--- a/day2-deck/decks/Internal Gross Profit - Review.pptx
+++ b/day2-deck/decks/Internal Gross Profit - Review.pptx
@@ -193,9 +193,9 @@
           </c:marker>
           <c:cat>
             <c:multiLvlStrRef>
-              <c:f>Sheet1!$A$2:$A$10</c:f>
+              <c:f>Sheet1!$A$2:$A$13</c:f>
               <c:multiLvlStrCache>
-                <c:ptCount val="9"/>
+                <c:ptCount val="12"/>
                 <c:lvl>
                   <c:pt idx="0">
                     <c:v>Jan</c:v>
@@ -224,16 +224,25 @@
                   <c:pt idx="8">
                     <c:v>Sep</c:v>
                   </c:pt>
+                  <c:pt idx="9">
+                    <c:v>Oct</c:v>
+                  </c:pt>
+                  <c:pt idx="10">
+                    <c:v>Nov</c:v>
+                  </c:pt>
+                  <c:pt idx="11">
+                    <c:v>Dec</c:v>
+                  </c:pt>
                 </c:lvl>
               </c:multiLvlStrCache>
             </c:multiLvlStrRef>
           </c:cat>
           <c:val>
             <c:numRef>
-              <c:f>Sheet1!$B$2:$B$10</c:f>
+              <c:f>Sheet1!$B$2:$B$13</c:f>
               <c:numCache>
                 <c:formatCode>General</c:formatCode>
-                <c:ptCount val="9"/>
+                <c:ptCount val="12"/>
                 <c:pt idx="0">
                   <c:v>77.5</c:v>
                 </c:pt>
@@ -260,6 +269,15 @@
                 </c:pt>
                 <c:pt idx="8">
                   <c:v>78.2</c:v>
+                </c:pt>
+                <c:pt idx="9">
+                  <c:v/>
+                </c:pt>
+                <c:pt idx="10">
+                  <c:v/>
+                </c:pt>
+                <c:pt idx="11">
+                  <c:v/>
                 </c:pt>
               </c:numCache>
             </c:numRef>
@@ -476,9 +494,9 @@
           </c:marker>
           <c:cat>
             <c:multiLvlStrRef>
-              <c:f>Sheet1!$A$2:$A$10</c:f>
+              <c:f>Sheet1!$A$2:$A$13</c:f>
               <c:multiLvlStrCache>
-                <c:ptCount val="9"/>
+                <c:ptCount val="12"/>
                 <c:lvl>
                   <c:pt idx="0">
                     <c:v>Jan</c:v>
@@ -507,16 +525,25 @@
                   <c:pt idx="8">
                     <c:v>Sep</c:v>
                   </c:pt>
+                  <c:pt idx="9">
+                    <c:v>Oct</c:v>
+                  </c:pt>
+                  <c:pt idx="10">
+                    <c:v>Nov</c:v>
+                  </c:pt>
+                  <c:pt idx="11">
+                    <c:v>Dec</c:v>
+                  </c:pt>
                 </c:lvl>
               </c:multiLvlStrCache>
             </c:multiLvlStrRef>
           </c:cat>
           <c:val>
             <c:numRef>
-              <c:f>Sheet1!$B$2:$B$10</c:f>
+              <c:f>Sheet1!$B$2:$B$13</c:f>
               <c:numCache>
                 <c:formatCode>General</c:formatCode>
-                <c:ptCount val="9"/>
+                <c:ptCount val="12"/>
                 <c:pt idx="0">
                   <c:v/>
                 </c:pt>
@@ -542,6 +569,15 @@
                   <c:v/>
                 </c:pt>
                 <c:pt idx="8">
+                  <c:v/>
+                </c:pt>
+                <c:pt idx="9">
+                  <c:v/>
+                </c:pt>
+                <c:pt idx="10">
+                  <c:v/>
+                </c:pt>
+                <c:pt idx="11">
                   <c:v/>
                 </c:pt>
               </c:numCache>
@@ -768,9 +804,9 @@
           </c:marker>
           <c:cat>
             <c:multiLvlStrRef>
-              <c:f>Sheet1!$A$2:$A$10</c:f>
+              <c:f>Sheet1!$A$2:$A$13</c:f>
               <c:multiLvlStrCache>
-                <c:ptCount val="9"/>
+                <c:ptCount val="12"/>
                 <c:lvl>
                   <c:pt idx="0">
                     <c:v>Jan</c:v>
@@ -799,16 +835,25 @@
                   <c:pt idx="8">
                     <c:v>Sep</c:v>
                   </c:pt>
+                  <c:pt idx="9">
+                    <c:v>Oct</c:v>
+                  </c:pt>
+                  <c:pt idx="10">
+                    <c:v>Nov</c:v>
+                  </c:pt>
+                  <c:pt idx="11">
+                    <c:v>Dec</c:v>
+                  </c:pt>
                 </c:lvl>
               </c:multiLvlStrCache>
             </c:multiLvlStrRef>
           </c:cat>
           <c:val>
             <c:numRef>
-              <c:f>Sheet1!$B$2:$B$10</c:f>
+              <c:f>Sheet1!$B$2:$B$13</c:f>
               <c:numCache>
                 <c:formatCode>General</c:formatCode>
-                <c:ptCount val="9"/>
+                <c:ptCount val="12"/>
                 <c:pt idx="0">
                   <c:v>35.1</c:v>
                 </c:pt>
@@ -835,6 +880,15 @@
                 </c:pt>
                 <c:pt idx="8">
                   <c:v>36.1</c:v>
+                </c:pt>
+                <c:pt idx="9">
+                  <c:v>35.4</c:v>
+                </c:pt>
+                <c:pt idx="10">
+                  <c:v>35.2</c:v>
+                </c:pt>
+                <c:pt idx="11">
+                  <c:v>35.4</c:v>
                 </c:pt>
               </c:numCache>
             </c:numRef>
@@ -1063,9 +1117,9 @@
           </c:marker>
           <c:cat>
             <c:multiLvlStrRef>
-              <c:f>Sheet1!$A$2:$A$10</c:f>
+              <c:f>Sheet1!$A$2:$A$13</c:f>
               <c:multiLvlStrCache>
-                <c:ptCount val="9"/>
+                <c:ptCount val="12"/>
                 <c:lvl>
                   <c:pt idx="0">
                     <c:v>Jan</c:v>
@@ -1094,16 +1148,25 @@
                   <c:pt idx="8">
                     <c:v>Sep</c:v>
                   </c:pt>
+                  <c:pt idx="9">
+                    <c:v>Oct</c:v>
+                  </c:pt>
+                  <c:pt idx="10">
+                    <c:v>Nov</c:v>
+                  </c:pt>
+                  <c:pt idx="11">
+                    <c:v>Dec</c:v>
+                  </c:pt>
                 </c:lvl>
               </c:multiLvlStrCache>
             </c:multiLvlStrRef>
           </c:cat>
           <c:val>
             <c:numRef>
-              <c:f>Sheet1!$B$2:$B$10</c:f>
+              <c:f>Sheet1!$B$2:$B$13</c:f>
               <c:numCache>
                 <c:formatCode>General</c:formatCode>
-                <c:ptCount val="9"/>
+                <c:ptCount val="12"/>
                 <c:pt idx="0">
                   <c:v>35.1</c:v>
                 </c:pt>
@@ -1130,6 +1193,15 @@
                 </c:pt>
                 <c:pt idx="8">
                   <c:v>36.1</c:v>
+                </c:pt>
+                <c:pt idx="9">
+                  <c:v>35.4</c:v>
+                </c:pt>
+                <c:pt idx="10">
+                  <c:v>35.2</c:v>
+                </c:pt>
+                <c:pt idx="11">
+                  <c:v>35.4</c:v>
                 </c:pt>
               </c:numCache>
             </c:numRef>
@@ -1367,9 +1439,9 @@
           </c:marker>
           <c:cat>
             <c:multiLvlStrRef>
-              <c:f>Sheet1!$A$2:$A$10</c:f>
+              <c:f>Sheet1!$A$2:$A$13</c:f>
               <c:multiLvlStrCache>
-                <c:ptCount val="9"/>
+                <c:ptCount val="12"/>
                 <c:lvl>
                   <c:pt idx="0">
                     <c:v>Jan</c:v>
@@ -1398,16 +1470,25 @@
                   <c:pt idx="8">
                     <c:v>Sep</c:v>
                   </c:pt>
+                  <c:pt idx="9">
+                    <c:v>Oct</c:v>
+                  </c:pt>
+                  <c:pt idx="10">
+                    <c:v>Nov</c:v>
+                  </c:pt>
+                  <c:pt idx="11">
+                    <c:v>Dec</c:v>
+                  </c:pt>
                 </c:lvl>
               </c:multiLvlStrCache>
             </c:multiLvlStrRef>
           </c:cat>
           <c:val>
             <c:numRef>
-              <c:f>Sheet1!$B$2:$B$10</c:f>
+              <c:f>Sheet1!$B$2:$B$13</c:f>
               <c:numCache>
                 <c:formatCode>General</c:formatCode>
-                <c:ptCount val="9"/>
+                <c:ptCount val="12"/>
                 <c:pt idx="0">
                   <c:v/>
                 </c:pt>
@@ -1434,6 +1515,15 @@
                 </c:pt>
                 <c:pt idx="8">
                   <c:v>78.2</c:v>
+                </c:pt>
+                <c:pt idx="9">
+                  <c:v/>
+                </c:pt>
+                <c:pt idx="10">
+                  <c:v/>
+                </c:pt>
+                <c:pt idx="11">
+                  <c:v/>
                 </c:pt>
               </c:numCache>
             </c:numRef>
@@ -1659,9 +1749,9 @@
           </c:marker>
           <c:cat>
             <c:multiLvlStrRef>
-              <c:f>Sheet1!$A$2:$A$10</c:f>
+              <c:f>Sheet1!$A$2:$A$13</c:f>
               <c:multiLvlStrCache>
-                <c:ptCount val="9"/>
+                <c:ptCount val="12"/>
                 <c:lvl>
                   <c:pt idx="0">
                     <c:v>Jan</c:v>
@@ -1690,16 +1780,25 @@
                   <c:pt idx="8">
                     <c:v>Sep</c:v>
                   </c:pt>
+                  <c:pt idx="9">
+                    <c:v>Oct</c:v>
+                  </c:pt>
+                  <c:pt idx="10">
+                    <c:v>Nov</c:v>
+                  </c:pt>
+                  <c:pt idx="11">
+                    <c:v>Dec</c:v>
+                  </c:pt>
                 </c:lvl>
               </c:multiLvlStrCache>
             </c:multiLvlStrRef>
           </c:cat>
           <c:val>
             <c:numRef>
-              <c:f>Sheet1!$B$2:$B$10</c:f>
+              <c:f>Sheet1!$B$2:$B$13</c:f>
               <c:numCache>
                 <c:formatCode>General</c:formatCode>
-                <c:ptCount val="9"/>
+                <c:ptCount val="12"/>
                 <c:pt idx="0">
                   <c:v>77.5</c:v>
                 </c:pt>
@@ -1725,6 +1824,15 @@
                   <c:v/>
                 </c:pt>
                 <c:pt idx="8">
+                  <c:v/>
+                </c:pt>
+                <c:pt idx="9">
+                  <c:v/>
+                </c:pt>
+                <c:pt idx="10">
+                  <c:v/>
+                </c:pt>
+                <c:pt idx="11">
                   <c:v/>
                 </c:pt>
               </c:numCache>
@@ -1951,9 +2059,9 @@
           </c:marker>
           <c:cat>
             <c:multiLvlStrRef>
-              <c:f>Sheet1!$A$2:$A$10</c:f>
+              <c:f>Sheet1!$A$2:$A$13</c:f>
               <c:multiLvlStrCache>
-                <c:ptCount val="9"/>
+                <c:ptCount val="12"/>
                 <c:lvl>
                   <c:pt idx="0">
                     <c:v>Jan</c:v>
@@ -1982,16 +2090,25 @@
                   <c:pt idx="8">
                     <c:v>Sep</c:v>
                   </c:pt>
+                  <c:pt idx="9">
+                    <c:v>Oct</c:v>
+                  </c:pt>
+                  <c:pt idx="10">
+                    <c:v>Nov</c:v>
+                  </c:pt>
+                  <c:pt idx="11">
+                    <c:v>Dec</c:v>
+                  </c:pt>
                 </c:lvl>
               </c:multiLvlStrCache>
             </c:multiLvlStrRef>
           </c:cat>
           <c:val>
             <c:numRef>
-              <c:f>Sheet1!$B$2:$B$10</c:f>
+              <c:f>Sheet1!$B$2:$B$13</c:f>
               <c:numCache>
                 <c:formatCode>General</c:formatCode>
-                <c:ptCount val="9"/>
+                <c:ptCount val="12"/>
                 <c:pt idx="0">
                   <c:v>77.6</c:v>
                 </c:pt>
@@ -2017,6 +2134,15 @@
                   <c:v/>
                 </c:pt>
                 <c:pt idx="8">
+                  <c:v/>
+                </c:pt>
+                <c:pt idx="9">
+                  <c:v/>
+                </c:pt>
+                <c:pt idx="10">
+                  <c:v/>
+                </c:pt>
+                <c:pt idx="11">
                   <c:v/>
                 </c:pt>
               </c:numCache>
@@ -2243,9 +2369,9 @@
           </c:marker>
           <c:cat>
             <c:multiLvlStrRef>
-              <c:f>Sheet1!$A$2:$A$10</c:f>
+              <c:f>Sheet1!$A$2:$A$13</c:f>
               <c:multiLvlStrCache>
-                <c:ptCount val="9"/>
+                <c:ptCount val="12"/>
                 <c:lvl>
                   <c:pt idx="0">
                     <c:v>Jan</c:v>
@@ -2274,16 +2400,25 @@
                   <c:pt idx="8">
                     <c:v>Sep</c:v>
                   </c:pt>
+                  <c:pt idx="9">
+                    <c:v>Oct</c:v>
+                  </c:pt>
+                  <c:pt idx="10">
+                    <c:v>Nov</c:v>
+                  </c:pt>
+                  <c:pt idx="11">
+                    <c:v>Dec</c:v>
+                  </c:pt>
                 </c:lvl>
               </c:multiLvlStrCache>
             </c:multiLvlStrRef>
           </c:cat>
           <c:val>
             <c:numRef>
-              <c:f>Sheet1!$B$2:$B$10</c:f>
+              <c:f>Sheet1!$B$2:$B$13</c:f>
               <c:numCache>
                 <c:formatCode>General</c:formatCode>
-                <c:ptCount val="9"/>
+                <c:ptCount val="12"/>
                 <c:pt idx="0">
                   <c:v/>
                 </c:pt>
@@ -2310,6 +2445,15 @@
                 </c:pt>
                 <c:pt idx="8">
                   <c:v>77.3</c:v>
+                </c:pt>
+                <c:pt idx="9">
+                  <c:v>77.9</c:v>
+                </c:pt>
+                <c:pt idx="10">
+                  <c:v>77.4</c:v>
+                </c:pt>
+                <c:pt idx="11">
+                  <c:v>78.4</c:v>
                 </c:pt>
               </c:numCache>
             </c:numRef>
@@ -2538,9 +2682,9 @@
           </c:marker>
           <c:cat>
             <c:multiLvlStrRef>
-              <c:f>Sheet1!$A$2:$A$10</c:f>
+              <c:f>Sheet1!$A$2:$A$13</c:f>
               <c:multiLvlStrCache>
-                <c:ptCount val="9"/>
+                <c:ptCount val="12"/>
                 <c:lvl>
                   <c:pt idx="0">
                     <c:v>Jan</c:v>
@@ -2569,16 +2713,25 @@
                   <c:pt idx="8">
                     <c:v>Sep</c:v>
                   </c:pt>
+                  <c:pt idx="9">
+                    <c:v>Oct</c:v>
+                  </c:pt>
+                  <c:pt idx="10">
+                    <c:v>Nov</c:v>
+                  </c:pt>
+                  <c:pt idx="11">
+                    <c:v>Dec</c:v>
+                  </c:pt>
                 </c:lvl>
               </c:multiLvlStrCache>
             </c:multiLvlStrRef>
           </c:cat>
           <c:val>
             <c:numRef>
-              <c:f>Sheet1!$B$2:$B$10</c:f>
+              <c:f>Sheet1!$B$2:$B$13</c:f>
               <c:numCache>
                 <c:formatCode>General</c:formatCode>
-                <c:ptCount val="9"/>
+                <c:ptCount val="12"/>
                 <c:pt idx="0">
                   <c:v>77.6</c:v>
                 </c:pt>
@@ -2605,6 +2758,15 @@
                 </c:pt>
                 <c:pt idx="8">
                   <c:v>77.3</c:v>
+                </c:pt>
+                <c:pt idx="9">
+                  <c:v>77.9</c:v>
+                </c:pt>
+                <c:pt idx="10">
+                  <c:v>77.4</c:v>
+                </c:pt>
+                <c:pt idx="11">
+                  <c:v>78.4</c:v>
                 </c:pt>
               </c:numCache>
             </c:numRef>
@@ -2845,9 +3007,9 @@
           </c:marker>
           <c:cat>
             <c:multiLvlStrRef>
-              <c:f>Sheet1!$A$2:$A$10</c:f>
+              <c:f>Sheet1!$A$2:$A$13</c:f>
               <c:multiLvlStrCache>
-                <c:ptCount val="9"/>
+                <c:ptCount val="12"/>
                 <c:lvl>
                   <c:pt idx="0">
                     <c:v>Jan</c:v>
@@ -2876,16 +3038,25 @@
                   <c:pt idx="8">
                     <c:v>Sep</c:v>
                   </c:pt>
+                  <c:pt idx="9">
+                    <c:v>Oct</c:v>
+                  </c:pt>
+                  <c:pt idx="10">
+                    <c:v>Nov</c:v>
+                  </c:pt>
+                  <c:pt idx="11">
+                    <c:v>Dec</c:v>
+                  </c:pt>
                 </c:lvl>
               </c:multiLvlStrCache>
             </c:multiLvlStrRef>
           </c:cat>
           <c:val>
             <c:numRef>
-              <c:f>Sheet1!$B$2:$B$10</c:f>
+              <c:f>Sheet1!$B$2:$B$13</c:f>
               <c:numCache>
                 <c:formatCode>General</c:formatCode>
-                <c:ptCount val="9"/>
+                <c:ptCount val="12"/>
                 <c:pt idx="0">
                   <c:v>35.9</c:v>
                 </c:pt>
@@ -2912,6 +3083,15 @@
                 </c:pt>
                 <c:pt idx="8">
                   <c:v>36.7</c:v>
+                </c:pt>
+                <c:pt idx="9">
+                  <c:v/>
+                </c:pt>
+                <c:pt idx="10">
+                  <c:v/>
+                </c:pt>
+                <c:pt idx="11">
+                  <c:v/>
                 </c:pt>
               </c:numCache>
             </c:numRef>
@@ -3128,9 +3308,9 @@
           </c:marker>
           <c:cat>
             <c:multiLvlStrRef>
-              <c:f>Sheet1!$A$2:$A$10</c:f>
+              <c:f>Sheet1!$A$2:$A$13</c:f>
               <c:multiLvlStrCache>
-                <c:ptCount val="9"/>
+                <c:ptCount val="12"/>
                 <c:lvl>
                   <c:pt idx="0">
                     <c:v>Jan</c:v>
@@ -3159,16 +3339,25 @@
                   <c:pt idx="8">
                     <c:v>Sep</c:v>
                   </c:pt>
+                  <c:pt idx="9">
+                    <c:v>Oct</c:v>
+                  </c:pt>
+                  <c:pt idx="10">
+                    <c:v>Nov</c:v>
+                  </c:pt>
+                  <c:pt idx="11">
+                    <c:v>Dec</c:v>
+                  </c:pt>
                 </c:lvl>
               </c:multiLvlStrCache>
             </c:multiLvlStrRef>
           </c:cat>
           <c:val>
             <c:numRef>
-              <c:f>Sheet1!$B$2:$B$10</c:f>
+              <c:f>Sheet1!$B$2:$B$13</c:f>
               <c:numCache>
                 <c:formatCode>General</c:formatCode>
-                <c:ptCount val="9"/>
+                <c:ptCount val="12"/>
                 <c:pt idx="0">
                   <c:v>35.9</c:v>
                 </c:pt>
@@ -3195,6 +3384,15 @@
                 </c:pt>
                 <c:pt idx="8">
                   <c:v>36.7</c:v>
+                </c:pt>
+                <c:pt idx="9">
+                  <c:v/>
+                </c:pt>
+                <c:pt idx="10">
+                  <c:v/>
+                </c:pt>
+                <c:pt idx="11">
+                  <c:v/>
                 </c:pt>
               </c:numCache>
             </c:numRef>
@@ -3420,9 +3618,9 @@
           </c:marker>
           <c:cat>
             <c:multiLvlStrRef>
-              <c:f>Sheet1!$A$2:$A$10</c:f>
+              <c:f>Sheet1!$A$2:$A$13</c:f>
               <c:multiLvlStrCache>
-                <c:ptCount val="9"/>
+                <c:ptCount val="12"/>
                 <c:lvl>
                   <c:pt idx="0">
                     <c:v>Jan</c:v>
@@ -3451,16 +3649,25 @@
                   <c:pt idx="8">
                     <c:v>Sep</c:v>
                   </c:pt>
+                  <c:pt idx="9">
+                    <c:v>Oct</c:v>
+                  </c:pt>
+                  <c:pt idx="10">
+                    <c:v>Nov</c:v>
+                  </c:pt>
+                  <c:pt idx="11">
+                    <c:v>Dec</c:v>
+                  </c:pt>
                 </c:lvl>
               </c:multiLvlStrCache>
             </c:multiLvlStrRef>
           </c:cat>
           <c:val>
             <c:numRef>
-              <c:f>Sheet1!$B$2:$B$10</c:f>
+              <c:f>Sheet1!$B$2:$B$13</c:f>
               <c:numCache>
                 <c:formatCode>General</c:formatCode>
-                <c:ptCount val="9"/>
+                <c:ptCount val="12"/>
                 <c:pt idx="0">
                   <c:v/>
                 </c:pt>
@@ -3486,6 +3693,15 @@
                   <c:v/>
                 </c:pt>
                 <c:pt idx="8">
+                  <c:v/>
+                </c:pt>
+                <c:pt idx="9">
+                  <c:v/>
+                </c:pt>
+                <c:pt idx="10">
+                  <c:v/>
+                </c:pt>
+                <c:pt idx="11">
                   <c:v/>
                 </c:pt>
               </c:numCache>
@@ -4029,7 +4245,7 @@
           <a:p>
             <a:r>
               <a:rPr lang="en-US" dirty="0"/>
-              <a:t>Source: Qlik - Closed Repair Orders. Internal pay type, Jan-Sep by close month. Same-store, INEOS excluded (opened 2026). GMC Prescott body shop labor types excluded. Internal labor gross / internal labor sale. A higher internal margin adds service gross but is a cost to used cars. YTD from YTD totals, not the mean of months. Store rows reconcile to the group on every input, both years.</a:t>
+              <a:t>Source: Qlik - Closed Repair Orders. Internal pay type, Jan-Sep by close month. Same-store, INEOS excluded (opened 2026). GMC Prescott body shop labor types excluded. Internal labor gross / internal labor sale. A higher internal margin adds service gross but is a cost to used cars. YTD from YTD totals, not the mean of months. Store rows reconcile to the group on every input, both years. 2025 shown January-December; October-December pulled Oct 22 on the same basis (chart only).</a:t>
             </a:r>
             <a:endParaRPr lang="en-US" dirty="0"/>
           </a:p>
@@ -4293,7 +4509,7 @@
           <a:p>
             <a:r>
               <a:rPr lang="en-US" dirty="0"/>
-              <a:t>Source: Qlik - Closed Repair Orders. Internal pay type, Jan-Sep by close month. Same-store, INEOS excluded (opened 2026). GMC Prescott body shop labor types excluded. Internal parts gross / internal parts sale on repair orders. A higher internal margin adds parts gross but is a cost to used cars. YTD from YTD totals, not the mean of months. Store rows reconcile to the group on every input, both years.</a:t>
+              <a:t>Source: Qlik - Closed Repair Orders. Internal pay type, Jan-Sep by close month. Same-store, INEOS excluded (opened 2026). GMC Prescott body shop labor types excluded. Internal parts gross / internal parts sale on repair orders. A higher internal margin adds parts gross but is a cost to used cars. YTD from YTD totals, not the mean of months. Store rows reconcile to the group on every input, both years. 2025 shown January-December; October-December pulled Oct 22 on the same basis (chart only).</a:t>
             </a:r>
             <a:endParaRPr lang="en-US" dirty="0"/>
           </a:p>

--- a/day2-deck/decks/Internal Gross Profit - Review.pptx
+++ b/day2-deck/decks/Internal Gross Profit - Review.pptx
@@ -5111,7 +5111,7 @@
                 <a:ea typeface="Inter" pitchFamily="34" charset="-122"/>
                 <a:cs typeface="Inter" pitchFamily="34" charset="-120"/>
               </a:rPr>
-              <a:t>WARRANTY &amp; INTERNAL</a:t>
+              <a:t>LABOR MIX</a:t>
             </a:r>
             <a:endParaRPr lang="en-US" sz="1400" dirty="0"/>
           </a:p>
@@ -5965,7 +5965,7 @@
                 <a:ea typeface="Inter" pitchFamily="34" charset="-122"/>
                 <a:cs typeface="Inter" pitchFamily="34" charset="-120"/>
               </a:rPr>
-              <a:t>WARRANTY &amp; INTERNAL</a:t>
+              <a:t>LABOR MIX</a:t>
             </a:r>
             <a:endParaRPr lang="en-US" sz="1400" dirty="0"/>
           </a:p>
@@ -10912,7 +10912,7 @@
                 <a:ea typeface="Inter" pitchFamily="34" charset="-122"/>
                 <a:cs typeface="Inter" pitchFamily="34" charset="-120"/>
               </a:rPr>
-              <a:t>WARRANTY &amp; INTERNAL</a:t>
+              <a:t>LABOR MIX</a:t>
             </a:r>
             <a:endParaRPr lang="en-US" sz="1400" dirty="0"/>
           </a:p>
@@ -15859,7 +15859,7 @@
                 <a:ea typeface="Inter" pitchFamily="34" charset="-122"/>
                 <a:cs typeface="Inter" pitchFamily="34" charset="-120"/>
               </a:rPr>
-              <a:t>WARRANTY &amp; INTERNAL</a:t>
+              <a:t>LABOR MIX</a:t>
             </a:r>
             <a:endParaRPr lang="en-US" sz="1400" dirty="0"/>
           </a:p>
@@ -16713,7 +16713,7 @@
                 <a:ea typeface="Inter" pitchFamily="34" charset="-122"/>
                 <a:cs typeface="Inter" pitchFamily="34" charset="-120"/>
               </a:rPr>
-              <a:t>WARRANTY &amp; INTERNAL</a:t>
+              <a:t>LABOR MIX</a:t>
             </a:r>
             <a:endParaRPr lang="en-US" sz="1400" dirty="0"/>
           </a:p>
@@ -21660,7 +21660,7 @@
                 <a:ea typeface="Inter" pitchFamily="34" charset="-122"/>
                 <a:cs typeface="Inter" pitchFamily="34" charset="-120"/>
               </a:rPr>
-              <a:t>WARRANTY &amp; INTERNAL</a:t>
+              <a:t>LABOR MIX</a:t>
             </a:r>
             <a:endParaRPr lang="en-US" sz="1400" dirty="0"/>
           </a:p>

--- a/day2-deck/decks/Internal Gross Profit - Review.pptx
+++ b/day2-deck/decks/Internal Gross Profit - Review.pptx
@@ -4511,7 +4511,7 @@
           <a:p>
             <a:r>
               <a:rPr lang="en-US" dirty="0"/>
-              <a:t>Source: Qlik - Closed Repair Orders. Internal pay type, Jan-Sep by close month. Same-store, INEOS excluded (opened 2026). GMC Prescott body shop labor types excluded. Internal labor gross / internal labor sale. A higher internal margin adds service gross but is a cost to used cars. Top and bottom five stores by change in Internal Labor Gross Profit %, Jan-Sep 2026 vs 2025.Conversation starter: each top store says one thing they started doing; each bottom store says what got in the way and what they would try. The room trades ideas.</a:t>
+              <a:t>Source: Qlik - Closed Repair Orders. Internal pay type, Jan-Sep by close month. Same-store, INEOS excluded (opened 2026). GMC Prescott body shop labor types excluded. Internal labor gross / internal labor sale. A higher internal margin adds service gross but is a cost to used cars. Top and bottom five stores by change in Internal Labor Gross Profit %, Jan-Sep 2026 vs 2025. Moving now: Jul-Sep 2026 vs Jan-Mar 2026, each store against itself; the group moved +0.5 pts on the same basis, so part of every store's change is seasonal.Conversation starter: each top store says one thing they started doing; each bottom store says what got in the way and what they would try. The room trades ideas. Moving now: ask the top three what they started this year.</a:t>
             </a:r>
             <a:endParaRPr lang="en-US" dirty="0"/>
           </a:p>
@@ -4863,7 +4863,7 @@
           <a:p>
             <a:r>
               <a:rPr lang="en-US" dirty="0"/>
-              <a:t>Source: Qlik - Closed Repair Orders. Internal pay type, Jan-Sep by close month. Same-store, INEOS excluded (opened 2026). GMC Prescott body shop labor types excluded. Internal parts gross / internal parts sale on repair orders. A higher internal margin adds parts gross but is a cost to used cars. Top and bottom five stores by change in Internal Parts Gross Profit %, Jan-Sep 2026 vs 2025.Conversation starter: each top store says one thing they started doing; each bottom store says what got in the way and what they would try. The room trades ideas.</a:t>
+              <a:t>Source: Qlik - Closed Repair Orders. Internal pay type, Jan-Sep by close month. Same-store, INEOS excluded (opened 2026). GMC Prescott body shop labor types excluded. Internal parts gross / internal parts sale on repair orders. A higher internal margin adds parts gross but is a cost to used cars. Top and bottom five stores by change in Internal Parts Gross Profit %, Jan-Sep 2026 vs 2025. Moving now: Jul-Sep 2026 vs Jan-Mar 2026, each store against itself; the group moved +0.5 pts on the same basis, so part of every store's change is seasonal.Conversation starter: each top store says one thing they started doing; each bottom store says what got in the way and what they would try. The room trades ideas. Moving now: ask the top three what they started this year.</a:t>
             </a:r>
             <a:endParaRPr lang="en-US" dirty="0"/>
           </a:p>
@@ -16104,53 +16104,14 @@
       </p:sp>
       <p:sp>
         <p:nvSpPr>
-          <p:cNvPr id="6" name="Text 4"/>
-          <p:cNvSpPr txBox="1"/>
-          <p:nvPr/>
-        </p:nvSpPr>
-        <p:spPr>
-          <a:xfrm>
-            <a:off x="713232" y="1298448"/>
-            <a:ext cx="10762488" cy="310896"/>
-          </a:xfrm>
-          <a:prstGeom prst="rect">
-            <a:avLst/>
-          </a:prstGeom>
-          <a:noFill/>
-          <a:ln/>
-        </p:spPr>
-        <p:txBody>
-          <a:bodyPr wrap="square" lIns="0" tIns="0" rIns="0" bIns="0" rtlCol="0" anchor="ctr"/>
-          <a:lstStyle/>
-          <a:p>
-            <a:pPr indent="0" marL="0">
-              <a:buNone/>
-            </a:pPr>
-            <a:r>
-              <a:rPr lang="en-US" sz="1400" dirty="0">
-                <a:solidFill>
-                  <a:srgbClr val="595959"/>
-                </a:solidFill>
-                <a:latin typeface="Inter" pitchFamily="34" charset="0"/>
-                <a:ea typeface="Inter" pitchFamily="34" charset="-122"/>
-                <a:cs typeface="Inter" pitchFamily="34" charset="-120"/>
-              </a:rPr>
-              <a:t>Jan–Sep 2026 against Jan–Sep 2025. Group 77.9% → 78.1% (+0.3 pts). Ranked by change.</a:t>
-            </a:r>
-            <a:endParaRPr lang="en-US" sz="1400" dirty="0"/>
-          </a:p>
-        </p:txBody>
-      </p:sp>
-      <p:sp>
-        <p:nvSpPr>
-          <p:cNvPr id="7" name="Shape 5"/>
+          <p:cNvPr id="6" name="Shape 4"/>
           <p:cNvSpPr/>
           <p:nvPr/>
         </p:nvSpPr>
         <p:spPr>
           <a:xfrm>
-            <a:off x="658368" y="1737360"/>
-            <a:ext cx="5321808" cy="45720"/>
+            <a:off x="658368" y="1371600"/>
+            <a:ext cx="3489960" cy="45720"/>
           </a:xfrm>
           <a:prstGeom prst="rect">
             <a:avLst/>
@@ -16163,14 +16124,53 @@
       </p:sp>
       <p:sp>
         <p:nvSpPr>
+          <p:cNvPr id="7" name="Text 5"/>
+          <p:cNvSpPr txBox="1"/>
+          <p:nvPr/>
+        </p:nvSpPr>
+        <p:spPr>
+          <a:xfrm>
+            <a:off x="749808" y="1444752"/>
+            <a:ext cx="3307080" cy="274320"/>
+          </a:xfrm>
+          <a:prstGeom prst="rect">
+            <a:avLst/>
+          </a:prstGeom>
+          <a:noFill/>
+          <a:ln/>
+        </p:spPr>
+        <p:txBody>
+          <a:bodyPr wrap="square" lIns="0" tIns="0" rIns="0" bIns="0" rtlCol="0" anchor="ctr"/>
+          <a:lstStyle/>
+          <a:p>
+            <a:pPr indent="0" marL="0">
+              <a:buNone/>
+            </a:pPr>
+            <a:r>
+              <a:rPr lang="en-US" sz="1500" b="1" spc="100" kern="0" dirty="0">
+                <a:solidFill>
+                  <a:srgbClr val="0B7A4A"/>
+                </a:solidFill>
+                <a:latin typeface="Inter" pitchFamily="34" charset="0"/>
+                <a:ea typeface="Inter" pitchFamily="34" charset="-122"/>
+                <a:cs typeface="Inter" pitchFamily="34" charset="-120"/>
+              </a:rPr>
+              <a:t>TOP 5 VS LAST YEAR</a:t>
+            </a:r>
+            <a:endParaRPr lang="en-US" sz="1500" dirty="0"/>
+          </a:p>
+        </p:txBody>
+      </p:sp>
+      <p:sp>
+        <p:nvSpPr>
           <p:cNvPr id="8" name="Text 6"/>
           <p:cNvSpPr txBox="1"/>
           <p:nvPr/>
         </p:nvSpPr>
         <p:spPr>
           <a:xfrm>
-            <a:off x="749808" y="1810512"/>
-            <a:ext cx="1828800" cy="274320"/>
+            <a:off x="749808" y="1737360"/>
+            <a:ext cx="3307080" cy="274320"/>
           </a:xfrm>
           <a:prstGeom prst="rect">
             <a:avLst/>
@@ -16186,46 +16186,7 @@
               <a:buNone/>
             </a:pPr>
             <a:r>
-              <a:rPr lang="en-US" sz="1400" b="1" spc="100" kern="0" dirty="0">
-                <a:solidFill>
-                  <a:srgbClr val="0B7A4A"/>
-                </a:solidFill>
-                <a:latin typeface="Inter" pitchFamily="34" charset="0"/>
-                <a:ea typeface="Inter" pitchFamily="34" charset="-122"/>
-                <a:cs typeface="Inter" pitchFamily="34" charset="-120"/>
-              </a:rPr>
-              <a:t>TOP 5</a:t>
-            </a:r>
-            <a:endParaRPr lang="en-US" sz="1400" dirty="0"/>
-          </a:p>
-        </p:txBody>
-      </p:sp>
-      <p:sp>
-        <p:nvSpPr>
-          <p:cNvPr id="9" name="Text 7"/>
-          <p:cNvSpPr txBox="1"/>
-          <p:nvPr/>
-        </p:nvSpPr>
-        <p:spPr>
-          <a:xfrm>
-            <a:off x="2898648" y="1810512"/>
-            <a:ext cx="1828800" cy="274320"/>
-          </a:xfrm>
-          <a:prstGeom prst="rect">
-            <a:avLst/>
-          </a:prstGeom>
-          <a:noFill/>
-          <a:ln/>
-        </p:spPr>
-        <p:txBody>
-          <a:bodyPr wrap="square" lIns="0" tIns="0" rIns="0" bIns="0" rtlCol="0" anchor="ctr"/>
-          <a:lstStyle/>
-          <a:p>
-            <a:pPr indent="0" marL="0">
-              <a:buNone/>
-            </a:pPr>
-            <a:r>
-              <a:rPr lang="en-US" sz="1400" b="1" dirty="0">
+              <a:rPr lang="en-US" sz="1200" dirty="0">
                 <a:solidFill>
                   <a:srgbClr val="595959"/>
                 </a:solidFill>
@@ -16233,61 +16194,22 @@
                 <a:ea typeface="Inter" pitchFamily="34" charset="-122"/>
                 <a:cs typeface="Inter" pitchFamily="34" charset="-120"/>
               </a:rPr>
-              <a:t>2025 → 2026</a:t>
-            </a:r>
-            <a:endParaRPr lang="en-US" sz="1400" dirty="0"/>
-          </a:p>
-        </p:txBody>
-      </p:sp>
-      <p:sp>
-        <p:nvSpPr>
-          <p:cNvPr id="10" name="Text 8"/>
-          <p:cNvSpPr txBox="1"/>
-          <p:nvPr/>
-        </p:nvSpPr>
-        <p:spPr>
-          <a:xfrm>
-            <a:off x="4864608" y="1810512"/>
-            <a:ext cx="1051560" cy="274320"/>
-          </a:xfrm>
-          <a:prstGeom prst="rect">
-            <a:avLst/>
-          </a:prstGeom>
-          <a:noFill/>
-          <a:ln/>
-        </p:spPr>
-        <p:txBody>
-          <a:bodyPr wrap="square" lIns="0" tIns="0" rIns="0" bIns="0" rtlCol="0" anchor="ctr"/>
-          <a:lstStyle/>
-          <a:p>
-            <a:pPr algn="r" indent="0" marL="0">
-              <a:buNone/>
-            </a:pPr>
-            <a:r>
-              <a:rPr lang="en-US" sz="1400" b="1" dirty="0">
-                <a:solidFill>
-                  <a:srgbClr val="595959"/>
-                </a:solidFill>
-                <a:latin typeface="Inter" pitchFamily="34" charset="0"/>
-                <a:ea typeface="Inter" pitchFamily="34" charset="-122"/>
-                <a:cs typeface="Inter" pitchFamily="34" charset="-120"/>
-              </a:rPr>
-              <a:t>Change</a:t>
-            </a:r>
-            <a:endParaRPr lang="en-US" sz="1400" dirty="0"/>
-          </a:p>
-        </p:txBody>
-      </p:sp>
-      <p:sp>
-        <p:nvSpPr>
-          <p:cNvPr id="11" name="Shape 9"/>
+              <a:t>Jan–Sep 2026 vs Jan–Sep 2025</a:t>
+            </a:r>
+            <a:endParaRPr lang="en-US" sz="1200" dirty="0"/>
+          </a:p>
+        </p:txBody>
+      </p:sp>
+      <p:sp>
+        <p:nvSpPr>
+          <p:cNvPr id="9" name="Shape 7"/>
           <p:cNvSpPr/>
           <p:nvPr/>
         </p:nvSpPr>
         <p:spPr>
           <a:xfrm>
-            <a:off x="658368" y="2121408"/>
-            <a:ext cx="5321808" cy="751637"/>
+            <a:off x="658368" y="2103120"/>
+            <a:ext cx="3489960" cy="755294"/>
           </a:xfrm>
           <a:prstGeom prst="rect">
             <a:avLst/>
@@ -16300,14 +16222,171 @@
       </p:sp>
       <p:sp>
         <p:nvSpPr>
+          <p:cNvPr id="10" name="Text 8"/>
+          <p:cNvSpPr txBox="1"/>
+          <p:nvPr/>
+        </p:nvSpPr>
+        <p:spPr>
+          <a:xfrm>
+            <a:off x="749808" y="2103120"/>
+            <a:ext cx="365760" cy="755294"/>
+          </a:xfrm>
+          <a:prstGeom prst="rect">
+            <a:avLst/>
+          </a:prstGeom>
+          <a:noFill/>
+          <a:ln/>
+        </p:spPr>
+        <p:txBody>
+          <a:bodyPr wrap="square" lIns="0" tIns="0" rIns="0" bIns="0" rtlCol="0" anchor="ctr"/>
+          <a:lstStyle/>
+          <a:p>
+            <a:pPr indent="0" marL="0">
+              <a:buNone/>
+            </a:pPr>
+            <a:r>
+              <a:rPr lang="en-US" sz="1500" b="1" dirty="0">
+                <a:solidFill>
+                  <a:srgbClr val="0B2C4A"/>
+                </a:solidFill>
+                <a:latin typeface="Inter" pitchFamily="34" charset="0"/>
+                <a:ea typeface="Inter" pitchFamily="34" charset="-122"/>
+                <a:cs typeface="Inter" pitchFamily="34" charset="-120"/>
+              </a:rPr>
+              <a:t>1</a:t>
+            </a:r>
+            <a:endParaRPr lang="en-US" sz="1500" dirty="0"/>
+          </a:p>
+        </p:txBody>
+      </p:sp>
+      <p:sp>
+        <p:nvSpPr>
+          <p:cNvPr id="11" name="Text 9"/>
+          <p:cNvSpPr txBox="1"/>
+          <p:nvPr/>
+        </p:nvSpPr>
+        <p:spPr>
+          <a:xfrm>
+            <a:off x="1097280" y="2103120"/>
+            <a:ext cx="1825752" cy="755294"/>
+          </a:xfrm>
+          <a:prstGeom prst="rect">
+            <a:avLst/>
+          </a:prstGeom>
+          <a:noFill/>
+          <a:ln/>
+        </p:spPr>
+        <p:txBody>
+          <a:bodyPr wrap="square" lIns="0" tIns="0" rIns="0" bIns="0" rtlCol="0" anchor="ctr"/>
+          <a:lstStyle/>
+          <a:p>
+            <a:pPr indent="0" marL="0">
+              <a:spcAft>
+                <a:spcPts val="200"/>
+              </a:spcAft>
+              <a:buNone/>
+            </a:pPr>
+            <a:r>
+              <a:rPr lang="en-US" sz="1400" b="1" dirty="0">
+                <a:solidFill>
+                  <a:srgbClr val="1A1A1A"/>
+                </a:solidFill>
+                <a:latin typeface="Inter" pitchFamily="34" charset="0"/>
+                <a:ea typeface="Inter" pitchFamily="34" charset="-122"/>
+                <a:cs typeface="Inter" pitchFamily="34" charset="-120"/>
+              </a:rPr>
+              <a:t>Acura</a:t>
+            </a:r>
+            <a:endParaRPr lang="en-US" sz="1400" dirty="0"/>
+          </a:p>
+          <a:p>
+            <a:pPr indent="0" marL="0">
+              <a:spcAft>
+                <a:spcPts val="200"/>
+              </a:spcAft>
+              <a:buNone/>
+            </a:pPr>
+            <a:r>
+              <a:rPr lang="en-US" sz="1200" dirty="0">
+                <a:solidFill>
+                  <a:srgbClr val="595959"/>
+                </a:solidFill>
+                <a:latin typeface="Inter" pitchFamily="34" charset="0"/>
+                <a:ea typeface="Inter" pitchFamily="34" charset="-122"/>
+                <a:cs typeface="Inter" pitchFamily="34" charset="-120"/>
+              </a:rPr>
+              <a:t>71.6%  →  </a:t>
+            </a:r>
+            <a:pPr indent="0" marL="0">
+              <a:spcAft>
+                <a:spcPts val="200"/>
+              </a:spcAft>
+              <a:buNone/>
+            </a:pPr>
+            <a:r>
+              <a:rPr lang="en-US" sz="1200" b="1" dirty="0">
+                <a:solidFill>
+                  <a:srgbClr val="0B7A4A"/>
+                </a:solidFill>
+                <a:latin typeface="Inter" pitchFamily="34" charset="0"/>
+                <a:ea typeface="Inter" pitchFamily="34" charset="-122"/>
+                <a:cs typeface="Inter" pitchFamily="34" charset="-120"/>
+              </a:rPr>
+              <a:t>77.2%</a:t>
+            </a:r>
+            <a:endParaRPr lang="en-US" sz="1400" dirty="0"/>
+          </a:p>
+        </p:txBody>
+      </p:sp>
+      <p:sp>
+        <p:nvSpPr>
           <p:cNvPr id="12" name="Text 10"/>
           <p:cNvSpPr txBox="1"/>
           <p:nvPr/>
         </p:nvSpPr>
         <p:spPr>
           <a:xfrm>
-            <a:off x="749808" y="2121408"/>
-            <a:ext cx="320040" cy="751637"/>
+            <a:off x="2941320" y="2103120"/>
+            <a:ext cx="1115568" cy="755294"/>
+          </a:xfrm>
+          <a:prstGeom prst="rect">
+            <a:avLst/>
+          </a:prstGeom>
+          <a:noFill/>
+          <a:ln/>
+        </p:spPr>
+        <p:txBody>
+          <a:bodyPr wrap="square" lIns="0" tIns="0" rIns="0" bIns="0" rtlCol="0" anchor="ctr"/>
+          <a:lstStyle/>
+          <a:p>
+            <a:pPr algn="r" indent="0" marL="0">
+              <a:buNone/>
+            </a:pPr>
+            <a:r>
+              <a:rPr lang="en-US" sz="1600" b="1" dirty="0">
+                <a:solidFill>
+                  <a:srgbClr val="0B7A4A"/>
+                </a:solidFill>
+                <a:latin typeface="Inter" pitchFamily="34" charset="0"/>
+                <a:ea typeface="Inter" pitchFamily="34" charset="-122"/>
+                <a:cs typeface="Inter" pitchFamily="34" charset="-120"/>
+              </a:rPr>
+              <a:t>+5.6 pts</a:t>
+            </a:r>
+            <a:endParaRPr lang="en-US" sz="1600" dirty="0"/>
+          </a:p>
+        </p:txBody>
+      </p:sp>
+      <p:sp>
+        <p:nvSpPr>
+          <p:cNvPr id="13" name="Text 11"/>
+          <p:cNvSpPr txBox="1"/>
+          <p:nvPr/>
+        </p:nvSpPr>
+        <p:spPr>
+          <a:xfrm>
+            <a:off x="749808" y="2858414"/>
+            <a:ext cx="365760" cy="755294"/>
           </a:xfrm>
           <a:prstGeom prst="rect">
             <a:avLst/>
@@ -16331,7 +16410,7 @@
                 <a:ea typeface="Inter" pitchFamily="34" charset="-122"/>
                 <a:cs typeface="Inter" pitchFamily="34" charset="-120"/>
               </a:rPr>
-              <a:t>1</a:t>
+              <a:t>2</a:t>
             </a:r>
             <a:endParaRPr lang="en-US" sz="1500" dirty="0"/>
           </a:p>
@@ -16339,14 +16418,14 @@
       </p:sp>
       <p:sp>
         <p:nvSpPr>
-          <p:cNvPr id="13" name="Text 11"/>
-          <p:cNvSpPr txBox="1"/>
-          <p:nvPr/>
-        </p:nvSpPr>
-        <p:spPr>
-          <a:xfrm>
-            <a:off x="1115568" y="2121408"/>
-            <a:ext cx="1737360" cy="751637"/>
+          <p:cNvPr id="14" name="Text 12"/>
+          <p:cNvSpPr txBox="1"/>
+          <p:nvPr/>
+        </p:nvSpPr>
+        <p:spPr>
+          <a:xfrm>
+            <a:off x="1097280" y="2858414"/>
+            <a:ext cx="1825752" cy="755294"/>
           </a:xfrm>
           <a:prstGeom prst="rect">
             <a:avLst/>
@@ -16359,6 +16438,9 @@
           <a:lstStyle/>
           <a:p>
             <a:pPr indent="0" marL="0">
+              <a:spcAft>
+                <a:spcPts val="200"/>
+              </a:spcAft>
               <a:buNone/>
             </a:pPr>
             <a:r>
@@ -16370,38 +16452,19 @@
                 <a:ea typeface="Inter" pitchFamily="34" charset="-122"/>
                 <a:cs typeface="Inter" pitchFamily="34" charset="-120"/>
               </a:rPr>
-              <a:t>Acura</a:t>
+              <a:t>Honda Spokane</a:t>
             </a:r>
             <a:endParaRPr lang="en-US" sz="1400" dirty="0"/>
           </a:p>
-        </p:txBody>
-      </p:sp>
-      <p:sp>
-        <p:nvSpPr>
-          <p:cNvPr id="14" name="Text 12"/>
-          <p:cNvSpPr txBox="1"/>
-          <p:nvPr/>
-        </p:nvSpPr>
-        <p:spPr>
-          <a:xfrm>
-            <a:off x="2898648" y="2121408"/>
-            <a:ext cx="1920240" cy="751637"/>
-          </a:xfrm>
-          <a:prstGeom prst="rect">
-            <a:avLst/>
-          </a:prstGeom>
-          <a:noFill/>
-          <a:ln/>
-        </p:spPr>
-        <p:txBody>
-          <a:bodyPr wrap="square" lIns="0" tIns="0" rIns="0" bIns="0" rtlCol="0" anchor="ctr"/>
-          <a:lstStyle/>
           <a:p>
             <a:pPr indent="0" marL="0">
-              <a:buNone/>
-            </a:pPr>
-            <a:r>
-              <a:rPr lang="en-US" sz="1400" dirty="0">
+              <a:spcAft>
+                <a:spcPts val="200"/>
+              </a:spcAft>
+              <a:buNone/>
+            </a:pPr>
+            <a:r>
+              <a:rPr lang="en-US" sz="1200" dirty="0">
                 <a:solidFill>
                   <a:srgbClr val="595959"/>
                 </a:solidFill>
@@ -16409,13 +16472,16 @@
                 <a:ea typeface="Inter" pitchFamily="34" charset="-122"/>
                 <a:cs typeface="Inter" pitchFamily="34" charset="-120"/>
               </a:rPr>
-              <a:t>71.6%  </a:t>
+              <a:t>76.1%  →  </a:t>
             </a:r>
             <a:pPr indent="0" marL="0">
-              <a:buNone/>
-            </a:pPr>
-            <a:r>
-              <a:rPr lang="en-US" sz="1400" b="1" dirty="0">
+              <a:spcAft>
+                <a:spcPts val="200"/>
+              </a:spcAft>
+              <a:buNone/>
+            </a:pPr>
+            <a:r>
+              <a:rPr lang="en-US" sz="1200" b="1" dirty="0">
                 <a:solidFill>
                   <a:srgbClr val="0B7A4A"/>
                 </a:solidFill>
@@ -16423,13 +16489,38 @@
                 <a:ea typeface="Inter" pitchFamily="34" charset="-122"/>
                 <a:cs typeface="Inter" pitchFamily="34" charset="-120"/>
               </a:rPr>
-              <a:t>→  </a:t>
-            </a:r>
-            <a:pPr indent="0" marL="0">
-              <a:buNone/>
-            </a:pPr>
-            <a:r>
-              <a:rPr lang="en-US" sz="1400" b="1" dirty="0">
+              <a:t>79.8%</a:t>
+            </a:r>
+            <a:endParaRPr lang="en-US" sz="1400" dirty="0"/>
+          </a:p>
+        </p:txBody>
+      </p:sp>
+      <p:sp>
+        <p:nvSpPr>
+          <p:cNvPr id="15" name="Text 13"/>
+          <p:cNvSpPr txBox="1"/>
+          <p:nvPr/>
+        </p:nvSpPr>
+        <p:spPr>
+          <a:xfrm>
+            <a:off x="2941320" y="2858414"/>
+            <a:ext cx="1115568" cy="755294"/>
+          </a:xfrm>
+          <a:prstGeom prst="rect">
+            <a:avLst/>
+          </a:prstGeom>
+          <a:noFill/>
+          <a:ln/>
+        </p:spPr>
+        <p:txBody>
+          <a:bodyPr wrap="square" lIns="0" tIns="0" rIns="0" bIns="0" rtlCol="0" anchor="ctr"/>
+          <a:lstStyle/>
+          <a:p>
+            <a:pPr algn="r" indent="0" marL="0">
+              <a:buNone/>
+            </a:pPr>
+            <a:r>
+              <a:rPr lang="en-US" sz="1600" b="1" dirty="0">
                 <a:solidFill>
                   <a:srgbClr val="0B7A4A"/>
                 </a:solidFill>
@@ -16437,46 +16528,7 @@
                 <a:ea typeface="Inter" pitchFamily="34" charset="-122"/>
                 <a:cs typeface="Inter" pitchFamily="34" charset="-120"/>
               </a:rPr>
-              <a:t>77.2%</a:t>
-            </a:r>
-            <a:endParaRPr lang="en-US" sz="1400" dirty="0"/>
-          </a:p>
-        </p:txBody>
-      </p:sp>
-      <p:sp>
-        <p:nvSpPr>
-          <p:cNvPr id="15" name="Text 13"/>
-          <p:cNvSpPr txBox="1"/>
-          <p:nvPr/>
-        </p:nvSpPr>
-        <p:spPr>
-          <a:xfrm>
-            <a:off x="4864608" y="2121408"/>
-            <a:ext cx="1051560" cy="751637"/>
-          </a:xfrm>
-          <a:prstGeom prst="rect">
-            <a:avLst/>
-          </a:prstGeom>
-          <a:noFill/>
-          <a:ln/>
-        </p:spPr>
-        <p:txBody>
-          <a:bodyPr wrap="square" lIns="0" tIns="0" rIns="0" bIns="0" rtlCol="0" anchor="ctr"/>
-          <a:lstStyle/>
-          <a:p>
-            <a:pPr algn="r" indent="0" marL="0">
-              <a:buNone/>
-            </a:pPr>
-            <a:r>
-              <a:rPr lang="en-US" sz="1600" b="1" dirty="0">
-                <a:solidFill>
-                  <a:srgbClr val="0B7A4A"/>
-                </a:solidFill>
-                <a:latin typeface="Inter" pitchFamily="34" charset="0"/>
-                <a:ea typeface="Inter" pitchFamily="34" charset="-122"/>
-                <a:cs typeface="Inter" pitchFamily="34" charset="-120"/>
-              </a:rPr>
-              <a:t>+5.6 pts</a:t>
+              <a:t>+3.7 pts</a:t>
             </a:r>
             <a:endParaRPr lang="en-US" sz="1600" dirty="0"/>
           </a:p>
@@ -16484,198 +16536,14 @@
       </p:sp>
       <p:sp>
         <p:nvSpPr>
-          <p:cNvPr id="16" name="Text 14"/>
-          <p:cNvSpPr txBox="1"/>
-          <p:nvPr/>
-        </p:nvSpPr>
-        <p:spPr>
-          <a:xfrm>
-            <a:off x="749808" y="2873045"/>
-            <a:ext cx="320040" cy="751637"/>
-          </a:xfrm>
-          <a:prstGeom prst="rect">
-            <a:avLst/>
-          </a:prstGeom>
-          <a:noFill/>
-          <a:ln/>
-        </p:spPr>
-        <p:txBody>
-          <a:bodyPr wrap="square" lIns="0" tIns="0" rIns="0" bIns="0" rtlCol="0" anchor="ctr"/>
-          <a:lstStyle/>
-          <a:p>
-            <a:pPr indent="0" marL="0">
-              <a:buNone/>
-            </a:pPr>
-            <a:r>
-              <a:rPr lang="en-US" sz="1500" b="1" dirty="0">
-                <a:solidFill>
-                  <a:srgbClr val="0B2C4A"/>
-                </a:solidFill>
-                <a:latin typeface="Inter" pitchFamily="34" charset="0"/>
-                <a:ea typeface="Inter" pitchFamily="34" charset="-122"/>
-                <a:cs typeface="Inter" pitchFamily="34" charset="-120"/>
-              </a:rPr>
-              <a:t>2</a:t>
-            </a:r>
-            <a:endParaRPr lang="en-US" sz="1500" dirty="0"/>
-          </a:p>
-        </p:txBody>
-      </p:sp>
-      <p:sp>
-        <p:nvSpPr>
-          <p:cNvPr id="17" name="Text 15"/>
-          <p:cNvSpPr txBox="1"/>
-          <p:nvPr/>
-        </p:nvSpPr>
-        <p:spPr>
-          <a:xfrm>
-            <a:off x="1115568" y="2873045"/>
-            <a:ext cx="1737360" cy="751637"/>
-          </a:xfrm>
-          <a:prstGeom prst="rect">
-            <a:avLst/>
-          </a:prstGeom>
-          <a:noFill/>
-          <a:ln/>
-        </p:spPr>
-        <p:txBody>
-          <a:bodyPr wrap="square" lIns="0" tIns="0" rIns="0" bIns="0" rtlCol="0" anchor="ctr"/>
-          <a:lstStyle/>
-          <a:p>
-            <a:pPr indent="0" marL="0">
-              <a:buNone/>
-            </a:pPr>
-            <a:r>
-              <a:rPr lang="en-US" sz="1400" b="1" dirty="0">
-                <a:solidFill>
-                  <a:srgbClr val="1A1A1A"/>
-                </a:solidFill>
-                <a:latin typeface="Inter" pitchFamily="34" charset="0"/>
-                <a:ea typeface="Inter" pitchFamily="34" charset="-122"/>
-                <a:cs typeface="Inter" pitchFamily="34" charset="-120"/>
-              </a:rPr>
-              <a:t>Honda Spokane</a:t>
-            </a:r>
-            <a:endParaRPr lang="en-US" sz="1400" dirty="0"/>
-          </a:p>
-        </p:txBody>
-      </p:sp>
-      <p:sp>
-        <p:nvSpPr>
-          <p:cNvPr id="18" name="Text 16"/>
-          <p:cNvSpPr txBox="1"/>
-          <p:nvPr/>
-        </p:nvSpPr>
-        <p:spPr>
-          <a:xfrm>
-            <a:off x="2898648" y="2873045"/>
-            <a:ext cx="1920240" cy="751637"/>
-          </a:xfrm>
-          <a:prstGeom prst="rect">
-            <a:avLst/>
-          </a:prstGeom>
-          <a:noFill/>
-          <a:ln/>
-        </p:spPr>
-        <p:txBody>
-          <a:bodyPr wrap="square" lIns="0" tIns="0" rIns="0" bIns="0" rtlCol="0" anchor="ctr"/>
-          <a:lstStyle/>
-          <a:p>
-            <a:pPr indent="0" marL="0">
-              <a:buNone/>
-            </a:pPr>
-            <a:r>
-              <a:rPr lang="en-US" sz="1400" dirty="0">
-                <a:solidFill>
-                  <a:srgbClr val="595959"/>
-                </a:solidFill>
-                <a:latin typeface="Inter" pitchFamily="34" charset="0"/>
-                <a:ea typeface="Inter" pitchFamily="34" charset="-122"/>
-                <a:cs typeface="Inter" pitchFamily="34" charset="-120"/>
-              </a:rPr>
-              <a:t>76.1%  </a:t>
-            </a:r>
-            <a:pPr indent="0" marL="0">
-              <a:buNone/>
-            </a:pPr>
-            <a:r>
-              <a:rPr lang="en-US" sz="1400" b="1" dirty="0">
-                <a:solidFill>
-                  <a:srgbClr val="0B7A4A"/>
-                </a:solidFill>
-                <a:latin typeface="Inter" pitchFamily="34" charset="0"/>
-                <a:ea typeface="Inter" pitchFamily="34" charset="-122"/>
-                <a:cs typeface="Inter" pitchFamily="34" charset="-120"/>
-              </a:rPr>
-              <a:t>→  </a:t>
-            </a:r>
-            <a:pPr indent="0" marL="0">
-              <a:buNone/>
-            </a:pPr>
-            <a:r>
-              <a:rPr lang="en-US" sz="1400" b="1" dirty="0">
-                <a:solidFill>
-                  <a:srgbClr val="0B7A4A"/>
-                </a:solidFill>
-                <a:latin typeface="Inter" pitchFamily="34" charset="0"/>
-                <a:ea typeface="Inter" pitchFamily="34" charset="-122"/>
-                <a:cs typeface="Inter" pitchFamily="34" charset="-120"/>
-              </a:rPr>
-              <a:t>79.8%</a:t>
-            </a:r>
-            <a:endParaRPr lang="en-US" sz="1400" dirty="0"/>
-          </a:p>
-        </p:txBody>
-      </p:sp>
-      <p:sp>
-        <p:nvSpPr>
-          <p:cNvPr id="19" name="Text 17"/>
-          <p:cNvSpPr txBox="1"/>
-          <p:nvPr/>
-        </p:nvSpPr>
-        <p:spPr>
-          <a:xfrm>
-            <a:off x="4864608" y="2873045"/>
-            <a:ext cx="1051560" cy="751637"/>
-          </a:xfrm>
-          <a:prstGeom prst="rect">
-            <a:avLst/>
-          </a:prstGeom>
-          <a:noFill/>
-          <a:ln/>
-        </p:spPr>
-        <p:txBody>
-          <a:bodyPr wrap="square" lIns="0" tIns="0" rIns="0" bIns="0" rtlCol="0" anchor="ctr"/>
-          <a:lstStyle/>
-          <a:p>
-            <a:pPr algn="r" indent="0" marL="0">
-              <a:buNone/>
-            </a:pPr>
-            <a:r>
-              <a:rPr lang="en-US" sz="1600" b="1" dirty="0">
-                <a:solidFill>
-                  <a:srgbClr val="0B7A4A"/>
-                </a:solidFill>
-                <a:latin typeface="Inter" pitchFamily="34" charset="0"/>
-                <a:ea typeface="Inter" pitchFamily="34" charset="-122"/>
-                <a:cs typeface="Inter" pitchFamily="34" charset="-120"/>
-              </a:rPr>
-              <a:t>+3.7 pts</a:t>
-            </a:r>
-            <a:endParaRPr lang="en-US" sz="1600" dirty="0"/>
-          </a:p>
-        </p:txBody>
-      </p:sp>
-      <p:sp>
-        <p:nvSpPr>
-          <p:cNvPr id="20" name="Shape 18"/>
+          <p:cNvPr id="16" name="Shape 14"/>
           <p:cNvSpPr/>
           <p:nvPr/>
         </p:nvSpPr>
         <p:spPr>
           <a:xfrm>
-            <a:off x="658368" y="3624682"/>
-            <a:ext cx="5321808" cy="751637"/>
+            <a:off x="658368" y="3613709"/>
+            <a:ext cx="3489960" cy="755294"/>
           </a:xfrm>
           <a:prstGeom prst="rect">
             <a:avLst/>
@@ -16688,14 +16556,210 @@
       </p:sp>
       <p:sp>
         <p:nvSpPr>
+          <p:cNvPr id="17" name="Text 15"/>
+          <p:cNvSpPr txBox="1"/>
+          <p:nvPr/>
+        </p:nvSpPr>
+        <p:spPr>
+          <a:xfrm>
+            <a:off x="749808" y="3613709"/>
+            <a:ext cx="365760" cy="755294"/>
+          </a:xfrm>
+          <a:prstGeom prst="rect">
+            <a:avLst/>
+          </a:prstGeom>
+          <a:noFill/>
+          <a:ln/>
+        </p:spPr>
+        <p:txBody>
+          <a:bodyPr wrap="square" lIns="0" tIns="0" rIns="0" bIns="0" rtlCol="0" anchor="ctr"/>
+          <a:lstStyle/>
+          <a:p>
+            <a:pPr indent="0" marL="0">
+              <a:buNone/>
+            </a:pPr>
+            <a:r>
+              <a:rPr lang="en-US" sz="1500" b="1" dirty="0">
+                <a:solidFill>
+                  <a:srgbClr val="0B2C4A"/>
+                </a:solidFill>
+                <a:latin typeface="Inter" pitchFamily="34" charset="0"/>
+                <a:ea typeface="Inter" pitchFamily="34" charset="-122"/>
+                <a:cs typeface="Inter" pitchFamily="34" charset="-120"/>
+              </a:rPr>
+              <a:t>3</a:t>
+            </a:r>
+            <a:endParaRPr lang="en-US" sz="1500" dirty="0"/>
+          </a:p>
+        </p:txBody>
+      </p:sp>
+      <p:sp>
+        <p:nvSpPr>
+          <p:cNvPr id="18" name="Text 16"/>
+          <p:cNvSpPr txBox="1"/>
+          <p:nvPr/>
+        </p:nvSpPr>
+        <p:spPr>
+          <a:xfrm>
+            <a:off x="1097280" y="3613709"/>
+            <a:ext cx="1825752" cy="755294"/>
+          </a:xfrm>
+          <a:prstGeom prst="rect">
+            <a:avLst/>
+          </a:prstGeom>
+          <a:noFill/>
+          <a:ln/>
+        </p:spPr>
+        <p:txBody>
+          <a:bodyPr wrap="square" lIns="0" tIns="0" rIns="0" bIns="0" rtlCol="0" anchor="ctr"/>
+          <a:lstStyle/>
+          <a:p>
+            <a:pPr indent="0" marL="0">
+              <a:spcAft>
+                <a:spcPts val="200"/>
+              </a:spcAft>
+              <a:buNone/>
+            </a:pPr>
+            <a:r>
+              <a:rPr lang="en-US" sz="1400" b="1" dirty="0">
+                <a:solidFill>
+                  <a:srgbClr val="1A1A1A"/>
+                </a:solidFill>
+                <a:latin typeface="Inter" pitchFamily="34" charset="0"/>
+                <a:ea typeface="Inter" pitchFamily="34" charset="-122"/>
+                <a:cs typeface="Inter" pitchFamily="34" charset="-120"/>
+              </a:rPr>
+              <a:t>LR Reno</a:t>
+            </a:r>
+            <a:endParaRPr lang="en-US" sz="1400" dirty="0"/>
+          </a:p>
+          <a:p>
+            <a:pPr indent="0" marL="0">
+              <a:spcAft>
+                <a:spcPts val="200"/>
+              </a:spcAft>
+              <a:buNone/>
+            </a:pPr>
+            <a:r>
+              <a:rPr lang="en-US" sz="1200" dirty="0">
+                <a:solidFill>
+                  <a:srgbClr val="595959"/>
+                </a:solidFill>
+                <a:latin typeface="Inter" pitchFamily="34" charset="0"/>
+                <a:ea typeface="Inter" pitchFamily="34" charset="-122"/>
+                <a:cs typeface="Inter" pitchFamily="34" charset="-120"/>
+              </a:rPr>
+              <a:t>78.8%  →  </a:t>
+            </a:r>
+            <a:pPr indent="0" marL="0">
+              <a:spcAft>
+                <a:spcPts val="200"/>
+              </a:spcAft>
+              <a:buNone/>
+            </a:pPr>
+            <a:r>
+              <a:rPr lang="en-US" sz="1200" b="1" dirty="0">
+                <a:solidFill>
+                  <a:srgbClr val="0B7A4A"/>
+                </a:solidFill>
+                <a:latin typeface="Inter" pitchFamily="34" charset="0"/>
+                <a:ea typeface="Inter" pitchFamily="34" charset="-122"/>
+                <a:cs typeface="Inter" pitchFamily="34" charset="-120"/>
+              </a:rPr>
+              <a:t>82.3%</a:t>
+            </a:r>
+            <a:endParaRPr lang="en-US" sz="1400" dirty="0"/>
+          </a:p>
+        </p:txBody>
+      </p:sp>
+      <p:sp>
+        <p:nvSpPr>
+          <p:cNvPr id="19" name="Text 17"/>
+          <p:cNvSpPr txBox="1"/>
+          <p:nvPr/>
+        </p:nvSpPr>
+        <p:spPr>
+          <a:xfrm>
+            <a:off x="2941320" y="3613709"/>
+            <a:ext cx="1115568" cy="755294"/>
+          </a:xfrm>
+          <a:prstGeom prst="rect">
+            <a:avLst/>
+          </a:prstGeom>
+          <a:noFill/>
+          <a:ln/>
+        </p:spPr>
+        <p:txBody>
+          <a:bodyPr wrap="square" lIns="0" tIns="0" rIns="0" bIns="0" rtlCol="0" anchor="ctr"/>
+          <a:lstStyle/>
+          <a:p>
+            <a:pPr algn="r" indent="0" marL="0">
+              <a:buNone/>
+            </a:pPr>
+            <a:r>
+              <a:rPr lang="en-US" sz="1600" b="1" dirty="0">
+                <a:solidFill>
+                  <a:srgbClr val="0B7A4A"/>
+                </a:solidFill>
+                <a:latin typeface="Inter" pitchFamily="34" charset="0"/>
+                <a:ea typeface="Inter" pitchFamily="34" charset="-122"/>
+                <a:cs typeface="Inter" pitchFamily="34" charset="-120"/>
+              </a:rPr>
+              <a:t>+3.4 pts</a:t>
+            </a:r>
+            <a:endParaRPr lang="en-US" sz="1600" dirty="0"/>
+          </a:p>
+        </p:txBody>
+      </p:sp>
+      <p:sp>
+        <p:nvSpPr>
+          <p:cNvPr id="20" name="Text 18"/>
+          <p:cNvSpPr txBox="1"/>
+          <p:nvPr/>
+        </p:nvSpPr>
+        <p:spPr>
+          <a:xfrm>
+            <a:off x="749808" y="4369003"/>
+            <a:ext cx="365760" cy="755294"/>
+          </a:xfrm>
+          <a:prstGeom prst="rect">
+            <a:avLst/>
+          </a:prstGeom>
+          <a:noFill/>
+          <a:ln/>
+        </p:spPr>
+        <p:txBody>
+          <a:bodyPr wrap="square" lIns="0" tIns="0" rIns="0" bIns="0" rtlCol="0" anchor="ctr"/>
+          <a:lstStyle/>
+          <a:p>
+            <a:pPr indent="0" marL="0">
+              <a:buNone/>
+            </a:pPr>
+            <a:r>
+              <a:rPr lang="en-US" sz="1500" b="1" dirty="0">
+                <a:solidFill>
+                  <a:srgbClr val="0B2C4A"/>
+                </a:solidFill>
+                <a:latin typeface="Inter" pitchFamily="34" charset="0"/>
+                <a:ea typeface="Inter" pitchFamily="34" charset="-122"/>
+                <a:cs typeface="Inter" pitchFamily="34" charset="-120"/>
+              </a:rPr>
+              <a:t>4</a:t>
+            </a:r>
+            <a:endParaRPr lang="en-US" sz="1500" dirty="0"/>
+          </a:p>
+        </p:txBody>
+      </p:sp>
+      <p:sp>
+        <p:nvSpPr>
           <p:cNvPr id="21" name="Text 19"/>
           <p:cNvSpPr txBox="1"/>
           <p:nvPr/>
         </p:nvSpPr>
         <p:spPr>
           <a:xfrm>
-            <a:off x="749808" y="3624682"/>
-            <a:ext cx="320040" cy="751637"/>
+            <a:off x="1097280" y="4369003"/>
+            <a:ext cx="1825752" cy="755294"/>
           </a:xfrm>
           <a:prstGeom prst="rect">
             <a:avLst/>
@@ -16708,20 +16772,60 @@
           <a:lstStyle/>
           <a:p>
             <a:pPr indent="0" marL="0">
-              <a:buNone/>
-            </a:pPr>
-            <a:r>
-              <a:rPr lang="en-US" sz="1500" b="1" dirty="0">
-                <a:solidFill>
-                  <a:srgbClr val="0B2C4A"/>
-                </a:solidFill>
-                <a:latin typeface="Inter" pitchFamily="34" charset="0"/>
-                <a:ea typeface="Inter" pitchFamily="34" charset="-122"/>
-                <a:cs typeface="Inter" pitchFamily="34" charset="-120"/>
-              </a:rPr>
-              <a:t>3</a:t>
-            </a:r>
-            <a:endParaRPr lang="en-US" sz="1500" dirty="0"/>
+              <a:spcAft>
+                <a:spcPts val="200"/>
+              </a:spcAft>
+              <a:buNone/>
+            </a:pPr>
+            <a:r>
+              <a:rPr lang="en-US" sz="1400" b="1" dirty="0">
+                <a:solidFill>
+                  <a:srgbClr val="1A1A1A"/>
+                </a:solidFill>
+                <a:latin typeface="Inter" pitchFamily="34" charset="0"/>
+                <a:ea typeface="Inter" pitchFamily="34" charset="-122"/>
+                <a:cs typeface="Inter" pitchFamily="34" charset="-120"/>
+              </a:rPr>
+              <a:t>Hyundai St George</a:t>
+            </a:r>
+            <a:endParaRPr lang="en-US" sz="1400" dirty="0"/>
+          </a:p>
+          <a:p>
+            <a:pPr indent="0" marL="0">
+              <a:spcAft>
+                <a:spcPts val="200"/>
+              </a:spcAft>
+              <a:buNone/>
+            </a:pPr>
+            <a:r>
+              <a:rPr lang="en-US" sz="1200" dirty="0">
+                <a:solidFill>
+                  <a:srgbClr val="595959"/>
+                </a:solidFill>
+                <a:latin typeface="Inter" pitchFamily="34" charset="0"/>
+                <a:ea typeface="Inter" pitchFamily="34" charset="-122"/>
+                <a:cs typeface="Inter" pitchFamily="34" charset="-120"/>
+              </a:rPr>
+              <a:t>82.3%  →  </a:t>
+            </a:r>
+            <a:pPr indent="0" marL="0">
+              <a:spcAft>
+                <a:spcPts val="200"/>
+              </a:spcAft>
+              <a:buNone/>
+            </a:pPr>
+            <a:r>
+              <a:rPr lang="en-US" sz="1200" b="1" dirty="0">
+                <a:solidFill>
+                  <a:srgbClr val="0B7A4A"/>
+                </a:solidFill>
+                <a:latin typeface="Inter" pitchFamily="34" charset="0"/>
+                <a:ea typeface="Inter" pitchFamily="34" charset="-122"/>
+                <a:cs typeface="Inter" pitchFamily="34" charset="-120"/>
+              </a:rPr>
+              <a:t>85.3%</a:t>
+            </a:r>
+            <a:endParaRPr lang="en-US" sz="1400" dirty="0"/>
           </a:p>
         </p:txBody>
       </p:sp>
@@ -16733,77 +16837,24 @@
         </p:nvSpPr>
         <p:spPr>
           <a:xfrm>
-            <a:off x="1115568" y="3624682"/>
-            <a:ext cx="1737360" cy="751637"/>
-          </a:xfrm>
-          <a:prstGeom prst="rect">
-            <a:avLst/>
-          </a:prstGeom>
-          <a:noFill/>
-          <a:ln/>
-        </p:spPr>
-        <p:txBody>
-          <a:bodyPr wrap="square" lIns="0" tIns="0" rIns="0" bIns="0" rtlCol="0" anchor="ctr"/>
-          <a:lstStyle/>
-          <a:p>
-            <a:pPr indent="0" marL="0">
-              <a:buNone/>
-            </a:pPr>
-            <a:r>
-              <a:rPr lang="en-US" sz="1400" b="1" dirty="0">
-                <a:solidFill>
-                  <a:srgbClr val="1A1A1A"/>
-                </a:solidFill>
-                <a:latin typeface="Inter" pitchFamily="34" charset="0"/>
-                <a:ea typeface="Inter" pitchFamily="34" charset="-122"/>
-                <a:cs typeface="Inter" pitchFamily="34" charset="-120"/>
-              </a:rPr>
-              <a:t>LR Reno</a:t>
-            </a:r>
-            <a:endParaRPr lang="en-US" sz="1400" dirty="0"/>
-          </a:p>
-        </p:txBody>
-      </p:sp>
-      <p:sp>
-        <p:nvSpPr>
-          <p:cNvPr id="23" name="Text 21"/>
-          <p:cNvSpPr txBox="1"/>
-          <p:nvPr/>
-        </p:nvSpPr>
-        <p:spPr>
-          <a:xfrm>
-            <a:off x="2898648" y="3624682"/>
-            <a:ext cx="1920240" cy="751637"/>
-          </a:xfrm>
-          <a:prstGeom prst="rect">
-            <a:avLst/>
-          </a:prstGeom>
-          <a:noFill/>
-          <a:ln/>
-        </p:spPr>
-        <p:txBody>
-          <a:bodyPr wrap="square" lIns="0" tIns="0" rIns="0" bIns="0" rtlCol="0" anchor="ctr"/>
-          <a:lstStyle/>
-          <a:p>
-            <a:pPr indent="0" marL="0">
-              <a:buNone/>
-            </a:pPr>
-            <a:r>
-              <a:rPr lang="en-US" sz="1400" dirty="0">
-                <a:solidFill>
-                  <a:srgbClr val="595959"/>
-                </a:solidFill>
-                <a:latin typeface="Inter" pitchFamily="34" charset="0"/>
-                <a:ea typeface="Inter" pitchFamily="34" charset="-122"/>
-                <a:cs typeface="Inter" pitchFamily="34" charset="-120"/>
-              </a:rPr>
-              <a:t>78.8%  </a:t>
-            </a:r>
-            <a:pPr indent="0" marL="0">
-              <a:buNone/>
-            </a:pPr>
-            <a:r>
-              <a:rPr lang="en-US" sz="1400" b="1" dirty="0">
+            <a:off x="2941320" y="4369003"/>
+            <a:ext cx="1115568" cy="755294"/>
+          </a:xfrm>
+          <a:prstGeom prst="rect">
+            <a:avLst/>
+          </a:prstGeom>
+          <a:noFill/>
+          <a:ln/>
+        </p:spPr>
+        <p:txBody>
+          <a:bodyPr wrap="square" lIns="0" tIns="0" rIns="0" bIns="0" rtlCol="0" anchor="ctr"/>
+          <a:lstStyle/>
+          <a:p>
+            <a:pPr algn="r" indent="0" marL="0">
+              <a:buNone/>
+            </a:pPr>
+            <a:r>
+              <a:rPr lang="en-US" sz="1600" b="1" dirty="0">
                 <a:solidFill>
                   <a:srgbClr val="0B7A4A"/>
                 </a:solidFill>
@@ -16811,60 +16862,7 @@
                 <a:ea typeface="Inter" pitchFamily="34" charset="-122"/>
                 <a:cs typeface="Inter" pitchFamily="34" charset="-120"/>
               </a:rPr>
-              <a:t>→  </a:t>
-            </a:r>
-            <a:pPr indent="0" marL="0">
-              <a:buNone/>
-            </a:pPr>
-            <a:r>
-              <a:rPr lang="en-US" sz="1400" b="1" dirty="0">
-                <a:solidFill>
-                  <a:srgbClr val="0B7A4A"/>
-                </a:solidFill>
-                <a:latin typeface="Inter" pitchFamily="34" charset="0"/>
-                <a:ea typeface="Inter" pitchFamily="34" charset="-122"/>
-                <a:cs typeface="Inter" pitchFamily="34" charset="-120"/>
-              </a:rPr>
-              <a:t>82.3%</a:t>
-            </a:r>
-            <a:endParaRPr lang="en-US" sz="1400" dirty="0"/>
-          </a:p>
-        </p:txBody>
-      </p:sp>
-      <p:sp>
-        <p:nvSpPr>
-          <p:cNvPr id="24" name="Text 22"/>
-          <p:cNvSpPr txBox="1"/>
-          <p:nvPr/>
-        </p:nvSpPr>
-        <p:spPr>
-          <a:xfrm>
-            <a:off x="4864608" y="3624682"/>
-            <a:ext cx="1051560" cy="751637"/>
-          </a:xfrm>
-          <a:prstGeom prst="rect">
-            <a:avLst/>
-          </a:prstGeom>
-          <a:noFill/>
-          <a:ln/>
-        </p:spPr>
-        <p:txBody>
-          <a:bodyPr wrap="square" lIns="0" tIns="0" rIns="0" bIns="0" rtlCol="0" anchor="ctr"/>
-          <a:lstStyle/>
-          <a:p>
-            <a:pPr algn="r" indent="0" marL="0">
-              <a:buNone/>
-            </a:pPr>
-            <a:r>
-              <a:rPr lang="en-US" sz="1600" b="1" dirty="0">
-                <a:solidFill>
-                  <a:srgbClr val="0B7A4A"/>
-                </a:solidFill>
-                <a:latin typeface="Inter" pitchFamily="34" charset="0"/>
-                <a:ea typeface="Inter" pitchFamily="34" charset="-122"/>
-                <a:cs typeface="Inter" pitchFamily="34" charset="-120"/>
-              </a:rPr>
-              <a:t>+3.4 pts</a:t>
+              <a:t>+3.0 pts</a:t>
             </a:r>
             <a:endParaRPr lang="en-US" sz="1600" dirty="0"/>
           </a:p>
@@ -16872,198 +16870,14 @@
       </p:sp>
       <p:sp>
         <p:nvSpPr>
-          <p:cNvPr id="25" name="Text 23"/>
-          <p:cNvSpPr txBox="1"/>
-          <p:nvPr/>
-        </p:nvSpPr>
-        <p:spPr>
-          <a:xfrm>
-            <a:off x="749808" y="4376318"/>
-            <a:ext cx="320040" cy="751637"/>
-          </a:xfrm>
-          <a:prstGeom prst="rect">
-            <a:avLst/>
-          </a:prstGeom>
-          <a:noFill/>
-          <a:ln/>
-        </p:spPr>
-        <p:txBody>
-          <a:bodyPr wrap="square" lIns="0" tIns="0" rIns="0" bIns="0" rtlCol="0" anchor="ctr"/>
-          <a:lstStyle/>
-          <a:p>
-            <a:pPr indent="0" marL="0">
-              <a:buNone/>
-            </a:pPr>
-            <a:r>
-              <a:rPr lang="en-US" sz="1500" b="1" dirty="0">
-                <a:solidFill>
-                  <a:srgbClr val="0B2C4A"/>
-                </a:solidFill>
-                <a:latin typeface="Inter" pitchFamily="34" charset="0"/>
-                <a:ea typeface="Inter" pitchFamily="34" charset="-122"/>
-                <a:cs typeface="Inter" pitchFamily="34" charset="-120"/>
-              </a:rPr>
-              <a:t>4</a:t>
-            </a:r>
-            <a:endParaRPr lang="en-US" sz="1500" dirty="0"/>
-          </a:p>
-        </p:txBody>
-      </p:sp>
-      <p:sp>
-        <p:nvSpPr>
-          <p:cNvPr id="26" name="Text 24"/>
-          <p:cNvSpPr txBox="1"/>
-          <p:nvPr/>
-        </p:nvSpPr>
-        <p:spPr>
-          <a:xfrm>
-            <a:off x="1115568" y="4376318"/>
-            <a:ext cx="1737360" cy="751637"/>
-          </a:xfrm>
-          <a:prstGeom prst="rect">
-            <a:avLst/>
-          </a:prstGeom>
-          <a:noFill/>
-          <a:ln/>
-        </p:spPr>
-        <p:txBody>
-          <a:bodyPr wrap="square" lIns="0" tIns="0" rIns="0" bIns="0" rtlCol="0" anchor="ctr"/>
-          <a:lstStyle/>
-          <a:p>
-            <a:pPr indent="0" marL="0">
-              <a:buNone/>
-            </a:pPr>
-            <a:r>
-              <a:rPr lang="en-US" sz="1400" b="1" dirty="0">
-                <a:solidFill>
-                  <a:srgbClr val="1A1A1A"/>
-                </a:solidFill>
-                <a:latin typeface="Inter" pitchFamily="34" charset="0"/>
-                <a:ea typeface="Inter" pitchFamily="34" charset="-122"/>
-                <a:cs typeface="Inter" pitchFamily="34" charset="-120"/>
-              </a:rPr>
-              <a:t>Hyundai St George</a:t>
-            </a:r>
-            <a:endParaRPr lang="en-US" sz="1400" dirty="0"/>
-          </a:p>
-        </p:txBody>
-      </p:sp>
-      <p:sp>
-        <p:nvSpPr>
-          <p:cNvPr id="27" name="Text 25"/>
-          <p:cNvSpPr txBox="1"/>
-          <p:nvPr/>
-        </p:nvSpPr>
-        <p:spPr>
-          <a:xfrm>
-            <a:off x="2898648" y="4376318"/>
-            <a:ext cx="1920240" cy="751637"/>
-          </a:xfrm>
-          <a:prstGeom prst="rect">
-            <a:avLst/>
-          </a:prstGeom>
-          <a:noFill/>
-          <a:ln/>
-        </p:spPr>
-        <p:txBody>
-          <a:bodyPr wrap="square" lIns="0" tIns="0" rIns="0" bIns="0" rtlCol="0" anchor="ctr"/>
-          <a:lstStyle/>
-          <a:p>
-            <a:pPr indent="0" marL="0">
-              <a:buNone/>
-            </a:pPr>
-            <a:r>
-              <a:rPr lang="en-US" sz="1400" dirty="0">
-                <a:solidFill>
-                  <a:srgbClr val="595959"/>
-                </a:solidFill>
-                <a:latin typeface="Inter" pitchFamily="34" charset="0"/>
-                <a:ea typeface="Inter" pitchFamily="34" charset="-122"/>
-                <a:cs typeface="Inter" pitchFamily="34" charset="-120"/>
-              </a:rPr>
-              <a:t>82.3%  </a:t>
-            </a:r>
-            <a:pPr indent="0" marL="0">
-              <a:buNone/>
-            </a:pPr>
-            <a:r>
-              <a:rPr lang="en-US" sz="1400" b="1" dirty="0">
-                <a:solidFill>
-                  <a:srgbClr val="0B7A4A"/>
-                </a:solidFill>
-                <a:latin typeface="Inter" pitchFamily="34" charset="0"/>
-                <a:ea typeface="Inter" pitchFamily="34" charset="-122"/>
-                <a:cs typeface="Inter" pitchFamily="34" charset="-120"/>
-              </a:rPr>
-              <a:t>→  </a:t>
-            </a:r>
-            <a:pPr indent="0" marL="0">
-              <a:buNone/>
-            </a:pPr>
-            <a:r>
-              <a:rPr lang="en-US" sz="1400" b="1" dirty="0">
-                <a:solidFill>
-                  <a:srgbClr val="0B7A4A"/>
-                </a:solidFill>
-                <a:latin typeface="Inter" pitchFamily="34" charset="0"/>
-                <a:ea typeface="Inter" pitchFamily="34" charset="-122"/>
-                <a:cs typeface="Inter" pitchFamily="34" charset="-120"/>
-              </a:rPr>
-              <a:t>85.3%</a:t>
-            </a:r>
-            <a:endParaRPr lang="en-US" sz="1400" dirty="0"/>
-          </a:p>
-        </p:txBody>
-      </p:sp>
-      <p:sp>
-        <p:nvSpPr>
-          <p:cNvPr id="28" name="Text 26"/>
-          <p:cNvSpPr txBox="1"/>
-          <p:nvPr/>
-        </p:nvSpPr>
-        <p:spPr>
-          <a:xfrm>
-            <a:off x="4864608" y="4376318"/>
-            <a:ext cx="1051560" cy="751637"/>
-          </a:xfrm>
-          <a:prstGeom prst="rect">
-            <a:avLst/>
-          </a:prstGeom>
-          <a:noFill/>
-          <a:ln/>
-        </p:spPr>
-        <p:txBody>
-          <a:bodyPr wrap="square" lIns="0" tIns="0" rIns="0" bIns="0" rtlCol="0" anchor="ctr"/>
-          <a:lstStyle/>
-          <a:p>
-            <a:pPr algn="r" indent="0" marL="0">
-              <a:buNone/>
-            </a:pPr>
-            <a:r>
-              <a:rPr lang="en-US" sz="1600" b="1" dirty="0">
-                <a:solidFill>
-                  <a:srgbClr val="0B7A4A"/>
-                </a:solidFill>
-                <a:latin typeface="Inter" pitchFamily="34" charset="0"/>
-                <a:ea typeface="Inter" pitchFamily="34" charset="-122"/>
-                <a:cs typeface="Inter" pitchFamily="34" charset="-120"/>
-              </a:rPr>
-              <a:t>+3.0 pts</a:t>
-            </a:r>
-            <a:endParaRPr lang="en-US" sz="1600" dirty="0"/>
-          </a:p>
-        </p:txBody>
-      </p:sp>
-      <p:sp>
-        <p:nvSpPr>
-          <p:cNvPr id="29" name="Shape 27"/>
+          <p:cNvPr id="23" name="Shape 21"/>
           <p:cNvSpPr/>
           <p:nvPr/>
         </p:nvSpPr>
         <p:spPr>
           <a:xfrm>
-            <a:off x="658368" y="5127955"/>
-            <a:ext cx="5321808" cy="751637"/>
+            <a:off x="658368" y="5124298"/>
+            <a:ext cx="3489960" cy="755294"/>
           </a:xfrm>
           <a:prstGeom prst="rect">
             <a:avLst/>
@@ -17076,14 +16890,14 @@
       </p:sp>
       <p:sp>
         <p:nvSpPr>
-          <p:cNvPr id="30" name="Text 28"/>
-          <p:cNvSpPr txBox="1"/>
-          <p:nvPr/>
-        </p:nvSpPr>
-        <p:spPr>
-          <a:xfrm>
-            <a:off x="749808" y="5127955"/>
-            <a:ext cx="320040" cy="751637"/>
+          <p:cNvPr id="24" name="Text 22"/>
+          <p:cNvSpPr txBox="1"/>
+          <p:nvPr/>
+        </p:nvSpPr>
+        <p:spPr>
+          <a:xfrm>
+            <a:off x="749808" y="5124298"/>
+            <a:ext cx="365760" cy="755294"/>
           </a:xfrm>
           <a:prstGeom prst="rect">
             <a:avLst/>
@@ -17115,14 +16929,14 @@
       </p:sp>
       <p:sp>
         <p:nvSpPr>
-          <p:cNvPr id="31" name="Text 29"/>
-          <p:cNvSpPr txBox="1"/>
-          <p:nvPr/>
-        </p:nvSpPr>
-        <p:spPr>
-          <a:xfrm>
-            <a:off x="1115568" y="5127955"/>
-            <a:ext cx="1737360" cy="751637"/>
+          <p:cNvPr id="25" name="Text 23"/>
+          <p:cNvSpPr txBox="1"/>
+          <p:nvPr/>
+        </p:nvSpPr>
+        <p:spPr>
+          <a:xfrm>
+            <a:off x="1097280" y="5124298"/>
+            <a:ext cx="1825752" cy="755294"/>
           </a:xfrm>
           <a:prstGeom prst="rect">
             <a:avLst/>
@@ -17135,6 +16949,9 @@
           <a:lstStyle/>
           <a:p>
             <a:pPr indent="0" marL="0">
+              <a:spcAft>
+                <a:spcPts val="200"/>
+              </a:spcAft>
               <a:buNone/>
             </a:pPr>
             <a:r>
@@ -17150,34 +16967,15 @@
             </a:r>
             <a:endParaRPr lang="en-US" sz="1400" dirty="0"/>
           </a:p>
-        </p:txBody>
-      </p:sp>
-      <p:sp>
-        <p:nvSpPr>
-          <p:cNvPr id="32" name="Text 30"/>
-          <p:cNvSpPr txBox="1"/>
-          <p:nvPr/>
-        </p:nvSpPr>
-        <p:spPr>
-          <a:xfrm>
-            <a:off x="2898648" y="5127955"/>
-            <a:ext cx="1920240" cy="751637"/>
-          </a:xfrm>
-          <a:prstGeom prst="rect">
-            <a:avLst/>
-          </a:prstGeom>
-          <a:noFill/>
-          <a:ln/>
-        </p:spPr>
-        <p:txBody>
-          <a:bodyPr wrap="square" lIns="0" tIns="0" rIns="0" bIns="0" rtlCol="0" anchor="ctr"/>
-          <a:lstStyle/>
           <a:p>
             <a:pPr indent="0" marL="0">
-              <a:buNone/>
-            </a:pPr>
-            <a:r>
-              <a:rPr lang="en-US" sz="1400" dirty="0">
+              <a:spcAft>
+                <a:spcPts val="200"/>
+              </a:spcAft>
+              <a:buNone/>
+            </a:pPr>
+            <a:r>
+              <a:rPr lang="en-US" sz="1200" dirty="0">
                 <a:solidFill>
                   <a:srgbClr val="595959"/>
                 </a:solidFill>
@@ -17185,13 +16983,16 @@
                 <a:ea typeface="Inter" pitchFamily="34" charset="-122"/>
                 <a:cs typeface="Inter" pitchFamily="34" charset="-120"/>
               </a:rPr>
-              <a:t>80.4%  </a:t>
+              <a:t>80.4%  →  </a:t>
             </a:r>
             <a:pPr indent="0" marL="0">
-              <a:buNone/>
-            </a:pPr>
-            <a:r>
-              <a:rPr lang="en-US" sz="1400" b="1" dirty="0">
+              <a:spcAft>
+                <a:spcPts val="200"/>
+              </a:spcAft>
+              <a:buNone/>
+            </a:pPr>
+            <a:r>
+              <a:rPr lang="en-US" sz="1200" b="1" dirty="0">
                 <a:solidFill>
                   <a:srgbClr val="0B7A4A"/>
                 </a:solidFill>
@@ -17199,13 +17000,38 @@
                 <a:ea typeface="Inter" pitchFamily="34" charset="-122"/>
                 <a:cs typeface="Inter" pitchFamily="34" charset="-120"/>
               </a:rPr>
-              <a:t>→  </a:t>
-            </a:r>
-            <a:pPr indent="0" marL="0">
-              <a:buNone/>
-            </a:pPr>
-            <a:r>
-              <a:rPr lang="en-US" sz="1400" b="1" dirty="0">
+              <a:t>82.8%</a:t>
+            </a:r>
+            <a:endParaRPr lang="en-US" sz="1400" dirty="0"/>
+          </a:p>
+        </p:txBody>
+      </p:sp>
+      <p:sp>
+        <p:nvSpPr>
+          <p:cNvPr id="26" name="Text 24"/>
+          <p:cNvSpPr txBox="1"/>
+          <p:nvPr/>
+        </p:nvSpPr>
+        <p:spPr>
+          <a:xfrm>
+            <a:off x="2941320" y="5124298"/>
+            <a:ext cx="1115568" cy="755294"/>
+          </a:xfrm>
+          <a:prstGeom prst="rect">
+            <a:avLst/>
+          </a:prstGeom>
+          <a:noFill/>
+          <a:ln/>
+        </p:spPr>
+        <p:txBody>
+          <a:bodyPr wrap="square" lIns="0" tIns="0" rIns="0" bIns="0" rtlCol="0" anchor="ctr"/>
+          <a:lstStyle/>
+          <a:p>
+            <a:pPr algn="r" indent="0" marL="0">
+              <a:buNone/>
+            </a:pPr>
+            <a:r>
+              <a:rPr lang="en-US" sz="1600" b="1" dirty="0">
                 <a:solidFill>
                   <a:srgbClr val="0B7A4A"/>
                 </a:solidFill>
@@ -17213,45 +17039,6 @@
                 <a:ea typeface="Inter" pitchFamily="34" charset="-122"/>
                 <a:cs typeface="Inter" pitchFamily="34" charset="-120"/>
               </a:rPr>
-              <a:t>82.8%</a:t>
-            </a:r>
-            <a:endParaRPr lang="en-US" sz="1400" dirty="0"/>
-          </a:p>
-        </p:txBody>
-      </p:sp>
-      <p:sp>
-        <p:nvSpPr>
-          <p:cNvPr id="33" name="Text 31"/>
-          <p:cNvSpPr txBox="1"/>
-          <p:nvPr/>
-        </p:nvSpPr>
-        <p:spPr>
-          <a:xfrm>
-            <a:off x="4864608" y="5127955"/>
-            <a:ext cx="1051560" cy="751637"/>
-          </a:xfrm>
-          <a:prstGeom prst="rect">
-            <a:avLst/>
-          </a:prstGeom>
-          <a:noFill/>
-          <a:ln/>
-        </p:spPr>
-        <p:txBody>
-          <a:bodyPr wrap="square" lIns="0" tIns="0" rIns="0" bIns="0" rtlCol="0" anchor="ctr"/>
-          <a:lstStyle/>
-          <a:p>
-            <a:pPr algn="r" indent="0" marL="0">
-              <a:buNone/>
-            </a:pPr>
-            <a:r>
-              <a:rPr lang="en-US" sz="1600" b="1" dirty="0">
-                <a:solidFill>
-                  <a:srgbClr val="0B7A4A"/>
-                </a:solidFill>
-                <a:latin typeface="Inter" pitchFamily="34" charset="0"/>
-                <a:ea typeface="Inter" pitchFamily="34" charset="-122"/>
-                <a:cs typeface="Inter" pitchFamily="34" charset="-120"/>
-              </a:rPr>
               <a:t>+2.4 pts</a:t>
             </a:r>
             <a:endParaRPr lang="en-US" sz="1600" dirty="0"/>
@@ -17260,14 +17047,14 @@
       </p:sp>
       <p:sp>
         <p:nvSpPr>
-          <p:cNvPr id="34" name="Shape 32"/>
+          <p:cNvPr id="27" name="Shape 25"/>
           <p:cNvSpPr/>
           <p:nvPr/>
         </p:nvSpPr>
         <p:spPr>
           <a:xfrm>
-            <a:off x="6208776" y="1737360"/>
-            <a:ext cx="5321808" cy="45720"/>
+            <a:off x="4349496" y="1371600"/>
+            <a:ext cx="3489960" cy="45720"/>
           </a:xfrm>
           <a:prstGeom prst="rect">
             <a:avLst/>
@@ -17280,14 +17067,14 @@
       </p:sp>
       <p:sp>
         <p:nvSpPr>
-          <p:cNvPr id="35" name="Text 33"/>
-          <p:cNvSpPr txBox="1"/>
-          <p:nvPr/>
-        </p:nvSpPr>
-        <p:spPr>
-          <a:xfrm>
-            <a:off x="6300216" y="1810512"/>
-            <a:ext cx="1828800" cy="274320"/>
+          <p:cNvPr id="28" name="Text 26"/>
+          <p:cNvSpPr txBox="1"/>
+          <p:nvPr/>
+        </p:nvSpPr>
+        <p:spPr>
+          <a:xfrm>
+            <a:off x="4440936" y="1444752"/>
+            <a:ext cx="3307080" cy="274320"/>
           </a:xfrm>
           <a:prstGeom prst="rect">
             <a:avLst/>
@@ -17303,7 +17090,7 @@
               <a:buNone/>
             </a:pPr>
             <a:r>
-              <a:rPr lang="en-US" sz="1400" b="1" spc="100" kern="0" dirty="0">
+              <a:rPr lang="en-US" sz="1500" b="1" spc="100" kern="0" dirty="0">
                 <a:solidFill>
                   <a:srgbClr val="A82B26"/>
                 </a:solidFill>
@@ -17311,22 +17098,22 @@
                 <a:ea typeface="Inter" pitchFamily="34" charset="-122"/>
                 <a:cs typeface="Inter" pitchFamily="34" charset="-120"/>
               </a:rPr>
-              <a:t>BOTTOM 5</a:t>
-            </a:r>
-            <a:endParaRPr lang="en-US" sz="1400" dirty="0"/>
-          </a:p>
-        </p:txBody>
-      </p:sp>
-      <p:sp>
-        <p:nvSpPr>
-          <p:cNvPr id="36" name="Text 34"/>
-          <p:cNvSpPr txBox="1"/>
-          <p:nvPr/>
-        </p:nvSpPr>
-        <p:spPr>
-          <a:xfrm>
-            <a:off x="8449056" y="1810512"/>
-            <a:ext cx="1828800" cy="274320"/>
+              <a:t>BOTTOM 5 VS LAST YEAR</a:t>
+            </a:r>
+            <a:endParaRPr lang="en-US" sz="1500" dirty="0"/>
+          </a:p>
+        </p:txBody>
+      </p:sp>
+      <p:sp>
+        <p:nvSpPr>
+          <p:cNvPr id="29" name="Text 27"/>
+          <p:cNvSpPr txBox="1"/>
+          <p:nvPr/>
+        </p:nvSpPr>
+        <p:spPr>
+          <a:xfrm>
+            <a:off x="4440936" y="1737360"/>
+            <a:ext cx="3307080" cy="274320"/>
           </a:xfrm>
           <a:prstGeom prst="rect">
             <a:avLst/>
@@ -17342,7 +17129,7 @@
               <a:buNone/>
             </a:pPr>
             <a:r>
-              <a:rPr lang="en-US" sz="1400" b="1" dirty="0">
+              <a:rPr lang="en-US" sz="1200" dirty="0">
                 <a:solidFill>
                   <a:srgbClr val="595959"/>
                 </a:solidFill>
@@ -17350,61 +17137,22 @@
                 <a:ea typeface="Inter" pitchFamily="34" charset="-122"/>
                 <a:cs typeface="Inter" pitchFamily="34" charset="-120"/>
               </a:rPr>
-              <a:t>2025 → 2026</a:t>
-            </a:r>
-            <a:endParaRPr lang="en-US" sz="1400" dirty="0"/>
-          </a:p>
-        </p:txBody>
-      </p:sp>
-      <p:sp>
-        <p:nvSpPr>
-          <p:cNvPr id="37" name="Text 35"/>
-          <p:cNvSpPr txBox="1"/>
-          <p:nvPr/>
-        </p:nvSpPr>
-        <p:spPr>
-          <a:xfrm>
-            <a:off x="10415016" y="1810512"/>
-            <a:ext cx="1051560" cy="274320"/>
-          </a:xfrm>
-          <a:prstGeom prst="rect">
-            <a:avLst/>
-          </a:prstGeom>
-          <a:noFill/>
-          <a:ln/>
-        </p:spPr>
-        <p:txBody>
-          <a:bodyPr wrap="square" lIns="0" tIns="0" rIns="0" bIns="0" rtlCol="0" anchor="ctr"/>
-          <a:lstStyle/>
-          <a:p>
-            <a:pPr algn="r" indent="0" marL="0">
-              <a:buNone/>
-            </a:pPr>
-            <a:r>
-              <a:rPr lang="en-US" sz="1400" b="1" dirty="0">
-                <a:solidFill>
-                  <a:srgbClr val="595959"/>
-                </a:solidFill>
-                <a:latin typeface="Inter" pitchFamily="34" charset="0"/>
-                <a:ea typeface="Inter" pitchFamily="34" charset="-122"/>
-                <a:cs typeface="Inter" pitchFamily="34" charset="-120"/>
-              </a:rPr>
-              <a:t>Change</a:t>
-            </a:r>
-            <a:endParaRPr lang="en-US" sz="1400" dirty="0"/>
-          </a:p>
-        </p:txBody>
-      </p:sp>
-      <p:sp>
-        <p:nvSpPr>
-          <p:cNvPr id="38" name="Shape 36"/>
+              <a:t>Jan–Sep 2026 vs Jan–Sep 2025</a:t>
+            </a:r>
+            <a:endParaRPr lang="en-US" sz="1200" dirty="0"/>
+          </a:p>
+        </p:txBody>
+      </p:sp>
+      <p:sp>
+        <p:nvSpPr>
+          <p:cNvPr id="30" name="Shape 28"/>
           <p:cNvSpPr/>
           <p:nvPr/>
         </p:nvSpPr>
         <p:spPr>
           <a:xfrm>
-            <a:off x="6208776" y="2121408"/>
-            <a:ext cx="5321808" cy="751637"/>
+            <a:off x="4349496" y="2103120"/>
+            <a:ext cx="3489960" cy="755294"/>
           </a:xfrm>
           <a:prstGeom prst="rect">
             <a:avLst/>
@@ -17417,14 +17165,14 @@
       </p:sp>
       <p:sp>
         <p:nvSpPr>
-          <p:cNvPr id="39" name="Text 37"/>
-          <p:cNvSpPr txBox="1"/>
-          <p:nvPr/>
-        </p:nvSpPr>
-        <p:spPr>
-          <a:xfrm>
-            <a:off x="6300216" y="2121408"/>
-            <a:ext cx="320040" cy="751637"/>
+          <p:cNvPr id="31" name="Text 29"/>
+          <p:cNvSpPr txBox="1"/>
+          <p:nvPr/>
+        </p:nvSpPr>
+        <p:spPr>
+          <a:xfrm>
+            <a:off x="4440936" y="2103120"/>
+            <a:ext cx="365760" cy="755294"/>
           </a:xfrm>
           <a:prstGeom prst="rect">
             <a:avLst/>
@@ -17456,14 +17204,14 @@
       </p:sp>
       <p:sp>
         <p:nvSpPr>
-          <p:cNvPr id="40" name="Text 38"/>
-          <p:cNvSpPr txBox="1"/>
-          <p:nvPr/>
-        </p:nvSpPr>
-        <p:spPr>
-          <a:xfrm>
-            <a:off x="6665976" y="2121408"/>
-            <a:ext cx="1737360" cy="751637"/>
+          <p:cNvPr id="32" name="Text 30"/>
+          <p:cNvSpPr txBox="1"/>
+          <p:nvPr/>
+        </p:nvSpPr>
+        <p:spPr>
+          <a:xfrm>
+            <a:off x="4788408" y="2103120"/>
+            <a:ext cx="1825752" cy="755294"/>
           </a:xfrm>
           <a:prstGeom prst="rect">
             <a:avLst/>
@@ -17476,6 +17224,9 @@
           <a:lstStyle/>
           <a:p>
             <a:pPr indent="0" marL="0">
+              <a:spcAft>
+                <a:spcPts val="200"/>
+              </a:spcAft>
               <a:buNone/>
             </a:pPr>
             <a:r>
@@ -17491,34 +17242,15 @@
             </a:r>
             <a:endParaRPr lang="en-US" sz="1400" dirty="0"/>
           </a:p>
-        </p:txBody>
-      </p:sp>
-      <p:sp>
-        <p:nvSpPr>
-          <p:cNvPr id="41" name="Text 39"/>
-          <p:cNvSpPr txBox="1"/>
-          <p:nvPr/>
-        </p:nvSpPr>
-        <p:spPr>
-          <a:xfrm>
-            <a:off x="8449056" y="2121408"/>
-            <a:ext cx="1920240" cy="751637"/>
-          </a:xfrm>
-          <a:prstGeom prst="rect">
-            <a:avLst/>
-          </a:prstGeom>
-          <a:noFill/>
-          <a:ln/>
-        </p:spPr>
-        <p:txBody>
-          <a:bodyPr wrap="square" lIns="0" tIns="0" rIns="0" bIns="0" rtlCol="0" anchor="ctr"/>
-          <a:lstStyle/>
           <a:p>
             <a:pPr indent="0" marL="0">
-              <a:buNone/>
-            </a:pPr>
-            <a:r>
-              <a:rPr lang="en-US" sz="1400" dirty="0">
+              <a:spcAft>
+                <a:spcPts val="200"/>
+              </a:spcAft>
+              <a:buNone/>
+            </a:pPr>
+            <a:r>
+              <a:rPr lang="en-US" sz="1200" dirty="0">
                 <a:solidFill>
                   <a:srgbClr val="595959"/>
                 </a:solidFill>
@@ -17526,27 +17258,212 @@
                 <a:ea typeface="Inter" pitchFamily="34" charset="-122"/>
                 <a:cs typeface="Inter" pitchFamily="34" charset="-120"/>
               </a:rPr>
-              <a:t>76.6%  </a:t>
+              <a:t>76.6%  →  </a:t>
             </a:r>
             <a:pPr indent="0" marL="0">
+              <a:spcAft>
+                <a:spcPts val="200"/>
+              </a:spcAft>
+              <a:buNone/>
+            </a:pPr>
+            <a:r>
+              <a:rPr lang="en-US" sz="1200" b="1" dirty="0">
+                <a:solidFill>
+                  <a:srgbClr val="A82B26"/>
+                </a:solidFill>
+                <a:latin typeface="Inter" pitchFamily="34" charset="0"/>
+                <a:ea typeface="Inter" pitchFamily="34" charset="-122"/>
+                <a:cs typeface="Inter" pitchFamily="34" charset="-120"/>
+              </a:rPr>
+              <a:t>67.8%</a:t>
+            </a:r>
+            <a:endParaRPr lang="en-US" sz="1400" dirty="0"/>
+          </a:p>
+        </p:txBody>
+      </p:sp>
+      <p:sp>
+        <p:nvSpPr>
+          <p:cNvPr id="33" name="Text 31"/>
+          <p:cNvSpPr txBox="1"/>
+          <p:nvPr/>
+        </p:nvSpPr>
+        <p:spPr>
+          <a:xfrm>
+            <a:off x="6632448" y="2103120"/>
+            <a:ext cx="1115568" cy="755294"/>
+          </a:xfrm>
+          <a:prstGeom prst="rect">
+            <a:avLst/>
+          </a:prstGeom>
+          <a:noFill/>
+          <a:ln/>
+        </p:spPr>
+        <p:txBody>
+          <a:bodyPr wrap="square" lIns="0" tIns="0" rIns="0" bIns="0" rtlCol="0" anchor="ctr"/>
+          <a:lstStyle/>
+          <a:p>
+            <a:pPr algn="r" indent="0" marL="0">
+              <a:buNone/>
+            </a:pPr>
+            <a:r>
+              <a:rPr lang="en-US" sz="1600" b="1" dirty="0">
+                <a:solidFill>
+                  <a:srgbClr val="A82B26"/>
+                </a:solidFill>
+                <a:latin typeface="Inter" pitchFamily="34" charset="0"/>
+                <a:ea typeface="Inter" pitchFamily="34" charset="-122"/>
+                <a:cs typeface="Inter" pitchFamily="34" charset="-120"/>
+              </a:rPr>
+              <a:t>−8.8 pts</a:t>
+            </a:r>
+            <a:endParaRPr lang="en-US" sz="1600" dirty="0"/>
+          </a:p>
+        </p:txBody>
+      </p:sp>
+      <p:sp>
+        <p:nvSpPr>
+          <p:cNvPr id="34" name="Text 32"/>
+          <p:cNvSpPr txBox="1"/>
+          <p:nvPr/>
+        </p:nvSpPr>
+        <p:spPr>
+          <a:xfrm>
+            <a:off x="4440936" y="2858414"/>
+            <a:ext cx="365760" cy="755294"/>
+          </a:xfrm>
+          <a:prstGeom prst="rect">
+            <a:avLst/>
+          </a:prstGeom>
+          <a:noFill/>
+          <a:ln/>
+        </p:spPr>
+        <p:txBody>
+          <a:bodyPr wrap="square" lIns="0" tIns="0" rIns="0" bIns="0" rtlCol="0" anchor="ctr"/>
+          <a:lstStyle/>
+          <a:p>
+            <a:pPr indent="0" marL="0">
+              <a:buNone/>
+            </a:pPr>
+            <a:r>
+              <a:rPr lang="en-US" sz="1500" b="1" dirty="0">
+                <a:solidFill>
+                  <a:srgbClr val="0B2C4A"/>
+                </a:solidFill>
+                <a:latin typeface="Inter" pitchFamily="34" charset="0"/>
+                <a:ea typeface="Inter" pitchFamily="34" charset="-122"/>
+                <a:cs typeface="Inter" pitchFamily="34" charset="-120"/>
+              </a:rPr>
+              <a:t>32</a:t>
+            </a:r>
+            <a:endParaRPr lang="en-US" sz="1500" dirty="0"/>
+          </a:p>
+        </p:txBody>
+      </p:sp>
+      <p:sp>
+        <p:nvSpPr>
+          <p:cNvPr id="35" name="Text 33"/>
+          <p:cNvSpPr txBox="1"/>
+          <p:nvPr/>
+        </p:nvSpPr>
+        <p:spPr>
+          <a:xfrm>
+            <a:off x="4788408" y="2858414"/>
+            <a:ext cx="1825752" cy="755294"/>
+          </a:xfrm>
+          <a:prstGeom prst="rect">
+            <a:avLst/>
+          </a:prstGeom>
+          <a:noFill/>
+          <a:ln/>
+        </p:spPr>
+        <p:txBody>
+          <a:bodyPr wrap="square" lIns="0" tIns="0" rIns="0" bIns="0" rtlCol="0" anchor="ctr"/>
+          <a:lstStyle/>
+          <a:p>
+            <a:pPr indent="0" marL="0">
+              <a:spcAft>
+                <a:spcPts val="200"/>
+              </a:spcAft>
               <a:buNone/>
             </a:pPr>
             <a:r>
               <a:rPr lang="en-US" sz="1400" b="1" dirty="0">
                 <a:solidFill>
+                  <a:srgbClr val="1A1A1A"/>
+                </a:solidFill>
+                <a:latin typeface="Inter" pitchFamily="34" charset="0"/>
+                <a:ea typeface="Inter" pitchFamily="34" charset="-122"/>
+                <a:cs typeface="Inter" pitchFamily="34" charset="-120"/>
+              </a:rPr>
+              <a:t>LR LV</a:t>
+            </a:r>
+            <a:endParaRPr lang="en-US" sz="1400" dirty="0"/>
+          </a:p>
+          <a:p>
+            <a:pPr indent="0" marL="0">
+              <a:spcAft>
+                <a:spcPts val="200"/>
+              </a:spcAft>
+              <a:buNone/>
+            </a:pPr>
+            <a:r>
+              <a:rPr lang="en-US" sz="1200" dirty="0">
+                <a:solidFill>
+                  <a:srgbClr val="595959"/>
+                </a:solidFill>
+                <a:latin typeface="Inter" pitchFamily="34" charset="0"/>
+                <a:ea typeface="Inter" pitchFamily="34" charset="-122"/>
+                <a:cs typeface="Inter" pitchFamily="34" charset="-120"/>
+              </a:rPr>
+              <a:t>75.6%  →  </a:t>
+            </a:r>
+            <a:pPr indent="0" marL="0">
+              <a:spcAft>
+                <a:spcPts val="200"/>
+              </a:spcAft>
+              <a:buNone/>
+            </a:pPr>
+            <a:r>
+              <a:rPr lang="en-US" sz="1200" b="1" dirty="0">
+                <a:solidFill>
                   <a:srgbClr val="A82B26"/>
                 </a:solidFill>
                 <a:latin typeface="Inter" pitchFamily="34" charset="0"/>
                 <a:ea typeface="Inter" pitchFamily="34" charset="-122"/>
                 <a:cs typeface="Inter" pitchFamily="34" charset="-120"/>
               </a:rPr>
-              <a:t>→  </a:t>
-            </a:r>
-            <a:pPr indent="0" marL="0">
-              <a:buNone/>
-            </a:pPr>
-            <a:r>
-              <a:rPr lang="en-US" sz="1400" b="1" dirty="0">
+              <a:t>70.0%</a:t>
+            </a:r>
+            <a:endParaRPr lang="en-US" sz="1400" dirty="0"/>
+          </a:p>
+        </p:txBody>
+      </p:sp>
+      <p:sp>
+        <p:nvSpPr>
+          <p:cNvPr id="36" name="Text 34"/>
+          <p:cNvSpPr txBox="1"/>
+          <p:nvPr/>
+        </p:nvSpPr>
+        <p:spPr>
+          <a:xfrm>
+            <a:off x="6632448" y="2858414"/>
+            <a:ext cx="1115568" cy="755294"/>
+          </a:xfrm>
+          <a:prstGeom prst="rect">
+            <a:avLst/>
+          </a:prstGeom>
+          <a:noFill/>
+          <a:ln/>
+        </p:spPr>
+        <p:txBody>
+          <a:bodyPr wrap="square" lIns="0" tIns="0" rIns="0" bIns="0" rtlCol="0" anchor="ctr"/>
+          <a:lstStyle/>
+          <a:p>
+            <a:pPr algn="r" indent="0" marL="0">
+              <a:buNone/>
+            </a:pPr>
+            <a:r>
+              <a:rPr lang="en-US" sz="1600" b="1" dirty="0">
                 <a:solidFill>
                   <a:srgbClr val="A82B26"/>
                 </a:solidFill>
@@ -17554,46 +17471,7 @@
                 <a:ea typeface="Inter" pitchFamily="34" charset="-122"/>
                 <a:cs typeface="Inter" pitchFamily="34" charset="-120"/>
               </a:rPr>
-              <a:t>67.8%</a:t>
-            </a:r>
-            <a:endParaRPr lang="en-US" sz="1400" dirty="0"/>
-          </a:p>
-        </p:txBody>
-      </p:sp>
-      <p:sp>
-        <p:nvSpPr>
-          <p:cNvPr id="42" name="Text 40"/>
-          <p:cNvSpPr txBox="1"/>
-          <p:nvPr/>
-        </p:nvSpPr>
-        <p:spPr>
-          <a:xfrm>
-            <a:off x="10415016" y="2121408"/>
-            <a:ext cx="1051560" cy="751637"/>
-          </a:xfrm>
-          <a:prstGeom prst="rect">
-            <a:avLst/>
-          </a:prstGeom>
-          <a:noFill/>
-          <a:ln/>
-        </p:spPr>
-        <p:txBody>
-          <a:bodyPr wrap="square" lIns="0" tIns="0" rIns="0" bIns="0" rtlCol="0" anchor="ctr"/>
-          <a:lstStyle/>
-          <a:p>
-            <a:pPr algn="r" indent="0" marL="0">
-              <a:buNone/>
-            </a:pPr>
-            <a:r>
-              <a:rPr lang="en-US" sz="1600" b="1" dirty="0">
-                <a:solidFill>
-                  <a:srgbClr val="A82B26"/>
-                </a:solidFill>
-                <a:latin typeface="Inter" pitchFamily="34" charset="0"/>
-                <a:ea typeface="Inter" pitchFamily="34" charset="-122"/>
-                <a:cs typeface="Inter" pitchFamily="34" charset="-120"/>
-              </a:rPr>
-              <a:t>−8.8 pts</a:t>
+              <a:t>−5.6 pts</a:t>
             </a:r>
             <a:endParaRPr lang="en-US" sz="1600" dirty="0"/>
           </a:p>
@@ -17601,198 +17479,14 @@
       </p:sp>
       <p:sp>
         <p:nvSpPr>
-          <p:cNvPr id="43" name="Text 41"/>
-          <p:cNvSpPr txBox="1"/>
-          <p:nvPr/>
-        </p:nvSpPr>
-        <p:spPr>
-          <a:xfrm>
-            <a:off x="6300216" y="2873045"/>
-            <a:ext cx="320040" cy="751637"/>
-          </a:xfrm>
-          <a:prstGeom prst="rect">
-            <a:avLst/>
-          </a:prstGeom>
-          <a:noFill/>
-          <a:ln/>
-        </p:spPr>
-        <p:txBody>
-          <a:bodyPr wrap="square" lIns="0" tIns="0" rIns="0" bIns="0" rtlCol="0" anchor="ctr"/>
-          <a:lstStyle/>
-          <a:p>
-            <a:pPr indent="0" marL="0">
-              <a:buNone/>
-            </a:pPr>
-            <a:r>
-              <a:rPr lang="en-US" sz="1500" b="1" dirty="0">
-                <a:solidFill>
-                  <a:srgbClr val="0B2C4A"/>
-                </a:solidFill>
-                <a:latin typeface="Inter" pitchFamily="34" charset="0"/>
-                <a:ea typeface="Inter" pitchFamily="34" charset="-122"/>
-                <a:cs typeface="Inter" pitchFamily="34" charset="-120"/>
-              </a:rPr>
-              <a:t>32</a:t>
-            </a:r>
-            <a:endParaRPr lang="en-US" sz="1500" dirty="0"/>
-          </a:p>
-        </p:txBody>
-      </p:sp>
-      <p:sp>
-        <p:nvSpPr>
-          <p:cNvPr id="44" name="Text 42"/>
-          <p:cNvSpPr txBox="1"/>
-          <p:nvPr/>
-        </p:nvSpPr>
-        <p:spPr>
-          <a:xfrm>
-            <a:off x="6665976" y="2873045"/>
-            <a:ext cx="1737360" cy="751637"/>
-          </a:xfrm>
-          <a:prstGeom prst="rect">
-            <a:avLst/>
-          </a:prstGeom>
-          <a:noFill/>
-          <a:ln/>
-        </p:spPr>
-        <p:txBody>
-          <a:bodyPr wrap="square" lIns="0" tIns="0" rIns="0" bIns="0" rtlCol="0" anchor="ctr"/>
-          <a:lstStyle/>
-          <a:p>
-            <a:pPr indent="0" marL="0">
-              <a:buNone/>
-            </a:pPr>
-            <a:r>
-              <a:rPr lang="en-US" sz="1400" b="1" dirty="0">
-                <a:solidFill>
-                  <a:srgbClr val="1A1A1A"/>
-                </a:solidFill>
-                <a:latin typeface="Inter" pitchFamily="34" charset="0"/>
-                <a:ea typeface="Inter" pitchFamily="34" charset="-122"/>
-                <a:cs typeface="Inter" pitchFamily="34" charset="-120"/>
-              </a:rPr>
-              <a:t>LR LV</a:t>
-            </a:r>
-            <a:endParaRPr lang="en-US" sz="1400" dirty="0"/>
-          </a:p>
-        </p:txBody>
-      </p:sp>
-      <p:sp>
-        <p:nvSpPr>
-          <p:cNvPr id="45" name="Text 43"/>
-          <p:cNvSpPr txBox="1"/>
-          <p:nvPr/>
-        </p:nvSpPr>
-        <p:spPr>
-          <a:xfrm>
-            <a:off x="8449056" y="2873045"/>
-            <a:ext cx="1920240" cy="751637"/>
-          </a:xfrm>
-          <a:prstGeom prst="rect">
-            <a:avLst/>
-          </a:prstGeom>
-          <a:noFill/>
-          <a:ln/>
-        </p:spPr>
-        <p:txBody>
-          <a:bodyPr wrap="square" lIns="0" tIns="0" rIns="0" bIns="0" rtlCol="0" anchor="ctr"/>
-          <a:lstStyle/>
-          <a:p>
-            <a:pPr indent="0" marL="0">
-              <a:buNone/>
-            </a:pPr>
-            <a:r>
-              <a:rPr lang="en-US" sz="1400" dirty="0">
-                <a:solidFill>
-                  <a:srgbClr val="595959"/>
-                </a:solidFill>
-                <a:latin typeface="Inter" pitchFamily="34" charset="0"/>
-                <a:ea typeface="Inter" pitchFamily="34" charset="-122"/>
-                <a:cs typeface="Inter" pitchFamily="34" charset="-120"/>
-              </a:rPr>
-              <a:t>75.6%  </a:t>
-            </a:r>
-            <a:pPr indent="0" marL="0">
-              <a:buNone/>
-            </a:pPr>
-            <a:r>
-              <a:rPr lang="en-US" sz="1400" b="1" dirty="0">
-                <a:solidFill>
-                  <a:srgbClr val="A82B26"/>
-                </a:solidFill>
-                <a:latin typeface="Inter" pitchFamily="34" charset="0"/>
-                <a:ea typeface="Inter" pitchFamily="34" charset="-122"/>
-                <a:cs typeface="Inter" pitchFamily="34" charset="-120"/>
-              </a:rPr>
-              <a:t>→  </a:t>
-            </a:r>
-            <a:pPr indent="0" marL="0">
-              <a:buNone/>
-            </a:pPr>
-            <a:r>
-              <a:rPr lang="en-US" sz="1400" b="1" dirty="0">
-                <a:solidFill>
-                  <a:srgbClr val="A82B26"/>
-                </a:solidFill>
-                <a:latin typeface="Inter" pitchFamily="34" charset="0"/>
-                <a:ea typeface="Inter" pitchFamily="34" charset="-122"/>
-                <a:cs typeface="Inter" pitchFamily="34" charset="-120"/>
-              </a:rPr>
-              <a:t>70.0%</a:t>
-            </a:r>
-            <a:endParaRPr lang="en-US" sz="1400" dirty="0"/>
-          </a:p>
-        </p:txBody>
-      </p:sp>
-      <p:sp>
-        <p:nvSpPr>
-          <p:cNvPr id="46" name="Text 44"/>
-          <p:cNvSpPr txBox="1"/>
-          <p:nvPr/>
-        </p:nvSpPr>
-        <p:spPr>
-          <a:xfrm>
-            <a:off x="10415016" y="2873045"/>
-            <a:ext cx="1051560" cy="751637"/>
-          </a:xfrm>
-          <a:prstGeom prst="rect">
-            <a:avLst/>
-          </a:prstGeom>
-          <a:noFill/>
-          <a:ln/>
-        </p:spPr>
-        <p:txBody>
-          <a:bodyPr wrap="square" lIns="0" tIns="0" rIns="0" bIns="0" rtlCol="0" anchor="ctr"/>
-          <a:lstStyle/>
-          <a:p>
-            <a:pPr algn="r" indent="0" marL="0">
-              <a:buNone/>
-            </a:pPr>
-            <a:r>
-              <a:rPr lang="en-US" sz="1600" b="1" dirty="0">
-                <a:solidFill>
-                  <a:srgbClr val="A82B26"/>
-                </a:solidFill>
-                <a:latin typeface="Inter" pitchFamily="34" charset="0"/>
-                <a:ea typeface="Inter" pitchFamily="34" charset="-122"/>
-                <a:cs typeface="Inter" pitchFamily="34" charset="-120"/>
-              </a:rPr>
-              <a:t>−5.6 pts</a:t>
-            </a:r>
-            <a:endParaRPr lang="en-US" sz="1600" dirty="0"/>
-          </a:p>
-        </p:txBody>
-      </p:sp>
-      <p:sp>
-        <p:nvSpPr>
-          <p:cNvPr id="47" name="Shape 45"/>
+          <p:cNvPr id="37" name="Shape 35"/>
           <p:cNvSpPr/>
           <p:nvPr/>
         </p:nvSpPr>
         <p:spPr>
           <a:xfrm>
-            <a:off x="6208776" y="3624682"/>
-            <a:ext cx="5321808" cy="751637"/>
+            <a:off x="4349496" y="3613709"/>
+            <a:ext cx="3489960" cy="755294"/>
           </a:xfrm>
           <a:prstGeom prst="rect">
             <a:avLst/>
@@ -17805,14 +17499,14 @@
       </p:sp>
       <p:sp>
         <p:nvSpPr>
-          <p:cNvPr id="48" name="Text 46"/>
-          <p:cNvSpPr txBox="1"/>
-          <p:nvPr/>
-        </p:nvSpPr>
-        <p:spPr>
-          <a:xfrm>
-            <a:off x="6300216" y="3624682"/>
-            <a:ext cx="320040" cy="751637"/>
+          <p:cNvPr id="38" name="Text 36"/>
+          <p:cNvSpPr txBox="1"/>
+          <p:nvPr/>
+        </p:nvSpPr>
+        <p:spPr>
+          <a:xfrm>
+            <a:off x="4440936" y="3613709"/>
+            <a:ext cx="365760" cy="755294"/>
           </a:xfrm>
           <a:prstGeom prst="rect">
             <a:avLst/>
@@ -17844,14 +17538,14 @@
       </p:sp>
       <p:sp>
         <p:nvSpPr>
-          <p:cNvPr id="49" name="Text 47"/>
-          <p:cNvSpPr txBox="1"/>
-          <p:nvPr/>
-        </p:nvSpPr>
-        <p:spPr>
-          <a:xfrm>
-            <a:off x="6665976" y="3624682"/>
-            <a:ext cx="1737360" cy="751637"/>
+          <p:cNvPr id="39" name="Text 37"/>
+          <p:cNvSpPr txBox="1"/>
+          <p:nvPr/>
+        </p:nvSpPr>
+        <p:spPr>
+          <a:xfrm>
+            <a:off x="4788408" y="3613709"/>
+            <a:ext cx="1825752" cy="755294"/>
           </a:xfrm>
           <a:prstGeom prst="rect">
             <a:avLst/>
@@ -17864,6 +17558,9 @@
           <a:lstStyle/>
           <a:p>
             <a:pPr indent="0" marL="0">
+              <a:spcAft>
+                <a:spcPts val="200"/>
+              </a:spcAft>
               <a:buNone/>
             </a:pPr>
             <a:r>
@@ -17879,34 +17576,15 @@
             </a:r>
             <a:endParaRPr lang="en-US" sz="1400" dirty="0"/>
           </a:p>
-        </p:txBody>
-      </p:sp>
-      <p:sp>
-        <p:nvSpPr>
-          <p:cNvPr id="50" name="Text 48"/>
-          <p:cNvSpPr txBox="1"/>
-          <p:nvPr/>
-        </p:nvSpPr>
-        <p:spPr>
-          <a:xfrm>
-            <a:off x="8449056" y="3624682"/>
-            <a:ext cx="1920240" cy="751637"/>
-          </a:xfrm>
-          <a:prstGeom prst="rect">
-            <a:avLst/>
-          </a:prstGeom>
-          <a:noFill/>
-          <a:ln/>
-        </p:spPr>
-        <p:txBody>
-          <a:bodyPr wrap="square" lIns="0" tIns="0" rIns="0" bIns="0" rtlCol="0" anchor="ctr"/>
-          <a:lstStyle/>
           <a:p>
             <a:pPr indent="0" marL="0">
-              <a:buNone/>
-            </a:pPr>
-            <a:r>
-              <a:rPr lang="en-US" sz="1400" dirty="0">
+              <a:spcAft>
+                <a:spcPts val="200"/>
+              </a:spcAft>
+              <a:buNone/>
+            </a:pPr>
+            <a:r>
+              <a:rPr lang="en-US" sz="1200" dirty="0">
                 <a:solidFill>
                   <a:srgbClr val="595959"/>
                 </a:solidFill>
@@ -17914,27 +17592,212 @@
                 <a:ea typeface="Inter" pitchFamily="34" charset="-122"/>
                 <a:cs typeface="Inter" pitchFamily="34" charset="-120"/>
               </a:rPr>
-              <a:t>85.1%  </a:t>
+              <a:t>85.1%  →  </a:t>
             </a:r>
             <a:pPr indent="0" marL="0">
+              <a:spcAft>
+                <a:spcPts val="200"/>
+              </a:spcAft>
+              <a:buNone/>
+            </a:pPr>
+            <a:r>
+              <a:rPr lang="en-US" sz="1200" b="1" dirty="0">
+                <a:solidFill>
+                  <a:srgbClr val="A82B26"/>
+                </a:solidFill>
+                <a:latin typeface="Inter" pitchFamily="34" charset="0"/>
+                <a:ea typeface="Inter" pitchFamily="34" charset="-122"/>
+                <a:cs typeface="Inter" pitchFamily="34" charset="-120"/>
+              </a:rPr>
+              <a:t>79.7%</a:t>
+            </a:r>
+            <a:endParaRPr lang="en-US" sz="1400" dirty="0"/>
+          </a:p>
+        </p:txBody>
+      </p:sp>
+      <p:sp>
+        <p:nvSpPr>
+          <p:cNvPr id="40" name="Text 38"/>
+          <p:cNvSpPr txBox="1"/>
+          <p:nvPr/>
+        </p:nvSpPr>
+        <p:spPr>
+          <a:xfrm>
+            <a:off x="6632448" y="3613709"/>
+            <a:ext cx="1115568" cy="755294"/>
+          </a:xfrm>
+          <a:prstGeom prst="rect">
+            <a:avLst/>
+          </a:prstGeom>
+          <a:noFill/>
+          <a:ln/>
+        </p:spPr>
+        <p:txBody>
+          <a:bodyPr wrap="square" lIns="0" tIns="0" rIns="0" bIns="0" rtlCol="0" anchor="ctr"/>
+          <a:lstStyle/>
+          <a:p>
+            <a:pPr algn="r" indent="0" marL="0">
+              <a:buNone/>
+            </a:pPr>
+            <a:r>
+              <a:rPr lang="en-US" sz="1600" b="1" dirty="0">
+                <a:solidFill>
+                  <a:srgbClr val="A82B26"/>
+                </a:solidFill>
+                <a:latin typeface="Inter" pitchFamily="34" charset="0"/>
+                <a:ea typeface="Inter" pitchFamily="34" charset="-122"/>
+                <a:cs typeface="Inter" pitchFamily="34" charset="-120"/>
+              </a:rPr>
+              <a:t>−5.3 pts</a:t>
+            </a:r>
+            <a:endParaRPr lang="en-US" sz="1600" dirty="0"/>
+          </a:p>
+        </p:txBody>
+      </p:sp>
+      <p:sp>
+        <p:nvSpPr>
+          <p:cNvPr id="41" name="Text 39"/>
+          <p:cNvSpPr txBox="1"/>
+          <p:nvPr/>
+        </p:nvSpPr>
+        <p:spPr>
+          <a:xfrm>
+            <a:off x="4440936" y="4369003"/>
+            <a:ext cx="365760" cy="755294"/>
+          </a:xfrm>
+          <a:prstGeom prst="rect">
+            <a:avLst/>
+          </a:prstGeom>
+          <a:noFill/>
+          <a:ln/>
+        </p:spPr>
+        <p:txBody>
+          <a:bodyPr wrap="square" lIns="0" tIns="0" rIns="0" bIns="0" rtlCol="0" anchor="ctr"/>
+          <a:lstStyle/>
+          <a:p>
+            <a:pPr indent="0" marL="0">
+              <a:buNone/>
+            </a:pPr>
+            <a:r>
+              <a:rPr lang="en-US" sz="1500" b="1" dirty="0">
+                <a:solidFill>
+                  <a:srgbClr val="0B2C4A"/>
+                </a:solidFill>
+                <a:latin typeface="Inter" pitchFamily="34" charset="0"/>
+                <a:ea typeface="Inter" pitchFamily="34" charset="-122"/>
+                <a:cs typeface="Inter" pitchFamily="34" charset="-120"/>
+              </a:rPr>
+              <a:t>30</a:t>
+            </a:r>
+            <a:endParaRPr lang="en-US" sz="1500" dirty="0"/>
+          </a:p>
+        </p:txBody>
+      </p:sp>
+      <p:sp>
+        <p:nvSpPr>
+          <p:cNvPr id="42" name="Text 40"/>
+          <p:cNvSpPr txBox="1"/>
+          <p:nvPr/>
+        </p:nvSpPr>
+        <p:spPr>
+          <a:xfrm>
+            <a:off x="4788408" y="4369003"/>
+            <a:ext cx="1825752" cy="755294"/>
+          </a:xfrm>
+          <a:prstGeom prst="rect">
+            <a:avLst/>
+          </a:prstGeom>
+          <a:noFill/>
+          <a:ln/>
+        </p:spPr>
+        <p:txBody>
+          <a:bodyPr wrap="square" lIns="0" tIns="0" rIns="0" bIns="0" rtlCol="0" anchor="ctr"/>
+          <a:lstStyle/>
+          <a:p>
+            <a:pPr indent="0" marL="0">
+              <a:spcAft>
+                <a:spcPts val="200"/>
+              </a:spcAft>
               <a:buNone/>
             </a:pPr>
             <a:r>
               <a:rPr lang="en-US" sz="1400" b="1" dirty="0">
                 <a:solidFill>
+                  <a:srgbClr val="1A1A1A"/>
+                </a:solidFill>
+                <a:latin typeface="Inter" pitchFamily="34" charset="0"/>
+                <a:ea typeface="Inter" pitchFamily="34" charset="-122"/>
+                <a:cs typeface="Inter" pitchFamily="34" charset="-120"/>
+              </a:rPr>
+              <a:t>Subaru Prescott</a:t>
+            </a:r>
+            <a:endParaRPr lang="en-US" sz="1400" dirty="0"/>
+          </a:p>
+          <a:p>
+            <a:pPr indent="0" marL="0">
+              <a:spcAft>
+                <a:spcPts val="200"/>
+              </a:spcAft>
+              <a:buNone/>
+            </a:pPr>
+            <a:r>
+              <a:rPr lang="en-US" sz="1200" dirty="0">
+                <a:solidFill>
+                  <a:srgbClr val="595959"/>
+                </a:solidFill>
+                <a:latin typeface="Inter" pitchFamily="34" charset="0"/>
+                <a:ea typeface="Inter" pitchFamily="34" charset="-122"/>
+                <a:cs typeface="Inter" pitchFamily="34" charset="-120"/>
+              </a:rPr>
+              <a:t>78.4%  →  </a:t>
+            </a:r>
+            <a:pPr indent="0" marL="0">
+              <a:spcAft>
+                <a:spcPts val="200"/>
+              </a:spcAft>
+              <a:buNone/>
+            </a:pPr>
+            <a:r>
+              <a:rPr lang="en-US" sz="1200" b="1" dirty="0">
+                <a:solidFill>
                   <a:srgbClr val="A82B26"/>
                 </a:solidFill>
                 <a:latin typeface="Inter" pitchFamily="34" charset="0"/>
                 <a:ea typeface="Inter" pitchFamily="34" charset="-122"/>
                 <a:cs typeface="Inter" pitchFamily="34" charset="-120"/>
               </a:rPr>
-              <a:t>→  </a:t>
-            </a:r>
-            <a:pPr indent="0" marL="0">
-              <a:buNone/>
-            </a:pPr>
-            <a:r>
-              <a:rPr lang="en-US" sz="1400" b="1" dirty="0">
+              <a:t>73.8%</a:t>
+            </a:r>
+            <a:endParaRPr lang="en-US" sz="1400" dirty="0"/>
+          </a:p>
+        </p:txBody>
+      </p:sp>
+      <p:sp>
+        <p:nvSpPr>
+          <p:cNvPr id="43" name="Text 41"/>
+          <p:cNvSpPr txBox="1"/>
+          <p:nvPr/>
+        </p:nvSpPr>
+        <p:spPr>
+          <a:xfrm>
+            <a:off x="6632448" y="4369003"/>
+            <a:ext cx="1115568" cy="755294"/>
+          </a:xfrm>
+          <a:prstGeom prst="rect">
+            <a:avLst/>
+          </a:prstGeom>
+          <a:noFill/>
+          <a:ln/>
+        </p:spPr>
+        <p:txBody>
+          <a:bodyPr wrap="square" lIns="0" tIns="0" rIns="0" bIns="0" rtlCol="0" anchor="ctr"/>
+          <a:lstStyle/>
+          <a:p>
+            <a:pPr algn="r" indent="0" marL="0">
+              <a:buNone/>
+            </a:pPr>
+            <a:r>
+              <a:rPr lang="en-US" sz="1600" b="1" dirty="0">
                 <a:solidFill>
                   <a:srgbClr val="A82B26"/>
                 </a:solidFill>
@@ -17942,46 +17805,7 @@
                 <a:ea typeface="Inter" pitchFamily="34" charset="-122"/>
                 <a:cs typeface="Inter" pitchFamily="34" charset="-120"/>
               </a:rPr>
-              <a:t>79.7%</a:t>
-            </a:r>
-            <a:endParaRPr lang="en-US" sz="1400" dirty="0"/>
-          </a:p>
-        </p:txBody>
-      </p:sp>
-      <p:sp>
-        <p:nvSpPr>
-          <p:cNvPr id="51" name="Text 49"/>
-          <p:cNvSpPr txBox="1"/>
-          <p:nvPr/>
-        </p:nvSpPr>
-        <p:spPr>
-          <a:xfrm>
-            <a:off x="10415016" y="3624682"/>
-            <a:ext cx="1051560" cy="751637"/>
-          </a:xfrm>
-          <a:prstGeom prst="rect">
-            <a:avLst/>
-          </a:prstGeom>
-          <a:noFill/>
-          <a:ln/>
-        </p:spPr>
-        <p:txBody>
-          <a:bodyPr wrap="square" lIns="0" tIns="0" rIns="0" bIns="0" rtlCol="0" anchor="ctr"/>
-          <a:lstStyle/>
-          <a:p>
-            <a:pPr algn="r" indent="0" marL="0">
-              <a:buNone/>
-            </a:pPr>
-            <a:r>
-              <a:rPr lang="en-US" sz="1600" b="1" dirty="0">
-                <a:solidFill>
-                  <a:srgbClr val="A82B26"/>
-                </a:solidFill>
-                <a:latin typeface="Inter" pitchFamily="34" charset="0"/>
-                <a:ea typeface="Inter" pitchFamily="34" charset="-122"/>
-                <a:cs typeface="Inter" pitchFamily="34" charset="-120"/>
-              </a:rPr>
-              <a:t>−5.3 pts</a:t>
+              <a:t>−4.6 pts</a:t>
             </a:r>
             <a:endParaRPr lang="en-US" sz="1600" dirty="0"/>
           </a:p>
@@ -17989,198 +17813,14 @@
       </p:sp>
       <p:sp>
         <p:nvSpPr>
-          <p:cNvPr id="52" name="Text 50"/>
-          <p:cNvSpPr txBox="1"/>
-          <p:nvPr/>
-        </p:nvSpPr>
-        <p:spPr>
-          <a:xfrm>
-            <a:off x="6300216" y="4376318"/>
-            <a:ext cx="320040" cy="751637"/>
-          </a:xfrm>
-          <a:prstGeom prst="rect">
-            <a:avLst/>
-          </a:prstGeom>
-          <a:noFill/>
-          <a:ln/>
-        </p:spPr>
-        <p:txBody>
-          <a:bodyPr wrap="square" lIns="0" tIns="0" rIns="0" bIns="0" rtlCol="0" anchor="ctr"/>
-          <a:lstStyle/>
-          <a:p>
-            <a:pPr indent="0" marL="0">
-              <a:buNone/>
-            </a:pPr>
-            <a:r>
-              <a:rPr lang="en-US" sz="1500" b="1" dirty="0">
-                <a:solidFill>
-                  <a:srgbClr val="0B2C4A"/>
-                </a:solidFill>
-                <a:latin typeface="Inter" pitchFamily="34" charset="0"/>
-                <a:ea typeface="Inter" pitchFamily="34" charset="-122"/>
-                <a:cs typeface="Inter" pitchFamily="34" charset="-120"/>
-              </a:rPr>
-              <a:t>30</a:t>
-            </a:r>
-            <a:endParaRPr lang="en-US" sz="1500" dirty="0"/>
-          </a:p>
-        </p:txBody>
-      </p:sp>
-      <p:sp>
-        <p:nvSpPr>
-          <p:cNvPr id="53" name="Text 51"/>
-          <p:cNvSpPr txBox="1"/>
-          <p:nvPr/>
-        </p:nvSpPr>
-        <p:spPr>
-          <a:xfrm>
-            <a:off x="6665976" y="4376318"/>
-            <a:ext cx="1737360" cy="751637"/>
-          </a:xfrm>
-          <a:prstGeom prst="rect">
-            <a:avLst/>
-          </a:prstGeom>
-          <a:noFill/>
-          <a:ln/>
-        </p:spPr>
-        <p:txBody>
-          <a:bodyPr wrap="square" lIns="0" tIns="0" rIns="0" bIns="0" rtlCol="0" anchor="ctr"/>
-          <a:lstStyle/>
-          <a:p>
-            <a:pPr indent="0" marL="0">
-              <a:buNone/>
-            </a:pPr>
-            <a:r>
-              <a:rPr lang="en-US" sz="1400" b="1" dirty="0">
-                <a:solidFill>
-                  <a:srgbClr val="1A1A1A"/>
-                </a:solidFill>
-                <a:latin typeface="Inter" pitchFamily="34" charset="0"/>
-                <a:ea typeface="Inter" pitchFamily="34" charset="-122"/>
-                <a:cs typeface="Inter" pitchFamily="34" charset="-120"/>
-              </a:rPr>
-              <a:t>Subaru Prescott</a:t>
-            </a:r>
-            <a:endParaRPr lang="en-US" sz="1400" dirty="0"/>
-          </a:p>
-        </p:txBody>
-      </p:sp>
-      <p:sp>
-        <p:nvSpPr>
-          <p:cNvPr id="54" name="Text 52"/>
-          <p:cNvSpPr txBox="1"/>
-          <p:nvPr/>
-        </p:nvSpPr>
-        <p:spPr>
-          <a:xfrm>
-            <a:off x="8449056" y="4376318"/>
-            <a:ext cx="1920240" cy="751637"/>
-          </a:xfrm>
-          <a:prstGeom prst="rect">
-            <a:avLst/>
-          </a:prstGeom>
-          <a:noFill/>
-          <a:ln/>
-        </p:spPr>
-        <p:txBody>
-          <a:bodyPr wrap="square" lIns="0" tIns="0" rIns="0" bIns="0" rtlCol="0" anchor="ctr"/>
-          <a:lstStyle/>
-          <a:p>
-            <a:pPr indent="0" marL="0">
-              <a:buNone/>
-            </a:pPr>
-            <a:r>
-              <a:rPr lang="en-US" sz="1400" dirty="0">
-                <a:solidFill>
-                  <a:srgbClr val="595959"/>
-                </a:solidFill>
-                <a:latin typeface="Inter" pitchFamily="34" charset="0"/>
-                <a:ea typeface="Inter" pitchFamily="34" charset="-122"/>
-                <a:cs typeface="Inter" pitchFamily="34" charset="-120"/>
-              </a:rPr>
-              <a:t>78.4%  </a:t>
-            </a:r>
-            <a:pPr indent="0" marL="0">
-              <a:buNone/>
-            </a:pPr>
-            <a:r>
-              <a:rPr lang="en-US" sz="1400" b="1" dirty="0">
-                <a:solidFill>
-                  <a:srgbClr val="A82B26"/>
-                </a:solidFill>
-                <a:latin typeface="Inter" pitchFamily="34" charset="0"/>
-                <a:ea typeface="Inter" pitchFamily="34" charset="-122"/>
-                <a:cs typeface="Inter" pitchFamily="34" charset="-120"/>
-              </a:rPr>
-              <a:t>→  </a:t>
-            </a:r>
-            <a:pPr indent="0" marL="0">
-              <a:buNone/>
-            </a:pPr>
-            <a:r>
-              <a:rPr lang="en-US" sz="1400" b="1" dirty="0">
-                <a:solidFill>
-                  <a:srgbClr val="A82B26"/>
-                </a:solidFill>
-                <a:latin typeface="Inter" pitchFamily="34" charset="0"/>
-                <a:ea typeface="Inter" pitchFamily="34" charset="-122"/>
-                <a:cs typeface="Inter" pitchFamily="34" charset="-120"/>
-              </a:rPr>
-              <a:t>73.8%</a:t>
-            </a:r>
-            <a:endParaRPr lang="en-US" sz="1400" dirty="0"/>
-          </a:p>
-        </p:txBody>
-      </p:sp>
-      <p:sp>
-        <p:nvSpPr>
-          <p:cNvPr id="55" name="Text 53"/>
-          <p:cNvSpPr txBox="1"/>
-          <p:nvPr/>
-        </p:nvSpPr>
-        <p:spPr>
-          <a:xfrm>
-            <a:off x="10415016" y="4376318"/>
-            <a:ext cx="1051560" cy="751637"/>
-          </a:xfrm>
-          <a:prstGeom prst="rect">
-            <a:avLst/>
-          </a:prstGeom>
-          <a:noFill/>
-          <a:ln/>
-        </p:spPr>
-        <p:txBody>
-          <a:bodyPr wrap="square" lIns="0" tIns="0" rIns="0" bIns="0" rtlCol="0" anchor="ctr"/>
-          <a:lstStyle/>
-          <a:p>
-            <a:pPr algn="r" indent="0" marL="0">
-              <a:buNone/>
-            </a:pPr>
-            <a:r>
-              <a:rPr lang="en-US" sz="1600" b="1" dirty="0">
-                <a:solidFill>
-                  <a:srgbClr val="A82B26"/>
-                </a:solidFill>
-                <a:latin typeface="Inter" pitchFamily="34" charset="0"/>
-                <a:ea typeface="Inter" pitchFamily="34" charset="-122"/>
-                <a:cs typeface="Inter" pitchFamily="34" charset="-120"/>
-              </a:rPr>
-              <a:t>−4.6 pts</a:t>
-            </a:r>
-            <a:endParaRPr lang="en-US" sz="1600" dirty="0"/>
-          </a:p>
-        </p:txBody>
-      </p:sp>
-      <p:sp>
-        <p:nvSpPr>
-          <p:cNvPr id="56" name="Shape 54"/>
+          <p:cNvPr id="44" name="Shape 42"/>
           <p:cNvSpPr/>
           <p:nvPr/>
         </p:nvSpPr>
         <p:spPr>
           <a:xfrm>
-            <a:off x="6208776" y="5127955"/>
-            <a:ext cx="5321808" cy="751637"/>
+            <a:off x="4349496" y="5124298"/>
+            <a:ext cx="3489960" cy="755294"/>
           </a:xfrm>
           <a:prstGeom prst="rect">
             <a:avLst/>
@@ -18193,14 +17833,623 @@
       </p:sp>
       <p:sp>
         <p:nvSpPr>
+          <p:cNvPr id="45" name="Text 43"/>
+          <p:cNvSpPr txBox="1"/>
+          <p:nvPr/>
+        </p:nvSpPr>
+        <p:spPr>
+          <a:xfrm>
+            <a:off x="4440936" y="5124298"/>
+            <a:ext cx="365760" cy="755294"/>
+          </a:xfrm>
+          <a:prstGeom prst="rect">
+            <a:avLst/>
+          </a:prstGeom>
+          <a:noFill/>
+          <a:ln/>
+        </p:spPr>
+        <p:txBody>
+          <a:bodyPr wrap="square" lIns="0" tIns="0" rIns="0" bIns="0" rtlCol="0" anchor="ctr"/>
+          <a:lstStyle/>
+          <a:p>
+            <a:pPr indent="0" marL="0">
+              <a:buNone/>
+            </a:pPr>
+            <a:r>
+              <a:rPr lang="en-US" sz="1500" b="1" dirty="0">
+                <a:solidFill>
+                  <a:srgbClr val="0B2C4A"/>
+                </a:solidFill>
+                <a:latin typeface="Inter" pitchFamily="34" charset="0"/>
+                <a:ea typeface="Inter" pitchFamily="34" charset="-122"/>
+                <a:cs typeface="Inter" pitchFamily="34" charset="-120"/>
+              </a:rPr>
+              <a:t>29</a:t>
+            </a:r>
+            <a:endParaRPr lang="en-US" sz="1500" dirty="0"/>
+          </a:p>
+        </p:txBody>
+      </p:sp>
+      <p:sp>
+        <p:nvSpPr>
+          <p:cNvPr id="46" name="Text 44"/>
+          <p:cNvSpPr txBox="1"/>
+          <p:nvPr/>
+        </p:nvSpPr>
+        <p:spPr>
+          <a:xfrm>
+            <a:off x="4788408" y="5124298"/>
+            <a:ext cx="1825752" cy="755294"/>
+          </a:xfrm>
+          <a:prstGeom prst="rect">
+            <a:avLst/>
+          </a:prstGeom>
+          <a:noFill/>
+          <a:ln/>
+        </p:spPr>
+        <p:txBody>
+          <a:bodyPr wrap="square" lIns="0" tIns="0" rIns="0" bIns="0" rtlCol="0" anchor="ctr"/>
+          <a:lstStyle/>
+          <a:p>
+            <a:pPr indent="0" marL="0">
+              <a:spcAft>
+                <a:spcPts val="200"/>
+              </a:spcAft>
+              <a:buNone/>
+            </a:pPr>
+            <a:r>
+              <a:rPr lang="en-US" sz="1400" b="1" dirty="0">
+                <a:solidFill>
+                  <a:srgbClr val="1A1A1A"/>
+                </a:solidFill>
+                <a:latin typeface="Inter" pitchFamily="34" charset="0"/>
+                <a:ea typeface="Inter" pitchFamily="34" charset="-122"/>
+                <a:cs typeface="Inter" pitchFamily="34" charset="-120"/>
+              </a:rPr>
+              <a:t>Hyundai Prescott</a:t>
+            </a:r>
+            <a:endParaRPr lang="en-US" sz="1400" dirty="0"/>
+          </a:p>
+          <a:p>
+            <a:pPr indent="0" marL="0">
+              <a:spcAft>
+                <a:spcPts val="200"/>
+              </a:spcAft>
+              <a:buNone/>
+            </a:pPr>
+            <a:r>
+              <a:rPr lang="en-US" sz="1200" dirty="0">
+                <a:solidFill>
+                  <a:srgbClr val="595959"/>
+                </a:solidFill>
+                <a:latin typeface="Inter" pitchFamily="34" charset="0"/>
+                <a:ea typeface="Inter" pitchFamily="34" charset="-122"/>
+                <a:cs typeface="Inter" pitchFamily="34" charset="-120"/>
+              </a:rPr>
+              <a:t>76.9%  →  </a:t>
+            </a:r>
+            <a:pPr indent="0" marL="0">
+              <a:spcAft>
+                <a:spcPts val="200"/>
+              </a:spcAft>
+              <a:buNone/>
+            </a:pPr>
+            <a:r>
+              <a:rPr lang="en-US" sz="1200" b="1" dirty="0">
+                <a:solidFill>
+                  <a:srgbClr val="A82B26"/>
+                </a:solidFill>
+                <a:latin typeface="Inter" pitchFamily="34" charset="0"/>
+                <a:ea typeface="Inter" pitchFamily="34" charset="-122"/>
+                <a:cs typeface="Inter" pitchFamily="34" charset="-120"/>
+              </a:rPr>
+              <a:t>72.5%</a:t>
+            </a:r>
+            <a:endParaRPr lang="en-US" sz="1400" dirty="0"/>
+          </a:p>
+        </p:txBody>
+      </p:sp>
+      <p:sp>
+        <p:nvSpPr>
+          <p:cNvPr id="47" name="Text 45"/>
+          <p:cNvSpPr txBox="1"/>
+          <p:nvPr/>
+        </p:nvSpPr>
+        <p:spPr>
+          <a:xfrm>
+            <a:off x="6632448" y="5124298"/>
+            <a:ext cx="1115568" cy="755294"/>
+          </a:xfrm>
+          <a:prstGeom prst="rect">
+            <a:avLst/>
+          </a:prstGeom>
+          <a:noFill/>
+          <a:ln/>
+        </p:spPr>
+        <p:txBody>
+          <a:bodyPr wrap="square" lIns="0" tIns="0" rIns="0" bIns="0" rtlCol="0" anchor="ctr"/>
+          <a:lstStyle/>
+          <a:p>
+            <a:pPr algn="r" indent="0" marL="0">
+              <a:buNone/>
+            </a:pPr>
+            <a:r>
+              <a:rPr lang="en-US" sz="1600" b="1" dirty="0">
+                <a:solidFill>
+                  <a:srgbClr val="A82B26"/>
+                </a:solidFill>
+                <a:latin typeface="Inter" pitchFamily="34" charset="0"/>
+                <a:ea typeface="Inter" pitchFamily="34" charset="-122"/>
+                <a:cs typeface="Inter" pitchFamily="34" charset="-120"/>
+              </a:rPr>
+              <a:t>−4.3 pts</a:t>
+            </a:r>
+            <a:endParaRPr lang="en-US" sz="1600" dirty="0"/>
+          </a:p>
+        </p:txBody>
+      </p:sp>
+      <p:sp>
+        <p:nvSpPr>
+          <p:cNvPr id="48" name="Shape 46"/>
+          <p:cNvSpPr/>
+          <p:nvPr/>
+        </p:nvSpPr>
+        <p:spPr>
+          <a:xfrm>
+            <a:off x="8040624" y="1371600"/>
+            <a:ext cx="3489960" cy="45720"/>
+          </a:xfrm>
+          <a:prstGeom prst="rect">
+            <a:avLst/>
+          </a:prstGeom>
+          <a:solidFill>
+            <a:srgbClr val="2587C5"/>
+          </a:solidFill>
+          <a:ln/>
+        </p:spPr>
+      </p:sp>
+      <p:sp>
+        <p:nvSpPr>
+          <p:cNvPr id="49" name="Text 47"/>
+          <p:cNvSpPr txBox="1"/>
+          <p:nvPr/>
+        </p:nvSpPr>
+        <p:spPr>
+          <a:xfrm>
+            <a:off x="8132064" y="1444752"/>
+            <a:ext cx="3307080" cy="274320"/>
+          </a:xfrm>
+          <a:prstGeom prst="rect">
+            <a:avLst/>
+          </a:prstGeom>
+          <a:noFill/>
+          <a:ln/>
+        </p:spPr>
+        <p:txBody>
+          <a:bodyPr wrap="square" lIns="0" tIns="0" rIns="0" bIns="0" rtlCol="0" anchor="ctr"/>
+          <a:lstStyle/>
+          <a:p>
+            <a:pPr indent="0" marL="0">
+              <a:buNone/>
+            </a:pPr>
+            <a:r>
+              <a:rPr lang="en-US" sz="1500" b="1" spc="100" kern="0" dirty="0">
+                <a:solidFill>
+                  <a:srgbClr val="0B2C4A"/>
+                </a:solidFill>
+                <a:latin typeface="Inter" pitchFamily="34" charset="0"/>
+                <a:ea typeface="Inter" pitchFamily="34" charset="-122"/>
+                <a:cs typeface="Inter" pitchFamily="34" charset="-120"/>
+              </a:rPr>
+              <a:t>TOP 5 MOVING NOW</a:t>
+            </a:r>
+            <a:endParaRPr lang="en-US" sz="1500" dirty="0"/>
+          </a:p>
+        </p:txBody>
+      </p:sp>
+      <p:sp>
+        <p:nvSpPr>
+          <p:cNvPr id="50" name="Text 48"/>
+          <p:cNvSpPr txBox="1"/>
+          <p:nvPr/>
+        </p:nvSpPr>
+        <p:spPr>
+          <a:xfrm>
+            <a:off x="8132064" y="1737360"/>
+            <a:ext cx="3307080" cy="274320"/>
+          </a:xfrm>
+          <a:prstGeom prst="rect">
+            <a:avLst/>
+          </a:prstGeom>
+          <a:noFill/>
+          <a:ln/>
+        </p:spPr>
+        <p:txBody>
+          <a:bodyPr wrap="square" lIns="0" tIns="0" rIns="0" bIns="0" rtlCol="0" anchor="ctr"/>
+          <a:lstStyle/>
+          <a:p>
+            <a:pPr indent="0" marL="0">
+              <a:buNone/>
+            </a:pPr>
+            <a:r>
+              <a:rPr lang="en-US" sz="1200" dirty="0">
+                <a:solidFill>
+                  <a:srgbClr val="595959"/>
+                </a:solidFill>
+                <a:latin typeface="Inter" pitchFamily="34" charset="0"/>
+                <a:ea typeface="Inter" pitchFamily="34" charset="-122"/>
+                <a:cs typeface="Inter" pitchFamily="34" charset="-120"/>
+              </a:rPr>
+              <a:t>Jul–Sep vs Jan–Mar 2026</a:t>
+            </a:r>
+            <a:endParaRPr lang="en-US" sz="1200" dirty="0"/>
+          </a:p>
+        </p:txBody>
+      </p:sp>
+      <p:sp>
+        <p:nvSpPr>
+          <p:cNvPr id="51" name="Shape 49"/>
+          <p:cNvSpPr/>
+          <p:nvPr/>
+        </p:nvSpPr>
+        <p:spPr>
+          <a:xfrm>
+            <a:off x="8040624" y="2103120"/>
+            <a:ext cx="3489960" cy="755294"/>
+          </a:xfrm>
+          <a:prstGeom prst="rect">
+            <a:avLst/>
+          </a:prstGeom>
+          <a:solidFill>
+            <a:srgbClr val="F7F7F7"/>
+          </a:solidFill>
+          <a:ln/>
+        </p:spPr>
+      </p:sp>
+      <p:sp>
+        <p:nvSpPr>
+          <p:cNvPr id="52" name="Text 50"/>
+          <p:cNvSpPr txBox="1"/>
+          <p:nvPr/>
+        </p:nvSpPr>
+        <p:spPr>
+          <a:xfrm>
+            <a:off x="8132064" y="2103120"/>
+            <a:ext cx="365760" cy="755294"/>
+          </a:xfrm>
+          <a:prstGeom prst="rect">
+            <a:avLst/>
+          </a:prstGeom>
+          <a:noFill/>
+          <a:ln/>
+        </p:spPr>
+        <p:txBody>
+          <a:bodyPr wrap="square" lIns="0" tIns="0" rIns="0" bIns="0" rtlCol="0" anchor="ctr"/>
+          <a:lstStyle/>
+          <a:p>
+            <a:pPr indent="0" marL="0">
+              <a:buNone/>
+            </a:pPr>
+            <a:r>
+              <a:rPr lang="en-US" sz="1500" b="1" dirty="0">
+                <a:solidFill>
+                  <a:srgbClr val="0B2C4A"/>
+                </a:solidFill>
+                <a:latin typeface="Inter" pitchFamily="34" charset="0"/>
+                <a:ea typeface="Inter" pitchFamily="34" charset="-122"/>
+                <a:cs typeface="Inter" pitchFamily="34" charset="-120"/>
+              </a:rPr>
+              <a:t>1</a:t>
+            </a:r>
+            <a:endParaRPr lang="en-US" sz="1500" dirty="0"/>
+          </a:p>
+        </p:txBody>
+      </p:sp>
+      <p:sp>
+        <p:nvSpPr>
+          <p:cNvPr id="53" name="Text 51"/>
+          <p:cNvSpPr txBox="1"/>
+          <p:nvPr/>
+        </p:nvSpPr>
+        <p:spPr>
+          <a:xfrm>
+            <a:off x="8479536" y="2103120"/>
+            <a:ext cx="1825752" cy="755294"/>
+          </a:xfrm>
+          <a:prstGeom prst="rect">
+            <a:avLst/>
+          </a:prstGeom>
+          <a:noFill/>
+          <a:ln/>
+        </p:spPr>
+        <p:txBody>
+          <a:bodyPr wrap="square" lIns="0" tIns="0" rIns="0" bIns="0" rtlCol="0" anchor="ctr"/>
+          <a:lstStyle/>
+          <a:p>
+            <a:pPr indent="0" marL="0">
+              <a:spcAft>
+                <a:spcPts val="200"/>
+              </a:spcAft>
+              <a:buNone/>
+            </a:pPr>
+            <a:r>
+              <a:rPr lang="en-US" sz="1400" b="1" dirty="0">
+                <a:solidFill>
+                  <a:srgbClr val="1A1A1A"/>
+                </a:solidFill>
+                <a:latin typeface="Inter" pitchFamily="34" charset="0"/>
+                <a:ea typeface="Inter" pitchFamily="34" charset="-122"/>
+                <a:cs typeface="Inter" pitchFamily="34" charset="-120"/>
+              </a:rPr>
+              <a:t>LR Henderson</a:t>
+            </a:r>
+            <a:endParaRPr lang="en-US" sz="1400" dirty="0"/>
+          </a:p>
+          <a:p>
+            <a:pPr indent="0" marL="0">
+              <a:spcAft>
+                <a:spcPts val="200"/>
+              </a:spcAft>
+              <a:buNone/>
+            </a:pPr>
+            <a:r>
+              <a:rPr lang="en-US" sz="1200" dirty="0">
+                <a:solidFill>
+                  <a:srgbClr val="595959"/>
+                </a:solidFill>
+                <a:latin typeface="Inter" pitchFamily="34" charset="0"/>
+                <a:ea typeface="Inter" pitchFamily="34" charset="-122"/>
+                <a:cs typeface="Inter" pitchFamily="34" charset="-120"/>
+              </a:rPr>
+              <a:t>66.2%  →  </a:t>
+            </a:r>
+            <a:pPr indent="0" marL="0">
+              <a:spcAft>
+                <a:spcPts val="200"/>
+              </a:spcAft>
+              <a:buNone/>
+            </a:pPr>
+            <a:r>
+              <a:rPr lang="en-US" sz="1200" b="1" dirty="0">
+                <a:solidFill>
+                  <a:srgbClr val="0B7A4A"/>
+                </a:solidFill>
+                <a:latin typeface="Inter" pitchFamily="34" charset="0"/>
+                <a:ea typeface="Inter" pitchFamily="34" charset="-122"/>
+                <a:cs typeface="Inter" pitchFamily="34" charset="-120"/>
+              </a:rPr>
+              <a:t>72.6%</a:t>
+            </a:r>
+            <a:endParaRPr lang="en-US" sz="1400" dirty="0"/>
+          </a:p>
+        </p:txBody>
+      </p:sp>
+      <p:sp>
+        <p:nvSpPr>
+          <p:cNvPr id="54" name="Text 52"/>
+          <p:cNvSpPr txBox="1"/>
+          <p:nvPr/>
+        </p:nvSpPr>
+        <p:spPr>
+          <a:xfrm>
+            <a:off x="10323576" y="2103120"/>
+            <a:ext cx="1115568" cy="755294"/>
+          </a:xfrm>
+          <a:prstGeom prst="rect">
+            <a:avLst/>
+          </a:prstGeom>
+          <a:noFill/>
+          <a:ln/>
+        </p:spPr>
+        <p:txBody>
+          <a:bodyPr wrap="square" lIns="0" tIns="0" rIns="0" bIns="0" rtlCol="0" anchor="ctr"/>
+          <a:lstStyle/>
+          <a:p>
+            <a:pPr algn="r" indent="0" marL="0">
+              <a:buNone/>
+            </a:pPr>
+            <a:r>
+              <a:rPr lang="en-US" sz="1600" b="1" dirty="0">
+                <a:solidFill>
+                  <a:srgbClr val="0B7A4A"/>
+                </a:solidFill>
+                <a:latin typeface="Inter" pitchFamily="34" charset="0"/>
+                <a:ea typeface="Inter" pitchFamily="34" charset="-122"/>
+                <a:cs typeface="Inter" pitchFamily="34" charset="-120"/>
+              </a:rPr>
+              <a:t>+6.4 pts</a:t>
+            </a:r>
+            <a:endParaRPr lang="en-US" sz="1600" dirty="0"/>
+          </a:p>
+        </p:txBody>
+      </p:sp>
+      <p:sp>
+        <p:nvSpPr>
+          <p:cNvPr id="55" name="Text 53"/>
+          <p:cNvSpPr txBox="1"/>
+          <p:nvPr/>
+        </p:nvSpPr>
+        <p:spPr>
+          <a:xfrm>
+            <a:off x="8132064" y="2858414"/>
+            <a:ext cx="365760" cy="755294"/>
+          </a:xfrm>
+          <a:prstGeom prst="rect">
+            <a:avLst/>
+          </a:prstGeom>
+          <a:noFill/>
+          <a:ln/>
+        </p:spPr>
+        <p:txBody>
+          <a:bodyPr wrap="square" lIns="0" tIns="0" rIns="0" bIns="0" rtlCol="0" anchor="ctr"/>
+          <a:lstStyle/>
+          <a:p>
+            <a:pPr indent="0" marL="0">
+              <a:buNone/>
+            </a:pPr>
+            <a:r>
+              <a:rPr lang="en-US" sz="1500" b="1" dirty="0">
+                <a:solidFill>
+                  <a:srgbClr val="0B2C4A"/>
+                </a:solidFill>
+                <a:latin typeface="Inter" pitchFamily="34" charset="0"/>
+                <a:ea typeface="Inter" pitchFamily="34" charset="-122"/>
+                <a:cs typeface="Inter" pitchFamily="34" charset="-120"/>
+              </a:rPr>
+              <a:t>2</a:t>
+            </a:r>
+            <a:endParaRPr lang="en-US" sz="1500" dirty="0"/>
+          </a:p>
+        </p:txBody>
+      </p:sp>
+      <p:sp>
+        <p:nvSpPr>
+          <p:cNvPr id="56" name="Text 54"/>
+          <p:cNvSpPr txBox="1"/>
+          <p:nvPr/>
+        </p:nvSpPr>
+        <p:spPr>
+          <a:xfrm>
+            <a:off x="8479536" y="2858414"/>
+            <a:ext cx="1825752" cy="755294"/>
+          </a:xfrm>
+          <a:prstGeom prst="rect">
+            <a:avLst/>
+          </a:prstGeom>
+          <a:noFill/>
+          <a:ln/>
+        </p:spPr>
+        <p:txBody>
+          <a:bodyPr wrap="square" lIns="0" tIns="0" rIns="0" bIns="0" rtlCol="0" anchor="ctr"/>
+          <a:lstStyle/>
+          <a:p>
+            <a:pPr indent="0" marL="0">
+              <a:spcAft>
+                <a:spcPts val="200"/>
+              </a:spcAft>
+              <a:buNone/>
+            </a:pPr>
+            <a:r>
+              <a:rPr lang="en-US" sz="1400" b="1" dirty="0">
+                <a:solidFill>
+                  <a:srgbClr val="1A1A1A"/>
+                </a:solidFill>
+                <a:latin typeface="Inter" pitchFamily="34" charset="0"/>
+                <a:ea typeface="Inter" pitchFamily="34" charset="-122"/>
+                <a:cs typeface="Inter" pitchFamily="34" charset="-120"/>
+              </a:rPr>
+              <a:t>Kia St George</a:t>
+            </a:r>
+            <a:endParaRPr lang="en-US" sz="1400" dirty="0"/>
+          </a:p>
+          <a:p>
+            <a:pPr indent="0" marL="0">
+              <a:spcAft>
+                <a:spcPts val="200"/>
+              </a:spcAft>
+              <a:buNone/>
+            </a:pPr>
+            <a:r>
+              <a:rPr lang="en-US" sz="1200" dirty="0">
+                <a:solidFill>
+                  <a:srgbClr val="595959"/>
+                </a:solidFill>
+                <a:latin typeface="Inter" pitchFamily="34" charset="0"/>
+                <a:ea typeface="Inter" pitchFamily="34" charset="-122"/>
+                <a:cs typeface="Inter" pitchFamily="34" charset="-120"/>
+              </a:rPr>
+              <a:t>76.8%  →  </a:t>
+            </a:r>
+            <a:pPr indent="0" marL="0">
+              <a:spcAft>
+                <a:spcPts val="200"/>
+              </a:spcAft>
+              <a:buNone/>
+            </a:pPr>
+            <a:r>
+              <a:rPr lang="en-US" sz="1200" b="1" dirty="0">
+                <a:solidFill>
+                  <a:srgbClr val="0B7A4A"/>
+                </a:solidFill>
+                <a:latin typeface="Inter" pitchFamily="34" charset="0"/>
+                <a:ea typeface="Inter" pitchFamily="34" charset="-122"/>
+                <a:cs typeface="Inter" pitchFamily="34" charset="-120"/>
+              </a:rPr>
+              <a:t>82.0%</a:t>
+            </a:r>
+            <a:endParaRPr lang="en-US" sz="1400" dirty="0"/>
+          </a:p>
+        </p:txBody>
+      </p:sp>
+      <p:sp>
+        <p:nvSpPr>
           <p:cNvPr id="57" name="Text 55"/>
           <p:cNvSpPr txBox="1"/>
           <p:nvPr/>
         </p:nvSpPr>
         <p:spPr>
           <a:xfrm>
-            <a:off x="6300216" y="5127955"/>
-            <a:ext cx="320040" cy="751637"/>
+            <a:off x="10323576" y="2858414"/>
+            <a:ext cx="1115568" cy="755294"/>
+          </a:xfrm>
+          <a:prstGeom prst="rect">
+            <a:avLst/>
+          </a:prstGeom>
+          <a:noFill/>
+          <a:ln/>
+        </p:spPr>
+        <p:txBody>
+          <a:bodyPr wrap="square" lIns="0" tIns="0" rIns="0" bIns="0" rtlCol="0" anchor="ctr"/>
+          <a:lstStyle/>
+          <a:p>
+            <a:pPr algn="r" indent="0" marL="0">
+              <a:buNone/>
+            </a:pPr>
+            <a:r>
+              <a:rPr lang="en-US" sz="1600" b="1" dirty="0">
+                <a:solidFill>
+                  <a:srgbClr val="0B7A4A"/>
+                </a:solidFill>
+                <a:latin typeface="Inter" pitchFamily="34" charset="0"/>
+                <a:ea typeface="Inter" pitchFamily="34" charset="-122"/>
+                <a:cs typeface="Inter" pitchFamily="34" charset="-120"/>
+              </a:rPr>
+              <a:t>+5.2 pts</a:t>
+            </a:r>
+            <a:endParaRPr lang="en-US" sz="1600" dirty="0"/>
+          </a:p>
+        </p:txBody>
+      </p:sp>
+      <p:sp>
+        <p:nvSpPr>
+          <p:cNvPr id="58" name="Shape 56"/>
+          <p:cNvSpPr/>
+          <p:nvPr/>
+        </p:nvSpPr>
+        <p:spPr>
+          <a:xfrm>
+            <a:off x="8040624" y="3613709"/>
+            <a:ext cx="3489960" cy="755294"/>
+          </a:xfrm>
+          <a:prstGeom prst="rect">
+            <a:avLst/>
+          </a:prstGeom>
+          <a:solidFill>
+            <a:srgbClr val="F7F7F7"/>
+          </a:solidFill>
+          <a:ln/>
+        </p:spPr>
+      </p:sp>
+      <p:sp>
+        <p:nvSpPr>
+          <p:cNvPr id="59" name="Text 57"/>
+          <p:cNvSpPr txBox="1"/>
+          <p:nvPr/>
+        </p:nvSpPr>
+        <p:spPr>
+          <a:xfrm>
+            <a:off x="8132064" y="3613709"/>
+            <a:ext cx="365760" cy="755294"/>
           </a:xfrm>
           <a:prstGeom prst="rect">
             <a:avLst/>
@@ -18224,7 +18473,7 @@
                 <a:ea typeface="Inter" pitchFamily="34" charset="-122"/>
                 <a:cs typeface="Inter" pitchFamily="34" charset="-120"/>
               </a:rPr>
-              <a:t>29</a:t>
+              <a:t>3</a:t>
             </a:r>
             <a:endParaRPr lang="en-US" sz="1500" dirty="0"/>
           </a:p>
@@ -18232,14 +18481,14 @@
       </p:sp>
       <p:sp>
         <p:nvSpPr>
-          <p:cNvPr id="58" name="Text 56"/>
-          <p:cNvSpPr txBox="1"/>
-          <p:nvPr/>
-        </p:nvSpPr>
-        <p:spPr>
-          <a:xfrm>
-            <a:off x="6665976" y="5127955"/>
-            <a:ext cx="1737360" cy="751637"/>
+          <p:cNvPr id="60" name="Text 58"/>
+          <p:cNvSpPr txBox="1"/>
+          <p:nvPr/>
+        </p:nvSpPr>
+        <p:spPr>
+          <a:xfrm>
+            <a:off x="8479536" y="3613709"/>
+            <a:ext cx="1825752" cy="755294"/>
           </a:xfrm>
           <a:prstGeom prst="rect">
             <a:avLst/>
@@ -18252,6 +18501,9 @@
           <a:lstStyle/>
           <a:p>
             <a:pPr indent="0" marL="0">
+              <a:spcAft>
+                <a:spcPts val="200"/>
+              </a:spcAft>
               <a:buNone/>
             </a:pPr>
             <a:r>
@@ -18263,38 +18515,19 @@
                 <a:ea typeface="Inter" pitchFamily="34" charset="-122"/>
                 <a:cs typeface="Inter" pitchFamily="34" charset="-120"/>
               </a:rPr>
-              <a:t>Hyundai Prescott</a:t>
+              <a:t>Hyundai St George</a:t>
             </a:r>
             <a:endParaRPr lang="en-US" sz="1400" dirty="0"/>
           </a:p>
-        </p:txBody>
-      </p:sp>
-      <p:sp>
-        <p:nvSpPr>
-          <p:cNvPr id="59" name="Text 57"/>
-          <p:cNvSpPr txBox="1"/>
-          <p:nvPr/>
-        </p:nvSpPr>
-        <p:spPr>
-          <a:xfrm>
-            <a:off x="8449056" y="5127955"/>
-            <a:ext cx="1920240" cy="751637"/>
-          </a:xfrm>
-          <a:prstGeom prst="rect">
-            <a:avLst/>
-          </a:prstGeom>
-          <a:noFill/>
-          <a:ln/>
-        </p:spPr>
-        <p:txBody>
-          <a:bodyPr wrap="square" lIns="0" tIns="0" rIns="0" bIns="0" rtlCol="0" anchor="ctr"/>
-          <a:lstStyle/>
           <a:p>
             <a:pPr indent="0" marL="0">
-              <a:buNone/>
-            </a:pPr>
-            <a:r>
-              <a:rPr lang="en-US" sz="1400" dirty="0">
+              <a:spcAft>
+                <a:spcPts val="200"/>
+              </a:spcAft>
+              <a:buNone/>
+            </a:pPr>
+            <a:r>
+              <a:rPr lang="en-US" sz="1200" dirty="0">
                 <a:solidFill>
                   <a:srgbClr val="595959"/>
                 </a:solidFill>
@@ -18302,50 +18535,373 @@
                 <a:ea typeface="Inter" pitchFamily="34" charset="-122"/>
                 <a:cs typeface="Inter" pitchFamily="34" charset="-120"/>
               </a:rPr>
-              <a:t>76.9%  </a:t>
+              <a:t>83.0%  →  </a:t>
             </a:r>
             <a:pPr indent="0" marL="0">
+              <a:spcAft>
+                <a:spcPts val="200"/>
+              </a:spcAft>
+              <a:buNone/>
+            </a:pPr>
+            <a:r>
+              <a:rPr lang="en-US" sz="1200" b="1" dirty="0">
+                <a:solidFill>
+                  <a:srgbClr val="0B7A4A"/>
+                </a:solidFill>
+                <a:latin typeface="Inter" pitchFamily="34" charset="0"/>
+                <a:ea typeface="Inter" pitchFamily="34" charset="-122"/>
+                <a:cs typeface="Inter" pitchFamily="34" charset="-120"/>
+              </a:rPr>
+              <a:t>87.1%</a:t>
+            </a:r>
+            <a:endParaRPr lang="en-US" sz="1400" dirty="0"/>
+          </a:p>
+        </p:txBody>
+      </p:sp>
+      <p:sp>
+        <p:nvSpPr>
+          <p:cNvPr id="61" name="Text 59"/>
+          <p:cNvSpPr txBox="1"/>
+          <p:nvPr/>
+        </p:nvSpPr>
+        <p:spPr>
+          <a:xfrm>
+            <a:off x="10323576" y="3613709"/>
+            <a:ext cx="1115568" cy="755294"/>
+          </a:xfrm>
+          <a:prstGeom prst="rect">
+            <a:avLst/>
+          </a:prstGeom>
+          <a:noFill/>
+          <a:ln/>
+        </p:spPr>
+        <p:txBody>
+          <a:bodyPr wrap="square" lIns="0" tIns="0" rIns="0" bIns="0" rtlCol="0" anchor="ctr"/>
+          <a:lstStyle/>
+          <a:p>
+            <a:pPr algn="r" indent="0" marL="0">
+              <a:buNone/>
+            </a:pPr>
+            <a:r>
+              <a:rPr lang="en-US" sz="1600" b="1" dirty="0">
+                <a:solidFill>
+                  <a:srgbClr val="0B7A4A"/>
+                </a:solidFill>
+                <a:latin typeface="Inter" pitchFamily="34" charset="0"/>
+                <a:ea typeface="Inter" pitchFamily="34" charset="-122"/>
+                <a:cs typeface="Inter" pitchFamily="34" charset="-120"/>
+              </a:rPr>
+              <a:t>+4.1 pts</a:t>
+            </a:r>
+            <a:endParaRPr lang="en-US" sz="1600" dirty="0"/>
+          </a:p>
+        </p:txBody>
+      </p:sp>
+      <p:sp>
+        <p:nvSpPr>
+          <p:cNvPr id="62" name="Text 60"/>
+          <p:cNvSpPr txBox="1"/>
+          <p:nvPr/>
+        </p:nvSpPr>
+        <p:spPr>
+          <a:xfrm>
+            <a:off x="8132064" y="4369003"/>
+            <a:ext cx="365760" cy="755294"/>
+          </a:xfrm>
+          <a:prstGeom prst="rect">
+            <a:avLst/>
+          </a:prstGeom>
+          <a:noFill/>
+          <a:ln/>
+        </p:spPr>
+        <p:txBody>
+          <a:bodyPr wrap="square" lIns="0" tIns="0" rIns="0" bIns="0" rtlCol="0" anchor="ctr"/>
+          <a:lstStyle/>
+          <a:p>
+            <a:pPr indent="0" marL="0">
+              <a:buNone/>
+            </a:pPr>
+            <a:r>
+              <a:rPr lang="en-US" sz="1500" b="1" dirty="0">
+                <a:solidFill>
+                  <a:srgbClr val="0B2C4A"/>
+                </a:solidFill>
+                <a:latin typeface="Inter" pitchFamily="34" charset="0"/>
+                <a:ea typeface="Inter" pitchFamily="34" charset="-122"/>
+                <a:cs typeface="Inter" pitchFamily="34" charset="-120"/>
+              </a:rPr>
+              <a:t>4</a:t>
+            </a:r>
+            <a:endParaRPr lang="en-US" sz="1500" dirty="0"/>
+          </a:p>
+        </p:txBody>
+      </p:sp>
+      <p:sp>
+        <p:nvSpPr>
+          <p:cNvPr id="63" name="Text 61"/>
+          <p:cNvSpPr txBox="1"/>
+          <p:nvPr/>
+        </p:nvSpPr>
+        <p:spPr>
+          <a:xfrm>
+            <a:off x="8479536" y="4369003"/>
+            <a:ext cx="1825752" cy="755294"/>
+          </a:xfrm>
+          <a:prstGeom prst="rect">
+            <a:avLst/>
+          </a:prstGeom>
+          <a:noFill/>
+          <a:ln/>
+        </p:spPr>
+        <p:txBody>
+          <a:bodyPr wrap="square" lIns="0" tIns="0" rIns="0" bIns="0" rtlCol="0" anchor="ctr"/>
+          <a:lstStyle/>
+          <a:p>
+            <a:pPr indent="0" marL="0">
+              <a:spcAft>
+                <a:spcPts val="200"/>
+              </a:spcAft>
               <a:buNone/>
             </a:pPr>
             <a:r>
               <a:rPr lang="en-US" sz="1400" b="1" dirty="0">
                 <a:solidFill>
-                  <a:srgbClr val="A82B26"/>
-                </a:solidFill>
-                <a:latin typeface="Inter" pitchFamily="34" charset="0"/>
-                <a:ea typeface="Inter" pitchFamily="34" charset="-122"/>
-                <a:cs typeface="Inter" pitchFamily="34" charset="-120"/>
-              </a:rPr>
-              <a:t>→  </a:t>
-            </a:r>
+                  <a:srgbClr val="1A1A1A"/>
+                </a:solidFill>
+                <a:latin typeface="Inter" pitchFamily="34" charset="0"/>
+                <a:ea typeface="Inter" pitchFamily="34" charset="-122"/>
+                <a:cs typeface="Inter" pitchFamily="34" charset="-120"/>
+              </a:rPr>
+              <a:t>Honda North</a:t>
+            </a:r>
+            <a:endParaRPr lang="en-US" sz="1400" dirty="0"/>
+          </a:p>
+          <a:p>
             <a:pPr indent="0" marL="0">
+              <a:spcAft>
+                <a:spcPts val="200"/>
+              </a:spcAft>
+              <a:buNone/>
+            </a:pPr>
+            <a:r>
+              <a:rPr lang="en-US" sz="1200" dirty="0">
+                <a:solidFill>
+                  <a:srgbClr val="595959"/>
+                </a:solidFill>
+                <a:latin typeface="Inter" pitchFamily="34" charset="0"/>
+                <a:ea typeface="Inter" pitchFamily="34" charset="-122"/>
+                <a:cs typeface="Inter" pitchFamily="34" charset="-120"/>
+              </a:rPr>
+              <a:t>72.5%  →  </a:t>
+            </a:r>
+            <a:pPr indent="0" marL="0">
+              <a:spcAft>
+                <a:spcPts val="200"/>
+              </a:spcAft>
+              <a:buNone/>
+            </a:pPr>
+            <a:r>
+              <a:rPr lang="en-US" sz="1200" b="1" dirty="0">
+                <a:solidFill>
+                  <a:srgbClr val="0B7A4A"/>
+                </a:solidFill>
+                <a:latin typeface="Inter" pitchFamily="34" charset="0"/>
+                <a:ea typeface="Inter" pitchFamily="34" charset="-122"/>
+                <a:cs typeface="Inter" pitchFamily="34" charset="-120"/>
+              </a:rPr>
+              <a:t>76.4%</a:t>
+            </a:r>
+            <a:endParaRPr lang="en-US" sz="1400" dirty="0"/>
+          </a:p>
+        </p:txBody>
+      </p:sp>
+      <p:sp>
+        <p:nvSpPr>
+          <p:cNvPr id="64" name="Text 62"/>
+          <p:cNvSpPr txBox="1"/>
+          <p:nvPr/>
+        </p:nvSpPr>
+        <p:spPr>
+          <a:xfrm>
+            <a:off x="10323576" y="4369003"/>
+            <a:ext cx="1115568" cy="755294"/>
+          </a:xfrm>
+          <a:prstGeom prst="rect">
+            <a:avLst/>
+          </a:prstGeom>
+          <a:noFill/>
+          <a:ln/>
+        </p:spPr>
+        <p:txBody>
+          <a:bodyPr wrap="square" lIns="0" tIns="0" rIns="0" bIns="0" rtlCol="0" anchor="ctr"/>
+          <a:lstStyle/>
+          <a:p>
+            <a:pPr algn="r" indent="0" marL="0">
+              <a:buNone/>
+            </a:pPr>
+            <a:r>
+              <a:rPr lang="en-US" sz="1600" b="1" dirty="0">
+                <a:solidFill>
+                  <a:srgbClr val="0B7A4A"/>
+                </a:solidFill>
+                <a:latin typeface="Inter" pitchFamily="34" charset="0"/>
+                <a:ea typeface="Inter" pitchFamily="34" charset="-122"/>
+                <a:cs typeface="Inter" pitchFamily="34" charset="-120"/>
+              </a:rPr>
+              <a:t>+3.9 pts</a:t>
+            </a:r>
+            <a:endParaRPr lang="en-US" sz="1600" dirty="0"/>
+          </a:p>
+        </p:txBody>
+      </p:sp>
+      <p:sp>
+        <p:nvSpPr>
+          <p:cNvPr id="65" name="Shape 63"/>
+          <p:cNvSpPr/>
+          <p:nvPr/>
+        </p:nvSpPr>
+        <p:spPr>
+          <a:xfrm>
+            <a:off x="8040624" y="5124298"/>
+            <a:ext cx="3489960" cy="755294"/>
+          </a:xfrm>
+          <a:prstGeom prst="rect">
+            <a:avLst/>
+          </a:prstGeom>
+          <a:solidFill>
+            <a:srgbClr val="F7F7F7"/>
+          </a:solidFill>
+          <a:ln/>
+        </p:spPr>
+      </p:sp>
+      <p:sp>
+        <p:nvSpPr>
+          <p:cNvPr id="66" name="Text 64"/>
+          <p:cNvSpPr txBox="1"/>
+          <p:nvPr/>
+        </p:nvSpPr>
+        <p:spPr>
+          <a:xfrm>
+            <a:off x="8132064" y="5124298"/>
+            <a:ext cx="365760" cy="755294"/>
+          </a:xfrm>
+          <a:prstGeom prst="rect">
+            <a:avLst/>
+          </a:prstGeom>
+          <a:noFill/>
+          <a:ln/>
+        </p:spPr>
+        <p:txBody>
+          <a:bodyPr wrap="square" lIns="0" tIns="0" rIns="0" bIns="0" rtlCol="0" anchor="ctr"/>
+          <a:lstStyle/>
+          <a:p>
+            <a:pPr indent="0" marL="0">
+              <a:buNone/>
+            </a:pPr>
+            <a:r>
+              <a:rPr lang="en-US" sz="1500" b="1" dirty="0">
+                <a:solidFill>
+                  <a:srgbClr val="0B2C4A"/>
+                </a:solidFill>
+                <a:latin typeface="Inter" pitchFamily="34" charset="0"/>
+                <a:ea typeface="Inter" pitchFamily="34" charset="-122"/>
+                <a:cs typeface="Inter" pitchFamily="34" charset="-120"/>
+              </a:rPr>
+              <a:t>5</a:t>
+            </a:r>
+            <a:endParaRPr lang="en-US" sz="1500" dirty="0"/>
+          </a:p>
+        </p:txBody>
+      </p:sp>
+      <p:sp>
+        <p:nvSpPr>
+          <p:cNvPr id="67" name="Text 65"/>
+          <p:cNvSpPr txBox="1"/>
+          <p:nvPr/>
+        </p:nvSpPr>
+        <p:spPr>
+          <a:xfrm>
+            <a:off x="8479536" y="5124298"/>
+            <a:ext cx="1825752" cy="755294"/>
+          </a:xfrm>
+          <a:prstGeom prst="rect">
+            <a:avLst/>
+          </a:prstGeom>
+          <a:noFill/>
+          <a:ln/>
+        </p:spPr>
+        <p:txBody>
+          <a:bodyPr wrap="square" lIns="0" tIns="0" rIns="0" bIns="0" rtlCol="0" anchor="ctr"/>
+          <a:lstStyle/>
+          <a:p>
+            <a:pPr indent="0" marL="0">
+              <a:spcAft>
+                <a:spcPts val="200"/>
+              </a:spcAft>
               <a:buNone/>
             </a:pPr>
             <a:r>
               <a:rPr lang="en-US" sz="1400" b="1" dirty="0">
                 <a:solidFill>
-                  <a:srgbClr val="A82B26"/>
-                </a:solidFill>
-                <a:latin typeface="Inter" pitchFamily="34" charset="0"/>
-                <a:ea typeface="Inter" pitchFamily="34" charset="-122"/>
-                <a:cs typeface="Inter" pitchFamily="34" charset="-120"/>
-              </a:rPr>
-              <a:t>72.5%</a:t>
+                  <a:srgbClr val="1A1A1A"/>
+                </a:solidFill>
+                <a:latin typeface="Inter" pitchFamily="34" charset="0"/>
+                <a:ea typeface="Inter" pitchFamily="34" charset="-122"/>
+                <a:cs typeface="Inter" pitchFamily="34" charset="-120"/>
+              </a:rPr>
+              <a:t>Toyota Henderson</a:t>
             </a:r>
             <a:endParaRPr lang="en-US" sz="1400" dirty="0"/>
           </a:p>
-        </p:txBody>
-      </p:sp>
-      <p:sp>
-        <p:nvSpPr>
-          <p:cNvPr id="60" name="Text 58"/>
-          <p:cNvSpPr txBox="1"/>
-          <p:nvPr/>
-        </p:nvSpPr>
-        <p:spPr>
-          <a:xfrm>
-            <a:off x="10415016" y="5127955"/>
-            <a:ext cx="1051560" cy="751637"/>
+          <a:p>
+            <a:pPr indent="0" marL="0">
+              <a:spcAft>
+                <a:spcPts val="200"/>
+              </a:spcAft>
+              <a:buNone/>
+            </a:pPr>
+            <a:r>
+              <a:rPr lang="en-US" sz="1200" dirty="0">
+                <a:solidFill>
+                  <a:srgbClr val="595959"/>
+                </a:solidFill>
+                <a:latin typeface="Inter" pitchFamily="34" charset="0"/>
+                <a:ea typeface="Inter" pitchFamily="34" charset="-122"/>
+                <a:cs typeface="Inter" pitchFamily="34" charset="-120"/>
+              </a:rPr>
+              <a:t>76.4%  →  </a:t>
+            </a:r>
+            <a:pPr indent="0" marL="0">
+              <a:spcAft>
+                <a:spcPts val="200"/>
+              </a:spcAft>
+              <a:buNone/>
+            </a:pPr>
+            <a:r>
+              <a:rPr lang="en-US" sz="1200" b="1" dirty="0">
+                <a:solidFill>
+                  <a:srgbClr val="0B7A4A"/>
+                </a:solidFill>
+                <a:latin typeface="Inter" pitchFamily="34" charset="0"/>
+                <a:ea typeface="Inter" pitchFamily="34" charset="-122"/>
+                <a:cs typeface="Inter" pitchFamily="34" charset="-120"/>
+              </a:rPr>
+              <a:t>79.7%</a:t>
+            </a:r>
+            <a:endParaRPr lang="en-US" sz="1400" dirty="0"/>
+          </a:p>
+        </p:txBody>
+      </p:sp>
+      <p:sp>
+        <p:nvSpPr>
+          <p:cNvPr id="68" name="Text 66"/>
+          <p:cNvSpPr txBox="1"/>
+          <p:nvPr/>
+        </p:nvSpPr>
+        <p:spPr>
+          <a:xfrm>
+            <a:off x="10323576" y="5124298"/>
+            <a:ext cx="1115568" cy="755294"/>
           </a:xfrm>
           <a:prstGeom prst="rect">
             <a:avLst/>
@@ -18363,13 +18919,13 @@
             <a:r>
               <a:rPr lang="en-US" sz="1600" b="1" dirty="0">
                 <a:solidFill>
-                  <a:srgbClr val="A82B26"/>
-                </a:solidFill>
-                <a:latin typeface="Inter" pitchFamily="34" charset="0"/>
-                <a:ea typeface="Inter" pitchFamily="34" charset="-122"/>
-                <a:cs typeface="Inter" pitchFamily="34" charset="-120"/>
-              </a:rPr>
-              <a:t>−4.3 pts</a:t>
+                  <a:srgbClr val="0B7A4A"/>
+                </a:solidFill>
+                <a:latin typeface="Inter" pitchFamily="34" charset="0"/>
+                <a:ea typeface="Inter" pitchFamily="34" charset="-122"/>
+                <a:cs typeface="Inter" pitchFamily="34" charset="-120"/>
+              </a:rPr>
+              <a:t>+3.3 pts</a:t>
             </a:r>
             <a:endParaRPr lang="en-US" sz="1600" dirty="0"/>
           </a:p>
@@ -18377,14 +18933,14 @@
       </p:sp>
       <p:sp>
         <p:nvSpPr>
-          <p:cNvPr id="61" name="Shape 59"/>
+          <p:cNvPr id="69" name="Shape 67"/>
           <p:cNvSpPr/>
           <p:nvPr/>
         </p:nvSpPr>
         <p:spPr>
           <a:xfrm>
             <a:off x="457200" y="6126480"/>
-            <a:ext cx="11274552" cy="371856"/>
+            <a:ext cx="11274552" cy="615696"/>
           </a:xfrm>
           <a:prstGeom prst="rect">
             <a:avLst/>
@@ -18397,14 +18953,14 @@
       </p:sp>
       <p:sp>
         <p:nvSpPr>
-          <p:cNvPr id="62" name="Text 60"/>
+          <p:cNvPr id="70" name="Text 68"/>
           <p:cNvSpPr txBox="1"/>
           <p:nvPr/>
         </p:nvSpPr>
         <p:spPr>
           <a:xfrm>
             <a:off x="658368" y="6144768"/>
-            <a:ext cx="10927080" cy="335280"/>
+            <a:ext cx="10927080" cy="579120"/>
           </a:xfrm>
           <a:prstGeom prst="rect">
             <a:avLst/>
@@ -18428,7 +18984,7 @@
                 <a:ea typeface="Inter" pitchFamily="34" charset="-122"/>
                 <a:cs typeface="Inter" pitchFamily="34" charset="-120"/>
               </a:rPr>
-              <a:t>Ask Acura, Honda Spokane and LR Reno what changed. Ask Nissan, LR LV and Mazda what got in the way.</a:t>
+              <a:t>Ask Acura, Honda Spokane and LR Reno what changed. Ask Nissan, LR LV and Mazda what got in the way. Ask LR Henderson, Kia St George and Hyundai St George what they started this year.</a:t>
             </a:r>
             <a:endParaRPr lang="en-US" sz="1600" dirty="0"/>
           </a:p>
@@ -29334,53 +29890,14 @@
       </p:sp>
       <p:sp>
         <p:nvSpPr>
-          <p:cNvPr id="6" name="Text 4"/>
-          <p:cNvSpPr txBox="1"/>
-          <p:nvPr/>
-        </p:nvSpPr>
-        <p:spPr>
-          <a:xfrm>
-            <a:off x="713232" y="1298448"/>
-            <a:ext cx="10762488" cy="310896"/>
-          </a:xfrm>
-          <a:prstGeom prst="rect">
-            <a:avLst/>
-          </a:prstGeom>
-          <a:noFill/>
-          <a:ln/>
-        </p:spPr>
-        <p:txBody>
-          <a:bodyPr wrap="square" lIns="0" tIns="0" rIns="0" bIns="0" rtlCol="0" anchor="ctr"/>
-          <a:lstStyle/>
-          <a:p>
-            <a:pPr indent="0" marL="0">
-              <a:buNone/>
-            </a:pPr>
-            <a:r>
-              <a:rPr lang="en-US" sz="1400" dirty="0">
-                <a:solidFill>
-                  <a:srgbClr val="595959"/>
-                </a:solidFill>
-                <a:latin typeface="Inter" pitchFamily="34" charset="0"/>
-                <a:ea typeface="Inter" pitchFamily="34" charset="-122"/>
-                <a:cs typeface="Inter" pitchFamily="34" charset="-120"/>
-              </a:rPr>
-              <a:t>Jan–Sep 2026 against Jan–Sep 2025. Group 36.0% → 36.5% (+0.5 pts). Ranked by change.</a:t>
-            </a:r>
-            <a:endParaRPr lang="en-US" sz="1400" dirty="0"/>
-          </a:p>
-        </p:txBody>
-      </p:sp>
-      <p:sp>
-        <p:nvSpPr>
-          <p:cNvPr id="7" name="Shape 5"/>
+          <p:cNvPr id="6" name="Shape 4"/>
           <p:cNvSpPr/>
           <p:nvPr/>
         </p:nvSpPr>
         <p:spPr>
           <a:xfrm>
-            <a:off x="658368" y="1737360"/>
-            <a:ext cx="5321808" cy="45720"/>
+            <a:off x="658368" y="1371600"/>
+            <a:ext cx="3489960" cy="45720"/>
           </a:xfrm>
           <a:prstGeom prst="rect">
             <a:avLst/>
@@ -29393,14 +29910,53 @@
       </p:sp>
       <p:sp>
         <p:nvSpPr>
+          <p:cNvPr id="7" name="Text 5"/>
+          <p:cNvSpPr txBox="1"/>
+          <p:nvPr/>
+        </p:nvSpPr>
+        <p:spPr>
+          <a:xfrm>
+            <a:off x="749808" y="1444752"/>
+            <a:ext cx="3307080" cy="274320"/>
+          </a:xfrm>
+          <a:prstGeom prst="rect">
+            <a:avLst/>
+          </a:prstGeom>
+          <a:noFill/>
+          <a:ln/>
+        </p:spPr>
+        <p:txBody>
+          <a:bodyPr wrap="square" lIns="0" tIns="0" rIns="0" bIns="0" rtlCol="0" anchor="ctr"/>
+          <a:lstStyle/>
+          <a:p>
+            <a:pPr indent="0" marL="0">
+              <a:buNone/>
+            </a:pPr>
+            <a:r>
+              <a:rPr lang="en-US" sz="1500" b="1" spc="100" kern="0" dirty="0">
+                <a:solidFill>
+                  <a:srgbClr val="0B7A4A"/>
+                </a:solidFill>
+                <a:latin typeface="Inter" pitchFamily="34" charset="0"/>
+                <a:ea typeface="Inter" pitchFamily="34" charset="-122"/>
+                <a:cs typeface="Inter" pitchFamily="34" charset="-120"/>
+              </a:rPr>
+              <a:t>TOP 5 VS LAST YEAR</a:t>
+            </a:r>
+            <a:endParaRPr lang="en-US" sz="1500" dirty="0"/>
+          </a:p>
+        </p:txBody>
+      </p:sp>
+      <p:sp>
+        <p:nvSpPr>
           <p:cNvPr id="8" name="Text 6"/>
           <p:cNvSpPr txBox="1"/>
           <p:nvPr/>
         </p:nvSpPr>
         <p:spPr>
           <a:xfrm>
-            <a:off x="749808" y="1810512"/>
-            <a:ext cx="1828800" cy="274320"/>
+            <a:off x="749808" y="1737360"/>
+            <a:ext cx="3307080" cy="274320"/>
           </a:xfrm>
           <a:prstGeom prst="rect">
             <a:avLst/>
@@ -29416,46 +29972,7 @@
               <a:buNone/>
             </a:pPr>
             <a:r>
-              <a:rPr lang="en-US" sz="1400" b="1" spc="100" kern="0" dirty="0">
-                <a:solidFill>
-                  <a:srgbClr val="0B7A4A"/>
-                </a:solidFill>
-                <a:latin typeface="Inter" pitchFamily="34" charset="0"/>
-                <a:ea typeface="Inter" pitchFamily="34" charset="-122"/>
-                <a:cs typeface="Inter" pitchFamily="34" charset="-120"/>
-              </a:rPr>
-              <a:t>TOP 5</a:t>
-            </a:r>
-            <a:endParaRPr lang="en-US" sz="1400" dirty="0"/>
-          </a:p>
-        </p:txBody>
-      </p:sp>
-      <p:sp>
-        <p:nvSpPr>
-          <p:cNvPr id="9" name="Text 7"/>
-          <p:cNvSpPr txBox="1"/>
-          <p:nvPr/>
-        </p:nvSpPr>
-        <p:spPr>
-          <a:xfrm>
-            <a:off x="2898648" y="1810512"/>
-            <a:ext cx="1828800" cy="274320"/>
-          </a:xfrm>
-          <a:prstGeom prst="rect">
-            <a:avLst/>
-          </a:prstGeom>
-          <a:noFill/>
-          <a:ln/>
-        </p:spPr>
-        <p:txBody>
-          <a:bodyPr wrap="square" lIns="0" tIns="0" rIns="0" bIns="0" rtlCol="0" anchor="ctr"/>
-          <a:lstStyle/>
-          <a:p>
-            <a:pPr indent="0" marL="0">
-              <a:buNone/>
-            </a:pPr>
-            <a:r>
-              <a:rPr lang="en-US" sz="1400" b="1" dirty="0">
+              <a:rPr lang="en-US" sz="1200" dirty="0">
                 <a:solidFill>
                   <a:srgbClr val="595959"/>
                 </a:solidFill>
@@ -29463,61 +29980,22 @@
                 <a:ea typeface="Inter" pitchFamily="34" charset="-122"/>
                 <a:cs typeface="Inter" pitchFamily="34" charset="-120"/>
               </a:rPr>
-              <a:t>2025 → 2026</a:t>
-            </a:r>
-            <a:endParaRPr lang="en-US" sz="1400" dirty="0"/>
-          </a:p>
-        </p:txBody>
-      </p:sp>
-      <p:sp>
-        <p:nvSpPr>
-          <p:cNvPr id="10" name="Text 8"/>
-          <p:cNvSpPr txBox="1"/>
-          <p:nvPr/>
-        </p:nvSpPr>
-        <p:spPr>
-          <a:xfrm>
-            <a:off x="4864608" y="1810512"/>
-            <a:ext cx="1051560" cy="274320"/>
-          </a:xfrm>
-          <a:prstGeom prst="rect">
-            <a:avLst/>
-          </a:prstGeom>
-          <a:noFill/>
-          <a:ln/>
-        </p:spPr>
-        <p:txBody>
-          <a:bodyPr wrap="square" lIns="0" tIns="0" rIns="0" bIns="0" rtlCol="0" anchor="ctr"/>
-          <a:lstStyle/>
-          <a:p>
-            <a:pPr algn="r" indent="0" marL="0">
-              <a:buNone/>
-            </a:pPr>
-            <a:r>
-              <a:rPr lang="en-US" sz="1400" b="1" dirty="0">
-                <a:solidFill>
-                  <a:srgbClr val="595959"/>
-                </a:solidFill>
-                <a:latin typeface="Inter" pitchFamily="34" charset="0"/>
-                <a:ea typeface="Inter" pitchFamily="34" charset="-122"/>
-                <a:cs typeface="Inter" pitchFamily="34" charset="-120"/>
-              </a:rPr>
-              <a:t>Change</a:t>
-            </a:r>
-            <a:endParaRPr lang="en-US" sz="1400" dirty="0"/>
-          </a:p>
-        </p:txBody>
-      </p:sp>
-      <p:sp>
-        <p:nvSpPr>
-          <p:cNvPr id="11" name="Shape 9"/>
+              <a:t>Jan–Sep 2026 vs Jan–Sep 2025</a:t>
+            </a:r>
+            <a:endParaRPr lang="en-US" sz="1200" dirty="0"/>
+          </a:p>
+        </p:txBody>
+      </p:sp>
+      <p:sp>
+        <p:nvSpPr>
+          <p:cNvPr id="9" name="Shape 7"/>
           <p:cNvSpPr/>
           <p:nvPr/>
         </p:nvSpPr>
         <p:spPr>
           <a:xfrm>
-            <a:off x="658368" y="2121408"/>
-            <a:ext cx="5321808" cy="751637"/>
+            <a:off x="658368" y="2103120"/>
+            <a:ext cx="3489960" cy="755294"/>
           </a:xfrm>
           <a:prstGeom prst="rect">
             <a:avLst/>
@@ -29530,14 +30008,171 @@
       </p:sp>
       <p:sp>
         <p:nvSpPr>
+          <p:cNvPr id="10" name="Text 8"/>
+          <p:cNvSpPr txBox="1"/>
+          <p:nvPr/>
+        </p:nvSpPr>
+        <p:spPr>
+          <a:xfrm>
+            <a:off x="749808" y="2103120"/>
+            <a:ext cx="365760" cy="755294"/>
+          </a:xfrm>
+          <a:prstGeom prst="rect">
+            <a:avLst/>
+          </a:prstGeom>
+          <a:noFill/>
+          <a:ln/>
+        </p:spPr>
+        <p:txBody>
+          <a:bodyPr wrap="square" lIns="0" tIns="0" rIns="0" bIns="0" rtlCol="0" anchor="ctr"/>
+          <a:lstStyle/>
+          <a:p>
+            <a:pPr indent="0" marL="0">
+              <a:buNone/>
+            </a:pPr>
+            <a:r>
+              <a:rPr lang="en-US" sz="1500" b="1" dirty="0">
+                <a:solidFill>
+                  <a:srgbClr val="0B2C4A"/>
+                </a:solidFill>
+                <a:latin typeface="Inter" pitchFamily="34" charset="0"/>
+                <a:ea typeface="Inter" pitchFamily="34" charset="-122"/>
+                <a:cs typeface="Inter" pitchFamily="34" charset="-120"/>
+              </a:rPr>
+              <a:t>1</a:t>
+            </a:r>
+            <a:endParaRPr lang="en-US" sz="1500" dirty="0"/>
+          </a:p>
+        </p:txBody>
+      </p:sp>
+      <p:sp>
+        <p:nvSpPr>
+          <p:cNvPr id="11" name="Text 9"/>
+          <p:cNvSpPr txBox="1"/>
+          <p:nvPr/>
+        </p:nvSpPr>
+        <p:spPr>
+          <a:xfrm>
+            <a:off x="1097280" y="2103120"/>
+            <a:ext cx="1825752" cy="755294"/>
+          </a:xfrm>
+          <a:prstGeom prst="rect">
+            <a:avLst/>
+          </a:prstGeom>
+          <a:noFill/>
+          <a:ln/>
+        </p:spPr>
+        <p:txBody>
+          <a:bodyPr wrap="square" lIns="0" tIns="0" rIns="0" bIns="0" rtlCol="0" anchor="ctr"/>
+          <a:lstStyle/>
+          <a:p>
+            <a:pPr indent="0" marL="0">
+              <a:spcAft>
+                <a:spcPts val="200"/>
+              </a:spcAft>
+              <a:buNone/>
+            </a:pPr>
+            <a:r>
+              <a:rPr lang="en-US" sz="1400" b="1" dirty="0">
+                <a:solidFill>
+                  <a:srgbClr val="1A1A1A"/>
+                </a:solidFill>
+                <a:latin typeface="Inter" pitchFamily="34" charset="0"/>
+                <a:ea typeface="Inter" pitchFamily="34" charset="-122"/>
+                <a:cs typeface="Inter" pitchFamily="34" charset="-120"/>
+              </a:rPr>
+              <a:t>Acura</a:t>
+            </a:r>
+            <a:endParaRPr lang="en-US" sz="1400" dirty="0"/>
+          </a:p>
+          <a:p>
+            <a:pPr indent="0" marL="0">
+              <a:spcAft>
+                <a:spcPts val="200"/>
+              </a:spcAft>
+              <a:buNone/>
+            </a:pPr>
+            <a:r>
+              <a:rPr lang="en-US" sz="1200" dirty="0">
+                <a:solidFill>
+                  <a:srgbClr val="595959"/>
+                </a:solidFill>
+                <a:latin typeface="Inter" pitchFamily="34" charset="0"/>
+                <a:ea typeface="Inter" pitchFamily="34" charset="-122"/>
+                <a:cs typeface="Inter" pitchFamily="34" charset="-120"/>
+              </a:rPr>
+              <a:t>27.8%  →  </a:t>
+            </a:r>
+            <a:pPr indent="0" marL="0">
+              <a:spcAft>
+                <a:spcPts val="200"/>
+              </a:spcAft>
+              <a:buNone/>
+            </a:pPr>
+            <a:r>
+              <a:rPr lang="en-US" sz="1200" b="1" dirty="0">
+                <a:solidFill>
+                  <a:srgbClr val="0B7A4A"/>
+                </a:solidFill>
+                <a:latin typeface="Inter" pitchFamily="34" charset="0"/>
+                <a:ea typeface="Inter" pitchFamily="34" charset="-122"/>
+                <a:cs typeface="Inter" pitchFamily="34" charset="-120"/>
+              </a:rPr>
+              <a:t>34.0%</a:t>
+            </a:r>
+            <a:endParaRPr lang="en-US" sz="1400" dirty="0"/>
+          </a:p>
+        </p:txBody>
+      </p:sp>
+      <p:sp>
+        <p:nvSpPr>
           <p:cNvPr id="12" name="Text 10"/>
           <p:cNvSpPr txBox="1"/>
           <p:nvPr/>
         </p:nvSpPr>
         <p:spPr>
           <a:xfrm>
-            <a:off x="749808" y="2121408"/>
-            <a:ext cx="320040" cy="751637"/>
+            <a:off x="2941320" y="2103120"/>
+            <a:ext cx="1115568" cy="755294"/>
+          </a:xfrm>
+          <a:prstGeom prst="rect">
+            <a:avLst/>
+          </a:prstGeom>
+          <a:noFill/>
+          <a:ln/>
+        </p:spPr>
+        <p:txBody>
+          <a:bodyPr wrap="square" lIns="0" tIns="0" rIns="0" bIns="0" rtlCol="0" anchor="ctr"/>
+          <a:lstStyle/>
+          <a:p>
+            <a:pPr algn="r" indent="0" marL="0">
+              <a:buNone/>
+            </a:pPr>
+            <a:r>
+              <a:rPr lang="en-US" sz="1600" b="1" dirty="0">
+                <a:solidFill>
+                  <a:srgbClr val="0B7A4A"/>
+                </a:solidFill>
+                <a:latin typeface="Inter" pitchFamily="34" charset="0"/>
+                <a:ea typeface="Inter" pitchFamily="34" charset="-122"/>
+                <a:cs typeface="Inter" pitchFamily="34" charset="-120"/>
+              </a:rPr>
+              <a:t>+6.2 pts</a:t>
+            </a:r>
+            <a:endParaRPr lang="en-US" sz="1600" dirty="0"/>
+          </a:p>
+        </p:txBody>
+      </p:sp>
+      <p:sp>
+        <p:nvSpPr>
+          <p:cNvPr id="13" name="Text 11"/>
+          <p:cNvSpPr txBox="1"/>
+          <p:nvPr/>
+        </p:nvSpPr>
+        <p:spPr>
+          <a:xfrm>
+            <a:off x="749808" y="2858414"/>
+            <a:ext cx="365760" cy="755294"/>
           </a:xfrm>
           <a:prstGeom prst="rect">
             <a:avLst/>
@@ -29561,7 +30196,7 @@
                 <a:ea typeface="Inter" pitchFamily="34" charset="-122"/>
                 <a:cs typeface="Inter" pitchFamily="34" charset="-120"/>
               </a:rPr>
-              <a:t>1</a:t>
+              <a:t>2</a:t>
             </a:r>
             <a:endParaRPr lang="en-US" sz="1500" dirty="0"/>
           </a:p>
@@ -29569,14 +30204,14 @@
       </p:sp>
       <p:sp>
         <p:nvSpPr>
-          <p:cNvPr id="13" name="Text 11"/>
-          <p:cNvSpPr txBox="1"/>
-          <p:nvPr/>
-        </p:nvSpPr>
-        <p:spPr>
-          <a:xfrm>
-            <a:off x="1115568" y="2121408"/>
-            <a:ext cx="1737360" cy="751637"/>
+          <p:cNvPr id="14" name="Text 12"/>
+          <p:cNvSpPr txBox="1"/>
+          <p:nvPr/>
+        </p:nvSpPr>
+        <p:spPr>
+          <a:xfrm>
+            <a:off x="1097280" y="2858414"/>
+            <a:ext cx="1825752" cy="755294"/>
           </a:xfrm>
           <a:prstGeom prst="rect">
             <a:avLst/>
@@ -29589,6 +30224,9 @@
           <a:lstStyle/>
           <a:p>
             <a:pPr indent="0" marL="0">
+              <a:spcAft>
+                <a:spcPts val="200"/>
+              </a:spcAft>
               <a:buNone/>
             </a:pPr>
             <a:r>
@@ -29600,38 +30238,19 @@
                 <a:ea typeface="Inter" pitchFamily="34" charset="-122"/>
                 <a:cs typeface="Inter" pitchFamily="34" charset="-120"/>
               </a:rPr>
-              <a:t>Acura</a:t>
+              <a:t>Hyundai Prescott</a:t>
             </a:r>
             <a:endParaRPr lang="en-US" sz="1400" dirty="0"/>
           </a:p>
-        </p:txBody>
-      </p:sp>
-      <p:sp>
-        <p:nvSpPr>
-          <p:cNvPr id="14" name="Text 12"/>
-          <p:cNvSpPr txBox="1"/>
-          <p:nvPr/>
-        </p:nvSpPr>
-        <p:spPr>
-          <a:xfrm>
-            <a:off x="2898648" y="2121408"/>
-            <a:ext cx="1920240" cy="751637"/>
-          </a:xfrm>
-          <a:prstGeom prst="rect">
-            <a:avLst/>
-          </a:prstGeom>
-          <a:noFill/>
-          <a:ln/>
-        </p:spPr>
-        <p:txBody>
-          <a:bodyPr wrap="square" lIns="0" tIns="0" rIns="0" bIns="0" rtlCol="0" anchor="ctr"/>
-          <a:lstStyle/>
           <a:p>
             <a:pPr indent="0" marL="0">
-              <a:buNone/>
-            </a:pPr>
-            <a:r>
-              <a:rPr lang="en-US" sz="1400" dirty="0">
+              <a:spcAft>
+                <a:spcPts val="200"/>
+              </a:spcAft>
+              <a:buNone/>
+            </a:pPr>
+            <a:r>
+              <a:rPr lang="en-US" sz="1200" dirty="0">
                 <a:solidFill>
                   <a:srgbClr val="595959"/>
                 </a:solidFill>
@@ -29639,13 +30258,16 @@
                 <a:ea typeface="Inter" pitchFamily="34" charset="-122"/>
                 <a:cs typeface="Inter" pitchFamily="34" charset="-120"/>
               </a:rPr>
-              <a:t>27.8%  </a:t>
+              <a:t>27.4%  →  </a:t>
             </a:r>
             <a:pPr indent="0" marL="0">
-              <a:buNone/>
-            </a:pPr>
-            <a:r>
-              <a:rPr lang="en-US" sz="1400" b="1" dirty="0">
+              <a:spcAft>
+                <a:spcPts val="200"/>
+              </a:spcAft>
+              <a:buNone/>
+            </a:pPr>
+            <a:r>
+              <a:rPr lang="en-US" sz="1200" b="1" dirty="0">
                 <a:solidFill>
                   <a:srgbClr val="0B7A4A"/>
                 </a:solidFill>
@@ -29653,13 +30275,38 @@
                 <a:ea typeface="Inter" pitchFamily="34" charset="-122"/>
                 <a:cs typeface="Inter" pitchFamily="34" charset="-120"/>
               </a:rPr>
-              <a:t>→  </a:t>
-            </a:r>
-            <a:pPr indent="0" marL="0">
-              <a:buNone/>
-            </a:pPr>
-            <a:r>
-              <a:rPr lang="en-US" sz="1400" b="1" dirty="0">
+              <a:t>33.4%</a:t>
+            </a:r>
+            <a:endParaRPr lang="en-US" sz="1400" dirty="0"/>
+          </a:p>
+        </p:txBody>
+      </p:sp>
+      <p:sp>
+        <p:nvSpPr>
+          <p:cNvPr id="15" name="Text 13"/>
+          <p:cNvSpPr txBox="1"/>
+          <p:nvPr/>
+        </p:nvSpPr>
+        <p:spPr>
+          <a:xfrm>
+            <a:off x="2941320" y="2858414"/>
+            <a:ext cx="1115568" cy="755294"/>
+          </a:xfrm>
+          <a:prstGeom prst="rect">
+            <a:avLst/>
+          </a:prstGeom>
+          <a:noFill/>
+          <a:ln/>
+        </p:spPr>
+        <p:txBody>
+          <a:bodyPr wrap="square" lIns="0" tIns="0" rIns="0" bIns="0" rtlCol="0" anchor="ctr"/>
+          <a:lstStyle/>
+          <a:p>
+            <a:pPr algn="r" indent="0" marL="0">
+              <a:buNone/>
+            </a:pPr>
+            <a:r>
+              <a:rPr lang="en-US" sz="1600" b="1" dirty="0">
                 <a:solidFill>
                   <a:srgbClr val="0B7A4A"/>
                 </a:solidFill>
@@ -29667,46 +30314,7 @@
                 <a:ea typeface="Inter" pitchFamily="34" charset="-122"/>
                 <a:cs typeface="Inter" pitchFamily="34" charset="-120"/>
               </a:rPr>
-              <a:t>34.0%</a:t>
-            </a:r>
-            <a:endParaRPr lang="en-US" sz="1400" dirty="0"/>
-          </a:p>
-        </p:txBody>
-      </p:sp>
-      <p:sp>
-        <p:nvSpPr>
-          <p:cNvPr id="15" name="Text 13"/>
-          <p:cNvSpPr txBox="1"/>
-          <p:nvPr/>
-        </p:nvSpPr>
-        <p:spPr>
-          <a:xfrm>
-            <a:off x="4864608" y="2121408"/>
-            <a:ext cx="1051560" cy="751637"/>
-          </a:xfrm>
-          <a:prstGeom prst="rect">
-            <a:avLst/>
-          </a:prstGeom>
-          <a:noFill/>
-          <a:ln/>
-        </p:spPr>
-        <p:txBody>
-          <a:bodyPr wrap="square" lIns="0" tIns="0" rIns="0" bIns="0" rtlCol="0" anchor="ctr"/>
-          <a:lstStyle/>
-          <a:p>
-            <a:pPr algn="r" indent="0" marL="0">
-              <a:buNone/>
-            </a:pPr>
-            <a:r>
-              <a:rPr lang="en-US" sz="1600" b="1" dirty="0">
-                <a:solidFill>
-                  <a:srgbClr val="0B7A4A"/>
-                </a:solidFill>
-                <a:latin typeface="Inter" pitchFamily="34" charset="0"/>
-                <a:ea typeface="Inter" pitchFamily="34" charset="-122"/>
-                <a:cs typeface="Inter" pitchFamily="34" charset="-120"/>
-              </a:rPr>
-              <a:t>+6.2 pts</a:t>
+              <a:t>+6.0 pts</a:t>
             </a:r>
             <a:endParaRPr lang="en-US" sz="1600" dirty="0"/>
           </a:p>
@@ -29714,198 +30322,14 @@
       </p:sp>
       <p:sp>
         <p:nvSpPr>
-          <p:cNvPr id="16" name="Text 14"/>
-          <p:cNvSpPr txBox="1"/>
-          <p:nvPr/>
-        </p:nvSpPr>
-        <p:spPr>
-          <a:xfrm>
-            <a:off x="749808" y="2873045"/>
-            <a:ext cx="320040" cy="751637"/>
-          </a:xfrm>
-          <a:prstGeom prst="rect">
-            <a:avLst/>
-          </a:prstGeom>
-          <a:noFill/>
-          <a:ln/>
-        </p:spPr>
-        <p:txBody>
-          <a:bodyPr wrap="square" lIns="0" tIns="0" rIns="0" bIns="0" rtlCol="0" anchor="ctr"/>
-          <a:lstStyle/>
-          <a:p>
-            <a:pPr indent="0" marL="0">
-              <a:buNone/>
-            </a:pPr>
-            <a:r>
-              <a:rPr lang="en-US" sz="1500" b="1" dirty="0">
-                <a:solidFill>
-                  <a:srgbClr val="0B2C4A"/>
-                </a:solidFill>
-                <a:latin typeface="Inter" pitchFamily="34" charset="0"/>
-                <a:ea typeface="Inter" pitchFamily="34" charset="-122"/>
-                <a:cs typeface="Inter" pitchFamily="34" charset="-120"/>
-              </a:rPr>
-              <a:t>2</a:t>
-            </a:r>
-            <a:endParaRPr lang="en-US" sz="1500" dirty="0"/>
-          </a:p>
-        </p:txBody>
-      </p:sp>
-      <p:sp>
-        <p:nvSpPr>
-          <p:cNvPr id="17" name="Text 15"/>
-          <p:cNvSpPr txBox="1"/>
-          <p:nvPr/>
-        </p:nvSpPr>
-        <p:spPr>
-          <a:xfrm>
-            <a:off x="1115568" y="2873045"/>
-            <a:ext cx="1737360" cy="751637"/>
-          </a:xfrm>
-          <a:prstGeom prst="rect">
-            <a:avLst/>
-          </a:prstGeom>
-          <a:noFill/>
-          <a:ln/>
-        </p:spPr>
-        <p:txBody>
-          <a:bodyPr wrap="square" lIns="0" tIns="0" rIns="0" bIns="0" rtlCol="0" anchor="ctr"/>
-          <a:lstStyle/>
-          <a:p>
-            <a:pPr indent="0" marL="0">
-              <a:buNone/>
-            </a:pPr>
-            <a:r>
-              <a:rPr lang="en-US" sz="1400" b="1" dirty="0">
-                <a:solidFill>
-                  <a:srgbClr val="1A1A1A"/>
-                </a:solidFill>
-                <a:latin typeface="Inter" pitchFamily="34" charset="0"/>
-                <a:ea typeface="Inter" pitchFamily="34" charset="-122"/>
-                <a:cs typeface="Inter" pitchFamily="34" charset="-120"/>
-              </a:rPr>
-              <a:t>Hyundai Prescott</a:t>
-            </a:r>
-            <a:endParaRPr lang="en-US" sz="1400" dirty="0"/>
-          </a:p>
-        </p:txBody>
-      </p:sp>
-      <p:sp>
-        <p:nvSpPr>
-          <p:cNvPr id="18" name="Text 16"/>
-          <p:cNvSpPr txBox="1"/>
-          <p:nvPr/>
-        </p:nvSpPr>
-        <p:spPr>
-          <a:xfrm>
-            <a:off x="2898648" y="2873045"/>
-            <a:ext cx="1920240" cy="751637"/>
-          </a:xfrm>
-          <a:prstGeom prst="rect">
-            <a:avLst/>
-          </a:prstGeom>
-          <a:noFill/>
-          <a:ln/>
-        </p:spPr>
-        <p:txBody>
-          <a:bodyPr wrap="square" lIns="0" tIns="0" rIns="0" bIns="0" rtlCol="0" anchor="ctr"/>
-          <a:lstStyle/>
-          <a:p>
-            <a:pPr indent="0" marL="0">
-              <a:buNone/>
-            </a:pPr>
-            <a:r>
-              <a:rPr lang="en-US" sz="1400" dirty="0">
-                <a:solidFill>
-                  <a:srgbClr val="595959"/>
-                </a:solidFill>
-                <a:latin typeface="Inter" pitchFamily="34" charset="0"/>
-                <a:ea typeface="Inter" pitchFamily="34" charset="-122"/>
-                <a:cs typeface="Inter" pitchFamily="34" charset="-120"/>
-              </a:rPr>
-              <a:t>27.4%  </a:t>
-            </a:r>
-            <a:pPr indent="0" marL="0">
-              <a:buNone/>
-            </a:pPr>
-            <a:r>
-              <a:rPr lang="en-US" sz="1400" b="1" dirty="0">
-                <a:solidFill>
-                  <a:srgbClr val="0B7A4A"/>
-                </a:solidFill>
-                <a:latin typeface="Inter" pitchFamily="34" charset="0"/>
-                <a:ea typeface="Inter" pitchFamily="34" charset="-122"/>
-                <a:cs typeface="Inter" pitchFamily="34" charset="-120"/>
-              </a:rPr>
-              <a:t>→  </a:t>
-            </a:r>
-            <a:pPr indent="0" marL="0">
-              <a:buNone/>
-            </a:pPr>
-            <a:r>
-              <a:rPr lang="en-US" sz="1400" b="1" dirty="0">
-                <a:solidFill>
-                  <a:srgbClr val="0B7A4A"/>
-                </a:solidFill>
-                <a:latin typeface="Inter" pitchFamily="34" charset="0"/>
-                <a:ea typeface="Inter" pitchFamily="34" charset="-122"/>
-                <a:cs typeface="Inter" pitchFamily="34" charset="-120"/>
-              </a:rPr>
-              <a:t>33.4%</a:t>
-            </a:r>
-            <a:endParaRPr lang="en-US" sz="1400" dirty="0"/>
-          </a:p>
-        </p:txBody>
-      </p:sp>
-      <p:sp>
-        <p:nvSpPr>
-          <p:cNvPr id="19" name="Text 17"/>
-          <p:cNvSpPr txBox="1"/>
-          <p:nvPr/>
-        </p:nvSpPr>
-        <p:spPr>
-          <a:xfrm>
-            <a:off x="4864608" y="2873045"/>
-            <a:ext cx="1051560" cy="751637"/>
-          </a:xfrm>
-          <a:prstGeom prst="rect">
-            <a:avLst/>
-          </a:prstGeom>
-          <a:noFill/>
-          <a:ln/>
-        </p:spPr>
-        <p:txBody>
-          <a:bodyPr wrap="square" lIns="0" tIns="0" rIns="0" bIns="0" rtlCol="0" anchor="ctr"/>
-          <a:lstStyle/>
-          <a:p>
-            <a:pPr algn="r" indent="0" marL="0">
-              <a:buNone/>
-            </a:pPr>
-            <a:r>
-              <a:rPr lang="en-US" sz="1600" b="1" dirty="0">
-                <a:solidFill>
-                  <a:srgbClr val="0B7A4A"/>
-                </a:solidFill>
-                <a:latin typeface="Inter" pitchFamily="34" charset="0"/>
-                <a:ea typeface="Inter" pitchFamily="34" charset="-122"/>
-                <a:cs typeface="Inter" pitchFamily="34" charset="-120"/>
-              </a:rPr>
-              <a:t>+6.0 pts</a:t>
-            </a:r>
-            <a:endParaRPr lang="en-US" sz="1600" dirty="0"/>
-          </a:p>
-        </p:txBody>
-      </p:sp>
-      <p:sp>
-        <p:nvSpPr>
-          <p:cNvPr id="20" name="Shape 18"/>
+          <p:cNvPr id="16" name="Shape 14"/>
           <p:cNvSpPr/>
           <p:nvPr/>
         </p:nvSpPr>
         <p:spPr>
           <a:xfrm>
-            <a:off x="658368" y="3624682"/>
-            <a:ext cx="5321808" cy="751637"/>
+            <a:off x="658368" y="3613709"/>
+            <a:ext cx="3489960" cy="755294"/>
           </a:xfrm>
           <a:prstGeom prst="rect">
             <a:avLst/>
@@ -29918,14 +30342,210 @@
       </p:sp>
       <p:sp>
         <p:nvSpPr>
+          <p:cNvPr id="17" name="Text 15"/>
+          <p:cNvSpPr txBox="1"/>
+          <p:nvPr/>
+        </p:nvSpPr>
+        <p:spPr>
+          <a:xfrm>
+            <a:off x="749808" y="3613709"/>
+            <a:ext cx="365760" cy="755294"/>
+          </a:xfrm>
+          <a:prstGeom prst="rect">
+            <a:avLst/>
+          </a:prstGeom>
+          <a:noFill/>
+          <a:ln/>
+        </p:spPr>
+        <p:txBody>
+          <a:bodyPr wrap="square" lIns="0" tIns="0" rIns="0" bIns="0" rtlCol="0" anchor="ctr"/>
+          <a:lstStyle/>
+          <a:p>
+            <a:pPr indent="0" marL="0">
+              <a:buNone/>
+            </a:pPr>
+            <a:r>
+              <a:rPr lang="en-US" sz="1500" b="1" dirty="0">
+                <a:solidFill>
+                  <a:srgbClr val="0B2C4A"/>
+                </a:solidFill>
+                <a:latin typeface="Inter" pitchFamily="34" charset="0"/>
+                <a:ea typeface="Inter" pitchFamily="34" charset="-122"/>
+                <a:cs typeface="Inter" pitchFamily="34" charset="-120"/>
+              </a:rPr>
+              <a:t>3</a:t>
+            </a:r>
+            <a:endParaRPr lang="en-US" sz="1500" dirty="0"/>
+          </a:p>
+        </p:txBody>
+      </p:sp>
+      <p:sp>
+        <p:nvSpPr>
+          <p:cNvPr id="18" name="Text 16"/>
+          <p:cNvSpPr txBox="1"/>
+          <p:nvPr/>
+        </p:nvSpPr>
+        <p:spPr>
+          <a:xfrm>
+            <a:off x="1097280" y="3613709"/>
+            <a:ext cx="1825752" cy="755294"/>
+          </a:xfrm>
+          <a:prstGeom prst="rect">
+            <a:avLst/>
+          </a:prstGeom>
+          <a:noFill/>
+          <a:ln/>
+        </p:spPr>
+        <p:txBody>
+          <a:bodyPr wrap="square" lIns="0" tIns="0" rIns="0" bIns="0" rtlCol="0" anchor="ctr"/>
+          <a:lstStyle/>
+          <a:p>
+            <a:pPr indent="0" marL="0">
+              <a:spcAft>
+                <a:spcPts val="200"/>
+              </a:spcAft>
+              <a:buNone/>
+            </a:pPr>
+            <a:r>
+              <a:rPr lang="en-US" sz="1400" b="1" dirty="0">
+                <a:solidFill>
+                  <a:srgbClr val="1A1A1A"/>
+                </a:solidFill>
+                <a:latin typeface="Inter" pitchFamily="34" charset="0"/>
+                <a:ea typeface="Inter" pitchFamily="34" charset="-122"/>
+                <a:cs typeface="Inter" pitchFamily="34" charset="-120"/>
+              </a:rPr>
+              <a:t>Honda Flagstaff</a:t>
+            </a:r>
+            <a:endParaRPr lang="en-US" sz="1400" dirty="0"/>
+          </a:p>
+          <a:p>
+            <a:pPr indent="0" marL="0">
+              <a:spcAft>
+                <a:spcPts val="200"/>
+              </a:spcAft>
+              <a:buNone/>
+            </a:pPr>
+            <a:r>
+              <a:rPr lang="en-US" sz="1200" dirty="0">
+                <a:solidFill>
+                  <a:srgbClr val="595959"/>
+                </a:solidFill>
+                <a:latin typeface="Inter" pitchFamily="34" charset="0"/>
+                <a:ea typeface="Inter" pitchFamily="34" charset="-122"/>
+                <a:cs typeface="Inter" pitchFamily="34" charset="-120"/>
+              </a:rPr>
+              <a:t>25.3%  →  </a:t>
+            </a:r>
+            <a:pPr indent="0" marL="0">
+              <a:spcAft>
+                <a:spcPts val="200"/>
+              </a:spcAft>
+              <a:buNone/>
+            </a:pPr>
+            <a:r>
+              <a:rPr lang="en-US" sz="1200" b="1" dirty="0">
+                <a:solidFill>
+                  <a:srgbClr val="0B7A4A"/>
+                </a:solidFill>
+                <a:latin typeface="Inter" pitchFamily="34" charset="0"/>
+                <a:ea typeface="Inter" pitchFamily="34" charset="-122"/>
+                <a:cs typeface="Inter" pitchFamily="34" charset="-120"/>
+              </a:rPr>
+              <a:t>29.7%</a:t>
+            </a:r>
+            <a:endParaRPr lang="en-US" sz="1400" dirty="0"/>
+          </a:p>
+        </p:txBody>
+      </p:sp>
+      <p:sp>
+        <p:nvSpPr>
+          <p:cNvPr id="19" name="Text 17"/>
+          <p:cNvSpPr txBox="1"/>
+          <p:nvPr/>
+        </p:nvSpPr>
+        <p:spPr>
+          <a:xfrm>
+            <a:off x="2941320" y="3613709"/>
+            <a:ext cx="1115568" cy="755294"/>
+          </a:xfrm>
+          <a:prstGeom prst="rect">
+            <a:avLst/>
+          </a:prstGeom>
+          <a:noFill/>
+          <a:ln/>
+        </p:spPr>
+        <p:txBody>
+          <a:bodyPr wrap="square" lIns="0" tIns="0" rIns="0" bIns="0" rtlCol="0" anchor="ctr"/>
+          <a:lstStyle/>
+          <a:p>
+            <a:pPr algn="r" indent="0" marL="0">
+              <a:buNone/>
+            </a:pPr>
+            <a:r>
+              <a:rPr lang="en-US" sz="1600" b="1" dirty="0">
+                <a:solidFill>
+                  <a:srgbClr val="0B7A4A"/>
+                </a:solidFill>
+                <a:latin typeface="Inter" pitchFamily="34" charset="0"/>
+                <a:ea typeface="Inter" pitchFamily="34" charset="-122"/>
+                <a:cs typeface="Inter" pitchFamily="34" charset="-120"/>
+              </a:rPr>
+              <a:t>+4.4 pts</a:t>
+            </a:r>
+            <a:endParaRPr lang="en-US" sz="1600" dirty="0"/>
+          </a:p>
+        </p:txBody>
+      </p:sp>
+      <p:sp>
+        <p:nvSpPr>
+          <p:cNvPr id="20" name="Text 18"/>
+          <p:cNvSpPr txBox="1"/>
+          <p:nvPr/>
+        </p:nvSpPr>
+        <p:spPr>
+          <a:xfrm>
+            <a:off x="749808" y="4369003"/>
+            <a:ext cx="365760" cy="755294"/>
+          </a:xfrm>
+          <a:prstGeom prst="rect">
+            <a:avLst/>
+          </a:prstGeom>
+          <a:noFill/>
+          <a:ln/>
+        </p:spPr>
+        <p:txBody>
+          <a:bodyPr wrap="square" lIns="0" tIns="0" rIns="0" bIns="0" rtlCol="0" anchor="ctr"/>
+          <a:lstStyle/>
+          <a:p>
+            <a:pPr indent="0" marL="0">
+              <a:buNone/>
+            </a:pPr>
+            <a:r>
+              <a:rPr lang="en-US" sz="1500" b="1" dirty="0">
+                <a:solidFill>
+                  <a:srgbClr val="0B2C4A"/>
+                </a:solidFill>
+                <a:latin typeface="Inter" pitchFamily="34" charset="0"/>
+                <a:ea typeface="Inter" pitchFamily="34" charset="-122"/>
+                <a:cs typeface="Inter" pitchFamily="34" charset="-120"/>
+              </a:rPr>
+              <a:t>4</a:t>
+            </a:r>
+            <a:endParaRPr lang="en-US" sz="1500" dirty="0"/>
+          </a:p>
+        </p:txBody>
+      </p:sp>
+      <p:sp>
+        <p:nvSpPr>
           <p:cNvPr id="21" name="Text 19"/>
           <p:cNvSpPr txBox="1"/>
           <p:nvPr/>
         </p:nvSpPr>
         <p:spPr>
           <a:xfrm>
-            <a:off x="749808" y="3624682"/>
-            <a:ext cx="320040" cy="751637"/>
+            <a:off x="1097280" y="4369003"/>
+            <a:ext cx="1825752" cy="755294"/>
           </a:xfrm>
           <a:prstGeom prst="rect">
             <a:avLst/>
@@ -29938,20 +30558,60 @@
           <a:lstStyle/>
           <a:p>
             <a:pPr indent="0" marL="0">
-              <a:buNone/>
-            </a:pPr>
-            <a:r>
-              <a:rPr lang="en-US" sz="1500" b="1" dirty="0">
-                <a:solidFill>
-                  <a:srgbClr val="0B2C4A"/>
-                </a:solidFill>
-                <a:latin typeface="Inter" pitchFamily="34" charset="0"/>
-                <a:ea typeface="Inter" pitchFamily="34" charset="-122"/>
-                <a:cs typeface="Inter" pitchFamily="34" charset="-120"/>
-              </a:rPr>
-              <a:t>3</a:t>
-            </a:r>
-            <a:endParaRPr lang="en-US" sz="1500" dirty="0"/>
+              <a:spcAft>
+                <a:spcPts val="200"/>
+              </a:spcAft>
+              <a:buNone/>
+            </a:pPr>
+            <a:r>
+              <a:rPr lang="en-US" sz="1400" b="1" dirty="0">
+                <a:solidFill>
+                  <a:srgbClr val="1A1A1A"/>
+                </a:solidFill>
+                <a:latin typeface="Inter" pitchFamily="34" charset="0"/>
+                <a:ea typeface="Inter" pitchFamily="34" charset="-122"/>
+                <a:cs typeface="Inter" pitchFamily="34" charset="-120"/>
+              </a:rPr>
+              <a:t>VW Henderson</a:t>
+            </a:r>
+            <a:endParaRPr lang="en-US" sz="1400" dirty="0"/>
+          </a:p>
+          <a:p>
+            <a:pPr indent="0" marL="0">
+              <a:spcAft>
+                <a:spcPts val="200"/>
+              </a:spcAft>
+              <a:buNone/>
+            </a:pPr>
+            <a:r>
+              <a:rPr lang="en-US" sz="1200" dirty="0">
+                <a:solidFill>
+                  <a:srgbClr val="595959"/>
+                </a:solidFill>
+                <a:latin typeface="Inter" pitchFamily="34" charset="0"/>
+                <a:ea typeface="Inter" pitchFamily="34" charset="-122"/>
+                <a:cs typeface="Inter" pitchFamily="34" charset="-120"/>
+              </a:rPr>
+              <a:t>23.5%  →  </a:t>
+            </a:r>
+            <a:pPr indent="0" marL="0">
+              <a:spcAft>
+                <a:spcPts val="200"/>
+              </a:spcAft>
+              <a:buNone/>
+            </a:pPr>
+            <a:r>
+              <a:rPr lang="en-US" sz="1200" b="1" dirty="0">
+                <a:solidFill>
+                  <a:srgbClr val="0B7A4A"/>
+                </a:solidFill>
+                <a:latin typeface="Inter" pitchFamily="34" charset="0"/>
+                <a:ea typeface="Inter" pitchFamily="34" charset="-122"/>
+                <a:cs typeface="Inter" pitchFamily="34" charset="-120"/>
+              </a:rPr>
+              <a:t>26.8%</a:t>
+            </a:r>
+            <a:endParaRPr lang="en-US" sz="1400" dirty="0"/>
           </a:p>
         </p:txBody>
       </p:sp>
@@ -29963,77 +30623,24 @@
         </p:nvSpPr>
         <p:spPr>
           <a:xfrm>
-            <a:off x="1115568" y="3624682"/>
-            <a:ext cx="1737360" cy="751637"/>
-          </a:xfrm>
-          <a:prstGeom prst="rect">
-            <a:avLst/>
-          </a:prstGeom>
-          <a:noFill/>
-          <a:ln/>
-        </p:spPr>
-        <p:txBody>
-          <a:bodyPr wrap="square" lIns="0" tIns="0" rIns="0" bIns="0" rtlCol="0" anchor="ctr"/>
-          <a:lstStyle/>
-          <a:p>
-            <a:pPr indent="0" marL="0">
-              <a:buNone/>
-            </a:pPr>
-            <a:r>
-              <a:rPr lang="en-US" sz="1400" b="1" dirty="0">
-                <a:solidFill>
-                  <a:srgbClr val="1A1A1A"/>
-                </a:solidFill>
-                <a:latin typeface="Inter" pitchFamily="34" charset="0"/>
-                <a:ea typeface="Inter" pitchFamily="34" charset="-122"/>
-                <a:cs typeface="Inter" pitchFamily="34" charset="-120"/>
-              </a:rPr>
-              <a:t>Honda Flagstaff</a:t>
-            </a:r>
-            <a:endParaRPr lang="en-US" sz="1400" dirty="0"/>
-          </a:p>
-        </p:txBody>
-      </p:sp>
-      <p:sp>
-        <p:nvSpPr>
-          <p:cNvPr id="23" name="Text 21"/>
-          <p:cNvSpPr txBox="1"/>
-          <p:nvPr/>
-        </p:nvSpPr>
-        <p:spPr>
-          <a:xfrm>
-            <a:off x="2898648" y="3624682"/>
-            <a:ext cx="1920240" cy="751637"/>
-          </a:xfrm>
-          <a:prstGeom prst="rect">
-            <a:avLst/>
-          </a:prstGeom>
-          <a:noFill/>
-          <a:ln/>
-        </p:spPr>
-        <p:txBody>
-          <a:bodyPr wrap="square" lIns="0" tIns="0" rIns="0" bIns="0" rtlCol="0" anchor="ctr"/>
-          <a:lstStyle/>
-          <a:p>
-            <a:pPr indent="0" marL="0">
-              <a:buNone/>
-            </a:pPr>
-            <a:r>
-              <a:rPr lang="en-US" sz="1400" dirty="0">
-                <a:solidFill>
-                  <a:srgbClr val="595959"/>
-                </a:solidFill>
-                <a:latin typeface="Inter" pitchFamily="34" charset="0"/>
-                <a:ea typeface="Inter" pitchFamily="34" charset="-122"/>
-                <a:cs typeface="Inter" pitchFamily="34" charset="-120"/>
-              </a:rPr>
-              <a:t>25.3%  </a:t>
-            </a:r>
-            <a:pPr indent="0" marL="0">
-              <a:buNone/>
-            </a:pPr>
-            <a:r>
-              <a:rPr lang="en-US" sz="1400" b="1" dirty="0">
+            <a:off x="2941320" y="4369003"/>
+            <a:ext cx="1115568" cy="755294"/>
+          </a:xfrm>
+          <a:prstGeom prst="rect">
+            <a:avLst/>
+          </a:prstGeom>
+          <a:noFill/>
+          <a:ln/>
+        </p:spPr>
+        <p:txBody>
+          <a:bodyPr wrap="square" lIns="0" tIns="0" rIns="0" bIns="0" rtlCol="0" anchor="ctr"/>
+          <a:lstStyle/>
+          <a:p>
+            <a:pPr algn="r" indent="0" marL="0">
+              <a:buNone/>
+            </a:pPr>
+            <a:r>
+              <a:rPr lang="en-US" sz="1600" b="1" dirty="0">
                 <a:solidFill>
                   <a:srgbClr val="0B7A4A"/>
                 </a:solidFill>
@@ -30041,60 +30648,7 @@
                 <a:ea typeface="Inter" pitchFamily="34" charset="-122"/>
                 <a:cs typeface="Inter" pitchFamily="34" charset="-120"/>
               </a:rPr>
-              <a:t>→  </a:t>
-            </a:r>
-            <a:pPr indent="0" marL="0">
-              <a:buNone/>
-            </a:pPr>
-            <a:r>
-              <a:rPr lang="en-US" sz="1400" b="1" dirty="0">
-                <a:solidFill>
-                  <a:srgbClr val="0B7A4A"/>
-                </a:solidFill>
-                <a:latin typeface="Inter" pitchFamily="34" charset="0"/>
-                <a:ea typeface="Inter" pitchFamily="34" charset="-122"/>
-                <a:cs typeface="Inter" pitchFamily="34" charset="-120"/>
-              </a:rPr>
-              <a:t>29.7%</a:t>
-            </a:r>
-            <a:endParaRPr lang="en-US" sz="1400" dirty="0"/>
-          </a:p>
-        </p:txBody>
-      </p:sp>
-      <p:sp>
-        <p:nvSpPr>
-          <p:cNvPr id="24" name="Text 22"/>
-          <p:cNvSpPr txBox="1"/>
-          <p:nvPr/>
-        </p:nvSpPr>
-        <p:spPr>
-          <a:xfrm>
-            <a:off x="4864608" y="3624682"/>
-            <a:ext cx="1051560" cy="751637"/>
-          </a:xfrm>
-          <a:prstGeom prst="rect">
-            <a:avLst/>
-          </a:prstGeom>
-          <a:noFill/>
-          <a:ln/>
-        </p:spPr>
-        <p:txBody>
-          <a:bodyPr wrap="square" lIns="0" tIns="0" rIns="0" bIns="0" rtlCol="0" anchor="ctr"/>
-          <a:lstStyle/>
-          <a:p>
-            <a:pPr algn="r" indent="0" marL="0">
-              <a:buNone/>
-            </a:pPr>
-            <a:r>
-              <a:rPr lang="en-US" sz="1600" b="1" dirty="0">
-                <a:solidFill>
-                  <a:srgbClr val="0B7A4A"/>
-                </a:solidFill>
-                <a:latin typeface="Inter" pitchFamily="34" charset="0"/>
-                <a:ea typeface="Inter" pitchFamily="34" charset="-122"/>
-                <a:cs typeface="Inter" pitchFamily="34" charset="-120"/>
-              </a:rPr>
-              <a:t>+4.4 pts</a:t>
+              <a:t>+3.3 pts</a:t>
             </a:r>
             <a:endParaRPr lang="en-US" sz="1600" dirty="0"/>
           </a:p>
@@ -30102,198 +30656,14 @@
       </p:sp>
       <p:sp>
         <p:nvSpPr>
-          <p:cNvPr id="25" name="Text 23"/>
-          <p:cNvSpPr txBox="1"/>
-          <p:nvPr/>
-        </p:nvSpPr>
-        <p:spPr>
-          <a:xfrm>
-            <a:off x="749808" y="4376318"/>
-            <a:ext cx="320040" cy="751637"/>
-          </a:xfrm>
-          <a:prstGeom prst="rect">
-            <a:avLst/>
-          </a:prstGeom>
-          <a:noFill/>
-          <a:ln/>
-        </p:spPr>
-        <p:txBody>
-          <a:bodyPr wrap="square" lIns="0" tIns="0" rIns="0" bIns="0" rtlCol="0" anchor="ctr"/>
-          <a:lstStyle/>
-          <a:p>
-            <a:pPr indent="0" marL="0">
-              <a:buNone/>
-            </a:pPr>
-            <a:r>
-              <a:rPr lang="en-US" sz="1500" b="1" dirty="0">
-                <a:solidFill>
-                  <a:srgbClr val="0B2C4A"/>
-                </a:solidFill>
-                <a:latin typeface="Inter" pitchFamily="34" charset="0"/>
-                <a:ea typeface="Inter" pitchFamily="34" charset="-122"/>
-                <a:cs typeface="Inter" pitchFamily="34" charset="-120"/>
-              </a:rPr>
-              <a:t>4</a:t>
-            </a:r>
-            <a:endParaRPr lang="en-US" sz="1500" dirty="0"/>
-          </a:p>
-        </p:txBody>
-      </p:sp>
-      <p:sp>
-        <p:nvSpPr>
-          <p:cNvPr id="26" name="Text 24"/>
-          <p:cNvSpPr txBox="1"/>
-          <p:nvPr/>
-        </p:nvSpPr>
-        <p:spPr>
-          <a:xfrm>
-            <a:off x="1115568" y="4376318"/>
-            <a:ext cx="1737360" cy="751637"/>
-          </a:xfrm>
-          <a:prstGeom prst="rect">
-            <a:avLst/>
-          </a:prstGeom>
-          <a:noFill/>
-          <a:ln/>
-        </p:spPr>
-        <p:txBody>
-          <a:bodyPr wrap="square" lIns="0" tIns="0" rIns="0" bIns="0" rtlCol="0" anchor="ctr"/>
-          <a:lstStyle/>
-          <a:p>
-            <a:pPr indent="0" marL="0">
-              <a:buNone/>
-            </a:pPr>
-            <a:r>
-              <a:rPr lang="en-US" sz="1400" b="1" dirty="0">
-                <a:solidFill>
-                  <a:srgbClr val="1A1A1A"/>
-                </a:solidFill>
-                <a:latin typeface="Inter" pitchFamily="34" charset="0"/>
-                <a:ea typeface="Inter" pitchFamily="34" charset="-122"/>
-                <a:cs typeface="Inter" pitchFamily="34" charset="-120"/>
-              </a:rPr>
-              <a:t>VW Henderson</a:t>
-            </a:r>
-            <a:endParaRPr lang="en-US" sz="1400" dirty="0"/>
-          </a:p>
-        </p:txBody>
-      </p:sp>
-      <p:sp>
-        <p:nvSpPr>
-          <p:cNvPr id="27" name="Text 25"/>
-          <p:cNvSpPr txBox="1"/>
-          <p:nvPr/>
-        </p:nvSpPr>
-        <p:spPr>
-          <a:xfrm>
-            <a:off x="2898648" y="4376318"/>
-            <a:ext cx="1920240" cy="751637"/>
-          </a:xfrm>
-          <a:prstGeom prst="rect">
-            <a:avLst/>
-          </a:prstGeom>
-          <a:noFill/>
-          <a:ln/>
-        </p:spPr>
-        <p:txBody>
-          <a:bodyPr wrap="square" lIns="0" tIns="0" rIns="0" bIns="0" rtlCol="0" anchor="ctr"/>
-          <a:lstStyle/>
-          <a:p>
-            <a:pPr indent="0" marL="0">
-              <a:buNone/>
-            </a:pPr>
-            <a:r>
-              <a:rPr lang="en-US" sz="1400" dirty="0">
-                <a:solidFill>
-                  <a:srgbClr val="595959"/>
-                </a:solidFill>
-                <a:latin typeface="Inter" pitchFamily="34" charset="0"/>
-                <a:ea typeface="Inter" pitchFamily="34" charset="-122"/>
-                <a:cs typeface="Inter" pitchFamily="34" charset="-120"/>
-              </a:rPr>
-              <a:t>23.5%  </a:t>
-            </a:r>
-            <a:pPr indent="0" marL="0">
-              <a:buNone/>
-            </a:pPr>
-            <a:r>
-              <a:rPr lang="en-US" sz="1400" b="1" dirty="0">
-                <a:solidFill>
-                  <a:srgbClr val="0B7A4A"/>
-                </a:solidFill>
-                <a:latin typeface="Inter" pitchFamily="34" charset="0"/>
-                <a:ea typeface="Inter" pitchFamily="34" charset="-122"/>
-                <a:cs typeface="Inter" pitchFamily="34" charset="-120"/>
-              </a:rPr>
-              <a:t>→  </a:t>
-            </a:r>
-            <a:pPr indent="0" marL="0">
-              <a:buNone/>
-            </a:pPr>
-            <a:r>
-              <a:rPr lang="en-US" sz="1400" b="1" dirty="0">
-                <a:solidFill>
-                  <a:srgbClr val="0B7A4A"/>
-                </a:solidFill>
-                <a:latin typeface="Inter" pitchFamily="34" charset="0"/>
-                <a:ea typeface="Inter" pitchFamily="34" charset="-122"/>
-                <a:cs typeface="Inter" pitchFamily="34" charset="-120"/>
-              </a:rPr>
-              <a:t>26.8%</a:t>
-            </a:r>
-            <a:endParaRPr lang="en-US" sz="1400" dirty="0"/>
-          </a:p>
-        </p:txBody>
-      </p:sp>
-      <p:sp>
-        <p:nvSpPr>
-          <p:cNvPr id="28" name="Text 26"/>
-          <p:cNvSpPr txBox="1"/>
-          <p:nvPr/>
-        </p:nvSpPr>
-        <p:spPr>
-          <a:xfrm>
-            <a:off x="4864608" y="4376318"/>
-            <a:ext cx="1051560" cy="751637"/>
-          </a:xfrm>
-          <a:prstGeom prst="rect">
-            <a:avLst/>
-          </a:prstGeom>
-          <a:noFill/>
-          <a:ln/>
-        </p:spPr>
-        <p:txBody>
-          <a:bodyPr wrap="square" lIns="0" tIns="0" rIns="0" bIns="0" rtlCol="0" anchor="ctr"/>
-          <a:lstStyle/>
-          <a:p>
-            <a:pPr algn="r" indent="0" marL="0">
-              <a:buNone/>
-            </a:pPr>
-            <a:r>
-              <a:rPr lang="en-US" sz="1600" b="1" dirty="0">
-                <a:solidFill>
-                  <a:srgbClr val="0B7A4A"/>
-                </a:solidFill>
-                <a:latin typeface="Inter" pitchFamily="34" charset="0"/>
-                <a:ea typeface="Inter" pitchFamily="34" charset="-122"/>
-                <a:cs typeface="Inter" pitchFamily="34" charset="-120"/>
-              </a:rPr>
-              <a:t>+3.3 pts</a:t>
-            </a:r>
-            <a:endParaRPr lang="en-US" sz="1600" dirty="0"/>
-          </a:p>
-        </p:txBody>
-      </p:sp>
-      <p:sp>
-        <p:nvSpPr>
-          <p:cNvPr id="29" name="Shape 27"/>
+          <p:cNvPr id="23" name="Shape 21"/>
           <p:cNvSpPr/>
           <p:nvPr/>
         </p:nvSpPr>
         <p:spPr>
           <a:xfrm>
-            <a:off x="658368" y="5127955"/>
-            <a:ext cx="5321808" cy="751637"/>
+            <a:off x="658368" y="5124298"/>
+            <a:ext cx="3489960" cy="755294"/>
           </a:xfrm>
           <a:prstGeom prst="rect">
             <a:avLst/>
@@ -30306,14 +30676,14 @@
       </p:sp>
       <p:sp>
         <p:nvSpPr>
-          <p:cNvPr id="30" name="Text 28"/>
-          <p:cNvSpPr txBox="1"/>
-          <p:nvPr/>
-        </p:nvSpPr>
-        <p:spPr>
-          <a:xfrm>
-            <a:off x="749808" y="5127955"/>
-            <a:ext cx="320040" cy="751637"/>
+          <p:cNvPr id="24" name="Text 22"/>
+          <p:cNvSpPr txBox="1"/>
+          <p:nvPr/>
+        </p:nvSpPr>
+        <p:spPr>
+          <a:xfrm>
+            <a:off x="749808" y="5124298"/>
+            <a:ext cx="365760" cy="755294"/>
           </a:xfrm>
           <a:prstGeom prst="rect">
             <a:avLst/>
@@ -30345,14 +30715,14 @@
       </p:sp>
       <p:sp>
         <p:nvSpPr>
-          <p:cNvPr id="31" name="Text 29"/>
-          <p:cNvSpPr txBox="1"/>
-          <p:nvPr/>
-        </p:nvSpPr>
-        <p:spPr>
-          <a:xfrm>
-            <a:off x="1115568" y="5127955"/>
-            <a:ext cx="1737360" cy="751637"/>
+          <p:cNvPr id="25" name="Text 23"/>
+          <p:cNvSpPr txBox="1"/>
+          <p:nvPr/>
+        </p:nvSpPr>
+        <p:spPr>
+          <a:xfrm>
+            <a:off x="1097280" y="5124298"/>
+            <a:ext cx="1825752" cy="755294"/>
           </a:xfrm>
           <a:prstGeom prst="rect">
             <a:avLst/>
@@ -30365,6 +30735,9 @@
           <a:lstStyle/>
           <a:p>
             <a:pPr indent="0" marL="0">
+              <a:spcAft>
+                <a:spcPts val="200"/>
+              </a:spcAft>
               <a:buNone/>
             </a:pPr>
             <a:r>
@@ -30380,34 +30753,15 @@
             </a:r>
             <a:endParaRPr lang="en-US" sz="1400" dirty="0"/>
           </a:p>
-        </p:txBody>
-      </p:sp>
-      <p:sp>
-        <p:nvSpPr>
-          <p:cNvPr id="32" name="Text 30"/>
-          <p:cNvSpPr txBox="1"/>
-          <p:nvPr/>
-        </p:nvSpPr>
-        <p:spPr>
-          <a:xfrm>
-            <a:off x="2898648" y="5127955"/>
-            <a:ext cx="1920240" cy="751637"/>
-          </a:xfrm>
-          <a:prstGeom prst="rect">
-            <a:avLst/>
-          </a:prstGeom>
-          <a:noFill/>
-          <a:ln/>
-        </p:spPr>
-        <p:txBody>
-          <a:bodyPr wrap="square" lIns="0" tIns="0" rIns="0" bIns="0" rtlCol="0" anchor="ctr"/>
-          <a:lstStyle/>
           <a:p>
             <a:pPr indent="0" marL="0">
-              <a:buNone/>
-            </a:pPr>
-            <a:r>
-              <a:rPr lang="en-US" sz="1400" dirty="0">
+              <a:spcAft>
+                <a:spcPts val="200"/>
+              </a:spcAft>
+              <a:buNone/>
+            </a:pPr>
+            <a:r>
+              <a:rPr lang="en-US" sz="1200" dirty="0">
                 <a:solidFill>
                   <a:srgbClr val="595959"/>
                 </a:solidFill>
@@ -30415,13 +30769,16 @@
                 <a:ea typeface="Inter" pitchFamily="34" charset="-122"/>
                 <a:cs typeface="Inter" pitchFamily="34" charset="-120"/>
               </a:rPr>
-              <a:t>41.8%  </a:t>
+              <a:t>41.8%  →  </a:t>
             </a:r>
             <a:pPr indent="0" marL="0">
-              <a:buNone/>
-            </a:pPr>
-            <a:r>
-              <a:rPr lang="en-US" sz="1400" b="1" dirty="0">
+              <a:spcAft>
+                <a:spcPts val="200"/>
+              </a:spcAft>
+              <a:buNone/>
+            </a:pPr>
+            <a:r>
+              <a:rPr lang="en-US" sz="1200" b="1" dirty="0">
                 <a:solidFill>
                   <a:srgbClr val="0B7A4A"/>
                 </a:solidFill>
@@ -30429,13 +30786,38 @@
                 <a:ea typeface="Inter" pitchFamily="34" charset="-122"/>
                 <a:cs typeface="Inter" pitchFamily="34" charset="-120"/>
               </a:rPr>
-              <a:t>→  </a:t>
-            </a:r>
-            <a:pPr indent="0" marL="0">
-              <a:buNone/>
-            </a:pPr>
-            <a:r>
-              <a:rPr lang="en-US" sz="1400" b="1" dirty="0">
+              <a:t>45.1%</a:t>
+            </a:r>
+            <a:endParaRPr lang="en-US" sz="1400" dirty="0"/>
+          </a:p>
+        </p:txBody>
+      </p:sp>
+      <p:sp>
+        <p:nvSpPr>
+          <p:cNvPr id="26" name="Text 24"/>
+          <p:cNvSpPr txBox="1"/>
+          <p:nvPr/>
+        </p:nvSpPr>
+        <p:spPr>
+          <a:xfrm>
+            <a:off x="2941320" y="5124298"/>
+            <a:ext cx="1115568" cy="755294"/>
+          </a:xfrm>
+          <a:prstGeom prst="rect">
+            <a:avLst/>
+          </a:prstGeom>
+          <a:noFill/>
+          <a:ln/>
+        </p:spPr>
+        <p:txBody>
+          <a:bodyPr wrap="square" lIns="0" tIns="0" rIns="0" bIns="0" rtlCol="0" anchor="ctr"/>
+          <a:lstStyle/>
+          <a:p>
+            <a:pPr algn="r" indent="0" marL="0">
+              <a:buNone/>
+            </a:pPr>
+            <a:r>
+              <a:rPr lang="en-US" sz="1600" b="1" dirty="0">
                 <a:solidFill>
                   <a:srgbClr val="0B7A4A"/>
                 </a:solidFill>
@@ -30443,45 +30825,6 @@
                 <a:ea typeface="Inter" pitchFamily="34" charset="-122"/>
                 <a:cs typeface="Inter" pitchFamily="34" charset="-120"/>
               </a:rPr>
-              <a:t>45.1%</a:t>
-            </a:r>
-            <a:endParaRPr lang="en-US" sz="1400" dirty="0"/>
-          </a:p>
-        </p:txBody>
-      </p:sp>
-      <p:sp>
-        <p:nvSpPr>
-          <p:cNvPr id="33" name="Text 31"/>
-          <p:cNvSpPr txBox="1"/>
-          <p:nvPr/>
-        </p:nvSpPr>
-        <p:spPr>
-          <a:xfrm>
-            <a:off x="4864608" y="5127955"/>
-            <a:ext cx="1051560" cy="751637"/>
-          </a:xfrm>
-          <a:prstGeom prst="rect">
-            <a:avLst/>
-          </a:prstGeom>
-          <a:noFill/>
-          <a:ln/>
-        </p:spPr>
-        <p:txBody>
-          <a:bodyPr wrap="square" lIns="0" tIns="0" rIns="0" bIns="0" rtlCol="0" anchor="ctr"/>
-          <a:lstStyle/>
-          <a:p>
-            <a:pPr algn="r" indent="0" marL="0">
-              <a:buNone/>
-            </a:pPr>
-            <a:r>
-              <a:rPr lang="en-US" sz="1600" b="1" dirty="0">
-                <a:solidFill>
-                  <a:srgbClr val="0B7A4A"/>
-                </a:solidFill>
-                <a:latin typeface="Inter" pitchFamily="34" charset="0"/>
-                <a:ea typeface="Inter" pitchFamily="34" charset="-122"/>
-                <a:cs typeface="Inter" pitchFamily="34" charset="-120"/>
-              </a:rPr>
               <a:t>+3.3 pts</a:t>
             </a:r>
             <a:endParaRPr lang="en-US" sz="1600" dirty="0"/>
@@ -30490,14 +30833,14 @@
       </p:sp>
       <p:sp>
         <p:nvSpPr>
-          <p:cNvPr id="34" name="Shape 32"/>
+          <p:cNvPr id="27" name="Shape 25"/>
           <p:cNvSpPr/>
           <p:nvPr/>
         </p:nvSpPr>
         <p:spPr>
           <a:xfrm>
-            <a:off x="6208776" y="1737360"/>
-            <a:ext cx="5321808" cy="45720"/>
+            <a:off x="4349496" y="1371600"/>
+            <a:ext cx="3489960" cy="45720"/>
           </a:xfrm>
           <a:prstGeom prst="rect">
             <a:avLst/>
@@ -30510,14 +30853,14 @@
       </p:sp>
       <p:sp>
         <p:nvSpPr>
-          <p:cNvPr id="35" name="Text 33"/>
-          <p:cNvSpPr txBox="1"/>
-          <p:nvPr/>
-        </p:nvSpPr>
-        <p:spPr>
-          <a:xfrm>
-            <a:off x="6300216" y="1810512"/>
-            <a:ext cx="1828800" cy="274320"/>
+          <p:cNvPr id="28" name="Text 26"/>
+          <p:cNvSpPr txBox="1"/>
+          <p:nvPr/>
+        </p:nvSpPr>
+        <p:spPr>
+          <a:xfrm>
+            <a:off x="4440936" y="1444752"/>
+            <a:ext cx="3307080" cy="274320"/>
           </a:xfrm>
           <a:prstGeom prst="rect">
             <a:avLst/>
@@ -30533,7 +30876,7 @@
               <a:buNone/>
             </a:pPr>
             <a:r>
-              <a:rPr lang="en-US" sz="1400" b="1" spc="100" kern="0" dirty="0">
+              <a:rPr lang="en-US" sz="1500" b="1" spc="100" kern="0" dirty="0">
                 <a:solidFill>
                   <a:srgbClr val="A82B26"/>
                 </a:solidFill>
@@ -30541,22 +30884,22 @@
                 <a:ea typeface="Inter" pitchFamily="34" charset="-122"/>
                 <a:cs typeface="Inter" pitchFamily="34" charset="-120"/>
               </a:rPr>
-              <a:t>BOTTOM 5</a:t>
-            </a:r>
-            <a:endParaRPr lang="en-US" sz="1400" dirty="0"/>
-          </a:p>
-        </p:txBody>
-      </p:sp>
-      <p:sp>
-        <p:nvSpPr>
-          <p:cNvPr id="36" name="Text 34"/>
-          <p:cNvSpPr txBox="1"/>
-          <p:nvPr/>
-        </p:nvSpPr>
-        <p:spPr>
-          <a:xfrm>
-            <a:off x="8449056" y="1810512"/>
-            <a:ext cx="1828800" cy="274320"/>
+              <a:t>BOTTOM 5 VS LAST YEAR</a:t>
+            </a:r>
+            <a:endParaRPr lang="en-US" sz="1500" dirty="0"/>
+          </a:p>
+        </p:txBody>
+      </p:sp>
+      <p:sp>
+        <p:nvSpPr>
+          <p:cNvPr id="29" name="Text 27"/>
+          <p:cNvSpPr txBox="1"/>
+          <p:nvPr/>
+        </p:nvSpPr>
+        <p:spPr>
+          <a:xfrm>
+            <a:off x="4440936" y="1737360"/>
+            <a:ext cx="3307080" cy="274320"/>
           </a:xfrm>
           <a:prstGeom prst="rect">
             <a:avLst/>
@@ -30572,7 +30915,7 @@
               <a:buNone/>
             </a:pPr>
             <a:r>
-              <a:rPr lang="en-US" sz="1400" b="1" dirty="0">
+              <a:rPr lang="en-US" sz="1200" dirty="0">
                 <a:solidFill>
                   <a:srgbClr val="595959"/>
                 </a:solidFill>
@@ -30580,61 +30923,22 @@
                 <a:ea typeface="Inter" pitchFamily="34" charset="-122"/>
                 <a:cs typeface="Inter" pitchFamily="34" charset="-120"/>
               </a:rPr>
-              <a:t>2025 → 2026</a:t>
-            </a:r>
-            <a:endParaRPr lang="en-US" sz="1400" dirty="0"/>
-          </a:p>
-        </p:txBody>
-      </p:sp>
-      <p:sp>
-        <p:nvSpPr>
-          <p:cNvPr id="37" name="Text 35"/>
-          <p:cNvSpPr txBox="1"/>
-          <p:nvPr/>
-        </p:nvSpPr>
-        <p:spPr>
-          <a:xfrm>
-            <a:off x="10415016" y="1810512"/>
-            <a:ext cx="1051560" cy="274320"/>
-          </a:xfrm>
-          <a:prstGeom prst="rect">
-            <a:avLst/>
-          </a:prstGeom>
-          <a:noFill/>
-          <a:ln/>
-        </p:spPr>
-        <p:txBody>
-          <a:bodyPr wrap="square" lIns="0" tIns="0" rIns="0" bIns="0" rtlCol="0" anchor="ctr"/>
-          <a:lstStyle/>
-          <a:p>
-            <a:pPr algn="r" indent="0" marL="0">
-              <a:buNone/>
-            </a:pPr>
-            <a:r>
-              <a:rPr lang="en-US" sz="1400" b="1" dirty="0">
-                <a:solidFill>
-                  <a:srgbClr val="595959"/>
-                </a:solidFill>
-                <a:latin typeface="Inter" pitchFamily="34" charset="0"/>
-                <a:ea typeface="Inter" pitchFamily="34" charset="-122"/>
-                <a:cs typeface="Inter" pitchFamily="34" charset="-120"/>
-              </a:rPr>
-              <a:t>Change</a:t>
-            </a:r>
-            <a:endParaRPr lang="en-US" sz="1400" dirty="0"/>
-          </a:p>
-        </p:txBody>
-      </p:sp>
-      <p:sp>
-        <p:nvSpPr>
-          <p:cNvPr id="38" name="Shape 36"/>
+              <a:t>Jan–Sep 2026 vs Jan–Sep 2025</a:t>
+            </a:r>
+            <a:endParaRPr lang="en-US" sz="1200" dirty="0"/>
+          </a:p>
+        </p:txBody>
+      </p:sp>
+      <p:sp>
+        <p:nvSpPr>
+          <p:cNvPr id="30" name="Shape 28"/>
           <p:cNvSpPr/>
           <p:nvPr/>
         </p:nvSpPr>
         <p:spPr>
           <a:xfrm>
-            <a:off x="6208776" y="2121408"/>
-            <a:ext cx="5321808" cy="751637"/>
+            <a:off x="4349496" y="2103120"/>
+            <a:ext cx="3489960" cy="755294"/>
           </a:xfrm>
           <a:prstGeom prst="rect">
             <a:avLst/>
@@ -30647,14 +30951,14 @@
       </p:sp>
       <p:sp>
         <p:nvSpPr>
-          <p:cNvPr id="39" name="Text 37"/>
-          <p:cNvSpPr txBox="1"/>
-          <p:nvPr/>
-        </p:nvSpPr>
-        <p:spPr>
-          <a:xfrm>
-            <a:off x="6300216" y="2121408"/>
-            <a:ext cx="320040" cy="751637"/>
+          <p:cNvPr id="31" name="Text 29"/>
+          <p:cNvSpPr txBox="1"/>
+          <p:nvPr/>
+        </p:nvSpPr>
+        <p:spPr>
+          <a:xfrm>
+            <a:off x="4440936" y="2103120"/>
+            <a:ext cx="365760" cy="755294"/>
           </a:xfrm>
           <a:prstGeom prst="rect">
             <a:avLst/>
@@ -30686,14 +30990,14 @@
       </p:sp>
       <p:sp>
         <p:nvSpPr>
-          <p:cNvPr id="40" name="Text 38"/>
-          <p:cNvSpPr txBox="1"/>
-          <p:nvPr/>
-        </p:nvSpPr>
-        <p:spPr>
-          <a:xfrm>
-            <a:off x="6665976" y="2121408"/>
-            <a:ext cx="1737360" cy="751637"/>
+          <p:cNvPr id="32" name="Text 30"/>
+          <p:cNvSpPr txBox="1"/>
+          <p:nvPr/>
+        </p:nvSpPr>
+        <p:spPr>
+          <a:xfrm>
+            <a:off x="4788408" y="2103120"/>
+            <a:ext cx="1825752" cy="755294"/>
           </a:xfrm>
           <a:prstGeom prst="rect">
             <a:avLst/>
@@ -30706,6 +31010,9 @@
           <a:lstStyle/>
           <a:p>
             <a:pPr indent="0" marL="0">
+              <a:spcAft>
+                <a:spcPts val="200"/>
+              </a:spcAft>
               <a:buNone/>
             </a:pPr>
             <a:r>
@@ -30721,34 +31028,15 @@
             </a:r>
             <a:endParaRPr lang="en-US" sz="1400" dirty="0"/>
           </a:p>
-        </p:txBody>
-      </p:sp>
-      <p:sp>
-        <p:nvSpPr>
-          <p:cNvPr id="41" name="Text 39"/>
-          <p:cNvSpPr txBox="1"/>
-          <p:nvPr/>
-        </p:nvSpPr>
-        <p:spPr>
-          <a:xfrm>
-            <a:off x="8449056" y="2121408"/>
-            <a:ext cx="1920240" cy="751637"/>
-          </a:xfrm>
-          <a:prstGeom prst="rect">
-            <a:avLst/>
-          </a:prstGeom>
-          <a:noFill/>
-          <a:ln/>
-        </p:spPr>
-        <p:txBody>
-          <a:bodyPr wrap="square" lIns="0" tIns="0" rIns="0" bIns="0" rtlCol="0" anchor="ctr"/>
-          <a:lstStyle/>
           <a:p>
             <a:pPr indent="0" marL="0">
-              <a:buNone/>
-            </a:pPr>
-            <a:r>
-              <a:rPr lang="en-US" sz="1400" dirty="0">
+              <a:spcAft>
+                <a:spcPts val="200"/>
+              </a:spcAft>
+              <a:buNone/>
+            </a:pPr>
+            <a:r>
+              <a:rPr lang="en-US" sz="1200" dirty="0">
                 <a:solidFill>
                   <a:srgbClr val="595959"/>
                 </a:solidFill>
@@ -30756,27 +31044,212 @@
                 <a:ea typeface="Inter" pitchFamily="34" charset="-122"/>
                 <a:cs typeface="Inter" pitchFamily="34" charset="-120"/>
               </a:rPr>
-              <a:t>36.5%  </a:t>
+              <a:t>36.5%  →  </a:t>
             </a:r>
             <a:pPr indent="0" marL="0">
+              <a:spcAft>
+                <a:spcPts val="200"/>
+              </a:spcAft>
+              <a:buNone/>
+            </a:pPr>
+            <a:r>
+              <a:rPr lang="en-US" sz="1200" b="1" dirty="0">
+                <a:solidFill>
+                  <a:srgbClr val="A82B26"/>
+                </a:solidFill>
+                <a:latin typeface="Inter" pitchFamily="34" charset="0"/>
+                <a:ea typeface="Inter" pitchFamily="34" charset="-122"/>
+                <a:cs typeface="Inter" pitchFamily="34" charset="-120"/>
+              </a:rPr>
+              <a:t>31.7%</a:t>
+            </a:r>
+            <a:endParaRPr lang="en-US" sz="1400" dirty="0"/>
+          </a:p>
+        </p:txBody>
+      </p:sp>
+      <p:sp>
+        <p:nvSpPr>
+          <p:cNvPr id="33" name="Text 31"/>
+          <p:cNvSpPr txBox="1"/>
+          <p:nvPr/>
+        </p:nvSpPr>
+        <p:spPr>
+          <a:xfrm>
+            <a:off x="6632448" y="2103120"/>
+            <a:ext cx="1115568" cy="755294"/>
+          </a:xfrm>
+          <a:prstGeom prst="rect">
+            <a:avLst/>
+          </a:prstGeom>
+          <a:noFill/>
+          <a:ln/>
+        </p:spPr>
+        <p:txBody>
+          <a:bodyPr wrap="square" lIns="0" tIns="0" rIns="0" bIns="0" rtlCol="0" anchor="ctr"/>
+          <a:lstStyle/>
+          <a:p>
+            <a:pPr algn="r" indent="0" marL="0">
+              <a:buNone/>
+            </a:pPr>
+            <a:r>
+              <a:rPr lang="en-US" sz="1600" b="1" dirty="0">
+                <a:solidFill>
+                  <a:srgbClr val="A82B26"/>
+                </a:solidFill>
+                <a:latin typeface="Inter" pitchFamily="34" charset="0"/>
+                <a:ea typeface="Inter" pitchFamily="34" charset="-122"/>
+                <a:cs typeface="Inter" pitchFamily="34" charset="-120"/>
+              </a:rPr>
+              <a:t>−4.8 pts</a:t>
+            </a:r>
+            <a:endParaRPr lang="en-US" sz="1600" dirty="0"/>
+          </a:p>
+        </p:txBody>
+      </p:sp>
+      <p:sp>
+        <p:nvSpPr>
+          <p:cNvPr id="34" name="Text 32"/>
+          <p:cNvSpPr txBox="1"/>
+          <p:nvPr/>
+        </p:nvSpPr>
+        <p:spPr>
+          <a:xfrm>
+            <a:off x="4440936" y="2858414"/>
+            <a:ext cx="365760" cy="755294"/>
+          </a:xfrm>
+          <a:prstGeom prst="rect">
+            <a:avLst/>
+          </a:prstGeom>
+          <a:noFill/>
+          <a:ln/>
+        </p:spPr>
+        <p:txBody>
+          <a:bodyPr wrap="square" lIns="0" tIns="0" rIns="0" bIns="0" rtlCol="0" anchor="ctr"/>
+          <a:lstStyle/>
+          <a:p>
+            <a:pPr indent="0" marL="0">
+              <a:buNone/>
+            </a:pPr>
+            <a:r>
+              <a:rPr lang="en-US" sz="1500" b="1" dirty="0">
+                <a:solidFill>
+                  <a:srgbClr val="0B2C4A"/>
+                </a:solidFill>
+                <a:latin typeface="Inter" pitchFamily="34" charset="0"/>
+                <a:ea typeface="Inter" pitchFamily="34" charset="-122"/>
+                <a:cs typeface="Inter" pitchFamily="34" charset="-120"/>
+              </a:rPr>
+              <a:t>32</a:t>
+            </a:r>
+            <a:endParaRPr lang="en-US" sz="1500" dirty="0"/>
+          </a:p>
+        </p:txBody>
+      </p:sp>
+      <p:sp>
+        <p:nvSpPr>
+          <p:cNvPr id="35" name="Text 33"/>
+          <p:cNvSpPr txBox="1"/>
+          <p:nvPr/>
+        </p:nvSpPr>
+        <p:spPr>
+          <a:xfrm>
+            <a:off x="4788408" y="2858414"/>
+            <a:ext cx="1825752" cy="755294"/>
+          </a:xfrm>
+          <a:prstGeom prst="rect">
+            <a:avLst/>
+          </a:prstGeom>
+          <a:noFill/>
+          <a:ln/>
+        </p:spPr>
+        <p:txBody>
+          <a:bodyPr wrap="square" lIns="0" tIns="0" rIns="0" bIns="0" rtlCol="0" anchor="ctr"/>
+          <a:lstStyle/>
+          <a:p>
+            <a:pPr indent="0" marL="0">
+              <a:spcAft>
+                <a:spcPts val="200"/>
+              </a:spcAft>
               <a:buNone/>
             </a:pPr>
             <a:r>
               <a:rPr lang="en-US" sz="1400" b="1" dirty="0">
                 <a:solidFill>
+                  <a:srgbClr val="1A1A1A"/>
+                </a:solidFill>
+                <a:latin typeface="Inter" pitchFamily="34" charset="0"/>
+                <a:ea typeface="Inter" pitchFamily="34" charset="-122"/>
+                <a:cs typeface="Inter" pitchFamily="34" charset="-120"/>
+              </a:rPr>
+              <a:t>Kia LV</a:t>
+            </a:r>
+            <a:endParaRPr lang="en-US" sz="1400" dirty="0"/>
+          </a:p>
+          <a:p>
+            <a:pPr indent="0" marL="0">
+              <a:spcAft>
+                <a:spcPts val="200"/>
+              </a:spcAft>
+              <a:buNone/>
+            </a:pPr>
+            <a:r>
+              <a:rPr lang="en-US" sz="1200" dirty="0">
+                <a:solidFill>
+                  <a:srgbClr val="595959"/>
+                </a:solidFill>
+                <a:latin typeface="Inter" pitchFamily="34" charset="0"/>
+                <a:ea typeface="Inter" pitchFamily="34" charset="-122"/>
+                <a:cs typeface="Inter" pitchFamily="34" charset="-120"/>
+              </a:rPr>
+              <a:t>37.1%  →  </a:t>
+            </a:r>
+            <a:pPr indent="0" marL="0">
+              <a:spcAft>
+                <a:spcPts val="200"/>
+              </a:spcAft>
+              <a:buNone/>
+            </a:pPr>
+            <a:r>
+              <a:rPr lang="en-US" sz="1200" b="1" dirty="0">
+                <a:solidFill>
                   <a:srgbClr val="A82B26"/>
                 </a:solidFill>
                 <a:latin typeface="Inter" pitchFamily="34" charset="0"/>
                 <a:ea typeface="Inter" pitchFamily="34" charset="-122"/>
                 <a:cs typeface="Inter" pitchFamily="34" charset="-120"/>
               </a:rPr>
-              <a:t>→  </a:t>
-            </a:r>
-            <a:pPr indent="0" marL="0">
-              <a:buNone/>
-            </a:pPr>
-            <a:r>
-              <a:rPr lang="en-US" sz="1400" b="1" dirty="0">
+              <a:t>32.5%</a:t>
+            </a:r>
+            <a:endParaRPr lang="en-US" sz="1400" dirty="0"/>
+          </a:p>
+        </p:txBody>
+      </p:sp>
+      <p:sp>
+        <p:nvSpPr>
+          <p:cNvPr id="36" name="Text 34"/>
+          <p:cNvSpPr txBox="1"/>
+          <p:nvPr/>
+        </p:nvSpPr>
+        <p:spPr>
+          <a:xfrm>
+            <a:off x="6632448" y="2858414"/>
+            <a:ext cx="1115568" cy="755294"/>
+          </a:xfrm>
+          <a:prstGeom prst="rect">
+            <a:avLst/>
+          </a:prstGeom>
+          <a:noFill/>
+          <a:ln/>
+        </p:spPr>
+        <p:txBody>
+          <a:bodyPr wrap="square" lIns="0" tIns="0" rIns="0" bIns="0" rtlCol="0" anchor="ctr"/>
+          <a:lstStyle/>
+          <a:p>
+            <a:pPr algn="r" indent="0" marL="0">
+              <a:buNone/>
+            </a:pPr>
+            <a:r>
+              <a:rPr lang="en-US" sz="1600" b="1" dirty="0">
                 <a:solidFill>
                   <a:srgbClr val="A82B26"/>
                 </a:solidFill>
@@ -30784,46 +31257,7 @@
                 <a:ea typeface="Inter" pitchFamily="34" charset="-122"/>
                 <a:cs typeface="Inter" pitchFamily="34" charset="-120"/>
               </a:rPr>
-              <a:t>31.7%</a:t>
-            </a:r>
-            <a:endParaRPr lang="en-US" sz="1400" dirty="0"/>
-          </a:p>
-        </p:txBody>
-      </p:sp>
-      <p:sp>
-        <p:nvSpPr>
-          <p:cNvPr id="42" name="Text 40"/>
-          <p:cNvSpPr txBox="1"/>
-          <p:nvPr/>
-        </p:nvSpPr>
-        <p:spPr>
-          <a:xfrm>
-            <a:off x="10415016" y="2121408"/>
-            <a:ext cx="1051560" cy="751637"/>
-          </a:xfrm>
-          <a:prstGeom prst="rect">
-            <a:avLst/>
-          </a:prstGeom>
-          <a:noFill/>
-          <a:ln/>
-        </p:spPr>
-        <p:txBody>
-          <a:bodyPr wrap="square" lIns="0" tIns="0" rIns="0" bIns="0" rtlCol="0" anchor="ctr"/>
-          <a:lstStyle/>
-          <a:p>
-            <a:pPr algn="r" indent="0" marL="0">
-              <a:buNone/>
-            </a:pPr>
-            <a:r>
-              <a:rPr lang="en-US" sz="1600" b="1" dirty="0">
-                <a:solidFill>
-                  <a:srgbClr val="A82B26"/>
-                </a:solidFill>
-                <a:latin typeface="Inter" pitchFamily="34" charset="0"/>
-                <a:ea typeface="Inter" pitchFamily="34" charset="-122"/>
-                <a:cs typeface="Inter" pitchFamily="34" charset="-120"/>
-              </a:rPr>
-              <a:t>−4.8 pts</a:t>
+              <a:t>−4.6 pts</a:t>
             </a:r>
             <a:endParaRPr lang="en-US" sz="1600" dirty="0"/>
           </a:p>
@@ -30831,198 +31265,14 @@
       </p:sp>
       <p:sp>
         <p:nvSpPr>
-          <p:cNvPr id="43" name="Text 41"/>
-          <p:cNvSpPr txBox="1"/>
-          <p:nvPr/>
-        </p:nvSpPr>
-        <p:spPr>
-          <a:xfrm>
-            <a:off x="6300216" y="2873045"/>
-            <a:ext cx="320040" cy="751637"/>
-          </a:xfrm>
-          <a:prstGeom prst="rect">
-            <a:avLst/>
-          </a:prstGeom>
-          <a:noFill/>
-          <a:ln/>
-        </p:spPr>
-        <p:txBody>
-          <a:bodyPr wrap="square" lIns="0" tIns="0" rIns="0" bIns="0" rtlCol="0" anchor="ctr"/>
-          <a:lstStyle/>
-          <a:p>
-            <a:pPr indent="0" marL="0">
-              <a:buNone/>
-            </a:pPr>
-            <a:r>
-              <a:rPr lang="en-US" sz="1500" b="1" dirty="0">
-                <a:solidFill>
-                  <a:srgbClr val="0B2C4A"/>
-                </a:solidFill>
-                <a:latin typeface="Inter" pitchFamily="34" charset="0"/>
-                <a:ea typeface="Inter" pitchFamily="34" charset="-122"/>
-                <a:cs typeface="Inter" pitchFamily="34" charset="-120"/>
-              </a:rPr>
-              <a:t>32</a:t>
-            </a:r>
-            <a:endParaRPr lang="en-US" sz="1500" dirty="0"/>
-          </a:p>
-        </p:txBody>
-      </p:sp>
-      <p:sp>
-        <p:nvSpPr>
-          <p:cNvPr id="44" name="Text 42"/>
-          <p:cNvSpPr txBox="1"/>
-          <p:nvPr/>
-        </p:nvSpPr>
-        <p:spPr>
-          <a:xfrm>
-            <a:off x="6665976" y="2873045"/>
-            <a:ext cx="1737360" cy="751637"/>
-          </a:xfrm>
-          <a:prstGeom prst="rect">
-            <a:avLst/>
-          </a:prstGeom>
-          <a:noFill/>
-          <a:ln/>
-        </p:spPr>
-        <p:txBody>
-          <a:bodyPr wrap="square" lIns="0" tIns="0" rIns="0" bIns="0" rtlCol="0" anchor="ctr"/>
-          <a:lstStyle/>
-          <a:p>
-            <a:pPr indent="0" marL="0">
-              <a:buNone/>
-            </a:pPr>
-            <a:r>
-              <a:rPr lang="en-US" sz="1400" b="1" dirty="0">
-                <a:solidFill>
-                  <a:srgbClr val="1A1A1A"/>
-                </a:solidFill>
-                <a:latin typeface="Inter" pitchFamily="34" charset="0"/>
-                <a:ea typeface="Inter" pitchFamily="34" charset="-122"/>
-                <a:cs typeface="Inter" pitchFamily="34" charset="-120"/>
-              </a:rPr>
-              <a:t>Kia LV</a:t>
-            </a:r>
-            <a:endParaRPr lang="en-US" sz="1400" dirty="0"/>
-          </a:p>
-        </p:txBody>
-      </p:sp>
-      <p:sp>
-        <p:nvSpPr>
-          <p:cNvPr id="45" name="Text 43"/>
-          <p:cNvSpPr txBox="1"/>
-          <p:nvPr/>
-        </p:nvSpPr>
-        <p:spPr>
-          <a:xfrm>
-            <a:off x="8449056" y="2873045"/>
-            <a:ext cx="1920240" cy="751637"/>
-          </a:xfrm>
-          <a:prstGeom prst="rect">
-            <a:avLst/>
-          </a:prstGeom>
-          <a:noFill/>
-          <a:ln/>
-        </p:spPr>
-        <p:txBody>
-          <a:bodyPr wrap="square" lIns="0" tIns="0" rIns="0" bIns="0" rtlCol="0" anchor="ctr"/>
-          <a:lstStyle/>
-          <a:p>
-            <a:pPr indent="0" marL="0">
-              <a:buNone/>
-            </a:pPr>
-            <a:r>
-              <a:rPr lang="en-US" sz="1400" dirty="0">
-                <a:solidFill>
-                  <a:srgbClr val="595959"/>
-                </a:solidFill>
-                <a:latin typeface="Inter" pitchFamily="34" charset="0"/>
-                <a:ea typeface="Inter" pitchFamily="34" charset="-122"/>
-                <a:cs typeface="Inter" pitchFamily="34" charset="-120"/>
-              </a:rPr>
-              <a:t>37.1%  </a:t>
-            </a:r>
-            <a:pPr indent="0" marL="0">
-              <a:buNone/>
-            </a:pPr>
-            <a:r>
-              <a:rPr lang="en-US" sz="1400" b="1" dirty="0">
-                <a:solidFill>
-                  <a:srgbClr val="A82B26"/>
-                </a:solidFill>
-                <a:latin typeface="Inter" pitchFamily="34" charset="0"/>
-                <a:ea typeface="Inter" pitchFamily="34" charset="-122"/>
-                <a:cs typeface="Inter" pitchFamily="34" charset="-120"/>
-              </a:rPr>
-              <a:t>→  </a:t>
-            </a:r>
-            <a:pPr indent="0" marL="0">
-              <a:buNone/>
-            </a:pPr>
-            <a:r>
-              <a:rPr lang="en-US" sz="1400" b="1" dirty="0">
-                <a:solidFill>
-                  <a:srgbClr val="A82B26"/>
-                </a:solidFill>
-                <a:latin typeface="Inter" pitchFamily="34" charset="0"/>
-                <a:ea typeface="Inter" pitchFamily="34" charset="-122"/>
-                <a:cs typeface="Inter" pitchFamily="34" charset="-120"/>
-              </a:rPr>
-              <a:t>32.5%</a:t>
-            </a:r>
-            <a:endParaRPr lang="en-US" sz="1400" dirty="0"/>
-          </a:p>
-        </p:txBody>
-      </p:sp>
-      <p:sp>
-        <p:nvSpPr>
-          <p:cNvPr id="46" name="Text 44"/>
-          <p:cNvSpPr txBox="1"/>
-          <p:nvPr/>
-        </p:nvSpPr>
-        <p:spPr>
-          <a:xfrm>
-            <a:off x="10415016" y="2873045"/>
-            <a:ext cx="1051560" cy="751637"/>
-          </a:xfrm>
-          <a:prstGeom prst="rect">
-            <a:avLst/>
-          </a:prstGeom>
-          <a:noFill/>
-          <a:ln/>
-        </p:spPr>
-        <p:txBody>
-          <a:bodyPr wrap="square" lIns="0" tIns="0" rIns="0" bIns="0" rtlCol="0" anchor="ctr"/>
-          <a:lstStyle/>
-          <a:p>
-            <a:pPr algn="r" indent="0" marL="0">
-              <a:buNone/>
-            </a:pPr>
-            <a:r>
-              <a:rPr lang="en-US" sz="1600" b="1" dirty="0">
-                <a:solidFill>
-                  <a:srgbClr val="A82B26"/>
-                </a:solidFill>
-                <a:latin typeface="Inter" pitchFamily="34" charset="0"/>
-                <a:ea typeface="Inter" pitchFamily="34" charset="-122"/>
-                <a:cs typeface="Inter" pitchFamily="34" charset="-120"/>
-              </a:rPr>
-              <a:t>−4.6 pts</a:t>
-            </a:r>
-            <a:endParaRPr lang="en-US" sz="1600" dirty="0"/>
-          </a:p>
-        </p:txBody>
-      </p:sp>
-      <p:sp>
-        <p:nvSpPr>
-          <p:cNvPr id="47" name="Shape 45"/>
+          <p:cNvPr id="37" name="Shape 35"/>
           <p:cNvSpPr/>
           <p:nvPr/>
         </p:nvSpPr>
         <p:spPr>
           <a:xfrm>
-            <a:off x="6208776" y="3624682"/>
-            <a:ext cx="5321808" cy="751637"/>
+            <a:off x="4349496" y="3613709"/>
+            <a:ext cx="3489960" cy="755294"/>
           </a:xfrm>
           <a:prstGeom prst="rect">
             <a:avLst/>
@@ -31035,14 +31285,14 @@
       </p:sp>
       <p:sp>
         <p:nvSpPr>
-          <p:cNvPr id="48" name="Text 46"/>
-          <p:cNvSpPr txBox="1"/>
-          <p:nvPr/>
-        </p:nvSpPr>
-        <p:spPr>
-          <a:xfrm>
-            <a:off x="6300216" y="3624682"/>
-            <a:ext cx="320040" cy="751637"/>
+          <p:cNvPr id="38" name="Text 36"/>
+          <p:cNvSpPr txBox="1"/>
+          <p:nvPr/>
+        </p:nvSpPr>
+        <p:spPr>
+          <a:xfrm>
+            <a:off x="4440936" y="3613709"/>
+            <a:ext cx="365760" cy="755294"/>
           </a:xfrm>
           <a:prstGeom prst="rect">
             <a:avLst/>
@@ -31074,14 +31324,14 @@
       </p:sp>
       <p:sp>
         <p:nvSpPr>
-          <p:cNvPr id="49" name="Text 47"/>
-          <p:cNvSpPr txBox="1"/>
-          <p:nvPr/>
-        </p:nvSpPr>
-        <p:spPr>
-          <a:xfrm>
-            <a:off x="6665976" y="3624682"/>
-            <a:ext cx="1737360" cy="751637"/>
+          <p:cNvPr id="39" name="Text 37"/>
+          <p:cNvSpPr txBox="1"/>
+          <p:nvPr/>
+        </p:nvSpPr>
+        <p:spPr>
+          <a:xfrm>
+            <a:off x="4788408" y="3613709"/>
+            <a:ext cx="1825752" cy="755294"/>
           </a:xfrm>
           <a:prstGeom prst="rect">
             <a:avLst/>
@@ -31094,6 +31344,9 @@
           <a:lstStyle/>
           <a:p>
             <a:pPr indent="0" marL="0">
+              <a:spcAft>
+                <a:spcPts val="200"/>
+              </a:spcAft>
               <a:buNone/>
             </a:pPr>
             <a:r>
@@ -31109,34 +31362,15 @@
             </a:r>
             <a:endParaRPr lang="en-US" sz="1400" dirty="0"/>
           </a:p>
-        </p:txBody>
-      </p:sp>
-      <p:sp>
-        <p:nvSpPr>
-          <p:cNvPr id="50" name="Text 48"/>
-          <p:cNvSpPr txBox="1"/>
-          <p:nvPr/>
-        </p:nvSpPr>
-        <p:spPr>
-          <a:xfrm>
-            <a:off x="8449056" y="3624682"/>
-            <a:ext cx="1920240" cy="751637"/>
-          </a:xfrm>
-          <a:prstGeom prst="rect">
-            <a:avLst/>
-          </a:prstGeom>
-          <a:noFill/>
-          <a:ln/>
-        </p:spPr>
-        <p:txBody>
-          <a:bodyPr wrap="square" lIns="0" tIns="0" rIns="0" bIns="0" rtlCol="0" anchor="ctr"/>
-          <a:lstStyle/>
           <a:p>
             <a:pPr indent="0" marL="0">
-              <a:buNone/>
-            </a:pPr>
-            <a:r>
-              <a:rPr lang="en-US" sz="1400" dirty="0">
+              <a:spcAft>
+                <a:spcPts val="200"/>
+              </a:spcAft>
+              <a:buNone/>
+            </a:pPr>
+            <a:r>
+              <a:rPr lang="en-US" sz="1200" dirty="0">
                 <a:solidFill>
                   <a:srgbClr val="595959"/>
                 </a:solidFill>
@@ -31144,27 +31378,212 @@
                 <a:ea typeface="Inter" pitchFamily="34" charset="-122"/>
                 <a:cs typeface="Inter" pitchFamily="34" charset="-120"/>
               </a:rPr>
-              <a:t>28.9%  </a:t>
+              <a:t>28.9%  →  </a:t>
             </a:r>
             <a:pPr indent="0" marL="0">
+              <a:spcAft>
+                <a:spcPts val="200"/>
+              </a:spcAft>
+              <a:buNone/>
+            </a:pPr>
+            <a:r>
+              <a:rPr lang="en-US" sz="1200" b="1" dirty="0">
+                <a:solidFill>
+                  <a:srgbClr val="A82B26"/>
+                </a:solidFill>
+                <a:latin typeface="Inter" pitchFamily="34" charset="0"/>
+                <a:ea typeface="Inter" pitchFamily="34" charset="-122"/>
+                <a:cs typeface="Inter" pitchFamily="34" charset="-120"/>
+              </a:rPr>
+              <a:t>25.2%</a:t>
+            </a:r>
+            <a:endParaRPr lang="en-US" sz="1400" dirty="0"/>
+          </a:p>
+        </p:txBody>
+      </p:sp>
+      <p:sp>
+        <p:nvSpPr>
+          <p:cNvPr id="40" name="Text 38"/>
+          <p:cNvSpPr txBox="1"/>
+          <p:nvPr/>
+        </p:nvSpPr>
+        <p:spPr>
+          <a:xfrm>
+            <a:off x="6632448" y="3613709"/>
+            <a:ext cx="1115568" cy="755294"/>
+          </a:xfrm>
+          <a:prstGeom prst="rect">
+            <a:avLst/>
+          </a:prstGeom>
+          <a:noFill/>
+          <a:ln/>
+        </p:spPr>
+        <p:txBody>
+          <a:bodyPr wrap="square" lIns="0" tIns="0" rIns="0" bIns="0" rtlCol="0" anchor="ctr"/>
+          <a:lstStyle/>
+          <a:p>
+            <a:pPr algn="r" indent="0" marL="0">
+              <a:buNone/>
+            </a:pPr>
+            <a:r>
+              <a:rPr lang="en-US" sz="1600" b="1" dirty="0">
+                <a:solidFill>
+                  <a:srgbClr val="A82B26"/>
+                </a:solidFill>
+                <a:latin typeface="Inter" pitchFamily="34" charset="0"/>
+                <a:ea typeface="Inter" pitchFamily="34" charset="-122"/>
+                <a:cs typeface="Inter" pitchFamily="34" charset="-120"/>
+              </a:rPr>
+              <a:t>−3.7 pts</a:t>
+            </a:r>
+            <a:endParaRPr lang="en-US" sz="1600" dirty="0"/>
+          </a:p>
+        </p:txBody>
+      </p:sp>
+      <p:sp>
+        <p:nvSpPr>
+          <p:cNvPr id="41" name="Text 39"/>
+          <p:cNvSpPr txBox="1"/>
+          <p:nvPr/>
+        </p:nvSpPr>
+        <p:spPr>
+          <a:xfrm>
+            <a:off x="4440936" y="4369003"/>
+            <a:ext cx="365760" cy="755294"/>
+          </a:xfrm>
+          <a:prstGeom prst="rect">
+            <a:avLst/>
+          </a:prstGeom>
+          <a:noFill/>
+          <a:ln/>
+        </p:spPr>
+        <p:txBody>
+          <a:bodyPr wrap="square" lIns="0" tIns="0" rIns="0" bIns="0" rtlCol="0" anchor="ctr"/>
+          <a:lstStyle/>
+          <a:p>
+            <a:pPr indent="0" marL="0">
+              <a:buNone/>
+            </a:pPr>
+            <a:r>
+              <a:rPr lang="en-US" sz="1500" b="1" dirty="0">
+                <a:solidFill>
+                  <a:srgbClr val="0B2C4A"/>
+                </a:solidFill>
+                <a:latin typeface="Inter" pitchFamily="34" charset="0"/>
+                <a:ea typeface="Inter" pitchFamily="34" charset="-122"/>
+                <a:cs typeface="Inter" pitchFamily="34" charset="-120"/>
+              </a:rPr>
+              <a:t>30</a:t>
+            </a:r>
+            <a:endParaRPr lang="en-US" sz="1500" dirty="0"/>
+          </a:p>
+        </p:txBody>
+      </p:sp>
+      <p:sp>
+        <p:nvSpPr>
+          <p:cNvPr id="42" name="Text 40"/>
+          <p:cNvSpPr txBox="1"/>
+          <p:nvPr/>
+        </p:nvSpPr>
+        <p:spPr>
+          <a:xfrm>
+            <a:off x="4788408" y="4369003"/>
+            <a:ext cx="1825752" cy="755294"/>
+          </a:xfrm>
+          <a:prstGeom prst="rect">
+            <a:avLst/>
+          </a:prstGeom>
+          <a:noFill/>
+          <a:ln/>
+        </p:spPr>
+        <p:txBody>
+          <a:bodyPr wrap="square" lIns="0" tIns="0" rIns="0" bIns="0" rtlCol="0" anchor="ctr"/>
+          <a:lstStyle/>
+          <a:p>
+            <a:pPr indent="0" marL="0">
+              <a:spcAft>
+                <a:spcPts val="200"/>
+              </a:spcAft>
               <a:buNone/>
             </a:pPr>
             <a:r>
               <a:rPr lang="en-US" sz="1400" b="1" dirty="0">
                 <a:solidFill>
+                  <a:srgbClr val="1A1A1A"/>
+                </a:solidFill>
+                <a:latin typeface="Inter" pitchFamily="34" charset="0"/>
+                <a:ea typeface="Inter" pitchFamily="34" charset="-122"/>
+                <a:cs typeface="Inter" pitchFamily="34" charset="-120"/>
+              </a:rPr>
+              <a:t>GMC Prescott</a:t>
+            </a:r>
+            <a:endParaRPr lang="en-US" sz="1400" dirty="0"/>
+          </a:p>
+          <a:p>
+            <a:pPr indent="0" marL="0">
+              <a:spcAft>
+                <a:spcPts val="200"/>
+              </a:spcAft>
+              <a:buNone/>
+            </a:pPr>
+            <a:r>
+              <a:rPr lang="en-US" sz="1200" dirty="0">
+                <a:solidFill>
+                  <a:srgbClr val="595959"/>
+                </a:solidFill>
+                <a:latin typeface="Inter" pitchFamily="34" charset="0"/>
+                <a:ea typeface="Inter" pitchFamily="34" charset="-122"/>
+                <a:cs typeface="Inter" pitchFamily="34" charset="-120"/>
+              </a:rPr>
+              <a:t>35.0%  →  </a:t>
+            </a:r>
+            <a:pPr indent="0" marL="0">
+              <a:spcAft>
+                <a:spcPts val="200"/>
+              </a:spcAft>
+              <a:buNone/>
+            </a:pPr>
+            <a:r>
+              <a:rPr lang="en-US" sz="1200" b="1" dirty="0">
+                <a:solidFill>
                   <a:srgbClr val="A82B26"/>
                 </a:solidFill>
                 <a:latin typeface="Inter" pitchFamily="34" charset="0"/>
                 <a:ea typeface="Inter" pitchFamily="34" charset="-122"/>
                 <a:cs typeface="Inter" pitchFamily="34" charset="-120"/>
               </a:rPr>
-              <a:t>→  </a:t>
-            </a:r>
-            <a:pPr indent="0" marL="0">
-              <a:buNone/>
-            </a:pPr>
-            <a:r>
-              <a:rPr lang="en-US" sz="1400" b="1" dirty="0">
+              <a:t>31.3%</a:t>
+            </a:r>
+            <a:endParaRPr lang="en-US" sz="1400" dirty="0"/>
+          </a:p>
+        </p:txBody>
+      </p:sp>
+      <p:sp>
+        <p:nvSpPr>
+          <p:cNvPr id="43" name="Text 41"/>
+          <p:cNvSpPr txBox="1"/>
+          <p:nvPr/>
+        </p:nvSpPr>
+        <p:spPr>
+          <a:xfrm>
+            <a:off x="6632448" y="4369003"/>
+            <a:ext cx="1115568" cy="755294"/>
+          </a:xfrm>
+          <a:prstGeom prst="rect">
+            <a:avLst/>
+          </a:prstGeom>
+          <a:noFill/>
+          <a:ln/>
+        </p:spPr>
+        <p:txBody>
+          <a:bodyPr wrap="square" lIns="0" tIns="0" rIns="0" bIns="0" rtlCol="0" anchor="ctr"/>
+          <a:lstStyle/>
+          <a:p>
+            <a:pPr algn="r" indent="0" marL="0">
+              <a:buNone/>
+            </a:pPr>
+            <a:r>
+              <a:rPr lang="en-US" sz="1600" b="1" dirty="0">
                 <a:solidFill>
                   <a:srgbClr val="A82B26"/>
                 </a:solidFill>
@@ -31172,46 +31591,7 @@
                 <a:ea typeface="Inter" pitchFamily="34" charset="-122"/>
                 <a:cs typeface="Inter" pitchFamily="34" charset="-120"/>
               </a:rPr>
-              <a:t>25.2%</a:t>
-            </a:r>
-            <a:endParaRPr lang="en-US" sz="1400" dirty="0"/>
-          </a:p>
-        </p:txBody>
-      </p:sp>
-      <p:sp>
-        <p:nvSpPr>
-          <p:cNvPr id="51" name="Text 49"/>
-          <p:cNvSpPr txBox="1"/>
-          <p:nvPr/>
-        </p:nvSpPr>
-        <p:spPr>
-          <a:xfrm>
-            <a:off x="10415016" y="3624682"/>
-            <a:ext cx="1051560" cy="751637"/>
-          </a:xfrm>
-          <a:prstGeom prst="rect">
-            <a:avLst/>
-          </a:prstGeom>
-          <a:noFill/>
-          <a:ln/>
-        </p:spPr>
-        <p:txBody>
-          <a:bodyPr wrap="square" lIns="0" tIns="0" rIns="0" bIns="0" rtlCol="0" anchor="ctr"/>
-          <a:lstStyle/>
-          <a:p>
-            <a:pPr algn="r" indent="0" marL="0">
-              <a:buNone/>
-            </a:pPr>
-            <a:r>
-              <a:rPr lang="en-US" sz="1600" b="1" dirty="0">
-                <a:solidFill>
-                  <a:srgbClr val="A82B26"/>
-                </a:solidFill>
-                <a:latin typeface="Inter" pitchFamily="34" charset="0"/>
-                <a:ea typeface="Inter" pitchFamily="34" charset="-122"/>
-                <a:cs typeface="Inter" pitchFamily="34" charset="-120"/>
-              </a:rPr>
-              <a:t>−3.7 pts</a:t>
+              <a:t>−3.6 pts</a:t>
             </a:r>
             <a:endParaRPr lang="en-US" sz="1600" dirty="0"/>
           </a:p>
@@ -31219,198 +31599,14 @@
       </p:sp>
       <p:sp>
         <p:nvSpPr>
-          <p:cNvPr id="52" name="Text 50"/>
-          <p:cNvSpPr txBox="1"/>
-          <p:nvPr/>
-        </p:nvSpPr>
-        <p:spPr>
-          <a:xfrm>
-            <a:off x="6300216" y="4376318"/>
-            <a:ext cx="320040" cy="751637"/>
-          </a:xfrm>
-          <a:prstGeom prst="rect">
-            <a:avLst/>
-          </a:prstGeom>
-          <a:noFill/>
-          <a:ln/>
-        </p:spPr>
-        <p:txBody>
-          <a:bodyPr wrap="square" lIns="0" tIns="0" rIns="0" bIns="0" rtlCol="0" anchor="ctr"/>
-          <a:lstStyle/>
-          <a:p>
-            <a:pPr indent="0" marL="0">
-              <a:buNone/>
-            </a:pPr>
-            <a:r>
-              <a:rPr lang="en-US" sz="1500" b="1" dirty="0">
-                <a:solidFill>
-                  <a:srgbClr val="0B2C4A"/>
-                </a:solidFill>
-                <a:latin typeface="Inter" pitchFamily="34" charset="0"/>
-                <a:ea typeface="Inter" pitchFamily="34" charset="-122"/>
-                <a:cs typeface="Inter" pitchFamily="34" charset="-120"/>
-              </a:rPr>
-              <a:t>30</a:t>
-            </a:r>
-            <a:endParaRPr lang="en-US" sz="1500" dirty="0"/>
-          </a:p>
-        </p:txBody>
-      </p:sp>
-      <p:sp>
-        <p:nvSpPr>
-          <p:cNvPr id="53" name="Text 51"/>
-          <p:cNvSpPr txBox="1"/>
-          <p:nvPr/>
-        </p:nvSpPr>
-        <p:spPr>
-          <a:xfrm>
-            <a:off x="6665976" y="4376318"/>
-            <a:ext cx="1737360" cy="751637"/>
-          </a:xfrm>
-          <a:prstGeom prst="rect">
-            <a:avLst/>
-          </a:prstGeom>
-          <a:noFill/>
-          <a:ln/>
-        </p:spPr>
-        <p:txBody>
-          <a:bodyPr wrap="square" lIns="0" tIns="0" rIns="0" bIns="0" rtlCol="0" anchor="ctr"/>
-          <a:lstStyle/>
-          <a:p>
-            <a:pPr indent="0" marL="0">
-              <a:buNone/>
-            </a:pPr>
-            <a:r>
-              <a:rPr lang="en-US" sz="1400" b="1" dirty="0">
-                <a:solidFill>
-                  <a:srgbClr val="1A1A1A"/>
-                </a:solidFill>
-                <a:latin typeface="Inter" pitchFamily="34" charset="0"/>
-                <a:ea typeface="Inter" pitchFamily="34" charset="-122"/>
-                <a:cs typeface="Inter" pitchFamily="34" charset="-120"/>
-              </a:rPr>
-              <a:t>GMC Prescott</a:t>
-            </a:r>
-            <a:endParaRPr lang="en-US" sz="1400" dirty="0"/>
-          </a:p>
-        </p:txBody>
-      </p:sp>
-      <p:sp>
-        <p:nvSpPr>
-          <p:cNvPr id="54" name="Text 52"/>
-          <p:cNvSpPr txBox="1"/>
-          <p:nvPr/>
-        </p:nvSpPr>
-        <p:spPr>
-          <a:xfrm>
-            <a:off x="8449056" y="4376318"/>
-            <a:ext cx="1920240" cy="751637"/>
-          </a:xfrm>
-          <a:prstGeom prst="rect">
-            <a:avLst/>
-          </a:prstGeom>
-          <a:noFill/>
-          <a:ln/>
-        </p:spPr>
-        <p:txBody>
-          <a:bodyPr wrap="square" lIns="0" tIns="0" rIns="0" bIns="0" rtlCol="0" anchor="ctr"/>
-          <a:lstStyle/>
-          <a:p>
-            <a:pPr indent="0" marL="0">
-              <a:buNone/>
-            </a:pPr>
-            <a:r>
-              <a:rPr lang="en-US" sz="1400" dirty="0">
-                <a:solidFill>
-                  <a:srgbClr val="595959"/>
-                </a:solidFill>
-                <a:latin typeface="Inter" pitchFamily="34" charset="0"/>
-                <a:ea typeface="Inter" pitchFamily="34" charset="-122"/>
-                <a:cs typeface="Inter" pitchFamily="34" charset="-120"/>
-              </a:rPr>
-              <a:t>35.0%  </a:t>
-            </a:r>
-            <a:pPr indent="0" marL="0">
-              <a:buNone/>
-            </a:pPr>
-            <a:r>
-              <a:rPr lang="en-US" sz="1400" b="1" dirty="0">
-                <a:solidFill>
-                  <a:srgbClr val="A82B26"/>
-                </a:solidFill>
-                <a:latin typeface="Inter" pitchFamily="34" charset="0"/>
-                <a:ea typeface="Inter" pitchFamily="34" charset="-122"/>
-                <a:cs typeface="Inter" pitchFamily="34" charset="-120"/>
-              </a:rPr>
-              <a:t>→  </a:t>
-            </a:r>
-            <a:pPr indent="0" marL="0">
-              <a:buNone/>
-            </a:pPr>
-            <a:r>
-              <a:rPr lang="en-US" sz="1400" b="1" dirty="0">
-                <a:solidFill>
-                  <a:srgbClr val="A82B26"/>
-                </a:solidFill>
-                <a:latin typeface="Inter" pitchFamily="34" charset="0"/>
-                <a:ea typeface="Inter" pitchFamily="34" charset="-122"/>
-                <a:cs typeface="Inter" pitchFamily="34" charset="-120"/>
-              </a:rPr>
-              <a:t>31.3%</a:t>
-            </a:r>
-            <a:endParaRPr lang="en-US" sz="1400" dirty="0"/>
-          </a:p>
-        </p:txBody>
-      </p:sp>
-      <p:sp>
-        <p:nvSpPr>
-          <p:cNvPr id="55" name="Text 53"/>
-          <p:cNvSpPr txBox="1"/>
-          <p:nvPr/>
-        </p:nvSpPr>
-        <p:spPr>
-          <a:xfrm>
-            <a:off x="10415016" y="4376318"/>
-            <a:ext cx="1051560" cy="751637"/>
-          </a:xfrm>
-          <a:prstGeom prst="rect">
-            <a:avLst/>
-          </a:prstGeom>
-          <a:noFill/>
-          <a:ln/>
-        </p:spPr>
-        <p:txBody>
-          <a:bodyPr wrap="square" lIns="0" tIns="0" rIns="0" bIns="0" rtlCol="0" anchor="ctr"/>
-          <a:lstStyle/>
-          <a:p>
-            <a:pPr algn="r" indent="0" marL="0">
-              <a:buNone/>
-            </a:pPr>
-            <a:r>
-              <a:rPr lang="en-US" sz="1600" b="1" dirty="0">
-                <a:solidFill>
-                  <a:srgbClr val="A82B26"/>
-                </a:solidFill>
-                <a:latin typeface="Inter" pitchFamily="34" charset="0"/>
-                <a:ea typeface="Inter" pitchFamily="34" charset="-122"/>
-                <a:cs typeface="Inter" pitchFamily="34" charset="-120"/>
-              </a:rPr>
-              <a:t>−3.6 pts</a:t>
-            </a:r>
-            <a:endParaRPr lang="en-US" sz="1600" dirty="0"/>
-          </a:p>
-        </p:txBody>
-      </p:sp>
-      <p:sp>
-        <p:nvSpPr>
-          <p:cNvPr id="56" name="Shape 54"/>
+          <p:cNvPr id="44" name="Shape 42"/>
           <p:cNvSpPr/>
           <p:nvPr/>
         </p:nvSpPr>
         <p:spPr>
           <a:xfrm>
-            <a:off x="6208776" y="5127955"/>
-            <a:ext cx="5321808" cy="751637"/>
+            <a:off x="4349496" y="5124298"/>
+            <a:ext cx="3489960" cy="755294"/>
           </a:xfrm>
           <a:prstGeom prst="rect">
             <a:avLst/>
@@ -31423,14 +31619,623 @@
       </p:sp>
       <p:sp>
         <p:nvSpPr>
+          <p:cNvPr id="45" name="Text 43"/>
+          <p:cNvSpPr txBox="1"/>
+          <p:nvPr/>
+        </p:nvSpPr>
+        <p:spPr>
+          <a:xfrm>
+            <a:off x="4440936" y="5124298"/>
+            <a:ext cx="365760" cy="755294"/>
+          </a:xfrm>
+          <a:prstGeom prst="rect">
+            <a:avLst/>
+          </a:prstGeom>
+          <a:noFill/>
+          <a:ln/>
+        </p:spPr>
+        <p:txBody>
+          <a:bodyPr wrap="square" lIns="0" tIns="0" rIns="0" bIns="0" rtlCol="0" anchor="ctr"/>
+          <a:lstStyle/>
+          <a:p>
+            <a:pPr indent="0" marL="0">
+              <a:buNone/>
+            </a:pPr>
+            <a:r>
+              <a:rPr lang="en-US" sz="1500" b="1" dirty="0">
+                <a:solidFill>
+                  <a:srgbClr val="0B2C4A"/>
+                </a:solidFill>
+                <a:latin typeface="Inter" pitchFamily="34" charset="0"/>
+                <a:ea typeface="Inter" pitchFamily="34" charset="-122"/>
+                <a:cs typeface="Inter" pitchFamily="34" charset="-120"/>
+              </a:rPr>
+              <a:t>29</a:t>
+            </a:r>
+            <a:endParaRPr lang="en-US" sz="1500" dirty="0"/>
+          </a:p>
+        </p:txBody>
+      </p:sp>
+      <p:sp>
+        <p:nvSpPr>
+          <p:cNvPr id="46" name="Text 44"/>
+          <p:cNvSpPr txBox="1"/>
+          <p:nvPr/>
+        </p:nvSpPr>
+        <p:spPr>
+          <a:xfrm>
+            <a:off x="4788408" y="5124298"/>
+            <a:ext cx="1825752" cy="755294"/>
+          </a:xfrm>
+          <a:prstGeom prst="rect">
+            <a:avLst/>
+          </a:prstGeom>
+          <a:noFill/>
+          <a:ln/>
+        </p:spPr>
+        <p:txBody>
+          <a:bodyPr wrap="square" lIns="0" tIns="0" rIns="0" bIns="0" rtlCol="0" anchor="ctr"/>
+          <a:lstStyle/>
+          <a:p>
+            <a:pPr indent="0" marL="0">
+              <a:spcAft>
+                <a:spcPts val="200"/>
+              </a:spcAft>
+              <a:buNone/>
+            </a:pPr>
+            <a:r>
+              <a:rPr lang="en-US" sz="1400" b="1" dirty="0">
+                <a:solidFill>
+                  <a:srgbClr val="1A1A1A"/>
+                </a:solidFill>
+                <a:latin typeface="Inter" pitchFamily="34" charset="0"/>
+                <a:ea typeface="Inter" pitchFamily="34" charset="-122"/>
+                <a:cs typeface="Inter" pitchFamily="34" charset="-120"/>
+              </a:rPr>
+              <a:t>Cadillac</a:t>
+            </a:r>
+            <a:endParaRPr lang="en-US" sz="1400" dirty="0"/>
+          </a:p>
+          <a:p>
+            <a:pPr indent="0" marL="0">
+              <a:spcAft>
+                <a:spcPts val="200"/>
+              </a:spcAft>
+              <a:buNone/>
+            </a:pPr>
+            <a:r>
+              <a:rPr lang="en-US" sz="1200" dirty="0">
+                <a:solidFill>
+                  <a:srgbClr val="595959"/>
+                </a:solidFill>
+                <a:latin typeface="Inter" pitchFamily="34" charset="0"/>
+                <a:ea typeface="Inter" pitchFamily="34" charset="-122"/>
+                <a:cs typeface="Inter" pitchFamily="34" charset="-120"/>
+              </a:rPr>
+              <a:t>33.8%  →  </a:t>
+            </a:r>
+            <a:pPr indent="0" marL="0">
+              <a:spcAft>
+                <a:spcPts val="200"/>
+              </a:spcAft>
+              <a:buNone/>
+            </a:pPr>
+            <a:r>
+              <a:rPr lang="en-US" sz="1200" b="1" dirty="0">
+                <a:solidFill>
+                  <a:srgbClr val="A82B26"/>
+                </a:solidFill>
+                <a:latin typeface="Inter" pitchFamily="34" charset="0"/>
+                <a:ea typeface="Inter" pitchFamily="34" charset="-122"/>
+                <a:cs typeface="Inter" pitchFamily="34" charset="-120"/>
+              </a:rPr>
+              <a:t>30.8%</a:t>
+            </a:r>
+            <a:endParaRPr lang="en-US" sz="1400" dirty="0"/>
+          </a:p>
+        </p:txBody>
+      </p:sp>
+      <p:sp>
+        <p:nvSpPr>
+          <p:cNvPr id="47" name="Text 45"/>
+          <p:cNvSpPr txBox="1"/>
+          <p:nvPr/>
+        </p:nvSpPr>
+        <p:spPr>
+          <a:xfrm>
+            <a:off x="6632448" y="5124298"/>
+            <a:ext cx="1115568" cy="755294"/>
+          </a:xfrm>
+          <a:prstGeom prst="rect">
+            <a:avLst/>
+          </a:prstGeom>
+          <a:noFill/>
+          <a:ln/>
+        </p:spPr>
+        <p:txBody>
+          <a:bodyPr wrap="square" lIns="0" tIns="0" rIns="0" bIns="0" rtlCol="0" anchor="ctr"/>
+          <a:lstStyle/>
+          <a:p>
+            <a:pPr algn="r" indent="0" marL="0">
+              <a:buNone/>
+            </a:pPr>
+            <a:r>
+              <a:rPr lang="en-US" sz="1600" b="1" dirty="0">
+                <a:solidFill>
+                  <a:srgbClr val="A82B26"/>
+                </a:solidFill>
+                <a:latin typeface="Inter" pitchFamily="34" charset="0"/>
+                <a:ea typeface="Inter" pitchFamily="34" charset="-122"/>
+                <a:cs typeface="Inter" pitchFamily="34" charset="-120"/>
+              </a:rPr>
+              <a:t>−3.0 pts</a:t>
+            </a:r>
+            <a:endParaRPr lang="en-US" sz="1600" dirty="0"/>
+          </a:p>
+        </p:txBody>
+      </p:sp>
+      <p:sp>
+        <p:nvSpPr>
+          <p:cNvPr id="48" name="Shape 46"/>
+          <p:cNvSpPr/>
+          <p:nvPr/>
+        </p:nvSpPr>
+        <p:spPr>
+          <a:xfrm>
+            <a:off x="8040624" y="1371600"/>
+            <a:ext cx="3489960" cy="45720"/>
+          </a:xfrm>
+          <a:prstGeom prst="rect">
+            <a:avLst/>
+          </a:prstGeom>
+          <a:solidFill>
+            <a:srgbClr val="2587C5"/>
+          </a:solidFill>
+          <a:ln/>
+        </p:spPr>
+      </p:sp>
+      <p:sp>
+        <p:nvSpPr>
+          <p:cNvPr id="49" name="Text 47"/>
+          <p:cNvSpPr txBox="1"/>
+          <p:nvPr/>
+        </p:nvSpPr>
+        <p:spPr>
+          <a:xfrm>
+            <a:off x="8132064" y="1444752"/>
+            <a:ext cx="3307080" cy="274320"/>
+          </a:xfrm>
+          <a:prstGeom prst="rect">
+            <a:avLst/>
+          </a:prstGeom>
+          <a:noFill/>
+          <a:ln/>
+        </p:spPr>
+        <p:txBody>
+          <a:bodyPr wrap="square" lIns="0" tIns="0" rIns="0" bIns="0" rtlCol="0" anchor="ctr"/>
+          <a:lstStyle/>
+          <a:p>
+            <a:pPr indent="0" marL="0">
+              <a:buNone/>
+            </a:pPr>
+            <a:r>
+              <a:rPr lang="en-US" sz="1500" b="1" spc="100" kern="0" dirty="0">
+                <a:solidFill>
+                  <a:srgbClr val="0B2C4A"/>
+                </a:solidFill>
+                <a:latin typeface="Inter" pitchFamily="34" charset="0"/>
+                <a:ea typeface="Inter" pitchFamily="34" charset="-122"/>
+                <a:cs typeface="Inter" pitchFamily="34" charset="-120"/>
+              </a:rPr>
+              <a:t>TOP 5 MOVING NOW</a:t>
+            </a:r>
+            <a:endParaRPr lang="en-US" sz="1500" dirty="0"/>
+          </a:p>
+        </p:txBody>
+      </p:sp>
+      <p:sp>
+        <p:nvSpPr>
+          <p:cNvPr id="50" name="Text 48"/>
+          <p:cNvSpPr txBox="1"/>
+          <p:nvPr/>
+        </p:nvSpPr>
+        <p:spPr>
+          <a:xfrm>
+            <a:off x="8132064" y="1737360"/>
+            <a:ext cx="3307080" cy="274320"/>
+          </a:xfrm>
+          <a:prstGeom prst="rect">
+            <a:avLst/>
+          </a:prstGeom>
+          <a:noFill/>
+          <a:ln/>
+        </p:spPr>
+        <p:txBody>
+          <a:bodyPr wrap="square" lIns="0" tIns="0" rIns="0" bIns="0" rtlCol="0" anchor="ctr"/>
+          <a:lstStyle/>
+          <a:p>
+            <a:pPr indent="0" marL="0">
+              <a:buNone/>
+            </a:pPr>
+            <a:r>
+              <a:rPr lang="en-US" sz="1200" dirty="0">
+                <a:solidFill>
+                  <a:srgbClr val="595959"/>
+                </a:solidFill>
+                <a:latin typeface="Inter" pitchFamily="34" charset="0"/>
+                <a:ea typeface="Inter" pitchFamily="34" charset="-122"/>
+                <a:cs typeface="Inter" pitchFamily="34" charset="-120"/>
+              </a:rPr>
+              <a:t>Jul–Sep vs Jan–Mar 2026</a:t>
+            </a:r>
+            <a:endParaRPr lang="en-US" sz="1200" dirty="0"/>
+          </a:p>
+        </p:txBody>
+      </p:sp>
+      <p:sp>
+        <p:nvSpPr>
+          <p:cNvPr id="51" name="Shape 49"/>
+          <p:cNvSpPr/>
+          <p:nvPr/>
+        </p:nvSpPr>
+        <p:spPr>
+          <a:xfrm>
+            <a:off x="8040624" y="2103120"/>
+            <a:ext cx="3489960" cy="755294"/>
+          </a:xfrm>
+          <a:prstGeom prst="rect">
+            <a:avLst/>
+          </a:prstGeom>
+          <a:solidFill>
+            <a:srgbClr val="F7F7F7"/>
+          </a:solidFill>
+          <a:ln/>
+        </p:spPr>
+      </p:sp>
+      <p:sp>
+        <p:nvSpPr>
+          <p:cNvPr id="52" name="Text 50"/>
+          <p:cNvSpPr txBox="1"/>
+          <p:nvPr/>
+        </p:nvSpPr>
+        <p:spPr>
+          <a:xfrm>
+            <a:off x="8132064" y="2103120"/>
+            <a:ext cx="365760" cy="755294"/>
+          </a:xfrm>
+          <a:prstGeom prst="rect">
+            <a:avLst/>
+          </a:prstGeom>
+          <a:noFill/>
+          <a:ln/>
+        </p:spPr>
+        <p:txBody>
+          <a:bodyPr wrap="square" lIns="0" tIns="0" rIns="0" bIns="0" rtlCol="0" anchor="ctr"/>
+          <a:lstStyle/>
+          <a:p>
+            <a:pPr indent="0" marL="0">
+              <a:buNone/>
+            </a:pPr>
+            <a:r>
+              <a:rPr lang="en-US" sz="1500" b="1" dirty="0">
+                <a:solidFill>
+                  <a:srgbClr val="0B2C4A"/>
+                </a:solidFill>
+                <a:latin typeface="Inter" pitchFamily="34" charset="0"/>
+                <a:ea typeface="Inter" pitchFamily="34" charset="-122"/>
+                <a:cs typeface="Inter" pitchFamily="34" charset="-120"/>
+              </a:rPr>
+              <a:t>1</a:t>
+            </a:r>
+            <a:endParaRPr lang="en-US" sz="1500" dirty="0"/>
+          </a:p>
+        </p:txBody>
+      </p:sp>
+      <p:sp>
+        <p:nvSpPr>
+          <p:cNvPr id="53" name="Text 51"/>
+          <p:cNvSpPr txBox="1"/>
+          <p:nvPr/>
+        </p:nvSpPr>
+        <p:spPr>
+          <a:xfrm>
+            <a:off x="8479536" y="2103120"/>
+            <a:ext cx="1825752" cy="755294"/>
+          </a:xfrm>
+          <a:prstGeom prst="rect">
+            <a:avLst/>
+          </a:prstGeom>
+          <a:noFill/>
+          <a:ln/>
+        </p:spPr>
+        <p:txBody>
+          <a:bodyPr wrap="square" lIns="0" tIns="0" rIns="0" bIns="0" rtlCol="0" anchor="ctr"/>
+          <a:lstStyle/>
+          <a:p>
+            <a:pPr indent="0" marL="0">
+              <a:spcAft>
+                <a:spcPts val="200"/>
+              </a:spcAft>
+              <a:buNone/>
+            </a:pPr>
+            <a:r>
+              <a:rPr lang="en-US" sz="1400" b="1" dirty="0">
+                <a:solidFill>
+                  <a:srgbClr val="1A1A1A"/>
+                </a:solidFill>
+                <a:latin typeface="Inter" pitchFamily="34" charset="0"/>
+                <a:ea typeface="Inter" pitchFamily="34" charset="-122"/>
+                <a:cs typeface="Inter" pitchFamily="34" charset="-120"/>
+              </a:rPr>
+              <a:t>LR Reno</a:t>
+            </a:r>
+            <a:endParaRPr lang="en-US" sz="1400" dirty="0"/>
+          </a:p>
+          <a:p>
+            <a:pPr indent="0" marL="0">
+              <a:spcAft>
+                <a:spcPts val="200"/>
+              </a:spcAft>
+              <a:buNone/>
+            </a:pPr>
+            <a:r>
+              <a:rPr lang="en-US" sz="1200" dirty="0">
+                <a:solidFill>
+                  <a:srgbClr val="595959"/>
+                </a:solidFill>
+                <a:latin typeface="Inter" pitchFamily="34" charset="0"/>
+                <a:ea typeface="Inter" pitchFamily="34" charset="-122"/>
+                <a:cs typeface="Inter" pitchFamily="34" charset="-120"/>
+              </a:rPr>
+              <a:t>22.8%  →  </a:t>
+            </a:r>
+            <a:pPr indent="0" marL="0">
+              <a:spcAft>
+                <a:spcPts val="200"/>
+              </a:spcAft>
+              <a:buNone/>
+            </a:pPr>
+            <a:r>
+              <a:rPr lang="en-US" sz="1200" b="1" dirty="0">
+                <a:solidFill>
+                  <a:srgbClr val="0B7A4A"/>
+                </a:solidFill>
+                <a:latin typeface="Inter" pitchFamily="34" charset="0"/>
+                <a:ea typeface="Inter" pitchFamily="34" charset="-122"/>
+                <a:cs typeface="Inter" pitchFamily="34" charset="-120"/>
+              </a:rPr>
+              <a:t>34.8%</a:t>
+            </a:r>
+            <a:endParaRPr lang="en-US" sz="1400" dirty="0"/>
+          </a:p>
+        </p:txBody>
+      </p:sp>
+      <p:sp>
+        <p:nvSpPr>
+          <p:cNvPr id="54" name="Text 52"/>
+          <p:cNvSpPr txBox="1"/>
+          <p:nvPr/>
+        </p:nvSpPr>
+        <p:spPr>
+          <a:xfrm>
+            <a:off x="10323576" y="2103120"/>
+            <a:ext cx="1115568" cy="755294"/>
+          </a:xfrm>
+          <a:prstGeom prst="rect">
+            <a:avLst/>
+          </a:prstGeom>
+          <a:noFill/>
+          <a:ln/>
+        </p:spPr>
+        <p:txBody>
+          <a:bodyPr wrap="square" lIns="0" tIns="0" rIns="0" bIns="0" rtlCol="0" anchor="ctr"/>
+          <a:lstStyle/>
+          <a:p>
+            <a:pPr algn="r" indent="0" marL="0">
+              <a:buNone/>
+            </a:pPr>
+            <a:r>
+              <a:rPr lang="en-US" sz="1600" b="1" dirty="0">
+                <a:solidFill>
+                  <a:srgbClr val="0B7A4A"/>
+                </a:solidFill>
+                <a:latin typeface="Inter" pitchFamily="34" charset="0"/>
+                <a:ea typeface="Inter" pitchFamily="34" charset="-122"/>
+                <a:cs typeface="Inter" pitchFamily="34" charset="-120"/>
+              </a:rPr>
+              <a:t>+11.9 pts</a:t>
+            </a:r>
+            <a:endParaRPr lang="en-US" sz="1600" dirty="0"/>
+          </a:p>
+        </p:txBody>
+      </p:sp>
+      <p:sp>
+        <p:nvSpPr>
+          <p:cNvPr id="55" name="Text 53"/>
+          <p:cNvSpPr txBox="1"/>
+          <p:nvPr/>
+        </p:nvSpPr>
+        <p:spPr>
+          <a:xfrm>
+            <a:off x="8132064" y="2858414"/>
+            <a:ext cx="365760" cy="755294"/>
+          </a:xfrm>
+          <a:prstGeom prst="rect">
+            <a:avLst/>
+          </a:prstGeom>
+          <a:noFill/>
+          <a:ln/>
+        </p:spPr>
+        <p:txBody>
+          <a:bodyPr wrap="square" lIns="0" tIns="0" rIns="0" bIns="0" rtlCol="0" anchor="ctr"/>
+          <a:lstStyle/>
+          <a:p>
+            <a:pPr indent="0" marL="0">
+              <a:buNone/>
+            </a:pPr>
+            <a:r>
+              <a:rPr lang="en-US" sz="1500" b="1" dirty="0">
+                <a:solidFill>
+                  <a:srgbClr val="0B2C4A"/>
+                </a:solidFill>
+                <a:latin typeface="Inter" pitchFamily="34" charset="0"/>
+                <a:ea typeface="Inter" pitchFamily="34" charset="-122"/>
+                <a:cs typeface="Inter" pitchFamily="34" charset="-120"/>
+              </a:rPr>
+              <a:t>2</a:t>
+            </a:r>
+            <a:endParaRPr lang="en-US" sz="1500" dirty="0"/>
+          </a:p>
+        </p:txBody>
+      </p:sp>
+      <p:sp>
+        <p:nvSpPr>
+          <p:cNvPr id="56" name="Text 54"/>
+          <p:cNvSpPr txBox="1"/>
+          <p:nvPr/>
+        </p:nvSpPr>
+        <p:spPr>
+          <a:xfrm>
+            <a:off x="8479536" y="2858414"/>
+            <a:ext cx="1825752" cy="755294"/>
+          </a:xfrm>
+          <a:prstGeom prst="rect">
+            <a:avLst/>
+          </a:prstGeom>
+          <a:noFill/>
+          <a:ln/>
+        </p:spPr>
+        <p:txBody>
+          <a:bodyPr wrap="square" lIns="0" tIns="0" rIns="0" bIns="0" rtlCol="0" anchor="ctr"/>
+          <a:lstStyle/>
+          <a:p>
+            <a:pPr indent="0" marL="0">
+              <a:spcAft>
+                <a:spcPts val="200"/>
+              </a:spcAft>
+              <a:buNone/>
+            </a:pPr>
+            <a:r>
+              <a:rPr lang="en-US" sz="1400" b="1" dirty="0">
+                <a:solidFill>
+                  <a:srgbClr val="1A1A1A"/>
+                </a:solidFill>
+                <a:latin typeface="Inter" pitchFamily="34" charset="0"/>
+                <a:ea typeface="Inter" pitchFamily="34" charset="-122"/>
+                <a:cs typeface="Inter" pitchFamily="34" charset="-120"/>
+              </a:rPr>
+              <a:t>CDJR Post Falls</a:t>
+            </a:r>
+            <a:endParaRPr lang="en-US" sz="1400" dirty="0"/>
+          </a:p>
+          <a:p>
+            <a:pPr indent="0" marL="0">
+              <a:spcAft>
+                <a:spcPts val="200"/>
+              </a:spcAft>
+              <a:buNone/>
+            </a:pPr>
+            <a:r>
+              <a:rPr lang="en-US" sz="1200" dirty="0">
+                <a:solidFill>
+                  <a:srgbClr val="595959"/>
+                </a:solidFill>
+                <a:latin typeface="Inter" pitchFamily="34" charset="0"/>
+                <a:ea typeface="Inter" pitchFamily="34" charset="-122"/>
+                <a:cs typeface="Inter" pitchFamily="34" charset="-120"/>
+              </a:rPr>
+              <a:t>20.2%  →  </a:t>
+            </a:r>
+            <a:pPr indent="0" marL="0">
+              <a:spcAft>
+                <a:spcPts val="200"/>
+              </a:spcAft>
+              <a:buNone/>
+            </a:pPr>
+            <a:r>
+              <a:rPr lang="en-US" sz="1200" b="1" dirty="0">
+                <a:solidFill>
+                  <a:srgbClr val="0B7A4A"/>
+                </a:solidFill>
+                <a:latin typeface="Inter" pitchFamily="34" charset="0"/>
+                <a:ea typeface="Inter" pitchFamily="34" charset="-122"/>
+                <a:cs typeface="Inter" pitchFamily="34" charset="-120"/>
+              </a:rPr>
+              <a:t>26.4%</a:t>
+            </a:r>
+            <a:endParaRPr lang="en-US" sz="1400" dirty="0"/>
+          </a:p>
+        </p:txBody>
+      </p:sp>
+      <p:sp>
+        <p:nvSpPr>
           <p:cNvPr id="57" name="Text 55"/>
           <p:cNvSpPr txBox="1"/>
           <p:nvPr/>
         </p:nvSpPr>
         <p:spPr>
           <a:xfrm>
-            <a:off x="6300216" y="5127955"/>
-            <a:ext cx="320040" cy="751637"/>
+            <a:off x="10323576" y="2858414"/>
+            <a:ext cx="1115568" cy="755294"/>
+          </a:xfrm>
+          <a:prstGeom prst="rect">
+            <a:avLst/>
+          </a:prstGeom>
+          <a:noFill/>
+          <a:ln/>
+        </p:spPr>
+        <p:txBody>
+          <a:bodyPr wrap="square" lIns="0" tIns="0" rIns="0" bIns="0" rtlCol="0" anchor="ctr"/>
+          <a:lstStyle/>
+          <a:p>
+            <a:pPr algn="r" indent="0" marL="0">
+              <a:buNone/>
+            </a:pPr>
+            <a:r>
+              <a:rPr lang="en-US" sz="1600" b="1" dirty="0">
+                <a:solidFill>
+                  <a:srgbClr val="0B7A4A"/>
+                </a:solidFill>
+                <a:latin typeface="Inter" pitchFamily="34" charset="0"/>
+                <a:ea typeface="Inter" pitchFamily="34" charset="-122"/>
+                <a:cs typeface="Inter" pitchFamily="34" charset="-120"/>
+              </a:rPr>
+              <a:t>+6.2 pts</a:t>
+            </a:r>
+            <a:endParaRPr lang="en-US" sz="1600" dirty="0"/>
+          </a:p>
+        </p:txBody>
+      </p:sp>
+      <p:sp>
+        <p:nvSpPr>
+          <p:cNvPr id="58" name="Shape 56"/>
+          <p:cNvSpPr/>
+          <p:nvPr/>
+        </p:nvSpPr>
+        <p:spPr>
+          <a:xfrm>
+            <a:off x="8040624" y="3613709"/>
+            <a:ext cx="3489960" cy="755294"/>
+          </a:xfrm>
+          <a:prstGeom prst="rect">
+            <a:avLst/>
+          </a:prstGeom>
+          <a:solidFill>
+            <a:srgbClr val="F7F7F7"/>
+          </a:solidFill>
+          <a:ln/>
+        </p:spPr>
+      </p:sp>
+      <p:sp>
+        <p:nvSpPr>
+          <p:cNvPr id="59" name="Text 57"/>
+          <p:cNvSpPr txBox="1"/>
+          <p:nvPr/>
+        </p:nvSpPr>
+        <p:spPr>
+          <a:xfrm>
+            <a:off x="8132064" y="3613709"/>
+            <a:ext cx="365760" cy="755294"/>
           </a:xfrm>
           <a:prstGeom prst="rect">
             <a:avLst/>
@@ -31454,7 +32259,7 @@
                 <a:ea typeface="Inter" pitchFamily="34" charset="-122"/>
                 <a:cs typeface="Inter" pitchFamily="34" charset="-120"/>
               </a:rPr>
-              <a:t>29</a:t>
+              <a:t>3</a:t>
             </a:r>
             <a:endParaRPr lang="en-US" sz="1500" dirty="0"/>
           </a:p>
@@ -31462,14 +32267,14 @@
       </p:sp>
       <p:sp>
         <p:nvSpPr>
-          <p:cNvPr id="58" name="Text 56"/>
-          <p:cNvSpPr txBox="1"/>
-          <p:nvPr/>
-        </p:nvSpPr>
-        <p:spPr>
-          <a:xfrm>
-            <a:off x="6665976" y="5127955"/>
-            <a:ext cx="1737360" cy="751637"/>
+          <p:cNvPr id="60" name="Text 58"/>
+          <p:cNvSpPr txBox="1"/>
+          <p:nvPr/>
+        </p:nvSpPr>
+        <p:spPr>
+          <a:xfrm>
+            <a:off x="8479536" y="3613709"/>
+            <a:ext cx="1825752" cy="755294"/>
           </a:xfrm>
           <a:prstGeom prst="rect">
             <a:avLst/>
@@ -31482,6 +32287,9 @@
           <a:lstStyle/>
           <a:p>
             <a:pPr indent="0" marL="0">
+              <a:spcAft>
+                <a:spcPts val="200"/>
+              </a:spcAft>
               <a:buNone/>
             </a:pPr>
             <a:r>
@@ -31493,38 +32301,19 @@
                 <a:ea typeface="Inter" pitchFamily="34" charset="-122"/>
                 <a:cs typeface="Inter" pitchFamily="34" charset="-120"/>
               </a:rPr>
-              <a:t>Cadillac</a:t>
+              <a:t>LR Henderson</a:t>
             </a:r>
             <a:endParaRPr lang="en-US" sz="1400" dirty="0"/>
           </a:p>
-        </p:txBody>
-      </p:sp>
-      <p:sp>
-        <p:nvSpPr>
-          <p:cNvPr id="59" name="Text 57"/>
-          <p:cNvSpPr txBox="1"/>
-          <p:nvPr/>
-        </p:nvSpPr>
-        <p:spPr>
-          <a:xfrm>
-            <a:off x="8449056" y="5127955"/>
-            <a:ext cx="1920240" cy="751637"/>
-          </a:xfrm>
-          <a:prstGeom prst="rect">
-            <a:avLst/>
-          </a:prstGeom>
-          <a:noFill/>
-          <a:ln/>
-        </p:spPr>
-        <p:txBody>
-          <a:bodyPr wrap="square" lIns="0" tIns="0" rIns="0" bIns="0" rtlCol="0" anchor="ctr"/>
-          <a:lstStyle/>
           <a:p>
             <a:pPr indent="0" marL="0">
-              <a:buNone/>
-            </a:pPr>
-            <a:r>
-              <a:rPr lang="en-US" sz="1400" dirty="0">
+              <a:spcAft>
+                <a:spcPts val="200"/>
+              </a:spcAft>
+              <a:buNone/>
+            </a:pPr>
+            <a:r>
+              <a:rPr lang="en-US" sz="1200" dirty="0">
                 <a:solidFill>
                   <a:srgbClr val="595959"/>
                 </a:solidFill>
@@ -31532,50 +32321,373 @@
                 <a:ea typeface="Inter" pitchFamily="34" charset="-122"/>
                 <a:cs typeface="Inter" pitchFamily="34" charset="-120"/>
               </a:rPr>
-              <a:t>33.8%  </a:t>
+              <a:t>31.5%  →  </a:t>
             </a:r>
             <a:pPr indent="0" marL="0">
+              <a:spcAft>
+                <a:spcPts val="200"/>
+              </a:spcAft>
+              <a:buNone/>
+            </a:pPr>
+            <a:r>
+              <a:rPr lang="en-US" sz="1200" b="1" dirty="0">
+                <a:solidFill>
+                  <a:srgbClr val="0B7A4A"/>
+                </a:solidFill>
+                <a:latin typeface="Inter" pitchFamily="34" charset="0"/>
+                <a:ea typeface="Inter" pitchFamily="34" charset="-122"/>
+                <a:cs typeface="Inter" pitchFamily="34" charset="-120"/>
+              </a:rPr>
+              <a:t>35.6%</a:t>
+            </a:r>
+            <a:endParaRPr lang="en-US" sz="1400" dirty="0"/>
+          </a:p>
+        </p:txBody>
+      </p:sp>
+      <p:sp>
+        <p:nvSpPr>
+          <p:cNvPr id="61" name="Text 59"/>
+          <p:cNvSpPr txBox="1"/>
+          <p:nvPr/>
+        </p:nvSpPr>
+        <p:spPr>
+          <a:xfrm>
+            <a:off x="10323576" y="3613709"/>
+            <a:ext cx="1115568" cy="755294"/>
+          </a:xfrm>
+          <a:prstGeom prst="rect">
+            <a:avLst/>
+          </a:prstGeom>
+          <a:noFill/>
+          <a:ln/>
+        </p:spPr>
+        <p:txBody>
+          <a:bodyPr wrap="square" lIns="0" tIns="0" rIns="0" bIns="0" rtlCol="0" anchor="ctr"/>
+          <a:lstStyle/>
+          <a:p>
+            <a:pPr algn="r" indent="0" marL="0">
+              <a:buNone/>
+            </a:pPr>
+            <a:r>
+              <a:rPr lang="en-US" sz="1600" b="1" dirty="0">
+                <a:solidFill>
+                  <a:srgbClr val="0B7A4A"/>
+                </a:solidFill>
+                <a:latin typeface="Inter" pitchFamily="34" charset="0"/>
+                <a:ea typeface="Inter" pitchFamily="34" charset="-122"/>
+                <a:cs typeface="Inter" pitchFamily="34" charset="-120"/>
+              </a:rPr>
+              <a:t>+4.2 pts</a:t>
+            </a:r>
+            <a:endParaRPr lang="en-US" sz="1600" dirty="0"/>
+          </a:p>
+        </p:txBody>
+      </p:sp>
+      <p:sp>
+        <p:nvSpPr>
+          <p:cNvPr id="62" name="Text 60"/>
+          <p:cNvSpPr txBox="1"/>
+          <p:nvPr/>
+        </p:nvSpPr>
+        <p:spPr>
+          <a:xfrm>
+            <a:off x="8132064" y="4369003"/>
+            <a:ext cx="365760" cy="755294"/>
+          </a:xfrm>
+          <a:prstGeom prst="rect">
+            <a:avLst/>
+          </a:prstGeom>
+          <a:noFill/>
+          <a:ln/>
+        </p:spPr>
+        <p:txBody>
+          <a:bodyPr wrap="square" lIns="0" tIns="0" rIns="0" bIns="0" rtlCol="0" anchor="ctr"/>
+          <a:lstStyle/>
+          <a:p>
+            <a:pPr indent="0" marL="0">
+              <a:buNone/>
+            </a:pPr>
+            <a:r>
+              <a:rPr lang="en-US" sz="1500" b="1" dirty="0">
+                <a:solidFill>
+                  <a:srgbClr val="0B2C4A"/>
+                </a:solidFill>
+                <a:latin typeface="Inter" pitchFamily="34" charset="0"/>
+                <a:ea typeface="Inter" pitchFamily="34" charset="-122"/>
+                <a:cs typeface="Inter" pitchFamily="34" charset="-120"/>
+              </a:rPr>
+              <a:t>4</a:t>
+            </a:r>
+            <a:endParaRPr lang="en-US" sz="1500" dirty="0"/>
+          </a:p>
+        </p:txBody>
+      </p:sp>
+      <p:sp>
+        <p:nvSpPr>
+          <p:cNvPr id="63" name="Text 61"/>
+          <p:cNvSpPr txBox="1"/>
+          <p:nvPr/>
+        </p:nvSpPr>
+        <p:spPr>
+          <a:xfrm>
+            <a:off x="8479536" y="4369003"/>
+            <a:ext cx="1825752" cy="755294"/>
+          </a:xfrm>
+          <a:prstGeom prst="rect">
+            <a:avLst/>
+          </a:prstGeom>
+          <a:noFill/>
+          <a:ln/>
+        </p:spPr>
+        <p:txBody>
+          <a:bodyPr wrap="square" lIns="0" tIns="0" rIns="0" bIns="0" rtlCol="0" anchor="ctr"/>
+          <a:lstStyle/>
+          <a:p>
+            <a:pPr indent="0" marL="0">
+              <a:spcAft>
+                <a:spcPts val="200"/>
+              </a:spcAft>
               <a:buNone/>
             </a:pPr>
             <a:r>
               <a:rPr lang="en-US" sz="1400" b="1" dirty="0">
                 <a:solidFill>
-                  <a:srgbClr val="A82B26"/>
-                </a:solidFill>
-                <a:latin typeface="Inter" pitchFamily="34" charset="0"/>
-                <a:ea typeface="Inter" pitchFamily="34" charset="-122"/>
-                <a:cs typeface="Inter" pitchFamily="34" charset="-120"/>
-              </a:rPr>
-              <a:t>→  </a:t>
-            </a:r>
+                  <a:srgbClr val="1A1A1A"/>
+                </a:solidFill>
+                <a:latin typeface="Inter" pitchFamily="34" charset="0"/>
+                <a:ea typeface="Inter" pitchFamily="34" charset="-122"/>
+                <a:cs typeface="Inter" pitchFamily="34" charset="-120"/>
+              </a:rPr>
+              <a:t>Acura</a:t>
+            </a:r>
+            <a:endParaRPr lang="en-US" sz="1400" dirty="0"/>
+          </a:p>
+          <a:p>
             <a:pPr indent="0" marL="0">
+              <a:spcAft>
+                <a:spcPts val="200"/>
+              </a:spcAft>
+              <a:buNone/>
+            </a:pPr>
+            <a:r>
+              <a:rPr lang="en-US" sz="1200" dirty="0">
+                <a:solidFill>
+                  <a:srgbClr val="595959"/>
+                </a:solidFill>
+                <a:latin typeface="Inter" pitchFamily="34" charset="0"/>
+                <a:ea typeface="Inter" pitchFamily="34" charset="-122"/>
+                <a:cs typeface="Inter" pitchFamily="34" charset="-120"/>
+              </a:rPr>
+              <a:t>31.3%  →  </a:t>
+            </a:r>
+            <a:pPr indent="0" marL="0">
+              <a:spcAft>
+                <a:spcPts val="200"/>
+              </a:spcAft>
+              <a:buNone/>
+            </a:pPr>
+            <a:r>
+              <a:rPr lang="en-US" sz="1200" b="1" dirty="0">
+                <a:solidFill>
+                  <a:srgbClr val="0B7A4A"/>
+                </a:solidFill>
+                <a:latin typeface="Inter" pitchFamily="34" charset="0"/>
+                <a:ea typeface="Inter" pitchFamily="34" charset="-122"/>
+                <a:cs typeface="Inter" pitchFamily="34" charset="-120"/>
+              </a:rPr>
+              <a:t>34.5%</a:t>
+            </a:r>
+            <a:endParaRPr lang="en-US" sz="1400" dirty="0"/>
+          </a:p>
+        </p:txBody>
+      </p:sp>
+      <p:sp>
+        <p:nvSpPr>
+          <p:cNvPr id="64" name="Text 62"/>
+          <p:cNvSpPr txBox="1"/>
+          <p:nvPr/>
+        </p:nvSpPr>
+        <p:spPr>
+          <a:xfrm>
+            <a:off x="10323576" y="4369003"/>
+            <a:ext cx="1115568" cy="755294"/>
+          </a:xfrm>
+          <a:prstGeom prst="rect">
+            <a:avLst/>
+          </a:prstGeom>
+          <a:noFill/>
+          <a:ln/>
+        </p:spPr>
+        <p:txBody>
+          <a:bodyPr wrap="square" lIns="0" tIns="0" rIns="0" bIns="0" rtlCol="0" anchor="ctr"/>
+          <a:lstStyle/>
+          <a:p>
+            <a:pPr algn="r" indent="0" marL="0">
+              <a:buNone/>
+            </a:pPr>
+            <a:r>
+              <a:rPr lang="en-US" sz="1600" b="1" dirty="0">
+                <a:solidFill>
+                  <a:srgbClr val="0B7A4A"/>
+                </a:solidFill>
+                <a:latin typeface="Inter" pitchFamily="34" charset="0"/>
+                <a:ea typeface="Inter" pitchFamily="34" charset="-122"/>
+                <a:cs typeface="Inter" pitchFamily="34" charset="-120"/>
+              </a:rPr>
+              <a:t>+3.2 pts</a:t>
+            </a:r>
+            <a:endParaRPr lang="en-US" sz="1600" dirty="0"/>
+          </a:p>
+        </p:txBody>
+      </p:sp>
+      <p:sp>
+        <p:nvSpPr>
+          <p:cNvPr id="65" name="Shape 63"/>
+          <p:cNvSpPr/>
+          <p:nvPr/>
+        </p:nvSpPr>
+        <p:spPr>
+          <a:xfrm>
+            <a:off x="8040624" y="5124298"/>
+            <a:ext cx="3489960" cy="755294"/>
+          </a:xfrm>
+          <a:prstGeom prst="rect">
+            <a:avLst/>
+          </a:prstGeom>
+          <a:solidFill>
+            <a:srgbClr val="F7F7F7"/>
+          </a:solidFill>
+          <a:ln/>
+        </p:spPr>
+      </p:sp>
+      <p:sp>
+        <p:nvSpPr>
+          <p:cNvPr id="66" name="Text 64"/>
+          <p:cNvSpPr txBox="1"/>
+          <p:nvPr/>
+        </p:nvSpPr>
+        <p:spPr>
+          <a:xfrm>
+            <a:off x="8132064" y="5124298"/>
+            <a:ext cx="365760" cy="755294"/>
+          </a:xfrm>
+          <a:prstGeom prst="rect">
+            <a:avLst/>
+          </a:prstGeom>
+          <a:noFill/>
+          <a:ln/>
+        </p:spPr>
+        <p:txBody>
+          <a:bodyPr wrap="square" lIns="0" tIns="0" rIns="0" bIns="0" rtlCol="0" anchor="ctr"/>
+          <a:lstStyle/>
+          <a:p>
+            <a:pPr indent="0" marL="0">
+              <a:buNone/>
+            </a:pPr>
+            <a:r>
+              <a:rPr lang="en-US" sz="1500" b="1" dirty="0">
+                <a:solidFill>
+                  <a:srgbClr val="0B2C4A"/>
+                </a:solidFill>
+                <a:latin typeface="Inter" pitchFamily="34" charset="0"/>
+                <a:ea typeface="Inter" pitchFamily="34" charset="-122"/>
+                <a:cs typeface="Inter" pitchFamily="34" charset="-120"/>
+              </a:rPr>
+              <a:t>5</a:t>
+            </a:r>
+            <a:endParaRPr lang="en-US" sz="1500" dirty="0"/>
+          </a:p>
+        </p:txBody>
+      </p:sp>
+      <p:sp>
+        <p:nvSpPr>
+          <p:cNvPr id="67" name="Text 65"/>
+          <p:cNvSpPr txBox="1"/>
+          <p:nvPr/>
+        </p:nvSpPr>
+        <p:spPr>
+          <a:xfrm>
+            <a:off x="8479536" y="5124298"/>
+            <a:ext cx="1825752" cy="755294"/>
+          </a:xfrm>
+          <a:prstGeom prst="rect">
+            <a:avLst/>
+          </a:prstGeom>
+          <a:noFill/>
+          <a:ln/>
+        </p:spPr>
+        <p:txBody>
+          <a:bodyPr wrap="square" lIns="0" tIns="0" rIns="0" bIns="0" rtlCol="0" anchor="ctr"/>
+          <a:lstStyle/>
+          <a:p>
+            <a:pPr indent="0" marL="0">
+              <a:spcAft>
+                <a:spcPts val="200"/>
+              </a:spcAft>
               <a:buNone/>
             </a:pPr>
             <a:r>
               <a:rPr lang="en-US" sz="1400" b="1" dirty="0">
                 <a:solidFill>
-                  <a:srgbClr val="A82B26"/>
-                </a:solidFill>
-                <a:latin typeface="Inter" pitchFamily="34" charset="0"/>
-                <a:ea typeface="Inter" pitchFamily="34" charset="-122"/>
-                <a:cs typeface="Inter" pitchFamily="34" charset="-120"/>
-              </a:rPr>
-              <a:t>30.8%</a:t>
+                  <a:srgbClr val="1A1A1A"/>
+                </a:solidFill>
+                <a:latin typeface="Inter" pitchFamily="34" charset="0"/>
+                <a:ea typeface="Inter" pitchFamily="34" charset="-122"/>
+                <a:cs typeface="Inter" pitchFamily="34" charset="-120"/>
+              </a:rPr>
+              <a:t>Mazda</a:t>
             </a:r>
             <a:endParaRPr lang="en-US" sz="1400" dirty="0"/>
           </a:p>
-        </p:txBody>
-      </p:sp>
-      <p:sp>
-        <p:nvSpPr>
-          <p:cNvPr id="60" name="Text 58"/>
-          <p:cNvSpPr txBox="1"/>
-          <p:nvPr/>
-        </p:nvSpPr>
-        <p:spPr>
-          <a:xfrm>
-            <a:off x="10415016" y="5127955"/>
-            <a:ext cx="1051560" cy="751637"/>
+          <a:p>
+            <a:pPr indent="0" marL="0">
+              <a:spcAft>
+                <a:spcPts val="200"/>
+              </a:spcAft>
+              <a:buNone/>
+            </a:pPr>
+            <a:r>
+              <a:rPr lang="en-US" sz="1200" dirty="0">
+                <a:solidFill>
+                  <a:srgbClr val="595959"/>
+                </a:solidFill>
+                <a:latin typeface="Inter" pitchFamily="34" charset="0"/>
+                <a:ea typeface="Inter" pitchFamily="34" charset="-122"/>
+                <a:cs typeface="Inter" pitchFamily="34" charset="-120"/>
+              </a:rPr>
+              <a:t>35.2%  →  </a:t>
+            </a:r>
+            <a:pPr indent="0" marL="0">
+              <a:spcAft>
+                <a:spcPts val="200"/>
+              </a:spcAft>
+              <a:buNone/>
+            </a:pPr>
+            <a:r>
+              <a:rPr lang="en-US" sz="1200" b="1" dirty="0">
+                <a:solidFill>
+                  <a:srgbClr val="0B7A4A"/>
+                </a:solidFill>
+                <a:latin typeface="Inter" pitchFamily="34" charset="0"/>
+                <a:ea typeface="Inter" pitchFamily="34" charset="-122"/>
+                <a:cs typeface="Inter" pitchFamily="34" charset="-120"/>
+              </a:rPr>
+              <a:t>37.9%</a:t>
+            </a:r>
+            <a:endParaRPr lang="en-US" sz="1400" dirty="0"/>
+          </a:p>
+        </p:txBody>
+      </p:sp>
+      <p:sp>
+        <p:nvSpPr>
+          <p:cNvPr id="68" name="Text 66"/>
+          <p:cNvSpPr txBox="1"/>
+          <p:nvPr/>
+        </p:nvSpPr>
+        <p:spPr>
+          <a:xfrm>
+            <a:off x="10323576" y="5124298"/>
+            <a:ext cx="1115568" cy="755294"/>
           </a:xfrm>
           <a:prstGeom prst="rect">
             <a:avLst/>
@@ -31593,13 +32705,13 @@
             <a:r>
               <a:rPr lang="en-US" sz="1600" b="1" dirty="0">
                 <a:solidFill>
-                  <a:srgbClr val="A82B26"/>
-                </a:solidFill>
-                <a:latin typeface="Inter" pitchFamily="34" charset="0"/>
-                <a:ea typeface="Inter" pitchFamily="34" charset="-122"/>
-                <a:cs typeface="Inter" pitchFamily="34" charset="-120"/>
-              </a:rPr>
-              <a:t>−3.0 pts</a:t>
+                  <a:srgbClr val="0B7A4A"/>
+                </a:solidFill>
+                <a:latin typeface="Inter" pitchFamily="34" charset="0"/>
+                <a:ea typeface="Inter" pitchFamily="34" charset="-122"/>
+                <a:cs typeface="Inter" pitchFamily="34" charset="-120"/>
+              </a:rPr>
+              <a:t>+2.7 pts</a:t>
             </a:r>
             <a:endParaRPr lang="en-US" sz="1600" dirty="0"/>
           </a:p>
@@ -31607,7 +32719,7 @@
       </p:sp>
       <p:sp>
         <p:nvSpPr>
-          <p:cNvPr id="61" name="Shape 59"/>
+          <p:cNvPr id="69" name="Shape 67"/>
           <p:cNvSpPr/>
           <p:nvPr/>
         </p:nvSpPr>
@@ -31627,7 +32739,7 @@
       </p:sp>
       <p:sp>
         <p:nvSpPr>
-          <p:cNvPr id="62" name="Text 60"/>
+          <p:cNvPr id="70" name="Text 68"/>
           <p:cNvSpPr txBox="1"/>
           <p:nvPr/>
         </p:nvSpPr>
@@ -31658,7 +32770,7 @@
                 <a:ea typeface="Inter" pitchFamily="34" charset="-122"/>
                 <a:cs typeface="Inter" pitchFamily="34" charset="-120"/>
               </a:rPr>
-              <a:t>Ask Acura, Hyundai Prescott and Honda Flagstaff what changed. Ask VW St George, Kia LV and LR LV what got in the way.</a:t>
+              <a:t>Ask Acura, Hyundai Prescott and Honda Flagstaff what changed. Ask VW St George, Kia LV and LR LV what got in the way. Ask LR Reno, CDJR Post Falls and LR Henderson what they started this year.</a:t>
             </a:r>
             <a:endParaRPr lang="en-US" sz="1600" dirty="0"/>
           </a:p>

--- a/day2-deck/decks/Internal Gross Profit - Review.pptx
+++ b/day2-deck/decks/Internal Gross Profit - Review.pptx
@@ -5289,7 +5289,7 @@
                 <a:ea typeface="Inter" pitchFamily="34" charset="-122"/>
                 <a:cs typeface="Inter" pitchFamily="34" charset="-120"/>
               </a:rPr>
-              <a:t>LABOR MIX</a:t>
+              <a:t>INTERNAL</a:t>
             </a:r>
             <a:endParaRPr lang="en-US" sz="1400" dirty="0"/>
           </a:p>
@@ -6143,7 +6143,7 @@
                 <a:ea typeface="Inter" pitchFamily="34" charset="-122"/>
                 <a:cs typeface="Inter" pitchFamily="34" charset="-120"/>
               </a:rPr>
-              <a:t>LABOR MIX</a:t>
+              <a:t>INTERNAL</a:t>
             </a:r>
             <a:endParaRPr lang="en-US" sz="1400" dirty="0"/>
           </a:p>
@@ -11090,7 +11090,7 @@
                 <a:ea typeface="Inter" pitchFamily="34" charset="-122"/>
                 <a:cs typeface="Inter" pitchFamily="34" charset="-120"/>
               </a:rPr>
-              <a:t>LABOR MIX</a:t>
+              <a:t>INTERNAL</a:t>
             </a:r>
             <a:endParaRPr lang="en-US" sz="1400" dirty="0"/>
           </a:p>
@@ -16037,7 +16037,7 @@
                 <a:ea typeface="Inter" pitchFamily="34" charset="-122"/>
                 <a:cs typeface="Inter" pitchFamily="34" charset="-120"/>
               </a:rPr>
-              <a:t>LABOR MIX</a:t>
+              <a:t>INTERNAL</a:t>
             </a:r>
             <a:endParaRPr lang="en-US" sz="1400" dirty="0"/>
           </a:p>
@@ -19075,7 +19075,7 @@
                 <a:ea typeface="Inter" pitchFamily="34" charset="-122"/>
                 <a:cs typeface="Inter" pitchFamily="34" charset="-120"/>
               </a:rPr>
-              <a:t>LABOR MIX</a:t>
+              <a:t>INTERNAL</a:t>
             </a:r>
             <a:endParaRPr lang="en-US" sz="1400" dirty="0"/>
           </a:p>
@@ -19929,7 +19929,7 @@
                 <a:ea typeface="Inter" pitchFamily="34" charset="-122"/>
                 <a:cs typeface="Inter" pitchFamily="34" charset="-120"/>
               </a:rPr>
-              <a:t>LABOR MIX</a:t>
+              <a:t>INTERNAL</a:t>
             </a:r>
             <a:endParaRPr lang="en-US" sz="1400" dirty="0"/>
           </a:p>
@@ -24876,7 +24876,7 @@
                 <a:ea typeface="Inter" pitchFamily="34" charset="-122"/>
                 <a:cs typeface="Inter" pitchFamily="34" charset="-120"/>
               </a:rPr>
-              <a:t>LABOR MIX</a:t>
+              <a:t>INTERNAL</a:t>
             </a:r>
             <a:endParaRPr lang="en-US" sz="1400" dirty="0"/>
           </a:p>
@@ -29823,7 +29823,7 @@
                 <a:ea typeface="Inter" pitchFamily="34" charset="-122"/>
                 <a:cs typeface="Inter" pitchFamily="34" charset="-120"/>
               </a:rPr>
-              <a:t>LABOR MIX</a:t>
+              <a:t>INTERNAL</a:t>
             </a:r>
             <a:endParaRPr lang="en-US" sz="1400" dirty="0"/>
           </a:p>

--- a/day2-deck/decks/Internal Gross Profit - Review.pptx
+++ b/day2-deck/decks/Internal Gross Profit - Review.pptx
@@ -363,6 +363,17 @@
         </c:scaling>
         <c:delete val="0"/>
         <c:axPos val="l"/>
+        <c:majorGridlines>
+          <c:spPr>
+            <a:ln w="9525" cap="flat">
+              <a:solidFill>
+                <a:srgbClr val="D9D9D9"/>
+              </a:solidFill>
+              <a:prstDash val="solid"/>
+              <a:round/>
+            </a:ln>
+          </c:spPr>
+        </c:majorGridlines>
         <c:numFmt formatCode="0&quot;%&quot;" sourceLinked="0"/>
         <c:majorTickMark val="out"/>
         <c:minorTickMark val="none"/>
@@ -580,7 +591,7 @@
                   <c:v/>
                 </c:pt>
                 <c:pt idx="11">
-                  <c:v/>
+                  <c:v>35.4</c:v>
                 </c:pt>
               </c:numCache>
             </c:numRef>
@@ -890,7 +901,7 @@
                   <c:v>35.2</c:v>
                 </c:pt>
                 <c:pt idx="11">
-                  <c:v>35.4</c:v>
+                  <c:v/>
                 </c:pt>
               </c:numCache>
             </c:numRef>
@@ -1289,17 +1300,6 @@
         </c:scaling>
         <c:delete val="0"/>
         <c:axPos val="l"/>
-        <c:majorGridlines>
-          <c:spPr>
-            <a:ln w="9525" cap="flat">
-              <a:solidFill>
-                <a:srgbClr val="D9D9D9"/>
-              </a:solidFill>
-              <a:prstDash val="solid"/>
-              <a:round/>
-            </a:ln>
-          </c:spPr>
-        </c:majorGridlines>
         <c:numFmt formatCode="0&quot;%&quot;" sourceLinked="0"/>
         <c:majorTickMark val="out"/>
         <c:minorTickMark val="none"/>
@@ -2139,13 +2139,13 @@
                   <c:v/>
                 </c:pt>
                 <c:pt idx="9">
-                  <c:v/>
+                  <c:v>77.9</c:v>
                 </c:pt>
                 <c:pt idx="10">
                   <c:v/>
                 </c:pt>
                 <c:pt idx="11">
-                  <c:v/>
+                  <c:v>78.4</c:v>
                 </c:pt>
               </c:numCache>
             </c:numRef>
@@ -2449,13 +2449,13 @@
                   <c:v>77.3</c:v>
                 </c:pt>
                 <c:pt idx="9">
-                  <c:v>77.9</c:v>
+                  <c:v/>
                 </c:pt>
                 <c:pt idx="10">
                   <c:v>77.4</c:v>
                 </c:pt>
                 <c:pt idx="11">
-                  <c:v>78.4</c:v>
+                  <c:v/>
                 </c:pt>
               </c:numCache>
             </c:numRef>
@@ -2854,17 +2854,6 @@
         </c:scaling>
         <c:delete val="0"/>
         <c:axPos val="l"/>
-        <c:majorGridlines>
-          <c:spPr>
-            <a:ln w="9525" cap="flat">
-              <a:solidFill>
-                <a:srgbClr val="D9D9D9"/>
-              </a:solidFill>
-              <a:prstDash val="solid"/>
-              <a:round/>
-            </a:ln>
-          </c:spPr>
-        </c:majorGridlines>
         <c:numFmt formatCode="0&quot;%&quot;" sourceLinked="0"/>
         <c:majorTickMark val="out"/>
         <c:minorTickMark val="none"/>
@@ -3177,6 +3166,17 @@
         </c:scaling>
         <c:delete val="0"/>
         <c:axPos val="l"/>
+        <c:majorGridlines>
+          <c:spPr>
+            <a:ln w="9525" cap="flat">
+              <a:solidFill>
+                <a:srgbClr val="D9D9D9"/>
+              </a:solidFill>
+              <a:prstDash val="solid"/>
+              <a:round/>
+            </a:ln>
+          </c:spPr>
+        </c:majorGridlines>
         <c:numFmt formatCode="0&quot;%&quot;" sourceLinked="0"/>
         <c:majorTickMark val="out"/>
         <c:minorTickMark val="none"/>

--- a/day2-deck/decks/Internal Gross Profit - Review.pptx
+++ b/day2-deck/decks/Internal Gross Profit - Review.pptx
@@ -4511,7 +4511,7 @@
           <a:p>
             <a:r>
               <a:rPr lang="en-US" dirty="0"/>
-              <a:t>Source: Qlik - Closed Repair Orders. Internal pay type, Jan-Sep by close month. Same-store, INEOS excluded (opened 2026). GMC Prescott body shop labor types excluded. Internal labor gross / internal labor sale. A higher internal margin adds service gross but is a cost to used cars. Top and bottom five stores by change in Internal Labor Gross Profit %, Jan-Sep 2026 vs 2025. Moving now: Jul-Sep 2026 vs Jan-Mar 2026, each store against itself; the group moved +0.5 pts on the same basis, so part of every store's change is seasonal.Conversation starter: each top store says one thing they started doing; each bottom store says what got in the way and what they would try. The room trades ideas. Moving now: ask the top three what they started this year.</a:t>
+              <a:t>Source: Qlik - Closed Repair Orders. Internal pay type, Jan-Sep by close month. Same-store, INEOS excluded (opened 2026). GMC Prescott body shop labor types excluded. Internal labor gross / internal labor sale. A higher internal margin adds service gross but is a cost to used cars. Top and bottom five stores by change in Internal Labor Gross Profit %, Jan-Sep 2026 vs 2025. Moving now: Jul-Sep 2026 vs Jan-Mar 2026, each store against itself; the group moved +0.5 pts on the same basis, so part of every store's change is seasonal. Green bar at the right of a row: the store is on both the top five vs last year and the top five moving now.Conversation starter: each top store says one thing they started doing; each bottom store says what got in the way and what they would try. The room trades ideas. Moving now: ask the top three what they started this year.</a:t>
             </a:r>
             <a:endParaRPr lang="en-US" dirty="0"/>
           </a:p>
@@ -4863,7 +4863,7 @@
           <a:p>
             <a:r>
               <a:rPr lang="en-US" dirty="0"/>
-              <a:t>Source: Qlik - Closed Repair Orders. Internal pay type, Jan-Sep by close month. Same-store, INEOS excluded (opened 2026). GMC Prescott body shop labor types excluded. Internal parts gross / internal parts sale on repair orders. A higher internal margin adds parts gross but is a cost to used cars. Top and bottom five stores by change in Internal Parts Gross Profit %, Jan-Sep 2026 vs 2025. Moving now: Jul-Sep 2026 vs Jan-Mar 2026, each store against itself; the group moved +0.5 pts on the same basis, so part of every store's change is seasonal.Conversation starter: each top store says one thing they started doing; each bottom store says what got in the way and what they would try. The room trades ideas. Moving now: ask the top three what they started this year.</a:t>
+              <a:t>Source: Qlik - Closed Repair Orders. Internal pay type, Jan-Sep by close month. Same-store, INEOS excluded (opened 2026). GMC Prescott body shop labor types excluded. Internal parts gross / internal parts sale on repair orders. A higher internal margin adds parts gross but is a cost to used cars. Top and bottom five stores by change in Internal Parts Gross Profit %, Jan-Sep 2026 vs 2025. Moving now: Jul-Sep 2026 vs Jan-Mar 2026, each store against itself; the group moved +0.5 pts on the same basis, so part of every store's change is seasonal. Green bar at the right of a row: the store is on both the top five vs last year and the top five moving now.Conversation starter: each top store says one thing they started doing; each bottom store says what got in the way and what they would try. The room trades ideas. Moving now: ask the top three what they started this year.</a:t>
             </a:r>
             <a:endParaRPr lang="en-US" dirty="0"/>
           </a:p>
@@ -11435,7 +11435,7 @@
               <a:buNone/>
             </a:pPr>
             <a:r>
-              <a:rPr lang="en-US" sz="1200" dirty="0">
+              <a:rPr lang="en-US" sz="1200" b="1" dirty="0">
                 <a:solidFill>
                   <a:srgbClr val="0B7A4A"/>
                 </a:solidFill>
@@ -11572,7 +11572,7 @@
               <a:buNone/>
             </a:pPr>
             <a:r>
-              <a:rPr lang="en-US" sz="1200" dirty="0">
+              <a:rPr lang="en-US" sz="1200" b="1" dirty="0">
                 <a:solidFill>
                   <a:srgbClr val="0B7A4A"/>
                 </a:solidFill>
@@ -11709,7 +11709,7 @@
               <a:buNone/>
             </a:pPr>
             <a:r>
-              <a:rPr lang="en-US" sz="1200" dirty="0">
+              <a:rPr lang="en-US" sz="1200" b="1" dirty="0">
                 <a:solidFill>
                   <a:srgbClr val="0B7A4A"/>
                 </a:solidFill>
@@ -11846,7 +11846,7 @@
               <a:buNone/>
             </a:pPr>
             <a:r>
-              <a:rPr lang="en-US" sz="1200" dirty="0">
+              <a:rPr lang="en-US" sz="1200" b="1" dirty="0">
                 <a:solidFill>
                   <a:srgbClr val="0B7A4A"/>
                 </a:solidFill>
@@ -11983,7 +11983,7 @@
               <a:buNone/>
             </a:pPr>
             <a:r>
-              <a:rPr lang="en-US" sz="1200" dirty="0">
+              <a:rPr lang="en-US" sz="1200" b="1" dirty="0">
                 <a:solidFill>
                   <a:srgbClr val="0B7A4A"/>
                 </a:solidFill>
@@ -12120,7 +12120,7 @@
               <a:buNone/>
             </a:pPr>
             <a:r>
-              <a:rPr lang="en-US" sz="1200" dirty="0">
+              <a:rPr lang="en-US" sz="1200" b="1" dirty="0">
                 <a:solidFill>
                   <a:srgbClr val="0B7A4A"/>
                 </a:solidFill>
@@ -12257,7 +12257,7 @@
               <a:buNone/>
             </a:pPr>
             <a:r>
-              <a:rPr lang="en-US" sz="1200" dirty="0">
+              <a:rPr lang="en-US" sz="1200" b="1" dirty="0">
                 <a:solidFill>
                   <a:srgbClr val="0B7A4A"/>
                 </a:solidFill>
@@ -12394,7 +12394,7 @@
               <a:buNone/>
             </a:pPr>
             <a:r>
-              <a:rPr lang="en-US" sz="1200" dirty="0">
+              <a:rPr lang="en-US" sz="1200" b="1" dirty="0">
                 <a:solidFill>
                   <a:srgbClr val="0B7A4A"/>
                 </a:solidFill>
@@ -12531,7 +12531,7 @@
               <a:buNone/>
             </a:pPr>
             <a:r>
-              <a:rPr lang="en-US" sz="1200" dirty="0">
+              <a:rPr lang="en-US" sz="1200" b="1" dirty="0">
                 <a:solidFill>
                   <a:srgbClr val="0B7A4A"/>
                 </a:solidFill>
@@ -12668,7 +12668,7 @@
               <a:buNone/>
             </a:pPr>
             <a:r>
-              <a:rPr lang="en-US" sz="1200" dirty="0">
+              <a:rPr lang="en-US" sz="1200" b="1" dirty="0">
                 <a:solidFill>
                   <a:srgbClr val="0B7A4A"/>
                 </a:solidFill>
@@ -12805,7 +12805,7 @@
               <a:buNone/>
             </a:pPr>
             <a:r>
-              <a:rPr lang="en-US" sz="1200" dirty="0">
+              <a:rPr lang="en-US" sz="1200" b="1" dirty="0">
                 <a:solidFill>
                   <a:srgbClr val="0B7A4A"/>
                 </a:solidFill>
@@ -12942,7 +12942,7 @@
               <a:buNone/>
             </a:pPr>
             <a:r>
-              <a:rPr lang="en-US" sz="1200" dirty="0">
+              <a:rPr lang="en-US" sz="1200" b="1" dirty="0">
                 <a:solidFill>
                   <a:srgbClr val="0B7A4A"/>
                 </a:solidFill>
@@ -13079,7 +13079,7 @@
               <a:buNone/>
             </a:pPr>
             <a:r>
-              <a:rPr lang="en-US" sz="1200" dirty="0">
+              <a:rPr lang="en-US" sz="1200" b="1" dirty="0">
                 <a:solidFill>
                   <a:srgbClr val="0B7A4A"/>
                 </a:solidFill>
@@ -13216,7 +13216,7 @@
               <a:buNone/>
             </a:pPr>
             <a:r>
-              <a:rPr lang="en-US" sz="1200" dirty="0">
+              <a:rPr lang="en-US" sz="1200" b="1" dirty="0">
                 <a:solidFill>
                   <a:srgbClr val="0B7A4A"/>
                 </a:solidFill>
@@ -13353,7 +13353,7 @@
               <a:buNone/>
             </a:pPr>
             <a:r>
-              <a:rPr lang="en-US" sz="1200" dirty="0">
+              <a:rPr lang="en-US" sz="1200" b="1" dirty="0">
                 <a:solidFill>
                   <a:srgbClr val="0B7A4A"/>
                 </a:solidFill>
@@ -13490,7 +13490,7 @@
               <a:buNone/>
             </a:pPr>
             <a:r>
-              <a:rPr lang="en-US" sz="1200" dirty="0">
+              <a:rPr lang="en-US" sz="1200" b="1" dirty="0">
                 <a:solidFill>
                   <a:srgbClr val="0B7A4A"/>
                 </a:solidFill>
@@ -13627,7 +13627,7 @@
               <a:buNone/>
             </a:pPr>
             <a:r>
-              <a:rPr lang="en-US" sz="1200" dirty="0">
+              <a:rPr lang="en-US" sz="1200" b="1" dirty="0">
                 <a:solidFill>
                   <a:srgbClr val="0B7A4A"/>
                 </a:solidFill>
@@ -13764,7 +13764,7 @@
               <a:buNone/>
             </a:pPr>
             <a:r>
-              <a:rPr lang="en-US" sz="1200" dirty="0">
+              <a:rPr lang="en-US" sz="1200" b="1" dirty="0">
                 <a:solidFill>
                   <a:srgbClr val="0B7A4A"/>
                 </a:solidFill>
@@ -13901,7 +13901,7 @@
               <a:buNone/>
             </a:pPr>
             <a:r>
-              <a:rPr lang="en-US" sz="1200" dirty="0">
+              <a:rPr lang="en-US" sz="1200" b="1" dirty="0">
                 <a:solidFill>
                   <a:srgbClr val="0B7A4A"/>
                 </a:solidFill>
@@ -14038,7 +14038,7 @@
               <a:buNone/>
             </a:pPr>
             <a:r>
-              <a:rPr lang="en-US" sz="1200" dirty="0">
+              <a:rPr lang="en-US" sz="1200" b="1" dirty="0">
                 <a:solidFill>
                   <a:srgbClr val="A82B26"/>
                 </a:solidFill>
@@ -14175,7 +14175,7 @@
               <a:buNone/>
             </a:pPr>
             <a:r>
-              <a:rPr lang="en-US" sz="1200" dirty="0">
+              <a:rPr lang="en-US" sz="1200" b="1" dirty="0">
                 <a:solidFill>
                   <a:srgbClr val="A82B26"/>
                 </a:solidFill>
@@ -14312,7 +14312,7 @@
               <a:buNone/>
             </a:pPr>
             <a:r>
-              <a:rPr lang="en-US" sz="1200" dirty="0">
+              <a:rPr lang="en-US" sz="1200" b="1" dirty="0">
                 <a:solidFill>
                   <a:srgbClr val="A82B26"/>
                 </a:solidFill>
@@ -14449,7 +14449,7 @@
               <a:buNone/>
             </a:pPr>
             <a:r>
-              <a:rPr lang="en-US" sz="1200" dirty="0">
+              <a:rPr lang="en-US" sz="1200" b="1" dirty="0">
                 <a:solidFill>
                   <a:srgbClr val="A82B26"/>
                 </a:solidFill>
@@ -14586,7 +14586,7 @@
               <a:buNone/>
             </a:pPr>
             <a:r>
-              <a:rPr lang="en-US" sz="1200" dirty="0">
+              <a:rPr lang="en-US" sz="1200" b="1" dirty="0">
                 <a:solidFill>
                   <a:srgbClr val="A82B26"/>
                 </a:solidFill>
@@ -14723,7 +14723,7 @@
               <a:buNone/>
             </a:pPr>
             <a:r>
-              <a:rPr lang="en-US" sz="1200" dirty="0">
+              <a:rPr lang="en-US" sz="1200" b="1" dirty="0">
                 <a:solidFill>
                   <a:srgbClr val="A82B26"/>
                 </a:solidFill>
@@ -14860,7 +14860,7 @@
               <a:buNone/>
             </a:pPr>
             <a:r>
-              <a:rPr lang="en-US" sz="1200" dirty="0">
+              <a:rPr lang="en-US" sz="1200" b="1" dirty="0">
                 <a:solidFill>
                   <a:srgbClr val="A82B26"/>
                 </a:solidFill>
@@ -14997,7 +14997,7 @@
               <a:buNone/>
             </a:pPr>
             <a:r>
-              <a:rPr lang="en-US" sz="1200" dirty="0">
+              <a:rPr lang="en-US" sz="1200" b="1" dirty="0">
                 <a:solidFill>
                   <a:srgbClr val="A82B26"/>
                 </a:solidFill>
@@ -15134,7 +15134,7 @@
               <a:buNone/>
             </a:pPr>
             <a:r>
-              <a:rPr lang="en-US" sz="1200" dirty="0">
+              <a:rPr lang="en-US" sz="1200" b="1" dirty="0">
                 <a:solidFill>
                   <a:srgbClr val="A82B26"/>
                 </a:solidFill>
@@ -15271,7 +15271,7 @@
               <a:buNone/>
             </a:pPr>
             <a:r>
-              <a:rPr lang="en-US" sz="1200" dirty="0">
+              <a:rPr lang="en-US" sz="1200" b="1" dirty="0">
                 <a:solidFill>
                   <a:srgbClr val="A82B26"/>
                 </a:solidFill>
@@ -15408,7 +15408,7 @@
               <a:buNone/>
             </a:pPr>
             <a:r>
-              <a:rPr lang="en-US" sz="1200" dirty="0">
+              <a:rPr lang="en-US" sz="1200" b="1" dirty="0">
                 <a:solidFill>
                   <a:srgbClr val="A82B26"/>
                 </a:solidFill>
@@ -15545,7 +15545,7 @@
               <a:buNone/>
             </a:pPr>
             <a:r>
-              <a:rPr lang="en-US" sz="1200" dirty="0">
+              <a:rPr lang="en-US" sz="1200" b="1" dirty="0">
                 <a:solidFill>
                   <a:srgbClr val="A82B26"/>
                 </a:solidFill>
@@ -15682,7 +15682,7 @@
               <a:buNone/>
             </a:pPr>
             <a:r>
-              <a:rPr lang="en-US" sz="1200" dirty="0">
+              <a:rPr lang="en-US" sz="1200" b="1" dirty="0">
                 <a:solidFill>
                   <a:srgbClr val="A82B26"/>
                 </a:solidFill>
@@ -15819,7 +15819,7 @@
               <a:buNone/>
             </a:pPr>
             <a:r>
-              <a:rPr lang="en-US" sz="1200" dirty="0">
+              <a:rPr lang="en-US" sz="1200" b="1" dirty="0">
                 <a:solidFill>
                   <a:srgbClr val="A82B26"/>
                 </a:solidFill>
@@ -16713,7 +16713,27 @@
       </p:sp>
       <p:sp>
         <p:nvSpPr>
-          <p:cNvPr id="20" name="Text 18"/>
+          <p:cNvPr id="20" name="Shape 18"/>
+          <p:cNvSpPr/>
+          <p:nvPr/>
+        </p:nvSpPr>
+        <p:spPr>
+          <a:xfrm>
+            <a:off x="4084320" y="4405579"/>
+            <a:ext cx="64008" cy="682142"/>
+          </a:xfrm>
+          <a:prstGeom prst="rect">
+            <a:avLst/>
+          </a:prstGeom>
+          <a:solidFill>
+            <a:srgbClr val="12A566"/>
+          </a:solidFill>
+          <a:ln/>
+        </p:spPr>
+      </p:sp>
+      <p:sp>
+        <p:nvSpPr>
+          <p:cNvPr id="21" name="Text 19"/>
           <p:cNvSpPr txBox="1"/>
           <p:nvPr/>
         </p:nvSpPr>
@@ -16752,7 +16772,7 @@
       </p:sp>
       <p:sp>
         <p:nvSpPr>
-          <p:cNvPr id="21" name="Text 19"/>
+          <p:cNvPr id="22" name="Text 20"/>
           <p:cNvSpPr txBox="1"/>
           <p:nvPr/>
         </p:nvSpPr>
@@ -16831,7 +16851,7 @@
       </p:sp>
       <p:sp>
         <p:nvSpPr>
-          <p:cNvPr id="22" name="Text 20"/>
+          <p:cNvPr id="23" name="Text 21"/>
           <p:cNvSpPr txBox="1"/>
           <p:nvPr/>
         </p:nvSpPr>
@@ -16870,7 +16890,7 @@
       </p:sp>
       <p:sp>
         <p:nvSpPr>
-          <p:cNvPr id="23" name="Shape 21"/>
+          <p:cNvPr id="24" name="Shape 22"/>
           <p:cNvSpPr/>
           <p:nvPr/>
         </p:nvSpPr>
@@ -16890,7 +16910,7 @@
       </p:sp>
       <p:sp>
         <p:nvSpPr>
-          <p:cNvPr id="24" name="Text 22"/>
+          <p:cNvPr id="25" name="Text 23"/>
           <p:cNvSpPr txBox="1"/>
           <p:nvPr/>
         </p:nvSpPr>
@@ -16929,7 +16949,7 @@
       </p:sp>
       <p:sp>
         <p:nvSpPr>
-          <p:cNvPr id="25" name="Text 23"/>
+          <p:cNvPr id="26" name="Text 24"/>
           <p:cNvSpPr txBox="1"/>
           <p:nvPr/>
         </p:nvSpPr>
@@ -17008,7 +17028,7 @@
       </p:sp>
       <p:sp>
         <p:nvSpPr>
-          <p:cNvPr id="26" name="Text 24"/>
+          <p:cNvPr id="27" name="Text 25"/>
           <p:cNvSpPr txBox="1"/>
           <p:nvPr/>
         </p:nvSpPr>
@@ -17047,7 +17067,7 @@
       </p:sp>
       <p:sp>
         <p:nvSpPr>
-          <p:cNvPr id="27" name="Shape 25"/>
+          <p:cNvPr id="28" name="Shape 26"/>
           <p:cNvSpPr/>
           <p:nvPr/>
         </p:nvSpPr>
@@ -17067,7 +17087,7 @@
       </p:sp>
       <p:sp>
         <p:nvSpPr>
-          <p:cNvPr id="28" name="Text 26"/>
+          <p:cNvPr id="29" name="Text 27"/>
           <p:cNvSpPr txBox="1"/>
           <p:nvPr/>
         </p:nvSpPr>
@@ -17106,7 +17126,7 @@
       </p:sp>
       <p:sp>
         <p:nvSpPr>
-          <p:cNvPr id="29" name="Text 27"/>
+          <p:cNvPr id="30" name="Text 28"/>
           <p:cNvSpPr txBox="1"/>
           <p:nvPr/>
         </p:nvSpPr>
@@ -17145,7 +17165,7 @@
       </p:sp>
       <p:sp>
         <p:nvSpPr>
-          <p:cNvPr id="30" name="Shape 28"/>
+          <p:cNvPr id="31" name="Shape 29"/>
           <p:cNvSpPr/>
           <p:nvPr/>
         </p:nvSpPr>
@@ -17165,7 +17185,7 @@
       </p:sp>
       <p:sp>
         <p:nvSpPr>
-          <p:cNvPr id="31" name="Text 29"/>
+          <p:cNvPr id="32" name="Text 30"/>
           <p:cNvSpPr txBox="1"/>
           <p:nvPr/>
         </p:nvSpPr>
@@ -17204,7 +17224,7 @@
       </p:sp>
       <p:sp>
         <p:nvSpPr>
-          <p:cNvPr id="32" name="Text 30"/>
+          <p:cNvPr id="33" name="Text 31"/>
           <p:cNvSpPr txBox="1"/>
           <p:nvPr/>
         </p:nvSpPr>
@@ -17283,7 +17303,7 @@
       </p:sp>
       <p:sp>
         <p:nvSpPr>
-          <p:cNvPr id="33" name="Text 31"/>
+          <p:cNvPr id="34" name="Text 32"/>
           <p:cNvSpPr txBox="1"/>
           <p:nvPr/>
         </p:nvSpPr>
@@ -17322,7 +17342,7 @@
       </p:sp>
       <p:sp>
         <p:nvSpPr>
-          <p:cNvPr id="34" name="Text 32"/>
+          <p:cNvPr id="35" name="Text 33"/>
           <p:cNvSpPr txBox="1"/>
           <p:nvPr/>
         </p:nvSpPr>
@@ -17361,7 +17381,7 @@
       </p:sp>
       <p:sp>
         <p:nvSpPr>
-          <p:cNvPr id="35" name="Text 33"/>
+          <p:cNvPr id="36" name="Text 34"/>
           <p:cNvSpPr txBox="1"/>
           <p:nvPr/>
         </p:nvSpPr>
@@ -17440,7 +17460,7 @@
       </p:sp>
       <p:sp>
         <p:nvSpPr>
-          <p:cNvPr id="36" name="Text 34"/>
+          <p:cNvPr id="37" name="Text 35"/>
           <p:cNvSpPr txBox="1"/>
           <p:nvPr/>
         </p:nvSpPr>
@@ -17479,7 +17499,7 @@
       </p:sp>
       <p:sp>
         <p:nvSpPr>
-          <p:cNvPr id="37" name="Shape 35"/>
+          <p:cNvPr id="38" name="Shape 36"/>
           <p:cNvSpPr/>
           <p:nvPr/>
         </p:nvSpPr>
@@ -17499,7 +17519,7 @@
       </p:sp>
       <p:sp>
         <p:nvSpPr>
-          <p:cNvPr id="38" name="Text 36"/>
+          <p:cNvPr id="39" name="Text 37"/>
           <p:cNvSpPr txBox="1"/>
           <p:nvPr/>
         </p:nvSpPr>
@@ -17538,7 +17558,7 @@
       </p:sp>
       <p:sp>
         <p:nvSpPr>
-          <p:cNvPr id="39" name="Text 37"/>
+          <p:cNvPr id="40" name="Text 38"/>
           <p:cNvSpPr txBox="1"/>
           <p:nvPr/>
         </p:nvSpPr>
@@ -17617,7 +17637,7 @@
       </p:sp>
       <p:sp>
         <p:nvSpPr>
-          <p:cNvPr id="40" name="Text 38"/>
+          <p:cNvPr id="41" name="Text 39"/>
           <p:cNvSpPr txBox="1"/>
           <p:nvPr/>
         </p:nvSpPr>
@@ -17656,7 +17676,7 @@
       </p:sp>
       <p:sp>
         <p:nvSpPr>
-          <p:cNvPr id="41" name="Text 39"/>
+          <p:cNvPr id="42" name="Text 40"/>
           <p:cNvSpPr txBox="1"/>
           <p:nvPr/>
         </p:nvSpPr>
@@ -17695,7 +17715,7 @@
       </p:sp>
       <p:sp>
         <p:nvSpPr>
-          <p:cNvPr id="42" name="Text 40"/>
+          <p:cNvPr id="43" name="Text 41"/>
           <p:cNvSpPr txBox="1"/>
           <p:nvPr/>
         </p:nvSpPr>
@@ -17774,7 +17794,7 @@
       </p:sp>
       <p:sp>
         <p:nvSpPr>
-          <p:cNvPr id="43" name="Text 41"/>
+          <p:cNvPr id="44" name="Text 42"/>
           <p:cNvSpPr txBox="1"/>
           <p:nvPr/>
         </p:nvSpPr>
@@ -17813,7 +17833,7 @@
       </p:sp>
       <p:sp>
         <p:nvSpPr>
-          <p:cNvPr id="44" name="Shape 42"/>
+          <p:cNvPr id="45" name="Shape 43"/>
           <p:cNvSpPr/>
           <p:nvPr/>
         </p:nvSpPr>
@@ -17833,7 +17853,7 @@
       </p:sp>
       <p:sp>
         <p:nvSpPr>
-          <p:cNvPr id="45" name="Text 43"/>
+          <p:cNvPr id="46" name="Text 44"/>
           <p:cNvSpPr txBox="1"/>
           <p:nvPr/>
         </p:nvSpPr>
@@ -17872,7 +17892,7 @@
       </p:sp>
       <p:sp>
         <p:nvSpPr>
-          <p:cNvPr id="46" name="Text 44"/>
+          <p:cNvPr id="47" name="Text 45"/>
           <p:cNvSpPr txBox="1"/>
           <p:nvPr/>
         </p:nvSpPr>
@@ -17951,7 +17971,7 @@
       </p:sp>
       <p:sp>
         <p:nvSpPr>
-          <p:cNvPr id="47" name="Text 45"/>
+          <p:cNvPr id="48" name="Text 46"/>
           <p:cNvSpPr txBox="1"/>
           <p:nvPr/>
         </p:nvSpPr>
@@ -17990,7 +18010,7 @@
       </p:sp>
       <p:sp>
         <p:nvSpPr>
-          <p:cNvPr id="48" name="Shape 46"/>
+          <p:cNvPr id="49" name="Shape 47"/>
           <p:cNvSpPr/>
           <p:nvPr/>
         </p:nvSpPr>
@@ -18010,7 +18030,7 @@
       </p:sp>
       <p:sp>
         <p:nvSpPr>
-          <p:cNvPr id="49" name="Text 47"/>
+          <p:cNvPr id="50" name="Text 48"/>
           <p:cNvSpPr txBox="1"/>
           <p:nvPr/>
         </p:nvSpPr>
@@ -18049,7 +18069,7 @@
       </p:sp>
       <p:sp>
         <p:nvSpPr>
-          <p:cNvPr id="50" name="Text 48"/>
+          <p:cNvPr id="51" name="Text 49"/>
           <p:cNvSpPr txBox="1"/>
           <p:nvPr/>
         </p:nvSpPr>
@@ -18088,7 +18108,7 @@
       </p:sp>
       <p:sp>
         <p:nvSpPr>
-          <p:cNvPr id="51" name="Shape 49"/>
+          <p:cNvPr id="52" name="Shape 50"/>
           <p:cNvSpPr/>
           <p:nvPr/>
         </p:nvSpPr>
@@ -18108,7 +18128,7 @@
       </p:sp>
       <p:sp>
         <p:nvSpPr>
-          <p:cNvPr id="52" name="Text 50"/>
+          <p:cNvPr id="53" name="Text 51"/>
           <p:cNvSpPr txBox="1"/>
           <p:nvPr/>
         </p:nvSpPr>
@@ -18147,7 +18167,7 @@
       </p:sp>
       <p:sp>
         <p:nvSpPr>
-          <p:cNvPr id="53" name="Text 51"/>
+          <p:cNvPr id="54" name="Text 52"/>
           <p:cNvSpPr txBox="1"/>
           <p:nvPr/>
         </p:nvSpPr>
@@ -18226,7 +18246,7 @@
       </p:sp>
       <p:sp>
         <p:nvSpPr>
-          <p:cNvPr id="54" name="Text 52"/>
+          <p:cNvPr id="55" name="Text 53"/>
           <p:cNvSpPr txBox="1"/>
           <p:nvPr/>
         </p:nvSpPr>
@@ -18265,7 +18285,7 @@
       </p:sp>
       <p:sp>
         <p:nvSpPr>
-          <p:cNvPr id="55" name="Text 53"/>
+          <p:cNvPr id="56" name="Text 54"/>
           <p:cNvSpPr txBox="1"/>
           <p:nvPr/>
         </p:nvSpPr>
@@ -18304,7 +18324,7 @@
       </p:sp>
       <p:sp>
         <p:nvSpPr>
-          <p:cNvPr id="56" name="Text 54"/>
+          <p:cNvPr id="57" name="Text 55"/>
           <p:cNvSpPr txBox="1"/>
           <p:nvPr/>
         </p:nvSpPr>
@@ -18383,7 +18403,7 @@
       </p:sp>
       <p:sp>
         <p:nvSpPr>
-          <p:cNvPr id="57" name="Text 55"/>
+          <p:cNvPr id="58" name="Text 56"/>
           <p:cNvSpPr txBox="1"/>
           <p:nvPr/>
         </p:nvSpPr>
@@ -18422,7 +18442,7 @@
       </p:sp>
       <p:sp>
         <p:nvSpPr>
-          <p:cNvPr id="58" name="Shape 56"/>
+          <p:cNvPr id="59" name="Shape 57"/>
           <p:cNvSpPr/>
           <p:nvPr/>
         </p:nvSpPr>
@@ -18442,7 +18462,27 @@
       </p:sp>
       <p:sp>
         <p:nvSpPr>
-          <p:cNvPr id="59" name="Text 57"/>
+          <p:cNvPr id="60" name="Shape 58"/>
+          <p:cNvSpPr/>
+          <p:nvPr/>
+        </p:nvSpPr>
+        <p:spPr>
+          <a:xfrm>
+            <a:off x="11466576" y="3650285"/>
+            <a:ext cx="64008" cy="682142"/>
+          </a:xfrm>
+          <a:prstGeom prst="rect">
+            <a:avLst/>
+          </a:prstGeom>
+          <a:solidFill>
+            <a:srgbClr val="12A566"/>
+          </a:solidFill>
+          <a:ln/>
+        </p:spPr>
+      </p:sp>
+      <p:sp>
+        <p:nvSpPr>
+          <p:cNvPr id="61" name="Text 59"/>
           <p:cNvSpPr txBox="1"/>
           <p:nvPr/>
         </p:nvSpPr>
@@ -18481,7 +18521,7 @@
       </p:sp>
       <p:sp>
         <p:nvSpPr>
-          <p:cNvPr id="60" name="Text 58"/>
+          <p:cNvPr id="62" name="Text 60"/>
           <p:cNvSpPr txBox="1"/>
           <p:nvPr/>
         </p:nvSpPr>
@@ -18560,7 +18600,7 @@
       </p:sp>
       <p:sp>
         <p:nvSpPr>
-          <p:cNvPr id="61" name="Text 59"/>
+          <p:cNvPr id="63" name="Text 61"/>
           <p:cNvSpPr txBox="1"/>
           <p:nvPr/>
         </p:nvSpPr>
@@ -18599,7 +18639,7 @@
       </p:sp>
       <p:sp>
         <p:nvSpPr>
-          <p:cNvPr id="62" name="Text 60"/>
+          <p:cNvPr id="64" name="Text 62"/>
           <p:cNvSpPr txBox="1"/>
           <p:nvPr/>
         </p:nvSpPr>
@@ -18638,7 +18678,7 @@
       </p:sp>
       <p:sp>
         <p:nvSpPr>
-          <p:cNvPr id="63" name="Text 61"/>
+          <p:cNvPr id="65" name="Text 63"/>
           <p:cNvSpPr txBox="1"/>
           <p:nvPr/>
         </p:nvSpPr>
@@ -18717,7 +18757,7 @@
       </p:sp>
       <p:sp>
         <p:nvSpPr>
-          <p:cNvPr id="64" name="Text 62"/>
+          <p:cNvPr id="66" name="Text 64"/>
           <p:cNvSpPr txBox="1"/>
           <p:nvPr/>
         </p:nvSpPr>
@@ -18756,7 +18796,7 @@
       </p:sp>
       <p:sp>
         <p:nvSpPr>
-          <p:cNvPr id="65" name="Shape 63"/>
+          <p:cNvPr id="67" name="Shape 65"/>
           <p:cNvSpPr/>
           <p:nvPr/>
         </p:nvSpPr>
@@ -18776,7 +18816,7 @@
       </p:sp>
       <p:sp>
         <p:nvSpPr>
-          <p:cNvPr id="66" name="Text 64"/>
+          <p:cNvPr id="68" name="Text 66"/>
           <p:cNvSpPr txBox="1"/>
           <p:nvPr/>
         </p:nvSpPr>
@@ -18815,7 +18855,7 @@
       </p:sp>
       <p:sp>
         <p:nvSpPr>
-          <p:cNvPr id="67" name="Text 65"/>
+          <p:cNvPr id="69" name="Text 67"/>
           <p:cNvSpPr txBox="1"/>
           <p:nvPr/>
         </p:nvSpPr>
@@ -18894,7 +18934,7 @@
       </p:sp>
       <p:sp>
         <p:nvSpPr>
-          <p:cNvPr id="68" name="Text 66"/>
+          <p:cNvPr id="70" name="Text 68"/>
           <p:cNvSpPr txBox="1"/>
           <p:nvPr/>
         </p:nvSpPr>
@@ -18933,7 +18973,7 @@
       </p:sp>
       <p:sp>
         <p:nvSpPr>
-          <p:cNvPr id="69" name="Shape 67"/>
+          <p:cNvPr id="71" name="Shape 69"/>
           <p:cNvSpPr/>
           <p:nvPr/>
         </p:nvSpPr>
@@ -18953,7 +18993,7 @@
       </p:sp>
       <p:sp>
         <p:nvSpPr>
-          <p:cNvPr id="70" name="Text 68"/>
+          <p:cNvPr id="72" name="Text 70"/>
           <p:cNvSpPr txBox="1"/>
           <p:nvPr/>
         </p:nvSpPr>
@@ -25221,7 +25261,7 @@
               <a:buNone/>
             </a:pPr>
             <a:r>
-              <a:rPr lang="en-US" sz="1200" dirty="0">
+              <a:rPr lang="en-US" sz="1200" b="1" dirty="0">
                 <a:solidFill>
                   <a:srgbClr val="0B7A4A"/>
                 </a:solidFill>
@@ -25358,7 +25398,7 @@
               <a:buNone/>
             </a:pPr>
             <a:r>
-              <a:rPr lang="en-US" sz="1200" dirty="0">
+              <a:rPr lang="en-US" sz="1200" b="1" dirty="0">
                 <a:solidFill>
                   <a:srgbClr val="0B7A4A"/>
                 </a:solidFill>
@@ -25495,7 +25535,7 @@
               <a:buNone/>
             </a:pPr>
             <a:r>
-              <a:rPr lang="en-US" sz="1200" dirty="0">
+              <a:rPr lang="en-US" sz="1200" b="1" dirty="0">
                 <a:solidFill>
                   <a:srgbClr val="0B7A4A"/>
                 </a:solidFill>
@@ -25632,7 +25672,7 @@
               <a:buNone/>
             </a:pPr>
             <a:r>
-              <a:rPr lang="en-US" sz="1200" dirty="0">
+              <a:rPr lang="en-US" sz="1200" b="1" dirty="0">
                 <a:solidFill>
                   <a:srgbClr val="0B7A4A"/>
                 </a:solidFill>
@@ -25769,7 +25809,7 @@
               <a:buNone/>
             </a:pPr>
             <a:r>
-              <a:rPr lang="en-US" sz="1200" dirty="0">
+              <a:rPr lang="en-US" sz="1200" b="1" dirty="0">
                 <a:solidFill>
                   <a:srgbClr val="0B7A4A"/>
                 </a:solidFill>
@@ -25906,7 +25946,7 @@
               <a:buNone/>
             </a:pPr>
             <a:r>
-              <a:rPr lang="en-US" sz="1200" dirty="0">
+              <a:rPr lang="en-US" sz="1200" b="1" dirty="0">
                 <a:solidFill>
                   <a:srgbClr val="0B7A4A"/>
                 </a:solidFill>
@@ -26043,7 +26083,7 @@
               <a:buNone/>
             </a:pPr>
             <a:r>
-              <a:rPr lang="en-US" sz="1200" dirty="0">
+              <a:rPr lang="en-US" sz="1200" b="1" dirty="0">
                 <a:solidFill>
                   <a:srgbClr val="0B7A4A"/>
                 </a:solidFill>
@@ -26180,7 +26220,7 @@
               <a:buNone/>
             </a:pPr>
             <a:r>
-              <a:rPr lang="en-US" sz="1200" dirty="0">
+              <a:rPr lang="en-US" sz="1200" b="1" dirty="0">
                 <a:solidFill>
                   <a:srgbClr val="0B7A4A"/>
                 </a:solidFill>
@@ -26317,7 +26357,7 @@
               <a:buNone/>
             </a:pPr>
             <a:r>
-              <a:rPr lang="en-US" sz="1200" dirty="0">
+              <a:rPr lang="en-US" sz="1200" b="1" dirty="0">
                 <a:solidFill>
                   <a:srgbClr val="0B7A4A"/>
                 </a:solidFill>
@@ -26454,7 +26494,7 @@
               <a:buNone/>
             </a:pPr>
             <a:r>
-              <a:rPr lang="en-US" sz="1200" dirty="0">
+              <a:rPr lang="en-US" sz="1200" b="1" dirty="0">
                 <a:solidFill>
                   <a:srgbClr val="0B7A4A"/>
                 </a:solidFill>
@@ -26591,7 +26631,7 @@
               <a:buNone/>
             </a:pPr>
             <a:r>
-              <a:rPr lang="en-US" sz="1200" dirty="0">
+              <a:rPr lang="en-US" sz="1200" b="1" dirty="0">
                 <a:solidFill>
                   <a:srgbClr val="0B7A4A"/>
                 </a:solidFill>
@@ -26728,7 +26768,7 @@
               <a:buNone/>
             </a:pPr>
             <a:r>
-              <a:rPr lang="en-US" sz="1200" dirty="0">
+              <a:rPr lang="en-US" sz="1200" b="1" dirty="0">
                 <a:solidFill>
                   <a:srgbClr val="0B7A4A"/>
                 </a:solidFill>
@@ -26865,7 +26905,7 @@
               <a:buNone/>
             </a:pPr>
             <a:r>
-              <a:rPr lang="en-US" sz="1200" dirty="0">
+              <a:rPr lang="en-US" sz="1200" b="1" dirty="0">
                 <a:solidFill>
                   <a:srgbClr val="0B7A4A"/>
                 </a:solidFill>
@@ -27002,7 +27042,7 @@
               <a:buNone/>
             </a:pPr>
             <a:r>
-              <a:rPr lang="en-US" sz="1200" dirty="0">
+              <a:rPr lang="en-US" sz="1200" b="1" dirty="0">
                 <a:solidFill>
                   <a:srgbClr val="0B7A4A"/>
                 </a:solidFill>
@@ -27139,7 +27179,7 @@
               <a:buNone/>
             </a:pPr>
             <a:r>
-              <a:rPr lang="en-US" sz="1200" dirty="0">
+              <a:rPr lang="en-US" sz="1200" b="1" dirty="0">
                 <a:solidFill>
                   <a:srgbClr val="0B7A4A"/>
                 </a:solidFill>
@@ -27276,7 +27316,7 @@
               <a:buNone/>
             </a:pPr>
             <a:r>
-              <a:rPr lang="en-US" sz="1200" dirty="0">
+              <a:rPr lang="en-US" sz="1200" b="1" dirty="0">
                 <a:solidFill>
                   <a:srgbClr val="0B7A4A"/>
                 </a:solidFill>
@@ -27413,7 +27453,7 @@
               <a:buNone/>
             </a:pPr>
             <a:r>
-              <a:rPr lang="en-US" sz="1200" dirty="0">
+              <a:rPr lang="en-US" sz="1200" b="1" dirty="0">
                 <a:solidFill>
                   <a:srgbClr val="0B7A4A"/>
                 </a:solidFill>
@@ -27550,7 +27590,7 @@
               <a:buNone/>
             </a:pPr>
             <a:r>
-              <a:rPr lang="en-US" sz="1200" dirty="0">
+              <a:rPr lang="en-US" sz="1200" b="1" dirty="0">
                 <a:solidFill>
                   <a:srgbClr val="0B7A4A"/>
                 </a:solidFill>
@@ -27687,7 +27727,7 @@
               <a:buNone/>
             </a:pPr>
             <a:r>
-              <a:rPr lang="en-US" sz="1200" dirty="0">
+              <a:rPr lang="en-US" sz="1200" b="1" dirty="0">
                 <a:solidFill>
                   <a:srgbClr val="0B7A4A"/>
                 </a:solidFill>
@@ -27824,7 +27864,7 @@
               <a:buNone/>
             </a:pPr>
             <a:r>
-              <a:rPr lang="en-US" sz="1200" dirty="0">
+              <a:rPr lang="en-US" sz="1200" b="1" dirty="0">
                 <a:solidFill>
                   <a:srgbClr val="0B7A4A"/>
                 </a:solidFill>
@@ -27961,7 +28001,7 @@
               <a:buNone/>
             </a:pPr>
             <a:r>
-              <a:rPr lang="en-US" sz="1200" dirty="0">
+              <a:rPr lang="en-US" sz="1200" b="1" dirty="0">
                 <a:solidFill>
                   <a:srgbClr val="0B7A4A"/>
                 </a:solidFill>
@@ -28098,7 +28138,7 @@
               <a:buNone/>
             </a:pPr>
             <a:r>
-              <a:rPr lang="en-US" sz="1200" dirty="0">
+              <a:rPr lang="en-US" sz="1200" b="1" dirty="0">
                 <a:solidFill>
                   <a:srgbClr val="A82B26"/>
                 </a:solidFill>
@@ -28235,7 +28275,7 @@
               <a:buNone/>
             </a:pPr>
             <a:r>
-              <a:rPr lang="en-US" sz="1200" dirty="0">
+              <a:rPr lang="en-US" sz="1200" b="1" dirty="0">
                 <a:solidFill>
                   <a:srgbClr val="A82B26"/>
                 </a:solidFill>
@@ -28372,7 +28412,7 @@
               <a:buNone/>
             </a:pPr>
             <a:r>
-              <a:rPr lang="en-US" sz="1200" dirty="0">
+              <a:rPr lang="en-US" sz="1200" b="1" dirty="0">
                 <a:solidFill>
                   <a:srgbClr val="A82B26"/>
                 </a:solidFill>
@@ -28509,7 +28549,7 @@
               <a:buNone/>
             </a:pPr>
             <a:r>
-              <a:rPr lang="en-US" sz="1200" dirty="0">
+              <a:rPr lang="en-US" sz="1200" b="1" dirty="0">
                 <a:solidFill>
                   <a:srgbClr val="A82B26"/>
                 </a:solidFill>
@@ -28646,7 +28686,7 @@
               <a:buNone/>
             </a:pPr>
             <a:r>
-              <a:rPr lang="en-US" sz="1200" dirty="0">
+              <a:rPr lang="en-US" sz="1200" b="1" dirty="0">
                 <a:solidFill>
                   <a:srgbClr val="A82B26"/>
                 </a:solidFill>
@@ -28783,7 +28823,7 @@
               <a:buNone/>
             </a:pPr>
             <a:r>
-              <a:rPr lang="en-US" sz="1200" dirty="0">
+              <a:rPr lang="en-US" sz="1200" b="1" dirty="0">
                 <a:solidFill>
                   <a:srgbClr val="A82B26"/>
                 </a:solidFill>
@@ -28920,7 +28960,7 @@
               <a:buNone/>
             </a:pPr>
             <a:r>
-              <a:rPr lang="en-US" sz="1200" dirty="0">
+              <a:rPr lang="en-US" sz="1200" b="1" dirty="0">
                 <a:solidFill>
                   <a:srgbClr val="A82B26"/>
                 </a:solidFill>
@@ -29057,7 +29097,7 @@
               <a:buNone/>
             </a:pPr>
             <a:r>
-              <a:rPr lang="en-US" sz="1200" dirty="0">
+              <a:rPr lang="en-US" sz="1200" b="1" dirty="0">
                 <a:solidFill>
                   <a:srgbClr val="A82B26"/>
                 </a:solidFill>
@@ -29194,7 +29234,7 @@
               <a:buNone/>
             </a:pPr>
             <a:r>
-              <a:rPr lang="en-US" sz="1200" dirty="0">
+              <a:rPr lang="en-US" sz="1200" b="1" dirty="0">
                 <a:solidFill>
                   <a:srgbClr val="A82B26"/>
                 </a:solidFill>
@@ -29331,7 +29371,7 @@
               <a:buNone/>
             </a:pPr>
             <a:r>
-              <a:rPr lang="en-US" sz="1200" dirty="0">
+              <a:rPr lang="en-US" sz="1200" b="1" dirty="0">
                 <a:solidFill>
                   <a:srgbClr val="A82B26"/>
                 </a:solidFill>
@@ -29468,7 +29508,7 @@
               <a:buNone/>
             </a:pPr>
             <a:r>
-              <a:rPr lang="en-US" sz="1200" dirty="0">
+              <a:rPr lang="en-US" sz="1200" b="1" dirty="0">
                 <a:solidFill>
                   <a:srgbClr val="A82B26"/>
                 </a:solidFill>
@@ -29605,7 +29645,7 @@
               <a:buNone/>
             </a:pPr>
             <a:r>
-              <a:rPr lang="en-US" sz="1200" dirty="0">
+              <a:rPr lang="en-US" sz="1200" b="1" dirty="0">
                 <a:solidFill>
                   <a:srgbClr val="A82B26"/>
                 </a:solidFill>
@@ -30008,7 +30048,27 @@
       </p:sp>
       <p:sp>
         <p:nvSpPr>
-          <p:cNvPr id="10" name="Text 8"/>
+          <p:cNvPr id="10" name="Shape 8"/>
+          <p:cNvSpPr/>
+          <p:nvPr/>
+        </p:nvSpPr>
+        <p:spPr>
+          <a:xfrm>
+            <a:off x="4084320" y="2139696"/>
+            <a:ext cx="64008" cy="682142"/>
+          </a:xfrm>
+          <a:prstGeom prst="rect">
+            <a:avLst/>
+          </a:prstGeom>
+          <a:solidFill>
+            <a:srgbClr val="12A566"/>
+          </a:solidFill>
+          <a:ln/>
+        </p:spPr>
+      </p:sp>
+      <p:sp>
+        <p:nvSpPr>
+          <p:cNvPr id="11" name="Text 9"/>
           <p:cNvSpPr txBox="1"/>
           <p:nvPr/>
         </p:nvSpPr>
@@ -30047,7 +30107,7 @@
       </p:sp>
       <p:sp>
         <p:nvSpPr>
-          <p:cNvPr id="11" name="Text 9"/>
+          <p:cNvPr id="12" name="Text 10"/>
           <p:cNvSpPr txBox="1"/>
           <p:nvPr/>
         </p:nvSpPr>
@@ -30126,7 +30186,7 @@
       </p:sp>
       <p:sp>
         <p:nvSpPr>
-          <p:cNvPr id="12" name="Text 10"/>
+          <p:cNvPr id="13" name="Text 11"/>
           <p:cNvSpPr txBox="1"/>
           <p:nvPr/>
         </p:nvSpPr>
@@ -30165,7 +30225,7 @@
       </p:sp>
       <p:sp>
         <p:nvSpPr>
-          <p:cNvPr id="13" name="Text 11"/>
+          <p:cNvPr id="14" name="Text 12"/>
           <p:cNvSpPr txBox="1"/>
           <p:nvPr/>
         </p:nvSpPr>
@@ -30204,7 +30264,7 @@
       </p:sp>
       <p:sp>
         <p:nvSpPr>
-          <p:cNvPr id="14" name="Text 12"/>
+          <p:cNvPr id="15" name="Text 13"/>
           <p:cNvSpPr txBox="1"/>
           <p:nvPr/>
         </p:nvSpPr>
@@ -30283,7 +30343,7 @@
       </p:sp>
       <p:sp>
         <p:nvSpPr>
-          <p:cNvPr id="15" name="Text 13"/>
+          <p:cNvPr id="16" name="Text 14"/>
           <p:cNvSpPr txBox="1"/>
           <p:nvPr/>
         </p:nvSpPr>
@@ -30322,7 +30382,7 @@
       </p:sp>
       <p:sp>
         <p:nvSpPr>
-          <p:cNvPr id="16" name="Shape 14"/>
+          <p:cNvPr id="17" name="Shape 15"/>
           <p:cNvSpPr/>
           <p:nvPr/>
         </p:nvSpPr>
@@ -30342,7 +30402,7 @@
       </p:sp>
       <p:sp>
         <p:nvSpPr>
-          <p:cNvPr id="17" name="Text 15"/>
+          <p:cNvPr id="18" name="Text 16"/>
           <p:cNvSpPr txBox="1"/>
           <p:nvPr/>
         </p:nvSpPr>
@@ -30381,7 +30441,7 @@
       </p:sp>
       <p:sp>
         <p:nvSpPr>
-          <p:cNvPr id="18" name="Text 16"/>
+          <p:cNvPr id="19" name="Text 17"/>
           <p:cNvSpPr txBox="1"/>
           <p:nvPr/>
         </p:nvSpPr>
@@ -30460,7 +30520,7 @@
       </p:sp>
       <p:sp>
         <p:nvSpPr>
-          <p:cNvPr id="19" name="Text 17"/>
+          <p:cNvPr id="20" name="Text 18"/>
           <p:cNvSpPr txBox="1"/>
           <p:nvPr/>
         </p:nvSpPr>
@@ -30499,7 +30559,7 @@
       </p:sp>
       <p:sp>
         <p:nvSpPr>
-          <p:cNvPr id="20" name="Text 18"/>
+          <p:cNvPr id="21" name="Text 19"/>
           <p:cNvSpPr txBox="1"/>
           <p:nvPr/>
         </p:nvSpPr>
@@ -30538,7 +30598,7 @@
       </p:sp>
       <p:sp>
         <p:nvSpPr>
-          <p:cNvPr id="21" name="Text 19"/>
+          <p:cNvPr id="22" name="Text 20"/>
           <p:cNvSpPr txBox="1"/>
           <p:nvPr/>
         </p:nvSpPr>
@@ -30617,7 +30677,7 @@
       </p:sp>
       <p:sp>
         <p:nvSpPr>
-          <p:cNvPr id="22" name="Text 20"/>
+          <p:cNvPr id="23" name="Text 21"/>
           <p:cNvSpPr txBox="1"/>
           <p:nvPr/>
         </p:nvSpPr>
@@ -30656,7 +30716,7 @@
       </p:sp>
       <p:sp>
         <p:nvSpPr>
-          <p:cNvPr id="23" name="Shape 21"/>
+          <p:cNvPr id="24" name="Shape 22"/>
           <p:cNvSpPr/>
           <p:nvPr/>
         </p:nvSpPr>
@@ -30676,7 +30736,7 @@
       </p:sp>
       <p:sp>
         <p:nvSpPr>
-          <p:cNvPr id="24" name="Text 22"/>
+          <p:cNvPr id="25" name="Text 23"/>
           <p:cNvSpPr txBox="1"/>
           <p:nvPr/>
         </p:nvSpPr>
@@ -30715,7 +30775,7 @@
       </p:sp>
       <p:sp>
         <p:nvSpPr>
-          <p:cNvPr id="25" name="Text 23"/>
+          <p:cNvPr id="26" name="Text 24"/>
           <p:cNvSpPr txBox="1"/>
           <p:nvPr/>
         </p:nvSpPr>
@@ -30794,7 +30854,7 @@
       </p:sp>
       <p:sp>
         <p:nvSpPr>
-          <p:cNvPr id="26" name="Text 24"/>
+          <p:cNvPr id="27" name="Text 25"/>
           <p:cNvSpPr txBox="1"/>
           <p:nvPr/>
         </p:nvSpPr>
@@ -30833,7 +30893,7 @@
       </p:sp>
       <p:sp>
         <p:nvSpPr>
-          <p:cNvPr id="27" name="Shape 25"/>
+          <p:cNvPr id="28" name="Shape 26"/>
           <p:cNvSpPr/>
           <p:nvPr/>
         </p:nvSpPr>
@@ -30853,7 +30913,7 @@
       </p:sp>
       <p:sp>
         <p:nvSpPr>
-          <p:cNvPr id="28" name="Text 26"/>
+          <p:cNvPr id="29" name="Text 27"/>
           <p:cNvSpPr txBox="1"/>
           <p:nvPr/>
         </p:nvSpPr>
@@ -30892,7 +30952,7 @@
       </p:sp>
       <p:sp>
         <p:nvSpPr>
-          <p:cNvPr id="29" name="Text 27"/>
+          <p:cNvPr id="30" name="Text 28"/>
           <p:cNvSpPr txBox="1"/>
           <p:nvPr/>
         </p:nvSpPr>
@@ -30931,7 +30991,7 @@
       </p:sp>
       <p:sp>
         <p:nvSpPr>
-          <p:cNvPr id="30" name="Shape 28"/>
+          <p:cNvPr id="31" name="Shape 29"/>
           <p:cNvSpPr/>
           <p:nvPr/>
         </p:nvSpPr>
@@ -30951,7 +31011,7 @@
       </p:sp>
       <p:sp>
         <p:nvSpPr>
-          <p:cNvPr id="31" name="Text 29"/>
+          <p:cNvPr id="32" name="Text 30"/>
           <p:cNvSpPr txBox="1"/>
           <p:nvPr/>
         </p:nvSpPr>
@@ -30990,7 +31050,7 @@
       </p:sp>
       <p:sp>
         <p:nvSpPr>
-          <p:cNvPr id="32" name="Text 30"/>
+          <p:cNvPr id="33" name="Text 31"/>
           <p:cNvSpPr txBox="1"/>
           <p:nvPr/>
         </p:nvSpPr>
@@ -31069,7 +31129,7 @@
       </p:sp>
       <p:sp>
         <p:nvSpPr>
-          <p:cNvPr id="33" name="Text 31"/>
+          <p:cNvPr id="34" name="Text 32"/>
           <p:cNvSpPr txBox="1"/>
           <p:nvPr/>
         </p:nvSpPr>
@@ -31108,7 +31168,7 @@
       </p:sp>
       <p:sp>
         <p:nvSpPr>
-          <p:cNvPr id="34" name="Text 32"/>
+          <p:cNvPr id="35" name="Text 33"/>
           <p:cNvSpPr txBox="1"/>
           <p:nvPr/>
         </p:nvSpPr>
@@ -31147,7 +31207,7 @@
       </p:sp>
       <p:sp>
         <p:nvSpPr>
-          <p:cNvPr id="35" name="Text 33"/>
+          <p:cNvPr id="36" name="Text 34"/>
           <p:cNvSpPr txBox="1"/>
           <p:nvPr/>
         </p:nvSpPr>
@@ -31226,7 +31286,7 @@
       </p:sp>
       <p:sp>
         <p:nvSpPr>
-          <p:cNvPr id="36" name="Text 34"/>
+          <p:cNvPr id="37" name="Text 35"/>
           <p:cNvSpPr txBox="1"/>
           <p:nvPr/>
         </p:nvSpPr>
@@ -31265,7 +31325,7 @@
       </p:sp>
       <p:sp>
         <p:nvSpPr>
-          <p:cNvPr id="37" name="Shape 35"/>
+          <p:cNvPr id="38" name="Shape 36"/>
           <p:cNvSpPr/>
           <p:nvPr/>
         </p:nvSpPr>
@@ -31285,7 +31345,7 @@
       </p:sp>
       <p:sp>
         <p:nvSpPr>
-          <p:cNvPr id="38" name="Text 36"/>
+          <p:cNvPr id="39" name="Text 37"/>
           <p:cNvSpPr txBox="1"/>
           <p:nvPr/>
         </p:nvSpPr>
@@ -31324,7 +31384,7 @@
       </p:sp>
       <p:sp>
         <p:nvSpPr>
-          <p:cNvPr id="39" name="Text 37"/>
+          <p:cNvPr id="40" name="Text 38"/>
           <p:cNvSpPr txBox="1"/>
           <p:nvPr/>
         </p:nvSpPr>
@@ -31403,7 +31463,7 @@
       </p:sp>
       <p:sp>
         <p:nvSpPr>
-          <p:cNvPr id="40" name="Text 38"/>
+          <p:cNvPr id="41" name="Text 39"/>
           <p:cNvSpPr txBox="1"/>
           <p:nvPr/>
         </p:nvSpPr>
@@ -31442,7 +31502,7 @@
       </p:sp>
       <p:sp>
         <p:nvSpPr>
-          <p:cNvPr id="41" name="Text 39"/>
+          <p:cNvPr id="42" name="Text 40"/>
           <p:cNvSpPr txBox="1"/>
           <p:nvPr/>
         </p:nvSpPr>
@@ -31481,7 +31541,7 @@
       </p:sp>
       <p:sp>
         <p:nvSpPr>
-          <p:cNvPr id="42" name="Text 40"/>
+          <p:cNvPr id="43" name="Text 41"/>
           <p:cNvSpPr txBox="1"/>
           <p:nvPr/>
         </p:nvSpPr>
@@ -31560,7 +31620,7 @@
       </p:sp>
       <p:sp>
         <p:nvSpPr>
-          <p:cNvPr id="43" name="Text 41"/>
+          <p:cNvPr id="44" name="Text 42"/>
           <p:cNvSpPr txBox="1"/>
           <p:nvPr/>
         </p:nvSpPr>
@@ -31599,7 +31659,7 @@
       </p:sp>
       <p:sp>
         <p:nvSpPr>
-          <p:cNvPr id="44" name="Shape 42"/>
+          <p:cNvPr id="45" name="Shape 43"/>
           <p:cNvSpPr/>
           <p:nvPr/>
         </p:nvSpPr>
@@ -31619,7 +31679,7 @@
       </p:sp>
       <p:sp>
         <p:nvSpPr>
-          <p:cNvPr id="45" name="Text 43"/>
+          <p:cNvPr id="46" name="Text 44"/>
           <p:cNvSpPr txBox="1"/>
           <p:nvPr/>
         </p:nvSpPr>
@@ -31658,7 +31718,7 @@
       </p:sp>
       <p:sp>
         <p:nvSpPr>
-          <p:cNvPr id="46" name="Text 44"/>
+          <p:cNvPr id="47" name="Text 45"/>
           <p:cNvSpPr txBox="1"/>
           <p:nvPr/>
         </p:nvSpPr>
@@ -31737,7 +31797,7 @@
       </p:sp>
       <p:sp>
         <p:nvSpPr>
-          <p:cNvPr id="47" name="Text 45"/>
+          <p:cNvPr id="48" name="Text 46"/>
           <p:cNvSpPr txBox="1"/>
           <p:nvPr/>
         </p:nvSpPr>
@@ -31776,7 +31836,7 @@
       </p:sp>
       <p:sp>
         <p:nvSpPr>
-          <p:cNvPr id="48" name="Shape 46"/>
+          <p:cNvPr id="49" name="Shape 47"/>
           <p:cNvSpPr/>
           <p:nvPr/>
         </p:nvSpPr>
@@ -31796,7 +31856,7 @@
       </p:sp>
       <p:sp>
         <p:nvSpPr>
-          <p:cNvPr id="49" name="Text 47"/>
+          <p:cNvPr id="50" name="Text 48"/>
           <p:cNvSpPr txBox="1"/>
           <p:nvPr/>
         </p:nvSpPr>
@@ -31835,7 +31895,7 @@
       </p:sp>
       <p:sp>
         <p:nvSpPr>
-          <p:cNvPr id="50" name="Text 48"/>
+          <p:cNvPr id="51" name="Text 49"/>
           <p:cNvSpPr txBox="1"/>
           <p:nvPr/>
         </p:nvSpPr>
@@ -31874,7 +31934,7 @@
       </p:sp>
       <p:sp>
         <p:nvSpPr>
-          <p:cNvPr id="51" name="Shape 49"/>
+          <p:cNvPr id="52" name="Shape 50"/>
           <p:cNvSpPr/>
           <p:nvPr/>
         </p:nvSpPr>
@@ -31894,7 +31954,7 @@
       </p:sp>
       <p:sp>
         <p:nvSpPr>
-          <p:cNvPr id="52" name="Text 50"/>
+          <p:cNvPr id="53" name="Text 51"/>
           <p:cNvSpPr txBox="1"/>
           <p:nvPr/>
         </p:nvSpPr>
@@ -31933,7 +31993,7 @@
       </p:sp>
       <p:sp>
         <p:nvSpPr>
-          <p:cNvPr id="53" name="Text 51"/>
+          <p:cNvPr id="54" name="Text 52"/>
           <p:cNvSpPr txBox="1"/>
           <p:nvPr/>
         </p:nvSpPr>
@@ -32012,7 +32072,7 @@
       </p:sp>
       <p:sp>
         <p:nvSpPr>
-          <p:cNvPr id="54" name="Text 52"/>
+          <p:cNvPr id="55" name="Text 53"/>
           <p:cNvSpPr txBox="1"/>
           <p:nvPr/>
         </p:nvSpPr>
@@ -32051,7 +32111,7 @@
       </p:sp>
       <p:sp>
         <p:nvSpPr>
-          <p:cNvPr id="55" name="Text 53"/>
+          <p:cNvPr id="56" name="Text 54"/>
           <p:cNvSpPr txBox="1"/>
           <p:nvPr/>
         </p:nvSpPr>
@@ -32090,7 +32150,7 @@
       </p:sp>
       <p:sp>
         <p:nvSpPr>
-          <p:cNvPr id="56" name="Text 54"/>
+          <p:cNvPr id="57" name="Text 55"/>
           <p:cNvSpPr txBox="1"/>
           <p:nvPr/>
         </p:nvSpPr>
@@ -32169,7 +32229,7 @@
       </p:sp>
       <p:sp>
         <p:nvSpPr>
-          <p:cNvPr id="57" name="Text 55"/>
+          <p:cNvPr id="58" name="Text 56"/>
           <p:cNvSpPr txBox="1"/>
           <p:nvPr/>
         </p:nvSpPr>
@@ -32208,7 +32268,7 @@
       </p:sp>
       <p:sp>
         <p:nvSpPr>
-          <p:cNvPr id="58" name="Shape 56"/>
+          <p:cNvPr id="59" name="Shape 57"/>
           <p:cNvSpPr/>
           <p:nvPr/>
         </p:nvSpPr>
@@ -32228,7 +32288,7 @@
       </p:sp>
       <p:sp>
         <p:nvSpPr>
-          <p:cNvPr id="59" name="Text 57"/>
+          <p:cNvPr id="60" name="Text 58"/>
           <p:cNvSpPr txBox="1"/>
           <p:nvPr/>
         </p:nvSpPr>
@@ -32267,7 +32327,7 @@
       </p:sp>
       <p:sp>
         <p:nvSpPr>
-          <p:cNvPr id="60" name="Text 58"/>
+          <p:cNvPr id="61" name="Text 59"/>
           <p:cNvSpPr txBox="1"/>
           <p:nvPr/>
         </p:nvSpPr>
@@ -32346,7 +32406,7 @@
       </p:sp>
       <p:sp>
         <p:nvSpPr>
-          <p:cNvPr id="61" name="Text 59"/>
+          <p:cNvPr id="62" name="Text 60"/>
           <p:cNvSpPr txBox="1"/>
           <p:nvPr/>
         </p:nvSpPr>
@@ -32385,7 +32445,27 @@
       </p:sp>
       <p:sp>
         <p:nvSpPr>
-          <p:cNvPr id="62" name="Text 60"/>
+          <p:cNvPr id="63" name="Shape 61"/>
+          <p:cNvSpPr/>
+          <p:nvPr/>
+        </p:nvSpPr>
+        <p:spPr>
+          <a:xfrm>
+            <a:off x="11466576" y="4405579"/>
+            <a:ext cx="64008" cy="682142"/>
+          </a:xfrm>
+          <a:prstGeom prst="rect">
+            <a:avLst/>
+          </a:prstGeom>
+          <a:solidFill>
+            <a:srgbClr val="12A566"/>
+          </a:solidFill>
+          <a:ln/>
+        </p:spPr>
+      </p:sp>
+      <p:sp>
+        <p:nvSpPr>
+          <p:cNvPr id="64" name="Text 62"/>
           <p:cNvSpPr txBox="1"/>
           <p:nvPr/>
         </p:nvSpPr>
@@ -32424,7 +32504,7 @@
       </p:sp>
       <p:sp>
         <p:nvSpPr>
-          <p:cNvPr id="63" name="Text 61"/>
+          <p:cNvPr id="65" name="Text 63"/>
           <p:cNvSpPr txBox="1"/>
           <p:nvPr/>
         </p:nvSpPr>
@@ -32503,7 +32583,7 @@
       </p:sp>
       <p:sp>
         <p:nvSpPr>
-          <p:cNvPr id="64" name="Text 62"/>
+          <p:cNvPr id="66" name="Text 64"/>
           <p:cNvSpPr txBox="1"/>
           <p:nvPr/>
         </p:nvSpPr>
@@ -32542,7 +32622,7 @@
       </p:sp>
       <p:sp>
         <p:nvSpPr>
-          <p:cNvPr id="65" name="Shape 63"/>
+          <p:cNvPr id="67" name="Shape 65"/>
           <p:cNvSpPr/>
           <p:nvPr/>
         </p:nvSpPr>
@@ -32562,7 +32642,7 @@
       </p:sp>
       <p:sp>
         <p:nvSpPr>
-          <p:cNvPr id="66" name="Text 64"/>
+          <p:cNvPr id="68" name="Text 66"/>
           <p:cNvSpPr txBox="1"/>
           <p:nvPr/>
         </p:nvSpPr>
@@ -32601,7 +32681,7 @@
       </p:sp>
       <p:sp>
         <p:nvSpPr>
-          <p:cNvPr id="67" name="Text 65"/>
+          <p:cNvPr id="69" name="Text 67"/>
           <p:cNvSpPr txBox="1"/>
           <p:nvPr/>
         </p:nvSpPr>
@@ -32680,7 +32760,7 @@
       </p:sp>
       <p:sp>
         <p:nvSpPr>
-          <p:cNvPr id="68" name="Text 66"/>
+          <p:cNvPr id="70" name="Text 68"/>
           <p:cNvSpPr txBox="1"/>
           <p:nvPr/>
         </p:nvSpPr>
@@ -32719,7 +32799,7 @@
       </p:sp>
       <p:sp>
         <p:nvSpPr>
-          <p:cNvPr id="69" name="Shape 67"/>
+          <p:cNvPr id="71" name="Shape 69"/>
           <p:cNvSpPr/>
           <p:nvPr/>
         </p:nvSpPr>
@@ -32739,7 +32819,7 @@
       </p:sp>
       <p:sp>
         <p:nvSpPr>
-          <p:cNvPr id="70" name="Text 68"/>
+          <p:cNvPr id="72" name="Text 70"/>
           <p:cNvSpPr txBox="1"/>
           <p:nvPr/>
         </p:nvSpPr>

--- a/day2-deck/decks/Internal Gross Profit - Review.pptx
+++ b/day2-deck/decks/Internal Gross Profit - Review.pptx
@@ -16194,7 +16194,7 @@
                 <a:ea typeface="Inter" pitchFamily="34" charset="-122"/>
                 <a:cs typeface="Inter" pitchFamily="34" charset="-120"/>
               </a:rPr>
-              <a:t>Jan–Sep 2026 vs Jan–Sep 2025</a:t>
+              <a:t>Jan–Sep, this year vs last</a:t>
             </a:r>
             <a:endParaRPr lang="en-US" sz="1200" dirty="0"/>
           </a:p>
@@ -17157,7 +17157,7 @@
                 <a:ea typeface="Inter" pitchFamily="34" charset="-122"/>
                 <a:cs typeface="Inter" pitchFamily="34" charset="-120"/>
               </a:rPr>
-              <a:t>Jan–Sep 2026 vs Jan–Sep 2025</a:t>
+              <a:t>Jan–Sep, this year vs last</a:t>
             </a:r>
             <a:endParaRPr lang="en-US" sz="1200" dirty="0"/>
           </a:p>
@@ -18100,7 +18100,7 @@
                 <a:ea typeface="Inter" pitchFamily="34" charset="-122"/>
                 <a:cs typeface="Inter" pitchFamily="34" charset="-120"/>
               </a:rPr>
-              <a:t>Jul–Sep vs Jan–Mar 2026</a:t>
+              <a:t>Jul–Sep vs Jan–Mar this year</a:t>
             </a:r>
             <a:endParaRPr lang="en-US" sz="1200" dirty="0"/>
           </a:p>
@@ -30020,7 +30020,7 @@
                 <a:ea typeface="Inter" pitchFamily="34" charset="-122"/>
                 <a:cs typeface="Inter" pitchFamily="34" charset="-120"/>
               </a:rPr>
-              <a:t>Jan–Sep 2026 vs Jan–Sep 2025</a:t>
+              <a:t>Jan–Sep, this year vs last</a:t>
             </a:r>
             <a:endParaRPr lang="en-US" sz="1200" dirty="0"/>
           </a:p>
@@ -30983,7 +30983,7 @@
                 <a:ea typeface="Inter" pitchFamily="34" charset="-122"/>
                 <a:cs typeface="Inter" pitchFamily="34" charset="-120"/>
               </a:rPr>
-              <a:t>Jan–Sep 2026 vs Jan–Sep 2025</a:t>
+              <a:t>Jan–Sep, this year vs last</a:t>
             </a:r>
             <a:endParaRPr lang="en-US" sz="1200" dirty="0"/>
           </a:p>
@@ -31926,7 +31926,7 @@
                 <a:ea typeface="Inter" pitchFamily="34" charset="-122"/>
                 <a:cs typeface="Inter" pitchFamily="34" charset="-120"/>
               </a:rPr>
-              <a:t>Jul–Sep vs Jan–Mar 2026</a:t>
+              <a:t>Jul–Sep vs Jan–Mar this year</a:t>
             </a:r>
             <a:endParaRPr lang="en-US" sz="1200" dirty="0"/>
           </a:p>

--- a/day2-deck/decks/Internal Gross Profit - Review.pptx
+++ b/day2-deck/decks/Internal Gross Profit - Review.pptx
@@ -4335,7 +4335,7 @@
           <a:p>
             <a:r>
               <a:rPr lang="en-US" dirty="0"/>
-              <a:t>Source: Qlik - Closed Repair Orders. Internal pay type, Jan-Sep by close month. Same-store, INEOS excluded (opened 2026). GMC Prescott body shop labor types excluded. Internal labor gross / internal labor sale. A higher internal margin adds service gross but is a cost to used cars. Jan-Sep 2026 YTD. Green at or above the group, red below. Bars start at 50.0% so differences are visible.</a:t>
+              <a:t>Takeaway (off the slide): 16 of 33 stores at or above the 78.1% group, led by Honda Henderson at 85.9%. Audi Reno is lowest at 58.8%.Source: Qlik - Closed Repair Orders. Internal pay type, Jan-Sep by close month. Same-store, INEOS excluded (opened 2026). GMC Prescott body shop labor types excluded. Internal labor gross / internal labor sale. A higher internal margin adds service gross but is a cost to used cars. Jan-Sep 2026 YTD. Green at or above the group, red below. Bars start at 50.0% so differences are visible.</a:t>
             </a:r>
             <a:endParaRPr lang="en-US" dirty="0"/>
           </a:p>
@@ -4423,7 +4423,7 @@
           <a:p>
             <a:r>
               <a:rPr lang="en-US" dirty="0"/>
-              <a:t>Source: Qlik - Closed Repair Orders. Internal pay type, Jan-Sep by close month. Same-store, INEOS excluded (opened 2026). GMC Prescott body shop labor types excluded. Change in Internal Labor Gross Profit %, Jan-Sep 2026 vs 2025, best first.</a:t>
+              <a:t>Takeaway (off the slide): 19 of 33 stores raised internal labor GP%, led by Acura at +5.6 pts to 77.2%. 14 declined; Nissan fell most at −8.8 pts.Source: Qlik - Closed Repair Orders. Internal pay type, Jan-Sep by close month. Same-store, INEOS excluded (opened 2026). GMC Prescott body shop labor types excluded. Change in Internal Labor Gross Profit %, Jan-Sep 2026 vs 2025, best first.</a:t>
             </a:r>
             <a:endParaRPr lang="en-US" dirty="0"/>
           </a:p>
@@ -4511,7 +4511,7 @@
           <a:p>
             <a:r>
               <a:rPr lang="en-US" dirty="0"/>
-              <a:t>Source: Qlik - Closed Repair Orders. Internal pay type, Jan-Sep by close month. Same-store, INEOS excluded (opened 2026). GMC Prescott body shop labor types excluded. Internal labor gross / internal labor sale. A higher internal margin adds service gross but is a cost to used cars. Top and bottom five stores by change in Internal Labor Gross Profit %, Jan-Sep 2026 vs 2025. Moving now: Jul-Sep 2026 vs Jan-Mar 2026, each store against itself; the group moved +0.5 pts on the same basis, so part of every store's change is seasonal. Green bar at the right of a row: the store is on both the top five vs last year and the top five moving now.Conversation starter: each top store says one thing they started doing; each bottom store says what got in the way and what they would try. The room trades ideas. Moving now: ask the top three what they started this year.</a:t>
+              <a:t>Takeaway (off the slide): Ask Acura, Honda Spokane and LR Reno what changed. Ask Nissan, LR LV and Mazda what got in the way. Ask LR Henderson, Kia St George and Hyundai St George what they started this year.Source: Qlik - Closed Repair Orders. Internal pay type, Jan-Sep by close month. Same-store, INEOS excluded (opened 2026). GMC Prescott body shop labor types excluded. Internal labor gross / internal labor sale. A higher internal margin adds service gross but is a cost to used cars. Top and bottom five stores by change in Internal Labor Gross Profit %, Jan-Sep 2026 vs 2025. Moving now: Jul-Sep 2026 vs Jan-Mar 2026, each store against itself; the group moved +0.5 pts on the same basis, so part of every store's change is seasonal. Green bar at the right of a row: the store is on both the top five vs last year and the top five moving now.Conversation starter: each top store says one thing they started doing; each bottom store says what got in the way and what they would try. The room trades ideas. Moving now: ask the top three what they started this year.</a:t>
             </a:r>
             <a:endParaRPr lang="en-US" dirty="0"/>
           </a:p>
@@ -4687,7 +4687,7 @@
           <a:p>
             <a:r>
               <a:rPr lang="en-US" dirty="0"/>
-              <a:t>Source: Qlik - Closed Repair Orders. Internal pay type, Jan-Sep by close month. Same-store, INEOS excluded (opened 2026). GMC Prescott body shop labor types excluded. Internal parts gross / internal parts sale on repair orders. A higher internal margin adds parts gross but is a cost to used cars. Jan-Sep 2026 YTD. Green at or above the group, red below. Bars start at 20.0% so differences are visible.</a:t>
+              <a:t>Takeaway (off the slide): 13 of 33 stores at or above the 36.5% group, led by Toyota Henderson at 45.1%. CDJR Post Falls is lowest at 24.4%.Source: Qlik - Closed Repair Orders. Internal pay type, Jan-Sep by close month. Same-store, INEOS excluded (opened 2026). GMC Prescott body shop labor types excluded. Internal parts gross / internal parts sale on repair orders. A higher internal margin adds parts gross but is a cost to used cars. Jan-Sep 2026 YTD. Green at or above the group, red below. Bars start at 20.0% so differences are visible.</a:t>
             </a:r>
             <a:endParaRPr lang="en-US" dirty="0"/>
           </a:p>
@@ -4775,7 +4775,7 @@
           <a:p>
             <a:r>
               <a:rPr lang="en-US" dirty="0"/>
-              <a:t>Source: Qlik - Closed Repair Orders. Internal pay type, Jan-Sep by close month. Same-store, INEOS excluded (opened 2026). GMC Prescott body shop labor types excluded. Change in Internal Parts Gross Profit %, Jan-Sep 2026 vs 2025, best first.</a:t>
+              <a:t>Takeaway (off the slide): 21 of 33 stores raised internal parts GP%, led by Acura at +6.2 pts to 34.0%. 12 declined; VW St George fell most at −4.8 pts.Source: Qlik - Closed Repair Orders. Internal pay type, Jan-Sep by close month. Same-store, INEOS excluded (opened 2026). GMC Prescott body shop labor types excluded. Change in Internal Parts Gross Profit %, Jan-Sep 2026 vs 2025, best first.</a:t>
             </a:r>
             <a:endParaRPr lang="en-US" dirty="0"/>
           </a:p>
@@ -4863,7 +4863,7 @@
           <a:p>
             <a:r>
               <a:rPr lang="en-US" dirty="0"/>
-              <a:t>Source: Qlik - Closed Repair Orders. Internal pay type, Jan-Sep by close month. Same-store, INEOS excluded (opened 2026). GMC Prescott body shop labor types excluded. Internal parts gross / internal parts sale on repair orders. A higher internal margin adds parts gross but is a cost to used cars. Top and bottom five stores by change in Internal Parts Gross Profit %, Jan-Sep 2026 vs 2025. Moving now: Jul-Sep 2026 vs Jan-Mar 2026, each store against itself; the group moved +0.5 pts on the same basis, so part of every store's change is seasonal. Green bar at the right of a row: the store is on both the top five vs last year and the top five moving now.Conversation starter: each top store says one thing they started doing; each bottom store says what got in the way and what they would try. The room trades ideas. Moving now: ask the top three what they started this year.</a:t>
+              <a:t>Takeaway (off the slide): Ask Acura, Hyundai Prescott and Honda Flagstaff what changed. Ask VW St George, Kia LV and LR LV what got in the way. Ask LR Reno, CDJR Post Falls and LR Henderson what they started this year.Source: Qlik - Closed Repair Orders. Internal pay type, Jan-Sep by close month. Same-store, INEOS excluded (opened 2026). GMC Prescott body shop labor types excluded. Internal parts gross / internal parts sale on repair orders. A higher internal margin adds parts gross but is a cost to used cars. Top and bottom five stores by change in Internal Parts Gross Profit %, Jan-Sep 2026 vs 2025. Moving now: Jul-Sep 2026 vs Jan-Mar 2026, each store against itself; the group moved +0.5 pts on the same basis, so part of every store's change is seasonal. Green bar at the right of a row: the store is on both the top five vs last year and the top five moving now.Conversation starter: each top store says one thing they started doing; each bottom store says what got in the way and what they would try. The room trades ideas. Moving now: ask the top three what they started this year.</a:t>
             </a:r>
             <a:endParaRPr lang="en-US" dirty="0"/>
           </a:p>
@@ -6197,7 +6197,7 @@
         <p:spPr>
           <a:xfrm>
             <a:off x="457200" y="1207008"/>
-            <a:ext cx="11274552" cy="4782312"/>
+            <a:ext cx="11274552" cy="5148072"/>
           </a:xfrm>
           <a:prstGeom prst="rect">
             <a:avLst/>
@@ -6374,7 +6374,7 @@
         <p:spPr>
           <a:xfrm>
             <a:off x="658368" y="1847088"/>
-            <a:ext cx="310896" cy="239896"/>
+            <a:ext cx="310896" cy="261411"/>
           </a:xfrm>
           <a:prstGeom prst="rect">
             <a:avLst/>
@@ -6413,7 +6413,7 @@
         <p:spPr>
           <a:xfrm>
             <a:off x="1014984" y="1847088"/>
-            <a:ext cx="1920240" cy="239896"/>
+            <a:ext cx="1920240" cy="261411"/>
           </a:xfrm>
           <a:prstGeom prst="rect">
             <a:avLst/>
@@ -6451,8 +6451,8 @@
         </p:nvSpPr>
         <p:spPr>
           <a:xfrm>
-            <a:off x="3008376" y="1907062"/>
-            <a:ext cx="1691640" cy="119948"/>
+            <a:off x="3008376" y="1912441"/>
+            <a:ext cx="1691640" cy="130705"/>
           </a:xfrm>
           <a:prstGeom prst="rect">
             <a:avLst/>
@@ -6472,7 +6472,7 @@
         <p:spPr>
           <a:xfrm>
             <a:off x="4754880" y="1847088"/>
-            <a:ext cx="1143000" cy="239896"/>
+            <a:ext cx="1143000" cy="261411"/>
           </a:xfrm>
           <a:prstGeom prst="rect">
             <a:avLst/>
@@ -6510,8 +6510,8 @@
         </p:nvSpPr>
         <p:spPr>
           <a:xfrm>
-            <a:off x="658368" y="2086984"/>
-            <a:ext cx="310896" cy="239896"/>
+            <a:off x="658368" y="2108499"/>
+            <a:ext cx="310896" cy="261411"/>
           </a:xfrm>
           <a:prstGeom prst="rect">
             <a:avLst/>
@@ -6549,8 +6549,8 @@
         </p:nvSpPr>
         <p:spPr>
           <a:xfrm>
-            <a:off x="1014984" y="2086984"/>
-            <a:ext cx="1920240" cy="239896"/>
+            <a:off x="1014984" y="2108499"/>
+            <a:ext cx="1920240" cy="261411"/>
           </a:xfrm>
           <a:prstGeom prst="rect">
             <a:avLst/>
@@ -6588,8 +6588,8 @@
         </p:nvSpPr>
         <p:spPr>
           <a:xfrm>
-            <a:off x="3008376" y="2146957"/>
-            <a:ext cx="1664906" cy="119948"/>
+            <a:off x="3008376" y="2173852"/>
+            <a:ext cx="1664906" cy="130705"/>
           </a:xfrm>
           <a:prstGeom prst="rect">
             <a:avLst/>
@@ -6608,8 +6608,8 @@
         </p:nvSpPr>
         <p:spPr>
           <a:xfrm>
-            <a:off x="4754880" y="2086984"/>
-            <a:ext cx="1143000" cy="239896"/>
+            <a:off x="4754880" y="2108499"/>
+            <a:ext cx="1143000" cy="261411"/>
           </a:xfrm>
           <a:prstGeom prst="rect">
             <a:avLst/>
@@ -6647,8 +6647,8 @@
         </p:nvSpPr>
         <p:spPr>
           <a:xfrm>
-            <a:off x="658368" y="2326879"/>
-            <a:ext cx="310896" cy="239896"/>
+            <a:off x="658368" y="2369910"/>
+            <a:ext cx="310896" cy="261411"/>
           </a:xfrm>
           <a:prstGeom prst="rect">
             <a:avLst/>
@@ -6686,8 +6686,8 @@
         </p:nvSpPr>
         <p:spPr>
           <a:xfrm>
-            <a:off x="1014984" y="2326879"/>
-            <a:ext cx="1920240" cy="239896"/>
+            <a:off x="1014984" y="2369910"/>
+            <a:ext cx="1920240" cy="261411"/>
           </a:xfrm>
           <a:prstGeom prst="rect">
             <a:avLst/>
@@ -6725,8 +6725,8 @@
         </p:nvSpPr>
         <p:spPr>
           <a:xfrm>
-            <a:off x="3008376" y="2386853"/>
-            <a:ext cx="1641280" cy="119948"/>
+            <a:off x="3008376" y="2435262"/>
+            <a:ext cx="1641280" cy="130705"/>
           </a:xfrm>
           <a:prstGeom prst="rect">
             <a:avLst/>
@@ -6745,8 +6745,8 @@
         </p:nvSpPr>
         <p:spPr>
           <a:xfrm>
-            <a:off x="4754880" y="2326879"/>
-            <a:ext cx="1143000" cy="239896"/>
+            <a:off x="4754880" y="2369910"/>
+            <a:ext cx="1143000" cy="261411"/>
           </a:xfrm>
           <a:prstGeom prst="rect">
             <a:avLst/>
@@ -6784,8 +6784,8 @@
         </p:nvSpPr>
         <p:spPr>
           <a:xfrm>
-            <a:off x="658368" y="2566775"/>
-            <a:ext cx="310896" cy="239896"/>
+            <a:off x="658368" y="2631320"/>
+            <a:ext cx="310896" cy="261411"/>
           </a:xfrm>
           <a:prstGeom prst="rect">
             <a:avLst/>
@@ -6823,8 +6823,8 @@
         </p:nvSpPr>
         <p:spPr>
           <a:xfrm>
-            <a:off x="1014984" y="2566775"/>
-            <a:ext cx="1920240" cy="239896"/>
+            <a:off x="1014984" y="2631320"/>
+            <a:ext cx="1920240" cy="261411"/>
           </a:xfrm>
           <a:prstGeom prst="rect">
             <a:avLst/>
@@ -6862,8 +6862,8 @@
         </p:nvSpPr>
         <p:spPr>
           <a:xfrm>
-            <a:off x="3008376" y="2626748"/>
-            <a:ext cx="1569988" cy="119948"/>
+            <a:off x="3008376" y="2696673"/>
+            <a:ext cx="1569988" cy="130705"/>
           </a:xfrm>
           <a:prstGeom prst="rect">
             <a:avLst/>
@@ -6882,8 +6882,8 @@
         </p:nvSpPr>
         <p:spPr>
           <a:xfrm>
-            <a:off x="4754880" y="2566775"/>
-            <a:ext cx="1143000" cy="239896"/>
+            <a:off x="4754880" y="2631320"/>
+            <a:ext cx="1143000" cy="261411"/>
           </a:xfrm>
           <a:prstGeom prst="rect">
             <a:avLst/>
@@ -6921,8 +6921,8 @@
         </p:nvSpPr>
         <p:spPr>
           <a:xfrm>
-            <a:off x="658368" y="2806670"/>
-            <a:ext cx="310896" cy="239896"/>
+            <a:off x="658368" y="2892731"/>
+            <a:ext cx="310896" cy="261411"/>
           </a:xfrm>
           <a:prstGeom prst="rect">
             <a:avLst/>
@@ -6960,8 +6960,8 @@
         </p:nvSpPr>
         <p:spPr>
           <a:xfrm>
-            <a:off x="1014984" y="2806670"/>
-            <a:ext cx="1920240" cy="239896"/>
+            <a:off x="1014984" y="2892731"/>
+            <a:ext cx="1920240" cy="261411"/>
           </a:xfrm>
           <a:prstGeom prst="rect">
             <a:avLst/>
@@ -6999,8 +6999,8 @@
         </p:nvSpPr>
         <p:spPr>
           <a:xfrm>
-            <a:off x="3008376" y="2866644"/>
-            <a:ext cx="1546216" cy="119948"/>
+            <a:off x="3008376" y="2958084"/>
+            <a:ext cx="1546216" cy="130705"/>
           </a:xfrm>
           <a:prstGeom prst="rect">
             <a:avLst/>
@@ -7019,8 +7019,8 @@
         </p:nvSpPr>
         <p:spPr>
           <a:xfrm>
-            <a:off x="4754880" y="2806670"/>
-            <a:ext cx="1143000" cy="239896"/>
+            <a:off x="4754880" y="2892731"/>
+            <a:ext cx="1143000" cy="261411"/>
           </a:xfrm>
           <a:prstGeom prst="rect">
             <a:avLst/>
@@ -7058,8 +7058,8 @@
         </p:nvSpPr>
         <p:spPr>
           <a:xfrm>
-            <a:off x="658368" y="3046566"/>
-            <a:ext cx="310896" cy="239896"/>
+            <a:off x="658368" y="3154142"/>
+            <a:ext cx="310896" cy="261411"/>
           </a:xfrm>
           <a:prstGeom prst="rect">
             <a:avLst/>
@@ -7097,8 +7097,8 @@
         </p:nvSpPr>
         <p:spPr>
           <a:xfrm>
-            <a:off x="1014984" y="3046566"/>
-            <a:ext cx="1920240" cy="239896"/>
+            <a:off x="1014984" y="3154142"/>
+            <a:ext cx="1920240" cy="261411"/>
           </a:xfrm>
           <a:prstGeom prst="rect">
             <a:avLst/>
@@ -7136,8 +7136,8 @@
         </p:nvSpPr>
         <p:spPr>
           <a:xfrm>
-            <a:off x="3008376" y="3106540"/>
-            <a:ext cx="1521776" cy="119948"/>
+            <a:off x="3008376" y="3219495"/>
+            <a:ext cx="1521776" cy="130705"/>
           </a:xfrm>
           <a:prstGeom prst="rect">
             <a:avLst/>
@@ -7156,8 +7156,8 @@
         </p:nvSpPr>
         <p:spPr>
           <a:xfrm>
-            <a:off x="4754880" y="3046566"/>
-            <a:ext cx="1143000" cy="239896"/>
+            <a:off x="4754880" y="3154142"/>
+            <a:ext cx="1143000" cy="261411"/>
           </a:xfrm>
           <a:prstGeom prst="rect">
             <a:avLst/>
@@ -7195,8 +7195,8 @@
         </p:nvSpPr>
         <p:spPr>
           <a:xfrm>
-            <a:off x="658368" y="3286461"/>
-            <a:ext cx="310896" cy="239896"/>
+            <a:off x="658368" y="3415553"/>
+            <a:ext cx="310896" cy="261411"/>
           </a:xfrm>
           <a:prstGeom prst="rect">
             <a:avLst/>
@@ -7234,8 +7234,8 @@
         </p:nvSpPr>
         <p:spPr>
           <a:xfrm>
-            <a:off x="1014984" y="3286461"/>
-            <a:ext cx="1920240" cy="239896"/>
+            <a:off x="1014984" y="3415553"/>
+            <a:ext cx="1920240" cy="261411"/>
           </a:xfrm>
           <a:prstGeom prst="rect">
             <a:avLst/>
@@ -7273,8 +7273,8 @@
         </p:nvSpPr>
         <p:spPr>
           <a:xfrm>
-            <a:off x="3008376" y="3346435"/>
-            <a:ext cx="1517221" cy="119948"/>
+            <a:off x="3008376" y="3480906"/>
+            <a:ext cx="1517221" cy="130705"/>
           </a:xfrm>
           <a:prstGeom prst="rect">
             <a:avLst/>
@@ -7293,8 +7293,8 @@
         </p:nvSpPr>
         <p:spPr>
           <a:xfrm>
-            <a:off x="4754880" y="3286461"/>
-            <a:ext cx="1143000" cy="239896"/>
+            <a:off x="4754880" y="3415553"/>
+            <a:ext cx="1143000" cy="261411"/>
           </a:xfrm>
           <a:prstGeom prst="rect">
             <a:avLst/>
@@ -7332,8 +7332,8 @@
         </p:nvSpPr>
         <p:spPr>
           <a:xfrm>
-            <a:off x="658368" y="3526357"/>
-            <a:ext cx="310896" cy="239896"/>
+            <a:off x="658368" y="3676964"/>
+            <a:ext cx="310896" cy="261411"/>
           </a:xfrm>
           <a:prstGeom prst="rect">
             <a:avLst/>
@@ -7371,8 +7371,8 @@
         </p:nvSpPr>
         <p:spPr>
           <a:xfrm>
-            <a:off x="1014984" y="3526357"/>
-            <a:ext cx="1920240" cy="239896"/>
+            <a:off x="1014984" y="3676964"/>
+            <a:ext cx="1920240" cy="261411"/>
           </a:xfrm>
           <a:prstGeom prst="rect">
             <a:avLst/>
@@ -7410,8 +7410,8 @@
         </p:nvSpPr>
         <p:spPr>
           <a:xfrm>
-            <a:off x="3008376" y="3586331"/>
-            <a:ext cx="1512092" cy="119948"/>
+            <a:off x="3008376" y="3742316"/>
+            <a:ext cx="1512092" cy="130705"/>
           </a:xfrm>
           <a:prstGeom prst="rect">
             <a:avLst/>
@@ -7430,8 +7430,8 @@
         </p:nvSpPr>
         <p:spPr>
           <a:xfrm>
-            <a:off x="4754880" y="3526357"/>
-            <a:ext cx="1143000" cy="239896"/>
+            <a:off x="4754880" y="3676964"/>
+            <a:ext cx="1143000" cy="261411"/>
           </a:xfrm>
           <a:prstGeom prst="rect">
             <a:avLst/>
@@ -7469,8 +7469,8 @@
         </p:nvSpPr>
         <p:spPr>
           <a:xfrm>
-            <a:off x="658368" y="3766252"/>
-            <a:ext cx="310896" cy="239896"/>
+            <a:off x="658368" y="3938375"/>
+            <a:ext cx="310896" cy="261411"/>
           </a:xfrm>
           <a:prstGeom prst="rect">
             <a:avLst/>
@@ -7508,8 +7508,8 @@
         </p:nvSpPr>
         <p:spPr>
           <a:xfrm>
-            <a:off x="1014984" y="3766252"/>
-            <a:ext cx="1920240" cy="239896"/>
+            <a:off x="1014984" y="3938375"/>
+            <a:ext cx="1920240" cy="261411"/>
           </a:xfrm>
           <a:prstGeom prst="rect">
             <a:avLst/>
@@ -7547,8 +7547,8 @@
         </p:nvSpPr>
         <p:spPr>
           <a:xfrm>
-            <a:off x="3008376" y="3826226"/>
-            <a:ext cx="1502318" cy="119948"/>
+            <a:off x="3008376" y="4003727"/>
+            <a:ext cx="1502318" cy="130705"/>
           </a:xfrm>
           <a:prstGeom prst="rect">
             <a:avLst/>
@@ -7567,8 +7567,8 @@
         </p:nvSpPr>
         <p:spPr>
           <a:xfrm>
-            <a:off x="4754880" y="3766252"/>
-            <a:ext cx="1143000" cy="239896"/>
+            <a:off x="4754880" y="3938375"/>
+            <a:ext cx="1143000" cy="261411"/>
           </a:xfrm>
           <a:prstGeom prst="rect">
             <a:avLst/>
@@ -7606,8 +7606,8 @@
         </p:nvSpPr>
         <p:spPr>
           <a:xfrm>
-            <a:off x="658368" y="4006148"/>
-            <a:ext cx="310896" cy="239896"/>
+            <a:off x="658368" y="4199785"/>
+            <a:ext cx="310896" cy="261411"/>
           </a:xfrm>
           <a:prstGeom prst="rect">
             <a:avLst/>
@@ -7645,8 +7645,8 @@
         </p:nvSpPr>
         <p:spPr>
           <a:xfrm>
-            <a:off x="1014984" y="4006148"/>
-            <a:ext cx="1920240" cy="239896"/>
+            <a:off x="1014984" y="4199785"/>
+            <a:ext cx="1920240" cy="261411"/>
           </a:xfrm>
           <a:prstGeom prst="rect">
             <a:avLst/>
@@ -7684,8 +7684,8 @@
         </p:nvSpPr>
         <p:spPr>
           <a:xfrm>
-            <a:off x="3008376" y="4066122"/>
-            <a:ext cx="1485717" cy="119948"/>
+            <a:off x="3008376" y="4265138"/>
+            <a:ext cx="1485717" cy="130705"/>
           </a:xfrm>
           <a:prstGeom prst="rect">
             <a:avLst/>
@@ -7704,8 +7704,8 @@
         </p:nvSpPr>
         <p:spPr>
           <a:xfrm>
-            <a:off x="4754880" y="4006148"/>
-            <a:ext cx="1143000" cy="239896"/>
+            <a:off x="4754880" y="4199785"/>
+            <a:ext cx="1143000" cy="261411"/>
           </a:xfrm>
           <a:prstGeom prst="rect">
             <a:avLst/>
@@ -7743,8 +7743,8 @@
         </p:nvSpPr>
         <p:spPr>
           <a:xfrm>
-            <a:off x="658368" y="4246043"/>
-            <a:ext cx="310896" cy="239896"/>
+            <a:off x="658368" y="4461196"/>
+            <a:ext cx="310896" cy="261411"/>
           </a:xfrm>
           <a:prstGeom prst="rect">
             <a:avLst/>
@@ -7782,8 +7782,8 @@
         </p:nvSpPr>
         <p:spPr>
           <a:xfrm>
-            <a:off x="1014984" y="4246043"/>
-            <a:ext cx="1920240" cy="239896"/>
+            <a:off x="1014984" y="4461196"/>
+            <a:ext cx="1920240" cy="261411"/>
           </a:xfrm>
           <a:prstGeom prst="rect">
             <a:avLst/>
@@ -7821,8 +7821,8 @@
         </p:nvSpPr>
         <p:spPr>
           <a:xfrm>
-            <a:off x="3008376" y="4306017"/>
-            <a:ext cx="1450241" cy="119948"/>
+            <a:off x="3008376" y="4526549"/>
+            <a:ext cx="1450241" cy="130705"/>
           </a:xfrm>
           <a:prstGeom prst="rect">
             <a:avLst/>
@@ -7841,8 +7841,8 @@
         </p:nvSpPr>
         <p:spPr>
           <a:xfrm>
-            <a:off x="4754880" y="4246043"/>
-            <a:ext cx="1143000" cy="239896"/>
+            <a:off x="4754880" y="4461196"/>
+            <a:ext cx="1143000" cy="261411"/>
           </a:xfrm>
           <a:prstGeom prst="rect">
             <a:avLst/>
@@ -7880,8 +7880,8 @@
         </p:nvSpPr>
         <p:spPr>
           <a:xfrm>
-            <a:off x="658368" y="4485939"/>
-            <a:ext cx="310896" cy="239896"/>
+            <a:off x="658368" y="4722607"/>
+            <a:ext cx="310896" cy="261411"/>
           </a:xfrm>
           <a:prstGeom prst="rect">
             <a:avLst/>
@@ -7919,8 +7919,8 @@
         </p:nvSpPr>
         <p:spPr>
           <a:xfrm>
-            <a:off x="1014984" y="4485939"/>
-            <a:ext cx="1920240" cy="239896"/>
+            <a:off x="1014984" y="4722607"/>
+            <a:ext cx="1920240" cy="261411"/>
           </a:xfrm>
           <a:prstGeom prst="rect">
             <a:avLst/>
@@ -7958,8 +7958,8 @@
         </p:nvSpPr>
         <p:spPr>
           <a:xfrm>
-            <a:off x="3008376" y="4545913"/>
-            <a:ext cx="1425422" cy="119948"/>
+            <a:off x="3008376" y="4787960"/>
+            <a:ext cx="1425422" cy="130705"/>
           </a:xfrm>
           <a:prstGeom prst="rect">
             <a:avLst/>
@@ -7978,8 +7978,8 @@
         </p:nvSpPr>
         <p:spPr>
           <a:xfrm>
-            <a:off x="4754880" y="4485939"/>
-            <a:ext cx="1143000" cy="239896"/>
+            <a:off x="4754880" y="4722607"/>
+            <a:ext cx="1143000" cy="261411"/>
           </a:xfrm>
           <a:prstGeom prst="rect">
             <a:avLst/>
@@ -8017,8 +8017,8 @@
         </p:nvSpPr>
         <p:spPr>
           <a:xfrm>
-            <a:off x="658368" y="4725834"/>
-            <a:ext cx="310896" cy="239896"/>
+            <a:off x="658368" y="4984018"/>
+            <a:ext cx="310896" cy="261411"/>
           </a:xfrm>
           <a:prstGeom prst="rect">
             <a:avLst/>
@@ -8056,8 +8056,8 @@
         </p:nvSpPr>
         <p:spPr>
           <a:xfrm>
-            <a:off x="1014984" y="4725834"/>
-            <a:ext cx="1920240" cy="239896"/>
+            <a:off x="1014984" y="4984018"/>
+            <a:ext cx="1920240" cy="261411"/>
           </a:xfrm>
           <a:prstGeom prst="rect">
             <a:avLst/>
@@ -8095,8 +8095,8 @@
         </p:nvSpPr>
         <p:spPr>
           <a:xfrm>
-            <a:off x="3008376" y="4785808"/>
-            <a:ext cx="1402468" cy="119948"/>
+            <a:off x="3008376" y="5049371"/>
+            <a:ext cx="1402468" cy="130705"/>
           </a:xfrm>
           <a:prstGeom prst="rect">
             <a:avLst/>
@@ -8115,8 +8115,8 @@
         </p:nvSpPr>
         <p:spPr>
           <a:xfrm>
-            <a:off x="4754880" y="4725834"/>
-            <a:ext cx="1143000" cy="239896"/>
+            <a:off x="4754880" y="4984018"/>
+            <a:ext cx="1143000" cy="261411"/>
           </a:xfrm>
           <a:prstGeom prst="rect">
             <a:avLst/>
@@ -8154,8 +8154,8 @@
         </p:nvSpPr>
         <p:spPr>
           <a:xfrm>
-            <a:off x="658368" y="4965730"/>
-            <a:ext cx="310896" cy="239896"/>
+            <a:off x="658368" y="5245429"/>
+            <a:ext cx="310896" cy="261411"/>
           </a:xfrm>
           <a:prstGeom prst="rect">
             <a:avLst/>
@@ -8193,8 +8193,8 @@
         </p:nvSpPr>
         <p:spPr>
           <a:xfrm>
-            <a:off x="1014984" y="4965730"/>
-            <a:ext cx="1920240" cy="239896"/>
+            <a:off x="1014984" y="5245429"/>
+            <a:ext cx="1920240" cy="261411"/>
           </a:xfrm>
           <a:prstGeom prst="rect">
             <a:avLst/>
@@ -8232,8 +8232,8 @@
         </p:nvSpPr>
         <p:spPr>
           <a:xfrm>
-            <a:off x="3008376" y="5025704"/>
-            <a:ext cx="1402095" cy="119948"/>
+            <a:off x="3008376" y="5310781"/>
+            <a:ext cx="1402095" cy="130705"/>
           </a:xfrm>
           <a:prstGeom prst="rect">
             <a:avLst/>
@@ -8252,8 +8252,8 @@
         </p:nvSpPr>
         <p:spPr>
           <a:xfrm>
-            <a:off x="4754880" y="4965730"/>
-            <a:ext cx="1143000" cy="239896"/>
+            <a:off x="4754880" y="5245429"/>
+            <a:ext cx="1143000" cy="261411"/>
           </a:xfrm>
           <a:prstGeom prst="rect">
             <a:avLst/>
@@ -8291,8 +8291,8 @@
         </p:nvSpPr>
         <p:spPr>
           <a:xfrm>
-            <a:off x="658368" y="5205625"/>
-            <a:ext cx="310896" cy="239896"/>
+            <a:off x="658368" y="5506840"/>
+            <a:ext cx="310896" cy="261411"/>
           </a:xfrm>
           <a:prstGeom prst="rect">
             <a:avLst/>
@@ -8330,8 +8330,8 @@
         </p:nvSpPr>
         <p:spPr>
           <a:xfrm>
-            <a:off x="1014984" y="5205625"/>
-            <a:ext cx="1920240" cy="239896"/>
+            <a:off x="1014984" y="5506840"/>
+            <a:ext cx="1920240" cy="261411"/>
           </a:xfrm>
           <a:prstGeom prst="rect">
             <a:avLst/>
@@ -8369,8 +8369,8 @@
         </p:nvSpPr>
         <p:spPr>
           <a:xfrm>
-            <a:off x="3008376" y="5265599"/>
-            <a:ext cx="1364813" cy="119948"/>
+            <a:off x="3008376" y="5572192"/>
+            <a:ext cx="1364813" cy="130705"/>
           </a:xfrm>
           <a:prstGeom prst="rect">
             <a:avLst/>
@@ -8389,8 +8389,8 @@
         </p:nvSpPr>
         <p:spPr>
           <a:xfrm>
-            <a:off x="4754880" y="5205625"/>
-            <a:ext cx="1143000" cy="239896"/>
+            <a:off x="4754880" y="5506840"/>
+            <a:ext cx="1143000" cy="261411"/>
           </a:xfrm>
           <a:prstGeom prst="rect">
             <a:avLst/>
@@ -8428,8 +8428,8 @@
         </p:nvSpPr>
         <p:spPr>
           <a:xfrm>
-            <a:off x="658368" y="5445521"/>
-            <a:ext cx="310896" cy="239896"/>
+            <a:off x="658368" y="5768250"/>
+            <a:ext cx="310896" cy="261411"/>
           </a:xfrm>
           <a:prstGeom prst="rect">
             <a:avLst/>
@@ -8467,8 +8467,8 @@
         </p:nvSpPr>
         <p:spPr>
           <a:xfrm>
-            <a:off x="1014984" y="5445521"/>
-            <a:ext cx="1920240" cy="239896"/>
+            <a:off x="1014984" y="5768250"/>
+            <a:ext cx="1920240" cy="261411"/>
           </a:xfrm>
           <a:prstGeom prst="rect">
             <a:avLst/>
@@ -8506,8 +8506,8 @@
         </p:nvSpPr>
         <p:spPr>
           <a:xfrm>
-            <a:off x="3008376" y="5505495"/>
-            <a:ext cx="1327108" cy="119948"/>
+            <a:off x="3008376" y="5833603"/>
+            <a:ext cx="1327108" cy="130705"/>
           </a:xfrm>
           <a:prstGeom prst="rect">
             <a:avLst/>
@@ -8526,8 +8526,8 @@
         </p:nvSpPr>
         <p:spPr>
           <a:xfrm>
-            <a:off x="4754880" y="5445521"/>
-            <a:ext cx="1143000" cy="239896"/>
+            <a:off x="4754880" y="5768250"/>
+            <a:ext cx="1143000" cy="261411"/>
           </a:xfrm>
           <a:prstGeom prst="rect">
             <a:avLst/>
@@ -8565,8 +8565,8 @@
         </p:nvSpPr>
         <p:spPr>
           <a:xfrm>
-            <a:off x="658368" y="5685416"/>
-            <a:ext cx="310896" cy="239896"/>
+            <a:off x="658368" y="6029661"/>
+            <a:ext cx="310896" cy="261411"/>
           </a:xfrm>
           <a:prstGeom prst="rect">
             <a:avLst/>
@@ -8604,8 +8604,8 @@
         </p:nvSpPr>
         <p:spPr>
           <a:xfrm>
-            <a:off x="1014984" y="5685416"/>
-            <a:ext cx="1920240" cy="239896"/>
+            <a:off x="1014984" y="6029661"/>
+            <a:ext cx="1920240" cy="261411"/>
           </a:xfrm>
           <a:prstGeom prst="rect">
             <a:avLst/>
@@ -8643,8 +8643,8 @@
         </p:nvSpPr>
         <p:spPr>
           <a:xfrm>
-            <a:off x="3008376" y="5745390"/>
-            <a:ext cx="1282160" cy="119948"/>
+            <a:off x="3008376" y="6095014"/>
+            <a:ext cx="1282160" cy="130705"/>
           </a:xfrm>
           <a:prstGeom prst="rect">
             <a:avLst/>
@@ -8663,8 +8663,8 @@
         </p:nvSpPr>
         <p:spPr>
           <a:xfrm>
-            <a:off x="4754880" y="5685416"/>
-            <a:ext cx="1143000" cy="239896"/>
+            <a:off x="4754880" y="6029661"/>
+            <a:ext cx="1143000" cy="261411"/>
           </a:xfrm>
           <a:prstGeom prst="rect">
             <a:avLst/>
@@ -8703,7 +8703,7 @@
         <p:spPr>
           <a:xfrm>
             <a:off x="6208776" y="1847088"/>
-            <a:ext cx="310896" cy="239896"/>
+            <a:ext cx="310896" cy="261411"/>
           </a:xfrm>
           <a:prstGeom prst="rect">
             <a:avLst/>
@@ -8742,7 +8742,7 @@
         <p:spPr>
           <a:xfrm>
             <a:off x="6565392" y="1847088"/>
-            <a:ext cx="1920240" cy="239896"/>
+            <a:ext cx="1920240" cy="261411"/>
           </a:xfrm>
           <a:prstGeom prst="rect">
             <a:avLst/>
@@ -8780,8 +8780,8 @@
         </p:nvSpPr>
         <p:spPr>
           <a:xfrm>
-            <a:off x="8558784" y="1907062"/>
-            <a:ext cx="1241952" cy="119948"/>
+            <a:off x="8558784" y="1912441"/>
+            <a:ext cx="1241952" cy="130705"/>
           </a:xfrm>
           <a:prstGeom prst="rect">
             <a:avLst/>
@@ -8801,7 +8801,7 @@
         <p:spPr>
           <a:xfrm>
             <a:off x="10305288" y="1847088"/>
-            <a:ext cx="1143000" cy="239896"/>
+            <a:ext cx="1143000" cy="261411"/>
           </a:xfrm>
           <a:prstGeom prst="rect">
             <a:avLst/>
@@ -8839,8 +8839,8 @@
         </p:nvSpPr>
         <p:spPr>
           <a:xfrm>
-            <a:off x="6208776" y="2086984"/>
-            <a:ext cx="310896" cy="239896"/>
+            <a:off x="6208776" y="2108499"/>
+            <a:ext cx="310896" cy="261411"/>
           </a:xfrm>
           <a:prstGeom prst="rect">
             <a:avLst/>
@@ -8878,8 +8878,8 @@
         </p:nvSpPr>
         <p:spPr>
           <a:xfrm>
-            <a:off x="6565392" y="2086984"/>
-            <a:ext cx="1920240" cy="239896"/>
+            <a:off x="6565392" y="2108499"/>
+            <a:ext cx="1920240" cy="261411"/>
           </a:xfrm>
           <a:prstGeom prst="rect">
             <a:avLst/>
@@ -8917,8 +8917,8 @@
         </p:nvSpPr>
         <p:spPr>
           <a:xfrm>
-            <a:off x="8558784" y="2146957"/>
-            <a:ext cx="1223403" cy="119948"/>
+            <a:off x="8558784" y="2173852"/>
+            <a:ext cx="1223403" cy="130705"/>
           </a:xfrm>
           <a:prstGeom prst="rect">
             <a:avLst/>
@@ -8937,8 +8937,8 @@
         </p:nvSpPr>
         <p:spPr>
           <a:xfrm>
-            <a:off x="10305288" y="2086984"/>
-            <a:ext cx="1143000" cy="239896"/>
+            <a:off x="10305288" y="2108499"/>
+            <a:ext cx="1143000" cy="261411"/>
           </a:xfrm>
           <a:prstGeom prst="rect">
             <a:avLst/>
@@ -8976,8 +8976,8 @@
         </p:nvSpPr>
         <p:spPr>
           <a:xfrm>
-            <a:off x="6208776" y="2326879"/>
-            <a:ext cx="310896" cy="239896"/>
+            <a:off x="6208776" y="2369910"/>
+            <a:ext cx="310896" cy="261411"/>
           </a:xfrm>
           <a:prstGeom prst="rect">
             <a:avLst/>
@@ -9015,8 +9015,8 @@
         </p:nvSpPr>
         <p:spPr>
           <a:xfrm>
-            <a:off x="6565392" y="2326879"/>
-            <a:ext cx="1920240" cy="239896"/>
+            <a:off x="6565392" y="2369910"/>
+            <a:ext cx="1920240" cy="261411"/>
           </a:xfrm>
           <a:prstGeom prst="rect">
             <a:avLst/>
@@ -9054,8 +9054,8 @@
         </p:nvSpPr>
         <p:spPr>
           <a:xfrm>
-            <a:off x="8558784" y="2386853"/>
-            <a:ext cx="1215016" cy="119948"/>
+            <a:off x="8558784" y="2435262"/>
+            <a:ext cx="1215016" cy="130705"/>
           </a:xfrm>
           <a:prstGeom prst="rect">
             <a:avLst/>
@@ -9074,8 +9074,8 @@
         </p:nvSpPr>
         <p:spPr>
           <a:xfrm>
-            <a:off x="10305288" y="2326879"/>
-            <a:ext cx="1143000" cy="239896"/>
+            <a:off x="10305288" y="2369910"/>
+            <a:ext cx="1143000" cy="261411"/>
           </a:xfrm>
           <a:prstGeom prst="rect">
             <a:avLst/>
@@ -9113,8 +9113,8 @@
         </p:nvSpPr>
         <p:spPr>
           <a:xfrm>
-            <a:off x="6208776" y="2566775"/>
-            <a:ext cx="310896" cy="239896"/>
+            <a:off x="6208776" y="2631320"/>
+            <a:ext cx="310896" cy="261411"/>
           </a:xfrm>
           <a:prstGeom prst="rect">
             <a:avLst/>
@@ -9152,8 +9152,8 @@
         </p:nvSpPr>
         <p:spPr>
           <a:xfrm>
-            <a:off x="6565392" y="2566775"/>
-            <a:ext cx="1920240" cy="239896"/>
+            <a:off x="6565392" y="2631320"/>
+            <a:ext cx="1920240" cy="261411"/>
           </a:xfrm>
           <a:prstGeom prst="rect">
             <a:avLst/>
@@ -9191,8 +9191,8 @@
         </p:nvSpPr>
         <p:spPr>
           <a:xfrm>
-            <a:off x="8558784" y="2626748"/>
-            <a:ext cx="1209791" cy="119948"/>
+            <a:off x="8558784" y="2696673"/>
+            <a:ext cx="1209791" cy="130705"/>
           </a:xfrm>
           <a:prstGeom prst="rect">
             <a:avLst/>
@@ -9211,8 +9211,8 @@
         </p:nvSpPr>
         <p:spPr>
           <a:xfrm>
-            <a:off x="10305288" y="2566775"/>
-            <a:ext cx="1143000" cy="239896"/>
+            <a:off x="10305288" y="2631320"/>
+            <a:ext cx="1143000" cy="261411"/>
           </a:xfrm>
           <a:prstGeom prst="rect">
             <a:avLst/>
@@ -9250,8 +9250,8 @@
         </p:nvSpPr>
         <p:spPr>
           <a:xfrm>
-            <a:off x="6208776" y="2806670"/>
-            <a:ext cx="310896" cy="239896"/>
+            <a:off x="6208776" y="2892731"/>
+            <a:ext cx="310896" cy="261411"/>
           </a:xfrm>
           <a:prstGeom prst="rect">
             <a:avLst/>
@@ -9289,8 +9289,8 @@
         </p:nvSpPr>
         <p:spPr>
           <a:xfrm>
-            <a:off x="6565392" y="2806670"/>
-            <a:ext cx="1920240" cy="239896"/>
+            <a:off x="6565392" y="2892731"/>
+            <a:ext cx="1920240" cy="261411"/>
           </a:xfrm>
           <a:prstGeom prst="rect">
             <a:avLst/>
@@ -9328,8 +9328,8 @@
         </p:nvSpPr>
         <p:spPr>
           <a:xfrm>
-            <a:off x="8558784" y="2866644"/>
-            <a:ext cx="1201696" cy="119948"/>
+            <a:off x="8558784" y="2958084"/>
+            <a:ext cx="1201696" cy="130705"/>
           </a:xfrm>
           <a:prstGeom prst="rect">
             <a:avLst/>
@@ -9348,8 +9348,8 @@
         </p:nvSpPr>
         <p:spPr>
           <a:xfrm>
-            <a:off x="10305288" y="2806670"/>
-            <a:ext cx="1143000" cy="239896"/>
+            <a:off x="10305288" y="2892731"/>
+            <a:ext cx="1143000" cy="261411"/>
           </a:xfrm>
           <a:prstGeom prst="rect">
             <a:avLst/>
@@ -9387,8 +9387,8 @@
         </p:nvSpPr>
         <p:spPr>
           <a:xfrm>
-            <a:off x="6208776" y="3046566"/>
-            <a:ext cx="310896" cy="239896"/>
+            <a:off x="6208776" y="3154142"/>
+            <a:ext cx="310896" cy="261411"/>
           </a:xfrm>
           <a:prstGeom prst="rect">
             <a:avLst/>
@@ -9426,8 +9426,8 @@
         </p:nvSpPr>
         <p:spPr>
           <a:xfrm>
-            <a:off x="6565392" y="3046566"/>
-            <a:ext cx="1920240" cy="239896"/>
+            <a:off x="6565392" y="3154142"/>
+            <a:ext cx="1920240" cy="261411"/>
           </a:xfrm>
           <a:prstGeom prst="rect">
             <a:avLst/>
@@ -9465,8 +9465,8 @@
         </p:nvSpPr>
         <p:spPr>
           <a:xfrm>
-            <a:off x="8558784" y="3106540"/>
-            <a:ext cx="1189467" cy="119948"/>
+            <a:off x="8558784" y="3219495"/>
+            <a:ext cx="1189467" cy="130705"/>
           </a:xfrm>
           <a:prstGeom prst="rect">
             <a:avLst/>
@@ -9485,8 +9485,8 @@
         </p:nvSpPr>
         <p:spPr>
           <a:xfrm>
-            <a:off x="10305288" y="3046566"/>
-            <a:ext cx="1143000" cy="239896"/>
+            <a:off x="10305288" y="3154142"/>
+            <a:ext cx="1143000" cy="261411"/>
           </a:xfrm>
           <a:prstGeom prst="rect">
             <a:avLst/>
@@ -9524,8 +9524,8 @@
         </p:nvSpPr>
         <p:spPr>
           <a:xfrm>
-            <a:off x="6208776" y="3286461"/>
-            <a:ext cx="310896" cy="239896"/>
+            <a:off x="6208776" y="3415553"/>
+            <a:ext cx="310896" cy="261411"/>
           </a:xfrm>
           <a:prstGeom prst="rect">
             <a:avLst/>
@@ -9563,8 +9563,8 @@
         </p:nvSpPr>
         <p:spPr>
           <a:xfrm>
-            <a:off x="6565392" y="3286461"/>
-            <a:ext cx="1920240" cy="239896"/>
+            <a:off x="6565392" y="3415553"/>
+            <a:ext cx="1920240" cy="261411"/>
           </a:xfrm>
           <a:prstGeom prst="rect">
             <a:avLst/>
@@ -9602,8 +9602,8 @@
         </p:nvSpPr>
         <p:spPr>
           <a:xfrm>
-            <a:off x="8558784" y="3346435"/>
-            <a:ext cx="1139224" cy="119948"/>
+            <a:off x="8558784" y="3480906"/>
+            <a:ext cx="1139224" cy="130705"/>
           </a:xfrm>
           <a:prstGeom prst="rect">
             <a:avLst/>
@@ -9622,8 +9622,8 @@
         </p:nvSpPr>
         <p:spPr>
           <a:xfrm>
-            <a:off x="10305288" y="3286461"/>
-            <a:ext cx="1143000" cy="239896"/>
+            <a:off x="10305288" y="3415553"/>
+            <a:ext cx="1143000" cy="261411"/>
           </a:xfrm>
           <a:prstGeom prst="rect">
             <a:avLst/>
@@ -9661,8 +9661,8 @@
         </p:nvSpPr>
         <p:spPr>
           <a:xfrm>
-            <a:off x="6208776" y="3526357"/>
-            <a:ext cx="310896" cy="239896"/>
+            <a:off x="6208776" y="3676964"/>
+            <a:ext cx="310896" cy="261411"/>
           </a:xfrm>
           <a:prstGeom prst="rect">
             <a:avLst/>
@@ -9700,8 +9700,8 @@
         </p:nvSpPr>
         <p:spPr>
           <a:xfrm>
-            <a:off x="6565392" y="3526357"/>
-            <a:ext cx="1920240" cy="239896"/>
+            <a:off x="6565392" y="3676964"/>
+            <a:ext cx="1920240" cy="261411"/>
           </a:xfrm>
           <a:prstGeom prst="rect">
             <a:avLst/>
@@ -9739,8 +9739,8 @@
         </p:nvSpPr>
         <p:spPr>
           <a:xfrm>
-            <a:off x="8558784" y="3586331"/>
-            <a:ext cx="1119486" cy="119948"/>
+            <a:off x="8558784" y="3742316"/>
+            <a:ext cx="1119486" cy="130705"/>
           </a:xfrm>
           <a:prstGeom prst="rect">
             <a:avLst/>
@@ -9759,8 +9759,8 @@
         </p:nvSpPr>
         <p:spPr>
           <a:xfrm>
-            <a:off x="10305288" y="3526357"/>
-            <a:ext cx="1143000" cy="239896"/>
+            <a:off x="10305288" y="3676964"/>
+            <a:ext cx="1143000" cy="261411"/>
           </a:xfrm>
           <a:prstGeom prst="rect">
             <a:avLst/>
@@ -9798,8 +9798,8 @@
         </p:nvSpPr>
         <p:spPr>
           <a:xfrm>
-            <a:off x="6208776" y="3766252"/>
-            <a:ext cx="310896" cy="239896"/>
+            <a:off x="6208776" y="3938375"/>
+            <a:ext cx="310896" cy="261411"/>
           </a:xfrm>
           <a:prstGeom prst="rect">
             <a:avLst/>
@@ -9837,8 +9837,8 @@
         </p:nvSpPr>
         <p:spPr>
           <a:xfrm>
-            <a:off x="6565392" y="3766252"/>
-            <a:ext cx="1920240" cy="239896"/>
+            <a:off x="6565392" y="3938375"/>
+            <a:ext cx="1920240" cy="261411"/>
           </a:xfrm>
           <a:prstGeom prst="rect">
             <a:avLst/>
@@ -9876,8 +9876,8 @@
         </p:nvSpPr>
         <p:spPr>
           <a:xfrm>
-            <a:off x="8558784" y="3826226"/>
-            <a:ext cx="1061761" cy="119948"/>
+            <a:off x="8558784" y="4003727"/>
+            <a:ext cx="1061761" cy="130705"/>
           </a:xfrm>
           <a:prstGeom prst="rect">
             <a:avLst/>
@@ -9896,8 +9896,8 @@
         </p:nvSpPr>
         <p:spPr>
           <a:xfrm>
-            <a:off x="10305288" y="3766252"/>
-            <a:ext cx="1143000" cy="239896"/>
+            <a:off x="10305288" y="3938375"/>
+            <a:ext cx="1143000" cy="261411"/>
           </a:xfrm>
           <a:prstGeom prst="rect">
             <a:avLst/>
@@ -9935,8 +9935,8 @@
         </p:nvSpPr>
         <p:spPr>
           <a:xfrm>
-            <a:off x="6208776" y="4006148"/>
-            <a:ext cx="310896" cy="239896"/>
+            <a:off x="6208776" y="4199785"/>
+            <a:ext cx="310896" cy="261411"/>
           </a:xfrm>
           <a:prstGeom prst="rect">
             <a:avLst/>
@@ -9974,8 +9974,8 @@
         </p:nvSpPr>
         <p:spPr>
           <a:xfrm>
-            <a:off x="6565392" y="4006148"/>
-            <a:ext cx="1920240" cy="239896"/>
+            <a:off x="6565392" y="4199785"/>
+            <a:ext cx="1920240" cy="261411"/>
           </a:xfrm>
           <a:prstGeom prst="rect">
             <a:avLst/>
@@ -10013,8 +10013,8 @@
         </p:nvSpPr>
         <p:spPr>
           <a:xfrm>
-            <a:off x="8558784" y="4066122"/>
-            <a:ext cx="1054105" cy="119948"/>
+            <a:off x="8558784" y="4265138"/>
+            <a:ext cx="1054105" cy="130705"/>
           </a:xfrm>
           <a:prstGeom prst="rect">
             <a:avLst/>
@@ -10033,8 +10033,8 @@
         </p:nvSpPr>
         <p:spPr>
           <a:xfrm>
-            <a:off x="10305288" y="4006148"/>
-            <a:ext cx="1143000" cy="239896"/>
+            <a:off x="10305288" y="4199785"/>
+            <a:ext cx="1143000" cy="261411"/>
           </a:xfrm>
           <a:prstGeom prst="rect">
             <a:avLst/>
@@ -10072,8 +10072,8 @@
         </p:nvSpPr>
         <p:spPr>
           <a:xfrm>
-            <a:off x="6208776" y="4246043"/>
-            <a:ext cx="310896" cy="239896"/>
+            <a:off x="6208776" y="4461196"/>
+            <a:ext cx="310896" cy="261411"/>
           </a:xfrm>
           <a:prstGeom prst="rect">
             <a:avLst/>
@@ -10111,8 +10111,8 @@
         </p:nvSpPr>
         <p:spPr>
           <a:xfrm>
-            <a:off x="6565392" y="4246043"/>
-            <a:ext cx="1920240" cy="239896"/>
+            <a:off x="6565392" y="4461196"/>
+            <a:ext cx="1920240" cy="261411"/>
           </a:xfrm>
           <a:prstGeom prst="rect">
             <a:avLst/>
@@ -10150,8 +10150,8 @@
         </p:nvSpPr>
         <p:spPr>
           <a:xfrm>
-            <a:off x="8558784" y="4306017"/>
-            <a:ext cx="1020574" cy="119948"/>
+            <a:off x="8558784" y="4526549"/>
+            <a:ext cx="1020574" cy="130705"/>
           </a:xfrm>
           <a:prstGeom prst="rect">
             <a:avLst/>
@@ -10170,8 +10170,8 @@
         </p:nvSpPr>
         <p:spPr>
           <a:xfrm>
-            <a:off x="10305288" y="4246043"/>
-            <a:ext cx="1143000" cy="239896"/>
+            <a:off x="10305288" y="4461196"/>
+            <a:ext cx="1143000" cy="261411"/>
           </a:xfrm>
           <a:prstGeom prst="rect">
             <a:avLst/>
@@ -10209,8 +10209,8 @@
         </p:nvSpPr>
         <p:spPr>
           <a:xfrm>
-            <a:off x="6208776" y="4485939"/>
-            <a:ext cx="310896" cy="239896"/>
+            <a:off x="6208776" y="4722607"/>
+            <a:ext cx="310896" cy="261411"/>
           </a:xfrm>
           <a:prstGeom prst="rect">
             <a:avLst/>
@@ -10248,8 +10248,8 @@
         </p:nvSpPr>
         <p:spPr>
           <a:xfrm>
-            <a:off x="6565392" y="4485939"/>
-            <a:ext cx="1920240" cy="239896"/>
+            <a:off x="6565392" y="4722607"/>
+            <a:ext cx="1920240" cy="261411"/>
           </a:xfrm>
           <a:prstGeom prst="rect">
             <a:avLst/>
@@ -10287,8 +10287,8 @@
         </p:nvSpPr>
         <p:spPr>
           <a:xfrm>
-            <a:off x="8558784" y="4545913"/>
-            <a:ext cx="951834" cy="119948"/>
+            <a:off x="8558784" y="4787960"/>
+            <a:ext cx="951834" cy="130705"/>
           </a:xfrm>
           <a:prstGeom prst="rect">
             <a:avLst/>
@@ -10307,8 +10307,8 @@
         </p:nvSpPr>
         <p:spPr>
           <a:xfrm>
-            <a:off x="10305288" y="4485939"/>
-            <a:ext cx="1143000" cy="239896"/>
+            <a:off x="10305288" y="4722607"/>
+            <a:ext cx="1143000" cy="261411"/>
           </a:xfrm>
           <a:prstGeom prst="rect">
             <a:avLst/>
@@ -10346,8 +10346,8 @@
         </p:nvSpPr>
         <p:spPr>
           <a:xfrm>
-            <a:off x="6208776" y="4725834"/>
-            <a:ext cx="310896" cy="239896"/>
+            <a:off x="6208776" y="4984018"/>
+            <a:ext cx="310896" cy="261411"/>
           </a:xfrm>
           <a:prstGeom prst="rect">
             <a:avLst/>
@@ -10385,8 +10385,8 @@
         </p:nvSpPr>
         <p:spPr>
           <a:xfrm>
-            <a:off x="6565392" y="4725834"/>
-            <a:ext cx="1920240" cy="239896"/>
+            <a:off x="6565392" y="4984018"/>
+            <a:ext cx="1920240" cy="261411"/>
           </a:xfrm>
           <a:prstGeom prst="rect">
             <a:avLst/>
@@ -10424,8 +10424,8 @@
         </p:nvSpPr>
         <p:spPr>
           <a:xfrm>
-            <a:off x="8558784" y="4785808"/>
-            <a:ext cx="942987" cy="119948"/>
+            <a:off x="8558784" y="5049371"/>
+            <a:ext cx="942987" cy="130705"/>
           </a:xfrm>
           <a:prstGeom prst="rect">
             <a:avLst/>
@@ -10444,8 +10444,8 @@
         </p:nvSpPr>
         <p:spPr>
           <a:xfrm>
-            <a:off x="10305288" y="4725834"/>
-            <a:ext cx="1143000" cy="239896"/>
+            <a:off x="10305288" y="4984018"/>
+            <a:ext cx="1143000" cy="261411"/>
           </a:xfrm>
           <a:prstGeom prst="rect">
             <a:avLst/>
@@ -10483,8 +10483,8 @@
         </p:nvSpPr>
         <p:spPr>
           <a:xfrm>
-            <a:off x="6208776" y="4965730"/>
-            <a:ext cx="310896" cy="239896"/>
+            <a:off x="6208776" y="5245429"/>
+            <a:ext cx="310896" cy="261411"/>
           </a:xfrm>
           <a:prstGeom prst="rect">
             <a:avLst/>
@@ -10522,8 +10522,8 @@
         </p:nvSpPr>
         <p:spPr>
           <a:xfrm>
-            <a:off x="6565392" y="4965730"/>
-            <a:ext cx="1920240" cy="239896"/>
+            <a:off x="6565392" y="5245429"/>
+            <a:ext cx="1920240" cy="261411"/>
           </a:xfrm>
           <a:prstGeom prst="rect">
             <a:avLst/>
@@ -10561,8 +10561,8 @@
         </p:nvSpPr>
         <p:spPr>
           <a:xfrm>
-            <a:off x="8558784" y="5025704"/>
-            <a:ext cx="887722" cy="119948"/>
+            <a:off x="8558784" y="5310781"/>
+            <a:ext cx="887722" cy="130705"/>
           </a:xfrm>
           <a:prstGeom prst="rect">
             <a:avLst/>
@@ -10581,8 +10581,8 @@
         </p:nvSpPr>
         <p:spPr>
           <a:xfrm>
-            <a:off x="10305288" y="4965730"/>
-            <a:ext cx="1143000" cy="239896"/>
+            <a:off x="10305288" y="5245429"/>
+            <a:ext cx="1143000" cy="261411"/>
           </a:xfrm>
           <a:prstGeom prst="rect">
             <a:avLst/>
@@ -10620,8 +10620,8 @@
         </p:nvSpPr>
         <p:spPr>
           <a:xfrm>
-            <a:off x="6208776" y="5205625"/>
-            <a:ext cx="310896" cy="239896"/>
+            <a:off x="6208776" y="5506840"/>
+            <a:ext cx="310896" cy="261411"/>
           </a:xfrm>
           <a:prstGeom prst="rect">
             <a:avLst/>
@@ -10659,8 +10659,8 @@
         </p:nvSpPr>
         <p:spPr>
           <a:xfrm>
-            <a:off x="6565392" y="5205625"/>
-            <a:ext cx="1920240" cy="239896"/>
+            <a:off x="6565392" y="5506840"/>
+            <a:ext cx="1920240" cy="261411"/>
           </a:xfrm>
           <a:prstGeom prst="rect">
             <a:avLst/>
@@ -10698,8 +10698,8 @@
         </p:nvSpPr>
         <p:spPr>
           <a:xfrm>
-            <a:off x="8558784" y="5265599"/>
-            <a:ext cx="837155" cy="119948"/>
+            <a:off x="8558784" y="5572192"/>
+            <a:ext cx="837155" cy="130705"/>
           </a:xfrm>
           <a:prstGeom prst="rect">
             <a:avLst/>
@@ -10718,8 +10718,8 @@
         </p:nvSpPr>
         <p:spPr>
           <a:xfrm>
-            <a:off x="10305288" y="5205625"/>
-            <a:ext cx="1143000" cy="239896"/>
+            <a:off x="10305288" y="5506840"/>
+            <a:ext cx="1143000" cy="261411"/>
           </a:xfrm>
           <a:prstGeom prst="rect">
             <a:avLst/>
@@ -10757,8 +10757,8 @@
         </p:nvSpPr>
         <p:spPr>
           <a:xfrm>
-            <a:off x="6208776" y="5445521"/>
-            <a:ext cx="310896" cy="239896"/>
+            <a:off x="6208776" y="5768250"/>
+            <a:ext cx="310896" cy="261411"/>
           </a:xfrm>
           <a:prstGeom prst="rect">
             <a:avLst/>
@@ -10796,8 +10796,8 @@
         </p:nvSpPr>
         <p:spPr>
           <a:xfrm>
-            <a:off x="6565392" y="5445521"/>
-            <a:ext cx="1920240" cy="239896"/>
+            <a:off x="6565392" y="5768250"/>
+            <a:ext cx="1920240" cy="261411"/>
           </a:xfrm>
           <a:prstGeom prst="rect">
             <a:avLst/>
@@ -10835,8 +10835,8 @@
         </p:nvSpPr>
         <p:spPr>
           <a:xfrm>
-            <a:off x="8558784" y="5505495"/>
-            <a:ext cx="414285" cy="119948"/>
+            <a:off x="8558784" y="5833603"/>
+            <a:ext cx="414285" cy="130705"/>
           </a:xfrm>
           <a:prstGeom prst="rect">
             <a:avLst/>
@@ -10855,8 +10855,8 @@
         </p:nvSpPr>
         <p:spPr>
           <a:xfrm>
-            <a:off x="10305288" y="5445521"/>
-            <a:ext cx="1143000" cy="239896"/>
+            <a:off x="10305288" y="5768250"/>
+            <a:ext cx="1143000" cy="261411"/>
           </a:xfrm>
           <a:prstGeom prst="rect">
             <a:avLst/>
@@ -10895,7 +10895,7 @@
         <p:spPr>
           <a:xfrm>
             <a:off x="4326190" y="1847088"/>
-            <a:ext cx="14630" cy="4078224"/>
+            <a:ext cx="14630" cy="4443984"/>
           </a:xfrm>
           <a:prstGeom prst="rect">
             <a:avLst/>
@@ -10915,7 +10915,7 @@
         <p:spPr>
           <a:xfrm>
             <a:off x="9876598" y="1847088"/>
-            <a:ext cx="14630" cy="4078224"/>
+            <a:ext cx="14630" cy="4443984"/>
           </a:xfrm>
           <a:prstGeom prst="rect">
             <a:avLst/>
@@ -10935,7 +10935,7 @@
         <p:spPr>
           <a:xfrm>
             <a:off x="6085332" y="1847088"/>
-            <a:ext cx="10973" cy="4078224"/>
+            <a:ext cx="10973" cy="4443984"/>
           </a:xfrm>
           <a:prstGeom prst="rect">
             <a:avLst/>
@@ -10945,65 +10945,6 @@
           </a:solidFill>
           <a:ln/>
         </p:spPr>
-      </p:sp>
-      <p:sp>
-        <p:nvSpPr>
-          <p:cNvPr id="146" name="Shape 144"/>
-          <p:cNvSpPr/>
-          <p:nvPr/>
-        </p:nvSpPr>
-        <p:spPr>
-          <a:xfrm>
-            <a:off x="457200" y="6126480"/>
-            <a:ext cx="11274552" cy="348996"/>
-          </a:xfrm>
-          <a:prstGeom prst="rect">
-            <a:avLst/>
-          </a:prstGeom>
-          <a:solidFill>
-            <a:srgbClr val="EDF4FA"/>
-          </a:solidFill>
-          <a:ln/>
-        </p:spPr>
-      </p:sp>
-      <p:sp>
-        <p:nvSpPr>
-          <p:cNvPr id="147" name="Text 145"/>
-          <p:cNvSpPr txBox="1"/>
-          <p:nvPr/>
-        </p:nvSpPr>
-        <p:spPr>
-          <a:xfrm>
-            <a:off x="658368" y="6144768"/>
-            <a:ext cx="10927080" cy="312420"/>
-          </a:xfrm>
-          <a:prstGeom prst="rect">
-            <a:avLst/>
-          </a:prstGeom>
-          <a:noFill/>
-          <a:ln/>
-        </p:spPr>
-        <p:txBody>
-          <a:bodyPr wrap="square" lIns="0" tIns="0" rIns="0" bIns="0" rtlCol="0" anchor="ctr"/>
-          <a:lstStyle/>
-          <a:p>
-            <a:pPr indent="0" marL="0">
-              <a:buNone/>
-            </a:pPr>
-            <a:r>
-              <a:rPr lang="en-US" sz="1450" b="1" dirty="0">
-                <a:solidFill>
-                  <a:srgbClr val="0B2C4A"/>
-                </a:solidFill>
-                <a:latin typeface="Inter" pitchFamily="34" charset="0"/>
-                <a:ea typeface="Inter" pitchFamily="34" charset="-122"/>
-                <a:cs typeface="Inter" pitchFamily="34" charset="-120"/>
-              </a:rPr>
-              <a:t>16 of 33 stores at or above the 78.1% group, led by Honda Henderson at 85.9%. Audi Reno is lowest at 58.8%.</a:t>
-            </a:r>
-            <a:endParaRPr lang="en-US" sz="1450" dirty="0"/>
-          </a:p>
-        </p:txBody>
       </p:sp>
     </p:spTree>
   </p:cSld>
@@ -11144,7 +11085,7 @@
         <p:spPr>
           <a:xfrm>
             <a:off x="457200" y="1207008"/>
-            <a:ext cx="11274552" cy="4782312"/>
+            <a:ext cx="11274552" cy="5148072"/>
           </a:xfrm>
           <a:prstGeom prst="rect">
             <a:avLst/>
@@ -11321,7 +11262,7 @@
         <p:spPr>
           <a:xfrm>
             <a:off x="658368" y="1847088"/>
-            <a:ext cx="310896" cy="239896"/>
+            <a:ext cx="310896" cy="261411"/>
           </a:xfrm>
           <a:prstGeom prst="rect">
             <a:avLst/>
@@ -11360,7 +11301,7 @@
         <p:spPr>
           <a:xfrm>
             <a:off x="1014984" y="1847088"/>
-            <a:ext cx="1920240" cy="239896"/>
+            <a:ext cx="1920240" cy="261411"/>
           </a:xfrm>
           <a:prstGeom prst="rect">
             <a:avLst/>
@@ -11398,8 +11339,8 @@
         </p:nvSpPr>
         <p:spPr>
           <a:xfrm>
-            <a:off x="3785616" y="1911860"/>
-            <a:ext cx="495495" cy="110352"/>
+            <a:off x="3785616" y="1917669"/>
+            <a:ext cx="495495" cy="120249"/>
           </a:xfrm>
           <a:prstGeom prst="rect">
             <a:avLst/>
@@ -11419,7 +11360,7 @@
         <p:spPr>
           <a:xfrm>
             <a:off x="4617720" y="1847088"/>
-            <a:ext cx="1234440" cy="239896"/>
+            <a:ext cx="1234440" cy="261411"/>
           </a:xfrm>
           <a:prstGeom prst="rect">
             <a:avLst/>
@@ -11457,8 +11398,8 @@
         </p:nvSpPr>
         <p:spPr>
           <a:xfrm>
-            <a:off x="658368" y="2086984"/>
-            <a:ext cx="310896" cy="239896"/>
+            <a:off x="658368" y="2108499"/>
+            <a:ext cx="310896" cy="261411"/>
           </a:xfrm>
           <a:prstGeom prst="rect">
             <a:avLst/>
@@ -11496,8 +11437,8 @@
         </p:nvSpPr>
         <p:spPr>
           <a:xfrm>
-            <a:off x="1014984" y="2086984"/>
-            <a:ext cx="1920240" cy="239896"/>
+            <a:off x="1014984" y="2108499"/>
+            <a:ext cx="1920240" cy="261411"/>
           </a:xfrm>
           <a:prstGeom prst="rect">
             <a:avLst/>
@@ -11535,8 +11476,8 @@
         </p:nvSpPr>
         <p:spPr>
           <a:xfrm>
-            <a:off x="3785616" y="2151755"/>
-            <a:ext cx="322622" cy="110352"/>
+            <a:off x="3785616" y="2179080"/>
+            <a:ext cx="322622" cy="120249"/>
           </a:xfrm>
           <a:prstGeom prst="rect">
             <a:avLst/>
@@ -11555,8 +11496,8 @@
         </p:nvSpPr>
         <p:spPr>
           <a:xfrm>
-            <a:off x="4617720" y="2086984"/>
-            <a:ext cx="1234440" cy="239896"/>
+            <a:off x="4617720" y="2108499"/>
+            <a:ext cx="1234440" cy="261411"/>
           </a:xfrm>
           <a:prstGeom prst="rect">
             <a:avLst/>
@@ -11594,8 +11535,8 @@
         </p:nvSpPr>
         <p:spPr>
           <a:xfrm>
-            <a:off x="658368" y="2326879"/>
-            <a:ext cx="310896" cy="239896"/>
+            <a:off x="658368" y="2369910"/>
+            <a:ext cx="310896" cy="261411"/>
           </a:xfrm>
           <a:prstGeom prst="rect">
             <a:avLst/>
@@ -11633,8 +11574,8 @@
         </p:nvSpPr>
         <p:spPr>
           <a:xfrm>
-            <a:off x="1014984" y="2326879"/>
-            <a:ext cx="1920240" cy="239896"/>
+            <a:off x="1014984" y="2369910"/>
+            <a:ext cx="1920240" cy="261411"/>
           </a:xfrm>
           <a:prstGeom prst="rect">
             <a:avLst/>
@@ -11672,8 +11613,8 @@
         </p:nvSpPr>
         <p:spPr>
           <a:xfrm>
-            <a:off x="3785616" y="2391651"/>
-            <a:ext cx="303335" cy="110352"/>
+            <a:off x="3785616" y="2440491"/>
+            <a:ext cx="303335" cy="120249"/>
           </a:xfrm>
           <a:prstGeom prst="rect">
             <a:avLst/>
@@ -11692,8 +11633,8 @@
         </p:nvSpPr>
         <p:spPr>
           <a:xfrm>
-            <a:off x="4617720" y="2326879"/>
-            <a:ext cx="1234440" cy="239896"/>
+            <a:off x="4617720" y="2369910"/>
+            <a:ext cx="1234440" cy="261411"/>
           </a:xfrm>
           <a:prstGeom prst="rect">
             <a:avLst/>
@@ -11731,8 +11672,8 @@
         </p:nvSpPr>
         <p:spPr>
           <a:xfrm>
-            <a:off x="658368" y="2566775"/>
-            <a:ext cx="310896" cy="239896"/>
+            <a:off x="658368" y="2631320"/>
+            <a:ext cx="310896" cy="261411"/>
           </a:xfrm>
           <a:prstGeom prst="rect">
             <a:avLst/>
@@ -11770,8 +11711,8 @@
         </p:nvSpPr>
         <p:spPr>
           <a:xfrm>
-            <a:off x="1014984" y="2566775"/>
-            <a:ext cx="1920240" cy="239896"/>
+            <a:off x="1014984" y="2631320"/>
+            <a:ext cx="1920240" cy="261411"/>
           </a:xfrm>
           <a:prstGeom prst="rect">
             <a:avLst/>
@@ -11809,8 +11750,8 @@
         </p:nvSpPr>
         <p:spPr>
           <a:xfrm>
-            <a:off x="3785616" y="2631546"/>
-            <a:ext cx="263778" cy="110352"/>
+            <a:off x="3785616" y="2701901"/>
+            <a:ext cx="263778" cy="120249"/>
           </a:xfrm>
           <a:prstGeom prst="rect">
             <a:avLst/>
@@ -11829,8 +11770,8 @@
         </p:nvSpPr>
         <p:spPr>
           <a:xfrm>
-            <a:off x="4617720" y="2566775"/>
-            <a:ext cx="1234440" cy="239896"/>
+            <a:off x="4617720" y="2631320"/>
+            <a:ext cx="1234440" cy="261411"/>
           </a:xfrm>
           <a:prstGeom prst="rect">
             <a:avLst/>
@@ -11868,8 +11809,8 @@
         </p:nvSpPr>
         <p:spPr>
           <a:xfrm>
-            <a:off x="658368" y="2806670"/>
-            <a:ext cx="310896" cy="239896"/>
+            <a:off x="658368" y="2892731"/>
+            <a:ext cx="310896" cy="261411"/>
           </a:xfrm>
           <a:prstGeom prst="rect">
             <a:avLst/>
@@ -11907,8 +11848,8 @@
         </p:nvSpPr>
         <p:spPr>
           <a:xfrm>
-            <a:off x="1014984" y="2806670"/>
-            <a:ext cx="1920240" cy="239896"/>
+            <a:off x="1014984" y="2892731"/>
+            <a:ext cx="1920240" cy="261411"/>
           </a:xfrm>
           <a:prstGeom prst="rect">
             <a:avLst/>
@@ -11946,8 +11887,8 @@
         </p:nvSpPr>
         <p:spPr>
           <a:xfrm>
-            <a:off x="3785616" y="2871442"/>
-            <a:ext cx="214318" cy="110352"/>
+            <a:off x="3785616" y="2963312"/>
+            <a:ext cx="214318" cy="120249"/>
           </a:xfrm>
           <a:prstGeom prst="rect">
             <a:avLst/>
@@ -11966,8 +11907,8 @@
         </p:nvSpPr>
         <p:spPr>
           <a:xfrm>
-            <a:off x="4617720" y="2806670"/>
-            <a:ext cx="1234440" cy="239896"/>
+            <a:off x="4617720" y="2892731"/>
+            <a:ext cx="1234440" cy="261411"/>
           </a:xfrm>
           <a:prstGeom prst="rect">
             <a:avLst/>
@@ -12005,8 +11946,8 @@
         </p:nvSpPr>
         <p:spPr>
           <a:xfrm>
-            <a:off x="658368" y="3046566"/>
-            <a:ext cx="310896" cy="239896"/>
+            <a:off x="658368" y="3154142"/>
+            <a:ext cx="310896" cy="261411"/>
           </a:xfrm>
           <a:prstGeom prst="rect">
             <a:avLst/>
@@ -12044,8 +11985,8 @@
         </p:nvSpPr>
         <p:spPr>
           <a:xfrm>
-            <a:off x="1014984" y="3046566"/>
-            <a:ext cx="1920240" cy="239896"/>
+            <a:off x="1014984" y="3154142"/>
+            <a:ext cx="1920240" cy="261411"/>
           </a:xfrm>
           <a:prstGeom prst="rect">
             <a:avLst/>
@@ -12083,8 +12024,8 @@
         </p:nvSpPr>
         <p:spPr>
           <a:xfrm>
-            <a:off x="3785616" y="3111337"/>
-            <a:ext cx="192096" cy="110352"/>
+            <a:off x="3785616" y="3224723"/>
+            <a:ext cx="192096" cy="120249"/>
           </a:xfrm>
           <a:prstGeom prst="rect">
             <a:avLst/>
@@ -12103,8 +12044,8 @@
         </p:nvSpPr>
         <p:spPr>
           <a:xfrm>
-            <a:off x="4617720" y="3046566"/>
-            <a:ext cx="1234440" cy="239896"/>
+            <a:off x="4617720" y="3154142"/>
+            <a:ext cx="1234440" cy="261411"/>
           </a:xfrm>
           <a:prstGeom prst="rect">
             <a:avLst/>
@@ -12142,8 +12083,8 @@
         </p:nvSpPr>
         <p:spPr>
           <a:xfrm>
-            <a:off x="658368" y="3286461"/>
-            <a:ext cx="310896" cy="239896"/>
+            <a:off x="658368" y="3415553"/>
+            <a:ext cx="310896" cy="261411"/>
           </a:xfrm>
           <a:prstGeom prst="rect">
             <a:avLst/>
@@ -12181,8 +12122,8 @@
         </p:nvSpPr>
         <p:spPr>
           <a:xfrm>
-            <a:off x="1014984" y="3286461"/>
-            <a:ext cx="1920240" cy="239896"/>
+            <a:off x="1014984" y="3415553"/>
+            <a:ext cx="1920240" cy="261411"/>
           </a:xfrm>
           <a:prstGeom prst="rect">
             <a:avLst/>
@@ -12220,8 +12161,8 @@
         </p:nvSpPr>
         <p:spPr>
           <a:xfrm>
-            <a:off x="3785616" y="3351233"/>
-            <a:ext cx="188815" cy="110352"/>
+            <a:off x="3785616" y="3486134"/>
+            <a:ext cx="188815" cy="120249"/>
           </a:xfrm>
           <a:prstGeom prst="rect">
             <a:avLst/>
@@ -12240,8 +12181,8 @@
         </p:nvSpPr>
         <p:spPr>
           <a:xfrm>
-            <a:off x="4617720" y="3286461"/>
-            <a:ext cx="1234440" cy="239896"/>
+            <a:off x="4617720" y="3415553"/>
+            <a:ext cx="1234440" cy="261411"/>
           </a:xfrm>
           <a:prstGeom prst="rect">
             <a:avLst/>
@@ -12279,8 +12220,8 @@
         </p:nvSpPr>
         <p:spPr>
           <a:xfrm>
-            <a:off x="658368" y="3526357"/>
-            <a:ext cx="310896" cy="239896"/>
+            <a:off x="658368" y="3676964"/>
+            <a:ext cx="310896" cy="261411"/>
           </a:xfrm>
           <a:prstGeom prst="rect">
             <a:avLst/>
@@ -12318,8 +12259,8 @@
         </p:nvSpPr>
         <p:spPr>
           <a:xfrm>
-            <a:off x="1014984" y="3526357"/>
-            <a:ext cx="1920240" cy="239896"/>
+            <a:off x="1014984" y="3676964"/>
+            <a:ext cx="1920240" cy="261411"/>
           </a:xfrm>
           <a:prstGeom prst="rect">
             <a:avLst/>
@@ -12357,8 +12298,8 @@
         </p:nvSpPr>
         <p:spPr>
           <a:xfrm>
-            <a:off x="3785616" y="3591128"/>
-            <a:ext cx="160577" cy="110352"/>
+            <a:off x="3785616" y="3747545"/>
+            <a:ext cx="160577" cy="120249"/>
           </a:xfrm>
           <a:prstGeom prst="rect">
             <a:avLst/>
@@ -12377,8 +12318,8 @@
         </p:nvSpPr>
         <p:spPr>
           <a:xfrm>
-            <a:off x="4617720" y="3526357"/>
-            <a:ext cx="1234440" cy="239896"/>
+            <a:off x="4617720" y="3676964"/>
+            <a:ext cx="1234440" cy="261411"/>
           </a:xfrm>
           <a:prstGeom prst="rect">
             <a:avLst/>
@@ -12416,8 +12357,8 @@
         </p:nvSpPr>
         <p:spPr>
           <a:xfrm>
-            <a:off x="658368" y="3766252"/>
-            <a:ext cx="310896" cy="239896"/>
+            <a:off x="658368" y="3938375"/>
+            <a:ext cx="310896" cy="261411"/>
           </a:xfrm>
           <a:prstGeom prst="rect">
             <a:avLst/>
@@ -12455,8 +12396,8 @@
         </p:nvSpPr>
         <p:spPr>
           <a:xfrm>
-            <a:off x="1014984" y="3766252"/>
-            <a:ext cx="1920240" cy="239896"/>
+            <a:off x="1014984" y="3938375"/>
+            <a:ext cx="1920240" cy="261411"/>
           </a:xfrm>
           <a:prstGeom prst="rect">
             <a:avLst/>
@@ -12494,8 +12435,8 @@
         </p:nvSpPr>
         <p:spPr>
           <a:xfrm>
-            <a:off x="3785616" y="3831024"/>
-            <a:ext cx="142780" cy="110352"/>
+            <a:off x="3785616" y="4008956"/>
+            <a:ext cx="142780" cy="120249"/>
           </a:xfrm>
           <a:prstGeom prst="rect">
             <a:avLst/>
@@ -12514,8 +12455,8 @@
         </p:nvSpPr>
         <p:spPr>
           <a:xfrm>
-            <a:off x="4617720" y="3766252"/>
-            <a:ext cx="1234440" cy="239896"/>
+            <a:off x="4617720" y="3938375"/>
+            <a:ext cx="1234440" cy="261411"/>
           </a:xfrm>
           <a:prstGeom prst="rect">
             <a:avLst/>
@@ -12553,8 +12494,8 @@
         </p:nvSpPr>
         <p:spPr>
           <a:xfrm>
-            <a:off x="658368" y="4006148"/>
-            <a:ext cx="310896" cy="239896"/>
+            <a:off x="658368" y="4199785"/>
+            <a:ext cx="310896" cy="261411"/>
           </a:xfrm>
           <a:prstGeom prst="rect">
             <a:avLst/>
@@ -12592,8 +12533,8 @@
         </p:nvSpPr>
         <p:spPr>
           <a:xfrm>
-            <a:off x="1014984" y="4006148"/>
-            <a:ext cx="1920240" cy="239896"/>
+            <a:off x="1014984" y="4199785"/>
+            <a:ext cx="1920240" cy="261411"/>
           </a:xfrm>
           <a:prstGeom prst="rect">
             <a:avLst/>
@@ -12631,8 +12572,8 @@
         </p:nvSpPr>
         <p:spPr>
           <a:xfrm>
-            <a:off x="3785616" y="4070920"/>
-            <a:ext cx="132169" cy="110352"/>
+            <a:off x="3785616" y="4270366"/>
+            <a:ext cx="132169" cy="120249"/>
           </a:xfrm>
           <a:prstGeom prst="rect">
             <a:avLst/>
@@ -12651,8 +12592,8 @@
         </p:nvSpPr>
         <p:spPr>
           <a:xfrm>
-            <a:off x="4617720" y="4006148"/>
-            <a:ext cx="1234440" cy="239896"/>
+            <a:off x="4617720" y="4199785"/>
+            <a:ext cx="1234440" cy="261411"/>
           </a:xfrm>
           <a:prstGeom prst="rect">
             <a:avLst/>
@@ -12690,8 +12631,8 @@
         </p:nvSpPr>
         <p:spPr>
           <a:xfrm>
-            <a:off x="658368" y="4246043"/>
-            <a:ext cx="310896" cy="239896"/>
+            <a:off x="658368" y="4461196"/>
+            <a:ext cx="310896" cy="261411"/>
           </a:xfrm>
           <a:prstGeom prst="rect">
             <a:avLst/>
@@ -12729,8 +12670,8 @@
         </p:nvSpPr>
         <p:spPr>
           <a:xfrm>
-            <a:off x="1014984" y="4246043"/>
-            <a:ext cx="1920240" cy="239896"/>
+            <a:off x="1014984" y="4461196"/>
+            <a:ext cx="1920240" cy="261411"/>
           </a:xfrm>
           <a:prstGeom prst="rect">
             <a:avLst/>
@@ -12768,8 +12709,8 @@
         </p:nvSpPr>
         <p:spPr>
           <a:xfrm>
-            <a:off x="3785616" y="4310815"/>
-            <a:ext cx="131489" cy="110352"/>
+            <a:off x="3785616" y="4531777"/>
+            <a:ext cx="131489" cy="120249"/>
           </a:xfrm>
           <a:prstGeom prst="rect">
             <a:avLst/>
@@ -12788,8 +12729,8 @@
         </p:nvSpPr>
         <p:spPr>
           <a:xfrm>
-            <a:off x="4617720" y="4246043"/>
-            <a:ext cx="1234440" cy="239896"/>
+            <a:off x="4617720" y="4461196"/>
+            <a:ext cx="1234440" cy="261411"/>
           </a:xfrm>
           <a:prstGeom prst="rect">
             <a:avLst/>
@@ -12827,8 +12768,8 @@
         </p:nvSpPr>
         <p:spPr>
           <a:xfrm>
-            <a:off x="658368" y="4485939"/>
-            <a:ext cx="310896" cy="239896"/>
+            <a:off x="658368" y="4722607"/>
+            <a:ext cx="310896" cy="261411"/>
           </a:xfrm>
           <a:prstGeom prst="rect">
             <a:avLst/>
@@ -12866,8 +12807,8 @@
         </p:nvSpPr>
         <p:spPr>
           <a:xfrm>
-            <a:off x="1014984" y="4485939"/>
-            <a:ext cx="1920240" cy="239896"/>
+            <a:off x="1014984" y="4722607"/>
+            <a:ext cx="1920240" cy="261411"/>
           </a:xfrm>
           <a:prstGeom prst="rect">
             <a:avLst/>
@@ -12905,8 +12846,8 @@
         </p:nvSpPr>
         <p:spPr>
           <a:xfrm>
-            <a:off x="3785616" y="4550711"/>
-            <a:ext cx="117300" cy="110352"/>
+            <a:off x="3785616" y="4793188"/>
+            <a:ext cx="117300" cy="120249"/>
           </a:xfrm>
           <a:prstGeom prst="rect">
             <a:avLst/>
@@ -12925,8 +12866,8 @@
         </p:nvSpPr>
         <p:spPr>
           <a:xfrm>
-            <a:off x="4617720" y="4485939"/>
-            <a:ext cx="1234440" cy="239896"/>
+            <a:off x="4617720" y="4722607"/>
+            <a:ext cx="1234440" cy="261411"/>
           </a:xfrm>
           <a:prstGeom prst="rect">
             <a:avLst/>
@@ -12964,8 +12905,8 @@
         </p:nvSpPr>
         <p:spPr>
           <a:xfrm>
-            <a:off x="658368" y="4725834"/>
-            <a:ext cx="310896" cy="239896"/>
+            <a:off x="658368" y="4984018"/>
+            <a:ext cx="310896" cy="261411"/>
           </a:xfrm>
           <a:prstGeom prst="rect">
             <a:avLst/>
@@ -13003,8 +12944,8 @@
         </p:nvSpPr>
         <p:spPr>
           <a:xfrm>
-            <a:off x="1014984" y="4725834"/>
-            <a:ext cx="1920240" cy="239896"/>
+            <a:off x="1014984" y="4984018"/>
+            <a:ext cx="1920240" cy="261411"/>
           </a:xfrm>
           <a:prstGeom prst="rect">
             <a:avLst/>
@@ -13042,8 +12983,8 @@
         </p:nvSpPr>
         <p:spPr>
           <a:xfrm>
-            <a:off x="3785616" y="4790606"/>
-            <a:ext cx="95080" cy="110352"/>
+            <a:off x="3785616" y="5054599"/>
+            <a:ext cx="95080" cy="120249"/>
           </a:xfrm>
           <a:prstGeom prst="rect">
             <a:avLst/>
@@ -13062,8 +13003,8 @@
         </p:nvSpPr>
         <p:spPr>
           <a:xfrm>
-            <a:off x="4617720" y="4725834"/>
-            <a:ext cx="1234440" cy="239896"/>
+            <a:off x="4617720" y="4984018"/>
+            <a:ext cx="1234440" cy="261411"/>
           </a:xfrm>
           <a:prstGeom prst="rect">
             <a:avLst/>
@@ -13101,8 +13042,8 @@
         </p:nvSpPr>
         <p:spPr>
           <a:xfrm>
-            <a:off x="658368" y="4965730"/>
-            <a:ext cx="310896" cy="239896"/>
+            <a:off x="658368" y="5245429"/>
+            <a:ext cx="310896" cy="261411"/>
           </a:xfrm>
           <a:prstGeom prst="rect">
             <a:avLst/>
@@ -13140,8 +13081,8 @@
         </p:nvSpPr>
         <p:spPr>
           <a:xfrm>
-            <a:off x="1014984" y="4965730"/>
-            <a:ext cx="1920240" cy="239896"/>
+            <a:off x="1014984" y="5245429"/>
+            <a:ext cx="1920240" cy="261411"/>
           </a:xfrm>
           <a:prstGeom prst="rect">
             <a:avLst/>
@@ -13179,8 +13120,8 @@
         </p:nvSpPr>
         <p:spPr>
           <a:xfrm>
-            <a:off x="3785616" y="5030502"/>
-            <a:ext cx="68825" cy="110352"/>
+            <a:off x="3785616" y="5316010"/>
+            <a:ext cx="68825" cy="120249"/>
           </a:xfrm>
           <a:prstGeom prst="rect">
             <a:avLst/>
@@ -13199,8 +13140,8 @@
         </p:nvSpPr>
         <p:spPr>
           <a:xfrm>
-            <a:off x="4617720" y="4965730"/>
-            <a:ext cx="1234440" cy="239896"/>
+            <a:off x="4617720" y="5245429"/>
+            <a:ext cx="1234440" cy="261411"/>
           </a:xfrm>
           <a:prstGeom prst="rect">
             <a:avLst/>
@@ -13238,8 +13179,8 @@
         </p:nvSpPr>
         <p:spPr>
           <a:xfrm>
-            <a:off x="658368" y="5205625"/>
-            <a:ext cx="310896" cy="239896"/>
+            <a:off x="658368" y="5506840"/>
+            <a:ext cx="310896" cy="261411"/>
           </a:xfrm>
           <a:prstGeom prst="rect">
             <a:avLst/>
@@ -13277,8 +13218,8 @@
         </p:nvSpPr>
         <p:spPr>
           <a:xfrm>
-            <a:off x="1014984" y="5205625"/>
-            <a:ext cx="1920240" cy="239896"/>
+            <a:off x="1014984" y="5506840"/>
+            <a:ext cx="1920240" cy="261411"/>
           </a:xfrm>
           <a:prstGeom prst="rect">
             <a:avLst/>
@@ -13316,8 +13257,8 @@
         </p:nvSpPr>
         <p:spPr>
           <a:xfrm>
-            <a:off x="3785616" y="5270397"/>
-            <a:ext cx="36133" cy="110352"/>
+            <a:off x="3785616" y="5577420"/>
+            <a:ext cx="36133" cy="120249"/>
           </a:xfrm>
           <a:prstGeom prst="rect">
             <a:avLst/>
@@ -13336,8 +13277,8 @@
         </p:nvSpPr>
         <p:spPr>
           <a:xfrm>
-            <a:off x="4617720" y="5205625"/>
-            <a:ext cx="1234440" cy="239896"/>
+            <a:off x="4617720" y="5506840"/>
+            <a:ext cx="1234440" cy="261411"/>
           </a:xfrm>
           <a:prstGeom prst="rect">
             <a:avLst/>
@@ -13375,8 +13316,8 @@
         </p:nvSpPr>
         <p:spPr>
           <a:xfrm>
-            <a:off x="658368" y="5445521"/>
-            <a:ext cx="310896" cy="239896"/>
+            <a:off x="658368" y="5768250"/>
+            <a:ext cx="310896" cy="261411"/>
           </a:xfrm>
           <a:prstGeom prst="rect">
             <a:avLst/>
@@ -13414,8 +13355,8 @@
         </p:nvSpPr>
         <p:spPr>
           <a:xfrm>
-            <a:off x="1014984" y="5445521"/>
-            <a:ext cx="1920240" cy="239896"/>
+            <a:off x="1014984" y="5768250"/>
+            <a:ext cx="1920240" cy="261411"/>
           </a:xfrm>
           <a:prstGeom prst="rect">
             <a:avLst/>
@@ -13453,8 +13394,8 @@
         </p:nvSpPr>
         <p:spPr>
           <a:xfrm>
-            <a:off x="3785616" y="5510293"/>
-            <a:ext cx="34356" cy="110352"/>
+            <a:off x="3785616" y="5838831"/>
+            <a:ext cx="34356" cy="120249"/>
           </a:xfrm>
           <a:prstGeom prst="rect">
             <a:avLst/>
@@ -13473,8 +13414,8 @@
         </p:nvSpPr>
         <p:spPr>
           <a:xfrm>
-            <a:off x="4617720" y="5445521"/>
-            <a:ext cx="1234440" cy="239896"/>
+            <a:off x="4617720" y="5768250"/>
+            <a:ext cx="1234440" cy="261411"/>
           </a:xfrm>
           <a:prstGeom prst="rect">
             <a:avLst/>
@@ -13512,8 +13453,8 @@
         </p:nvSpPr>
         <p:spPr>
           <a:xfrm>
-            <a:off x="658368" y="5685416"/>
-            <a:ext cx="310896" cy="239896"/>
+            <a:off x="658368" y="6029661"/>
+            <a:ext cx="310896" cy="261411"/>
           </a:xfrm>
           <a:prstGeom prst="rect">
             <a:avLst/>
@@ -13551,8 +13492,8 @@
         </p:nvSpPr>
         <p:spPr>
           <a:xfrm>
-            <a:off x="1014984" y="5685416"/>
-            <a:ext cx="1920240" cy="239896"/>
+            <a:off x="1014984" y="6029661"/>
+            <a:ext cx="1920240" cy="261411"/>
           </a:xfrm>
           <a:prstGeom prst="rect">
             <a:avLst/>
@@ -13590,8 +13531,8 @@
         </p:nvSpPr>
         <p:spPr>
           <a:xfrm>
-            <a:off x="3785616" y="5750188"/>
-            <a:ext cx="26542" cy="110352"/>
+            <a:off x="3785616" y="6100242"/>
+            <a:ext cx="26542" cy="120249"/>
           </a:xfrm>
           <a:prstGeom prst="rect">
             <a:avLst/>
@@ -13610,8 +13551,8 @@
         </p:nvSpPr>
         <p:spPr>
           <a:xfrm>
-            <a:off x="4617720" y="5685416"/>
-            <a:ext cx="1234440" cy="239896"/>
+            <a:off x="4617720" y="6029661"/>
+            <a:ext cx="1234440" cy="261411"/>
           </a:xfrm>
           <a:prstGeom prst="rect">
             <a:avLst/>
@@ -13650,7 +13591,7 @@
         <p:spPr>
           <a:xfrm>
             <a:off x="6208776" y="1847088"/>
-            <a:ext cx="310896" cy="239896"/>
+            <a:ext cx="310896" cy="261411"/>
           </a:xfrm>
           <a:prstGeom prst="rect">
             <a:avLst/>
@@ -13689,7 +13630,7 @@
         <p:spPr>
           <a:xfrm>
             <a:off x="6565392" y="1847088"/>
-            <a:ext cx="1920240" cy="239896"/>
+            <a:ext cx="1920240" cy="261411"/>
           </a:xfrm>
           <a:prstGeom prst="rect">
             <a:avLst/>
@@ -13727,8 +13668,8 @@
         </p:nvSpPr>
         <p:spPr>
           <a:xfrm>
-            <a:off x="9336024" y="1911860"/>
-            <a:ext cx="12802" cy="110352"/>
+            <a:off x="9336024" y="1917669"/>
+            <a:ext cx="12802" cy="120249"/>
           </a:xfrm>
           <a:prstGeom prst="rect">
             <a:avLst/>
@@ -13748,7 +13689,7 @@
         <p:spPr>
           <a:xfrm>
             <a:off x="10168128" y="1847088"/>
-            <a:ext cx="1234440" cy="239896"/>
+            <a:ext cx="1234440" cy="261411"/>
           </a:xfrm>
           <a:prstGeom prst="rect">
             <a:avLst/>
@@ -13786,8 +13727,8 @@
         </p:nvSpPr>
         <p:spPr>
           <a:xfrm>
-            <a:off x="6208776" y="2086984"/>
-            <a:ext cx="310896" cy="239896"/>
+            <a:off x="6208776" y="2108499"/>
+            <a:ext cx="310896" cy="261411"/>
           </a:xfrm>
           <a:prstGeom prst="rect">
             <a:avLst/>
@@ -13825,8 +13766,8 @@
         </p:nvSpPr>
         <p:spPr>
           <a:xfrm>
-            <a:off x="6565392" y="2086984"/>
-            <a:ext cx="1920240" cy="239896"/>
+            <a:off x="6565392" y="2108499"/>
+            <a:ext cx="1920240" cy="261411"/>
           </a:xfrm>
           <a:prstGeom prst="rect">
             <a:avLst/>
@@ -13864,8 +13805,8 @@
         </p:nvSpPr>
         <p:spPr>
           <a:xfrm>
-            <a:off x="9336024" y="2151755"/>
-            <a:ext cx="12802" cy="110352"/>
+            <a:off x="9336024" y="2179080"/>
+            <a:ext cx="12802" cy="120249"/>
           </a:xfrm>
           <a:prstGeom prst="rect">
             <a:avLst/>
@@ -13884,8 +13825,8 @@
         </p:nvSpPr>
         <p:spPr>
           <a:xfrm>
-            <a:off x="10168128" y="2086984"/>
-            <a:ext cx="1234440" cy="239896"/>
+            <a:off x="10168128" y="2108499"/>
+            <a:ext cx="1234440" cy="261411"/>
           </a:xfrm>
           <a:prstGeom prst="rect">
             <a:avLst/>
@@ -13923,8 +13864,8 @@
         </p:nvSpPr>
         <p:spPr>
           <a:xfrm>
-            <a:off x="6208776" y="2326879"/>
-            <a:ext cx="310896" cy="239896"/>
+            <a:off x="6208776" y="2369910"/>
+            <a:ext cx="310896" cy="261411"/>
           </a:xfrm>
           <a:prstGeom prst="rect">
             <a:avLst/>
@@ -13962,8 +13903,8 @@
         </p:nvSpPr>
         <p:spPr>
           <a:xfrm>
-            <a:off x="6565392" y="2326879"/>
-            <a:ext cx="1920240" cy="239896"/>
+            <a:off x="6565392" y="2369910"/>
+            <a:ext cx="1920240" cy="261411"/>
           </a:xfrm>
           <a:prstGeom prst="rect">
             <a:avLst/>
@@ -14001,8 +13942,8 @@
         </p:nvSpPr>
         <p:spPr>
           <a:xfrm>
-            <a:off x="9300490" y="2391651"/>
-            <a:ext cx="35534" cy="110352"/>
+            <a:off x="9300490" y="2440491"/>
+            <a:ext cx="35534" cy="120249"/>
           </a:xfrm>
           <a:prstGeom prst="rect">
             <a:avLst/>
@@ -14021,8 +13962,8 @@
         </p:nvSpPr>
         <p:spPr>
           <a:xfrm>
-            <a:off x="10168128" y="2326879"/>
-            <a:ext cx="1234440" cy="239896"/>
+            <a:off x="10168128" y="2369910"/>
+            <a:ext cx="1234440" cy="261411"/>
           </a:xfrm>
           <a:prstGeom prst="rect">
             <a:avLst/>
@@ -14060,8 +14001,8 @@
         </p:nvSpPr>
         <p:spPr>
           <a:xfrm>
-            <a:off x="6208776" y="2566775"/>
-            <a:ext cx="310896" cy="239896"/>
+            <a:off x="6208776" y="2631320"/>
+            <a:ext cx="310896" cy="261411"/>
           </a:xfrm>
           <a:prstGeom prst="rect">
             <a:avLst/>
@@ -14099,8 +14040,8 @@
         </p:nvSpPr>
         <p:spPr>
           <a:xfrm>
-            <a:off x="6565392" y="2566775"/>
-            <a:ext cx="1920240" cy="239896"/>
+            <a:off x="6565392" y="2631320"/>
+            <a:ext cx="1920240" cy="261411"/>
           </a:xfrm>
           <a:prstGeom prst="rect">
             <a:avLst/>
@@ -14138,8 +14079,8 @@
         </p:nvSpPr>
         <p:spPr>
           <a:xfrm>
-            <a:off x="9251253" y="2631546"/>
-            <a:ext cx="84771" cy="110352"/>
+            <a:off x="9251253" y="2701901"/>
+            <a:ext cx="84771" cy="120249"/>
           </a:xfrm>
           <a:prstGeom prst="rect">
             <a:avLst/>
@@ -14158,8 +14099,8 @@
         </p:nvSpPr>
         <p:spPr>
           <a:xfrm>
-            <a:off x="10168128" y="2566775"/>
-            <a:ext cx="1234440" cy="239896"/>
+            <a:off x="10168128" y="2631320"/>
+            <a:ext cx="1234440" cy="261411"/>
           </a:xfrm>
           <a:prstGeom prst="rect">
             <a:avLst/>
@@ -14197,8 +14138,8 @@
         </p:nvSpPr>
         <p:spPr>
           <a:xfrm>
-            <a:off x="6208776" y="2806670"/>
-            <a:ext cx="310896" cy="239896"/>
+            <a:off x="6208776" y="2892731"/>
+            <a:ext cx="310896" cy="261411"/>
           </a:xfrm>
           <a:prstGeom prst="rect">
             <a:avLst/>
@@ -14236,8 +14177,8 @@
         </p:nvSpPr>
         <p:spPr>
           <a:xfrm>
-            <a:off x="6565392" y="2806670"/>
-            <a:ext cx="1920240" cy="239896"/>
+            <a:off x="6565392" y="2892731"/>
+            <a:ext cx="1920240" cy="261411"/>
           </a:xfrm>
           <a:prstGeom prst="rect">
             <a:avLst/>
@@ -14275,8 +14216,8 @@
         </p:nvSpPr>
         <p:spPr>
           <a:xfrm>
-            <a:off x="9226020" y="2871442"/>
-            <a:ext cx="110004" cy="110352"/>
+            <a:off x="9226020" y="2963312"/>
+            <a:ext cx="110004" cy="120249"/>
           </a:xfrm>
           <a:prstGeom prst="rect">
             <a:avLst/>
@@ -14295,8 +14236,8 @@
         </p:nvSpPr>
         <p:spPr>
           <a:xfrm>
-            <a:off x="10168128" y="2806670"/>
-            <a:ext cx="1234440" cy="239896"/>
+            <a:off x="10168128" y="2892731"/>
+            <a:ext cx="1234440" cy="261411"/>
           </a:xfrm>
           <a:prstGeom prst="rect">
             <a:avLst/>
@@ -14334,8 +14275,8 @@
         </p:nvSpPr>
         <p:spPr>
           <a:xfrm>
-            <a:off x="6208776" y="3046566"/>
-            <a:ext cx="310896" cy="239896"/>
+            <a:off x="6208776" y="3154142"/>
+            <a:ext cx="310896" cy="261411"/>
           </a:xfrm>
           <a:prstGeom prst="rect">
             <a:avLst/>
@@ -14373,8 +14314,8 @@
         </p:nvSpPr>
         <p:spPr>
           <a:xfrm>
-            <a:off x="6565392" y="3046566"/>
-            <a:ext cx="1920240" cy="239896"/>
+            <a:off x="6565392" y="3154142"/>
+            <a:ext cx="1920240" cy="261411"/>
           </a:xfrm>
           <a:prstGeom prst="rect">
             <a:avLst/>
@@ -14412,8 +14353,8 @@
         </p:nvSpPr>
         <p:spPr>
           <a:xfrm>
-            <a:off x="9211478" y="3111337"/>
-            <a:ext cx="124546" cy="110352"/>
+            <a:off x="9211478" y="3224723"/>
+            <a:ext cx="124546" cy="120249"/>
           </a:xfrm>
           <a:prstGeom prst="rect">
             <a:avLst/>
@@ -14432,8 +14373,8 @@
         </p:nvSpPr>
         <p:spPr>
           <a:xfrm>
-            <a:off x="10168128" y="3046566"/>
-            <a:ext cx="1234440" cy="239896"/>
+            <a:off x="10168128" y="3154142"/>
+            <a:ext cx="1234440" cy="261411"/>
           </a:xfrm>
           <a:prstGeom prst="rect">
             <a:avLst/>
@@ -14471,8 +14412,8 @@
         </p:nvSpPr>
         <p:spPr>
           <a:xfrm>
-            <a:off x="6208776" y="3286461"/>
-            <a:ext cx="310896" cy="239896"/>
+            <a:off x="6208776" y="3415553"/>
+            <a:ext cx="310896" cy="261411"/>
           </a:xfrm>
           <a:prstGeom prst="rect">
             <a:avLst/>
@@ -14510,8 +14451,8 @@
         </p:nvSpPr>
         <p:spPr>
           <a:xfrm>
-            <a:off x="6565392" y="3286461"/>
-            <a:ext cx="1920240" cy="239896"/>
+            <a:off x="6565392" y="3415553"/>
+            <a:ext cx="1920240" cy="261411"/>
           </a:xfrm>
           <a:prstGeom prst="rect">
             <a:avLst/>
@@ -14549,8 +14490,8 @@
         </p:nvSpPr>
         <p:spPr>
           <a:xfrm>
-            <a:off x="9201170" y="3351233"/>
-            <a:ext cx="134854" cy="110352"/>
+            <a:off x="9201170" y="3486134"/>
+            <a:ext cx="134854" cy="120249"/>
           </a:xfrm>
           <a:prstGeom prst="rect">
             <a:avLst/>
@@ -14569,8 +14510,8 @@
         </p:nvSpPr>
         <p:spPr>
           <a:xfrm>
-            <a:off x="10168128" y="3286461"/>
-            <a:ext cx="1234440" cy="239896"/>
+            <a:off x="10168128" y="3415553"/>
+            <a:ext cx="1234440" cy="261411"/>
           </a:xfrm>
           <a:prstGeom prst="rect">
             <a:avLst/>
@@ -14608,8 +14549,8 @@
         </p:nvSpPr>
         <p:spPr>
           <a:xfrm>
-            <a:off x="6208776" y="3526357"/>
-            <a:ext cx="310896" cy="239896"/>
+            <a:off x="6208776" y="3676964"/>
+            <a:ext cx="310896" cy="261411"/>
           </a:xfrm>
           <a:prstGeom prst="rect">
             <a:avLst/>
@@ -14647,8 +14588,8 @@
         </p:nvSpPr>
         <p:spPr>
           <a:xfrm>
-            <a:off x="6565392" y="3526357"/>
-            <a:ext cx="1920240" cy="239896"/>
+            <a:off x="6565392" y="3676964"/>
+            <a:ext cx="1920240" cy="261411"/>
           </a:xfrm>
           <a:prstGeom prst="rect">
             <a:avLst/>
@@ -14686,8 +14627,8 @@
         </p:nvSpPr>
         <p:spPr>
           <a:xfrm>
-            <a:off x="9108753" y="3591128"/>
-            <a:ext cx="227271" cy="110352"/>
+            <a:off x="9108753" y="3747545"/>
+            <a:ext cx="227271" cy="120249"/>
           </a:xfrm>
           <a:prstGeom prst="rect">
             <a:avLst/>
@@ -14706,8 +14647,8 @@
         </p:nvSpPr>
         <p:spPr>
           <a:xfrm>
-            <a:off x="10168128" y="3526357"/>
-            <a:ext cx="1234440" cy="239896"/>
+            <a:off x="10168128" y="3676964"/>
+            <a:ext cx="1234440" cy="261411"/>
           </a:xfrm>
           <a:prstGeom prst="rect">
             <a:avLst/>
@@ -14745,8 +14686,8 @@
         </p:nvSpPr>
         <p:spPr>
           <a:xfrm>
-            <a:off x="6208776" y="3766252"/>
-            <a:ext cx="310896" cy="239896"/>
+            <a:off x="6208776" y="3938375"/>
+            <a:ext cx="310896" cy="261411"/>
           </a:xfrm>
           <a:prstGeom prst="rect">
             <a:avLst/>
@@ -14784,8 +14725,8 @@
         </p:nvSpPr>
         <p:spPr>
           <a:xfrm>
-            <a:off x="6565392" y="3766252"/>
-            <a:ext cx="1920240" cy="239896"/>
+            <a:off x="6565392" y="3938375"/>
+            <a:ext cx="1920240" cy="261411"/>
           </a:xfrm>
           <a:prstGeom prst="rect">
             <a:avLst/>
@@ -14823,8 +14764,8 @@
         </p:nvSpPr>
         <p:spPr>
           <a:xfrm>
-            <a:off x="9091564" y="3831024"/>
-            <a:ext cx="244460" cy="110352"/>
+            <a:off x="9091564" y="4008956"/>
+            <a:ext cx="244460" cy="120249"/>
           </a:xfrm>
           <a:prstGeom prst="rect">
             <a:avLst/>
@@ -14843,8 +14784,8 @@
         </p:nvSpPr>
         <p:spPr>
           <a:xfrm>
-            <a:off x="10168128" y="3766252"/>
-            <a:ext cx="1234440" cy="239896"/>
+            <a:off x="10168128" y="3938375"/>
+            <a:ext cx="1234440" cy="261411"/>
           </a:xfrm>
           <a:prstGeom prst="rect">
             <a:avLst/>
@@ -14882,8 +14823,8 @@
         </p:nvSpPr>
         <p:spPr>
           <a:xfrm>
-            <a:off x="6208776" y="4006148"/>
-            <a:ext cx="310896" cy="239896"/>
+            <a:off x="6208776" y="4199785"/>
+            <a:ext cx="310896" cy="261411"/>
           </a:xfrm>
           <a:prstGeom prst="rect">
             <a:avLst/>
@@ -14921,8 +14862,8 @@
         </p:nvSpPr>
         <p:spPr>
           <a:xfrm>
-            <a:off x="6565392" y="4006148"/>
-            <a:ext cx="1920240" cy="239896"/>
+            <a:off x="6565392" y="4199785"/>
+            <a:ext cx="1920240" cy="261411"/>
           </a:xfrm>
           <a:prstGeom prst="rect">
             <a:avLst/>
@@ -14960,8 +14901,8 @@
         </p:nvSpPr>
         <p:spPr>
           <a:xfrm>
-            <a:off x="9060005" y="4070920"/>
-            <a:ext cx="276019" cy="110352"/>
+            <a:off x="9060005" y="4270366"/>
+            <a:ext cx="276019" cy="120249"/>
           </a:xfrm>
           <a:prstGeom prst="rect">
             <a:avLst/>
@@ -14980,8 +14921,8 @@
         </p:nvSpPr>
         <p:spPr>
           <a:xfrm>
-            <a:off x="10168128" y="4006148"/>
-            <a:ext cx="1234440" cy="239896"/>
+            <a:off x="10168128" y="4199785"/>
+            <a:ext cx="1234440" cy="261411"/>
           </a:xfrm>
           <a:prstGeom prst="rect">
             <a:avLst/>
@@ -15019,8 +14960,8 @@
         </p:nvSpPr>
         <p:spPr>
           <a:xfrm>
-            <a:off x="6208776" y="4246043"/>
-            <a:ext cx="310896" cy="239896"/>
+            <a:off x="6208776" y="4461196"/>
+            <a:ext cx="310896" cy="261411"/>
           </a:xfrm>
           <a:prstGeom prst="rect">
             <a:avLst/>
@@ -15058,8 +14999,8 @@
         </p:nvSpPr>
         <p:spPr>
           <a:xfrm>
-            <a:off x="6565392" y="4246043"/>
-            <a:ext cx="1920240" cy="239896"/>
+            <a:off x="6565392" y="4461196"/>
+            <a:ext cx="1920240" cy="261411"/>
           </a:xfrm>
           <a:prstGeom prst="rect">
             <a:avLst/>
@@ -15097,8 +15038,8 @@
         </p:nvSpPr>
         <p:spPr>
           <a:xfrm>
-            <a:off x="9035101" y="4310815"/>
-            <a:ext cx="300923" cy="110352"/>
+            <a:off x="9035101" y="4531777"/>
+            <a:ext cx="300923" cy="120249"/>
           </a:xfrm>
           <a:prstGeom prst="rect">
             <a:avLst/>
@@ -15117,8 +15058,8 @@
         </p:nvSpPr>
         <p:spPr>
           <a:xfrm>
-            <a:off x="10168128" y="4246043"/>
-            <a:ext cx="1234440" cy="239896"/>
+            <a:off x="10168128" y="4461196"/>
+            <a:ext cx="1234440" cy="261411"/>
           </a:xfrm>
           <a:prstGeom prst="rect">
             <a:avLst/>
@@ -15156,8 +15097,8 @@
         </p:nvSpPr>
         <p:spPr>
           <a:xfrm>
-            <a:off x="6208776" y="4485939"/>
-            <a:ext cx="310896" cy="239896"/>
+            <a:off x="6208776" y="4722607"/>
+            <a:ext cx="310896" cy="261411"/>
           </a:xfrm>
           <a:prstGeom prst="rect">
             <a:avLst/>
@@ -15195,8 +15136,8 @@
         </p:nvSpPr>
         <p:spPr>
           <a:xfrm>
-            <a:off x="6565392" y="4485939"/>
-            <a:ext cx="1920240" cy="239896"/>
+            <a:off x="6565392" y="4722607"/>
+            <a:ext cx="1920240" cy="261411"/>
           </a:xfrm>
           <a:prstGeom prst="rect">
             <a:avLst/>
@@ -15234,8 +15175,8 @@
         </p:nvSpPr>
         <p:spPr>
           <a:xfrm>
-            <a:off x="8954892" y="4550711"/>
-            <a:ext cx="381132" cy="110352"/>
+            <a:off x="8954892" y="4793188"/>
+            <a:ext cx="381132" cy="120249"/>
           </a:xfrm>
           <a:prstGeom prst="rect">
             <a:avLst/>
@@ -15254,8 +15195,8 @@
         </p:nvSpPr>
         <p:spPr>
           <a:xfrm>
-            <a:off x="10168128" y="4485939"/>
-            <a:ext cx="1234440" cy="239896"/>
+            <a:off x="10168128" y="4722607"/>
+            <a:ext cx="1234440" cy="261411"/>
           </a:xfrm>
           <a:prstGeom prst="rect">
             <a:avLst/>
@@ -15293,8 +15234,8 @@
         </p:nvSpPr>
         <p:spPr>
           <a:xfrm>
-            <a:off x="6208776" y="4725834"/>
-            <a:ext cx="310896" cy="239896"/>
+            <a:off x="6208776" y="4984018"/>
+            <a:ext cx="310896" cy="261411"/>
           </a:xfrm>
           <a:prstGeom prst="rect">
             <a:avLst/>
@@ -15332,8 +15273,8 @@
         </p:nvSpPr>
         <p:spPr>
           <a:xfrm>
-            <a:off x="6565392" y="4725834"/>
-            <a:ext cx="1920240" cy="239896"/>
+            <a:off x="6565392" y="4984018"/>
+            <a:ext cx="1920240" cy="261411"/>
           </a:xfrm>
           <a:prstGeom prst="rect">
             <a:avLst/>
@@ -15371,8 +15312,8 @@
         </p:nvSpPr>
         <p:spPr>
           <a:xfrm>
-            <a:off x="8929245" y="4790606"/>
-            <a:ext cx="406779" cy="110352"/>
+            <a:off x="8929245" y="5054599"/>
+            <a:ext cx="406779" cy="120249"/>
           </a:xfrm>
           <a:prstGeom prst="rect">
             <a:avLst/>
@@ -15391,8 +15332,8 @@
         </p:nvSpPr>
         <p:spPr>
           <a:xfrm>
-            <a:off x="10168128" y="4725834"/>
-            <a:ext cx="1234440" cy="239896"/>
+            <a:off x="10168128" y="4984018"/>
+            <a:ext cx="1234440" cy="261411"/>
           </a:xfrm>
           <a:prstGeom prst="rect">
             <a:avLst/>
@@ -15430,8 +15371,8 @@
         </p:nvSpPr>
         <p:spPr>
           <a:xfrm>
-            <a:off x="6208776" y="4965730"/>
-            <a:ext cx="310896" cy="239896"/>
+            <a:off x="6208776" y="5245429"/>
+            <a:ext cx="310896" cy="261411"/>
           </a:xfrm>
           <a:prstGeom prst="rect">
             <a:avLst/>
@@ -15469,8 +15410,8 @@
         </p:nvSpPr>
         <p:spPr>
           <a:xfrm>
-            <a:off x="6565392" y="4965730"/>
-            <a:ext cx="1920240" cy="239896"/>
+            <a:off x="6565392" y="5245429"/>
+            <a:ext cx="1920240" cy="261411"/>
           </a:xfrm>
           <a:prstGeom prst="rect">
             <a:avLst/>
@@ -15508,8 +15449,8 @@
         </p:nvSpPr>
         <p:spPr>
           <a:xfrm>
-            <a:off x="8865948" y="5030502"/>
-            <a:ext cx="470076" cy="110352"/>
+            <a:off x="8865948" y="5316010"/>
+            <a:ext cx="470076" cy="120249"/>
           </a:xfrm>
           <a:prstGeom prst="rect">
             <a:avLst/>
@@ -15528,8 +15469,8 @@
         </p:nvSpPr>
         <p:spPr>
           <a:xfrm>
-            <a:off x="10168128" y="4965730"/>
-            <a:ext cx="1234440" cy="239896"/>
+            <a:off x="10168128" y="5245429"/>
+            <a:ext cx="1234440" cy="261411"/>
           </a:xfrm>
           <a:prstGeom prst="rect">
             <a:avLst/>
@@ -15567,8 +15508,8 @@
         </p:nvSpPr>
         <p:spPr>
           <a:xfrm>
-            <a:off x="6208776" y="5205625"/>
-            <a:ext cx="310896" cy="239896"/>
+            <a:off x="6208776" y="5506840"/>
+            <a:ext cx="310896" cy="261411"/>
           </a:xfrm>
           <a:prstGeom prst="rect">
             <a:avLst/>
@@ -15606,8 +15547,8 @@
         </p:nvSpPr>
         <p:spPr>
           <a:xfrm>
-            <a:off x="6565392" y="5205625"/>
-            <a:ext cx="1920240" cy="239896"/>
+            <a:off x="6565392" y="5506840"/>
+            <a:ext cx="1920240" cy="261411"/>
           </a:xfrm>
           <a:prstGeom prst="rect">
             <a:avLst/>
@@ -15645,8 +15586,8 @@
         </p:nvSpPr>
         <p:spPr>
           <a:xfrm>
-            <a:off x="8842326" y="5270397"/>
-            <a:ext cx="493698" cy="110352"/>
+            <a:off x="8842326" y="5577420"/>
+            <a:ext cx="493698" cy="120249"/>
           </a:xfrm>
           <a:prstGeom prst="rect">
             <a:avLst/>
@@ -15665,8 +15606,8 @@
         </p:nvSpPr>
         <p:spPr>
           <a:xfrm>
-            <a:off x="10168128" y="5205625"/>
-            <a:ext cx="1234440" cy="239896"/>
+            <a:off x="10168128" y="5506840"/>
+            <a:ext cx="1234440" cy="261411"/>
           </a:xfrm>
           <a:prstGeom prst="rect">
             <a:avLst/>
@@ -15704,8 +15645,8 @@
         </p:nvSpPr>
         <p:spPr>
           <a:xfrm>
-            <a:off x="6208776" y="5445521"/>
-            <a:ext cx="310896" cy="239896"/>
+            <a:off x="6208776" y="5768250"/>
+            <a:ext cx="310896" cy="261411"/>
           </a:xfrm>
           <a:prstGeom prst="rect">
             <a:avLst/>
@@ -15743,8 +15684,8 @@
         </p:nvSpPr>
         <p:spPr>
           <a:xfrm>
-            <a:off x="6565392" y="5445521"/>
-            <a:ext cx="1920240" cy="239896"/>
+            <a:off x="6565392" y="5768250"/>
+            <a:ext cx="1920240" cy="261411"/>
           </a:xfrm>
           <a:prstGeom prst="rect">
             <a:avLst/>
@@ -15782,8 +15723,8 @@
         </p:nvSpPr>
         <p:spPr>
           <a:xfrm>
-            <a:off x="8558784" y="5510293"/>
-            <a:ext cx="777240" cy="110352"/>
+            <a:off x="8558784" y="5838831"/>
+            <a:ext cx="777240" cy="120249"/>
           </a:xfrm>
           <a:prstGeom prst="rect">
             <a:avLst/>
@@ -15802,8 +15743,8 @@
         </p:nvSpPr>
         <p:spPr>
           <a:xfrm>
-            <a:off x="10168128" y="5445521"/>
-            <a:ext cx="1234440" cy="239896"/>
+            <a:off x="10168128" y="5768250"/>
+            <a:ext cx="1234440" cy="261411"/>
           </a:xfrm>
           <a:prstGeom prst="rect">
             <a:avLst/>
@@ -15842,7 +15783,7 @@
         <p:spPr>
           <a:xfrm>
             <a:off x="3780130" y="1847088"/>
-            <a:ext cx="10973" cy="4078224"/>
+            <a:ext cx="10973" cy="4443984"/>
           </a:xfrm>
           <a:prstGeom prst="rect">
             <a:avLst/>
@@ -15862,7 +15803,7 @@
         <p:spPr>
           <a:xfrm>
             <a:off x="9330538" y="1847088"/>
-            <a:ext cx="10973" cy="4078224"/>
+            <a:ext cx="10973" cy="4443984"/>
           </a:xfrm>
           <a:prstGeom prst="rect">
             <a:avLst/>
@@ -15882,7 +15823,7 @@
         <p:spPr>
           <a:xfrm>
             <a:off x="6085332" y="1847088"/>
-            <a:ext cx="10973" cy="4078224"/>
+            <a:ext cx="10973" cy="4443984"/>
           </a:xfrm>
           <a:prstGeom prst="rect">
             <a:avLst/>
@@ -15892,65 +15833,6 @@
           </a:solidFill>
           <a:ln/>
         </p:spPr>
-      </p:sp>
-      <p:sp>
-        <p:nvSpPr>
-          <p:cNvPr id="146" name="Shape 144"/>
-          <p:cNvSpPr/>
-          <p:nvPr/>
-        </p:nvSpPr>
-        <p:spPr>
-          <a:xfrm>
-            <a:off x="457200" y="6126480"/>
-            <a:ext cx="11274552" cy="615696"/>
-          </a:xfrm>
-          <a:prstGeom prst="rect">
-            <a:avLst/>
-          </a:prstGeom>
-          <a:solidFill>
-            <a:srgbClr val="E6F6EE"/>
-          </a:solidFill>
-          <a:ln/>
-        </p:spPr>
-      </p:sp>
-      <p:sp>
-        <p:nvSpPr>
-          <p:cNvPr id="147" name="Text 145"/>
-          <p:cNvSpPr txBox="1"/>
-          <p:nvPr/>
-        </p:nvSpPr>
-        <p:spPr>
-          <a:xfrm>
-            <a:off x="658368" y="6144768"/>
-            <a:ext cx="10927080" cy="579120"/>
-          </a:xfrm>
-          <a:prstGeom prst="rect">
-            <a:avLst/>
-          </a:prstGeom>
-          <a:noFill/>
-          <a:ln/>
-        </p:spPr>
-        <p:txBody>
-          <a:bodyPr wrap="square" lIns="0" tIns="0" rIns="0" bIns="0" rtlCol="0" anchor="ctr"/>
-          <a:lstStyle/>
-          <a:p>
-            <a:pPr indent="0" marL="0">
-              <a:buNone/>
-            </a:pPr>
-            <a:r>
-              <a:rPr lang="en-US" sz="1600" b="1" dirty="0">
-                <a:solidFill>
-                  <a:srgbClr val="0B7A4A"/>
-                </a:solidFill>
-                <a:latin typeface="Inter" pitchFamily="34" charset="0"/>
-                <a:ea typeface="Inter" pitchFamily="34" charset="-122"/>
-                <a:cs typeface="Inter" pitchFamily="34" charset="-120"/>
-              </a:rPr>
-              <a:t>19 of 33 stores raised internal labor GP%, led by Acura at +5.6 pts to 77.2%. 14 declined; Nissan fell most at −8.8 pts.</a:t>
-            </a:r>
-            <a:endParaRPr lang="en-US" sz="1600" dirty="0"/>
-          </a:p>
-        </p:txBody>
       </p:sp>
     </p:spTree>
   </p:cSld>
@@ -16091,7 +15973,7 @@
         <p:spPr>
           <a:xfrm>
             <a:off x="457200" y="1207008"/>
-            <a:ext cx="11274552" cy="4782312"/>
+            <a:ext cx="11274552" cy="5148072"/>
           </a:xfrm>
           <a:prstGeom prst="rect">
             <a:avLst/>
@@ -16209,7 +16091,7 @@
         <p:spPr>
           <a:xfrm>
             <a:off x="658368" y="2103120"/>
-            <a:ext cx="3489960" cy="755294"/>
+            <a:ext cx="3489960" cy="828446"/>
           </a:xfrm>
           <a:prstGeom prst="rect">
             <a:avLst/>
@@ -16229,7 +16111,7 @@
         <p:spPr>
           <a:xfrm>
             <a:off x="749808" y="2103120"/>
-            <a:ext cx="365760" cy="755294"/>
+            <a:ext cx="365760" cy="828446"/>
           </a:xfrm>
           <a:prstGeom prst="rect">
             <a:avLst/>
@@ -16268,7 +16150,7 @@
         <p:spPr>
           <a:xfrm>
             <a:off x="1097280" y="2103120"/>
-            <a:ext cx="1825752" cy="755294"/>
+            <a:ext cx="1825752" cy="828446"/>
           </a:xfrm>
           <a:prstGeom prst="rect">
             <a:avLst/>
@@ -16347,7 +16229,7 @@
         <p:spPr>
           <a:xfrm>
             <a:off x="2941320" y="2103120"/>
-            <a:ext cx="1115568" cy="755294"/>
+            <a:ext cx="1115568" cy="828446"/>
           </a:xfrm>
           <a:prstGeom prst="rect">
             <a:avLst/>
@@ -16385,8 +16267,8 @@
         </p:nvSpPr>
         <p:spPr>
           <a:xfrm>
-            <a:off x="749808" y="2858414"/>
-            <a:ext cx="365760" cy="755294"/>
+            <a:off x="749808" y="2931566"/>
+            <a:ext cx="365760" cy="828446"/>
           </a:xfrm>
           <a:prstGeom prst="rect">
             <a:avLst/>
@@ -16424,8 +16306,8 @@
         </p:nvSpPr>
         <p:spPr>
           <a:xfrm>
-            <a:off x="1097280" y="2858414"/>
-            <a:ext cx="1825752" cy="755294"/>
+            <a:off x="1097280" y="2931566"/>
+            <a:ext cx="1825752" cy="828446"/>
           </a:xfrm>
           <a:prstGeom prst="rect">
             <a:avLst/>
@@ -16503,8 +16385,8 @@
         </p:nvSpPr>
         <p:spPr>
           <a:xfrm>
-            <a:off x="2941320" y="2858414"/>
-            <a:ext cx="1115568" cy="755294"/>
+            <a:off x="2941320" y="2931566"/>
+            <a:ext cx="1115568" cy="828446"/>
           </a:xfrm>
           <a:prstGeom prst="rect">
             <a:avLst/>
@@ -16542,8 +16424,8 @@
         </p:nvSpPr>
         <p:spPr>
           <a:xfrm>
-            <a:off x="658368" y="3613709"/>
-            <a:ext cx="3489960" cy="755294"/>
+            <a:off x="658368" y="3760013"/>
+            <a:ext cx="3489960" cy="828446"/>
           </a:xfrm>
           <a:prstGeom prst="rect">
             <a:avLst/>
@@ -16562,8 +16444,8 @@
         </p:nvSpPr>
         <p:spPr>
           <a:xfrm>
-            <a:off x="749808" y="3613709"/>
-            <a:ext cx="365760" cy="755294"/>
+            <a:off x="749808" y="3760013"/>
+            <a:ext cx="365760" cy="828446"/>
           </a:xfrm>
           <a:prstGeom prst="rect">
             <a:avLst/>
@@ -16601,8 +16483,8 @@
         </p:nvSpPr>
         <p:spPr>
           <a:xfrm>
-            <a:off x="1097280" y="3613709"/>
-            <a:ext cx="1825752" cy="755294"/>
+            <a:off x="1097280" y="3760013"/>
+            <a:ext cx="1825752" cy="828446"/>
           </a:xfrm>
           <a:prstGeom prst="rect">
             <a:avLst/>
@@ -16680,8 +16562,8 @@
         </p:nvSpPr>
         <p:spPr>
           <a:xfrm>
-            <a:off x="2941320" y="3613709"/>
-            <a:ext cx="1115568" cy="755294"/>
+            <a:off x="2941320" y="3760013"/>
+            <a:ext cx="1115568" cy="828446"/>
           </a:xfrm>
           <a:prstGeom prst="rect">
             <a:avLst/>
@@ -16719,8 +16601,8 @@
         </p:nvSpPr>
         <p:spPr>
           <a:xfrm>
-            <a:off x="4084320" y="4405579"/>
-            <a:ext cx="64008" cy="682142"/>
+            <a:off x="4084320" y="4625035"/>
+            <a:ext cx="64008" cy="755294"/>
           </a:xfrm>
           <a:prstGeom prst="rect">
             <a:avLst/>
@@ -16739,8 +16621,8 @@
         </p:nvSpPr>
         <p:spPr>
           <a:xfrm>
-            <a:off x="749808" y="4369003"/>
-            <a:ext cx="365760" cy="755294"/>
+            <a:off x="749808" y="4588459"/>
+            <a:ext cx="365760" cy="828446"/>
           </a:xfrm>
           <a:prstGeom prst="rect">
             <a:avLst/>
@@ -16778,8 +16660,8 @@
         </p:nvSpPr>
         <p:spPr>
           <a:xfrm>
-            <a:off x="1097280" y="4369003"/>
-            <a:ext cx="1825752" cy="755294"/>
+            <a:off x="1097280" y="4588459"/>
+            <a:ext cx="1825752" cy="828446"/>
           </a:xfrm>
           <a:prstGeom prst="rect">
             <a:avLst/>
@@ -16857,8 +16739,8 @@
         </p:nvSpPr>
         <p:spPr>
           <a:xfrm>
-            <a:off x="2941320" y="4369003"/>
-            <a:ext cx="1115568" cy="755294"/>
+            <a:off x="2941320" y="4588459"/>
+            <a:ext cx="1115568" cy="828446"/>
           </a:xfrm>
           <a:prstGeom prst="rect">
             <a:avLst/>
@@ -16896,8 +16778,8 @@
         </p:nvSpPr>
         <p:spPr>
           <a:xfrm>
-            <a:off x="658368" y="5124298"/>
-            <a:ext cx="3489960" cy="755294"/>
+            <a:off x="658368" y="5416906"/>
+            <a:ext cx="3489960" cy="828446"/>
           </a:xfrm>
           <a:prstGeom prst="rect">
             <a:avLst/>
@@ -16916,8 +16798,8 @@
         </p:nvSpPr>
         <p:spPr>
           <a:xfrm>
-            <a:off x="749808" y="5124298"/>
-            <a:ext cx="365760" cy="755294"/>
+            <a:off x="749808" y="5416906"/>
+            <a:ext cx="365760" cy="828446"/>
           </a:xfrm>
           <a:prstGeom prst="rect">
             <a:avLst/>
@@ -16955,8 +16837,8 @@
         </p:nvSpPr>
         <p:spPr>
           <a:xfrm>
-            <a:off x="1097280" y="5124298"/>
-            <a:ext cx="1825752" cy="755294"/>
+            <a:off x="1097280" y="5416906"/>
+            <a:ext cx="1825752" cy="828446"/>
           </a:xfrm>
           <a:prstGeom prst="rect">
             <a:avLst/>
@@ -17034,8 +16916,8 @@
         </p:nvSpPr>
         <p:spPr>
           <a:xfrm>
-            <a:off x="2941320" y="5124298"/>
-            <a:ext cx="1115568" cy="755294"/>
+            <a:off x="2941320" y="5416906"/>
+            <a:ext cx="1115568" cy="828446"/>
           </a:xfrm>
           <a:prstGeom prst="rect">
             <a:avLst/>
@@ -17172,7 +17054,7 @@
         <p:spPr>
           <a:xfrm>
             <a:off x="4349496" y="2103120"/>
-            <a:ext cx="3489960" cy="755294"/>
+            <a:ext cx="3489960" cy="828446"/>
           </a:xfrm>
           <a:prstGeom prst="rect">
             <a:avLst/>
@@ -17192,7 +17074,7 @@
         <p:spPr>
           <a:xfrm>
             <a:off x="4440936" y="2103120"/>
-            <a:ext cx="365760" cy="755294"/>
+            <a:ext cx="365760" cy="828446"/>
           </a:xfrm>
           <a:prstGeom prst="rect">
             <a:avLst/>
@@ -17231,7 +17113,7 @@
         <p:spPr>
           <a:xfrm>
             <a:off x="4788408" y="2103120"/>
-            <a:ext cx="1825752" cy="755294"/>
+            <a:ext cx="1825752" cy="828446"/>
           </a:xfrm>
           <a:prstGeom prst="rect">
             <a:avLst/>
@@ -17310,7 +17192,7 @@
         <p:spPr>
           <a:xfrm>
             <a:off x="6632448" y="2103120"/>
-            <a:ext cx="1115568" cy="755294"/>
+            <a:ext cx="1115568" cy="828446"/>
           </a:xfrm>
           <a:prstGeom prst="rect">
             <a:avLst/>
@@ -17348,8 +17230,8 @@
         </p:nvSpPr>
         <p:spPr>
           <a:xfrm>
-            <a:off x="4440936" y="2858414"/>
-            <a:ext cx="365760" cy="755294"/>
+            <a:off x="4440936" y="2931566"/>
+            <a:ext cx="365760" cy="828446"/>
           </a:xfrm>
           <a:prstGeom prst="rect">
             <a:avLst/>
@@ -17387,8 +17269,8 @@
         </p:nvSpPr>
         <p:spPr>
           <a:xfrm>
-            <a:off x="4788408" y="2858414"/>
-            <a:ext cx="1825752" cy="755294"/>
+            <a:off x="4788408" y="2931566"/>
+            <a:ext cx="1825752" cy="828446"/>
           </a:xfrm>
           <a:prstGeom prst="rect">
             <a:avLst/>
@@ -17466,8 +17348,8 @@
         </p:nvSpPr>
         <p:spPr>
           <a:xfrm>
-            <a:off x="6632448" y="2858414"/>
-            <a:ext cx="1115568" cy="755294"/>
+            <a:off x="6632448" y="2931566"/>
+            <a:ext cx="1115568" cy="828446"/>
           </a:xfrm>
           <a:prstGeom prst="rect">
             <a:avLst/>
@@ -17505,8 +17387,8 @@
         </p:nvSpPr>
         <p:spPr>
           <a:xfrm>
-            <a:off x="4349496" y="3613709"/>
-            <a:ext cx="3489960" cy="755294"/>
+            <a:off x="4349496" y="3760013"/>
+            <a:ext cx="3489960" cy="828446"/>
           </a:xfrm>
           <a:prstGeom prst="rect">
             <a:avLst/>
@@ -17525,8 +17407,8 @@
         </p:nvSpPr>
         <p:spPr>
           <a:xfrm>
-            <a:off x="4440936" y="3613709"/>
-            <a:ext cx="365760" cy="755294"/>
+            <a:off x="4440936" y="3760013"/>
+            <a:ext cx="365760" cy="828446"/>
           </a:xfrm>
           <a:prstGeom prst="rect">
             <a:avLst/>
@@ -17564,8 +17446,8 @@
         </p:nvSpPr>
         <p:spPr>
           <a:xfrm>
-            <a:off x="4788408" y="3613709"/>
-            <a:ext cx="1825752" cy="755294"/>
+            <a:off x="4788408" y="3760013"/>
+            <a:ext cx="1825752" cy="828446"/>
           </a:xfrm>
           <a:prstGeom prst="rect">
             <a:avLst/>
@@ -17643,8 +17525,8 @@
         </p:nvSpPr>
         <p:spPr>
           <a:xfrm>
-            <a:off x="6632448" y="3613709"/>
-            <a:ext cx="1115568" cy="755294"/>
+            <a:off x="6632448" y="3760013"/>
+            <a:ext cx="1115568" cy="828446"/>
           </a:xfrm>
           <a:prstGeom prst="rect">
             <a:avLst/>
@@ -17682,8 +17564,8 @@
         </p:nvSpPr>
         <p:spPr>
           <a:xfrm>
-            <a:off x="4440936" y="4369003"/>
-            <a:ext cx="365760" cy="755294"/>
+            <a:off x="4440936" y="4588459"/>
+            <a:ext cx="365760" cy="828446"/>
           </a:xfrm>
           <a:prstGeom prst="rect">
             <a:avLst/>
@@ -17721,8 +17603,8 @@
         </p:nvSpPr>
         <p:spPr>
           <a:xfrm>
-            <a:off x="4788408" y="4369003"/>
-            <a:ext cx="1825752" cy="755294"/>
+            <a:off x="4788408" y="4588459"/>
+            <a:ext cx="1825752" cy="828446"/>
           </a:xfrm>
           <a:prstGeom prst="rect">
             <a:avLst/>
@@ -17800,8 +17682,8 @@
         </p:nvSpPr>
         <p:spPr>
           <a:xfrm>
-            <a:off x="6632448" y="4369003"/>
-            <a:ext cx="1115568" cy="755294"/>
+            <a:off x="6632448" y="4588459"/>
+            <a:ext cx="1115568" cy="828446"/>
           </a:xfrm>
           <a:prstGeom prst="rect">
             <a:avLst/>
@@ -17839,8 +17721,8 @@
         </p:nvSpPr>
         <p:spPr>
           <a:xfrm>
-            <a:off x="4349496" y="5124298"/>
-            <a:ext cx="3489960" cy="755294"/>
+            <a:off x="4349496" y="5416906"/>
+            <a:ext cx="3489960" cy="828446"/>
           </a:xfrm>
           <a:prstGeom prst="rect">
             <a:avLst/>
@@ -17859,8 +17741,8 @@
         </p:nvSpPr>
         <p:spPr>
           <a:xfrm>
-            <a:off x="4440936" y="5124298"/>
-            <a:ext cx="365760" cy="755294"/>
+            <a:off x="4440936" y="5416906"/>
+            <a:ext cx="365760" cy="828446"/>
           </a:xfrm>
           <a:prstGeom prst="rect">
             <a:avLst/>
@@ -17898,8 +17780,8 @@
         </p:nvSpPr>
         <p:spPr>
           <a:xfrm>
-            <a:off x="4788408" y="5124298"/>
-            <a:ext cx="1825752" cy="755294"/>
+            <a:off x="4788408" y="5416906"/>
+            <a:ext cx="1825752" cy="828446"/>
           </a:xfrm>
           <a:prstGeom prst="rect">
             <a:avLst/>
@@ -17977,8 +17859,8 @@
         </p:nvSpPr>
         <p:spPr>
           <a:xfrm>
-            <a:off x="6632448" y="5124298"/>
-            <a:ext cx="1115568" cy="755294"/>
+            <a:off x="6632448" y="5416906"/>
+            <a:ext cx="1115568" cy="828446"/>
           </a:xfrm>
           <a:prstGeom prst="rect">
             <a:avLst/>
@@ -18115,7 +17997,7 @@
         <p:spPr>
           <a:xfrm>
             <a:off x="8040624" y="2103120"/>
-            <a:ext cx="3489960" cy="755294"/>
+            <a:ext cx="3489960" cy="828446"/>
           </a:xfrm>
           <a:prstGeom prst="rect">
             <a:avLst/>
@@ -18135,7 +18017,7 @@
         <p:spPr>
           <a:xfrm>
             <a:off x="8132064" y="2103120"/>
-            <a:ext cx="365760" cy="755294"/>
+            <a:ext cx="365760" cy="828446"/>
           </a:xfrm>
           <a:prstGeom prst="rect">
             <a:avLst/>
@@ -18174,7 +18056,7 @@
         <p:spPr>
           <a:xfrm>
             <a:off x="8479536" y="2103120"/>
-            <a:ext cx="1825752" cy="755294"/>
+            <a:ext cx="1825752" cy="828446"/>
           </a:xfrm>
           <a:prstGeom prst="rect">
             <a:avLst/>
@@ -18253,7 +18135,7 @@
         <p:spPr>
           <a:xfrm>
             <a:off x="10323576" y="2103120"/>
-            <a:ext cx="1115568" cy="755294"/>
+            <a:ext cx="1115568" cy="828446"/>
           </a:xfrm>
           <a:prstGeom prst="rect">
             <a:avLst/>
@@ -18291,8 +18173,8 @@
         </p:nvSpPr>
         <p:spPr>
           <a:xfrm>
-            <a:off x="8132064" y="2858414"/>
-            <a:ext cx="365760" cy="755294"/>
+            <a:off x="8132064" y="2931566"/>
+            <a:ext cx="365760" cy="828446"/>
           </a:xfrm>
           <a:prstGeom prst="rect">
             <a:avLst/>
@@ -18330,8 +18212,8 @@
         </p:nvSpPr>
         <p:spPr>
           <a:xfrm>
-            <a:off x="8479536" y="2858414"/>
-            <a:ext cx="1825752" cy="755294"/>
+            <a:off x="8479536" y="2931566"/>
+            <a:ext cx="1825752" cy="828446"/>
           </a:xfrm>
           <a:prstGeom prst="rect">
             <a:avLst/>
@@ -18409,8 +18291,8 @@
         </p:nvSpPr>
         <p:spPr>
           <a:xfrm>
-            <a:off x="10323576" y="2858414"/>
-            <a:ext cx="1115568" cy="755294"/>
+            <a:off x="10323576" y="2931566"/>
+            <a:ext cx="1115568" cy="828446"/>
           </a:xfrm>
           <a:prstGeom prst="rect">
             <a:avLst/>
@@ -18448,8 +18330,8 @@
         </p:nvSpPr>
         <p:spPr>
           <a:xfrm>
-            <a:off x="8040624" y="3613709"/>
-            <a:ext cx="3489960" cy="755294"/>
+            <a:off x="8040624" y="3760013"/>
+            <a:ext cx="3489960" cy="828446"/>
           </a:xfrm>
           <a:prstGeom prst="rect">
             <a:avLst/>
@@ -18468,8 +18350,8 @@
         </p:nvSpPr>
         <p:spPr>
           <a:xfrm>
-            <a:off x="11466576" y="3650285"/>
-            <a:ext cx="64008" cy="682142"/>
+            <a:off x="11466576" y="3796589"/>
+            <a:ext cx="64008" cy="755294"/>
           </a:xfrm>
           <a:prstGeom prst="rect">
             <a:avLst/>
@@ -18488,8 +18370,8 @@
         </p:nvSpPr>
         <p:spPr>
           <a:xfrm>
-            <a:off x="8132064" y="3613709"/>
-            <a:ext cx="365760" cy="755294"/>
+            <a:off x="8132064" y="3760013"/>
+            <a:ext cx="365760" cy="828446"/>
           </a:xfrm>
           <a:prstGeom prst="rect">
             <a:avLst/>
@@ -18527,8 +18409,8 @@
         </p:nvSpPr>
         <p:spPr>
           <a:xfrm>
-            <a:off x="8479536" y="3613709"/>
-            <a:ext cx="1825752" cy="755294"/>
+            <a:off x="8479536" y="3760013"/>
+            <a:ext cx="1825752" cy="828446"/>
           </a:xfrm>
           <a:prstGeom prst="rect">
             <a:avLst/>
@@ -18606,8 +18488,8 @@
         </p:nvSpPr>
         <p:spPr>
           <a:xfrm>
-            <a:off x="10323576" y="3613709"/>
-            <a:ext cx="1115568" cy="755294"/>
+            <a:off x="10323576" y="3760013"/>
+            <a:ext cx="1115568" cy="828446"/>
           </a:xfrm>
           <a:prstGeom prst="rect">
             <a:avLst/>
@@ -18645,8 +18527,8 @@
         </p:nvSpPr>
         <p:spPr>
           <a:xfrm>
-            <a:off x="8132064" y="4369003"/>
-            <a:ext cx="365760" cy="755294"/>
+            <a:off x="8132064" y="4588459"/>
+            <a:ext cx="365760" cy="828446"/>
           </a:xfrm>
           <a:prstGeom prst="rect">
             <a:avLst/>
@@ -18684,8 +18566,8 @@
         </p:nvSpPr>
         <p:spPr>
           <a:xfrm>
-            <a:off x="8479536" y="4369003"/>
-            <a:ext cx="1825752" cy="755294"/>
+            <a:off x="8479536" y="4588459"/>
+            <a:ext cx="1825752" cy="828446"/>
           </a:xfrm>
           <a:prstGeom prst="rect">
             <a:avLst/>
@@ -18763,8 +18645,8 @@
         </p:nvSpPr>
         <p:spPr>
           <a:xfrm>
-            <a:off x="10323576" y="4369003"/>
-            <a:ext cx="1115568" cy="755294"/>
+            <a:off x="10323576" y="4588459"/>
+            <a:ext cx="1115568" cy="828446"/>
           </a:xfrm>
           <a:prstGeom prst="rect">
             <a:avLst/>
@@ -18802,8 +18684,8 @@
         </p:nvSpPr>
         <p:spPr>
           <a:xfrm>
-            <a:off x="8040624" y="5124298"/>
-            <a:ext cx="3489960" cy="755294"/>
+            <a:off x="8040624" y="5416906"/>
+            <a:ext cx="3489960" cy="828446"/>
           </a:xfrm>
           <a:prstGeom prst="rect">
             <a:avLst/>
@@ -18822,8 +18704,8 @@
         </p:nvSpPr>
         <p:spPr>
           <a:xfrm>
-            <a:off x="8132064" y="5124298"/>
-            <a:ext cx="365760" cy="755294"/>
+            <a:off x="8132064" y="5416906"/>
+            <a:ext cx="365760" cy="828446"/>
           </a:xfrm>
           <a:prstGeom prst="rect">
             <a:avLst/>
@@ -18861,8 +18743,8 @@
         </p:nvSpPr>
         <p:spPr>
           <a:xfrm>
-            <a:off x="8479536" y="5124298"/>
-            <a:ext cx="1825752" cy="755294"/>
+            <a:off x="8479536" y="5416906"/>
+            <a:ext cx="1825752" cy="828446"/>
           </a:xfrm>
           <a:prstGeom prst="rect">
             <a:avLst/>
@@ -18940,8 +18822,8 @@
         </p:nvSpPr>
         <p:spPr>
           <a:xfrm>
-            <a:off x="10323576" y="5124298"/>
-            <a:ext cx="1115568" cy="755294"/>
+            <a:off x="10323576" y="5416906"/>
+            <a:ext cx="1115568" cy="828446"/>
           </a:xfrm>
           <a:prstGeom prst="rect">
             <a:avLst/>
@@ -18966,65 +18848,6 @@
                 <a:cs typeface="Inter" pitchFamily="34" charset="-120"/>
               </a:rPr>
               <a:t>+3.3 pts</a:t>
-            </a:r>
-            <a:endParaRPr lang="en-US" sz="1600" dirty="0"/>
-          </a:p>
-        </p:txBody>
-      </p:sp>
-      <p:sp>
-        <p:nvSpPr>
-          <p:cNvPr id="71" name="Shape 69"/>
-          <p:cNvSpPr/>
-          <p:nvPr/>
-        </p:nvSpPr>
-        <p:spPr>
-          <a:xfrm>
-            <a:off x="457200" y="6126480"/>
-            <a:ext cx="11274552" cy="615696"/>
-          </a:xfrm>
-          <a:prstGeom prst="rect">
-            <a:avLst/>
-          </a:prstGeom>
-          <a:solidFill>
-            <a:srgbClr val="EDF4FA"/>
-          </a:solidFill>
-          <a:ln/>
-        </p:spPr>
-      </p:sp>
-      <p:sp>
-        <p:nvSpPr>
-          <p:cNvPr id="72" name="Text 70"/>
-          <p:cNvSpPr txBox="1"/>
-          <p:nvPr/>
-        </p:nvSpPr>
-        <p:spPr>
-          <a:xfrm>
-            <a:off x="658368" y="6144768"/>
-            <a:ext cx="10927080" cy="579120"/>
-          </a:xfrm>
-          <a:prstGeom prst="rect">
-            <a:avLst/>
-          </a:prstGeom>
-          <a:noFill/>
-          <a:ln/>
-        </p:spPr>
-        <p:txBody>
-          <a:bodyPr wrap="square" lIns="0" tIns="0" rIns="0" bIns="0" rtlCol="0" anchor="ctr"/>
-          <a:lstStyle/>
-          <a:p>
-            <a:pPr indent="0" marL="0">
-              <a:buNone/>
-            </a:pPr>
-            <a:r>
-              <a:rPr lang="en-US" sz="1600" b="1" dirty="0">
-                <a:solidFill>
-                  <a:srgbClr val="0B2C4A"/>
-                </a:solidFill>
-                <a:latin typeface="Inter" pitchFamily="34" charset="0"/>
-                <a:ea typeface="Inter" pitchFamily="34" charset="-122"/>
-                <a:cs typeface="Inter" pitchFamily="34" charset="-120"/>
-              </a:rPr>
-              <a:t>Ask Acura, Honda Spokane and LR Reno what changed. Ask Nissan, LR LV and Mazda what got in the way. Ask LR Henderson, Kia St George and Hyundai St George what they started this year.</a:t>
             </a:r>
             <a:endParaRPr lang="en-US" sz="1600" dirty="0"/>
           </a:p>
@@ -20023,7 +19846,7 @@
         <p:spPr>
           <a:xfrm>
             <a:off x="457200" y="1207008"/>
-            <a:ext cx="11274552" cy="4782312"/>
+            <a:ext cx="11274552" cy="5148072"/>
           </a:xfrm>
           <a:prstGeom prst="rect">
             <a:avLst/>
@@ -20200,7 +20023,7 @@
         <p:spPr>
           <a:xfrm>
             <a:off x="658368" y="1847088"/>
-            <a:ext cx="310896" cy="239896"/>
+            <a:ext cx="310896" cy="261411"/>
           </a:xfrm>
           <a:prstGeom prst="rect">
             <a:avLst/>
@@ -20239,7 +20062,7 @@
         <p:spPr>
           <a:xfrm>
             <a:off x="1014984" y="1847088"/>
-            <a:ext cx="1920240" cy="239896"/>
+            <a:ext cx="1920240" cy="261411"/>
           </a:xfrm>
           <a:prstGeom prst="rect">
             <a:avLst/>
@@ -20277,8 +20100,8 @@
         </p:nvSpPr>
         <p:spPr>
           <a:xfrm>
-            <a:off x="3008376" y="1907062"/>
-            <a:ext cx="1691640" cy="119948"/>
+            <a:off x="3008376" y="1912441"/>
+            <a:ext cx="1691640" cy="130705"/>
           </a:xfrm>
           <a:prstGeom prst="rect">
             <a:avLst/>
@@ -20298,7 +20121,7 @@
         <p:spPr>
           <a:xfrm>
             <a:off x="4754880" y="1847088"/>
-            <a:ext cx="1143000" cy="239896"/>
+            <a:ext cx="1143000" cy="261411"/>
           </a:xfrm>
           <a:prstGeom prst="rect">
             <a:avLst/>
@@ -20336,8 +20159,8 @@
         </p:nvSpPr>
         <p:spPr>
           <a:xfrm>
-            <a:off x="658368" y="2086984"/>
-            <a:ext cx="310896" cy="239896"/>
+            <a:off x="658368" y="2108499"/>
+            <a:ext cx="310896" cy="261411"/>
           </a:xfrm>
           <a:prstGeom prst="rect">
             <a:avLst/>
@@ -20375,8 +20198,8 @@
         </p:nvSpPr>
         <p:spPr>
           <a:xfrm>
-            <a:off x="1014984" y="2086984"/>
-            <a:ext cx="1920240" cy="239896"/>
+            <a:off x="1014984" y="2108499"/>
+            <a:ext cx="1920240" cy="261411"/>
           </a:xfrm>
           <a:prstGeom prst="rect">
             <a:avLst/>
@@ -20414,8 +20237,8 @@
         </p:nvSpPr>
         <p:spPr>
           <a:xfrm>
-            <a:off x="3008376" y="2146957"/>
-            <a:ext cx="1571389" cy="119948"/>
+            <a:off x="3008376" y="2173852"/>
+            <a:ext cx="1571389" cy="130705"/>
           </a:xfrm>
           <a:prstGeom prst="rect">
             <a:avLst/>
@@ -20434,8 +20257,8 @@
         </p:nvSpPr>
         <p:spPr>
           <a:xfrm>
-            <a:off x="4754880" y="2086984"/>
-            <a:ext cx="1143000" cy="239896"/>
+            <a:off x="4754880" y="2108499"/>
+            <a:ext cx="1143000" cy="261411"/>
           </a:xfrm>
           <a:prstGeom prst="rect">
             <a:avLst/>
@@ -20473,8 +20296,8 @@
         </p:nvSpPr>
         <p:spPr>
           <a:xfrm>
-            <a:off x="658368" y="2326879"/>
-            <a:ext cx="310896" cy="239896"/>
+            <a:off x="658368" y="2369910"/>
+            <a:ext cx="310896" cy="261411"/>
           </a:xfrm>
           <a:prstGeom prst="rect">
             <a:avLst/>
@@ -20512,8 +20335,8 @@
         </p:nvSpPr>
         <p:spPr>
           <a:xfrm>
-            <a:off x="1014984" y="2326879"/>
-            <a:ext cx="1920240" cy="239896"/>
+            <a:off x="1014984" y="2369910"/>
+            <a:ext cx="1920240" cy="261411"/>
           </a:xfrm>
           <a:prstGeom prst="rect">
             <a:avLst/>
@@ -20551,8 +20374,8 @@
         </p:nvSpPr>
         <p:spPr>
           <a:xfrm>
-            <a:off x="3008376" y="2386853"/>
-            <a:ext cx="1526083" cy="119948"/>
+            <a:off x="3008376" y="2435262"/>
+            <a:ext cx="1526083" cy="130705"/>
           </a:xfrm>
           <a:prstGeom prst="rect">
             <a:avLst/>
@@ -20571,8 +20394,8 @@
         </p:nvSpPr>
         <p:spPr>
           <a:xfrm>
-            <a:off x="4754880" y="2326879"/>
-            <a:ext cx="1143000" cy="239896"/>
+            <a:off x="4754880" y="2369910"/>
+            <a:ext cx="1143000" cy="261411"/>
           </a:xfrm>
           <a:prstGeom prst="rect">
             <a:avLst/>
@@ -20610,8 +20433,8 @@
         </p:nvSpPr>
         <p:spPr>
           <a:xfrm>
-            <a:off x="658368" y="2566775"/>
-            <a:ext cx="310896" cy="239896"/>
+            <a:off x="658368" y="2631320"/>
+            <a:ext cx="310896" cy="261411"/>
           </a:xfrm>
           <a:prstGeom prst="rect">
             <a:avLst/>
@@ -20649,8 +20472,8 @@
         </p:nvSpPr>
         <p:spPr>
           <a:xfrm>
-            <a:off x="1014984" y="2566775"/>
-            <a:ext cx="1920240" cy="239896"/>
+            <a:off x="1014984" y="2631320"/>
+            <a:ext cx="1920240" cy="261411"/>
           </a:xfrm>
           <a:prstGeom prst="rect">
             <a:avLst/>
@@ -20688,8 +20511,8 @@
         </p:nvSpPr>
         <p:spPr>
           <a:xfrm>
-            <a:off x="3008376" y="2626748"/>
-            <a:ext cx="1427052" cy="119948"/>
+            <a:off x="3008376" y="2696673"/>
+            <a:ext cx="1427052" cy="130705"/>
           </a:xfrm>
           <a:prstGeom prst="rect">
             <a:avLst/>
@@ -20708,8 +20531,8 @@
         </p:nvSpPr>
         <p:spPr>
           <a:xfrm>
-            <a:off x="4754880" y="2566775"/>
-            <a:ext cx="1143000" cy="239896"/>
+            <a:off x="4754880" y="2631320"/>
+            <a:ext cx="1143000" cy="261411"/>
           </a:xfrm>
           <a:prstGeom prst="rect">
             <a:avLst/>
@@ -20747,8 +20570,8 @@
         </p:nvSpPr>
         <p:spPr>
           <a:xfrm>
-            <a:off x="658368" y="2806670"/>
-            <a:ext cx="310896" cy="239896"/>
+            <a:off x="658368" y="2892731"/>
+            <a:ext cx="310896" cy="261411"/>
           </a:xfrm>
           <a:prstGeom prst="rect">
             <a:avLst/>
@@ -20786,8 +20609,8 @@
         </p:nvSpPr>
         <p:spPr>
           <a:xfrm>
-            <a:off x="1014984" y="2806670"/>
-            <a:ext cx="1920240" cy="239896"/>
+            <a:off x="1014984" y="2892731"/>
+            <a:ext cx="1920240" cy="261411"/>
           </a:xfrm>
           <a:prstGeom prst="rect">
             <a:avLst/>
@@ -20825,8 +20648,8 @@
         </p:nvSpPr>
         <p:spPr>
           <a:xfrm>
-            <a:off x="3008376" y="2866644"/>
-            <a:ext cx="1404264" cy="119948"/>
+            <a:off x="3008376" y="2958084"/>
+            <a:ext cx="1404264" cy="130705"/>
           </a:xfrm>
           <a:prstGeom prst="rect">
             <a:avLst/>
@@ -20845,8 +20668,8 @@
         </p:nvSpPr>
         <p:spPr>
           <a:xfrm>
-            <a:off x="4754880" y="2806670"/>
-            <a:ext cx="1143000" cy="239896"/>
+            <a:off x="4754880" y="2892731"/>
+            <a:ext cx="1143000" cy="261411"/>
           </a:xfrm>
           <a:prstGeom prst="rect">
             <a:avLst/>
@@ -20884,8 +20707,8 @@
         </p:nvSpPr>
         <p:spPr>
           <a:xfrm>
-            <a:off x="658368" y="3046566"/>
-            <a:ext cx="310896" cy="239896"/>
+            <a:off x="658368" y="3154142"/>
+            <a:ext cx="310896" cy="261411"/>
           </a:xfrm>
           <a:prstGeom prst="rect">
             <a:avLst/>
@@ -20923,8 +20746,8 @@
         </p:nvSpPr>
         <p:spPr>
           <a:xfrm>
-            <a:off x="1014984" y="3046566"/>
-            <a:ext cx="1920240" cy="239896"/>
+            <a:off x="1014984" y="3154142"/>
+            <a:ext cx="1920240" cy="261411"/>
           </a:xfrm>
           <a:prstGeom prst="rect">
             <a:avLst/>
@@ -20962,8 +20785,8 @@
         </p:nvSpPr>
         <p:spPr>
           <a:xfrm>
-            <a:off x="3008376" y="3106540"/>
-            <a:ext cx="1329194" cy="119948"/>
+            <a:off x="3008376" y="3219495"/>
+            <a:ext cx="1329194" cy="130705"/>
           </a:xfrm>
           <a:prstGeom prst="rect">
             <a:avLst/>
@@ -20982,8 +20805,8 @@
         </p:nvSpPr>
         <p:spPr>
           <a:xfrm>
-            <a:off x="4754880" y="3046566"/>
-            <a:ext cx="1143000" cy="239896"/>
+            <a:off x="4754880" y="3154142"/>
+            <a:ext cx="1143000" cy="261411"/>
           </a:xfrm>
           <a:prstGeom prst="rect">
             <a:avLst/>
@@ -21021,8 +20844,8 @@
         </p:nvSpPr>
         <p:spPr>
           <a:xfrm>
-            <a:off x="658368" y="3286461"/>
-            <a:ext cx="310896" cy="239896"/>
+            <a:off x="658368" y="3415553"/>
+            <a:ext cx="310896" cy="261411"/>
           </a:xfrm>
           <a:prstGeom prst="rect">
             <a:avLst/>
@@ -21060,8 +20883,8 @@
         </p:nvSpPr>
         <p:spPr>
           <a:xfrm>
-            <a:off x="1014984" y="3286461"/>
-            <a:ext cx="1920240" cy="239896"/>
+            <a:off x="1014984" y="3415553"/>
+            <a:ext cx="1920240" cy="261411"/>
           </a:xfrm>
           <a:prstGeom prst="rect">
             <a:avLst/>
@@ -21099,8 +20922,8 @@
         </p:nvSpPr>
         <p:spPr>
           <a:xfrm>
-            <a:off x="3008376" y="3346435"/>
-            <a:ext cx="1147637" cy="119948"/>
+            <a:off x="3008376" y="3480906"/>
+            <a:ext cx="1147637" cy="130705"/>
           </a:xfrm>
           <a:prstGeom prst="rect">
             <a:avLst/>
@@ -21119,8 +20942,8 @@
         </p:nvSpPr>
         <p:spPr>
           <a:xfrm>
-            <a:off x="4754880" y="3286461"/>
-            <a:ext cx="1143000" cy="239896"/>
+            <a:off x="4754880" y="3415553"/>
+            <a:ext cx="1143000" cy="261411"/>
           </a:xfrm>
           <a:prstGeom prst="rect">
             <a:avLst/>
@@ -21158,8 +20981,8 @@
         </p:nvSpPr>
         <p:spPr>
           <a:xfrm>
-            <a:off x="658368" y="3526357"/>
-            <a:ext cx="310896" cy="239896"/>
+            <a:off x="658368" y="3676964"/>
+            <a:ext cx="310896" cy="261411"/>
           </a:xfrm>
           <a:prstGeom prst="rect">
             <a:avLst/>
@@ -21197,8 +21020,8 @@
         </p:nvSpPr>
         <p:spPr>
           <a:xfrm>
-            <a:off x="1014984" y="3526357"/>
-            <a:ext cx="1920240" cy="239896"/>
+            <a:off x="1014984" y="3676964"/>
+            <a:ext cx="1920240" cy="261411"/>
           </a:xfrm>
           <a:prstGeom prst="rect">
             <a:avLst/>
@@ -21236,8 +21059,8 @@
         </p:nvSpPr>
         <p:spPr>
           <a:xfrm>
-            <a:off x="3008376" y="3586331"/>
-            <a:ext cx="1143623" cy="119948"/>
+            <a:off x="3008376" y="3742316"/>
+            <a:ext cx="1143623" cy="130705"/>
           </a:xfrm>
           <a:prstGeom prst="rect">
             <a:avLst/>
@@ -21256,8 +21079,8 @@
         </p:nvSpPr>
         <p:spPr>
           <a:xfrm>
-            <a:off x="4754880" y="3526357"/>
-            <a:ext cx="1143000" cy="239896"/>
+            <a:off x="4754880" y="3676964"/>
+            <a:ext cx="1143000" cy="261411"/>
           </a:xfrm>
           <a:prstGeom prst="rect">
             <a:avLst/>
@@ -21295,8 +21118,8 @@
         </p:nvSpPr>
         <p:spPr>
           <a:xfrm>
-            <a:off x="658368" y="3766252"/>
-            <a:ext cx="310896" cy="239896"/>
+            <a:off x="658368" y="3938375"/>
+            <a:ext cx="310896" cy="261411"/>
           </a:xfrm>
           <a:prstGeom prst="rect">
             <a:avLst/>
@@ -21334,8 +21157,8 @@
         </p:nvSpPr>
         <p:spPr>
           <a:xfrm>
-            <a:off x="1014984" y="3766252"/>
-            <a:ext cx="1920240" cy="239896"/>
+            <a:off x="1014984" y="3938375"/>
+            <a:ext cx="1920240" cy="261411"/>
           </a:xfrm>
           <a:prstGeom prst="rect">
             <a:avLst/>
@@ -21373,8 +21196,8 @@
         </p:nvSpPr>
         <p:spPr>
           <a:xfrm>
-            <a:off x="3008376" y="3826226"/>
-            <a:ext cx="1138452" cy="119948"/>
+            <a:off x="3008376" y="4003727"/>
+            <a:ext cx="1138452" cy="130705"/>
           </a:xfrm>
           <a:prstGeom prst="rect">
             <a:avLst/>
@@ -21393,8 +21216,8 @@
         </p:nvSpPr>
         <p:spPr>
           <a:xfrm>
-            <a:off x="4754880" y="3766252"/>
-            <a:ext cx="1143000" cy="239896"/>
+            <a:off x="4754880" y="3938375"/>
+            <a:ext cx="1143000" cy="261411"/>
           </a:xfrm>
           <a:prstGeom prst="rect">
             <a:avLst/>
@@ -21432,8 +21255,8 @@
         </p:nvSpPr>
         <p:spPr>
           <a:xfrm>
-            <a:off x="658368" y="4006148"/>
-            <a:ext cx="310896" cy="239896"/>
+            <a:off x="658368" y="4199785"/>
+            <a:ext cx="310896" cy="261411"/>
           </a:xfrm>
           <a:prstGeom prst="rect">
             <a:avLst/>
@@ -21471,8 +21294,8 @@
         </p:nvSpPr>
         <p:spPr>
           <a:xfrm>
-            <a:off x="1014984" y="4006148"/>
-            <a:ext cx="1920240" cy="239896"/>
+            <a:off x="1014984" y="4199785"/>
+            <a:ext cx="1920240" cy="261411"/>
           </a:xfrm>
           <a:prstGeom prst="rect">
             <a:avLst/>
@@ -21510,8 +21333,8 @@
         </p:nvSpPr>
         <p:spPr>
           <a:xfrm>
-            <a:off x="3008376" y="4066122"/>
-            <a:ext cx="1133430" cy="119948"/>
+            <a:off x="3008376" y="4265138"/>
+            <a:ext cx="1133430" cy="130705"/>
           </a:xfrm>
           <a:prstGeom prst="rect">
             <a:avLst/>
@@ -21530,8 +21353,8 @@
         </p:nvSpPr>
         <p:spPr>
           <a:xfrm>
-            <a:off x="4754880" y="4006148"/>
-            <a:ext cx="1143000" cy="239896"/>
+            <a:off x="4754880" y="4199785"/>
+            <a:ext cx="1143000" cy="261411"/>
           </a:xfrm>
           <a:prstGeom prst="rect">
             <a:avLst/>
@@ -21569,8 +21392,8 @@
         </p:nvSpPr>
         <p:spPr>
           <a:xfrm>
-            <a:off x="658368" y="4246043"/>
-            <a:ext cx="310896" cy="239896"/>
+            <a:off x="658368" y="4461196"/>
+            <a:ext cx="310896" cy="261411"/>
           </a:xfrm>
           <a:prstGeom prst="rect">
             <a:avLst/>
@@ -21608,8 +21431,8 @@
         </p:nvSpPr>
         <p:spPr>
           <a:xfrm>
-            <a:off x="1014984" y="4246043"/>
-            <a:ext cx="1920240" cy="239896"/>
+            <a:off x="1014984" y="4461196"/>
+            <a:ext cx="1920240" cy="261411"/>
           </a:xfrm>
           <a:prstGeom prst="rect">
             <a:avLst/>
@@ -21647,8 +21470,8 @@
         </p:nvSpPr>
         <p:spPr>
           <a:xfrm>
-            <a:off x="3008376" y="4306017"/>
-            <a:ext cx="1126165" cy="119948"/>
+            <a:off x="3008376" y="4526549"/>
+            <a:ext cx="1126165" cy="130705"/>
           </a:xfrm>
           <a:prstGeom prst="rect">
             <a:avLst/>
@@ -21667,8 +21490,8 @@
         </p:nvSpPr>
         <p:spPr>
           <a:xfrm>
-            <a:off x="4754880" y="4246043"/>
-            <a:ext cx="1143000" cy="239896"/>
+            <a:off x="4754880" y="4461196"/>
+            <a:ext cx="1143000" cy="261411"/>
           </a:xfrm>
           <a:prstGeom prst="rect">
             <a:avLst/>
@@ -21706,8 +21529,8 @@
         </p:nvSpPr>
         <p:spPr>
           <a:xfrm>
-            <a:off x="658368" y="4485939"/>
-            <a:ext cx="310896" cy="239896"/>
+            <a:off x="658368" y="4722607"/>
+            <a:ext cx="310896" cy="261411"/>
           </a:xfrm>
           <a:prstGeom prst="rect">
             <a:avLst/>
@@ -21745,8 +21568,8 @@
         </p:nvSpPr>
         <p:spPr>
           <a:xfrm>
-            <a:off x="1014984" y="4485939"/>
-            <a:ext cx="1920240" cy="239896"/>
+            <a:off x="1014984" y="4722607"/>
+            <a:ext cx="1920240" cy="261411"/>
           </a:xfrm>
           <a:prstGeom prst="rect">
             <a:avLst/>
@@ -21784,8 +21607,8 @@
         </p:nvSpPr>
         <p:spPr>
           <a:xfrm>
-            <a:off x="3008376" y="4545913"/>
-            <a:ext cx="1120821" cy="119948"/>
+            <a:off x="3008376" y="4787960"/>
+            <a:ext cx="1120821" cy="130705"/>
           </a:xfrm>
           <a:prstGeom prst="rect">
             <a:avLst/>
@@ -21804,8 +21627,8 @@
         </p:nvSpPr>
         <p:spPr>
           <a:xfrm>
-            <a:off x="4754880" y="4485939"/>
-            <a:ext cx="1143000" cy="239896"/>
+            <a:off x="4754880" y="4722607"/>
+            <a:ext cx="1143000" cy="261411"/>
           </a:xfrm>
           <a:prstGeom prst="rect">
             <a:avLst/>
@@ -21843,8 +21666,8 @@
         </p:nvSpPr>
         <p:spPr>
           <a:xfrm>
-            <a:off x="658368" y="4725834"/>
-            <a:ext cx="310896" cy="239896"/>
+            <a:off x="658368" y="4984018"/>
+            <a:ext cx="310896" cy="261411"/>
           </a:xfrm>
           <a:prstGeom prst="rect">
             <a:avLst/>
@@ -21882,8 +21705,8 @@
         </p:nvSpPr>
         <p:spPr>
           <a:xfrm>
-            <a:off x="1014984" y="4725834"/>
-            <a:ext cx="1920240" cy="239896"/>
+            <a:off x="1014984" y="4984018"/>
+            <a:ext cx="1920240" cy="261411"/>
           </a:xfrm>
           <a:prstGeom prst="rect">
             <a:avLst/>
@@ -21921,8 +21744,8 @@
         </p:nvSpPr>
         <p:spPr>
           <a:xfrm>
-            <a:off x="3008376" y="4785808"/>
-            <a:ext cx="1111196" cy="119948"/>
+            <a:off x="3008376" y="5049371"/>
+            <a:ext cx="1111196" cy="130705"/>
           </a:xfrm>
           <a:prstGeom prst="rect">
             <a:avLst/>
@@ -21941,8 +21764,8 @@
         </p:nvSpPr>
         <p:spPr>
           <a:xfrm>
-            <a:off x="4754880" y="4725834"/>
-            <a:ext cx="1143000" cy="239896"/>
+            <a:off x="4754880" y="4984018"/>
+            <a:ext cx="1143000" cy="261411"/>
           </a:xfrm>
           <a:prstGeom prst="rect">
             <a:avLst/>
@@ -21980,8 +21803,8 @@
         </p:nvSpPr>
         <p:spPr>
           <a:xfrm>
-            <a:off x="658368" y="4965730"/>
-            <a:ext cx="310896" cy="239896"/>
+            <a:off x="658368" y="5245429"/>
+            <a:ext cx="310896" cy="261411"/>
           </a:xfrm>
           <a:prstGeom prst="rect">
             <a:avLst/>
@@ -22019,8 +21842,8 @@
         </p:nvSpPr>
         <p:spPr>
           <a:xfrm>
-            <a:off x="1014984" y="4965730"/>
-            <a:ext cx="1920240" cy="239896"/>
+            <a:off x="1014984" y="5245429"/>
+            <a:ext cx="1920240" cy="261411"/>
           </a:xfrm>
           <a:prstGeom prst="rect">
             <a:avLst/>
@@ -22058,8 +21881,8 @@
         </p:nvSpPr>
         <p:spPr>
           <a:xfrm>
-            <a:off x="3008376" y="5025704"/>
-            <a:ext cx="1097912" cy="119948"/>
+            <a:off x="3008376" y="5310781"/>
+            <a:ext cx="1097912" cy="130705"/>
           </a:xfrm>
           <a:prstGeom prst="rect">
             <a:avLst/>
@@ -22078,8 +21901,8 @@
         </p:nvSpPr>
         <p:spPr>
           <a:xfrm>
-            <a:off x="4754880" y="4965730"/>
-            <a:ext cx="1143000" cy="239896"/>
+            <a:off x="4754880" y="5245429"/>
+            <a:ext cx="1143000" cy="261411"/>
           </a:xfrm>
           <a:prstGeom prst="rect">
             <a:avLst/>
@@ -22117,8 +21940,8 @@
         </p:nvSpPr>
         <p:spPr>
           <a:xfrm>
-            <a:off x="658368" y="5205625"/>
-            <a:ext cx="310896" cy="239896"/>
+            <a:off x="658368" y="5506840"/>
+            <a:ext cx="310896" cy="261411"/>
           </a:xfrm>
           <a:prstGeom prst="rect">
             <a:avLst/>
@@ -22156,8 +21979,8 @@
         </p:nvSpPr>
         <p:spPr>
           <a:xfrm>
-            <a:off x="1014984" y="5205625"/>
-            <a:ext cx="1920240" cy="239896"/>
+            <a:off x="1014984" y="5506840"/>
+            <a:ext cx="1920240" cy="261411"/>
           </a:xfrm>
           <a:prstGeom prst="rect">
             <a:avLst/>
@@ -22195,8 +22018,8 @@
         </p:nvSpPr>
         <p:spPr>
           <a:xfrm>
-            <a:off x="3008376" y="5265599"/>
-            <a:ext cx="1082615" cy="119948"/>
+            <a:off x="3008376" y="5572192"/>
+            <a:ext cx="1082615" cy="130705"/>
           </a:xfrm>
           <a:prstGeom prst="rect">
             <a:avLst/>
@@ -22215,8 +22038,8 @@
         </p:nvSpPr>
         <p:spPr>
           <a:xfrm>
-            <a:off x="4754880" y="5205625"/>
-            <a:ext cx="1143000" cy="239896"/>
+            <a:off x="4754880" y="5506840"/>
+            <a:ext cx="1143000" cy="261411"/>
           </a:xfrm>
           <a:prstGeom prst="rect">
             <a:avLst/>
@@ -22254,8 +22077,8 @@
         </p:nvSpPr>
         <p:spPr>
           <a:xfrm>
-            <a:off x="658368" y="5445521"/>
-            <a:ext cx="310896" cy="239896"/>
+            <a:off x="658368" y="5768250"/>
+            <a:ext cx="310896" cy="261411"/>
           </a:xfrm>
           <a:prstGeom prst="rect">
             <a:avLst/>
@@ -22293,8 +22116,8 @@
         </p:nvSpPr>
         <p:spPr>
           <a:xfrm>
-            <a:off x="1014984" y="5445521"/>
-            <a:ext cx="1920240" cy="239896"/>
+            <a:off x="1014984" y="5768250"/>
+            <a:ext cx="1920240" cy="261411"/>
           </a:xfrm>
           <a:prstGeom prst="rect">
             <a:avLst/>
@@ -22332,8 +22155,8 @@
         </p:nvSpPr>
         <p:spPr>
           <a:xfrm>
-            <a:off x="3008376" y="5505495"/>
-            <a:ext cx="1017763" cy="119948"/>
+            <a:off x="3008376" y="5833603"/>
+            <a:ext cx="1017763" cy="130705"/>
           </a:xfrm>
           <a:prstGeom prst="rect">
             <a:avLst/>
@@ -22352,8 +22175,8 @@
         </p:nvSpPr>
         <p:spPr>
           <a:xfrm>
-            <a:off x="4754880" y="5445521"/>
-            <a:ext cx="1143000" cy="239896"/>
+            <a:off x="4754880" y="5768250"/>
+            <a:ext cx="1143000" cy="261411"/>
           </a:xfrm>
           <a:prstGeom prst="rect">
             <a:avLst/>
@@ -22391,8 +22214,8 @@
         </p:nvSpPr>
         <p:spPr>
           <a:xfrm>
-            <a:off x="658368" y="5685416"/>
-            <a:ext cx="310896" cy="239896"/>
+            <a:off x="658368" y="6029661"/>
+            <a:ext cx="310896" cy="261411"/>
           </a:xfrm>
           <a:prstGeom prst="rect">
             <a:avLst/>
@@ -22430,8 +22253,8 @@
         </p:nvSpPr>
         <p:spPr>
           <a:xfrm>
-            <a:off x="1014984" y="5685416"/>
-            <a:ext cx="1920240" cy="239896"/>
+            <a:off x="1014984" y="6029661"/>
+            <a:ext cx="1920240" cy="261411"/>
           </a:xfrm>
           <a:prstGeom prst="rect">
             <a:avLst/>
@@ -22469,8 +22292,8 @@
         </p:nvSpPr>
         <p:spPr>
           <a:xfrm>
-            <a:off x="3008376" y="5745390"/>
-            <a:ext cx="975057" cy="119948"/>
+            <a:off x="3008376" y="6095014"/>
+            <a:ext cx="975057" cy="130705"/>
           </a:xfrm>
           <a:prstGeom prst="rect">
             <a:avLst/>
@@ -22489,8 +22312,8 @@
         </p:nvSpPr>
         <p:spPr>
           <a:xfrm>
-            <a:off x="4754880" y="5685416"/>
-            <a:ext cx="1143000" cy="239896"/>
+            <a:off x="4754880" y="6029661"/>
+            <a:ext cx="1143000" cy="261411"/>
           </a:xfrm>
           <a:prstGeom prst="rect">
             <a:avLst/>
@@ -22529,7 +22352,7 @@
         <p:spPr>
           <a:xfrm>
             <a:off x="6208776" y="1847088"/>
-            <a:ext cx="310896" cy="239896"/>
+            <a:ext cx="310896" cy="261411"/>
           </a:xfrm>
           <a:prstGeom prst="rect">
             <a:avLst/>
@@ -22568,7 +22391,7 @@
         <p:spPr>
           <a:xfrm>
             <a:off x="6565392" y="1847088"/>
-            <a:ext cx="1920240" cy="239896"/>
+            <a:ext cx="1920240" cy="261411"/>
           </a:xfrm>
           <a:prstGeom prst="rect">
             <a:avLst/>
@@ -22606,8 +22429,8 @@
         </p:nvSpPr>
         <p:spPr>
           <a:xfrm>
-            <a:off x="8558784" y="1907062"/>
-            <a:ext cx="973182" cy="119948"/>
+            <a:off x="8558784" y="1912441"/>
+            <a:ext cx="973182" cy="130705"/>
           </a:xfrm>
           <a:prstGeom prst="rect">
             <a:avLst/>
@@ -22627,7 +22450,7 @@
         <p:spPr>
           <a:xfrm>
             <a:off x="10305288" y="1847088"/>
-            <a:ext cx="1143000" cy="239896"/>
+            <a:ext cx="1143000" cy="261411"/>
           </a:xfrm>
           <a:prstGeom prst="rect">
             <a:avLst/>
@@ -22665,8 +22488,8 @@
         </p:nvSpPr>
         <p:spPr>
           <a:xfrm>
-            <a:off x="6208776" y="2086984"/>
-            <a:ext cx="310896" cy="239896"/>
+            <a:off x="6208776" y="2108499"/>
+            <a:ext cx="310896" cy="261411"/>
           </a:xfrm>
           <a:prstGeom prst="rect">
             <a:avLst/>
@@ -22704,8 +22527,8 @@
         </p:nvSpPr>
         <p:spPr>
           <a:xfrm>
-            <a:off x="6565392" y="2086984"/>
-            <a:ext cx="1920240" cy="239896"/>
+            <a:off x="6565392" y="2108499"/>
+            <a:ext cx="1920240" cy="261411"/>
           </a:xfrm>
           <a:prstGeom prst="rect">
             <a:avLst/>
@@ -22743,8 +22566,8 @@
         </p:nvSpPr>
         <p:spPr>
           <a:xfrm>
-            <a:off x="8558784" y="2146957"/>
-            <a:ext cx="944183" cy="119948"/>
+            <a:off x="8558784" y="2173852"/>
+            <a:ext cx="944183" cy="130705"/>
           </a:xfrm>
           <a:prstGeom prst="rect">
             <a:avLst/>
@@ -22763,8 +22586,8 @@
         </p:nvSpPr>
         <p:spPr>
           <a:xfrm>
-            <a:off x="10305288" y="2086984"/>
-            <a:ext cx="1143000" cy="239896"/>
+            <a:off x="10305288" y="2108499"/>
+            <a:ext cx="1143000" cy="261411"/>
           </a:xfrm>
           <a:prstGeom prst="rect">
             <a:avLst/>
@@ -22802,8 +22625,8 @@
         </p:nvSpPr>
         <p:spPr>
           <a:xfrm>
-            <a:off x="6208776" y="2326879"/>
-            <a:ext cx="310896" cy="239896"/>
+            <a:off x="6208776" y="2369910"/>
+            <a:ext cx="310896" cy="261411"/>
           </a:xfrm>
           <a:prstGeom prst="rect">
             <a:avLst/>
@@ -22841,8 +22664,8 @@
         </p:nvSpPr>
         <p:spPr>
           <a:xfrm>
-            <a:off x="6565392" y="2326879"/>
-            <a:ext cx="1920240" cy="239896"/>
+            <a:off x="6565392" y="2369910"/>
+            <a:ext cx="1920240" cy="261411"/>
           </a:xfrm>
           <a:prstGeom prst="rect">
             <a:avLst/>
@@ -22880,8 +22703,8 @@
         </p:nvSpPr>
         <p:spPr>
           <a:xfrm>
-            <a:off x="8558784" y="2386853"/>
-            <a:ext cx="900321" cy="119948"/>
+            <a:off x="8558784" y="2435262"/>
+            <a:ext cx="900321" cy="130705"/>
           </a:xfrm>
           <a:prstGeom prst="rect">
             <a:avLst/>
@@ -22900,8 +22723,8 @@
         </p:nvSpPr>
         <p:spPr>
           <a:xfrm>
-            <a:off x="10305288" y="2326879"/>
-            <a:ext cx="1143000" cy="239896"/>
+            <a:off x="10305288" y="2369910"/>
+            <a:ext cx="1143000" cy="261411"/>
           </a:xfrm>
           <a:prstGeom prst="rect">
             <a:avLst/>
@@ -22939,8 +22762,8 @@
         </p:nvSpPr>
         <p:spPr>
           <a:xfrm>
-            <a:off x="6208776" y="2566775"/>
-            <a:ext cx="310896" cy="239896"/>
+            <a:off x="6208776" y="2631320"/>
+            <a:ext cx="310896" cy="261411"/>
           </a:xfrm>
           <a:prstGeom prst="rect">
             <a:avLst/>
@@ -22978,8 +22801,8 @@
         </p:nvSpPr>
         <p:spPr>
           <a:xfrm>
-            <a:off x="6565392" y="2566775"/>
-            <a:ext cx="1920240" cy="239896"/>
+            <a:off x="6565392" y="2631320"/>
+            <a:ext cx="1920240" cy="261411"/>
           </a:xfrm>
           <a:prstGeom prst="rect">
             <a:avLst/>
@@ -23017,8 +22840,8 @@
         </p:nvSpPr>
         <p:spPr>
           <a:xfrm>
-            <a:off x="8558784" y="2626748"/>
-            <a:ext cx="865365" cy="119948"/>
+            <a:off x="8558784" y="2696673"/>
+            <a:ext cx="865365" cy="130705"/>
           </a:xfrm>
           <a:prstGeom prst="rect">
             <a:avLst/>
@@ -23037,8 +22860,8 @@
         </p:nvSpPr>
         <p:spPr>
           <a:xfrm>
-            <a:off x="10305288" y="2566775"/>
-            <a:ext cx="1143000" cy="239896"/>
+            <a:off x="10305288" y="2631320"/>
+            <a:ext cx="1143000" cy="261411"/>
           </a:xfrm>
           <a:prstGeom prst="rect">
             <a:avLst/>
@@ -23076,8 +22899,8 @@
         </p:nvSpPr>
         <p:spPr>
           <a:xfrm>
-            <a:off x="6208776" y="2806670"/>
-            <a:ext cx="310896" cy="239896"/>
+            <a:off x="6208776" y="2892731"/>
+            <a:ext cx="310896" cy="261411"/>
           </a:xfrm>
           <a:prstGeom prst="rect">
             <a:avLst/>
@@ -23115,8 +22938,8 @@
         </p:nvSpPr>
         <p:spPr>
           <a:xfrm>
-            <a:off x="6565392" y="2806670"/>
-            <a:ext cx="1920240" cy="239896"/>
+            <a:off x="6565392" y="2892731"/>
+            <a:ext cx="1920240" cy="261411"/>
           </a:xfrm>
           <a:prstGeom prst="rect">
             <a:avLst/>
@@ -23154,8 +22977,8 @@
         </p:nvSpPr>
         <p:spPr>
           <a:xfrm>
-            <a:off x="8558784" y="2866644"/>
-            <a:ext cx="844338" cy="119948"/>
+            <a:off x="8558784" y="2958084"/>
+            <a:ext cx="844338" cy="130705"/>
           </a:xfrm>
           <a:prstGeom prst="rect">
             <a:avLst/>
@@ -23174,8 +22997,8 @@
         </p:nvSpPr>
         <p:spPr>
           <a:xfrm>
-            <a:off x="10305288" y="2806670"/>
-            <a:ext cx="1143000" cy="239896"/>
+            <a:off x="10305288" y="2892731"/>
+            <a:ext cx="1143000" cy="261411"/>
           </a:xfrm>
           <a:prstGeom prst="rect">
             <a:avLst/>
@@ -23213,8 +23036,8 @@
         </p:nvSpPr>
         <p:spPr>
           <a:xfrm>
-            <a:off x="6208776" y="3046566"/>
-            <a:ext cx="310896" cy="239896"/>
+            <a:off x="6208776" y="3154142"/>
+            <a:ext cx="310896" cy="261411"/>
           </a:xfrm>
           <a:prstGeom prst="rect">
             <a:avLst/>
@@ -23252,8 +23075,8 @@
         </p:nvSpPr>
         <p:spPr>
           <a:xfrm>
-            <a:off x="6565392" y="3046566"/>
-            <a:ext cx="1920240" cy="239896"/>
+            <a:off x="6565392" y="3154142"/>
+            <a:ext cx="1920240" cy="261411"/>
           </a:xfrm>
           <a:prstGeom prst="rect">
             <a:avLst/>
@@ -23291,8 +23114,8 @@
         </p:nvSpPr>
         <p:spPr>
           <a:xfrm>
-            <a:off x="8558784" y="3106540"/>
-            <a:ext cx="788830" cy="119948"/>
+            <a:off x="8558784" y="3219495"/>
+            <a:ext cx="788830" cy="130705"/>
           </a:xfrm>
           <a:prstGeom prst="rect">
             <a:avLst/>
@@ -23311,8 +23134,8 @@
         </p:nvSpPr>
         <p:spPr>
           <a:xfrm>
-            <a:off x="10305288" y="3046566"/>
-            <a:ext cx="1143000" cy="239896"/>
+            <a:off x="10305288" y="3154142"/>
+            <a:ext cx="1143000" cy="261411"/>
           </a:xfrm>
           <a:prstGeom prst="rect">
             <a:avLst/>
@@ -23350,8 +23173,8 @@
         </p:nvSpPr>
         <p:spPr>
           <a:xfrm>
-            <a:off x="6208776" y="3286461"/>
-            <a:ext cx="310896" cy="239896"/>
+            <a:off x="6208776" y="3415553"/>
+            <a:ext cx="310896" cy="261411"/>
           </a:xfrm>
           <a:prstGeom prst="rect">
             <a:avLst/>
@@ -23389,8 +23212,8 @@
         </p:nvSpPr>
         <p:spPr>
           <a:xfrm>
-            <a:off x="6565392" y="3286461"/>
-            <a:ext cx="1920240" cy="239896"/>
+            <a:off x="6565392" y="3415553"/>
+            <a:ext cx="1920240" cy="261411"/>
           </a:xfrm>
           <a:prstGeom prst="rect">
             <a:avLst/>
@@ -23428,8 +23251,8 @@
         </p:nvSpPr>
         <p:spPr>
           <a:xfrm>
-            <a:off x="8558784" y="3346435"/>
-            <a:ext cx="763564" cy="119948"/>
+            <a:off x="8558784" y="3480906"/>
+            <a:ext cx="763564" cy="130705"/>
           </a:xfrm>
           <a:prstGeom prst="rect">
             <a:avLst/>
@@ -23448,8 +23271,8 @@
         </p:nvSpPr>
         <p:spPr>
           <a:xfrm>
-            <a:off x="10305288" y="3286461"/>
-            <a:ext cx="1143000" cy="239896"/>
+            <a:off x="10305288" y="3415553"/>
+            <a:ext cx="1143000" cy="261411"/>
           </a:xfrm>
           <a:prstGeom prst="rect">
             <a:avLst/>
@@ -23487,8 +23310,8 @@
         </p:nvSpPr>
         <p:spPr>
           <a:xfrm>
-            <a:off x="6208776" y="3526357"/>
-            <a:ext cx="310896" cy="239896"/>
+            <a:off x="6208776" y="3676964"/>
+            <a:ext cx="310896" cy="261411"/>
           </a:xfrm>
           <a:prstGeom prst="rect">
             <a:avLst/>
@@ -23526,8 +23349,8 @@
         </p:nvSpPr>
         <p:spPr>
           <a:xfrm>
-            <a:off x="6565392" y="3526357"/>
-            <a:ext cx="1920240" cy="239896"/>
+            <a:off x="6565392" y="3676964"/>
+            <a:ext cx="1920240" cy="261411"/>
           </a:xfrm>
           <a:prstGeom prst="rect">
             <a:avLst/>
@@ -23565,8 +23388,8 @@
         </p:nvSpPr>
         <p:spPr>
           <a:xfrm>
-            <a:off x="8558784" y="3586331"/>
-            <a:ext cx="727033" cy="119948"/>
+            <a:off x="8558784" y="3742316"/>
+            <a:ext cx="727033" cy="130705"/>
           </a:xfrm>
           <a:prstGeom prst="rect">
             <a:avLst/>
@@ -23585,8 +23408,8 @@
         </p:nvSpPr>
         <p:spPr>
           <a:xfrm>
-            <a:off x="10305288" y="3526357"/>
-            <a:ext cx="1143000" cy="239896"/>
+            <a:off x="10305288" y="3676964"/>
+            <a:ext cx="1143000" cy="261411"/>
           </a:xfrm>
           <a:prstGeom prst="rect">
             <a:avLst/>
@@ -23624,8 +23447,8 @@
         </p:nvSpPr>
         <p:spPr>
           <a:xfrm>
-            <a:off x="6208776" y="3766252"/>
-            <a:ext cx="310896" cy="239896"/>
+            <a:off x="6208776" y="3938375"/>
+            <a:ext cx="310896" cy="261411"/>
           </a:xfrm>
           <a:prstGeom prst="rect">
             <a:avLst/>
@@ -23663,8 +23486,8 @@
         </p:nvSpPr>
         <p:spPr>
           <a:xfrm>
-            <a:off x="6565392" y="3766252"/>
-            <a:ext cx="1920240" cy="239896"/>
+            <a:off x="6565392" y="3938375"/>
+            <a:ext cx="1920240" cy="261411"/>
           </a:xfrm>
           <a:prstGeom prst="rect">
             <a:avLst/>
@@ -23702,8 +23525,8 @@
         </p:nvSpPr>
         <p:spPr>
           <a:xfrm>
-            <a:off x="8558784" y="3826226"/>
-            <a:ext cx="709633" cy="119948"/>
+            <a:off x="8558784" y="4003727"/>
+            <a:ext cx="709633" cy="130705"/>
           </a:xfrm>
           <a:prstGeom prst="rect">
             <a:avLst/>
@@ -23722,8 +23545,8 @@
         </p:nvSpPr>
         <p:spPr>
           <a:xfrm>
-            <a:off x="10305288" y="3766252"/>
-            <a:ext cx="1143000" cy="239896"/>
+            <a:off x="10305288" y="3938375"/>
+            <a:ext cx="1143000" cy="261411"/>
           </a:xfrm>
           <a:prstGeom prst="rect">
             <a:avLst/>
@@ -23761,8 +23584,8 @@
         </p:nvSpPr>
         <p:spPr>
           <a:xfrm>
-            <a:off x="6208776" y="4006148"/>
-            <a:ext cx="310896" cy="239896"/>
+            <a:off x="6208776" y="4199785"/>
+            <a:ext cx="310896" cy="261411"/>
           </a:xfrm>
           <a:prstGeom prst="rect">
             <a:avLst/>
@@ -23800,8 +23623,8 @@
         </p:nvSpPr>
         <p:spPr>
           <a:xfrm>
-            <a:off x="6565392" y="4006148"/>
-            <a:ext cx="1920240" cy="239896"/>
+            <a:off x="6565392" y="4199785"/>
+            <a:ext cx="1920240" cy="261411"/>
           </a:xfrm>
           <a:prstGeom prst="rect">
             <a:avLst/>
@@ -23839,8 +23662,8 @@
         </p:nvSpPr>
         <p:spPr>
           <a:xfrm>
-            <a:off x="8558784" y="4066122"/>
-            <a:ext cx="677288" cy="119948"/>
+            <a:off x="8558784" y="4265138"/>
+            <a:ext cx="677288" cy="130705"/>
           </a:xfrm>
           <a:prstGeom prst="rect">
             <a:avLst/>
@@ -23859,8 +23682,8 @@
         </p:nvSpPr>
         <p:spPr>
           <a:xfrm>
-            <a:off x="10305288" y="4006148"/>
-            <a:ext cx="1143000" cy="239896"/>
+            <a:off x="10305288" y="4199785"/>
+            <a:ext cx="1143000" cy="261411"/>
           </a:xfrm>
           <a:prstGeom prst="rect">
             <a:avLst/>
@@ -23898,8 +23721,8 @@
         </p:nvSpPr>
         <p:spPr>
           <a:xfrm>
-            <a:off x="6208776" y="4246043"/>
-            <a:ext cx="310896" cy="239896"/>
+            <a:off x="6208776" y="4461196"/>
+            <a:ext cx="310896" cy="261411"/>
           </a:xfrm>
           <a:prstGeom prst="rect">
             <a:avLst/>
@@ -23937,8 +23760,8 @@
         </p:nvSpPr>
         <p:spPr>
           <a:xfrm>
-            <a:off x="6565392" y="4246043"/>
-            <a:ext cx="1920240" cy="239896"/>
+            <a:off x="6565392" y="4461196"/>
+            <a:ext cx="1920240" cy="261411"/>
           </a:xfrm>
           <a:prstGeom prst="rect">
             <a:avLst/>
@@ -23976,8 +23799,8 @@
         </p:nvSpPr>
         <p:spPr>
           <a:xfrm>
-            <a:off x="8558784" y="4306017"/>
-            <a:ext cx="652252" cy="119948"/>
+            <a:off x="8558784" y="4526549"/>
+            <a:ext cx="652252" cy="130705"/>
           </a:xfrm>
           <a:prstGeom prst="rect">
             <a:avLst/>
@@ -23996,8 +23819,8 @@
         </p:nvSpPr>
         <p:spPr>
           <a:xfrm>
-            <a:off x="10305288" y="4246043"/>
-            <a:ext cx="1143000" cy="239896"/>
+            <a:off x="10305288" y="4461196"/>
+            <a:ext cx="1143000" cy="261411"/>
           </a:xfrm>
           <a:prstGeom prst="rect">
             <a:avLst/>
@@ -24035,8 +23858,8 @@
         </p:nvSpPr>
         <p:spPr>
           <a:xfrm>
-            <a:off x="6208776" y="4485939"/>
-            <a:ext cx="310896" cy="239896"/>
+            <a:off x="6208776" y="4722607"/>
+            <a:ext cx="310896" cy="261411"/>
           </a:xfrm>
           <a:prstGeom prst="rect">
             <a:avLst/>
@@ -24074,8 +23897,8 @@
         </p:nvSpPr>
         <p:spPr>
           <a:xfrm>
-            <a:off x="6565392" y="4485939"/>
-            <a:ext cx="1920240" cy="239896"/>
+            <a:off x="6565392" y="4722607"/>
+            <a:ext cx="1920240" cy="261411"/>
           </a:xfrm>
           <a:prstGeom prst="rect">
             <a:avLst/>
@@ -24113,8 +23936,8 @@
         </p:nvSpPr>
         <p:spPr>
           <a:xfrm>
-            <a:off x="8558784" y="4545913"/>
-            <a:ext cx="586483" cy="119948"/>
+            <a:off x="8558784" y="4787960"/>
+            <a:ext cx="586483" cy="130705"/>
           </a:xfrm>
           <a:prstGeom prst="rect">
             <a:avLst/>
@@ -24133,8 +23956,8 @@
         </p:nvSpPr>
         <p:spPr>
           <a:xfrm>
-            <a:off x="10305288" y="4485939"/>
-            <a:ext cx="1143000" cy="239896"/>
+            <a:off x="10305288" y="4722607"/>
+            <a:ext cx="1143000" cy="261411"/>
           </a:xfrm>
           <a:prstGeom prst="rect">
             <a:avLst/>
@@ -24172,8 +23995,8 @@
         </p:nvSpPr>
         <p:spPr>
           <a:xfrm>
-            <a:off x="6208776" y="4725834"/>
-            <a:ext cx="310896" cy="239896"/>
+            <a:off x="6208776" y="4984018"/>
+            <a:ext cx="310896" cy="261411"/>
           </a:xfrm>
           <a:prstGeom prst="rect">
             <a:avLst/>
@@ -24211,8 +24034,8 @@
         </p:nvSpPr>
         <p:spPr>
           <a:xfrm>
-            <a:off x="6565392" y="4725834"/>
-            <a:ext cx="1920240" cy="239896"/>
+            <a:off x="6565392" y="4984018"/>
+            <a:ext cx="1920240" cy="261411"/>
           </a:xfrm>
           <a:prstGeom prst="rect">
             <a:avLst/>
@@ -24250,8 +24073,8 @@
         </p:nvSpPr>
         <p:spPr>
           <a:xfrm>
-            <a:off x="8558784" y="4785808"/>
-            <a:ext cx="460386" cy="119948"/>
+            <a:off x="8558784" y="5049371"/>
+            <a:ext cx="460386" cy="130705"/>
           </a:xfrm>
           <a:prstGeom prst="rect">
             <a:avLst/>
@@ -24270,8 +24093,8 @@
         </p:nvSpPr>
         <p:spPr>
           <a:xfrm>
-            <a:off x="10305288" y="4725834"/>
-            <a:ext cx="1143000" cy="239896"/>
+            <a:off x="10305288" y="4984018"/>
+            <a:ext cx="1143000" cy="261411"/>
           </a:xfrm>
           <a:prstGeom prst="rect">
             <a:avLst/>
@@ -24309,8 +24132,8 @@
         </p:nvSpPr>
         <p:spPr>
           <a:xfrm>
-            <a:off x="6208776" y="4965730"/>
-            <a:ext cx="310896" cy="239896"/>
+            <a:off x="6208776" y="5245429"/>
+            <a:ext cx="310896" cy="261411"/>
           </a:xfrm>
           <a:prstGeom prst="rect">
             <a:avLst/>
@@ -24348,8 +24171,8 @@
         </p:nvSpPr>
         <p:spPr>
           <a:xfrm>
-            <a:off x="6565392" y="4965730"/>
-            <a:ext cx="1920240" cy="239896"/>
+            <a:off x="6565392" y="5245429"/>
+            <a:ext cx="1920240" cy="261411"/>
           </a:xfrm>
           <a:prstGeom prst="rect">
             <a:avLst/>
@@ -24387,8 +24210,8 @@
         </p:nvSpPr>
         <p:spPr>
           <a:xfrm>
-            <a:off x="8558784" y="5025704"/>
-            <a:ext cx="414612" cy="119948"/>
+            <a:off x="8558784" y="5310781"/>
+            <a:ext cx="414612" cy="130705"/>
           </a:xfrm>
           <a:prstGeom prst="rect">
             <a:avLst/>
@@ -24407,8 +24230,8 @@
         </p:nvSpPr>
         <p:spPr>
           <a:xfrm>
-            <a:off x="10305288" y="4965730"/>
-            <a:ext cx="1143000" cy="239896"/>
+            <a:off x="10305288" y="5245429"/>
+            <a:ext cx="1143000" cy="261411"/>
           </a:xfrm>
           <a:prstGeom prst="rect">
             <a:avLst/>
@@ -24446,8 +24269,8 @@
         </p:nvSpPr>
         <p:spPr>
           <a:xfrm>
-            <a:off x="6208776" y="5205625"/>
-            <a:ext cx="310896" cy="239896"/>
+            <a:off x="6208776" y="5506840"/>
+            <a:ext cx="310896" cy="261411"/>
           </a:xfrm>
           <a:prstGeom prst="rect">
             <a:avLst/>
@@ -24485,8 +24308,8 @@
         </p:nvSpPr>
         <p:spPr>
           <a:xfrm>
-            <a:off x="6565392" y="5205625"/>
-            <a:ext cx="1920240" cy="239896"/>
+            <a:off x="6565392" y="5506840"/>
+            <a:ext cx="1920240" cy="261411"/>
           </a:xfrm>
           <a:prstGeom prst="rect">
             <a:avLst/>
@@ -24524,8 +24347,8 @@
         </p:nvSpPr>
         <p:spPr>
           <a:xfrm>
-            <a:off x="8558784" y="5265599"/>
-            <a:ext cx="351368" cy="119948"/>
+            <a:off x="8558784" y="5572192"/>
+            <a:ext cx="351368" cy="130705"/>
           </a:xfrm>
           <a:prstGeom prst="rect">
             <a:avLst/>
@@ -24544,8 +24367,8 @@
         </p:nvSpPr>
         <p:spPr>
           <a:xfrm>
-            <a:off x="10305288" y="5205625"/>
-            <a:ext cx="1143000" cy="239896"/>
+            <a:off x="10305288" y="5506840"/>
+            <a:ext cx="1143000" cy="261411"/>
           </a:xfrm>
           <a:prstGeom prst="rect">
             <a:avLst/>
@@ -24583,8 +24406,8 @@
         </p:nvSpPr>
         <p:spPr>
           <a:xfrm>
-            <a:off x="6208776" y="5445521"/>
-            <a:ext cx="310896" cy="239896"/>
+            <a:off x="6208776" y="5768250"/>
+            <a:ext cx="310896" cy="261411"/>
           </a:xfrm>
           <a:prstGeom prst="rect">
             <a:avLst/>
@@ -24622,8 +24445,8 @@
         </p:nvSpPr>
         <p:spPr>
           <a:xfrm>
-            <a:off x="6565392" y="5445521"/>
-            <a:ext cx="1920240" cy="239896"/>
+            <a:off x="6565392" y="5768250"/>
+            <a:ext cx="1920240" cy="261411"/>
           </a:xfrm>
           <a:prstGeom prst="rect">
             <a:avLst/>
@@ -24661,8 +24484,8 @@
         </p:nvSpPr>
         <p:spPr>
           <a:xfrm>
-            <a:off x="8558784" y="5505495"/>
-            <a:ext cx="298886" cy="119948"/>
+            <a:off x="8558784" y="5833603"/>
+            <a:ext cx="298886" cy="130705"/>
           </a:xfrm>
           <a:prstGeom prst="rect">
             <a:avLst/>
@@ -24681,8 +24504,8 @@
         </p:nvSpPr>
         <p:spPr>
           <a:xfrm>
-            <a:off x="10305288" y="5445521"/>
-            <a:ext cx="1143000" cy="239896"/>
+            <a:off x="10305288" y="5768250"/>
+            <a:ext cx="1143000" cy="261411"/>
           </a:xfrm>
           <a:prstGeom prst="rect">
             <a:avLst/>
@@ -24721,7 +24544,7 @@
         <p:spPr>
           <a:xfrm>
             <a:off x="4109587" y="1847088"/>
-            <a:ext cx="14630" cy="4078224"/>
+            <a:ext cx="14630" cy="4443984"/>
           </a:xfrm>
           <a:prstGeom prst="rect">
             <a:avLst/>
@@ -24741,7 +24564,7 @@
         <p:spPr>
           <a:xfrm>
             <a:off x="9659995" y="1847088"/>
-            <a:ext cx="14630" cy="4078224"/>
+            <a:ext cx="14630" cy="4443984"/>
           </a:xfrm>
           <a:prstGeom prst="rect">
             <a:avLst/>
@@ -24761,7 +24584,7 @@
         <p:spPr>
           <a:xfrm>
             <a:off x="6085332" y="1847088"/>
-            <a:ext cx="10973" cy="4078224"/>
+            <a:ext cx="10973" cy="4443984"/>
           </a:xfrm>
           <a:prstGeom prst="rect">
             <a:avLst/>
@@ -24771,65 +24594,6 @@
           </a:solidFill>
           <a:ln/>
         </p:spPr>
-      </p:sp>
-      <p:sp>
-        <p:nvSpPr>
-          <p:cNvPr id="146" name="Shape 144"/>
-          <p:cNvSpPr/>
-          <p:nvPr/>
-        </p:nvSpPr>
-        <p:spPr>
-          <a:xfrm>
-            <a:off x="457200" y="6126480"/>
-            <a:ext cx="11274552" cy="615696"/>
-          </a:xfrm>
-          <a:prstGeom prst="rect">
-            <a:avLst/>
-          </a:prstGeom>
-          <a:solidFill>
-            <a:srgbClr val="EDF4FA"/>
-          </a:solidFill>
-          <a:ln/>
-        </p:spPr>
-      </p:sp>
-      <p:sp>
-        <p:nvSpPr>
-          <p:cNvPr id="147" name="Text 145"/>
-          <p:cNvSpPr txBox="1"/>
-          <p:nvPr/>
-        </p:nvSpPr>
-        <p:spPr>
-          <a:xfrm>
-            <a:off x="658368" y="6144768"/>
-            <a:ext cx="10927080" cy="579120"/>
-          </a:xfrm>
-          <a:prstGeom prst="rect">
-            <a:avLst/>
-          </a:prstGeom>
-          <a:noFill/>
-          <a:ln/>
-        </p:spPr>
-        <p:txBody>
-          <a:bodyPr wrap="square" lIns="0" tIns="0" rIns="0" bIns="0" rtlCol="0" anchor="ctr"/>
-          <a:lstStyle/>
-          <a:p>
-            <a:pPr indent="0" marL="0">
-              <a:buNone/>
-            </a:pPr>
-            <a:r>
-              <a:rPr lang="en-US" sz="1600" b="1" dirty="0">
-                <a:solidFill>
-                  <a:srgbClr val="0B2C4A"/>
-                </a:solidFill>
-                <a:latin typeface="Inter" pitchFamily="34" charset="0"/>
-                <a:ea typeface="Inter" pitchFamily="34" charset="-122"/>
-                <a:cs typeface="Inter" pitchFamily="34" charset="-120"/>
-              </a:rPr>
-              <a:t>13 of 33 stores at or above the 36.5% group, led by Toyota Henderson at 45.1%. CDJR Post Falls is lowest at 24.4%.</a:t>
-            </a:r>
-            <a:endParaRPr lang="en-US" sz="1600" dirty="0"/>
-          </a:p>
-        </p:txBody>
       </p:sp>
     </p:spTree>
   </p:cSld>
@@ -24970,7 +24734,7 @@
         <p:spPr>
           <a:xfrm>
             <a:off x="457200" y="1207008"/>
-            <a:ext cx="11274552" cy="4782312"/>
+            <a:ext cx="11274552" cy="5148072"/>
           </a:xfrm>
           <a:prstGeom prst="rect">
             <a:avLst/>
@@ -25147,7 +24911,7 @@
         <p:spPr>
           <a:xfrm>
             <a:off x="658368" y="1847088"/>
-            <a:ext cx="310896" cy="239896"/>
+            <a:ext cx="310896" cy="261411"/>
           </a:xfrm>
           <a:prstGeom prst="rect">
             <a:avLst/>
@@ -25186,7 +24950,7 @@
         <p:spPr>
           <a:xfrm>
             <a:off x="1014984" y="1847088"/>
-            <a:ext cx="1920240" cy="239896"/>
+            <a:ext cx="1920240" cy="261411"/>
           </a:xfrm>
           <a:prstGeom prst="rect">
             <a:avLst/>
@@ -25224,8 +24988,8 @@
         </p:nvSpPr>
         <p:spPr>
           <a:xfrm>
-            <a:off x="3785616" y="1911860"/>
-            <a:ext cx="777240" cy="110352"/>
+            <a:off x="3785616" y="1917669"/>
+            <a:ext cx="777240" cy="120249"/>
           </a:xfrm>
           <a:prstGeom prst="rect">
             <a:avLst/>
@@ -25245,7 +25009,7 @@
         <p:spPr>
           <a:xfrm>
             <a:off x="4617720" y="1847088"/>
-            <a:ext cx="1234440" cy="239896"/>
+            <a:ext cx="1234440" cy="261411"/>
           </a:xfrm>
           <a:prstGeom prst="rect">
             <a:avLst/>
@@ -25283,8 +25047,8 @@
         </p:nvSpPr>
         <p:spPr>
           <a:xfrm>
-            <a:off x="658368" y="2086984"/>
-            <a:ext cx="310896" cy="239896"/>
+            <a:off x="658368" y="2108499"/>
+            <a:ext cx="310896" cy="261411"/>
           </a:xfrm>
           <a:prstGeom prst="rect">
             <a:avLst/>
@@ -25322,8 +25086,8 @@
         </p:nvSpPr>
         <p:spPr>
           <a:xfrm>
-            <a:off x="1014984" y="2086984"/>
-            <a:ext cx="1920240" cy="239896"/>
+            <a:off x="1014984" y="2108499"/>
+            <a:ext cx="1920240" cy="261411"/>
           </a:xfrm>
           <a:prstGeom prst="rect">
             <a:avLst/>
@@ -25361,8 +25125,8 @@
         </p:nvSpPr>
         <p:spPr>
           <a:xfrm>
-            <a:off x="3785616" y="2151755"/>
-            <a:ext cx="746935" cy="110352"/>
+            <a:off x="3785616" y="2179080"/>
+            <a:ext cx="746935" cy="120249"/>
           </a:xfrm>
           <a:prstGeom prst="rect">
             <a:avLst/>
@@ -25381,8 +25145,8 @@
         </p:nvSpPr>
         <p:spPr>
           <a:xfrm>
-            <a:off x="4617720" y="2086984"/>
-            <a:ext cx="1234440" cy="239896"/>
+            <a:off x="4617720" y="2108499"/>
+            <a:ext cx="1234440" cy="261411"/>
           </a:xfrm>
           <a:prstGeom prst="rect">
             <a:avLst/>
@@ -25420,8 +25184,8 @@
         </p:nvSpPr>
         <p:spPr>
           <a:xfrm>
-            <a:off x="658368" y="2326879"/>
-            <a:ext cx="310896" cy="239896"/>
+            <a:off x="658368" y="2369910"/>
+            <a:ext cx="310896" cy="261411"/>
           </a:xfrm>
           <a:prstGeom prst="rect">
             <a:avLst/>
@@ -25459,8 +25223,8 @@
         </p:nvSpPr>
         <p:spPr>
           <a:xfrm>
-            <a:off x="1014984" y="2326879"/>
-            <a:ext cx="1920240" cy="239896"/>
+            <a:off x="1014984" y="2369910"/>
+            <a:ext cx="1920240" cy="261411"/>
           </a:xfrm>
           <a:prstGeom prst="rect">
             <a:avLst/>
@@ -25498,8 +25262,8 @@
         </p:nvSpPr>
         <p:spPr>
           <a:xfrm>
-            <a:off x="3785616" y="2391651"/>
-            <a:ext cx="544841" cy="110352"/>
+            <a:off x="3785616" y="2440491"/>
+            <a:ext cx="544841" cy="120249"/>
           </a:xfrm>
           <a:prstGeom prst="rect">
             <a:avLst/>
@@ -25518,8 +25282,8 @@
         </p:nvSpPr>
         <p:spPr>
           <a:xfrm>
-            <a:off x="4617720" y="2326879"/>
-            <a:ext cx="1234440" cy="239896"/>
+            <a:off x="4617720" y="2369910"/>
+            <a:ext cx="1234440" cy="261411"/>
           </a:xfrm>
           <a:prstGeom prst="rect">
             <a:avLst/>
@@ -25557,8 +25321,8 @@
         </p:nvSpPr>
         <p:spPr>
           <a:xfrm>
-            <a:off x="658368" y="2566775"/>
-            <a:ext cx="310896" cy="239896"/>
+            <a:off x="658368" y="2631320"/>
+            <a:ext cx="310896" cy="261411"/>
           </a:xfrm>
           <a:prstGeom prst="rect">
             <a:avLst/>
@@ -25596,8 +25360,8 @@
         </p:nvSpPr>
         <p:spPr>
           <a:xfrm>
-            <a:off x="1014984" y="2566775"/>
-            <a:ext cx="1920240" cy="239896"/>
+            <a:off x="1014984" y="2631320"/>
+            <a:ext cx="1920240" cy="261411"/>
           </a:xfrm>
           <a:prstGeom prst="rect">
             <a:avLst/>
@@ -25635,8 +25399,8 @@
         </p:nvSpPr>
         <p:spPr>
           <a:xfrm>
-            <a:off x="3785616" y="2631546"/>
-            <a:ext cx="411845" cy="110352"/>
+            <a:off x="3785616" y="2701901"/>
+            <a:ext cx="411845" cy="120249"/>
           </a:xfrm>
           <a:prstGeom prst="rect">
             <a:avLst/>
@@ -25655,8 +25419,8 @@
         </p:nvSpPr>
         <p:spPr>
           <a:xfrm>
-            <a:off x="4617720" y="2566775"/>
-            <a:ext cx="1234440" cy="239896"/>
+            <a:off x="4617720" y="2631320"/>
+            <a:ext cx="1234440" cy="261411"/>
           </a:xfrm>
           <a:prstGeom prst="rect">
             <a:avLst/>
@@ -25694,8 +25458,8 @@
         </p:nvSpPr>
         <p:spPr>
           <a:xfrm>
-            <a:off x="658368" y="2806670"/>
-            <a:ext cx="310896" cy="239896"/>
+            <a:off x="658368" y="2892731"/>
+            <a:ext cx="310896" cy="261411"/>
           </a:xfrm>
           <a:prstGeom prst="rect">
             <a:avLst/>
@@ -25733,8 +25497,8 @@
         </p:nvSpPr>
         <p:spPr>
           <a:xfrm>
-            <a:off x="1014984" y="2806670"/>
-            <a:ext cx="1920240" cy="239896"/>
+            <a:off x="1014984" y="2892731"/>
+            <a:ext cx="1920240" cy="261411"/>
           </a:xfrm>
           <a:prstGeom prst="rect">
             <a:avLst/>
@@ -25772,8 +25536,8 @@
         </p:nvSpPr>
         <p:spPr>
           <a:xfrm>
-            <a:off x="3785616" y="2871442"/>
-            <a:ext cx="410069" cy="110352"/>
+            <a:off x="3785616" y="2963312"/>
+            <a:ext cx="410069" cy="120249"/>
           </a:xfrm>
           <a:prstGeom prst="rect">
             <a:avLst/>
@@ -25792,8 +25556,8 @@
         </p:nvSpPr>
         <p:spPr>
           <a:xfrm>
-            <a:off x="4617720" y="2806670"/>
-            <a:ext cx="1234440" cy="239896"/>
+            <a:off x="4617720" y="2892731"/>
+            <a:ext cx="1234440" cy="261411"/>
           </a:xfrm>
           <a:prstGeom prst="rect">
             <a:avLst/>
@@ -25831,8 +25595,8 @@
         </p:nvSpPr>
         <p:spPr>
           <a:xfrm>
-            <a:off x="658368" y="3046566"/>
-            <a:ext cx="310896" cy="239896"/>
+            <a:off x="658368" y="3154142"/>
+            <a:ext cx="310896" cy="261411"/>
           </a:xfrm>
           <a:prstGeom prst="rect">
             <a:avLst/>
@@ -25870,8 +25634,8 @@
         </p:nvSpPr>
         <p:spPr>
           <a:xfrm>
-            <a:off x="1014984" y="3046566"/>
-            <a:ext cx="1920240" cy="239896"/>
+            <a:off x="1014984" y="3154142"/>
+            <a:ext cx="1920240" cy="261411"/>
           </a:xfrm>
           <a:prstGeom prst="rect">
             <a:avLst/>
@@ -25909,8 +25673,8 @@
         </p:nvSpPr>
         <p:spPr>
           <a:xfrm>
-            <a:off x="3785616" y="3111337"/>
-            <a:ext cx="366175" cy="110352"/>
+            <a:off x="3785616" y="3224723"/>
+            <a:ext cx="366175" cy="120249"/>
           </a:xfrm>
           <a:prstGeom prst="rect">
             <a:avLst/>
@@ -25929,8 +25693,8 @@
         </p:nvSpPr>
         <p:spPr>
           <a:xfrm>
-            <a:off x="4617720" y="3046566"/>
-            <a:ext cx="1234440" cy="239896"/>
+            <a:off x="4617720" y="3154142"/>
+            <a:ext cx="1234440" cy="261411"/>
           </a:xfrm>
           <a:prstGeom prst="rect">
             <a:avLst/>
@@ -25968,8 +25732,8 @@
         </p:nvSpPr>
         <p:spPr>
           <a:xfrm>
-            <a:off x="658368" y="3286461"/>
-            <a:ext cx="310896" cy="239896"/>
+            <a:off x="658368" y="3415553"/>
+            <a:ext cx="310896" cy="261411"/>
           </a:xfrm>
           <a:prstGeom prst="rect">
             <a:avLst/>
@@ -26007,8 +25771,8 @@
         </p:nvSpPr>
         <p:spPr>
           <a:xfrm>
-            <a:off x="1014984" y="3286461"/>
-            <a:ext cx="1920240" cy="239896"/>
+            <a:off x="1014984" y="3415553"/>
+            <a:ext cx="1920240" cy="261411"/>
           </a:xfrm>
           <a:prstGeom prst="rect">
             <a:avLst/>
@@ -26046,8 +25810,8 @@
         </p:nvSpPr>
         <p:spPr>
           <a:xfrm>
-            <a:off x="3785616" y="3351233"/>
-            <a:ext cx="321691" cy="110352"/>
+            <a:off x="3785616" y="3486134"/>
+            <a:ext cx="321691" cy="120249"/>
           </a:xfrm>
           <a:prstGeom prst="rect">
             <a:avLst/>
@@ -26066,8 +25830,8 @@
         </p:nvSpPr>
         <p:spPr>
           <a:xfrm>
-            <a:off x="4617720" y="3286461"/>
-            <a:ext cx="1234440" cy="239896"/>
+            <a:off x="4617720" y="3415553"/>
+            <a:ext cx="1234440" cy="261411"/>
           </a:xfrm>
           <a:prstGeom prst="rect">
             <a:avLst/>
@@ -26105,8 +25869,8 @@
         </p:nvSpPr>
         <p:spPr>
           <a:xfrm>
-            <a:off x="658368" y="3526357"/>
-            <a:ext cx="310896" cy="239896"/>
+            <a:off x="658368" y="3676964"/>
+            <a:ext cx="310896" cy="261411"/>
           </a:xfrm>
           <a:prstGeom prst="rect">
             <a:avLst/>
@@ -26144,8 +25908,8 @@
         </p:nvSpPr>
         <p:spPr>
           <a:xfrm>
-            <a:off x="1014984" y="3526357"/>
-            <a:ext cx="1920240" cy="239896"/>
+            <a:off x="1014984" y="3676964"/>
+            <a:ext cx="1920240" cy="261411"/>
           </a:xfrm>
           <a:prstGeom prst="rect">
             <a:avLst/>
@@ -26183,8 +25947,8 @@
         </p:nvSpPr>
         <p:spPr>
           <a:xfrm>
-            <a:off x="3785616" y="3591128"/>
-            <a:ext cx="314225" cy="110352"/>
+            <a:off x="3785616" y="3747545"/>
+            <a:ext cx="314225" cy="120249"/>
           </a:xfrm>
           <a:prstGeom prst="rect">
             <a:avLst/>
@@ -26203,8 +25967,8 @@
         </p:nvSpPr>
         <p:spPr>
           <a:xfrm>
-            <a:off x="4617720" y="3526357"/>
-            <a:ext cx="1234440" cy="239896"/>
+            <a:off x="4617720" y="3676964"/>
+            <a:ext cx="1234440" cy="261411"/>
           </a:xfrm>
           <a:prstGeom prst="rect">
             <a:avLst/>
@@ -26242,8 +26006,8 @@
         </p:nvSpPr>
         <p:spPr>
           <a:xfrm>
-            <a:off x="658368" y="3766252"/>
-            <a:ext cx="310896" cy="239896"/>
+            <a:off x="658368" y="3938375"/>
+            <a:ext cx="310896" cy="261411"/>
           </a:xfrm>
           <a:prstGeom prst="rect">
             <a:avLst/>
@@ -26281,8 +26045,8 @@
         </p:nvSpPr>
         <p:spPr>
           <a:xfrm>
-            <a:off x="1014984" y="3766252"/>
-            <a:ext cx="1920240" cy="239896"/>
+            <a:off x="1014984" y="3938375"/>
+            <a:ext cx="1920240" cy="261411"/>
           </a:xfrm>
           <a:prstGeom prst="rect">
             <a:avLst/>
@@ -26320,8 +26084,8 @@
         </p:nvSpPr>
         <p:spPr>
           <a:xfrm>
-            <a:off x="3785616" y="3831024"/>
-            <a:ext cx="301280" cy="110352"/>
+            <a:off x="3785616" y="4008956"/>
+            <a:ext cx="301280" cy="120249"/>
           </a:xfrm>
           <a:prstGeom prst="rect">
             <a:avLst/>
@@ -26340,8 +26104,8 @@
         </p:nvSpPr>
         <p:spPr>
           <a:xfrm>
-            <a:off x="4617720" y="3766252"/>
-            <a:ext cx="1234440" cy="239896"/>
+            <a:off x="4617720" y="3938375"/>
+            <a:ext cx="1234440" cy="261411"/>
           </a:xfrm>
           <a:prstGeom prst="rect">
             <a:avLst/>
@@ -26379,8 +26143,8 @@
         </p:nvSpPr>
         <p:spPr>
           <a:xfrm>
-            <a:off x="658368" y="4006148"/>
-            <a:ext cx="310896" cy="239896"/>
+            <a:off x="658368" y="4199785"/>
+            <a:ext cx="310896" cy="261411"/>
           </a:xfrm>
           <a:prstGeom prst="rect">
             <a:avLst/>
@@ -26418,8 +26182,8 @@
         </p:nvSpPr>
         <p:spPr>
           <a:xfrm>
-            <a:off x="1014984" y="4006148"/>
-            <a:ext cx="1920240" cy="239896"/>
+            <a:off x="1014984" y="4199785"/>
+            <a:ext cx="1920240" cy="261411"/>
           </a:xfrm>
           <a:prstGeom prst="rect">
             <a:avLst/>
@@ -26457,8 +26221,8 @@
         </p:nvSpPr>
         <p:spPr>
           <a:xfrm>
-            <a:off x="3785616" y="4070920"/>
-            <a:ext cx="260605" cy="110352"/>
+            <a:off x="3785616" y="4270366"/>
+            <a:ext cx="260605" cy="120249"/>
           </a:xfrm>
           <a:prstGeom prst="rect">
             <a:avLst/>
@@ -26477,8 +26241,8 @@
         </p:nvSpPr>
         <p:spPr>
           <a:xfrm>
-            <a:off x="4617720" y="4006148"/>
-            <a:ext cx="1234440" cy="239896"/>
+            <a:off x="4617720" y="4199785"/>
+            <a:ext cx="1234440" cy="261411"/>
           </a:xfrm>
           <a:prstGeom prst="rect">
             <a:avLst/>
@@ -26516,8 +26280,8 @@
         </p:nvSpPr>
         <p:spPr>
           <a:xfrm>
-            <a:off x="658368" y="4246043"/>
-            <a:ext cx="310896" cy="239896"/>
+            <a:off x="658368" y="4461196"/>
+            <a:ext cx="310896" cy="261411"/>
           </a:xfrm>
           <a:prstGeom prst="rect">
             <a:avLst/>
@@ -26555,8 +26319,8 @@
         </p:nvSpPr>
         <p:spPr>
           <a:xfrm>
-            <a:off x="1014984" y="4246043"/>
-            <a:ext cx="1920240" cy="239896"/>
+            <a:off x="1014984" y="4461196"/>
+            <a:ext cx="1920240" cy="261411"/>
           </a:xfrm>
           <a:prstGeom prst="rect">
             <a:avLst/>
@@ -26594,8 +26358,8 @@
         </p:nvSpPr>
         <p:spPr>
           <a:xfrm>
-            <a:off x="3785616" y="4310815"/>
-            <a:ext cx="253666" cy="110352"/>
+            <a:off x="3785616" y="4531777"/>
+            <a:ext cx="253666" cy="120249"/>
           </a:xfrm>
           <a:prstGeom prst="rect">
             <a:avLst/>
@@ -26614,8 +26378,8 @@
         </p:nvSpPr>
         <p:spPr>
           <a:xfrm>
-            <a:off x="4617720" y="4246043"/>
-            <a:ext cx="1234440" cy="239896"/>
+            <a:off x="4617720" y="4461196"/>
+            <a:ext cx="1234440" cy="261411"/>
           </a:xfrm>
           <a:prstGeom prst="rect">
             <a:avLst/>
@@ -26653,8 +26417,8 @@
         </p:nvSpPr>
         <p:spPr>
           <a:xfrm>
-            <a:off x="658368" y="4485939"/>
-            <a:ext cx="310896" cy="239896"/>
+            <a:off x="658368" y="4722607"/>
+            <a:ext cx="310896" cy="261411"/>
           </a:xfrm>
           <a:prstGeom prst="rect">
             <a:avLst/>
@@ -26692,8 +26456,8 @@
         </p:nvSpPr>
         <p:spPr>
           <a:xfrm>
-            <a:off x="1014984" y="4485939"/>
-            <a:ext cx="1920240" cy="239896"/>
+            <a:off x="1014984" y="4722607"/>
+            <a:ext cx="1920240" cy="261411"/>
           </a:xfrm>
           <a:prstGeom prst="rect">
             <a:avLst/>
@@ -26731,8 +26495,8 @@
         </p:nvSpPr>
         <p:spPr>
           <a:xfrm>
-            <a:off x="3785616" y="4550711"/>
-            <a:ext cx="211088" cy="110352"/>
+            <a:off x="3785616" y="4793188"/>
+            <a:ext cx="211088" cy="120249"/>
           </a:xfrm>
           <a:prstGeom prst="rect">
             <a:avLst/>
@@ -26751,8 +26515,8 @@
         </p:nvSpPr>
         <p:spPr>
           <a:xfrm>
-            <a:off x="4617720" y="4485939"/>
-            <a:ext cx="1234440" cy="239896"/>
+            <a:off x="4617720" y="4722607"/>
+            <a:ext cx="1234440" cy="261411"/>
           </a:xfrm>
           <a:prstGeom prst="rect">
             <a:avLst/>
@@ -26790,8 +26554,8 @@
         </p:nvSpPr>
         <p:spPr>
           <a:xfrm>
-            <a:off x="658368" y="4725834"/>
-            <a:ext cx="310896" cy="239896"/>
+            <a:off x="658368" y="4984018"/>
+            <a:ext cx="310896" cy="261411"/>
           </a:xfrm>
           <a:prstGeom prst="rect">
             <a:avLst/>
@@ -26829,8 +26593,8 @@
         </p:nvSpPr>
         <p:spPr>
           <a:xfrm>
-            <a:off x="1014984" y="4725834"/>
-            <a:ext cx="1920240" cy="239896"/>
+            <a:off x="1014984" y="4984018"/>
+            <a:ext cx="1920240" cy="261411"/>
           </a:xfrm>
           <a:prstGeom prst="rect">
             <a:avLst/>
@@ -26868,8 +26632,8 @@
         </p:nvSpPr>
         <p:spPr>
           <a:xfrm>
-            <a:off x="3785616" y="4790606"/>
-            <a:ext cx="192231" cy="110352"/>
+            <a:off x="3785616" y="5054599"/>
+            <a:ext cx="192231" cy="120249"/>
           </a:xfrm>
           <a:prstGeom prst="rect">
             <a:avLst/>
@@ -26888,8 +26652,8 @@
         </p:nvSpPr>
         <p:spPr>
           <a:xfrm>
-            <a:off x="4617720" y="4725834"/>
-            <a:ext cx="1234440" cy="239896"/>
+            <a:off x="4617720" y="4984018"/>
+            <a:ext cx="1234440" cy="261411"/>
           </a:xfrm>
           <a:prstGeom prst="rect">
             <a:avLst/>
@@ -26927,8 +26691,8 @@
         </p:nvSpPr>
         <p:spPr>
           <a:xfrm>
-            <a:off x="658368" y="4965730"/>
-            <a:ext cx="310896" cy="239896"/>
+            <a:off x="658368" y="5245429"/>
+            <a:ext cx="310896" cy="261411"/>
           </a:xfrm>
           <a:prstGeom prst="rect">
             <a:avLst/>
@@ -26966,8 +26730,8 @@
         </p:nvSpPr>
         <p:spPr>
           <a:xfrm>
-            <a:off x="1014984" y="4965730"/>
-            <a:ext cx="1920240" cy="239896"/>
+            <a:off x="1014984" y="5245429"/>
+            <a:ext cx="1920240" cy="261411"/>
           </a:xfrm>
           <a:prstGeom prst="rect">
             <a:avLst/>
@@ -27005,8 +26769,8 @@
         </p:nvSpPr>
         <p:spPr>
           <a:xfrm>
-            <a:off x="3785616" y="5030502"/>
-            <a:ext cx="190854" cy="110352"/>
+            <a:off x="3785616" y="5316010"/>
+            <a:ext cx="190854" cy="120249"/>
           </a:xfrm>
           <a:prstGeom prst="rect">
             <a:avLst/>
@@ -27025,8 +26789,8 @@
         </p:nvSpPr>
         <p:spPr>
           <a:xfrm>
-            <a:off x="4617720" y="4965730"/>
-            <a:ext cx="1234440" cy="239896"/>
+            <a:off x="4617720" y="5245429"/>
+            <a:ext cx="1234440" cy="261411"/>
           </a:xfrm>
           <a:prstGeom prst="rect">
             <a:avLst/>
@@ -27064,8 +26828,8 @@
         </p:nvSpPr>
         <p:spPr>
           <a:xfrm>
-            <a:off x="658368" y="5205625"/>
-            <a:ext cx="310896" cy="239896"/>
+            <a:off x="658368" y="5506840"/>
+            <a:ext cx="310896" cy="261411"/>
           </a:xfrm>
           <a:prstGeom prst="rect">
             <a:avLst/>
@@ -27103,8 +26867,8 @@
         </p:nvSpPr>
         <p:spPr>
           <a:xfrm>
-            <a:off x="1014984" y="5205625"/>
-            <a:ext cx="1920240" cy="239896"/>
+            <a:off x="1014984" y="5506840"/>
+            <a:ext cx="1920240" cy="261411"/>
           </a:xfrm>
           <a:prstGeom prst="rect">
             <a:avLst/>
@@ -27142,8 +26906,8 @@
         </p:nvSpPr>
         <p:spPr>
           <a:xfrm>
-            <a:off x="3785616" y="5270397"/>
-            <a:ext cx="190842" cy="110352"/>
+            <a:off x="3785616" y="5577420"/>
+            <a:ext cx="190842" cy="120249"/>
           </a:xfrm>
           <a:prstGeom prst="rect">
             <a:avLst/>
@@ -27162,8 +26926,8 @@
         </p:nvSpPr>
         <p:spPr>
           <a:xfrm>
-            <a:off x="4617720" y="5205625"/>
-            <a:ext cx="1234440" cy="239896"/>
+            <a:off x="4617720" y="5506840"/>
+            <a:ext cx="1234440" cy="261411"/>
           </a:xfrm>
           <a:prstGeom prst="rect">
             <a:avLst/>
@@ -27201,8 +26965,8 @@
         </p:nvSpPr>
         <p:spPr>
           <a:xfrm>
-            <a:off x="658368" y="5445521"/>
-            <a:ext cx="310896" cy="239896"/>
+            <a:off x="658368" y="5768250"/>
+            <a:ext cx="310896" cy="261411"/>
           </a:xfrm>
           <a:prstGeom prst="rect">
             <a:avLst/>
@@ -27240,8 +27004,8 @@
         </p:nvSpPr>
         <p:spPr>
           <a:xfrm>
-            <a:off x="1014984" y="5445521"/>
-            <a:ext cx="1920240" cy="239896"/>
+            <a:off x="1014984" y="5768250"/>
+            <a:ext cx="1920240" cy="261411"/>
           </a:xfrm>
           <a:prstGeom prst="rect">
             <a:avLst/>
@@ -27279,8 +27043,8 @@
         </p:nvSpPr>
         <p:spPr>
           <a:xfrm>
-            <a:off x="3785616" y="5510293"/>
-            <a:ext cx="158978" cy="110352"/>
+            <a:off x="3785616" y="5838831"/>
+            <a:ext cx="158978" cy="120249"/>
           </a:xfrm>
           <a:prstGeom prst="rect">
             <a:avLst/>
@@ -27299,8 +27063,8 @@
         </p:nvSpPr>
         <p:spPr>
           <a:xfrm>
-            <a:off x="4617720" y="5445521"/>
-            <a:ext cx="1234440" cy="239896"/>
+            <a:off x="4617720" y="5768250"/>
+            <a:ext cx="1234440" cy="261411"/>
           </a:xfrm>
           <a:prstGeom prst="rect">
             <a:avLst/>
@@ -27338,8 +27102,8 @@
         </p:nvSpPr>
         <p:spPr>
           <a:xfrm>
-            <a:off x="658368" y="5685416"/>
-            <a:ext cx="310896" cy="239896"/>
+            <a:off x="658368" y="6029661"/>
+            <a:ext cx="310896" cy="261411"/>
           </a:xfrm>
           <a:prstGeom prst="rect">
             <a:avLst/>
@@ -27377,8 +27141,8 @@
         </p:nvSpPr>
         <p:spPr>
           <a:xfrm>
-            <a:off x="1014984" y="5685416"/>
-            <a:ext cx="1920240" cy="239896"/>
+            <a:off x="1014984" y="6029661"/>
+            <a:ext cx="1920240" cy="261411"/>
           </a:xfrm>
           <a:prstGeom prst="rect">
             <a:avLst/>
@@ -27416,8 +27180,8 @@
         </p:nvSpPr>
         <p:spPr>
           <a:xfrm>
-            <a:off x="3785616" y="5750188"/>
-            <a:ext cx="145538" cy="110352"/>
+            <a:off x="3785616" y="6100242"/>
+            <a:ext cx="145538" cy="120249"/>
           </a:xfrm>
           <a:prstGeom prst="rect">
             <a:avLst/>
@@ -27436,8 +27200,8 @@
         </p:nvSpPr>
         <p:spPr>
           <a:xfrm>
-            <a:off x="4617720" y="5685416"/>
-            <a:ext cx="1234440" cy="239896"/>
+            <a:off x="4617720" y="6029661"/>
+            <a:ext cx="1234440" cy="261411"/>
           </a:xfrm>
           <a:prstGeom prst="rect">
             <a:avLst/>
@@ -27476,7 +27240,7 @@
         <p:spPr>
           <a:xfrm>
             <a:off x="6208776" y="1847088"/>
-            <a:ext cx="310896" cy="239896"/>
+            <a:ext cx="310896" cy="261411"/>
           </a:xfrm>
           <a:prstGeom prst="rect">
             <a:avLst/>
@@ -27515,7 +27279,7 @@
         <p:spPr>
           <a:xfrm>
             <a:off x="6565392" y="1847088"/>
-            <a:ext cx="1920240" cy="239896"/>
+            <a:ext cx="1920240" cy="261411"/>
           </a:xfrm>
           <a:prstGeom prst="rect">
             <a:avLst/>
@@ -27553,8 +27317,8 @@
         </p:nvSpPr>
         <p:spPr>
           <a:xfrm>
-            <a:off x="9336024" y="1911860"/>
-            <a:ext cx="118014" cy="110352"/>
+            <a:off x="9336024" y="1917669"/>
+            <a:ext cx="118014" cy="120249"/>
           </a:xfrm>
           <a:prstGeom prst="rect">
             <a:avLst/>
@@ -27574,7 +27338,7 @@
         <p:spPr>
           <a:xfrm>
             <a:off x="10168128" y="1847088"/>
-            <a:ext cx="1234440" cy="239896"/>
+            <a:ext cx="1234440" cy="261411"/>
           </a:xfrm>
           <a:prstGeom prst="rect">
             <a:avLst/>
@@ -27612,8 +27376,8 @@
         </p:nvSpPr>
         <p:spPr>
           <a:xfrm>
-            <a:off x="6208776" y="2086984"/>
-            <a:ext cx="310896" cy="239896"/>
+            <a:off x="6208776" y="2108499"/>
+            <a:ext cx="310896" cy="261411"/>
           </a:xfrm>
           <a:prstGeom prst="rect">
             <a:avLst/>
@@ -27651,8 +27415,8 @@
         </p:nvSpPr>
         <p:spPr>
           <a:xfrm>
-            <a:off x="6565392" y="2086984"/>
-            <a:ext cx="1920240" cy="239896"/>
+            <a:off x="6565392" y="2108499"/>
+            <a:ext cx="1920240" cy="261411"/>
           </a:xfrm>
           <a:prstGeom prst="rect">
             <a:avLst/>
@@ -27690,8 +27454,8 @@
         </p:nvSpPr>
         <p:spPr>
           <a:xfrm>
-            <a:off x="9336024" y="2151755"/>
-            <a:ext cx="112861" cy="110352"/>
+            <a:off x="9336024" y="2179080"/>
+            <a:ext cx="112861" cy="120249"/>
           </a:xfrm>
           <a:prstGeom prst="rect">
             <a:avLst/>
@@ -27710,8 +27474,8 @@
         </p:nvSpPr>
         <p:spPr>
           <a:xfrm>
-            <a:off x="10168128" y="2086984"/>
-            <a:ext cx="1234440" cy="239896"/>
+            <a:off x="10168128" y="2108499"/>
+            <a:ext cx="1234440" cy="261411"/>
           </a:xfrm>
           <a:prstGeom prst="rect">
             <a:avLst/>
@@ -27749,8 +27513,8 @@
         </p:nvSpPr>
         <p:spPr>
           <a:xfrm>
-            <a:off x="6208776" y="2326879"/>
-            <a:ext cx="310896" cy="239896"/>
+            <a:off x="6208776" y="2369910"/>
+            <a:ext cx="310896" cy="261411"/>
           </a:xfrm>
           <a:prstGeom prst="rect">
             <a:avLst/>
@@ -27788,8 +27552,8 @@
         </p:nvSpPr>
         <p:spPr>
           <a:xfrm>
-            <a:off x="6565392" y="2326879"/>
-            <a:ext cx="1920240" cy="239896"/>
+            <a:off x="6565392" y="2369910"/>
+            <a:ext cx="1920240" cy="261411"/>
           </a:xfrm>
           <a:prstGeom prst="rect">
             <a:avLst/>
@@ -27827,8 +27591,8 @@
         </p:nvSpPr>
         <p:spPr>
           <a:xfrm>
-            <a:off x="9336024" y="2391651"/>
-            <a:ext cx="51131" cy="110352"/>
+            <a:off x="9336024" y="2440491"/>
+            <a:ext cx="51131" cy="120249"/>
           </a:xfrm>
           <a:prstGeom prst="rect">
             <a:avLst/>
@@ -27847,8 +27611,8 @@
         </p:nvSpPr>
         <p:spPr>
           <a:xfrm>
-            <a:off x="10168128" y="2326879"/>
-            <a:ext cx="1234440" cy="239896"/>
+            <a:off x="10168128" y="2369910"/>
+            <a:ext cx="1234440" cy="261411"/>
           </a:xfrm>
           <a:prstGeom prst="rect">
             <a:avLst/>
@@ -27886,8 +27650,8 @@
         </p:nvSpPr>
         <p:spPr>
           <a:xfrm>
-            <a:off x="6208776" y="2566775"/>
-            <a:ext cx="310896" cy="239896"/>
+            <a:off x="6208776" y="2631320"/>
+            <a:ext cx="310896" cy="261411"/>
           </a:xfrm>
           <a:prstGeom prst="rect">
             <a:avLst/>
@@ -27925,8 +27689,8 @@
         </p:nvSpPr>
         <p:spPr>
           <a:xfrm>
-            <a:off x="6565392" y="2566775"/>
-            <a:ext cx="1920240" cy="239896"/>
+            <a:off x="6565392" y="2631320"/>
+            <a:ext cx="1920240" cy="261411"/>
           </a:xfrm>
           <a:prstGeom prst="rect">
             <a:avLst/>
@@ -27964,8 +27728,8 @@
         </p:nvSpPr>
         <p:spPr>
           <a:xfrm>
-            <a:off x="9336024" y="2631546"/>
-            <a:ext cx="42573" cy="110352"/>
+            <a:off x="9336024" y="2701901"/>
+            <a:ext cx="42573" cy="120249"/>
           </a:xfrm>
           <a:prstGeom prst="rect">
             <a:avLst/>
@@ -27984,8 +27748,8 @@
         </p:nvSpPr>
         <p:spPr>
           <a:xfrm>
-            <a:off x="10168128" y="2566775"/>
-            <a:ext cx="1234440" cy="239896"/>
+            <a:off x="10168128" y="2631320"/>
+            <a:ext cx="1234440" cy="261411"/>
           </a:xfrm>
           <a:prstGeom prst="rect">
             <a:avLst/>
@@ -28023,8 +27787,8 @@
         </p:nvSpPr>
         <p:spPr>
           <a:xfrm>
-            <a:off x="6208776" y="2806670"/>
-            <a:ext cx="310896" cy="239896"/>
+            <a:off x="6208776" y="2892731"/>
+            <a:ext cx="310896" cy="261411"/>
           </a:xfrm>
           <a:prstGeom prst="rect">
             <a:avLst/>
@@ -28062,8 +27826,8 @@
         </p:nvSpPr>
         <p:spPr>
           <a:xfrm>
-            <a:off x="6565392" y="2806670"/>
-            <a:ext cx="1920240" cy="239896"/>
+            <a:off x="6565392" y="2892731"/>
+            <a:ext cx="1920240" cy="261411"/>
           </a:xfrm>
           <a:prstGeom prst="rect">
             <a:avLst/>
@@ -28101,8 +27865,8 @@
         </p:nvSpPr>
         <p:spPr>
           <a:xfrm>
-            <a:off x="9306469" y="2871442"/>
-            <a:ext cx="29555" cy="110352"/>
+            <a:off x="9306469" y="2963312"/>
+            <a:ext cx="29555" cy="120249"/>
           </a:xfrm>
           <a:prstGeom prst="rect">
             <a:avLst/>
@@ -28121,8 +27885,8 @@
         </p:nvSpPr>
         <p:spPr>
           <a:xfrm>
-            <a:off x="10168128" y="2806670"/>
-            <a:ext cx="1234440" cy="239896"/>
+            <a:off x="10168128" y="2892731"/>
+            <a:ext cx="1234440" cy="261411"/>
           </a:xfrm>
           <a:prstGeom prst="rect">
             <a:avLst/>
@@ -28160,8 +27924,8 @@
         </p:nvSpPr>
         <p:spPr>
           <a:xfrm>
-            <a:off x="6208776" y="3046566"/>
-            <a:ext cx="310896" cy="239896"/>
+            <a:off x="6208776" y="3154142"/>
+            <a:ext cx="310896" cy="261411"/>
           </a:xfrm>
           <a:prstGeom prst="rect">
             <a:avLst/>
@@ -28199,8 +27963,8 @@
         </p:nvSpPr>
         <p:spPr>
           <a:xfrm>
-            <a:off x="6565392" y="3046566"/>
-            <a:ext cx="1920240" cy="239896"/>
+            <a:off x="6565392" y="3154142"/>
+            <a:ext cx="1920240" cy="261411"/>
           </a:xfrm>
           <a:prstGeom prst="rect">
             <a:avLst/>
@@ -28238,8 +28002,8 @@
         </p:nvSpPr>
         <p:spPr>
           <a:xfrm>
-            <a:off x="9293325" y="3111337"/>
-            <a:ext cx="42699" cy="110352"/>
+            <a:off x="9293325" y="3224723"/>
+            <a:ext cx="42699" cy="120249"/>
           </a:xfrm>
           <a:prstGeom prst="rect">
             <a:avLst/>
@@ -28258,8 +28022,8 @@
         </p:nvSpPr>
         <p:spPr>
           <a:xfrm>
-            <a:off x="10168128" y="3046566"/>
-            <a:ext cx="1234440" cy="239896"/>
+            <a:off x="10168128" y="3154142"/>
+            <a:ext cx="1234440" cy="261411"/>
           </a:xfrm>
           <a:prstGeom prst="rect">
             <a:avLst/>
@@ -28297,8 +28061,8 @@
         </p:nvSpPr>
         <p:spPr>
           <a:xfrm>
-            <a:off x="6208776" y="3286461"/>
-            <a:ext cx="310896" cy="239896"/>
+            <a:off x="6208776" y="3415553"/>
+            <a:ext cx="310896" cy="261411"/>
           </a:xfrm>
           <a:prstGeom prst="rect">
             <a:avLst/>
@@ -28336,8 +28100,8 @@
         </p:nvSpPr>
         <p:spPr>
           <a:xfrm>
-            <a:off x="6565392" y="3286461"/>
-            <a:ext cx="1920240" cy="239896"/>
+            <a:off x="6565392" y="3415553"/>
+            <a:ext cx="1920240" cy="261411"/>
           </a:xfrm>
           <a:prstGeom prst="rect">
             <a:avLst/>
@@ -28375,8 +28139,8 @@
         </p:nvSpPr>
         <p:spPr>
           <a:xfrm>
-            <a:off x="9214515" y="3351233"/>
-            <a:ext cx="121509" cy="110352"/>
+            <a:off x="9214515" y="3486134"/>
+            <a:ext cx="121509" cy="120249"/>
           </a:xfrm>
           <a:prstGeom prst="rect">
             <a:avLst/>
@@ -28395,8 +28159,8 @@
         </p:nvSpPr>
         <p:spPr>
           <a:xfrm>
-            <a:off x="10168128" y="3286461"/>
-            <a:ext cx="1234440" cy="239896"/>
+            <a:off x="10168128" y="3415553"/>
+            <a:ext cx="1234440" cy="261411"/>
           </a:xfrm>
           <a:prstGeom prst="rect">
             <a:avLst/>
@@ -28434,8 +28198,8 @@
         </p:nvSpPr>
         <p:spPr>
           <a:xfrm>
-            <a:off x="6208776" y="3526357"/>
-            <a:ext cx="310896" cy="239896"/>
+            <a:off x="6208776" y="3676964"/>
+            <a:ext cx="310896" cy="261411"/>
           </a:xfrm>
           <a:prstGeom prst="rect">
             <a:avLst/>
@@ -28473,8 +28237,8 @@
         </p:nvSpPr>
         <p:spPr>
           <a:xfrm>
-            <a:off x="6565392" y="3526357"/>
-            <a:ext cx="1920240" cy="239896"/>
+            <a:off x="6565392" y="3676964"/>
+            <a:ext cx="1920240" cy="261411"/>
           </a:xfrm>
           <a:prstGeom prst="rect">
             <a:avLst/>
@@ -28512,8 +28276,8 @@
         </p:nvSpPr>
         <p:spPr>
           <a:xfrm>
-            <a:off x="9050201" y="3591128"/>
-            <a:ext cx="285823" cy="110352"/>
+            <a:off x="9050201" y="3747545"/>
+            <a:ext cx="285823" cy="120249"/>
           </a:xfrm>
           <a:prstGeom prst="rect">
             <a:avLst/>
@@ -28532,8 +28296,8 @@
         </p:nvSpPr>
         <p:spPr>
           <a:xfrm>
-            <a:off x="10168128" y="3526357"/>
-            <a:ext cx="1234440" cy="239896"/>
+            <a:off x="10168128" y="3676964"/>
+            <a:ext cx="1234440" cy="261411"/>
           </a:xfrm>
           <a:prstGeom prst="rect">
             <a:avLst/>
@@ -28571,8 +28335,8 @@
         </p:nvSpPr>
         <p:spPr>
           <a:xfrm>
-            <a:off x="6208776" y="3766252"/>
-            <a:ext cx="310896" cy="239896"/>
+            <a:off x="6208776" y="3938375"/>
+            <a:ext cx="310896" cy="261411"/>
           </a:xfrm>
           <a:prstGeom prst="rect">
             <a:avLst/>
@@ -28610,8 +28374,8 @@
         </p:nvSpPr>
         <p:spPr>
           <a:xfrm>
-            <a:off x="6565392" y="3766252"/>
-            <a:ext cx="1920240" cy="239896"/>
+            <a:off x="6565392" y="3938375"/>
+            <a:ext cx="1920240" cy="261411"/>
           </a:xfrm>
           <a:prstGeom prst="rect">
             <a:avLst/>
@@ -28649,8 +28413,8 @@
         </p:nvSpPr>
         <p:spPr>
           <a:xfrm>
-            <a:off x="9011711" y="3831024"/>
-            <a:ext cx="324313" cy="110352"/>
+            <a:off x="9011711" y="4008956"/>
+            <a:ext cx="324313" cy="120249"/>
           </a:xfrm>
           <a:prstGeom prst="rect">
             <a:avLst/>
@@ -28669,8 +28433,8 @@
         </p:nvSpPr>
         <p:spPr>
           <a:xfrm>
-            <a:off x="10168128" y="3766252"/>
-            <a:ext cx="1234440" cy="239896"/>
+            <a:off x="10168128" y="3938375"/>
+            <a:ext cx="1234440" cy="261411"/>
           </a:xfrm>
           <a:prstGeom prst="rect">
             <a:avLst/>
@@ -28708,8 +28472,8 @@
         </p:nvSpPr>
         <p:spPr>
           <a:xfrm>
-            <a:off x="6208776" y="4006148"/>
-            <a:ext cx="310896" cy="239896"/>
+            <a:off x="6208776" y="4199785"/>
+            <a:ext cx="310896" cy="261411"/>
           </a:xfrm>
           <a:prstGeom prst="rect">
             <a:avLst/>
@@ -28747,8 +28511,8 @@
         </p:nvSpPr>
         <p:spPr>
           <a:xfrm>
-            <a:off x="6565392" y="4006148"/>
-            <a:ext cx="1920240" cy="239896"/>
+            <a:off x="6565392" y="4199785"/>
+            <a:ext cx="1920240" cy="261411"/>
           </a:xfrm>
           <a:prstGeom prst="rect">
             <a:avLst/>
@@ -28786,8 +28550,8 @@
         </p:nvSpPr>
         <p:spPr>
           <a:xfrm>
-            <a:off x="8964654" y="4070920"/>
-            <a:ext cx="371370" cy="110352"/>
+            <a:off x="8964654" y="4270366"/>
+            <a:ext cx="371370" cy="120249"/>
           </a:xfrm>
           <a:prstGeom prst="rect">
             <a:avLst/>
@@ -28806,8 +28570,8 @@
         </p:nvSpPr>
         <p:spPr>
           <a:xfrm>
-            <a:off x="10168128" y="4006148"/>
-            <a:ext cx="1234440" cy="239896"/>
+            <a:off x="10168128" y="4199785"/>
+            <a:ext cx="1234440" cy="261411"/>
           </a:xfrm>
           <a:prstGeom prst="rect">
             <a:avLst/>
@@ -28845,8 +28609,8 @@
         </p:nvSpPr>
         <p:spPr>
           <a:xfrm>
-            <a:off x="6208776" y="4246043"/>
-            <a:ext cx="310896" cy="239896"/>
+            <a:off x="6208776" y="4461196"/>
+            <a:ext cx="310896" cy="261411"/>
           </a:xfrm>
           <a:prstGeom prst="rect">
             <a:avLst/>
@@ -28884,8 +28648,8 @@
         </p:nvSpPr>
         <p:spPr>
           <a:xfrm>
-            <a:off x="6565392" y="4246043"/>
-            <a:ext cx="1920240" cy="239896"/>
+            <a:off x="6565392" y="4461196"/>
+            <a:ext cx="1920240" cy="261411"/>
           </a:xfrm>
           <a:prstGeom prst="rect">
             <a:avLst/>
@@ -28923,8 +28687,8 @@
         </p:nvSpPr>
         <p:spPr>
           <a:xfrm>
-            <a:off x="8964060" y="4310815"/>
-            <a:ext cx="371964" cy="110352"/>
+            <a:off x="8964060" y="4531777"/>
+            <a:ext cx="371964" cy="120249"/>
           </a:xfrm>
           <a:prstGeom prst="rect">
             <a:avLst/>
@@ -28943,8 +28707,8 @@
         </p:nvSpPr>
         <p:spPr>
           <a:xfrm>
-            <a:off x="10168128" y="4246043"/>
-            <a:ext cx="1234440" cy="239896"/>
+            <a:off x="10168128" y="4461196"/>
+            <a:ext cx="1234440" cy="261411"/>
           </a:xfrm>
           <a:prstGeom prst="rect">
             <a:avLst/>
@@ -28982,8 +28746,8 @@
         </p:nvSpPr>
         <p:spPr>
           <a:xfrm>
-            <a:off x="6208776" y="4485939"/>
-            <a:ext cx="310896" cy="239896"/>
+            <a:off x="6208776" y="4722607"/>
+            <a:ext cx="310896" cy="261411"/>
           </a:xfrm>
           <a:prstGeom prst="rect">
             <a:avLst/>
@@ -29021,8 +28785,8 @@
         </p:nvSpPr>
         <p:spPr>
           <a:xfrm>
-            <a:off x="6565392" y="4485939"/>
-            <a:ext cx="1920240" cy="239896"/>
+            <a:off x="6565392" y="4722607"/>
+            <a:ext cx="1920240" cy="261411"/>
           </a:xfrm>
           <a:prstGeom prst="rect">
             <a:avLst/>
@@ -29060,8 +28824,8 @@
         </p:nvSpPr>
         <p:spPr>
           <a:xfrm>
-            <a:off x="8958532" y="4550711"/>
-            <a:ext cx="377492" cy="110352"/>
+            <a:off x="8958532" y="4793188"/>
+            <a:ext cx="377492" cy="120249"/>
           </a:xfrm>
           <a:prstGeom prst="rect">
             <a:avLst/>
@@ -29080,8 +28844,8 @@
         </p:nvSpPr>
         <p:spPr>
           <a:xfrm>
-            <a:off x="10168128" y="4485939"/>
-            <a:ext cx="1234440" cy="239896"/>
+            <a:off x="10168128" y="4722607"/>
+            <a:ext cx="1234440" cy="261411"/>
           </a:xfrm>
           <a:prstGeom prst="rect">
             <a:avLst/>
@@ -29119,8 +28883,8 @@
         </p:nvSpPr>
         <p:spPr>
           <a:xfrm>
-            <a:off x="6208776" y="4725834"/>
-            <a:ext cx="310896" cy="239896"/>
+            <a:off x="6208776" y="4984018"/>
+            <a:ext cx="310896" cy="261411"/>
           </a:xfrm>
           <a:prstGeom prst="rect">
             <a:avLst/>
@@ -29158,8 +28922,8 @@
         </p:nvSpPr>
         <p:spPr>
           <a:xfrm>
-            <a:off x="6565392" y="4725834"/>
-            <a:ext cx="1920240" cy="239896"/>
+            <a:off x="6565392" y="4984018"/>
+            <a:ext cx="1920240" cy="261411"/>
           </a:xfrm>
           <a:prstGeom prst="rect">
             <a:avLst/>
@@ -29197,8 +28961,8 @@
         </p:nvSpPr>
         <p:spPr>
           <a:xfrm>
-            <a:off x="8881593" y="4790606"/>
-            <a:ext cx="454431" cy="110352"/>
+            <a:off x="8881593" y="5054599"/>
+            <a:ext cx="454431" cy="120249"/>
           </a:xfrm>
           <a:prstGeom prst="rect">
             <a:avLst/>
@@ -29217,8 +28981,8 @@
         </p:nvSpPr>
         <p:spPr>
           <a:xfrm>
-            <a:off x="10168128" y="4725834"/>
-            <a:ext cx="1234440" cy="239896"/>
+            <a:off x="10168128" y="4984018"/>
+            <a:ext cx="1234440" cy="261411"/>
           </a:xfrm>
           <a:prstGeom prst="rect">
             <a:avLst/>
@@ -29256,8 +29020,8 @@
         </p:nvSpPr>
         <p:spPr>
           <a:xfrm>
-            <a:off x="6208776" y="4965730"/>
-            <a:ext cx="310896" cy="239896"/>
+            <a:off x="6208776" y="5245429"/>
+            <a:ext cx="310896" cy="261411"/>
           </a:xfrm>
           <a:prstGeom prst="rect">
             <a:avLst/>
@@ -29295,8 +29059,8 @@
         </p:nvSpPr>
         <p:spPr>
           <a:xfrm>
-            <a:off x="6565392" y="4965730"/>
-            <a:ext cx="1920240" cy="239896"/>
+            <a:off x="6565392" y="5245429"/>
+            <a:ext cx="1920240" cy="261411"/>
           </a:xfrm>
           <a:prstGeom prst="rect">
             <a:avLst/>
@@ -29334,8 +29098,8 @@
         </p:nvSpPr>
         <p:spPr>
           <a:xfrm>
-            <a:off x="8875241" y="5030502"/>
-            <a:ext cx="460783" cy="110352"/>
+            <a:off x="8875241" y="5316010"/>
+            <a:ext cx="460783" cy="120249"/>
           </a:xfrm>
           <a:prstGeom prst="rect">
             <a:avLst/>
@@ -29354,8 +29118,8 @@
         </p:nvSpPr>
         <p:spPr>
           <a:xfrm>
-            <a:off x="10168128" y="4965730"/>
-            <a:ext cx="1234440" cy="239896"/>
+            <a:off x="10168128" y="5245429"/>
+            <a:ext cx="1234440" cy="261411"/>
           </a:xfrm>
           <a:prstGeom prst="rect">
             <a:avLst/>
@@ -29393,8 +29157,8 @@
         </p:nvSpPr>
         <p:spPr>
           <a:xfrm>
-            <a:off x="6208776" y="5205625"/>
-            <a:ext cx="310896" cy="239896"/>
+            <a:off x="6208776" y="5506840"/>
+            <a:ext cx="310896" cy="261411"/>
           </a:xfrm>
           <a:prstGeom prst="rect">
             <a:avLst/>
@@ -29432,8 +29196,8 @@
         </p:nvSpPr>
         <p:spPr>
           <a:xfrm>
-            <a:off x="6565392" y="5205625"/>
-            <a:ext cx="1920240" cy="239896"/>
+            <a:off x="6565392" y="5506840"/>
+            <a:ext cx="1920240" cy="261411"/>
           </a:xfrm>
           <a:prstGeom prst="rect">
             <a:avLst/>
@@ -29471,8 +29235,8 @@
         </p:nvSpPr>
         <p:spPr>
           <a:xfrm>
-            <a:off x="8760254" y="5270397"/>
-            <a:ext cx="575770" cy="110352"/>
+            <a:off x="8760254" y="5577420"/>
+            <a:ext cx="575770" cy="120249"/>
           </a:xfrm>
           <a:prstGeom prst="rect">
             <a:avLst/>
@@ -29491,8 +29255,8 @@
         </p:nvSpPr>
         <p:spPr>
           <a:xfrm>
-            <a:off x="10168128" y="5205625"/>
-            <a:ext cx="1234440" cy="239896"/>
+            <a:off x="10168128" y="5506840"/>
+            <a:ext cx="1234440" cy="261411"/>
           </a:xfrm>
           <a:prstGeom prst="rect">
             <a:avLst/>
@@ -29530,8 +29294,8 @@
         </p:nvSpPr>
         <p:spPr>
           <a:xfrm>
-            <a:off x="6208776" y="5445521"/>
-            <a:ext cx="310896" cy="239896"/>
+            <a:off x="6208776" y="5768250"/>
+            <a:ext cx="310896" cy="261411"/>
           </a:xfrm>
           <a:prstGeom prst="rect">
             <a:avLst/>
@@ -29569,8 +29333,8 @@
         </p:nvSpPr>
         <p:spPr>
           <a:xfrm>
-            <a:off x="6565392" y="5445521"/>
-            <a:ext cx="1920240" cy="239896"/>
+            <a:off x="6565392" y="5768250"/>
+            <a:ext cx="1920240" cy="261411"/>
           </a:xfrm>
           <a:prstGeom prst="rect">
             <a:avLst/>
@@ -29608,8 +29372,8 @@
         </p:nvSpPr>
         <p:spPr>
           <a:xfrm>
-            <a:off x="8731990" y="5510293"/>
-            <a:ext cx="604034" cy="110352"/>
+            <a:off x="8731990" y="5838831"/>
+            <a:ext cx="604034" cy="120249"/>
           </a:xfrm>
           <a:prstGeom prst="rect">
             <a:avLst/>
@@ -29628,8 +29392,8 @@
         </p:nvSpPr>
         <p:spPr>
           <a:xfrm>
-            <a:off x="10168128" y="5445521"/>
-            <a:ext cx="1234440" cy="239896"/>
+            <a:off x="10168128" y="5768250"/>
+            <a:ext cx="1234440" cy="261411"/>
           </a:xfrm>
           <a:prstGeom prst="rect">
             <a:avLst/>
@@ -29668,7 +29432,7 @@
         <p:spPr>
           <a:xfrm>
             <a:off x="3780130" y="1847088"/>
-            <a:ext cx="10973" cy="4078224"/>
+            <a:ext cx="10973" cy="4443984"/>
           </a:xfrm>
           <a:prstGeom prst="rect">
             <a:avLst/>
@@ -29688,7 +29452,7 @@
         <p:spPr>
           <a:xfrm>
             <a:off x="9330538" y="1847088"/>
-            <a:ext cx="10973" cy="4078224"/>
+            <a:ext cx="10973" cy="4443984"/>
           </a:xfrm>
           <a:prstGeom prst="rect">
             <a:avLst/>
@@ -29708,7 +29472,7 @@
         <p:spPr>
           <a:xfrm>
             <a:off x="6085332" y="1847088"/>
-            <a:ext cx="10973" cy="4078224"/>
+            <a:ext cx="10973" cy="4443984"/>
           </a:xfrm>
           <a:prstGeom prst="rect">
             <a:avLst/>
@@ -29718,65 +29482,6 @@
           </a:solidFill>
           <a:ln/>
         </p:spPr>
-      </p:sp>
-      <p:sp>
-        <p:nvSpPr>
-          <p:cNvPr id="146" name="Shape 144"/>
-          <p:cNvSpPr/>
-          <p:nvPr/>
-        </p:nvSpPr>
-        <p:spPr>
-          <a:xfrm>
-            <a:off x="457200" y="6126480"/>
-            <a:ext cx="11274552" cy="615696"/>
-          </a:xfrm>
-          <a:prstGeom prst="rect">
-            <a:avLst/>
-          </a:prstGeom>
-          <a:solidFill>
-            <a:srgbClr val="E6F6EE"/>
-          </a:solidFill>
-          <a:ln/>
-        </p:spPr>
-      </p:sp>
-      <p:sp>
-        <p:nvSpPr>
-          <p:cNvPr id="147" name="Text 145"/>
-          <p:cNvSpPr txBox="1"/>
-          <p:nvPr/>
-        </p:nvSpPr>
-        <p:spPr>
-          <a:xfrm>
-            <a:off x="658368" y="6144768"/>
-            <a:ext cx="10927080" cy="579120"/>
-          </a:xfrm>
-          <a:prstGeom prst="rect">
-            <a:avLst/>
-          </a:prstGeom>
-          <a:noFill/>
-          <a:ln/>
-        </p:spPr>
-        <p:txBody>
-          <a:bodyPr wrap="square" lIns="0" tIns="0" rIns="0" bIns="0" rtlCol="0" anchor="ctr"/>
-          <a:lstStyle/>
-          <a:p>
-            <a:pPr indent="0" marL="0">
-              <a:buNone/>
-            </a:pPr>
-            <a:r>
-              <a:rPr lang="en-US" sz="1600" b="1" dirty="0">
-                <a:solidFill>
-                  <a:srgbClr val="0B7A4A"/>
-                </a:solidFill>
-                <a:latin typeface="Inter" pitchFamily="34" charset="0"/>
-                <a:ea typeface="Inter" pitchFamily="34" charset="-122"/>
-                <a:cs typeface="Inter" pitchFamily="34" charset="-120"/>
-              </a:rPr>
-              <a:t>21 of 33 stores raised internal parts GP%, led by Acura at +6.2 pts to 34.0%. 12 declined; VW St George fell most at −4.8 pts.</a:t>
-            </a:r>
-            <a:endParaRPr lang="en-US" sz="1600" dirty="0"/>
-          </a:p>
-        </p:txBody>
       </p:sp>
     </p:spTree>
   </p:cSld>
@@ -29917,7 +29622,7 @@
         <p:spPr>
           <a:xfrm>
             <a:off x="457200" y="1207008"/>
-            <a:ext cx="11274552" cy="4782312"/>
+            <a:ext cx="11274552" cy="5148072"/>
           </a:xfrm>
           <a:prstGeom prst="rect">
             <a:avLst/>
@@ -30035,7 +29740,7 @@
         <p:spPr>
           <a:xfrm>
             <a:off x="658368" y="2103120"/>
-            <a:ext cx="3489960" cy="755294"/>
+            <a:ext cx="3489960" cy="828446"/>
           </a:xfrm>
           <a:prstGeom prst="rect">
             <a:avLst/>
@@ -30055,7 +29760,7 @@
         <p:spPr>
           <a:xfrm>
             <a:off x="4084320" y="2139696"/>
-            <a:ext cx="64008" cy="682142"/>
+            <a:ext cx="64008" cy="755294"/>
           </a:xfrm>
           <a:prstGeom prst="rect">
             <a:avLst/>
@@ -30075,7 +29780,7 @@
         <p:spPr>
           <a:xfrm>
             <a:off x="749808" y="2103120"/>
-            <a:ext cx="365760" cy="755294"/>
+            <a:ext cx="365760" cy="828446"/>
           </a:xfrm>
           <a:prstGeom prst="rect">
             <a:avLst/>
@@ -30114,7 +29819,7 @@
         <p:spPr>
           <a:xfrm>
             <a:off x="1097280" y="2103120"/>
-            <a:ext cx="1825752" cy="755294"/>
+            <a:ext cx="1825752" cy="828446"/>
           </a:xfrm>
           <a:prstGeom prst="rect">
             <a:avLst/>
@@ -30193,7 +29898,7 @@
         <p:spPr>
           <a:xfrm>
             <a:off x="2941320" y="2103120"/>
-            <a:ext cx="1115568" cy="755294"/>
+            <a:ext cx="1115568" cy="828446"/>
           </a:xfrm>
           <a:prstGeom prst="rect">
             <a:avLst/>
@@ -30231,8 +29936,8 @@
         </p:nvSpPr>
         <p:spPr>
           <a:xfrm>
-            <a:off x="749808" y="2858414"/>
-            <a:ext cx="365760" cy="755294"/>
+            <a:off x="749808" y="2931566"/>
+            <a:ext cx="365760" cy="828446"/>
           </a:xfrm>
           <a:prstGeom prst="rect">
             <a:avLst/>
@@ -30270,8 +29975,8 @@
         </p:nvSpPr>
         <p:spPr>
           <a:xfrm>
-            <a:off x="1097280" y="2858414"/>
-            <a:ext cx="1825752" cy="755294"/>
+            <a:off x="1097280" y="2931566"/>
+            <a:ext cx="1825752" cy="828446"/>
           </a:xfrm>
           <a:prstGeom prst="rect">
             <a:avLst/>
@@ -30349,8 +30054,8 @@
         </p:nvSpPr>
         <p:spPr>
           <a:xfrm>
-            <a:off x="2941320" y="2858414"/>
-            <a:ext cx="1115568" cy="755294"/>
+            <a:off x="2941320" y="2931566"/>
+            <a:ext cx="1115568" cy="828446"/>
           </a:xfrm>
           <a:prstGeom prst="rect">
             <a:avLst/>
@@ -30388,8 +30093,8 @@
         </p:nvSpPr>
         <p:spPr>
           <a:xfrm>
-            <a:off x="658368" y="3613709"/>
-            <a:ext cx="3489960" cy="755294"/>
+            <a:off x="658368" y="3760013"/>
+            <a:ext cx="3489960" cy="828446"/>
           </a:xfrm>
           <a:prstGeom prst="rect">
             <a:avLst/>
@@ -30408,8 +30113,8 @@
         </p:nvSpPr>
         <p:spPr>
           <a:xfrm>
-            <a:off x="749808" y="3613709"/>
-            <a:ext cx="365760" cy="755294"/>
+            <a:off x="749808" y="3760013"/>
+            <a:ext cx="365760" cy="828446"/>
           </a:xfrm>
           <a:prstGeom prst="rect">
             <a:avLst/>
@@ -30447,8 +30152,8 @@
         </p:nvSpPr>
         <p:spPr>
           <a:xfrm>
-            <a:off x="1097280" y="3613709"/>
-            <a:ext cx="1825752" cy="755294"/>
+            <a:off x="1097280" y="3760013"/>
+            <a:ext cx="1825752" cy="828446"/>
           </a:xfrm>
           <a:prstGeom prst="rect">
             <a:avLst/>
@@ -30526,8 +30231,8 @@
         </p:nvSpPr>
         <p:spPr>
           <a:xfrm>
-            <a:off x="2941320" y="3613709"/>
-            <a:ext cx="1115568" cy="755294"/>
+            <a:off x="2941320" y="3760013"/>
+            <a:ext cx="1115568" cy="828446"/>
           </a:xfrm>
           <a:prstGeom prst="rect">
             <a:avLst/>
@@ -30565,8 +30270,8 @@
         </p:nvSpPr>
         <p:spPr>
           <a:xfrm>
-            <a:off x="749808" y="4369003"/>
-            <a:ext cx="365760" cy="755294"/>
+            <a:off x="749808" y="4588459"/>
+            <a:ext cx="365760" cy="828446"/>
           </a:xfrm>
           <a:prstGeom prst="rect">
             <a:avLst/>
@@ -30604,8 +30309,8 @@
         </p:nvSpPr>
         <p:spPr>
           <a:xfrm>
-            <a:off x="1097280" y="4369003"/>
-            <a:ext cx="1825752" cy="755294"/>
+            <a:off x="1097280" y="4588459"/>
+            <a:ext cx="1825752" cy="828446"/>
           </a:xfrm>
           <a:prstGeom prst="rect">
             <a:avLst/>
@@ -30683,8 +30388,8 @@
         </p:nvSpPr>
         <p:spPr>
           <a:xfrm>
-            <a:off x="2941320" y="4369003"/>
-            <a:ext cx="1115568" cy="755294"/>
+            <a:off x="2941320" y="4588459"/>
+            <a:ext cx="1115568" cy="828446"/>
           </a:xfrm>
           <a:prstGeom prst="rect">
             <a:avLst/>
@@ -30722,8 +30427,8 @@
         </p:nvSpPr>
         <p:spPr>
           <a:xfrm>
-            <a:off x="658368" y="5124298"/>
-            <a:ext cx="3489960" cy="755294"/>
+            <a:off x="658368" y="5416906"/>
+            <a:ext cx="3489960" cy="828446"/>
           </a:xfrm>
           <a:prstGeom prst="rect">
             <a:avLst/>
@@ -30742,8 +30447,8 @@
         </p:nvSpPr>
         <p:spPr>
           <a:xfrm>
-            <a:off x="749808" y="5124298"/>
-            <a:ext cx="365760" cy="755294"/>
+            <a:off x="749808" y="5416906"/>
+            <a:ext cx="365760" cy="828446"/>
           </a:xfrm>
           <a:prstGeom prst="rect">
             <a:avLst/>
@@ -30781,8 +30486,8 @@
         </p:nvSpPr>
         <p:spPr>
           <a:xfrm>
-            <a:off x="1097280" y="5124298"/>
-            <a:ext cx="1825752" cy="755294"/>
+            <a:off x="1097280" y="5416906"/>
+            <a:ext cx="1825752" cy="828446"/>
           </a:xfrm>
           <a:prstGeom prst="rect">
             <a:avLst/>
@@ -30860,8 +30565,8 @@
         </p:nvSpPr>
         <p:spPr>
           <a:xfrm>
-            <a:off x="2941320" y="5124298"/>
-            <a:ext cx="1115568" cy="755294"/>
+            <a:off x="2941320" y="5416906"/>
+            <a:ext cx="1115568" cy="828446"/>
           </a:xfrm>
           <a:prstGeom prst="rect">
             <a:avLst/>
@@ -30998,7 +30703,7 @@
         <p:spPr>
           <a:xfrm>
             <a:off x="4349496" y="2103120"/>
-            <a:ext cx="3489960" cy="755294"/>
+            <a:ext cx="3489960" cy="828446"/>
           </a:xfrm>
           <a:prstGeom prst="rect">
             <a:avLst/>
@@ -31018,7 +30723,7 @@
         <p:spPr>
           <a:xfrm>
             <a:off x="4440936" y="2103120"/>
-            <a:ext cx="365760" cy="755294"/>
+            <a:ext cx="365760" cy="828446"/>
           </a:xfrm>
           <a:prstGeom prst="rect">
             <a:avLst/>
@@ -31057,7 +30762,7 @@
         <p:spPr>
           <a:xfrm>
             <a:off x="4788408" y="2103120"/>
-            <a:ext cx="1825752" cy="755294"/>
+            <a:ext cx="1825752" cy="828446"/>
           </a:xfrm>
           <a:prstGeom prst="rect">
             <a:avLst/>
@@ -31136,7 +30841,7 @@
         <p:spPr>
           <a:xfrm>
             <a:off x="6632448" y="2103120"/>
-            <a:ext cx="1115568" cy="755294"/>
+            <a:ext cx="1115568" cy="828446"/>
           </a:xfrm>
           <a:prstGeom prst="rect">
             <a:avLst/>
@@ -31174,8 +30879,8 @@
         </p:nvSpPr>
         <p:spPr>
           <a:xfrm>
-            <a:off x="4440936" y="2858414"/>
-            <a:ext cx="365760" cy="755294"/>
+            <a:off x="4440936" y="2931566"/>
+            <a:ext cx="365760" cy="828446"/>
           </a:xfrm>
           <a:prstGeom prst="rect">
             <a:avLst/>
@@ -31213,8 +30918,8 @@
         </p:nvSpPr>
         <p:spPr>
           <a:xfrm>
-            <a:off x="4788408" y="2858414"/>
-            <a:ext cx="1825752" cy="755294"/>
+            <a:off x="4788408" y="2931566"/>
+            <a:ext cx="1825752" cy="828446"/>
           </a:xfrm>
           <a:prstGeom prst="rect">
             <a:avLst/>
@@ -31292,8 +30997,8 @@
         </p:nvSpPr>
         <p:spPr>
           <a:xfrm>
-            <a:off x="6632448" y="2858414"/>
-            <a:ext cx="1115568" cy="755294"/>
+            <a:off x="6632448" y="2931566"/>
+            <a:ext cx="1115568" cy="828446"/>
           </a:xfrm>
           <a:prstGeom prst="rect">
             <a:avLst/>
@@ -31331,8 +31036,8 @@
         </p:nvSpPr>
         <p:spPr>
           <a:xfrm>
-            <a:off x="4349496" y="3613709"/>
-            <a:ext cx="3489960" cy="755294"/>
+            <a:off x="4349496" y="3760013"/>
+            <a:ext cx="3489960" cy="828446"/>
           </a:xfrm>
           <a:prstGeom prst="rect">
             <a:avLst/>
@@ -31351,8 +31056,8 @@
         </p:nvSpPr>
         <p:spPr>
           <a:xfrm>
-            <a:off x="4440936" y="3613709"/>
-            <a:ext cx="365760" cy="755294"/>
+            <a:off x="4440936" y="3760013"/>
+            <a:ext cx="365760" cy="828446"/>
           </a:xfrm>
           <a:prstGeom prst="rect">
             <a:avLst/>
@@ -31390,8 +31095,8 @@
         </p:nvSpPr>
         <p:spPr>
           <a:xfrm>
-            <a:off x="4788408" y="3613709"/>
-            <a:ext cx="1825752" cy="755294"/>
+            <a:off x="4788408" y="3760013"/>
+            <a:ext cx="1825752" cy="828446"/>
           </a:xfrm>
           <a:prstGeom prst="rect">
             <a:avLst/>
@@ -31469,8 +31174,8 @@
         </p:nvSpPr>
         <p:spPr>
           <a:xfrm>
-            <a:off x="6632448" y="3613709"/>
-            <a:ext cx="1115568" cy="755294"/>
+            <a:off x="6632448" y="3760013"/>
+            <a:ext cx="1115568" cy="828446"/>
           </a:xfrm>
           <a:prstGeom prst="rect">
             <a:avLst/>
@@ -31508,8 +31213,8 @@
         </p:nvSpPr>
         <p:spPr>
           <a:xfrm>
-            <a:off x="4440936" y="4369003"/>
-            <a:ext cx="365760" cy="755294"/>
+            <a:off x="4440936" y="4588459"/>
+            <a:ext cx="365760" cy="828446"/>
           </a:xfrm>
           <a:prstGeom prst="rect">
             <a:avLst/>
@@ -31547,8 +31252,8 @@
         </p:nvSpPr>
         <p:spPr>
           <a:xfrm>
-            <a:off x="4788408" y="4369003"/>
-            <a:ext cx="1825752" cy="755294"/>
+            <a:off x="4788408" y="4588459"/>
+            <a:ext cx="1825752" cy="828446"/>
           </a:xfrm>
           <a:prstGeom prst="rect">
             <a:avLst/>
@@ -31626,8 +31331,8 @@
         </p:nvSpPr>
         <p:spPr>
           <a:xfrm>
-            <a:off x="6632448" y="4369003"/>
-            <a:ext cx="1115568" cy="755294"/>
+            <a:off x="6632448" y="4588459"/>
+            <a:ext cx="1115568" cy="828446"/>
           </a:xfrm>
           <a:prstGeom prst="rect">
             <a:avLst/>
@@ -31665,8 +31370,8 @@
         </p:nvSpPr>
         <p:spPr>
           <a:xfrm>
-            <a:off x="4349496" y="5124298"/>
-            <a:ext cx="3489960" cy="755294"/>
+            <a:off x="4349496" y="5416906"/>
+            <a:ext cx="3489960" cy="828446"/>
           </a:xfrm>
           <a:prstGeom prst="rect">
             <a:avLst/>
@@ -31685,8 +31390,8 @@
         </p:nvSpPr>
         <p:spPr>
           <a:xfrm>
-            <a:off x="4440936" y="5124298"/>
-            <a:ext cx="365760" cy="755294"/>
+            <a:off x="4440936" y="5416906"/>
+            <a:ext cx="365760" cy="828446"/>
           </a:xfrm>
           <a:prstGeom prst="rect">
             <a:avLst/>
@@ -31724,8 +31429,8 @@
         </p:nvSpPr>
         <p:spPr>
           <a:xfrm>
-            <a:off x="4788408" y="5124298"/>
-            <a:ext cx="1825752" cy="755294"/>
+            <a:off x="4788408" y="5416906"/>
+            <a:ext cx="1825752" cy="828446"/>
           </a:xfrm>
           <a:prstGeom prst="rect">
             <a:avLst/>
@@ -31803,8 +31508,8 @@
         </p:nvSpPr>
         <p:spPr>
           <a:xfrm>
-            <a:off x="6632448" y="5124298"/>
-            <a:ext cx="1115568" cy="755294"/>
+            <a:off x="6632448" y="5416906"/>
+            <a:ext cx="1115568" cy="828446"/>
           </a:xfrm>
           <a:prstGeom prst="rect">
             <a:avLst/>
@@ -31941,7 +31646,7 @@
         <p:spPr>
           <a:xfrm>
             <a:off x="8040624" y="2103120"/>
-            <a:ext cx="3489960" cy="755294"/>
+            <a:ext cx="3489960" cy="828446"/>
           </a:xfrm>
           <a:prstGeom prst="rect">
             <a:avLst/>
@@ -31961,7 +31666,7 @@
         <p:spPr>
           <a:xfrm>
             <a:off x="8132064" y="2103120"/>
-            <a:ext cx="365760" cy="755294"/>
+            <a:ext cx="365760" cy="828446"/>
           </a:xfrm>
           <a:prstGeom prst="rect">
             <a:avLst/>
@@ -32000,7 +31705,7 @@
         <p:spPr>
           <a:xfrm>
             <a:off x="8479536" y="2103120"/>
-            <a:ext cx="1825752" cy="755294"/>
+            <a:ext cx="1825752" cy="828446"/>
           </a:xfrm>
           <a:prstGeom prst="rect">
             <a:avLst/>
@@ -32079,7 +31784,7 @@
         <p:spPr>
           <a:xfrm>
             <a:off x="10323576" y="2103120"/>
-            <a:ext cx="1115568" cy="755294"/>
+            <a:ext cx="1115568" cy="828446"/>
           </a:xfrm>
           <a:prstGeom prst="rect">
             <a:avLst/>
@@ -32117,8 +31822,8 @@
         </p:nvSpPr>
         <p:spPr>
           <a:xfrm>
-            <a:off x="8132064" y="2858414"/>
-            <a:ext cx="365760" cy="755294"/>
+            <a:off x="8132064" y="2931566"/>
+            <a:ext cx="365760" cy="828446"/>
           </a:xfrm>
           <a:prstGeom prst="rect">
             <a:avLst/>
@@ -32156,8 +31861,8 @@
         </p:nvSpPr>
         <p:spPr>
           <a:xfrm>
-            <a:off x="8479536" y="2858414"/>
-            <a:ext cx="1825752" cy="755294"/>
+            <a:off x="8479536" y="2931566"/>
+            <a:ext cx="1825752" cy="828446"/>
           </a:xfrm>
           <a:prstGeom prst="rect">
             <a:avLst/>
@@ -32235,8 +31940,8 @@
         </p:nvSpPr>
         <p:spPr>
           <a:xfrm>
-            <a:off x="10323576" y="2858414"/>
-            <a:ext cx="1115568" cy="755294"/>
+            <a:off x="10323576" y="2931566"/>
+            <a:ext cx="1115568" cy="828446"/>
           </a:xfrm>
           <a:prstGeom prst="rect">
             <a:avLst/>
@@ -32274,8 +31979,8 @@
         </p:nvSpPr>
         <p:spPr>
           <a:xfrm>
-            <a:off x="8040624" y="3613709"/>
-            <a:ext cx="3489960" cy="755294"/>
+            <a:off x="8040624" y="3760013"/>
+            <a:ext cx="3489960" cy="828446"/>
           </a:xfrm>
           <a:prstGeom prst="rect">
             <a:avLst/>
@@ -32294,8 +31999,8 @@
         </p:nvSpPr>
         <p:spPr>
           <a:xfrm>
-            <a:off x="8132064" y="3613709"/>
-            <a:ext cx="365760" cy="755294"/>
+            <a:off x="8132064" y="3760013"/>
+            <a:ext cx="365760" cy="828446"/>
           </a:xfrm>
           <a:prstGeom prst="rect">
             <a:avLst/>
@@ -32333,8 +32038,8 @@
         </p:nvSpPr>
         <p:spPr>
           <a:xfrm>
-            <a:off x="8479536" y="3613709"/>
-            <a:ext cx="1825752" cy="755294"/>
+            <a:off x="8479536" y="3760013"/>
+            <a:ext cx="1825752" cy="828446"/>
           </a:xfrm>
           <a:prstGeom prst="rect">
             <a:avLst/>
@@ -32412,8 +32117,8 @@
         </p:nvSpPr>
         <p:spPr>
           <a:xfrm>
-            <a:off x="10323576" y="3613709"/>
-            <a:ext cx="1115568" cy="755294"/>
+            <a:off x="10323576" y="3760013"/>
+            <a:ext cx="1115568" cy="828446"/>
           </a:xfrm>
           <a:prstGeom prst="rect">
             <a:avLst/>
@@ -32451,8 +32156,8 @@
         </p:nvSpPr>
         <p:spPr>
           <a:xfrm>
-            <a:off x="11466576" y="4405579"/>
-            <a:ext cx="64008" cy="682142"/>
+            <a:off x="11466576" y="4625035"/>
+            <a:ext cx="64008" cy="755294"/>
           </a:xfrm>
           <a:prstGeom prst="rect">
             <a:avLst/>
@@ -32471,8 +32176,8 @@
         </p:nvSpPr>
         <p:spPr>
           <a:xfrm>
-            <a:off x="8132064" y="4369003"/>
-            <a:ext cx="365760" cy="755294"/>
+            <a:off x="8132064" y="4588459"/>
+            <a:ext cx="365760" cy="828446"/>
           </a:xfrm>
           <a:prstGeom prst="rect">
             <a:avLst/>
@@ -32510,8 +32215,8 @@
         </p:nvSpPr>
         <p:spPr>
           <a:xfrm>
-            <a:off x="8479536" y="4369003"/>
-            <a:ext cx="1825752" cy="755294"/>
+            <a:off x="8479536" y="4588459"/>
+            <a:ext cx="1825752" cy="828446"/>
           </a:xfrm>
           <a:prstGeom prst="rect">
             <a:avLst/>
@@ -32589,8 +32294,8 @@
         </p:nvSpPr>
         <p:spPr>
           <a:xfrm>
-            <a:off x="10323576" y="4369003"/>
-            <a:ext cx="1115568" cy="755294"/>
+            <a:off x="10323576" y="4588459"/>
+            <a:ext cx="1115568" cy="828446"/>
           </a:xfrm>
           <a:prstGeom prst="rect">
             <a:avLst/>
@@ -32628,8 +32333,8 @@
         </p:nvSpPr>
         <p:spPr>
           <a:xfrm>
-            <a:off x="8040624" y="5124298"/>
-            <a:ext cx="3489960" cy="755294"/>
+            <a:off x="8040624" y="5416906"/>
+            <a:ext cx="3489960" cy="828446"/>
           </a:xfrm>
           <a:prstGeom prst="rect">
             <a:avLst/>
@@ -32648,8 +32353,8 @@
         </p:nvSpPr>
         <p:spPr>
           <a:xfrm>
-            <a:off x="8132064" y="5124298"/>
-            <a:ext cx="365760" cy="755294"/>
+            <a:off x="8132064" y="5416906"/>
+            <a:ext cx="365760" cy="828446"/>
           </a:xfrm>
           <a:prstGeom prst="rect">
             <a:avLst/>
@@ -32687,8 +32392,8 @@
         </p:nvSpPr>
         <p:spPr>
           <a:xfrm>
-            <a:off x="8479536" y="5124298"/>
-            <a:ext cx="1825752" cy="755294"/>
+            <a:off x="8479536" y="5416906"/>
+            <a:ext cx="1825752" cy="828446"/>
           </a:xfrm>
           <a:prstGeom prst="rect">
             <a:avLst/>
@@ -32766,8 +32471,8 @@
         </p:nvSpPr>
         <p:spPr>
           <a:xfrm>
-            <a:off x="10323576" y="5124298"/>
-            <a:ext cx="1115568" cy="755294"/>
+            <a:off x="10323576" y="5416906"/>
+            <a:ext cx="1115568" cy="828446"/>
           </a:xfrm>
           <a:prstGeom prst="rect">
             <a:avLst/>
@@ -32792,65 +32497,6 @@
                 <a:cs typeface="Inter" pitchFamily="34" charset="-120"/>
               </a:rPr>
               <a:t>+2.7 pts</a:t>
-            </a:r>
-            <a:endParaRPr lang="en-US" sz="1600" dirty="0"/>
-          </a:p>
-        </p:txBody>
-      </p:sp>
-      <p:sp>
-        <p:nvSpPr>
-          <p:cNvPr id="71" name="Shape 69"/>
-          <p:cNvSpPr/>
-          <p:nvPr/>
-        </p:nvSpPr>
-        <p:spPr>
-          <a:xfrm>
-            <a:off x="457200" y="6126480"/>
-            <a:ext cx="11274552" cy="615696"/>
-          </a:xfrm>
-          <a:prstGeom prst="rect">
-            <a:avLst/>
-          </a:prstGeom>
-          <a:solidFill>
-            <a:srgbClr val="EDF4FA"/>
-          </a:solidFill>
-          <a:ln/>
-        </p:spPr>
-      </p:sp>
-      <p:sp>
-        <p:nvSpPr>
-          <p:cNvPr id="72" name="Text 70"/>
-          <p:cNvSpPr txBox="1"/>
-          <p:nvPr/>
-        </p:nvSpPr>
-        <p:spPr>
-          <a:xfrm>
-            <a:off x="658368" y="6144768"/>
-            <a:ext cx="10927080" cy="579120"/>
-          </a:xfrm>
-          <a:prstGeom prst="rect">
-            <a:avLst/>
-          </a:prstGeom>
-          <a:noFill/>
-          <a:ln/>
-        </p:spPr>
-        <p:txBody>
-          <a:bodyPr wrap="square" lIns="0" tIns="0" rIns="0" bIns="0" rtlCol="0" anchor="ctr"/>
-          <a:lstStyle/>
-          <a:p>
-            <a:pPr indent="0" marL="0">
-              <a:buNone/>
-            </a:pPr>
-            <a:r>
-              <a:rPr lang="en-US" sz="1600" b="1" dirty="0">
-                <a:solidFill>
-                  <a:srgbClr val="0B2C4A"/>
-                </a:solidFill>
-                <a:latin typeface="Inter" pitchFamily="34" charset="0"/>
-                <a:ea typeface="Inter" pitchFamily="34" charset="-122"/>
-                <a:cs typeface="Inter" pitchFamily="34" charset="-120"/>
-              </a:rPr>
-              <a:t>Ask Acura, Hyundai Prescott and Honda Flagstaff what changed. Ask VW St George, Kia LV and LR LV what got in the way. Ask LR Reno, CDJR Post Falls and LR Henderson what they started this year.</a:t>
             </a:r>
             <a:endParaRPr lang="en-US" sz="1600" dirty="0"/>
           </a:p>

--- a/day2-deck/decks/Internal Gross Profit - Review.pptx
+++ b/day2-deck/decks/Internal Gross Profit - Review.pptx
@@ -4335,7 +4335,7 @@
           <a:p>
             <a:r>
               <a:rPr lang="en-US" dirty="0"/>
-              <a:t>Takeaway (off the slide): 16 of 33 stores at or above the 78.1% group, led by Honda Henderson at 85.9%. Audi Reno is lowest at 58.8%.Source: Qlik - Closed Repair Orders. Internal pay type, Jan-Sep by close month. Same-store, INEOS excluded (opened 2026). GMC Prescott body shop labor types excluded. Internal labor gross / internal labor sale. A higher internal margin adds service gross but is a cost to used cars. Jan-Sep 2026 YTD. Green at or above the group, red below. Bars start at 50.0% so differences are visible.</a:t>
+              <a:t>Takeaway with the store call-outs (off the slide): 16 of 33 stores at or above the 78.1% group, led by Honda Henderson at 85.9%. Audi Reno is lowest at 58.8%.Source: Qlik - Closed Repair Orders. Internal pay type, Jan-Sep by close month. Same-store, INEOS excluded (opened 2026). GMC Prescott body shop labor types excluded. Internal labor gross / internal labor sale. A higher internal margin adds service gross but is a cost to used cars. Jan-Sep 2026 YTD. Green at or above the group, red below. Bars start at 50.0% so differences are visible.</a:t>
             </a:r>
             <a:endParaRPr lang="en-US" dirty="0"/>
           </a:p>
@@ -4423,7 +4423,7 @@
           <a:p>
             <a:r>
               <a:rPr lang="en-US" dirty="0"/>
-              <a:t>Takeaway (off the slide): 19 of 33 stores raised internal labor GP%, led by Acura at +5.6 pts to 77.2%. 14 declined; Nissan fell most at −8.8 pts.Source: Qlik - Closed Repair Orders. Internal pay type, Jan-Sep by close month. Same-store, INEOS excluded (opened 2026). GMC Prescott body shop labor types excluded. Change in Internal Labor Gross Profit %, Jan-Sep 2026 vs 2025, best first.</a:t>
+              <a:t>Takeaway with the store call-outs (off the slide): 19 of 33 stores raised internal labor GP%, led by Acura at +5.6 pts to 77.2%. 14 declined; Nissan fell most at −8.8 pts.Source: Qlik - Closed Repair Orders. Internal pay type, Jan-Sep by close month. Same-store, INEOS excluded (opened 2026). GMC Prescott body shop labor types excluded. Change in Internal Labor Gross Profit %, Jan-Sep 2026 vs 2025, best first.</a:t>
             </a:r>
             <a:endParaRPr lang="en-US" dirty="0"/>
           </a:p>
@@ -4511,7 +4511,7 @@
           <a:p>
             <a:r>
               <a:rPr lang="en-US" dirty="0"/>
-              <a:t>Takeaway (off the slide): Ask Acura, Honda Spokane and LR Reno what changed. Ask Nissan, LR LV and Mazda what got in the way. Ask LR Henderson, Kia St George and Hyundai St George what they started this year.Source: Qlik - Closed Repair Orders. Internal pay type, Jan-Sep by close month. Same-store, INEOS excluded (opened 2026). GMC Prescott body shop labor types excluded. Internal labor gross / internal labor sale. A higher internal margin adds service gross but is a cost to used cars. Top and bottom five stores by change in Internal Labor Gross Profit %, Jan-Sep 2026 vs 2025. Moving now: Jul-Sep 2026 vs Jan-Mar 2026, each store against itself; the group moved +0.5 pts on the same basis, so part of every store's change is seasonal. Green bar at the right of a row: the store is on both the top five vs last year and the top five moving now.Conversation starter: each top store says one thing they started doing; each bottom store says what got in the way and what they would try. The room trades ideas. Moving now: ask the top three what they started this year.</a:t>
+              <a:t>Takeaway with the store call-outs (off the slide): Ask Acura, Honda Spokane and LR Reno what changed. Ask Nissan, LR LV and Mazda what got in the way. Ask LR Henderson, Kia St George and Hyundai St George what they started this year.Source: Qlik - Closed Repair Orders. Internal pay type, Jan-Sep by close month. Same-store, INEOS excluded (opened 2026). GMC Prescott body shop labor types excluded. Internal labor gross / internal labor sale. A higher internal margin adds service gross but is a cost to used cars. Top and bottom five stores by change in Internal Labor Gross Profit %, Jan-Sep 2026 vs 2025. Moving now: Jul-Sep 2026 vs Jan-Mar 2026, each store against itself; the group moved +0.5 pts on the same basis, so part of every store's change is seasonal. Green bar at the right of a row: the store is on both the top five vs last year and the top five moving now.Conversation starter: each top store says one thing they started doing; each bottom store says what got in the way and what they would try. The room trades ideas. Moving now: ask the top three what they started this year.</a:t>
             </a:r>
             <a:endParaRPr lang="en-US" dirty="0"/>
           </a:p>
@@ -4687,7 +4687,7 @@
           <a:p>
             <a:r>
               <a:rPr lang="en-US" dirty="0"/>
-              <a:t>Takeaway (off the slide): 13 of 33 stores at or above the 36.5% group, led by Toyota Henderson at 45.1%. CDJR Post Falls is lowest at 24.4%.Source: Qlik - Closed Repair Orders. Internal pay type, Jan-Sep by close month. Same-store, INEOS excluded (opened 2026). GMC Prescott body shop labor types excluded. Internal parts gross / internal parts sale on repair orders. A higher internal margin adds parts gross but is a cost to used cars. Jan-Sep 2026 YTD. Green at or above the group, red below. Bars start at 20.0% so differences are visible.</a:t>
+              <a:t>Takeaway with the store call-outs (off the slide): 13 of 33 stores at or above the 36.5% group, led by Toyota Henderson at 45.1%. CDJR Post Falls is lowest at 24.4%.Source: Qlik - Closed Repair Orders. Internal pay type, Jan-Sep by close month. Same-store, INEOS excluded (opened 2026). GMC Prescott body shop labor types excluded. Internal parts gross / internal parts sale on repair orders. A higher internal margin adds parts gross but is a cost to used cars. Jan-Sep 2026 YTD. Green at or above the group, red below. Bars start at 20.0% so differences are visible.</a:t>
             </a:r>
             <a:endParaRPr lang="en-US" dirty="0"/>
           </a:p>
@@ -4775,7 +4775,7 @@
           <a:p>
             <a:r>
               <a:rPr lang="en-US" dirty="0"/>
-              <a:t>Takeaway (off the slide): 21 of 33 stores raised internal parts GP%, led by Acura at +6.2 pts to 34.0%. 12 declined; VW St George fell most at −4.8 pts.Source: Qlik - Closed Repair Orders. Internal pay type, Jan-Sep by close month. Same-store, INEOS excluded (opened 2026). GMC Prescott body shop labor types excluded. Change in Internal Parts Gross Profit %, Jan-Sep 2026 vs 2025, best first.</a:t>
+              <a:t>Takeaway with the store call-outs (off the slide): 21 of 33 stores raised internal parts GP%, led by Acura at +6.2 pts to 34.0%. 12 declined; VW St George fell most at −4.8 pts.Source: Qlik - Closed Repair Orders. Internal pay type, Jan-Sep by close month. Same-store, INEOS excluded (opened 2026). GMC Prescott body shop labor types excluded. Change in Internal Parts Gross Profit %, Jan-Sep 2026 vs 2025, best first.</a:t>
             </a:r>
             <a:endParaRPr lang="en-US" dirty="0"/>
           </a:p>
@@ -4863,7 +4863,7 @@
           <a:p>
             <a:r>
               <a:rPr lang="en-US" dirty="0"/>
-              <a:t>Takeaway (off the slide): Ask Acura, Hyundai Prescott and Honda Flagstaff what changed. Ask VW St George, Kia LV and LR LV what got in the way. Ask LR Reno, CDJR Post Falls and LR Henderson what they started this year.Source: Qlik - Closed Repair Orders. Internal pay type, Jan-Sep by close month. Same-store, INEOS excluded (opened 2026). GMC Prescott body shop labor types excluded. Internal parts gross / internal parts sale on repair orders. A higher internal margin adds parts gross but is a cost to used cars. Top and bottom five stores by change in Internal Parts Gross Profit %, Jan-Sep 2026 vs 2025. Moving now: Jul-Sep 2026 vs Jan-Mar 2026, each store against itself; the group moved +0.5 pts on the same basis, so part of every store's change is seasonal. Green bar at the right of a row: the store is on both the top five vs last year and the top five moving now.Conversation starter: each top store says one thing they started doing; each bottom store says what got in the way and what they would try. The room trades ideas. Moving now: ask the top three what they started this year.</a:t>
+              <a:t>Takeaway with the store call-outs (off the slide): Ask Acura, Hyundai Prescott and Honda Flagstaff what changed. Ask VW St George, Kia LV and LR LV what got in the way. Ask LR Reno, CDJR Post Falls and LR Henderson what they started this year.Source: Qlik - Closed Repair Orders. Internal pay type, Jan-Sep by close month. Same-store, INEOS excluded (opened 2026). GMC Prescott body shop labor types excluded. Internal parts gross / internal parts sale on repair orders. A higher internal margin adds parts gross but is a cost to used cars. Top and bottom five stores by change in Internal Parts Gross Profit %, Jan-Sep 2026 vs 2025. Moving now: Jul-Sep 2026 vs Jan-Mar 2026, each store against itself; the group moved +0.5 pts on the same basis, so part of every store's change is seasonal. Green bar at the right of a row: the store is on both the top five vs last year and the top five moving now.Conversation starter: each top store says one thing they started doing; each bottom store says what got in the way and what they would try. The room trades ideas. Moving now: ask the top three what they started this year.</a:t>
             </a:r>
             <a:endParaRPr lang="en-US" dirty="0"/>
           </a:p>
@@ -6197,7 +6197,7 @@
         <p:spPr>
           <a:xfrm>
             <a:off x="457200" y="1207008"/>
-            <a:ext cx="11274552" cy="5148072"/>
+            <a:ext cx="11274552" cy="4782312"/>
           </a:xfrm>
           <a:prstGeom prst="rect">
             <a:avLst/>
@@ -6374,7 +6374,7 @@
         <p:spPr>
           <a:xfrm>
             <a:off x="658368" y="1847088"/>
-            <a:ext cx="310896" cy="261411"/>
+            <a:ext cx="310896" cy="239896"/>
           </a:xfrm>
           <a:prstGeom prst="rect">
             <a:avLst/>
@@ -6413,7 +6413,7 @@
         <p:spPr>
           <a:xfrm>
             <a:off x="1014984" y="1847088"/>
-            <a:ext cx="1920240" cy="261411"/>
+            <a:ext cx="1920240" cy="239896"/>
           </a:xfrm>
           <a:prstGeom prst="rect">
             <a:avLst/>
@@ -6451,8 +6451,8 @@
         </p:nvSpPr>
         <p:spPr>
           <a:xfrm>
-            <a:off x="3008376" y="1912441"/>
-            <a:ext cx="1691640" cy="130705"/>
+            <a:off x="3008376" y="1907062"/>
+            <a:ext cx="1691640" cy="119948"/>
           </a:xfrm>
           <a:prstGeom prst="rect">
             <a:avLst/>
@@ -6472,7 +6472,7 @@
         <p:spPr>
           <a:xfrm>
             <a:off x="4754880" y="1847088"/>
-            <a:ext cx="1143000" cy="261411"/>
+            <a:ext cx="1143000" cy="239896"/>
           </a:xfrm>
           <a:prstGeom prst="rect">
             <a:avLst/>
@@ -6510,8 +6510,8 @@
         </p:nvSpPr>
         <p:spPr>
           <a:xfrm>
-            <a:off x="658368" y="2108499"/>
-            <a:ext cx="310896" cy="261411"/>
+            <a:off x="658368" y="2086984"/>
+            <a:ext cx="310896" cy="239896"/>
           </a:xfrm>
           <a:prstGeom prst="rect">
             <a:avLst/>
@@ -6549,8 +6549,8 @@
         </p:nvSpPr>
         <p:spPr>
           <a:xfrm>
-            <a:off x="1014984" y="2108499"/>
-            <a:ext cx="1920240" cy="261411"/>
+            <a:off x="1014984" y="2086984"/>
+            <a:ext cx="1920240" cy="239896"/>
           </a:xfrm>
           <a:prstGeom prst="rect">
             <a:avLst/>
@@ -6588,8 +6588,8 @@
         </p:nvSpPr>
         <p:spPr>
           <a:xfrm>
-            <a:off x="3008376" y="2173852"/>
-            <a:ext cx="1664906" cy="130705"/>
+            <a:off x="3008376" y="2146957"/>
+            <a:ext cx="1664906" cy="119948"/>
           </a:xfrm>
           <a:prstGeom prst="rect">
             <a:avLst/>
@@ -6608,8 +6608,8 @@
         </p:nvSpPr>
         <p:spPr>
           <a:xfrm>
-            <a:off x="4754880" y="2108499"/>
-            <a:ext cx="1143000" cy="261411"/>
+            <a:off x="4754880" y="2086984"/>
+            <a:ext cx="1143000" cy="239896"/>
           </a:xfrm>
           <a:prstGeom prst="rect">
             <a:avLst/>
@@ -6647,8 +6647,8 @@
         </p:nvSpPr>
         <p:spPr>
           <a:xfrm>
-            <a:off x="658368" y="2369910"/>
-            <a:ext cx="310896" cy="261411"/>
+            <a:off x="658368" y="2326879"/>
+            <a:ext cx="310896" cy="239896"/>
           </a:xfrm>
           <a:prstGeom prst="rect">
             <a:avLst/>
@@ -6686,8 +6686,8 @@
         </p:nvSpPr>
         <p:spPr>
           <a:xfrm>
-            <a:off x="1014984" y="2369910"/>
-            <a:ext cx="1920240" cy="261411"/>
+            <a:off x="1014984" y="2326879"/>
+            <a:ext cx="1920240" cy="239896"/>
           </a:xfrm>
           <a:prstGeom prst="rect">
             <a:avLst/>
@@ -6725,8 +6725,8 @@
         </p:nvSpPr>
         <p:spPr>
           <a:xfrm>
-            <a:off x="3008376" y="2435262"/>
-            <a:ext cx="1641280" cy="130705"/>
+            <a:off x="3008376" y="2386853"/>
+            <a:ext cx="1641280" cy="119948"/>
           </a:xfrm>
           <a:prstGeom prst="rect">
             <a:avLst/>
@@ -6745,8 +6745,8 @@
         </p:nvSpPr>
         <p:spPr>
           <a:xfrm>
-            <a:off x="4754880" y="2369910"/>
-            <a:ext cx="1143000" cy="261411"/>
+            <a:off x="4754880" y="2326879"/>
+            <a:ext cx="1143000" cy="239896"/>
           </a:xfrm>
           <a:prstGeom prst="rect">
             <a:avLst/>
@@ -6784,8 +6784,8 @@
         </p:nvSpPr>
         <p:spPr>
           <a:xfrm>
-            <a:off x="658368" y="2631320"/>
-            <a:ext cx="310896" cy="261411"/>
+            <a:off x="658368" y="2566775"/>
+            <a:ext cx="310896" cy="239896"/>
           </a:xfrm>
           <a:prstGeom prst="rect">
             <a:avLst/>
@@ -6823,8 +6823,8 @@
         </p:nvSpPr>
         <p:spPr>
           <a:xfrm>
-            <a:off x="1014984" y="2631320"/>
-            <a:ext cx="1920240" cy="261411"/>
+            <a:off x="1014984" y="2566775"/>
+            <a:ext cx="1920240" cy="239896"/>
           </a:xfrm>
           <a:prstGeom prst="rect">
             <a:avLst/>
@@ -6862,8 +6862,8 @@
         </p:nvSpPr>
         <p:spPr>
           <a:xfrm>
-            <a:off x="3008376" y="2696673"/>
-            <a:ext cx="1569988" cy="130705"/>
+            <a:off x="3008376" y="2626748"/>
+            <a:ext cx="1569988" cy="119948"/>
           </a:xfrm>
           <a:prstGeom prst="rect">
             <a:avLst/>
@@ -6882,8 +6882,8 @@
         </p:nvSpPr>
         <p:spPr>
           <a:xfrm>
-            <a:off x="4754880" y="2631320"/>
-            <a:ext cx="1143000" cy="261411"/>
+            <a:off x="4754880" y="2566775"/>
+            <a:ext cx="1143000" cy="239896"/>
           </a:xfrm>
           <a:prstGeom prst="rect">
             <a:avLst/>
@@ -6921,8 +6921,8 @@
         </p:nvSpPr>
         <p:spPr>
           <a:xfrm>
-            <a:off x="658368" y="2892731"/>
-            <a:ext cx="310896" cy="261411"/>
+            <a:off x="658368" y="2806670"/>
+            <a:ext cx="310896" cy="239896"/>
           </a:xfrm>
           <a:prstGeom prst="rect">
             <a:avLst/>
@@ -6960,8 +6960,8 @@
         </p:nvSpPr>
         <p:spPr>
           <a:xfrm>
-            <a:off x="1014984" y="2892731"/>
-            <a:ext cx="1920240" cy="261411"/>
+            <a:off x="1014984" y="2806670"/>
+            <a:ext cx="1920240" cy="239896"/>
           </a:xfrm>
           <a:prstGeom prst="rect">
             <a:avLst/>
@@ -6999,8 +6999,8 @@
         </p:nvSpPr>
         <p:spPr>
           <a:xfrm>
-            <a:off x="3008376" y="2958084"/>
-            <a:ext cx="1546216" cy="130705"/>
+            <a:off x="3008376" y="2866644"/>
+            <a:ext cx="1546216" cy="119948"/>
           </a:xfrm>
           <a:prstGeom prst="rect">
             <a:avLst/>
@@ -7019,8 +7019,8 @@
         </p:nvSpPr>
         <p:spPr>
           <a:xfrm>
-            <a:off x="4754880" y="2892731"/>
-            <a:ext cx="1143000" cy="261411"/>
+            <a:off x="4754880" y="2806670"/>
+            <a:ext cx="1143000" cy="239896"/>
           </a:xfrm>
           <a:prstGeom prst="rect">
             <a:avLst/>
@@ -7058,8 +7058,8 @@
         </p:nvSpPr>
         <p:spPr>
           <a:xfrm>
-            <a:off x="658368" y="3154142"/>
-            <a:ext cx="310896" cy="261411"/>
+            <a:off x="658368" y="3046566"/>
+            <a:ext cx="310896" cy="239896"/>
           </a:xfrm>
           <a:prstGeom prst="rect">
             <a:avLst/>
@@ -7097,8 +7097,8 @@
         </p:nvSpPr>
         <p:spPr>
           <a:xfrm>
-            <a:off x="1014984" y="3154142"/>
-            <a:ext cx="1920240" cy="261411"/>
+            <a:off x="1014984" y="3046566"/>
+            <a:ext cx="1920240" cy="239896"/>
           </a:xfrm>
           <a:prstGeom prst="rect">
             <a:avLst/>
@@ -7136,8 +7136,8 @@
         </p:nvSpPr>
         <p:spPr>
           <a:xfrm>
-            <a:off x="3008376" y="3219495"/>
-            <a:ext cx="1521776" cy="130705"/>
+            <a:off x="3008376" y="3106540"/>
+            <a:ext cx="1521776" cy="119948"/>
           </a:xfrm>
           <a:prstGeom prst="rect">
             <a:avLst/>
@@ -7156,8 +7156,8 @@
         </p:nvSpPr>
         <p:spPr>
           <a:xfrm>
-            <a:off x="4754880" y="3154142"/>
-            <a:ext cx="1143000" cy="261411"/>
+            <a:off x="4754880" y="3046566"/>
+            <a:ext cx="1143000" cy="239896"/>
           </a:xfrm>
           <a:prstGeom prst="rect">
             <a:avLst/>
@@ -7195,8 +7195,8 @@
         </p:nvSpPr>
         <p:spPr>
           <a:xfrm>
-            <a:off x="658368" y="3415553"/>
-            <a:ext cx="310896" cy="261411"/>
+            <a:off x="658368" y="3286461"/>
+            <a:ext cx="310896" cy="239896"/>
           </a:xfrm>
           <a:prstGeom prst="rect">
             <a:avLst/>
@@ -7234,8 +7234,8 @@
         </p:nvSpPr>
         <p:spPr>
           <a:xfrm>
-            <a:off x="1014984" y="3415553"/>
-            <a:ext cx="1920240" cy="261411"/>
+            <a:off x="1014984" y="3286461"/>
+            <a:ext cx="1920240" cy="239896"/>
           </a:xfrm>
           <a:prstGeom prst="rect">
             <a:avLst/>
@@ -7273,8 +7273,8 @@
         </p:nvSpPr>
         <p:spPr>
           <a:xfrm>
-            <a:off x="3008376" y="3480906"/>
-            <a:ext cx="1517221" cy="130705"/>
+            <a:off x="3008376" y="3346435"/>
+            <a:ext cx="1517221" cy="119948"/>
           </a:xfrm>
           <a:prstGeom prst="rect">
             <a:avLst/>
@@ -7293,8 +7293,8 @@
         </p:nvSpPr>
         <p:spPr>
           <a:xfrm>
-            <a:off x="4754880" y="3415553"/>
-            <a:ext cx="1143000" cy="261411"/>
+            <a:off x="4754880" y="3286461"/>
+            <a:ext cx="1143000" cy="239896"/>
           </a:xfrm>
           <a:prstGeom prst="rect">
             <a:avLst/>
@@ -7332,8 +7332,8 @@
         </p:nvSpPr>
         <p:spPr>
           <a:xfrm>
-            <a:off x="658368" y="3676964"/>
-            <a:ext cx="310896" cy="261411"/>
+            <a:off x="658368" y="3526357"/>
+            <a:ext cx="310896" cy="239896"/>
           </a:xfrm>
           <a:prstGeom prst="rect">
             <a:avLst/>
@@ -7371,8 +7371,8 @@
         </p:nvSpPr>
         <p:spPr>
           <a:xfrm>
-            <a:off x="1014984" y="3676964"/>
-            <a:ext cx="1920240" cy="261411"/>
+            <a:off x="1014984" y="3526357"/>
+            <a:ext cx="1920240" cy="239896"/>
           </a:xfrm>
           <a:prstGeom prst="rect">
             <a:avLst/>
@@ -7410,8 +7410,8 @@
         </p:nvSpPr>
         <p:spPr>
           <a:xfrm>
-            <a:off x="3008376" y="3742316"/>
-            <a:ext cx="1512092" cy="130705"/>
+            <a:off x="3008376" y="3586331"/>
+            <a:ext cx="1512092" cy="119948"/>
           </a:xfrm>
           <a:prstGeom prst="rect">
             <a:avLst/>
@@ -7430,8 +7430,8 @@
         </p:nvSpPr>
         <p:spPr>
           <a:xfrm>
-            <a:off x="4754880" y="3676964"/>
-            <a:ext cx="1143000" cy="261411"/>
+            <a:off x="4754880" y="3526357"/>
+            <a:ext cx="1143000" cy="239896"/>
           </a:xfrm>
           <a:prstGeom prst="rect">
             <a:avLst/>
@@ -7469,8 +7469,8 @@
         </p:nvSpPr>
         <p:spPr>
           <a:xfrm>
-            <a:off x="658368" y="3938375"/>
-            <a:ext cx="310896" cy="261411"/>
+            <a:off x="658368" y="3766252"/>
+            <a:ext cx="310896" cy="239896"/>
           </a:xfrm>
           <a:prstGeom prst="rect">
             <a:avLst/>
@@ -7508,8 +7508,8 @@
         </p:nvSpPr>
         <p:spPr>
           <a:xfrm>
-            <a:off x="1014984" y="3938375"/>
-            <a:ext cx="1920240" cy="261411"/>
+            <a:off x="1014984" y="3766252"/>
+            <a:ext cx="1920240" cy="239896"/>
           </a:xfrm>
           <a:prstGeom prst="rect">
             <a:avLst/>
@@ -7547,8 +7547,8 @@
         </p:nvSpPr>
         <p:spPr>
           <a:xfrm>
-            <a:off x="3008376" y="4003727"/>
-            <a:ext cx="1502318" cy="130705"/>
+            <a:off x="3008376" y="3826226"/>
+            <a:ext cx="1502318" cy="119948"/>
           </a:xfrm>
           <a:prstGeom prst="rect">
             <a:avLst/>
@@ -7567,8 +7567,8 @@
         </p:nvSpPr>
         <p:spPr>
           <a:xfrm>
-            <a:off x="4754880" y="3938375"/>
-            <a:ext cx="1143000" cy="261411"/>
+            <a:off x="4754880" y="3766252"/>
+            <a:ext cx="1143000" cy="239896"/>
           </a:xfrm>
           <a:prstGeom prst="rect">
             <a:avLst/>
@@ -7606,8 +7606,8 @@
         </p:nvSpPr>
         <p:spPr>
           <a:xfrm>
-            <a:off x="658368" y="4199785"/>
-            <a:ext cx="310896" cy="261411"/>
+            <a:off x="658368" y="4006148"/>
+            <a:ext cx="310896" cy="239896"/>
           </a:xfrm>
           <a:prstGeom prst="rect">
             <a:avLst/>
@@ -7645,8 +7645,8 @@
         </p:nvSpPr>
         <p:spPr>
           <a:xfrm>
-            <a:off x="1014984" y="4199785"/>
-            <a:ext cx="1920240" cy="261411"/>
+            <a:off x="1014984" y="4006148"/>
+            <a:ext cx="1920240" cy="239896"/>
           </a:xfrm>
           <a:prstGeom prst="rect">
             <a:avLst/>
@@ -7684,8 +7684,8 @@
         </p:nvSpPr>
         <p:spPr>
           <a:xfrm>
-            <a:off x="3008376" y="4265138"/>
-            <a:ext cx="1485717" cy="130705"/>
+            <a:off x="3008376" y="4066122"/>
+            <a:ext cx="1485717" cy="119948"/>
           </a:xfrm>
           <a:prstGeom prst="rect">
             <a:avLst/>
@@ -7704,8 +7704,8 @@
         </p:nvSpPr>
         <p:spPr>
           <a:xfrm>
-            <a:off x="4754880" y="4199785"/>
-            <a:ext cx="1143000" cy="261411"/>
+            <a:off x="4754880" y="4006148"/>
+            <a:ext cx="1143000" cy="239896"/>
           </a:xfrm>
           <a:prstGeom prst="rect">
             <a:avLst/>
@@ -7743,8 +7743,8 @@
         </p:nvSpPr>
         <p:spPr>
           <a:xfrm>
-            <a:off x="658368" y="4461196"/>
-            <a:ext cx="310896" cy="261411"/>
+            <a:off x="658368" y="4246043"/>
+            <a:ext cx="310896" cy="239896"/>
           </a:xfrm>
           <a:prstGeom prst="rect">
             <a:avLst/>
@@ -7782,8 +7782,8 @@
         </p:nvSpPr>
         <p:spPr>
           <a:xfrm>
-            <a:off x="1014984" y="4461196"/>
-            <a:ext cx="1920240" cy="261411"/>
+            <a:off x="1014984" y="4246043"/>
+            <a:ext cx="1920240" cy="239896"/>
           </a:xfrm>
           <a:prstGeom prst="rect">
             <a:avLst/>
@@ -7821,8 +7821,8 @@
         </p:nvSpPr>
         <p:spPr>
           <a:xfrm>
-            <a:off x="3008376" y="4526549"/>
-            <a:ext cx="1450241" cy="130705"/>
+            <a:off x="3008376" y="4306017"/>
+            <a:ext cx="1450241" cy="119948"/>
           </a:xfrm>
           <a:prstGeom prst="rect">
             <a:avLst/>
@@ -7841,8 +7841,8 @@
         </p:nvSpPr>
         <p:spPr>
           <a:xfrm>
-            <a:off x="4754880" y="4461196"/>
-            <a:ext cx="1143000" cy="261411"/>
+            <a:off x="4754880" y="4246043"/>
+            <a:ext cx="1143000" cy="239896"/>
           </a:xfrm>
           <a:prstGeom prst="rect">
             <a:avLst/>
@@ -7880,8 +7880,8 @@
         </p:nvSpPr>
         <p:spPr>
           <a:xfrm>
-            <a:off x="658368" y="4722607"/>
-            <a:ext cx="310896" cy="261411"/>
+            <a:off x="658368" y="4485939"/>
+            <a:ext cx="310896" cy="239896"/>
           </a:xfrm>
           <a:prstGeom prst="rect">
             <a:avLst/>
@@ -7919,8 +7919,8 @@
         </p:nvSpPr>
         <p:spPr>
           <a:xfrm>
-            <a:off x="1014984" y="4722607"/>
-            <a:ext cx="1920240" cy="261411"/>
+            <a:off x="1014984" y="4485939"/>
+            <a:ext cx="1920240" cy="239896"/>
           </a:xfrm>
           <a:prstGeom prst="rect">
             <a:avLst/>
@@ -7958,8 +7958,8 @@
         </p:nvSpPr>
         <p:spPr>
           <a:xfrm>
-            <a:off x="3008376" y="4787960"/>
-            <a:ext cx="1425422" cy="130705"/>
+            <a:off x="3008376" y="4545913"/>
+            <a:ext cx="1425422" cy="119948"/>
           </a:xfrm>
           <a:prstGeom prst="rect">
             <a:avLst/>
@@ -7978,8 +7978,8 @@
         </p:nvSpPr>
         <p:spPr>
           <a:xfrm>
-            <a:off x="4754880" y="4722607"/>
-            <a:ext cx="1143000" cy="261411"/>
+            <a:off x="4754880" y="4485939"/>
+            <a:ext cx="1143000" cy="239896"/>
           </a:xfrm>
           <a:prstGeom prst="rect">
             <a:avLst/>
@@ -8017,8 +8017,8 @@
         </p:nvSpPr>
         <p:spPr>
           <a:xfrm>
-            <a:off x="658368" y="4984018"/>
-            <a:ext cx="310896" cy="261411"/>
+            <a:off x="658368" y="4725834"/>
+            <a:ext cx="310896" cy="239896"/>
           </a:xfrm>
           <a:prstGeom prst="rect">
             <a:avLst/>
@@ -8056,8 +8056,8 @@
         </p:nvSpPr>
         <p:spPr>
           <a:xfrm>
-            <a:off x="1014984" y="4984018"/>
-            <a:ext cx="1920240" cy="261411"/>
+            <a:off x="1014984" y="4725834"/>
+            <a:ext cx="1920240" cy="239896"/>
           </a:xfrm>
           <a:prstGeom prst="rect">
             <a:avLst/>
@@ -8095,8 +8095,8 @@
         </p:nvSpPr>
         <p:spPr>
           <a:xfrm>
-            <a:off x="3008376" y="5049371"/>
-            <a:ext cx="1402468" cy="130705"/>
+            <a:off x="3008376" y="4785808"/>
+            <a:ext cx="1402468" cy="119948"/>
           </a:xfrm>
           <a:prstGeom prst="rect">
             <a:avLst/>
@@ -8115,8 +8115,8 @@
         </p:nvSpPr>
         <p:spPr>
           <a:xfrm>
-            <a:off x="4754880" y="4984018"/>
-            <a:ext cx="1143000" cy="261411"/>
+            <a:off x="4754880" y="4725834"/>
+            <a:ext cx="1143000" cy="239896"/>
           </a:xfrm>
           <a:prstGeom prst="rect">
             <a:avLst/>
@@ -8154,8 +8154,8 @@
         </p:nvSpPr>
         <p:spPr>
           <a:xfrm>
-            <a:off x="658368" y="5245429"/>
-            <a:ext cx="310896" cy="261411"/>
+            <a:off x="658368" y="4965730"/>
+            <a:ext cx="310896" cy="239896"/>
           </a:xfrm>
           <a:prstGeom prst="rect">
             <a:avLst/>
@@ -8193,8 +8193,8 @@
         </p:nvSpPr>
         <p:spPr>
           <a:xfrm>
-            <a:off x="1014984" y="5245429"/>
-            <a:ext cx="1920240" cy="261411"/>
+            <a:off x="1014984" y="4965730"/>
+            <a:ext cx="1920240" cy="239896"/>
           </a:xfrm>
           <a:prstGeom prst="rect">
             <a:avLst/>
@@ -8232,8 +8232,8 @@
         </p:nvSpPr>
         <p:spPr>
           <a:xfrm>
-            <a:off x="3008376" y="5310781"/>
-            <a:ext cx="1402095" cy="130705"/>
+            <a:off x="3008376" y="5025704"/>
+            <a:ext cx="1402095" cy="119948"/>
           </a:xfrm>
           <a:prstGeom prst="rect">
             <a:avLst/>
@@ -8252,8 +8252,8 @@
         </p:nvSpPr>
         <p:spPr>
           <a:xfrm>
-            <a:off x="4754880" y="5245429"/>
-            <a:ext cx="1143000" cy="261411"/>
+            <a:off x="4754880" y="4965730"/>
+            <a:ext cx="1143000" cy="239896"/>
           </a:xfrm>
           <a:prstGeom prst="rect">
             <a:avLst/>
@@ -8291,8 +8291,8 @@
         </p:nvSpPr>
         <p:spPr>
           <a:xfrm>
-            <a:off x="658368" y="5506840"/>
-            <a:ext cx="310896" cy="261411"/>
+            <a:off x="658368" y="5205625"/>
+            <a:ext cx="310896" cy="239896"/>
           </a:xfrm>
           <a:prstGeom prst="rect">
             <a:avLst/>
@@ -8330,8 +8330,8 @@
         </p:nvSpPr>
         <p:spPr>
           <a:xfrm>
-            <a:off x="1014984" y="5506840"/>
-            <a:ext cx="1920240" cy="261411"/>
+            <a:off x="1014984" y="5205625"/>
+            <a:ext cx="1920240" cy="239896"/>
           </a:xfrm>
           <a:prstGeom prst="rect">
             <a:avLst/>
@@ -8369,8 +8369,8 @@
         </p:nvSpPr>
         <p:spPr>
           <a:xfrm>
-            <a:off x="3008376" y="5572192"/>
-            <a:ext cx="1364813" cy="130705"/>
+            <a:off x="3008376" y="5265599"/>
+            <a:ext cx="1364813" cy="119948"/>
           </a:xfrm>
           <a:prstGeom prst="rect">
             <a:avLst/>
@@ -8389,8 +8389,8 @@
         </p:nvSpPr>
         <p:spPr>
           <a:xfrm>
-            <a:off x="4754880" y="5506840"/>
-            <a:ext cx="1143000" cy="261411"/>
+            <a:off x="4754880" y="5205625"/>
+            <a:ext cx="1143000" cy="239896"/>
           </a:xfrm>
           <a:prstGeom prst="rect">
             <a:avLst/>
@@ -8428,8 +8428,8 @@
         </p:nvSpPr>
         <p:spPr>
           <a:xfrm>
-            <a:off x="658368" y="5768250"/>
-            <a:ext cx="310896" cy="261411"/>
+            <a:off x="658368" y="5445521"/>
+            <a:ext cx="310896" cy="239896"/>
           </a:xfrm>
           <a:prstGeom prst="rect">
             <a:avLst/>
@@ -8467,8 +8467,8 @@
         </p:nvSpPr>
         <p:spPr>
           <a:xfrm>
-            <a:off x="1014984" y="5768250"/>
-            <a:ext cx="1920240" cy="261411"/>
+            <a:off x="1014984" y="5445521"/>
+            <a:ext cx="1920240" cy="239896"/>
           </a:xfrm>
           <a:prstGeom prst="rect">
             <a:avLst/>
@@ -8506,8 +8506,8 @@
         </p:nvSpPr>
         <p:spPr>
           <a:xfrm>
-            <a:off x="3008376" y="5833603"/>
-            <a:ext cx="1327108" cy="130705"/>
+            <a:off x="3008376" y="5505495"/>
+            <a:ext cx="1327108" cy="119948"/>
           </a:xfrm>
           <a:prstGeom prst="rect">
             <a:avLst/>
@@ -8526,8 +8526,8 @@
         </p:nvSpPr>
         <p:spPr>
           <a:xfrm>
-            <a:off x="4754880" y="5768250"/>
-            <a:ext cx="1143000" cy="261411"/>
+            <a:off x="4754880" y="5445521"/>
+            <a:ext cx="1143000" cy="239896"/>
           </a:xfrm>
           <a:prstGeom prst="rect">
             <a:avLst/>
@@ -8565,8 +8565,8 @@
         </p:nvSpPr>
         <p:spPr>
           <a:xfrm>
-            <a:off x="658368" y="6029661"/>
-            <a:ext cx="310896" cy="261411"/>
+            <a:off x="658368" y="5685416"/>
+            <a:ext cx="310896" cy="239896"/>
           </a:xfrm>
           <a:prstGeom prst="rect">
             <a:avLst/>
@@ -8604,8 +8604,8 @@
         </p:nvSpPr>
         <p:spPr>
           <a:xfrm>
-            <a:off x="1014984" y="6029661"/>
-            <a:ext cx="1920240" cy="261411"/>
+            <a:off x="1014984" y="5685416"/>
+            <a:ext cx="1920240" cy="239896"/>
           </a:xfrm>
           <a:prstGeom prst="rect">
             <a:avLst/>
@@ -8643,8 +8643,8 @@
         </p:nvSpPr>
         <p:spPr>
           <a:xfrm>
-            <a:off x="3008376" y="6095014"/>
-            <a:ext cx="1282160" cy="130705"/>
+            <a:off x="3008376" y="5745390"/>
+            <a:ext cx="1282160" cy="119948"/>
           </a:xfrm>
           <a:prstGeom prst="rect">
             <a:avLst/>
@@ -8663,8 +8663,8 @@
         </p:nvSpPr>
         <p:spPr>
           <a:xfrm>
-            <a:off x="4754880" y="6029661"/>
-            <a:ext cx="1143000" cy="261411"/>
+            <a:off x="4754880" y="5685416"/>
+            <a:ext cx="1143000" cy="239896"/>
           </a:xfrm>
           <a:prstGeom prst="rect">
             <a:avLst/>
@@ -8703,7 +8703,7 @@
         <p:spPr>
           <a:xfrm>
             <a:off x="6208776" y="1847088"/>
-            <a:ext cx="310896" cy="261411"/>
+            <a:ext cx="310896" cy="239896"/>
           </a:xfrm>
           <a:prstGeom prst="rect">
             <a:avLst/>
@@ -8742,7 +8742,7 @@
         <p:spPr>
           <a:xfrm>
             <a:off x="6565392" y="1847088"/>
-            <a:ext cx="1920240" cy="261411"/>
+            <a:ext cx="1920240" cy="239896"/>
           </a:xfrm>
           <a:prstGeom prst="rect">
             <a:avLst/>
@@ -8780,8 +8780,8 @@
         </p:nvSpPr>
         <p:spPr>
           <a:xfrm>
-            <a:off x="8558784" y="1912441"/>
-            <a:ext cx="1241952" cy="130705"/>
+            <a:off x="8558784" y="1907062"/>
+            <a:ext cx="1241952" cy="119948"/>
           </a:xfrm>
           <a:prstGeom prst="rect">
             <a:avLst/>
@@ -8801,7 +8801,7 @@
         <p:spPr>
           <a:xfrm>
             <a:off x="10305288" y="1847088"/>
-            <a:ext cx="1143000" cy="261411"/>
+            <a:ext cx="1143000" cy="239896"/>
           </a:xfrm>
           <a:prstGeom prst="rect">
             <a:avLst/>
@@ -8839,8 +8839,8 @@
         </p:nvSpPr>
         <p:spPr>
           <a:xfrm>
-            <a:off x="6208776" y="2108499"/>
-            <a:ext cx="310896" cy="261411"/>
+            <a:off x="6208776" y="2086984"/>
+            <a:ext cx="310896" cy="239896"/>
           </a:xfrm>
           <a:prstGeom prst="rect">
             <a:avLst/>
@@ -8878,8 +8878,8 @@
         </p:nvSpPr>
         <p:spPr>
           <a:xfrm>
-            <a:off x="6565392" y="2108499"/>
-            <a:ext cx="1920240" cy="261411"/>
+            <a:off x="6565392" y="2086984"/>
+            <a:ext cx="1920240" cy="239896"/>
           </a:xfrm>
           <a:prstGeom prst="rect">
             <a:avLst/>
@@ -8917,8 +8917,8 @@
         </p:nvSpPr>
         <p:spPr>
           <a:xfrm>
-            <a:off x="8558784" y="2173852"/>
-            <a:ext cx="1223403" cy="130705"/>
+            <a:off x="8558784" y="2146957"/>
+            <a:ext cx="1223403" cy="119948"/>
           </a:xfrm>
           <a:prstGeom prst="rect">
             <a:avLst/>
@@ -8937,8 +8937,8 @@
         </p:nvSpPr>
         <p:spPr>
           <a:xfrm>
-            <a:off x="10305288" y="2108499"/>
-            <a:ext cx="1143000" cy="261411"/>
+            <a:off x="10305288" y="2086984"/>
+            <a:ext cx="1143000" cy="239896"/>
           </a:xfrm>
           <a:prstGeom prst="rect">
             <a:avLst/>
@@ -8976,8 +8976,8 @@
         </p:nvSpPr>
         <p:spPr>
           <a:xfrm>
-            <a:off x="6208776" y="2369910"/>
-            <a:ext cx="310896" cy="261411"/>
+            <a:off x="6208776" y="2326879"/>
+            <a:ext cx="310896" cy="239896"/>
           </a:xfrm>
           <a:prstGeom prst="rect">
             <a:avLst/>
@@ -9015,8 +9015,8 @@
         </p:nvSpPr>
         <p:spPr>
           <a:xfrm>
-            <a:off x="6565392" y="2369910"/>
-            <a:ext cx="1920240" cy="261411"/>
+            <a:off x="6565392" y="2326879"/>
+            <a:ext cx="1920240" cy="239896"/>
           </a:xfrm>
           <a:prstGeom prst="rect">
             <a:avLst/>
@@ -9054,8 +9054,8 @@
         </p:nvSpPr>
         <p:spPr>
           <a:xfrm>
-            <a:off x="8558784" y="2435262"/>
-            <a:ext cx="1215016" cy="130705"/>
+            <a:off x="8558784" y="2386853"/>
+            <a:ext cx="1215016" cy="119948"/>
           </a:xfrm>
           <a:prstGeom prst="rect">
             <a:avLst/>
@@ -9074,8 +9074,8 @@
         </p:nvSpPr>
         <p:spPr>
           <a:xfrm>
-            <a:off x="10305288" y="2369910"/>
-            <a:ext cx="1143000" cy="261411"/>
+            <a:off x="10305288" y="2326879"/>
+            <a:ext cx="1143000" cy="239896"/>
           </a:xfrm>
           <a:prstGeom prst="rect">
             <a:avLst/>
@@ -9113,8 +9113,8 @@
         </p:nvSpPr>
         <p:spPr>
           <a:xfrm>
-            <a:off x="6208776" y="2631320"/>
-            <a:ext cx="310896" cy="261411"/>
+            <a:off x="6208776" y="2566775"/>
+            <a:ext cx="310896" cy="239896"/>
           </a:xfrm>
           <a:prstGeom prst="rect">
             <a:avLst/>
@@ -9152,8 +9152,8 @@
         </p:nvSpPr>
         <p:spPr>
           <a:xfrm>
-            <a:off x="6565392" y="2631320"/>
-            <a:ext cx="1920240" cy="261411"/>
+            <a:off x="6565392" y="2566775"/>
+            <a:ext cx="1920240" cy="239896"/>
           </a:xfrm>
           <a:prstGeom prst="rect">
             <a:avLst/>
@@ -9191,8 +9191,8 @@
         </p:nvSpPr>
         <p:spPr>
           <a:xfrm>
-            <a:off x="8558784" y="2696673"/>
-            <a:ext cx="1209791" cy="130705"/>
+            <a:off x="8558784" y="2626748"/>
+            <a:ext cx="1209791" cy="119948"/>
           </a:xfrm>
           <a:prstGeom prst="rect">
             <a:avLst/>
@@ -9211,8 +9211,8 @@
         </p:nvSpPr>
         <p:spPr>
           <a:xfrm>
-            <a:off x="10305288" y="2631320"/>
-            <a:ext cx="1143000" cy="261411"/>
+            <a:off x="10305288" y="2566775"/>
+            <a:ext cx="1143000" cy="239896"/>
           </a:xfrm>
           <a:prstGeom prst="rect">
             <a:avLst/>
@@ -9250,8 +9250,8 @@
         </p:nvSpPr>
         <p:spPr>
           <a:xfrm>
-            <a:off x="6208776" y="2892731"/>
-            <a:ext cx="310896" cy="261411"/>
+            <a:off x="6208776" y="2806670"/>
+            <a:ext cx="310896" cy="239896"/>
           </a:xfrm>
           <a:prstGeom prst="rect">
             <a:avLst/>
@@ -9289,8 +9289,8 @@
         </p:nvSpPr>
         <p:spPr>
           <a:xfrm>
-            <a:off x="6565392" y="2892731"/>
-            <a:ext cx="1920240" cy="261411"/>
+            <a:off x="6565392" y="2806670"/>
+            <a:ext cx="1920240" cy="239896"/>
           </a:xfrm>
           <a:prstGeom prst="rect">
             <a:avLst/>
@@ -9328,8 +9328,8 @@
         </p:nvSpPr>
         <p:spPr>
           <a:xfrm>
-            <a:off x="8558784" y="2958084"/>
-            <a:ext cx="1201696" cy="130705"/>
+            <a:off x="8558784" y="2866644"/>
+            <a:ext cx="1201696" cy="119948"/>
           </a:xfrm>
           <a:prstGeom prst="rect">
             <a:avLst/>
@@ -9348,8 +9348,8 @@
         </p:nvSpPr>
         <p:spPr>
           <a:xfrm>
-            <a:off x="10305288" y="2892731"/>
-            <a:ext cx="1143000" cy="261411"/>
+            <a:off x="10305288" y="2806670"/>
+            <a:ext cx="1143000" cy="239896"/>
           </a:xfrm>
           <a:prstGeom prst="rect">
             <a:avLst/>
@@ -9387,8 +9387,8 @@
         </p:nvSpPr>
         <p:spPr>
           <a:xfrm>
-            <a:off x="6208776" y="3154142"/>
-            <a:ext cx="310896" cy="261411"/>
+            <a:off x="6208776" y="3046566"/>
+            <a:ext cx="310896" cy="239896"/>
           </a:xfrm>
           <a:prstGeom prst="rect">
             <a:avLst/>
@@ -9426,8 +9426,8 @@
         </p:nvSpPr>
         <p:spPr>
           <a:xfrm>
-            <a:off x="6565392" y="3154142"/>
-            <a:ext cx="1920240" cy="261411"/>
+            <a:off x="6565392" y="3046566"/>
+            <a:ext cx="1920240" cy="239896"/>
           </a:xfrm>
           <a:prstGeom prst="rect">
             <a:avLst/>
@@ -9465,8 +9465,8 @@
         </p:nvSpPr>
         <p:spPr>
           <a:xfrm>
-            <a:off x="8558784" y="3219495"/>
-            <a:ext cx="1189467" cy="130705"/>
+            <a:off x="8558784" y="3106540"/>
+            <a:ext cx="1189467" cy="119948"/>
           </a:xfrm>
           <a:prstGeom prst="rect">
             <a:avLst/>
@@ -9485,8 +9485,8 @@
         </p:nvSpPr>
         <p:spPr>
           <a:xfrm>
-            <a:off x="10305288" y="3154142"/>
-            <a:ext cx="1143000" cy="261411"/>
+            <a:off x="10305288" y="3046566"/>
+            <a:ext cx="1143000" cy="239896"/>
           </a:xfrm>
           <a:prstGeom prst="rect">
             <a:avLst/>
@@ -9524,8 +9524,8 @@
         </p:nvSpPr>
         <p:spPr>
           <a:xfrm>
-            <a:off x="6208776" y="3415553"/>
-            <a:ext cx="310896" cy="261411"/>
+            <a:off x="6208776" y="3286461"/>
+            <a:ext cx="310896" cy="239896"/>
           </a:xfrm>
           <a:prstGeom prst="rect">
             <a:avLst/>
@@ -9563,8 +9563,8 @@
         </p:nvSpPr>
         <p:spPr>
           <a:xfrm>
-            <a:off x="6565392" y="3415553"/>
-            <a:ext cx="1920240" cy="261411"/>
+            <a:off x="6565392" y="3286461"/>
+            <a:ext cx="1920240" cy="239896"/>
           </a:xfrm>
           <a:prstGeom prst="rect">
             <a:avLst/>
@@ -9602,8 +9602,8 @@
         </p:nvSpPr>
         <p:spPr>
           <a:xfrm>
-            <a:off x="8558784" y="3480906"/>
-            <a:ext cx="1139224" cy="130705"/>
+            <a:off x="8558784" y="3346435"/>
+            <a:ext cx="1139224" cy="119948"/>
           </a:xfrm>
           <a:prstGeom prst="rect">
             <a:avLst/>
@@ -9622,8 +9622,8 @@
         </p:nvSpPr>
         <p:spPr>
           <a:xfrm>
-            <a:off x="10305288" y="3415553"/>
-            <a:ext cx="1143000" cy="261411"/>
+            <a:off x="10305288" y="3286461"/>
+            <a:ext cx="1143000" cy="239896"/>
           </a:xfrm>
           <a:prstGeom prst="rect">
             <a:avLst/>
@@ -9661,8 +9661,8 @@
         </p:nvSpPr>
         <p:spPr>
           <a:xfrm>
-            <a:off x="6208776" y="3676964"/>
-            <a:ext cx="310896" cy="261411"/>
+            <a:off x="6208776" y="3526357"/>
+            <a:ext cx="310896" cy="239896"/>
           </a:xfrm>
           <a:prstGeom prst="rect">
             <a:avLst/>
@@ -9700,8 +9700,8 @@
         </p:nvSpPr>
         <p:spPr>
           <a:xfrm>
-            <a:off x="6565392" y="3676964"/>
-            <a:ext cx="1920240" cy="261411"/>
+            <a:off x="6565392" y="3526357"/>
+            <a:ext cx="1920240" cy="239896"/>
           </a:xfrm>
           <a:prstGeom prst="rect">
             <a:avLst/>
@@ -9739,8 +9739,8 @@
         </p:nvSpPr>
         <p:spPr>
           <a:xfrm>
-            <a:off x="8558784" y="3742316"/>
-            <a:ext cx="1119486" cy="130705"/>
+            <a:off x="8558784" y="3586331"/>
+            <a:ext cx="1119486" cy="119948"/>
           </a:xfrm>
           <a:prstGeom prst="rect">
             <a:avLst/>
@@ -9759,8 +9759,8 @@
         </p:nvSpPr>
         <p:spPr>
           <a:xfrm>
-            <a:off x="10305288" y="3676964"/>
-            <a:ext cx="1143000" cy="261411"/>
+            <a:off x="10305288" y="3526357"/>
+            <a:ext cx="1143000" cy="239896"/>
           </a:xfrm>
           <a:prstGeom prst="rect">
             <a:avLst/>
@@ -9798,8 +9798,8 @@
         </p:nvSpPr>
         <p:spPr>
           <a:xfrm>
-            <a:off x="6208776" y="3938375"/>
-            <a:ext cx="310896" cy="261411"/>
+            <a:off x="6208776" y="3766252"/>
+            <a:ext cx="310896" cy="239896"/>
           </a:xfrm>
           <a:prstGeom prst="rect">
             <a:avLst/>
@@ -9837,8 +9837,8 @@
         </p:nvSpPr>
         <p:spPr>
           <a:xfrm>
-            <a:off x="6565392" y="3938375"/>
-            <a:ext cx="1920240" cy="261411"/>
+            <a:off x="6565392" y="3766252"/>
+            <a:ext cx="1920240" cy="239896"/>
           </a:xfrm>
           <a:prstGeom prst="rect">
             <a:avLst/>
@@ -9876,8 +9876,8 @@
         </p:nvSpPr>
         <p:spPr>
           <a:xfrm>
-            <a:off x="8558784" y="4003727"/>
-            <a:ext cx="1061761" cy="130705"/>
+            <a:off x="8558784" y="3826226"/>
+            <a:ext cx="1061761" cy="119948"/>
           </a:xfrm>
           <a:prstGeom prst="rect">
             <a:avLst/>
@@ -9896,8 +9896,8 @@
         </p:nvSpPr>
         <p:spPr>
           <a:xfrm>
-            <a:off x="10305288" y="3938375"/>
-            <a:ext cx="1143000" cy="261411"/>
+            <a:off x="10305288" y="3766252"/>
+            <a:ext cx="1143000" cy="239896"/>
           </a:xfrm>
           <a:prstGeom prst="rect">
             <a:avLst/>
@@ -9935,8 +9935,8 @@
         </p:nvSpPr>
         <p:spPr>
           <a:xfrm>
-            <a:off x="6208776" y="4199785"/>
-            <a:ext cx="310896" cy="261411"/>
+            <a:off x="6208776" y="4006148"/>
+            <a:ext cx="310896" cy="239896"/>
           </a:xfrm>
           <a:prstGeom prst="rect">
             <a:avLst/>
@@ -9974,8 +9974,8 @@
         </p:nvSpPr>
         <p:spPr>
           <a:xfrm>
-            <a:off x="6565392" y="4199785"/>
-            <a:ext cx="1920240" cy="261411"/>
+            <a:off x="6565392" y="4006148"/>
+            <a:ext cx="1920240" cy="239896"/>
           </a:xfrm>
           <a:prstGeom prst="rect">
             <a:avLst/>
@@ -10013,8 +10013,8 @@
         </p:nvSpPr>
         <p:spPr>
           <a:xfrm>
-            <a:off x="8558784" y="4265138"/>
-            <a:ext cx="1054105" cy="130705"/>
+            <a:off x="8558784" y="4066122"/>
+            <a:ext cx="1054105" cy="119948"/>
           </a:xfrm>
           <a:prstGeom prst="rect">
             <a:avLst/>
@@ -10033,8 +10033,8 @@
         </p:nvSpPr>
         <p:spPr>
           <a:xfrm>
-            <a:off x="10305288" y="4199785"/>
-            <a:ext cx="1143000" cy="261411"/>
+            <a:off x="10305288" y="4006148"/>
+            <a:ext cx="1143000" cy="239896"/>
           </a:xfrm>
           <a:prstGeom prst="rect">
             <a:avLst/>
@@ -10072,8 +10072,8 @@
         </p:nvSpPr>
         <p:spPr>
           <a:xfrm>
-            <a:off x="6208776" y="4461196"/>
-            <a:ext cx="310896" cy="261411"/>
+            <a:off x="6208776" y="4246043"/>
+            <a:ext cx="310896" cy="239896"/>
           </a:xfrm>
           <a:prstGeom prst="rect">
             <a:avLst/>
@@ -10111,8 +10111,8 @@
         </p:nvSpPr>
         <p:spPr>
           <a:xfrm>
-            <a:off x="6565392" y="4461196"/>
-            <a:ext cx="1920240" cy="261411"/>
+            <a:off x="6565392" y="4246043"/>
+            <a:ext cx="1920240" cy="239896"/>
           </a:xfrm>
           <a:prstGeom prst="rect">
             <a:avLst/>
@@ -10150,8 +10150,8 @@
         </p:nvSpPr>
         <p:spPr>
           <a:xfrm>
-            <a:off x="8558784" y="4526549"/>
-            <a:ext cx="1020574" cy="130705"/>
+            <a:off x="8558784" y="4306017"/>
+            <a:ext cx="1020574" cy="119948"/>
           </a:xfrm>
           <a:prstGeom prst="rect">
             <a:avLst/>
@@ -10170,8 +10170,8 @@
         </p:nvSpPr>
         <p:spPr>
           <a:xfrm>
-            <a:off x="10305288" y="4461196"/>
-            <a:ext cx="1143000" cy="261411"/>
+            <a:off x="10305288" y="4246043"/>
+            <a:ext cx="1143000" cy="239896"/>
           </a:xfrm>
           <a:prstGeom prst="rect">
             <a:avLst/>
@@ -10209,8 +10209,8 @@
         </p:nvSpPr>
         <p:spPr>
           <a:xfrm>
-            <a:off x="6208776" y="4722607"/>
-            <a:ext cx="310896" cy="261411"/>
+            <a:off x="6208776" y="4485939"/>
+            <a:ext cx="310896" cy="239896"/>
           </a:xfrm>
           <a:prstGeom prst="rect">
             <a:avLst/>
@@ -10248,8 +10248,8 @@
         </p:nvSpPr>
         <p:spPr>
           <a:xfrm>
-            <a:off x="6565392" y="4722607"/>
-            <a:ext cx="1920240" cy="261411"/>
+            <a:off x="6565392" y="4485939"/>
+            <a:ext cx="1920240" cy="239896"/>
           </a:xfrm>
           <a:prstGeom prst="rect">
             <a:avLst/>
@@ -10287,8 +10287,8 @@
         </p:nvSpPr>
         <p:spPr>
           <a:xfrm>
-            <a:off x="8558784" y="4787960"/>
-            <a:ext cx="951834" cy="130705"/>
+            <a:off x="8558784" y="4545913"/>
+            <a:ext cx="951834" cy="119948"/>
           </a:xfrm>
           <a:prstGeom prst="rect">
             <a:avLst/>
@@ -10307,8 +10307,8 @@
         </p:nvSpPr>
         <p:spPr>
           <a:xfrm>
-            <a:off x="10305288" y="4722607"/>
-            <a:ext cx="1143000" cy="261411"/>
+            <a:off x="10305288" y="4485939"/>
+            <a:ext cx="1143000" cy="239896"/>
           </a:xfrm>
           <a:prstGeom prst="rect">
             <a:avLst/>
@@ -10346,8 +10346,8 @@
         </p:nvSpPr>
         <p:spPr>
           <a:xfrm>
-            <a:off x="6208776" y="4984018"/>
-            <a:ext cx="310896" cy="261411"/>
+            <a:off x="6208776" y="4725834"/>
+            <a:ext cx="310896" cy="239896"/>
           </a:xfrm>
           <a:prstGeom prst="rect">
             <a:avLst/>
@@ -10385,8 +10385,8 @@
         </p:nvSpPr>
         <p:spPr>
           <a:xfrm>
-            <a:off x="6565392" y="4984018"/>
-            <a:ext cx="1920240" cy="261411"/>
+            <a:off x="6565392" y="4725834"/>
+            <a:ext cx="1920240" cy="239896"/>
           </a:xfrm>
           <a:prstGeom prst="rect">
             <a:avLst/>
@@ -10424,8 +10424,8 @@
         </p:nvSpPr>
         <p:spPr>
           <a:xfrm>
-            <a:off x="8558784" y="5049371"/>
-            <a:ext cx="942987" cy="130705"/>
+            <a:off x="8558784" y="4785808"/>
+            <a:ext cx="942987" cy="119948"/>
           </a:xfrm>
           <a:prstGeom prst="rect">
             <a:avLst/>
@@ -10444,8 +10444,8 @@
         </p:nvSpPr>
         <p:spPr>
           <a:xfrm>
-            <a:off x="10305288" y="4984018"/>
-            <a:ext cx="1143000" cy="261411"/>
+            <a:off x="10305288" y="4725834"/>
+            <a:ext cx="1143000" cy="239896"/>
           </a:xfrm>
           <a:prstGeom prst="rect">
             <a:avLst/>
@@ -10483,8 +10483,8 @@
         </p:nvSpPr>
         <p:spPr>
           <a:xfrm>
-            <a:off x="6208776" y="5245429"/>
-            <a:ext cx="310896" cy="261411"/>
+            <a:off x="6208776" y="4965730"/>
+            <a:ext cx="310896" cy="239896"/>
           </a:xfrm>
           <a:prstGeom prst="rect">
             <a:avLst/>
@@ -10522,8 +10522,8 @@
         </p:nvSpPr>
         <p:spPr>
           <a:xfrm>
-            <a:off x="6565392" y="5245429"/>
-            <a:ext cx="1920240" cy="261411"/>
+            <a:off x="6565392" y="4965730"/>
+            <a:ext cx="1920240" cy="239896"/>
           </a:xfrm>
           <a:prstGeom prst="rect">
             <a:avLst/>
@@ -10561,8 +10561,8 @@
         </p:nvSpPr>
         <p:spPr>
           <a:xfrm>
-            <a:off x="8558784" y="5310781"/>
-            <a:ext cx="887722" cy="130705"/>
+            <a:off x="8558784" y="5025704"/>
+            <a:ext cx="887722" cy="119948"/>
           </a:xfrm>
           <a:prstGeom prst="rect">
             <a:avLst/>
@@ -10581,8 +10581,8 @@
         </p:nvSpPr>
         <p:spPr>
           <a:xfrm>
-            <a:off x="10305288" y="5245429"/>
-            <a:ext cx="1143000" cy="261411"/>
+            <a:off x="10305288" y="4965730"/>
+            <a:ext cx="1143000" cy="239896"/>
           </a:xfrm>
           <a:prstGeom prst="rect">
             <a:avLst/>
@@ -10620,8 +10620,8 @@
         </p:nvSpPr>
         <p:spPr>
           <a:xfrm>
-            <a:off x="6208776" y="5506840"/>
-            <a:ext cx="310896" cy="261411"/>
+            <a:off x="6208776" y="5205625"/>
+            <a:ext cx="310896" cy="239896"/>
           </a:xfrm>
           <a:prstGeom prst="rect">
             <a:avLst/>
@@ -10659,8 +10659,8 @@
         </p:nvSpPr>
         <p:spPr>
           <a:xfrm>
-            <a:off x="6565392" y="5506840"/>
-            <a:ext cx="1920240" cy="261411"/>
+            <a:off x="6565392" y="5205625"/>
+            <a:ext cx="1920240" cy="239896"/>
           </a:xfrm>
           <a:prstGeom prst="rect">
             <a:avLst/>
@@ -10698,8 +10698,8 @@
         </p:nvSpPr>
         <p:spPr>
           <a:xfrm>
-            <a:off x="8558784" y="5572192"/>
-            <a:ext cx="837155" cy="130705"/>
+            <a:off x="8558784" y="5265599"/>
+            <a:ext cx="837155" cy="119948"/>
           </a:xfrm>
           <a:prstGeom prst="rect">
             <a:avLst/>
@@ -10718,8 +10718,8 @@
         </p:nvSpPr>
         <p:spPr>
           <a:xfrm>
-            <a:off x="10305288" y="5506840"/>
-            <a:ext cx="1143000" cy="261411"/>
+            <a:off x="10305288" y="5205625"/>
+            <a:ext cx="1143000" cy="239896"/>
           </a:xfrm>
           <a:prstGeom prst="rect">
             <a:avLst/>
@@ -10757,8 +10757,8 @@
         </p:nvSpPr>
         <p:spPr>
           <a:xfrm>
-            <a:off x="6208776" y="5768250"/>
-            <a:ext cx="310896" cy="261411"/>
+            <a:off x="6208776" y="5445521"/>
+            <a:ext cx="310896" cy="239896"/>
           </a:xfrm>
           <a:prstGeom prst="rect">
             <a:avLst/>
@@ -10796,8 +10796,8 @@
         </p:nvSpPr>
         <p:spPr>
           <a:xfrm>
-            <a:off x="6565392" y="5768250"/>
-            <a:ext cx="1920240" cy="261411"/>
+            <a:off x="6565392" y="5445521"/>
+            <a:ext cx="1920240" cy="239896"/>
           </a:xfrm>
           <a:prstGeom prst="rect">
             <a:avLst/>
@@ -10835,8 +10835,8 @@
         </p:nvSpPr>
         <p:spPr>
           <a:xfrm>
-            <a:off x="8558784" y="5833603"/>
-            <a:ext cx="414285" cy="130705"/>
+            <a:off x="8558784" y="5505495"/>
+            <a:ext cx="414285" cy="119948"/>
           </a:xfrm>
           <a:prstGeom prst="rect">
             <a:avLst/>
@@ -10855,8 +10855,8 @@
         </p:nvSpPr>
         <p:spPr>
           <a:xfrm>
-            <a:off x="10305288" y="5768250"/>
-            <a:ext cx="1143000" cy="261411"/>
+            <a:off x="10305288" y="5445521"/>
+            <a:ext cx="1143000" cy="239896"/>
           </a:xfrm>
           <a:prstGeom prst="rect">
             <a:avLst/>
@@ -10895,7 +10895,7 @@
         <p:spPr>
           <a:xfrm>
             <a:off x="4326190" y="1847088"/>
-            <a:ext cx="14630" cy="4443984"/>
+            <a:ext cx="14630" cy="4078224"/>
           </a:xfrm>
           <a:prstGeom prst="rect">
             <a:avLst/>
@@ -10915,7 +10915,7 @@
         <p:spPr>
           <a:xfrm>
             <a:off x="9876598" y="1847088"/>
-            <a:ext cx="14630" cy="4443984"/>
+            <a:ext cx="14630" cy="4078224"/>
           </a:xfrm>
           <a:prstGeom prst="rect">
             <a:avLst/>
@@ -10935,7 +10935,7 @@
         <p:spPr>
           <a:xfrm>
             <a:off x="6085332" y="1847088"/>
-            <a:ext cx="10973" cy="4443984"/>
+            <a:ext cx="10973" cy="4078224"/>
           </a:xfrm>
           <a:prstGeom prst="rect">
             <a:avLst/>
@@ -10945,6 +10945,65 @@
           </a:solidFill>
           <a:ln/>
         </p:spPr>
+      </p:sp>
+      <p:sp>
+        <p:nvSpPr>
+          <p:cNvPr id="147" name="Shape 144"/>
+          <p:cNvSpPr/>
+          <p:nvPr/>
+        </p:nvSpPr>
+        <p:spPr>
+          <a:xfrm>
+            <a:off x="457200" y="6126480"/>
+            <a:ext cx="11274552" cy="371856"/>
+          </a:xfrm>
+          <a:prstGeom prst="rect">
+            <a:avLst/>
+          </a:prstGeom>
+          <a:solidFill>
+            <a:srgbClr val="EDF4FA"/>
+          </a:solidFill>
+          <a:ln/>
+        </p:spPr>
+      </p:sp>
+      <p:sp>
+        <p:nvSpPr>
+          <p:cNvPr id="148" name="Text 145"/>
+          <p:cNvSpPr txBox="1"/>
+          <p:nvPr/>
+        </p:nvSpPr>
+        <p:spPr>
+          <a:xfrm>
+            <a:off x="658368" y="6144768"/>
+            <a:ext cx="10927080" cy="335280"/>
+          </a:xfrm>
+          <a:prstGeom prst="rect">
+            <a:avLst/>
+          </a:prstGeom>
+          <a:noFill/>
+          <a:ln/>
+        </p:spPr>
+        <p:txBody>
+          <a:bodyPr wrap="square" lIns="0" tIns="0" rIns="0" bIns="0" rtlCol="0" anchor="ctr"/>
+          <a:lstStyle/>
+          <a:p>
+            <a:pPr indent="0" marL="0">
+              <a:buNone/>
+            </a:pPr>
+            <a:r>
+              <a:rPr lang="en-US" sz="1600" b="1" dirty="0">
+                <a:solidFill>
+                  <a:srgbClr val="0B2C4A"/>
+                </a:solidFill>
+                <a:latin typeface="Inter" pitchFamily="34" charset="0"/>
+                <a:ea typeface="Inter" pitchFamily="34" charset="-122"/>
+                <a:cs typeface="Inter" pitchFamily="34" charset="-120"/>
+              </a:rPr>
+              <a:t>16 of 33 stores at or above the 78.1% group.</a:t>
+            </a:r>
+            <a:endParaRPr lang="en-US" sz="1600" dirty="0"/>
+          </a:p>
+        </p:txBody>
       </p:sp>
     </p:spTree>
   </p:cSld>
@@ -11085,7 +11144,7 @@
         <p:spPr>
           <a:xfrm>
             <a:off x="457200" y="1207008"/>
-            <a:ext cx="11274552" cy="5148072"/>
+            <a:ext cx="11274552" cy="4782312"/>
           </a:xfrm>
           <a:prstGeom prst="rect">
             <a:avLst/>
@@ -11262,7 +11321,7 @@
         <p:spPr>
           <a:xfrm>
             <a:off x="658368" y="1847088"/>
-            <a:ext cx="310896" cy="261411"/>
+            <a:ext cx="310896" cy="239896"/>
           </a:xfrm>
           <a:prstGeom prst="rect">
             <a:avLst/>
@@ -11301,7 +11360,7 @@
         <p:spPr>
           <a:xfrm>
             <a:off x="1014984" y="1847088"/>
-            <a:ext cx="1920240" cy="261411"/>
+            <a:ext cx="1920240" cy="239896"/>
           </a:xfrm>
           <a:prstGeom prst="rect">
             <a:avLst/>
@@ -11339,8 +11398,8 @@
         </p:nvSpPr>
         <p:spPr>
           <a:xfrm>
-            <a:off x="3785616" y="1917669"/>
-            <a:ext cx="495495" cy="120249"/>
+            <a:off x="3785616" y="1911860"/>
+            <a:ext cx="495495" cy="110352"/>
           </a:xfrm>
           <a:prstGeom prst="rect">
             <a:avLst/>
@@ -11360,7 +11419,7 @@
         <p:spPr>
           <a:xfrm>
             <a:off x="4617720" y="1847088"/>
-            <a:ext cx="1234440" cy="261411"/>
+            <a:ext cx="1234440" cy="239896"/>
           </a:xfrm>
           <a:prstGeom prst="rect">
             <a:avLst/>
@@ -11398,8 +11457,8 @@
         </p:nvSpPr>
         <p:spPr>
           <a:xfrm>
-            <a:off x="658368" y="2108499"/>
-            <a:ext cx="310896" cy="261411"/>
+            <a:off x="658368" y="2086984"/>
+            <a:ext cx="310896" cy="239896"/>
           </a:xfrm>
           <a:prstGeom prst="rect">
             <a:avLst/>
@@ -11437,8 +11496,8 @@
         </p:nvSpPr>
         <p:spPr>
           <a:xfrm>
-            <a:off x="1014984" y="2108499"/>
-            <a:ext cx="1920240" cy="261411"/>
+            <a:off x="1014984" y="2086984"/>
+            <a:ext cx="1920240" cy="239896"/>
           </a:xfrm>
           <a:prstGeom prst="rect">
             <a:avLst/>
@@ -11476,8 +11535,8 @@
         </p:nvSpPr>
         <p:spPr>
           <a:xfrm>
-            <a:off x="3785616" y="2179080"/>
-            <a:ext cx="322622" cy="120249"/>
+            <a:off x="3785616" y="2151755"/>
+            <a:ext cx="322622" cy="110352"/>
           </a:xfrm>
           <a:prstGeom prst="rect">
             <a:avLst/>
@@ -11496,8 +11555,8 @@
         </p:nvSpPr>
         <p:spPr>
           <a:xfrm>
-            <a:off x="4617720" y="2108499"/>
-            <a:ext cx="1234440" cy="261411"/>
+            <a:off x="4617720" y="2086984"/>
+            <a:ext cx="1234440" cy="239896"/>
           </a:xfrm>
           <a:prstGeom prst="rect">
             <a:avLst/>
@@ -11535,8 +11594,8 @@
         </p:nvSpPr>
         <p:spPr>
           <a:xfrm>
-            <a:off x="658368" y="2369910"/>
-            <a:ext cx="310896" cy="261411"/>
+            <a:off x="658368" y="2326879"/>
+            <a:ext cx="310896" cy="239896"/>
           </a:xfrm>
           <a:prstGeom prst="rect">
             <a:avLst/>
@@ -11574,8 +11633,8 @@
         </p:nvSpPr>
         <p:spPr>
           <a:xfrm>
-            <a:off x="1014984" y="2369910"/>
-            <a:ext cx="1920240" cy="261411"/>
+            <a:off x="1014984" y="2326879"/>
+            <a:ext cx="1920240" cy="239896"/>
           </a:xfrm>
           <a:prstGeom prst="rect">
             <a:avLst/>
@@ -11613,8 +11672,8 @@
         </p:nvSpPr>
         <p:spPr>
           <a:xfrm>
-            <a:off x="3785616" y="2440491"/>
-            <a:ext cx="303335" cy="120249"/>
+            <a:off x="3785616" y="2391651"/>
+            <a:ext cx="303335" cy="110352"/>
           </a:xfrm>
           <a:prstGeom prst="rect">
             <a:avLst/>
@@ -11633,8 +11692,8 @@
         </p:nvSpPr>
         <p:spPr>
           <a:xfrm>
-            <a:off x="4617720" y="2369910"/>
-            <a:ext cx="1234440" cy="261411"/>
+            <a:off x="4617720" y="2326879"/>
+            <a:ext cx="1234440" cy="239896"/>
           </a:xfrm>
           <a:prstGeom prst="rect">
             <a:avLst/>
@@ -11672,8 +11731,8 @@
         </p:nvSpPr>
         <p:spPr>
           <a:xfrm>
-            <a:off x="658368" y="2631320"/>
-            <a:ext cx="310896" cy="261411"/>
+            <a:off x="658368" y="2566775"/>
+            <a:ext cx="310896" cy="239896"/>
           </a:xfrm>
           <a:prstGeom prst="rect">
             <a:avLst/>
@@ -11711,8 +11770,8 @@
         </p:nvSpPr>
         <p:spPr>
           <a:xfrm>
-            <a:off x="1014984" y="2631320"/>
-            <a:ext cx="1920240" cy="261411"/>
+            <a:off x="1014984" y="2566775"/>
+            <a:ext cx="1920240" cy="239896"/>
           </a:xfrm>
           <a:prstGeom prst="rect">
             <a:avLst/>
@@ -11750,8 +11809,8 @@
         </p:nvSpPr>
         <p:spPr>
           <a:xfrm>
-            <a:off x="3785616" y="2701901"/>
-            <a:ext cx="263778" cy="120249"/>
+            <a:off x="3785616" y="2631546"/>
+            <a:ext cx="263778" cy="110352"/>
           </a:xfrm>
           <a:prstGeom prst="rect">
             <a:avLst/>
@@ -11770,8 +11829,8 @@
         </p:nvSpPr>
         <p:spPr>
           <a:xfrm>
-            <a:off x="4617720" y="2631320"/>
-            <a:ext cx="1234440" cy="261411"/>
+            <a:off x="4617720" y="2566775"/>
+            <a:ext cx="1234440" cy="239896"/>
           </a:xfrm>
           <a:prstGeom prst="rect">
             <a:avLst/>
@@ -11809,8 +11868,8 @@
         </p:nvSpPr>
         <p:spPr>
           <a:xfrm>
-            <a:off x="658368" y="2892731"/>
-            <a:ext cx="310896" cy="261411"/>
+            <a:off x="658368" y="2806670"/>
+            <a:ext cx="310896" cy="239896"/>
           </a:xfrm>
           <a:prstGeom prst="rect">
             <a:avLst/>
@@ -11848,8 +11907,8 @@
         </p:nvSpPr>
         <p:spPr>
           <a:xfrm>
-            <a:off x="1014984" y="2892731"/>
-            <a:ext cx="1920240" cy="261411"/>
+            <a:off x="1014984" y="2806670"/>
+            <a:ext cx="1920240" cy="239896"/>
           </a:xfrm>
           <a:prstGeom prst="rect">
             <a:avLst/>
@@ -11887,8 +11946,8 @@
         </p:nvSpPr>
         <p:spPr>
           <a:xfrm>
-            <a:off x="3785616" y="2963312"/>
-            <a:ext cx="214318" cy="120249"/>
+            <a:off x="3785616" y="2871442"/>
+            <a:ext cx="214318" cy="110352"/>
           </a:xfrm>
           <a:prstGeom prst="rect">
             <a:avLst/>
@@ -11907,8 +11966,8 @@
         </p:nvSpPr>
         <p:spPr>
           <a:xfrm>
-            <a:off x="4617720" y="2892731"/>
-            <a:ext cx="1234440" cy="261411"/>
+            <a:off x="4617720" y="2806670"/>
+            <a:ext cx="1234440" cy="239896"/>
           </a:xfrm>
           <a:prstGeom prst="rect">
             <a:avLst/>
@@ -11946,8 +12005,8 @@
         </p:nvSpPr>
         <p:spPr>
           <a:xfrm>
-            <a:off x="658368" y="3154142"/>
-            <a:ext cx="310896" cy="261411"/>
+            <a:off x="658368" y="3046566"/>
+            <a:ext cx="310896" cy="239896"/>
           </a:xfrm>
           <a:prstGeom prst="rect">
             <a:avLst/>
@@ -11985,8 +12044,8 @@
         </p:nvSpPr>
         <p:spPr>
           <a:xfrm>
-            <a:off x="1014984" y="3154142"/>
-            <a:ext cx="1920240" cy="261411"/>
+            <a:off x="1014984" y="3046566"/>
+            <a:ext cx="1920240" cy="239896"/>
           </a:xfrm>
           <a:prstGeom prst="rect">
             <a:avLst/>
@@ -12024,8 +12083,8 @@
         </p:nvSpPr>
         <p:spPr>
           <a:xfrm>
-            <a:off x="3785616" y="3224723"/>
-            <a:ext cx="192096" cy="120249"/>
+            <a:off x="3785616" y="3111337"/>
+            <a:ext cx="192096" cy="110352"/>
           </a:xfrm>
           <a:prstGeom prst="rect">
             <a:avLst/>
@@ -12044,8 +12103,8 @@
         </p:nvSpPr>
         <p:spPr>
           <a:xfrm>
-            <a:off x="4617720" y="3154142"/>
-            <a:ext cx="1234440" cy="261411"/>
+            <a:off x="4617720" y="3046566"/>
+            <a:ext cx="1234440" cy="239896"/>
           </a:xfrm>
           <a:prstGeom prst="rect">
             <a:avLst/>
@@ -12083,8 +12142,8 @@
         </p:nvSpPr>
         <p:spPr>
           <a:xfrm>
-            <a:off x="658368" y="3415553"/>
-            <a:ext cx="310896" cy="261411"/>
+            <a:off x="658368" y="3286461"/>
+            <a:ext cx="310896" cy="239896"/>
           </a:xfrm>
           <a:prstGeom prst="rect">
             <a:avLst/>
@@ -12122,8 +12181,8 @@
         </p:nvSpPr>
         <p:spPr>
           <a:xfrm>
-            <a:off x="1014984" y="3415553"/>
-            <a:ext cx="1920240" cy="261411"/>
+            <a:off x="1014984" y="3286461"/>
+            <a:ext cx="1920240" cy="239896"/>
           </a:xfrm>
           <a:prstGeom prst="rect">
             <a:avLst/>
@@ -12161,8 +12220,8 @@
         </p:nvSpPr>
         <p:spPr>
           <a:xfrm>
-            <a:off x="3785616" y="3486134"/>
-            <a:ext cx="188815" cy="120249"/>
+            <a:off x="3785616" y="3351233"/>
+            <a:ext cx="188815" cy="110352"/>
           </a:xfrm>
           <a:prstGeom prst="rect">
             <a:avLst/>
@@ -12181,8 +12240,8 @@
         </p:nvSpPr>
         <p:spPr>
           <a:xfrm>
-            <a:off x="4617720" y="3415553"/>
-            <a:ext cx="1234440" cy="261411"/>
+            <a:off x="4617720" y="3286461"/>
+            <a:ext cx="1234440" cy="239896"/>
           </a:xfrm>
           <a:prstGeom prst="rect">
             <a:avLst/>
@@ -12220,8 +12279,8 @@
         </p:nvSpPr>
         <p:spPr>
           <a:xfrm>
-            <a:off x="658368" y="3676964"/>
-            <a:ext cx="310896" cy="261411"/>
+            <a:off x="658368" y="3526357"/>
+            <a:ext cx="310896" cy="239896"/>
           </a:xfrm>
           <a:prstGeom prst="rect">
             <a:avLst/>
@@ -12259,8 +12318,8 @@
         </p:nvSpPr>
         <p:spPr>
           <a:xfrm>
-            <a:off x="1014984" y="3676964"/>
-            <a:ext cx="1920240" cy="261411"/>
+            <a:off x="1014984" y="3526357"/>
+            <a:ext cx="1920240" cy="239896"/>
           </a:xfrm>
           <a:prstGeom prst="rect">
             <a:avLst/>
@@ -12298,8 +12357,8 @@
         </p:nvSpPr>
         <p:spPr>
           <a:xfrm>
-            <a:off x="3785616" y="3747545"/>
-            <a:ext cx="160577" cy="120249"/>
+            <a:off x="3785616" y="3591128"/>
+            <a:ext cx="160577" cy="110352"/>
           </a:xfrm>
           <a:prstGeom prst="rect">
             <a:avLst/>
@@ -12318,8 +12377,8 @@
         </p:nvSpPr>
         <p:spPr>
           <a:xfrm>
-            <a:off x="4617720" y="3676964"/>
-            <a:ext cx="1234440" cy="261411"/>
+            <a:off x="4617720" y="3526357"/>
+            <a:ext cx="1234440" cy="239896"/>
           </a:xfrm>
           <a:prstGeom prst="rect">
             <a:avLst/>
@@ -12357,8 +12416,8 @@
         </p:nvSpPr>
         <p:spPr>
           <a:xfrm>
-            <a:off x="658368" y="3938375"/>
-            <a:ext cx="310896" cy="261411"/>
+            <a:off x="658368" y="3766252"/>
+            <a:ext cx="310896" cy="239896"/>
           </a:xfrm>
           <a:prstGeom prst="rect">
             <a:avLst/>
@@ -12396,8 +12455,8 @@
         </p:nvSpPr>
         <p:spPr>
           <a:xfrm>
-            <a:off x="1014984" y="3938375"/>
-            <a:ext cx="1920240" cy="261411"/>
+            <a:off x="1014984" y="3766252"/>
+            <a:ext cx="1920240" cy="239896"/>
           </a:xfrm>
           <a:prstGeom prst="rect">
             <a:avLst/>
@@ -12435,8 +12494,8 @@
         </p:nvSpPr>
         <p:spPr>
           <a:xfrm>
-            <a:off x="3785616" y="4008956"/>
-            <a:ext cx="142780" cy="120249"/>
+            <a:off x="3785616" y="3831024"/>
+            <a:ext cx="142780" cy="110352"/>
           </a:xfrm>
           <a:prstGeom prst="rect">
             <a:avLst/>
@@ -12455,8 +12514,8 @@
         </p:nvSpPr>
         <p:spPr>
           <a:xfrm>
-            <a:off x="4617720" y="3938375"/>
-            <a:ext cx="1234440" cy="261411"/>
+            <a:off x="4617720" y="3766252"/>
+            <a:ext cx="1234440" cy="239896"/>
           </a:xfrm>
           <a:prstGeom prst="rect">
             <a:avLst/>
@@ -12494,8 +12553,8 @@
         </p:nvSpPr>
         <p:spPr>
           <a:xfrm>
-            <a:off x="658368" y="4199785"/>
-            <a:ext cx="310896" cy="261411"/>
+            <a:off x="658368" y="4006148"/>
+            <a:ext cx="310896" cy="239896"/>
           </a:xfrm>
           <a:prstGeom prst="rect">
             <a:avLst/>
@@ -12533,8 +12592,8 @@
         </p:nvSpPr>
         <p:spPr>
           <a:xfrm>
-            <a:off x="1014984" y="4199785"/>
-            <a:ext cx="1920240" cy="261411"/>
+            <a:off x="1014984" y="4006148"/>
+            <a:ext cx="1920240" cy="239896"/>
           </a:xfrm>
           <a:prstGeom prst="rect">
             <a:avLst/>
@@ -12572,8 +12631,8 @@
         </p:nvSpPr>
         <p:spPr>
           <a:xfrm>
-            <a:off x="3785616" y="4270366"/>
-            <a:ext cx="132169" cy="120249"/>
+            <a:off x="3785616" y="4070920"/>
+            <a:ext cx="132169" cy="110352"/>
           </a:xfrm>
           <a:prstGeom prst="rect">
             <a:avLst/>
@@ -12592,8 +12651,8 @@
         </p:nvSpPr>
         <p:spPr>
           <a:xfrm>
-            <a:off x="4617720" y="4199785"/>
-            <a:ext cx="1234440" cy="261411"/>
+            <a:off x="4617720" y="4006148"/>
+            <a:ext cx="1234440" cy="239896"/>
           </a:xfrm>
           <a:prstGeom prst="rect">
             <a:avLst/>
@@ -12631,8 +12690,8 @@
         </p:nvSpPr>
         <p:spPr>
           <a:xfrm>
-            <a:off x="658368" y="4461196"/>
-            <a:ext cx="310896" cy="261411"/>
+            <a:off x="658368" y="4246043"/>
+            <a:ext cx="310896" cy="239896"/>
           </a:xfrm>
           <a:prstGeom prst="rect">
             <a:avLst/>
@@ -12670,8 +12729,8 @@
         </p:nvSpPr>
         <p:spPr>
           <a:xfrm>
-            <a:off x="1014984" y="4461196"/>
-            <a:ext cx="1920240" cy="261411"/>
+            <a:off x="1014984" y="4246043"/>
+            <a:ext cx="1920240" cy="239896"/>
           </a:xfrm>
           <a:prstGeom prst="rect">
             <a:avLst/>
@@ -12709,8 +12768,8 @@
         </p:nvSpPr>
         <p:spPr>
           <a:xfrm>
-            <a:off x="3785616" y="4531777"/>
-            <a:ext cx="131489" cy="120249"/>
+            <a:off x="3785616" y="4310815"/>
+            <a:ext cx="131489" cy="110352"/>
           </a:xfrm>
           <a:prstGeom prst="rect">
             <a:avLst/>
@@ -12729,8 +12788,8 @@
         </p:nvSpPr>
         <p:spPr>
           <a:xfrm>
-            <a:off x="4617720" y="4461196"/>
-            <a:ext cx="1234440" cy="261411"/>
+            <a:off x="4617720" y="4246043"/>
+            <a:ext cx="1234440" cy="239896"/>
           </a:xfrm>
           <a:prstGeom prst="rect">
             <a:avLst/>
@@ -12768,8 +12827,8 @@
         </p:nvSpPr>
         <p:spPr>
           <a:xfrm>
-            <a:off x="658368" y="4722607"/>
-            <a:ext cx="310896" cy="261411"/>
+            <a:off x="658368" y="4485939"/>
+            <a:ext cx="310896" cy="239896"/>
           </a:xfrm>
           <a:prstGeom prst="rect">
             <a:avLst/>
@@ -12807,8 +12866,8 @@
         </p:nvSpPr>
         <p:spPr>
           <a:xfrm>
-            <a:off x="1014984" y="4722607"/>
-            <a:ext cx="1920240" cy="261411"/>
+            <a:off x="1014984" y="4485939"/>
+            <a:ext cx="1920240" cy="239896"/>
           </a:xfrm>
           <a:prstGeom prst="rect">
             <a:avLst/>
@@ -12846,8 +12905,8 @@
         </p:nvSpPr>
         <p:spPr>
           <a:xfrm>
-            <a:off x="3785616" y="4793188"/>
-            <a:ext cx="117300" cy="120249"/>
+            <a:off x="3785616" y="4550711"/>
+            <a:ext cx="117300" cy="110352"/>
           </a:xfrm>
           <a:prstGeom prst="rect">
             <a:avLst/>
@@ -12866,8 +12925,8 @@
         </p:nvSpPr>
         <p:spPr>
           <a:xfrm>
-            <a:off x="4617720" y="4722607"/>
-            <a:ext cx="1234440" cy="261411"/>
+            <a:off x="4617720" y="4485939"/>
+            <a:ext cx="1234440" cy="239896"/>
           </a:xfrm>
           <a:prstGeom prst="rect">
             <a:avLst/>
@@ -12905,8 +12964,8 @@
         </p:nvSpPr>
         <p:spPr>
           <a:xfrm>
-            <a:off x="658368" y="4984018"/>
-            <a:ext cx="310896" cy="261411"/>
+            <a:off x="658368" y="4725834"/>
+            <a:ext cx="310896" cy="239896"/>
           </a:xfrm>
           <a:prstGeom prst="rect">
             <a:avLst/>
@@ -12944,8 +13003,8 @@
         </p:nvSpPr>
         <p:spPr>
           <a:xfrm>
-            <a:off x="1014984" y="4984018"/>
-            <a:ext cx="1920240" cy="261411"/>
+            <a:off x="1014984" y="4725834"/>
+            <a:ext cx="1920240" cy="239896"/>
           </a:xfrm>
           <a:prstGeom prst="rect">
             <a:avLst/>
@@ -12983,8 +13042,8 @@
         </p:nvSpPr>
         <p:spPr>
           <a:xfrm>
-            <a:off x="3785616" y="5054599"/>
-            <a:ext cx="95080" cy="120249"/>
+            <a:off x="3785616" y="4790606"/>
+            <a:ext cx="95080" cy="110352"/>
           </a:xfrm>
           <a:prstGeom prst="rect">
             <a:avLst/>
@@ -13003,8 +13062,8 @@
         </p:nvSpPr>
         <p:spPr>
           <a:xfrm>
-            <a:off x="4617720" y="4984018"/>
-            <a:ext cx="1234440" cy="261411"/>
+            <a:off x="4617720" y="4725834"/>
+            <a:ext cx="1234440" cy="239896"/>
           </a:xfrm>
           <a:prstGeom prst="rect">
             <a:avLst/>
@@ -13042,8 +13101,8 @@
         </p:nvSpPr>
         <p:spPr>
           <a:xfrm>
-            <a:off x="658368" y="5245429"/>
-            <a:ext cx="310896" cy="261411"/>
+            <a:off x="658368" y="4965730"/>
+            <a:ext cx="310896" cy="239896"/>
           </a:xfrm>
           <a:prstGeom prst="rect">
             <a:avLst/>
@@ -13081,8 +13140,8 @@
         </p:nvSpPr>
         <p:spPr>
           <a:xfrm>
-            <a:off x="1014984" y="5245429"/>
-            <a:ext cx="1920240" cy="261411"/>
+            <a:off x="1014984" y="4965730"/>
+            <a:ext cx="1920240" cy="239896"/>
           </a:xfrm>
           <a:prstGeom prst="rect">
             <a:avLst/>
@@ -13120,8 +13179,8 @@
         </p:nvSpPr>
         <p:spPr>
           <a:xfrm>
-            <a:off x="3785616" y="5316010"/>
-            <a:ext cx="68825" cy="120249"/>
+            <a:off x="3785616" y="5030502"/>
+            <a:ext cx="68825" cy="110352"/>
           </a:xfrm>
           <a:prstGeom prst="rect">
             <a:avLst/>
@@ -13140,8 +13199,8 @@
         </p:nvSpPr>
         <p:spPr>
           <a:xfrm>
-            <a:off x="4617720" y="5245429"/>
-            <a:ext cx="1234440" cy="261411"/>
+            <a:off x="4617720" y="4965730"/>
+            <a:ext cx="1234440" cy="239896"/>
           </a:xfrm>
           <a:prstGeom prst="rect">
             <a:avLst/>
@@ -13179,8 +13238,8 @@
         </p:nvSpPr>
         <p:spPr>
           <a:xfrm>
-            <a:off x="658368" y="5506840"/>
-            <a:ext cx="310896" cy="261411"/>
+            <a:off x="658368" y="5205625"/>
+            <a:ext cx="310896" cy="239896"/>
           </a:xfrm>
           <a:prstGeom prst="rect">
             <a:avLst/>
@@ -13218,8 +13277,8 @@
         </p:nvSpPr>
         <p:spPr>
           <a:xfrm>
-            <a:off x="1014984" y="5506840"/>
-            <a:ext cx="1920240" cy="261411"/>
+            <a:off x="1014984" y="5205625"/>
+            <a:ext cx="1920240" cy="239896"/>
           </a:xfrm>
           <a:prstGeom prst="rect">
             <a:avLst/>
@@ -13257,8 +13316,8 @@
         </p:nvSpPr>
         <p:spPr>
           <a:xfrm>
-            <a:off x="3785616" y="5577420"/>
-            <a:ext cx="36133" cy="120249"/>
+            <a:off x="3785616" y="5270397"/>
+            <a:ext cx="36133" cy="110352"/>
           </a:xfrm>
           <a:prstGeom prst="rect">
             <a:avLst/>
@@ -13277,8 +13336,8 @@
         </p:nvSpPr>
         <p:spPr>
           <a:xfrm>
-            <a:off x="4617720" y="5506840"/>
-            <a:ext cx="1234440" cy="261411"/>
+            <a:off x="4617720" y="5205625"/>
+            <a:ext cx="1234440" cy="239896"/>
           </a:xfrm>
           <a:prstGeom prst="rect">
             <a:avLst/>
@@ -13316,8 +13375,8 @@
         </p:nvSpPr>
         <p:spPr>
           <a:xfrm>
-            <a:off x="658368" y="5768250"/>
-            <a:ext cx="310896" cy="261411"/>
+            <a:off x="658368" y="5445521"/>
+            <a:ext cx="310896" cy="239896"/>
           </a:xfrm>
           <a:prstGeom prst="rect">
             <a:avLst/>
@@ -13355,8 +13414,8 @@
         </p:nvSpPr>
         <p:spPr>
           <a:xfrm>
-            <a:off x="1014984" y="5768250"/>
-            <a:ext cx="1920240" cy="261411"/>
+            <a:off x="1014984" y="5445521"/>
+            <a:ext cx="1920240" cy="239896"/>
           </a:xfrm>
           <a:prstGeom prst="rect">
             <a:avLst/>
@@ -13394,8 +13453,8 @@
         </p:nvSpPr>
         <p:spPr>
           <a:xfrm>
-            <a:off x="3785616" y="5838831"/>
-            <a:ext cx="34356" cy="120249"/>
+            <a:off x="3785616" y="5510293"/>
+            <a:ext cx="34356" cy="110352"/>
           </a:xfrm>
           <a:prstGeom prst="rect">
             <a:avLst/>
@@ -13414,8 +13473,8 @@
         </p:nvSpPr>
         <p:spPr>
           <a:xfrm>
-            <a:off x="4617720" y="5768250"/>
-            <a:ext cx="1234440" cy="261411"/>
+            <a:off x="4617720" y="5445521"/>
+            <a:ext cx="1234440" cy="239896"/>
           </a:xfrm>
           <a:prstGeom prst="rect">
             <a:avLst/>
@@ -13453,8 +13512,8 @@
         </p:nvSpPr>
         <p:spPr>
           <a:xfrm>
-            <a:off x="658368" y="6029661"/>
-            <a:ext cx="310896" cy="261411"/>
+            <a:off x="658368" y="5685416"/>
+            <a:ext cx="310896" cy="239896"/>
           </a:xfrm>
           <a:prstGeom prst="rect">
             <a:avLst/>
@@ -13492,8 +13551,8 @@
         </p:nvSpPr>
         <p:spPr>
           <a:xfrm>
-            <a:off x="1014984" y="6029661"/>
-            <a:ext cx="1920240" cy="261411"/>
+            <a:off x="1014984" y="5685416"/>
+            <a:ext cx="1920240" cy="239896"/>
           </a:xfrm>
           <a:prstGeom prst="rect">
             <a:avLst/>
@@ -13531,8 +13590,8 @@
         </p:nvSpPr>
         <p:spPr>
           <a:xfrm>
-            <a:off x="3785616" y="6100242"/>
-            <a:ext cx="26542" cy="120249"/>
+            <a:off x="3785616" y="5750188"/>
+            <a:ext cx="26542" cy="110352"/>
           </a:xfrm>
           <a:prstGeom prst="rect">
             <a:avLst/>
@@ -13551,8 +13610,8 @@
         </p:nvSpPr>
         <p:spPr>
           <a:xfrm>
-            <a:off x="4617720" y="6029661"/>
-            <a:ext cx="1234440" cy="261411"/>
+            <a:off x="4617720" y="5685416"/>
+            <a:ext cx="1234440" cy="239896"/>
           </a:xfrm>
           <a:prstGeom prst="rect">
             <a:avLst/>
@@ -13591,7 +13650,7 @@
         <p:spPr>
           <a:xfrm>
             <a:off x="6208776" y="1847088"/>
-            <a:ext cx="310896" cy="261411"/>
+            <a:ext cx="310896" cy="239896"/>
           </a:xfrm>
           <a:prstGeom prst="rect">
             <a:avLst/>
@@ -13630,7 +13689,7 @@
         <p:spPr>
           <a:xfrm>
             <a:off x="6565392" y="1847088"/>
-            <a:ext cx="1920240" cy="261411"/>
+            <a:ext cx="1920240" cy="239896"/>
           </a:xfrm>
           <a:prstGeom prst="rect">
             <a:avLst/>
@@ -13668,8 +13727,8 @@
         </p:nvSpPr>
         <p:spPr>
           <a:xfrm>
-            <a:off x="9336024" y="1917669"/>
-            <a:ext cx="12802" cy="120249"/>
+            <a:off x="9336024" y="1911860"/>
+            <a:ext cx="12802" cy="110352"/>
           </a:xfrm>
           <a:prstGeom prst="rect">
             <a:avLst/>
@@ -13689,7 +13748,7 @@
         <p:spPr>
           <a:xfrm>
             <a:off x="10168128" y="1847088"/>
-            <a:ext cx="1234440" cy="261411"/>
+            <a:ext cx="1234440" cy="239896"/>
           </a:xfrm>
           <a:prstGeom prst="rect">
             <a:avLst/>
@@ -13727,8 +13786,8 @@
         </p:nvSpPr>
         <p:spPr>
           <a:xfrm>
-            <a:off x="6208776" y="2108499"/>
-            <a:ext cx="310896" cy="261411"/>
+            <a:off x="6208776" y="2086984"/>
+            <a:ext cx="310896" cy="239896"/>
           </a:xfrm>
           <a:prstGeom prst="rect">
             <a:avLst/>
@@ -13766,8 +13825,8 @@
         </p:nvSpPr>
         <p:spPr>
           <a:xfrm>
-            <a:off x="6565392" y="2108499"/>
-            <a:ext cx="1920240" cy="261411"/>
+            <a:off x="6565392" y="2086984"/>
+            <a:ext cx="1920240" cy="239896"/>
           </a:xfrm>
           <a:prstGeom prst="rect">
             <a:avLst/>
@@ -13805,8 +13864,8 @@
         </p:nvSpPr>
         <p:spPr>
           <a:xfrm>
-            <a:off x="9336024" y="2179080"/>
-            <a:ext cx="12802" cy="120249"/>
+            <a:off x="9336024" y="2151755"/>
+            <a:ext cx="12802" cy="110352"/>
           </a:xfrm>
           <a:prstGeom prst="rect">
             <a:avLst/>
@@ -13825,8 +13884,8 @@
         </p:nvSpPr>
         <p:spPr>
           <a:xfrm>
-            <a:off x="10168128" y="2108499"/>
-            <a:ext cx="1234440" cy="261411"/>
+            <a:off x="10168128" y="2086984"/>
+            <a:ext cx="1234440" cy="239896"/>
           </a:xfrm>
           <a:prstGeom prst="rect">
             <a:avLst/>
@@ -13864,8 +13923,8 @@
         </p:nvSpPr>
         <p:spPr>
           <a:xfrm>
-            <a:off x="6208776" y="2369910"/>
-            <a:ext cx="310896" cy="261411"/>
+            <a:off x="6208776" y="2326879"/>
+            <a:ext cx="310896" cy="239896"/>
           </a:xfrm>
           <a:prstGeom prst="rect">
             <a:avLst/>
@@ -13903,8 +13962,8 @@
         </p:nvSpPr>
         <p:spPr>
           <a:xfrm>
-            <a:off x="6565392" y="2369910"/>
-            <a:ext cx="1920240" cy="261411"/>
+            <a:off x="6565392" y="2326879"/>
+            <a:ext cx="1920240" cy="239896"/>
           </a:xfrm>
           <a:prstGeom prst="rect">
             <a:avLst/>
@@ -13942,8 +14001,8 @@
         </p:nvSpPr>
         <p:spPr>
           <a:xfrm>
-            <a:off x="9300490" y="2440491"/>
-            <a:ext cx="35534" cy="120249"/>
+            <a:off x="9300490" y="2391651"/>
+            <a:ext cx="35534" cy="110352"/>
           </a:xfrm>
           <a:prstGeom prst="rect">
             <a:avLst/>
@@ -13962,8 +14021,8 @@
         </p:nvSpPr>
         <p:spPr>
           <a:xfrm>
-            <a:off x="10168128" y="2369910"/>
-            <a:ext cx="1234440" cy="261411"/>
+            <a:off x="10168128" y="2326879"/>
+            <a:ext cx="1234440" cy="239896"/>
           </a:xfrm>
           <a:prstGeom prst="rect">
             <a:avLst/>
@@ -14001,8 +14060,8 @@
         </p:nvSpPr>
         <p:spPr>
           <a:xfrm>
-            <a:off x="6208776" y="2631320"/>
-            <a:ext cx="310896" cy="261411"/>
+            <a:off x="6208776" y="2566775"/>
+            <a:ext cx="310896" cy="239896"/>
           </a:xfrm>
           <a:prstGeom prst="rect">
             <a:avLst/>
@@ -14040,8 +14099,8 @@
         </p:nvSpPr>
         <p:spPr>
           <a:xfrm>
-            <a:off x="6565392" y="2631320"/>
-            <a:ext cx="1920240" cy="261411"/>
+            <a:off x="6565392" y="2566775"/>
+            <a:ext cx="1920240" cy="239896"/>
           </a:xfrm>
           <a:prstGeom prst="rect">
             <a:avLst/>
@@ -14079,8 +14138,8 @@
         </p:nvSpPr>
         <p:spPr>
           <a:xfrm>
-            <a:off x="9251253" y="2701901"/>
-            <a:ext cx="84771" cy="120249"/>
+            <a:off x="9251253" y="2631546"/>
+            <a:ext cx="84771" cy="110352"/>
           </a:xfrm>
           <a:prstGeom prst="rect">
             <a:avLst/>
@@ -14099,8 +14158,8 @@
         </p:nvSpPr>
         <p:spPr>
           <a:xfrm>
-            <a:off x="10168128" y="2631320"/>
-            <a:ext cx="1234440" cy="261411"/>
+            <a:off x="10168128" y="2566775"/>
+            <a:ext cx="1234440" cy="239896"/>
           </a:xfrm>
           <a:prstGeom prst="rect">
             <a:avLst/>
@@ -14138,8 +14197,8 @@
         </p:nvSpPr>
         <p:spPr>
           <a:xfrm>
-            <a:off x="6208776" y="2892731"/>
-            <a:ext cx="310896" cy="261411"/>
+            <a:off x="6208776" y="2806670"/>
+            <a:ext cx="310896" cy="239896"/>
           </a:xfrm>
           <a:prstGeom prst="rect">
             <a:avLst/>
@@ -14177,8 +14236,8 @@
         </p:nvSpPr>
         <p:spPr>
           <a:xfrm>
-            <a:off x="6565392" y="2892731"/>
-            <a:ext cx="1920240" cy="261411"/>
+            <a:off x="6565392" y="2806670"/>
+            <a:ext cx="1920240" cy="239896"/>
           </a:xfrm>
           <a:prstGeom prst="rect">
             <a:avLst/>
@@ -14216,8 +14275,8 @@
         </p:nvSpPr>
         <p:spPr>
           <a:xfrm>
-            <a:off x="9226020" y="2963312"/>
-            <a:ext cx="110004" cy="120249"/>
+            <a:off x="9226020" y="2871442"/>
+            <a:ext cx="110004" cy="110352"/>
           </a:xfrm>
           <a:prstGeom prst="rect">
             <a:avLst/>
@@ -14236,8 +14295,8 @@
         </p:nvSpPr>
         <p:spPr>
           <a:xfrm>
-            <a:off x="10168128" y="2892731"/>
-            <a:ext cx="1234440" cy="261411"/>
+            <a:off x="10168128" y="2806670"/>
+            <a:ext cx="1234440" cy="239896"/>
           </a:xfrm>
           <a:prstGeom prst="rect">
             <a:avLst/>
@@ -14275,8 +14334,8 @@
         </p:nvSpPr>
         <p:spPr>
           <a:xfrm>
-            <a:off x="6208776" y="3154142"/>
-            <a:ext cx="310896" cy="261411"/>
+            <a:off x="6208776" y="3046566"/>
+            <a:ext cx="310896" cy="239896"/>
           </a:xfrm>
           <a:prstGeom prst="rect">
             <a:avLst/>
@@ -14314,8 +14373,8 @@
         </p:nvSpPr>
         <p:spPr>
           <a:xfrm>
-            <a:off x="6565392" y="3154142"/>
-            <a:ext cx="1920240" cy="261411"/>
+            <a:off x="6565392" y="3046566"/>
+            <a:ext cx="1920240" cy="239896"/>
           </a:xfrm>
           <a:prstGeom prst="rect">
             <a:avLst/>
@@ -14353,8 +14412,8 @@
         </p:nvSpPr>
         <p:spPr>
           <a:xfrm>
-            <a:off x="9211478" y="3224723"/>
-            <a:ext cx="124546" cy="120249"/>
+            <a:off x="9211478" y="3111337"/>
+            <a:ext cx="124546" cy="110352"/>
           </a:xfrm>
           <a:prstGeom prst="rect">
             <a:avLst/>
@@ -14373,8 +14432,8 @@
         </p:nvSpPr>
         <p:spPr>
           <a:xfrm>
-            <a:off x="10168128" y="3154142"/>
-            <a:ext cx="1234440" cy="261411"/>
+            <a:off x="10168128" y="3046566"/>
+            <a:ext cx="1234440" cy="239896"/>
           </a:xfrm>
           <a:prstGeom prst="rect">
             <a:avLst/>
@@ -14412,8 +14471,8 @@
         </p:nvSpPr>
         <p:spPr>
           <a:xfrm>
-            <a:off x="6208776" y="3415553"/>
-            <a:ext cx="310896" cy="261411"/>
+            <a:off x="6208776" y="3286461"/>
+            <a:ext cx="310896" cy="239896"/>
           </a:xfrm>
           <a:prstGeom prst="rect">
             <a:avLst/>
@@ -14451,8 +14510,8 @@
         </p:nvSpPr>
         <p:spPr>
           <a:xfrm>
-            <a:off x="6565392" y="3415553"/>
-            <a:ext cx="1920240" cy="261411"/>
+            <a:off x="6565392" y="3286461"/>
+            <a:ext cx="1920240" cy="239896"/>
           </a:xfrm>
           <a:prstGeom prst="rect">
             <a:avLst/>
@@ -14490,8 +14549,8 @@
         </p:nvSpPr>
         <p:spPr>
           <a:xfrm>
-            <a:off x="9201170" y="3486134"/>
-            <a:ext cx="134854" cy="120249"/>
+            <a:off x="9201170" y="3351233"/>
+            <a:ext cx="134854" cy="110352"/>
           </a:xfrm>
           <a:prstGeom prst="rect">
             <a:avLst/>
@@ -14510,8 +14569,8 @@
         </p:nvSpPr>
         <p:spPr>
           <a:xfrm>
-            <a:off x="10168128" y="3415553"/>
-            <a:ext cx="1234440" cy="261411"/>
+            <a:off x="10168128" y="3286461"/>
+            <a:ext cx="1234440" cy="239896"/>
           </a:xfrm>
           <a:prstGeom prst="rect">
             <a:avLst/>
@@ -14549,8 +14608,8 @@
         </p:nvSpPr>
         <p:spPr>
           <a:xfrm>
-            <a:off x="6208776" y="3676964"/>
-            <a:ext cx="310896" cy="261411"/>
+            <a:off x="6208776" y="3526357"/>
+            <a:ext cx="310896" cy="239896"/>
           </a:xfrm>
           <a:prstGeom prst="rect">
             <a:avLst/>
@@ -14588,8 +14647,8 @@
         </p:nvSpPr>
         <p:spPr>
           <a:xfrm>
-            <a:off x="6565392" y="3676964"/>
-            <a:ext cx="1920240" cy="261411"/>
+            <a:off x="6565392" y="3526357"/>
+            <a:ext cx="1920240" cy="239896"/>
           </a:xfrm>
           <a:prstGeom prst="rect">
             <a:avLst/>
@@ -14627,8 +14686,8 @@
         </p:nvSpPr>
         <p:spPr>
           <a:xfrm>
-            <a:off x="9108753" y="3747545"/>
-            <a:ext cx="227271" cy="120249"/>
+            <a:off x="9108753" y="3591128"/>
+            <a:ext cx="227271" cy="110352"/>
           </a:xfrm>
           <a:prstGeom prst="rect">
             <a:avLst/>
@@ -14647,8 +14706,8 @@
         </p:nvSpPr>
         <p:spPr>
           <a:xfrm>
-            <a:off x="10168128" y="3676964"/>
-            <a:ext cx="1234440" cy="261411"/>
+            <a:off x="10168128" y="3526357"/>
+            <a:ext cx="1234440" cy="239896"/>
           </a:xfrm>
           <a:prstGeom prst="rect">
             <a:avLst/>
@@ -14686,8 +14745,8 @@
         </p:nvSpPr>
         <p:spPr>
           <a:xfrm>
-            <a:off x="6208776" y="3938375"/>
-            <a:ext cx="310896" cy="261411"/>
+            <a:off x="6208776" y="3766252"/>
+            <a:ext cx="310896" cy="239896"/>
           </a:xfrm>
           <a:prstGeom prst="rect">
             <a:avLst/>
@@ -14725,8 +14784,8 @@
         </p:nvSpPr>
         <p:spPr>
           <a:xfrm>
-            <a:off x="6565392" y="3938375"/>
-            <a:ext cx="1920240" cy="261411"/>
+            <a:off x="6565392" y="3766252"/>
+            <a:ext cx="1920240" cy="239896"/>
           </a:xfrm>
           <a:prstGeom prst="rect">
             <a:avLst/>
@@ -14764,8 +14823,8 @@
         </p:nvSpPr>
         <p:spPr>
           <a:xfrm>
-            <a:off x="9091564" y="4008956"/>
-            <a:ext cx="244460" cy="120249"/>
+            <a:off x="9091564" y="3831024"/>
+            <a:ext cx="244460" cy="110352"/>
           </a:xfrm>
           <a:prstGeom prst="rect">
             <a:avLst/>
@@ -14784,8 +14843,8 @@
         </p:nvSpPr>
         <p:spPr>
           <a:xfrm>
-            <a:off x="10168128" y="3938375"/>
-            <a:ext cx="1234440" cy="261411"/>
+            <a:off x="10168128" y="3766252"/>
+            <a:ext cx="1234440" cy="239896"/>
           </a:xfrm>
           <a:prstGeom prst="rect">
             <a:avLst/>
@@ -14823,8 +14882,8 @@
         </p:nvSpPr>
         <p:spPr>
           <a:xfrm>
-            <a:off x="6208776" y="4199785"/>
-            <a:ext cx="310896" cy="261411"/>
+            <a:off x="6208776" y="4006148"/>
+            <a:ext cx="310896" cy="239896"/>
           </a:xfrm>
           <a:prstGeom prst="rect">
             <a:avLst/>
@@ -14862,8 +14921,8 @@
         </p:nvSpPr>
         <p:spPr>
           <a:xfrm>
-            <a:off x="6565392" y="4199785"/>
-            <a:ext cx="1920240" cy="261411"/>
+            <a:off x="6565392" y="4006148"/>
+            <a:ext cx="1920240" cy="239896"/>
           </a:xfrm>
           <a:prstGeom prst="rect">
             <a:avLst/>
@@ -14901,8 +14960,8 @@
         </p:nvSpPr>
         <p:spPr>
           <a:xfrm>
-            <a:off x="9060005" y="4270366"/>
-            <a:ext cx="276019" cy="120249"/>
+            <a:off x="9060005" y="4070920"/>
+            <a:ext cx="276019" cy="110352"/>
           </a:xfrm>
           <a:prstGeom prst="rect">
             <a:avLst/>
@@ -14921,8 +14980,8 @@
         </p:nvSpPr>
         <p:spPr>
           <a:xfrm>
-            <a:off x="10168128" y="4199785"/>
-            <a:ext cx="1234440" cy="261411"/>
+            <a:off x="10168128" y="4006148"/>
+            <a:ext cx="1234440" cy="239896"/>
           </a:xfrm>
           <a:prstGeom prst="rect">
             <a:avLst/>
@@ -14960,8 +15019,8 @@
         </p:nvSpPr>
         <p:spPr>
           <a:xfrm>
-            <a:off x="6208776" y="4461196"/>
-            <a:ext cx="310896" cy="261411"/>
+            <a:off x="6208776" y="4246043"/>
+            <a:ext cx="310896" cy="239896"/>
           </a:xfrm>
           <a:prstGeom prst="rect">
             <a:avLst/>
@@ -14999,8 +15058,8 @@
         </p:nvSpPr>
         <p:spPr>
           <a:xfrm>
-            <a:off x="6565392" y="4461196"/>
-            <a:ext cx="1920240" cy="261411"/>
+            <a:off x="6565392" y="4246043"/>
+            <a:ext cx="1920240" cy="239896"/>
           </a:xfrm>
           <a:prstGeom prst="rect">
             <a:avLst/>
@@ -15038,8 +15097,8 @@
         </p:nvSpPr>
         <p:spPr>
           <a:xfrm>
-            <a:off x="9035101" y="4531777"/>
-            <a:ext cx="300923" cy="120249"/>
+            <a:off x="9035101" y="4310815"/>
+            <a:ext cx="300923" cy="110352"/>
           </a:xfrm>
           <a:prstGeom prst="rect">
             <a:avLst/>
@@ -15058,8 +15117,8 @@
         </p:nvSpPr>
         <p:spPr>
           <a:xfrm>
-            <a:off x="10168128" y="4461196"/>
-            <a:ext cx="1234440" cy="261411"/>
+            <a:off x="10168128" y="4246043"/>
+            <a:ext cx="1234440" cy="239896"/>
           </a:xfrm>
           <a:prstGeom prst="rect">
             <a:avLst/>
@@ -15097,8 +15156,8 @@
         </p:nvSpPr>
         <p:spPr>
           <a:xfrm>
-            <a:off x="6208776" y="4722607"/>
-            <a:ext cx="310896" cy="261411"/>
+            <a:off x="6208776" y="4485939"/>
+            <a:ext cx="310896" cy="239896"/>
           </a:xfrm>
           <a:prstGeom prst="rect">
             <a:avLst/>
@@ -15136,8 +15195,8 @@
         </p:nvSpPr>
         <p:spPr>
           <a:xfrm>
-            <a:off x="6565392" y="4722607"/>
-            <a:ext cx="1920240" cy="261411"/>
+            <a:off x="6565392" y="4485939"/>
+            <a:ext cx="1920240" cy="239896"/>
           </a:xfrm>
           <a:prstGeom prst="rect">
             <a:avLst/>
@@ -15175,8 +15234,8 @@
         </p:nvSpPr>
         <p:spPr>
           <a:xfrm>
-            <a:off x="8954892" y="4793188"/>
-            <a:ext cx="381132" cy="120249"/>
+            <a:off x="8954892" y="4550711"/>
+            <a:ext cx="381132" cy="110352"/>
           </a:xfrm>
           <a:prstGeom prst="rect">
             <a:avLst/>
@@ -15195,8 +15254,8 @@
         </p:nvSpPr>
         <p:spPr>
           <a:xfrm>
-            <a:off x="10168128" y="4722607"/>
-            <a:ext cx="1234440" cy="261411"/>
+            <a:off x="10168128" y="4485939"/>
+            <a:ext cx="1234440" cy="239896"/>
           </a:xfrm>
           <a:prstGeom prst="rect">
             <a:avLst/>
@@ -15234,8 +15293,8 @@
         </p:nvSpPr>
         <p:spPr>
           <a:xfrm>
-            <a:off x="6208776" y="4984018"/>
-            <a:ext cx="310896" cy="261411"/>
+            <a:off x="6208776" y="4725834"/>
+            <a:ext cx="310896" cy="239896"/>
           </a:xfrm>
           <a:prstGeom prst="rect">
             <a:avLst/>
@@ -15273,8 +15332,8 @@
         </p:nvSpPr>
         <p:spPr>
           <a:xfrm>
-            <a:off x="6565392" y="4984018"/>
-            <a:ext cx="1920240" cy="261411"/>
+            <a:off x="6565392" y="4725834"/>
+            <a:ext cx="1920240" cy="239896"/>
           </a:xfrm>
           <a:prstGeom prst="rect">
             <a:avLst/>
@@ -15312,8 +15371,8 @@
         </p:nvSpPr>
         <p:spPr>
           <a:xfrm>
-            <a:off x="8929245" y="5054599"/>
-            <a:ext cx="406779" cy="120249"/>
+            <a:off x="8929245" y="4790606"/>
+            <a:ext cx="406779" cy="110352"/>
           </a:xfrm>
           <a:prstGeom prst="rect">
             <a:avLst/>
@@ -15332,8 +15391,8 @@
         </p:nvSpPr>
         <p:spPr>
           <a:xfrm>
-            <a:off x="10168128" y="4984018"/>
-            <a:ext cx="1234440" cy="261411"/>
+            <a:off x="10168128" y="4725834"/>
+            <a:ext cx="1234440" cy="239896"/>
           </a:xfrm>
           <a:prstGeom prst="rect">
             <a:avLst/>
@@ -15371,8 +15430,8 @@
         </p:nvSpPr>
         <p:spPr>
           <a:xfrm>
-            <a:off x="6208776" y="5245429"/>
-            <a:ext cx="310896" cy="261411"/>
+            <a:off x="6208776" y="4965730"/>
+            <a:ext cx="310896" cy="239896"/>
           </a:xfrm>
           <a:prstGeom prst="rect">
             <a:avLst/>
@@ -15410,8 +15469,8 @@
         </p:nvSpPr>
         <p:spPr>
           <a:xfrm>
-            <a:off x="6565392" y="5245429"/>
-            <a:ext cx="1920240" cy="261411"/>
+            <a:off x="6565392" y="4965730"/>
+            <a:ext cx="1920240" cy="239896"/>
           </a:xfrm>
           <a:prstGeom prst="rect">
             <a:avLst/>
@@ -15449,8 +15508,8 @@
         </p:nvSpPr>
         <p:spPr>
           <a:xfrm>
-            <a:off x="8865948" y="5316010"/>
-            <a:ext cx="470076" cy="120249"/>
+            <a:off x="8865948" y="5030502"/>
+            <a:ext cx="470076" cy="110352"/>
           </a:xfrm>
           <a:prstGeom prst="rect">
             <a:avLst/>
@@ -15469,8 +15528,8 @@
         </p:nvSpPr>
         <p:spPr>
           <a:xfrm>
-            <a:off x="10168128" y="5245429"/>
-            <a:ext cx="1234440" cy="261411"/>
+            <a:off x="10168128" y="4965730"/>
+            <a:ext cx="1234440" cy="239896"/>
           </a:xfrm>
           <a:prstGeom prst="rect">
             <a:avLst/>
@@ -15508,8 +15567,8 @@
         </p:nvSpPr>
         <p:spPr>
           <a:xfrm>
-            <a:off x="6208776" y="5506840"/>
-            <a:ext cx="310896" cy="261411"/>
+            <a:off x="6208776" y="5205625"/>
+            <a:ext cx="310896" cy="239896"/>
           </a:xfrm>
           <a:prstGeom prst="rect">
             <a:avLst/>
@@ -15547,8 +15606,8 @@
         </p:nvSpPr>
         <p:spPr>
           <a:xfrm>
-            <a:off x="6565392" y="5506840"/>
-            <a:ext cx="1920240" cy="261411"/>
+            <a:off x="6565392" y="5205625"/>
+            <a:ext cx="1920240" cy="239896"/>
           </a:xfrm>
           <a:prstGeom prst="rect">
             <a:avLst/>
@@ -15586,8 +15645,8 @@
         </p:nvSpPr>
         <p:spPr>
           <a:xfrm>
-            <a:off x="8842326" y="5577420"/>
-            <a:ext cx="493698" cy="120249"/>
+            <a:off x="8842326" y="5270397"/>
+            <a:ext cx="493698" cy="110352"/>
           </a:xfrm>
           <a:prstGeom prst="rect">
             <a:avLst/>
@@ -15606,8 +15665,8 @@
         </p:nvSpPr>
         <p:spPr>
           <a:xfrm>
-            <a:off x="10168128" y="5506840"/>
-            <a:ext cx="1234440" cy="261411"/>
+            <a:off x="10168128" y="5205625"/>
+            <a:ext cx="1234440" cy="239896"/>
           </a:xfrm>
           <a:prstGeom prst="rect">
             <a:avLst/>
@@ -15645,8 +15704,8 @@
         </p:nvSpPr>
         <p:spPr>
           <a:xfrm>
-            <a:off x="6208776" y="5768250"/>
-            <a:ext cx="310896" cy="261411"/>
+            <a:off x="6208776" y="5445521"/>
+            <a:ext cx="310896" cy="239896"/>
           </a:xfrm>
           <a:prstGeom prst="rect">
             <a:avLst/>
@@ -15684,8 +15743,8 @@
         </p:nvSpPr>
         <p:spPr>
           <a:xfrm>
-            <a:off x="6565392" y="5768250"/>
-            <a:ext cx="1920240" cy="261411"/>
+            <a:off x="6565392" y="5445521"/>
+            <a:ext cx="1920240" cy="239896"/>
           </a:xfrm>
           <a:prstGeom prst="rect">
             <a:avLst/>
@@ -15723,8 +15782,8 @@
         </p:nvSpPr>
         <p:spPr>
           <a:xfrm>
-            <a:off x="8558784" y="5838831"/>
-            <a:ext cx="777240" cy="120249"/>
+            <a:off x="8558784" y="5510293"/>
+            <a:ext cx="777240" cy="110352"/>
           </a:xfrm>
           <a:prstGeom prst="rect">
             <a:avLst/>
@@ -15743,8 +15802,8 @@
         </p:nvSpPr>
         <p:spPr>
           <a:xfrm>
-            <a:off x="10168128" y="5768250"/>
-            <a:ext cx="1234440" cy="261411"/>
+            <a:off x="10168128" y="5445521"/>
+            <a:ext cx="1234440" cy="239896"/>
           </a:xfrm>
           <a:prstGeom prst="rect">
             <a:avLst/>
@@ -15783,7 +15842,7 @@
         <p:spPr>
           <a:xfrm>
             <a:off x="3780130" y="1847088"/>
-            <a:ext cx="10973" cy="4443984"/>
+            <a:ext cx="10973" cy="4078224"/>
           </a:xfrm>
           <a:prstGeom prst="rect">
             <a:avLst/>
@@ -15803,7 +15862,7 @@
         <p:spPr>
           <a:xfrm>
             <a:off x="9330538" y="1847088"/>
-            <a:ext cx="10973" cy="4443984"/>
+            <a:ext cx="10973" cy="4078224"/>
           </a:xfrm>
           <a:prstGeom prst="rect">
             <a:avLst/>
@@ -15823,7 +15882,7 @@
         <p:spPr>
           <a:xfrm>
             <a:off x="6085332" y="1847088"/>
-            <a:ext cx="10973" cy="4443984"/>
+            <a:ext cx="10973" cy="4078224"/>
           </a:xfrm>
           <a:prstGeom prst="rect">
             <a:avLst/>
@@ -15833,6 +15892,65 @@
           </a:solidFill>
           <a:ln/>
         </p:spPr>
+      </p:sp>
+      <p:sp>
+        <p:nvSpPr>
+          <p:cNvPr id="147" name="Shape 144"/>
+          <p:cNvSpPr/>
+          <p:nvPr/>
+        </p:nvSpPr>
+        <p:spPr>
+          <a:xfrm>
+            <a:off x="457200" y="6126480"/>
+            <a:ext cx="11274552" cy="371856"/>
+          </a:xfrm>
+          <a:prstGeom prst="rect">
+            <a:avLst/>
+          </a:prstGeom>
+          <a:solidFill>
+            <a:srgbClr val="E6F6EE"/>
+          </a:solidFill>
+          <a:ln/>
+        </p:spPr>
+      </p:sp>
+      <p:sp>
+        <p:nvSpPr>
+          <p:cNvPr id="148" name="Text 145"/>
+          <p:cNvSpPr txBox="1"/>
+          <p:nvPr/>
+        </p:nvSpPr>
+        <p:spPr>
+          <a:xfrm>
+            <a:off x="658368" y="6144768"/>
+            <a:ext cx="10927080" cy="335280"/>
+          </a:xfrm>
+          <a:prstGeom prst="rect">
+            <a:avLst/>
+          </a:prstGeom>
+          <a:noFill/>
+          <a:ln/>
+        </p:spPr>
+        <p:txBody>
+          <a:bodyPr wrap="square" lIns="0" tIns="0" rIns="0" bIns="0" rtlCol="0" anchor="ctr"/>
+          <a:lstStyle/>
+          <a:p>
+            <a:pPr indent="0" marL="0">
+              <a:buNone/>
+            </a:pPr>
+            <a:r>
+              <a:rPr lang="en-US" sz="1600" b="1" dirty="0">
+                <a:solidFill>
+                  <a:srgbClr val="0B7A4A"/>
+                </a:solidFill>
+                <a:latin typeface="Inter" pitchFamily="34" charset="0"/>
+                <a:ea typeface="Inter" pitchFamily="34" charset="-122"/>
+                <a:cs typeface="Inter" pitchFamily="34" charset="-120"/>
+              </a:rPr>
+              <a:t>19 of 33 stores raised internal labor GP%. 14 declined.</a:t>
+            </a:r>
+            <a:endParaRPr lang="en-US" sz="1600" dirty="0"/>
+          </a:p>
+        </p:txBody>
       </p:sp>
     </p:spTree>
   </p:cSld>
@@ -19846,7 +19964,7 @@
         <p:spPr>
           <a:xfrm>
             <a:off x="457200" y="1207008"/>
-            <a:ext cx="11274552" cy="5148072"/>
+            <a:ext cx="11274552" cy="4782312"/>
           </a:xfrm>
           <a:prstGeom prst="rect">
             <a:avLst/>
@@ -20023,7 +20141,7 @@
         <p:spPr>
           <a:xfrm>
             <a:off x="658368" y="1847088"/>
-            <a:ext cx="310896" cy="261411"/>
+            <a:ext cx="310896" cy="239896"/>
           </a:xfrm>
           <a:prstGeom prst="rect">
             <a:avLst/>
@@ -20062,7 +20180,7 @@
         <p:spPr>
           <a:xfrm>
             <a:off x="1014984" y="1847088"/>
-            <a:ext cx="1920240" cy="261411"/>
+            <a:ext cx="1920240" cy="239896"/>
           </a:xfrm>
           <a:prstGeom prst="rect">
             <a:avLst/>
@@ -20100,8 +20218,8 @@
         </p:nvSpPr>
         <p:spPr>
           <a:xfrm>
-            <a:off x="3008376" y="1912441"/>
-            <a:ext cx="1691640" cy="130705"/>
+            <a:off x="3008376" y="1907062"/>
+            <a:ext cx="1691640" cy="119948"/>
           </a:xfrm>
           <a:prstGeom prst="rect">
             <a:avLst/>
@@ -20121,7 +20239,7 @@
         <p:spPr>
           <a:xfrm>
             <a:off x="4754880" y="1847088"/>
-            <a:ext cx="1143000" cy="261411"/>
+            <a:ext cx="1143000" cy="239896"/>
           </a:xfrm>
           <a:prstGeom prst="rect">
             <a:avLst/>
@@ -20159,8 +20277,8 @@
         </p:nvSpPr>
         <p:spPr>
           <a:xfrm>
-            <a:off x="658368" y="2108499"/>
-            <a:ext cx="310896" cy="261411"/>
+            <a:off x="658368" y="2086984"/>
+            <a:ext cx="310896" cy="239896"/>
           </a:xfrm>
           <a:prstGeom prst="rect">
             <a:avLst/>
@@ -20198,8 +20316,8 @@
         </p:nvSpPr>
         <p:spPr>
           <a:xfrm>
-            <a:off x="1014984" y="2108499"/>
-            <a:ext cx="1920240" cy="261411"/>
+            <a:off x="1014984" y="2086984"/>
+            <a:ext cx="1920240" cy="239896"/>
           </a:xfrm>
           <a:prstGeom prst="rect">
             <a:avLst/>
@@ -20237,8 +20355,8 @@
         </p:nvSpPr>
         <p:spPr>
           <a:xfrm>
-            <a:off x="3008376" y="2173852"/>
-            <a:ext cx="1571389" cy="130705"/>
+            <a:off x="3008376" y="2146957"/>
+            <a:ext cx="1571389" cy="119948"/>
           </a:xfrm>
           <a:prstGeom prst="rect">
             <a:avLst/>
@@ -20257,8 +20375,8 @@
         </p:nvSpPr>
         <p:spPr>
           <a:xfrm>
-            <a:off x="4754880" y="2108499"/>
-            <a:ext cx="1143000" cy="261411"/>
+            <a:off x="4754880" y="2086984"/>
+            <a:ext cx="1143000" cy="239896"/>
           </a:xfrm>
           <a:prstGeom prst="rect">
             <a:avLst/>
@@ -20296,8 +20414,8 @@
         </p:nvSpPr>
         <p:spPr>
           <a:xfrm>
-            <a:off x="658368" y="2369910"/>
-            <a:ext cx="310896" cy="261411"/>
+            <a:off x="658368" y="2326879"/>
+            <a:ext cx="310896" cy="239896"/>
           </a:xfrm>
           <a:prstGeom prst="rect">
             <a:avLst/>
@@ -20335,8 +20453,8 @@
         </p:nvSpPr>
         <p:spPr>
           <a:xfrm>
-            <a:off x="1014984" y="2369910"/>
-            <a:ext cx="1920240" cy="261411"/>
+            <a:off x="1014984" y="2326879"/>
+            <a:ext cx="1920240" cy="239896"/>
           </a:xfrm>
           <a:prstGeom prst="rect">
             <a:avLst/>
@@ -20374,8 +20492,8 @@
         </p:nvSpPr>
         <p:spPr>
           <a:xfrm>
-            <a:off x="3008376" y="2435262"/>
-            <a:ext cx="1526083" cy="130705"/>
+            <a:off x="3008376" y="2386853"/>
+            <a:ext cx="1526083" cy="119948"/>
           </a:xfrm>
           <a:prstGeom prst="rect">
             <a:avLst/>
@@ -20394,8 +20512,8 @@
         </p:nvSpPr>
         <p:spPr>
           <a:xfrm>
-            <a:off x="4754880" y="2369910"/>
-            <a:ext cx="1143000" cy="261411"/>
+            <a:off x="4754880" y="2326879"/>
+            <a:ext cx="1143000" cy="239896"/>
           </a:xfrm>
           <a:prstGeom prst="rect">
             <a:avLst/>
@@ -20433,8 +20551,8 @@
         </p:nvSpPr>
         <p:spPr>
           <a:xfrm>
-            <a:off x="658368" y="2631320"/>
-            <a:ext cx="310896" cy="261411"/>
+            <a:off x="658368" y="2566775"/>
+            <a:ext cx="310896" cy="239896"/>
           </a:xfrm>
           <a:prstGeom prst="rect">
             <a:avLst/>
@@ -20472,8 +20590,8 @@
         </p:nvSpPr>
         <p:spPr>
           <a:xfrm>
-            <a:off x="1014984" y="2631320"/>
-            <a:ext cx="1920240" cy="261411"/>
+            <a:off x="1014984" y="2566775"/>
+            <a:ext cx="1920240" cy="239896"/>
           </a:xfrm>
           <a:prstGeom prst="rect">
             <a:avLst/>
@@ -20511,8 +20629,8 @@
         </p:nvSpPr>
         <p:spPr>
           <a:xfrm>
-            <a:off x="3008376" y="2696673"/>
-            <a:ext cx="1427052" cy="130705"/>
+            <a:off x="3008376" y="2626748"/>
+            <a:ext cx="1427052" cy="119948"/>
           </a:xfrm>
           <a:prstGeom prst="rect">
             <a:avLst/>
@@ -20531,8 +20649,8 @@
         </p:nvSpPr>
         <p:spPr>
           <a:xfrm>
-            <a:off x="4754880" y="2631320"/>
-            <a:ext cx="1143000" cy="261411"/>
+            <a:off x="4754880" y="2566775"/>
+            <a:ext cx="1143000" cy="239896"/>
           </a:xfrm>
           <a:prstGeom prst="rect">
             <a:avLst/>
@@ -20570,8 +20688,8 @@
         </p:nvSpPr>
         <p:spPr>
           <a:xfrm>
-            <a:off x="658368" y="2892731"/>
-            <a:ext cx="310896" cy="261411"/>
+            <a:off x="658368" y="2806670"/>
+            <a:ext cx="310896" cy="239896"/>
           </a:xfrm>
           <a:prstGeom prst="rect">
             <a:avLst/>
@@ -20609,8 +20727,8 @@
         </p:nvSpPr>
         <p:spPr>
           <a:xfrm>
-            <a:off x="1014984" y="2892731"/>
-            <a:ext cx="1920240" cy="261411"/>
+            <a:off x="1014984" y="2806670"/>
+            <a:ext cx="1920240" cy="239896"/>
           </a:xfrm>
           <a:prstGeom prst="rect">
             <a:avLst/>
@@ -20648,8 +20766,8 @@
         </p:nvSpPr>
         <p:spPr>
           <a:xfrm>
-            <a:off x="3008376" y="2958084"/>
-            <a:ext cx="1404264" cy="130705"/>
+            <a:off x="3008376" y="2866644"/>
+            <a:ext cx="1404264" cy="119948"/>
           </a:xfrm>
           <a:prstGeom prst="rect">
             <a:avLst/>
@@ -20668,8 +20786,8 @@
         </p:nvSpPr>
         <p:spPr>
           <a:xfrm>
-            <a:off x="4754880" y="2892731"/>
-            <a:ext cx="1143000" cy="261411"/>
+            <a:off x="4754880" y="2806670"/>
+            <a:ext cx="1143000" cy="239896"/>
           </a:xfrm>
           <a:prstGeom prst="rect">
             <a:avLst/>
@@ -20707,8 +20825,8 @@
         </p:nvSpPr>
         <p:spPr>
           <a:xfrm>
-            <a:off x="658368" y="3154142"/>
-            <a:ext cx="310896" cy="261411"/>
+            <a:off x="658368" y="3046566"/>
+            <a:ext cx="310896" cy="239896"/>
           </a:xfrm>
           <a:prstGeom prst="rect">
             <a:avLst/>
@@ -20746,8 +20864,8 @@
         </p:nvSpPr>
         <p:spPr>
           <a:xfrm>
-            <a:off x="1014984" y="3154142"/>
-            <a:ext cx="1920240" cy="261411"/>
+            <a:off x="1014984" y="3046566"/>
+            <a:ext cx="1920240" cy="239896"/>
           </a:xfrm>
           <a:prstGeom prst="rect">
             <a:avLst/>
@@ -20785,8 +20903,8 @@
         </p:nvSpPr>
         <p:spPr>
           <a:xfrm>
-            <a:off x="3008376" y="3219495"/>
-            <a:ext cx="1329194" cy="130705"/>
+            <a:off x="3008376" y="3106540"/>
+            <a:ext cx="1329194" cy="119948"/>
           </a:xfrm>
           <a:prstGeom prst="rect">
             <a:avLst/>
@@ -20805,8 +20923,8 @@
         </p:nvSpPr>
         <p:spPr>
           <a:xfrm>
-            <a:off x="4754880" y="3154142"/>
-            <a:ext cx="1143000" cy="261411"/>
+            <a:off x="4754880" y="3046566"/>
+            <a:ext cx="1143000" cy="239896"/>
           </a:xfrm>
           <a:prstGeom prst="rect">
             <a:avLst/>
@@ -20844,8 +20962,8 @@
         </p:nvSpPr>
         <p:spPr>
           <a:xfrm>
-            <a:off x="658368" y="3415553"/>
-            <a:ext cx="310896" cy="261411"/>
+            <a:off x="658368" y="3286461"/>
+            <a:ext cx="310896" cy="239896"/>
           </a:xfrm>
           <a:prstGeom prst="rect">
             <a:avLst/>
@@ -20883,8 +21001,8 @@
         </p:nvSpPr>
         <p:spPr>
           <a:xfrm>
-            <a:off x="1014984" y="3415553"/>
-            <a:ext cx="1920240" cy="261411"/>
+            <a:off x="1014984" y="3286461"/>
+            <a:ext cx="1920240" cy="239896"/>
           </a:xfrm>
           <a:prstGeom prst="rect">
             <a:avLst/>
@@ -20922,8 +21040,8 @@
         </p:nvSpPr>
         <p:spPr>
           <a:xfrm>
-            <a:off x="3008376" y="3480906"/>
-            <a:ext cx="1147637" cy="130705"/>
+            <a:off x="3008376" y="3346435"/>
+            <a:ext cx="1147637" cy="119948"/>
           </a:xfrm>
           <a:prstGeom prst="rect">
             <a:avLst/>
@@ -20942,8 +21060,8 @@
         </p:nvSpPr>
         <p:spPr>
           <a:xfrm>
-            <a:off x="4754880" y="3415553"/>
-            <a:ext cx="1143000" cy="261411"/>
+            <a:off x="4754880" y="3286461"/>
+            <a:ext cx="1143000" cy="239896"/>
           </a:xfrm>
           <a:prstGeom prst="rect">
             <a:avLst/>
@@ -20981,8 +21099,8 @@
         </p:nvSpPr>
         <p:spPr>
           <a:xfrm>
-            <a:off x="658368" y="3676964"/>
-            <a:ext cx="310896" cy="261411"/>
+            <a:off x="658368" y="3526357"/>
+            <a:ext cx="310896" cy="239896"/>
           </a:xfrm>
           <a:prstGeom prst="rect">
             <a:avLst/>
@@ -21020,8 +21138,8 @@
         </p:nvSpPr>
         <p:spPr>
           <a:xfrm>
-            <a:off x="1014984" y="3676964"/>
-            <a:ext cx="1920240" cy="261411"/>
+            <a:off x="1014984" y="3526357"/>
+            <a:ext cx="1920240" cy="239896"/>
           </a:xfrm>
           <a:prstGeom prst="rect">
             <a:avLst/>
@@ -21059,8 +21177,8 @@
         </p:nvSpPr>
         <p:spPr>
           <a:xfrm>
-            <a:off x="3008376" y="3742316"/>
-            <a:ext cx="1143623" cy="130705"/>
+            <a:off x="3008376" y="3586331"/>
+            <a:ext cx="1143623" cy="119948"/>
           </a:xfrm>
           <a:prstGeom prst="rect">
             <a:avLst/>
@@ -21079,8 +21197,8 @@
         </p:nvSpPr>
         <p:spPr>
           <a:xfrm>
-            <a:off x="4754880" y="3676964"/>
-            <a:ext cx="1143000" cy="261411"/>
+            <a:off x="4754880" y="3526357"/>
+            <a:ext cx="1143000" cy="239896"/>
           </a:xfrm>
           <a:prstGeom prst="rect">
             <a:avLst/>
@@ -21118,8 +21236,8 @@
         </p:nvSpPr>
         <p:spPr>
           <a:xfrm>
-            <a:off x="658368" y="3938375"/>
-            <a:ext cx="310896" cy="261411"/>
+            <a:off x="658368" y="3766252"/>
+            <a:ext cx="310896" cy="239896"/>
           </a:xfrm>
           <a:prstGeom prst="rect">
             <a:avLst/>
@@ -21157,8 +21275,8 @@
         </p:nvSpPr>
         <p:spPr>
           <a:xfrm>
-            <a:off x="1014984" y="3938375"/>
-            <a:ext cx="1920240" cy="261411"/>
+            <a:off x="1014984" y="3766252"/>
+            <a:ext cx="1920240" cy="239896"/>
           </a:xfrm>
           <a:prstGeom prst="rect">
             <a:avLst/>
@@ -21196,8 +21314,8 @@
         </p:nvSpPr>
         <p:spPr>
           <a:xfrm>
-            <a:off x="3008376" y="4003727"/>
-            <a:ext cx="1138452" cy="130705"/>
+            <a:off x="3008376" y="3826226"/>
+            <a:ext cx="1138452" cy="119948"/>
           </a:xfrm>
           <a:prstGeom prst="rect">
             <a:avLst/>
@@ -21216,8 +21334,8 @@
         </p:nvSpPr>
         <p:spPr>
           <a:xfrm>
-            <a:off x="4754880" y="3938375"/>
-            <a:ext cx="1143000" cy="261411"/>
+            <a:off x="4754880" y="3766252"/>
+            <a:ext cx="1143000" cy="239896"/>
           </a:xfrm>
           <a:prstGeom prst="rect">
             <a:avLst/>
@@ -21255,8 +21373,8 @@
         </p:nvSpPr>
         <p:spPr>
           <a:xfrm>
-            <a:off x="658368" y="4199785"/>
-            <a:ext cx="310896" cy="261411"/>
+            <a:off x="658368" y="4006148"/>
+            <a:ext cx="310896" cy="239896"/>
           </a:xfrm>
           <a:prstGeom prst="rect">
             <a:avLst/>
@@ -21294,8 +21412,8 @@
         </p:nvSpPr>
         <p:spPr>
           <a:xfrm>
-            <a:off x="1014984" y="4199785"/>
-            <a:ext cx="1920240" cy="261411"/>
+            <a:off x="1014984" y="4006148"/>
+            <a:ext cx="1920240" cy="239896"/>
           </a:xfrm>
           <a:prstGeom prst="rect">
             <a:avLst/>
@@ -21333,8 +21451,8 @@
         </p:nvSpPr>
         <p:spPr>
           <a:xfrm>
-            <a:off x="3008376" y="4265138"/>
-            <a:ext cx="1133430" cy="130705"/>
+            <a:off x="3008376" y="4066122"/>
+            <a:ext cx="1133430" cy="119948"/>
           </a:xfrm>
           <a:prstGeom prst="rect">
             <a:avLst/>
@@ -21353,8 +21471,8 @@
         </p:nvSpPr>
         <p:spPr>
           <a:xfrm>
-            <a:off x="4754880" y="4199785"/>
-            <a:ext cx="1143000" cy="261411"/>
+            <a:off x="4754880" y="4006148"/>
+            <a:ext cx="1143000" cy="239896"/>
           </a:xfrm>
           <a:prstGeom prst="rect">
             <a:avLst/>
@@ -21392,8 +21510,8 @@
         </p:nvSpPr>
         <p:spPr>
           <a:xfrm>
-            <a:off x="658368" y="4461196"/>
-            <a:ext cx="310896" cy="261411"/>
+            <a:off x="658368" y="4246043"/>
+            <a:ext cx="310896" cy="239896"/>
           </a:xfrm>
           <a:prstGeom prst="rect">
             <a:avLst/>
@@ -21431,8 +21549,8 @@
         </p:nvSpPr>
         <p:spPr>
           <a:xfrm>
-            <a:off x="1014984" y="4461196"/>
-            <a:ext cx="1920240" cy="261411"/>
+            <a:off x="1014984" y="4246043"/>
+            <a:ext cx="1920240" cy="239896"/>
           </a:xfrm>
           <a:prstGeom prst="rect">
             <a:avLst/>
@@ -21470,8 +21588,8 @@
         </p:nvSpPr>
         <p:spPr>
           <a:xfrm>
-            <a:off x="3008376" y="4526549"/>
-            <a:ext cx="1126165" cy="130705"/>
+            <a:off x="3008376" y="4306017"/>
+            <a:ext cx="1126165" cy="119948"/>
           </a:xfrm>
           <a:prstGeom prst="rect">
             <a:avLst/>
@@ -21490,8 +21608,8 @@
         </p:nvSpPr>
         <p:spPr>
           <a:xfrm>
-            <a:off x="4754880" y="4461196"/>
-            <a:ext cx="1143000" cy="261411"/>
+            <a:off x="4754880" y="4246043"/>
+            <a:ext cx="1143000" cy="239896"/>
           </a:xfrm>
           <a:prstGeom prst="rect">
             <a:avLst/>
@@ -21529,8 +21647,8 @@
         </p:nvSpPr>
         <p:spPr>
           <a:xfrm>
-            <a:off x="658368" y="4722607"/>
-            <a:ext cx="310896" cy="261411"/>
+            <a:off x="658368" y="4485939"/>
+            <a:ext cx="310896" cy="239896"/>
           </a:xfrm>
           <a:prstGeom prst="rect">
             <a:avLst/>
@@ -21568,8 +21686,8 @@
         </p:nvSpPr>
         <p:spPr>
           <a:xfrm>
-            <a:off x="1014984" y="4722607"/>
-            <a:ext cx="1920240" cy="261411"/>
+            <a:off x="1014984" y="4485939"/>
+            <a:ext cx="1920240" cy="239896"/>
           </a:xfrm>
           <a:prstGeom prst="rect">
             <a:avLst/>
@@ -21607,8 +21725,8 @@
         </p:nvSpPr>
         <p:spPr>
           <a:xfrm>
-            <a:off x="3008376" y="4787960"/>
-            <a:ext cx="1120821" cy="130705"/>
+            <a:off x="3008376" y="4545913"/>
+            <a:ext cx="1120821" cy="119948"/>
           </a:xfrm>
           <a:prstGeom prst="rect">
             <a:avLst/>
@@ -21627,8 +21745,8 @@
         </p:nvSpPr>
         <p:spPr>
           <a:xfrm>
-            <a:off x="4754880" y="4722607"/>
-            <a:ext cx="1143000" cy="261411"/>
+            <a:off x="4754880" y="4485939"/>
+            <a:ext cx="1143000" cy="239896"/>
           </a:xfrm>
           <a:prstGeom prst="rect">
             <a:avLst/>
@@ -21666,8 +21784,8 @@
         </p:nvSpPr>
         <p:spPr>
           <a:xfrm>
-            <a:off x="658368" y="4984018"/>
-            <a:ext cx="310896" cy="261411"/>
+            <a:off x="658368" y="4725834"/>
+            <a:ext cx="310896" cy="239896"/>
           </a:xfrm>
           <a:prstGeom prst="rect">
             <a:avLst/>
@@ -21705,8 +21823,8 @@
         </p:nvSpPr>
         <p:spPr>
           <a:xfrm>
-            <a:off x="1014984" y="4984018"/>
-            <a:ext cx="1920240" cy="261411"/>
+            <a:off x="1014984" y="4725834"/>
+            <a:ext cx="1920240" cy="239896"/>
           </a:xfrm>
           <a:prstGeom prst="rect">
             <a:avLst/>
@@ -21744,8 +21862,8 @@
         </p:nvSpPr>
         <p:spPr>
           <a:xfrm>
-            <a:off x="3008376" y="5049371"/>
-            <a:ext cx="1111196" cy="130705"/>
+            <a:off x="3008376" y="4785808"/>
+            <a:ext cx="1111196" cy="119948"/>
           </a:xfrm>
           <a:prstGeom prst="rect">
             <a:avLst/>
@@ -21764,8 +21882,8 @@
         </p:nvSpPr>
         <p:spPr>
           <a:xfrm>
-            <a:off x="4754880" y="4984018"/>
-            <a:ext cx="1143000" cy="261411"/>
+            <a:off x="4754880" y="4725834"/>
+            <a:ext cx="1143000" cy="239896"/>
           </a:xfrm>
           <a:prstGeom prst="rect">
             <a:avLst/>
@@ -21803,8 +21921,8 @@
         </p:nvSpPr>
         <p:spPr>
           <a:xfrm>
-            <a:off x="658368" y="5245429"/>
-            <a:ext cx="310896" cy="261411"/>
+            <a:off x="658368" y="4965730"/>
+            <a:ext cx="310896" cy="239896"/>
           </a:xfrm>
           <a:prstGeom prst="rect">
             <a:avLst/>
@@ -21842,8 +21960,8 @@
         </p:nvSpPr>
         <p:spPr>
           <a:xfrm>
-            <a:off x="1014984" y="5245429"/>
-            <a:ext cx="1920240" cy="261411"/>
+            <a:off x="1014984" y="4965730"/>
+            <a:ext cx="1920240" cy="239896"/>
           </a:xfrm>
           <a:prstGeom prst="rect">
             <a:avLst/>
@@ -21881,8 +21999,8 @@
         </p:nvSpPr>
         <p:spPr>
           <a:xfrm>
-            <a:off x="3008376" y="5310781"/>
-            <a:ext cx="1097912" cy="130705"/>
+            <a:off x="3008376" y="5025704"/>
+            <a:ext cx="1097912" cy="119948"/>
           </a:xfrm>
           <a:prstGeom prst="rect">
             <a:avLst/>
@@ -21901,8 +22019,8 @@
         </p:nvSpPr>
         <p:spPr>
           <a:xfrm>
-            <a:off x="4754880" y="5245429"/>
-            <a:ext cx="1143000" cy="261411"/>
+            <a:off x="4754880" y="4965730"/>
+            <a:ext cx="1143000" cy="239896"/>
           </a:xfrm>
           <a:prstGeom prst="rect">
             <a:avLst/>
@@ -21940,8 +22058,8 @@
         </p:nvSpPr>
         <p:spPr>
           <a:xfrm>
-            <a:off x="658368" y="5506840"/>
-            <a:ext cx="310896" cy="261411"/>
+            <a:off x="658368" y="5205625"/>
+            <a:ext cx="310896" cy="239896"/>
           </a:xfrm>
           <a:prstGeom prst="rect">
             <a:avLst/>
@@ -21979,8 +22097,8 @@
         </p:nvSpPr>
         <p:spPr>
           <a:xfrm>
-            <a:off x="1014984" y="5506840"/>
-            <a:ext cx="1920240" cy="261411"/>
+            <a:off x="1014984" y="5205625"/>
+            <a:ext cx="1920240" cy="239896"/>
           </a:xfrm>
           <a:prstGeom prst="rect">
             <a:avLst/>
@@ -22018,8 +22136,8 @@
         </p:nvSpPr>
         <p:spPr>
           <a:xfrm>
-            <a:off x="3008376" y="5572192"/>
-            <a:ext cx="1082615" cy="130705"/>
+            <a:off x="3008376" y="5265599"/>
+            <a:ext cx="1082615" cy="119948"/>
           </a:xfrm>
           <a:prstGeom prst="rect">
             <a:avLst/>
@@ -22038,8 +22156,8 @@
         </p:nvSpPr>
         <p:spPr>
           <a:xfrm>
-            <a:off x="4754880" y="5506840"/>
-            <a:ext cx="1143000" cy="261411"/>
+            <a:off x="4754880" y="5205625"/>
+            <a:ext cx="1143000" cy="239896"/>
           </a:xfrm>
           <a:prstGeom prst="rect">
             <a:avLst/>
@@ -22077,8 +22195,8 @@
         </p:nvSpPr>
         <p:spPr>
           <a:xfrm>
-            <a:off x="658368" y="5768250"/>
-            <a:ext cx="310896" cy="261411"/>
+            <a:off x="658368" y="5445521"/>
+            <a:ext cx="310896" cy="239896"/>
           </a:xfrm>
           <a:prstGeom prst="rect">
             <a:avLst/>
@@ -22116,8 +22234,8 @@
         </p:nvSpPr>
         <p:spPr>
           <a:xfrm>
-            <a:off x="1014984" y="5768250"/>
-            <a:ext cx="1920240" cy="261411"/>
+            <a:off x="1014984" y="5445521"/>
+            <a:ext cx="1920240" cy="239896"/>
           </a:xfrm>
           <a:prstGeom prst="rect">
             <a:avLst/>
@@ -22155,8 +22273,8 @@
         </p:nvSpPr>
         <p:spPr>
           <a:xfrm>
-            <a:off x="3008376" y="5833603"/>
-            <a:ext cx="1017763" cy="130705"/>
+            <a:off x="3008376" y="5505495"/>
+            <a:ext cx="1017763" cy="119948"/>
           </a:xfrm>
           <a:prstGeom prst="rect">
             <a:avLst/>
@@ -22175,8 +22293,8 @@
         </p:nvSpPr>
         <p:spPr>
           <a:xfrm>
-            <a:off x="4754880" y="5768250"/>
-            <a:ext cx="1143000" cy="261411"/>
+            <a:off x="4754880" y="5445521"/>
+            <a:ext cx="1143000" cy="239896"/>
           </a:xfrm>
           <a:prstGeom prst="rect">
             <a:avLst/>
@@ -22214,8 +22332,8 @@
         </p:nvSpPr>
         <p:spPr>
           <a:xfrm>
-            <a:off x="658368" y="6029661"/>
-            <a:ext cx="310896" cy="261411"/>
+            <a:off x="658368" y="5685416"/>
+            <a:ext cx="310896" cy="239896"/>
           </a:xfrm>
           <a:prstGeom prst="rect">
             <a:avLst/>
@@ -22253,8 +22371,8 @@
         </p:nvSpPr>
         <p:spPr>
           <a:xfrm>
-            <a:off x="1014984" y="6029661"/>
-            <a:ext cx="1920240" cy="261411"/>
+            <a:off x="1014984" y="5685416"/>
+            <a:ext cx="1920240" cy="239896"/>
           </a:xfrm>
           <a:prstGeom prst="rect">
             <a:avLst/>
@@ -22292,8 +22410,8 @@
         </p:nvSpPr>
         <p:spPr>
           <a:xfrm>
-            <a:off x="3008376" y="6095014"/>
-            <a:ext cx="975057" cy="130705"/>
+            <a:off x="3008376" y="5745390"/>
+            <a:ext cx="975057" cy="119948"/>
           </a:xfrm>
           <a:prstGeom prst="rect">
             <a:avLst/>
@@ -22312,8 +22430,8 @@
         </p:nvSpPr>
         <p:spPr>
           <a:xfrm>
-            <a:off x="4754880" y="6029661"/>
-            <a:ext cx="1143000" cy="261411"/>
+            <a:off x="4754880" y="5685416"/>
+            <a:ext cx="1143000" cy="239896"/>
           </a:xfrm>
           <a:prstGeom prst="rect">
             <a:avLst/>
@@ -22352,7 +22470,7 @@
         <p:spPr>
           <a:xfrm>
             <a:off x="6208776" y="1847088"/>
-            <a:ext cx="310896" cy="261411"/>
+            <a:ext cx="310896" cy="239896"/>
           </a:xfrm>
           <a:prstGeom prst="rect">
             <a:avLst/>
@@ -22391,7 +22509,7 @@
         <p:spPr>
           <a:xfrm>
             <a:off x="6565392" y="1847088"/>
-            <a:ext cx="1920240" cy="261411"/>
+            <a:ext cx="1920240" cy="239896"/>
           </a:xfrm>
           <a:prstGeom prst="rect">
             <a:avLst/>
@@ -22429,8 +22547,8 @@
         </p:nvSpPr>
         <p:spPr>
           <a:xfrm>
-            <a:off x="8558784" y="1912441"/>
-            <a:ext cx="973182" cy="130705"/>
+            <a:off x="8558784" y="1907062"/>
+            <a:ext cx="973182" cy="119948"/>
           </a:xfrm>
           <a:prstGeom prst="rect">
             <a:avLst/>
@@ -22450,7 +22568,7 @@
         <p:spPr>
           <a:xfrm>
             <a:off x="10305288" y="1847088"/>
-            <a:ext cx="1143000" cy="261411"/>
+            <a:ext cx="1143000" cy="239896"/>
           </a:xfrm>
           <a:prstGeom prst="rect">
             <a:avLst/>
@@ -22488,8 +22606,8 @@
         </p:nvSpPr>
         <p:spPr>
           <a:xfrm>
-            <a:off x="6208776" y="2108499"/>
-            <a:ext cx="310896" cy="261411"/>
+            <a:off x="6208776" y="2086984"/>
+            <a:ext cx="310896" cy="239896"/>
           </a:xfrm>
           <a:prstGeom prst="rect">
             <a:avLst/>
@@ -22527,8 +22645,8 @@
         </p:nvSpPr>
         <p:spPr>
           <a:xfrm>
-            <a:off x="6565392" y="2108499"/>
-            <a:ext cx="1920240" cy="261411"/>
+            <a:off x="6565392" y="2086984"/>
+            <a:ext cx="1920240" cy="239896"/>
           </a:xfrm>
           <a:prstGeom prst="rect">
             <a:avLst/>
@@ -22566,8 +22684,8 @@
         </p:nvSpPr>
         <p:spPr>
           <a:xfrm>
-            <a:off x="8558784" y="2173852"/>
-            <a:ext cx="944183" cy="130705"/>
+            <a:off x="8558784" y="2146957"/>
+            <a:ext cx="944183" cy="119948"/>
           </a:xfrm>
           <a:prstGeom prst="rect">
             <a:avLst/>
@@ -22586,8 +22704,8 @@
         </p:nvSpPr>
         <p:spPr>
           <a:xfrm>
-            <a:off x="10305288" y="2108499"/>
-            <a:ext cx="1143000" cy="261411"/>
+            <a:off x="10305288" y="2086984"/>
+            <a:ext cx="1143000" cy="239896"/>
           </a:xfrm>
           <a:prstGeom prst="rect">
             <a:avLst/>
@@ -22625,8 +22743,8 @@
         </p:nvSpPr>
         <p:spPr>
           <a:xfrm>
-            <a:off x="6208776" y="2369910"/>
-            <a:ext cx="310896" cy="261411"/>
+            <a:off x="6208776" y="2326879"/>
+            <a:ext cx="310896" cy="239896"/>
           </a:xfrm>
           <a:prstGeom prst="rect">
             <a:avLst/>
@@ -22664,8 +22782,8 @@
         </p:nvSpPr>
         <p:spPr>
           <a:xfrm>
-            <a:off x="6565392" y="2369910"/>
-            <a:ext cx="1920240" cy="261411"/>
+            <a:off x="6565392" y="2326879"/>
+            <a:ext cx="1920240" cy="239896"/>
           </a:xfrm>
           <a:prstGeom prst="rect">
             <a:avLst/>
@@ -22703,8 +22821,8 @@
         </p:nvSpPr>
         <p:spPr>
           <a:xfrm>
-            <a:off x="8558784" y="2435262"/>
-            <a:ext cx="900321" cy="130705"/>
+            <a:off x="8558784" y="2386853"/>
+            <a:ext cx="900321" cy="119948"/>
           </a:xfrm>
           <a:prstGeom prst="rect">
             <a:avLst/>
@@ -22723,8 +22841,8 @@
         </p:nvSpPr>
         <p:spPr>
           <a:xfrm>
-            <a:off x="10305288" y="2369910"/>
-            <a:ext cx="1143000" cy="261411"/>
+            <a:off x="10305288" y="2326879"/>
+            <a:ext cx="1143000" cy="239896"/>
           </a:xfrm>
           <a:prstGeom prst="rect">
             <a:avLst/>
@@ -22762,8 +22880,8 @@
         </p:nvSpPr>
         <p:spPr>
           <a:xfrm>
-            <a:off x="6208776" y="2631320"/>
-            <a:ext cx="310896" cy="261411"/>
+            <a:off x="6208776" y="2566775"/>
+            <a:ext cx="310896" cy="239896"/>
           </a:xfrm>
           <a:prstGeom prst="rect">
             <a:avLst/>
@@ -22801,8 +22919,8 @@
         </p:nvSpPr>
         <p:spPr>
           <a:xfrm>
-            <a:off x="6565392" y="2631320"/>
-            <a:ext cx="1920240" cy="261411"/>
+            <a:off x="6565392" y="2566775"/>
+            <a:ext cx="1920240" cy="239896"/>
           </a:xfrm>
           <a:prstGeom prst="rect">
             <a:avLst/>
@@ -22840,8 +22958,8 @@
         </p:nvSpPr>
         <p:spPr>
           <a:xfrm>
-            <a:off x="8558784" y="2696673"/>
-            <a:ext cx="865365" cy="130705"/>
+            <a:off x="8558784" y="2626748"/>
+            <a:ext cx="865365" cy="119948"/>
           </a:xfrm>
           <a:prstGeom prst="rect">
             <a:avLst/>
@@ -22860,8 +22978,8 @@
         </p:nvSpPr>
         <p:spPr>
           <a:xfrm>
-            <a:off x="10305288" y="2631320"/>
-            <a:ext cx="1143000" cy="261411"/>
+            <a:off x="10305288" y="2566775"/>
+            <a:ext cx="1143000" cy="239896"/>
           </a:xfrm>
           <a:prstGeom prst="rect">
             <a:avLst/>
@@ -22899,8 +23017,8 @@
         </p:nvSpPr>
         <p:spPr>
           <a:xfrm>
-            <a:off x="6208776" y="2892731"/>
-            <a:ext cx="310896" cy="261411"/>
+            <a:off x="6208776" y="2806670"/>
+            <a:ext cx="310896" cy="239896"/>
           </a:xfrm>
           <a:prstGeom prst="rect">
             <a:avLst/>
@@ -22938,8 +23056,8 @@
         </p:nvSpPr>
         <p:spPr>
           <a:xfrm>
-            <a:off x="6565392" y="2892731"/>
-            <a:ext cx="1920240" cy="261411"/>
+            <a:off x="6565392" y="2806670"/>
+            <a:ext cx="1920240" cy="239896"/>
           </a:xfrm>
           <a:prstGeom prst="rect">
             <a:avLst/>
@@ -22977,8 +23095,8 @@
         </p:nvSpPr>
         <p:spPr>
           <a:xfrm>
-            <a:off x="8558784" y="2958084"/>
-            <a:ext cx="844338" cy="130705"/>
+            <a:off x="8558784" y="2866644"/>
+            <a:ext cx="844338" cy="119948"/>
           </a:xfrm>
           <a:prstGeom prst="rect">
             <a:avLst/>
@@ -22997,8 +23115,8 @@
         </p:nvSpPr>
         <p:spPr>
           <a:xfrm>
-            <a:off x="10305288" y="2892731"/>
-            <a:ext cx="1143000" cy="261411"/>
+            <a:off x="10305288" y="2806670"/>
+            <a:ext cx="1143000" cy="239896"/>
           </a:xfrm>
           <a:prstGeom prst="rect">
             <a:avLst/>
@@ -23036,8 +23154,8 @@
         </p:nvSpPr>
         <p:spPr>
           <a:xfrm>
-            <a:off x="6208776" y="3154142"/>
-            <a:ext cx="310896" cy="261411"/>
+            <a:off x="6208776" y="3046566"/>
+            <a:ext cx="310896" cy="239896"/>
           </a:xfrm>
           <a:prstGeom prst="rect">
             <a:avLst/>
@@ -23075,8 +23193,8 @@
         </p:nvSpPr>
         <p:spPr>
           <a:xfrm>
-            <a:off x="6565392" y="3154142"/>
-            <a:ext cx="1920240" cy="261411"/>
+            <a:off x="6565392" y="3046566"/>
+            <a:ext cx="1920240" cy="239896"/>
           </a:xfrm>
           <a:prstGeom prst="rect">
             <a:avLst/>
@@ -23114,8 +23232,8 @@
         </p:nvSpPr>
         <p:spPr>
           <a:xfrm>
-            <a:off x="8558784" y="3219495"/>
-            <a:ext cx="788830" cy="130705"/>
+            <a:off x="8558784" y="3106540"/>
+            <a:ext cx="788830" cy="119948"/>
           </a:xfrm>
           <a:prstGeom prst="rect">
             <a:avLst/>
@@ -23134,8 +23252,8 @@
         </p:nvSpPr>
         <p:spPr>
           <a:xfrm>
-            <a:off x="10305288" y="3154142"/>
-            <a:ext cx="1143000" cy="261411"/>
+            <a:off x="10305288" y="3046566"/>
+            <a:ext cx="1143000" cy="239896"/>
           </a:xfrm>
           <a:prstGeom prst="rect">
             <a:avLst/>
@@ -23173,8 +23291,8 @@
         </p:nvSpPr>
         <p:spPr>
           <a:xfrm>
-            <a:off x="6208776" y="3415553"/>
-            <a:ext cx="310896" cy="261411"/>
+            <a:off x="6208776" y="3286461"/>
+            <a:ext cx="310896" cy="239896"/>
           </a:xfrm>
           <a:prstGeom prst="rect">
             <a:avLst/>
@@ -23212,8 +23330,8 @@
         </p:nvSpPr>
         <p:spPr>
           <a:xfrm>
-            <a:off x="6565392" y="3415553"/>
-            <a:ext cx="1920240" cy="261411"/>
+            <a:off x="6565392" y="3286461"/>
+            <a:ext cx="1920240" cy="239896"/>
           </a:xfrm>
           <a:prstGeom prst="rect">
             <a:avLst/>
@@ -23251,8 +23369,8 @@
         </p:nvSpPr>
         <p:spPr>
           <a:xfrm>
-            <a:off x="8558784" y="3480906"/>
-            <a:ext cx="763564" cy="130705"/>
+            <a:off x="8558784" y="3346435"/>
+            <a:ext cx="763564" cy="119948"/>
           </a:xfrm>
           <a:prstGeom prst="rect">
             <a:avLst/>
@@ -23271,8 +23389,8 @@
         </p:nvSpPr>
         <p:spPr>
           <a:xfrm>
-            <a:off x="10305288" y="3415553"/>
-            <a:ext cx="1143000" cy="261411"/>
+            <a:off x="10305288" y="3286461"/>
+            <a:ext cx="1143000" cy="239896"/>
           </a:xfrm>
           <a:prstGeom prst="rect">
             <a:avLst/>
@@ -23310,8 +23428,8 @@
         </p:nvSpPr>
         <p:spPr>
           <a:xfrm>
-            <a:off x="6208776" y="3676964"/>
-            <a:ext cx="310896" cy="261411"/>
+            <a:off x="6208776" y="3526357"/>
+            <a:ext cx="310896" cy="239896"/>
           </a:xfrm>
           <a:prstGeom prst="rect">
             <a:avLst/>
@@ -23349,8 +23467,8 @@
         </p:nvSpPr>
         <p:spPr>
           <a:xfrm>
-            <a:off x="6565392" y="3676964"/>
-            <a:ext cx="1920240" cy="261411"/>
+            <a:off x="6565392" y="3526357"/>
+            <a:ext cx="1920240" cy="239896"/>
           </a:xfrm>
           <a:prstGeom prst="rect">
             <a:avLst/>
@@ -23388,8 +23506,8 @@
         </p:nvSpPr>
         <p:spPr>
           <a:xfrm>
-            <a:off x="8558784" y="3742316"/>
-            <a:ext cx="727033" cy="130705"/>
+            <a:off x="8558784" y="3586331"/>
+            <a:ext cx="727033" cy="119948"/>
           </a:xfrm>
           <a:prstGeom prst="rect">
             <a:avLst/>
@@ -23408,8 +23526,8 @@
         </p:nvSpPr>
         <p:spPr>
           <a:xfrm>
-            <a:off x="10305288" y="3676964"/>
-            <a:ext cx="1143000" cy="261411"/>
+            <a:off x="10305288" y="3526357"/>
+            <a:ext cx="1143000" cy="239896"/>
           </a:xfrm>
           <a:prstGeom prst="rect">
             <a:avLst/>
@@ -23447,8 +23565,8 @@
         </p:nvSpPr>
         <p:spPr>
           <a:xfrm>
-            <a:off x="6208776" y="3938375"/>
-            <a:ext cx="310896" cy="261411"/>
+            <a:off x="6208776" y="3766252"/>
+            <a:ext cx="310896" cy="239896"/>
           </a:xfrm>
           <a:prstGeom prst="rect">
             <a:avLst/>
@@ -23486,8 +23604,8 @@
         </p:nvSpPr>
         <p:spPr>
           <a:xfrm>
-            <a:off x="6565392" y="3938375"/>
-            <a:ext cx="1920240" cy="261411"/>
+            <a:off x="6565392" y="3766252"/>
+            <a:ext cx="1920240" cy="239896"/>
           </a:xfrm>
           <a:prstGeom prst="rect">
             <a:avLst/>
@@ -23525,8 +23643,8 @@
         </p:nvSpPr>
         <p:spPr>
           <a:xfrm>
-            <a:off x="8558784" y="4003727"/>
-            <a:ext cx="709633" cy="130705"/>
+            <a:off x="8558784" y="3826226"/>
+            <a:ext cx="709633" cy="119948"/>
           </a:xfrm>
           <a:prstGeom prst="rect">
             <a:avLst/>
@@ -23545,8 +23663,8 @@
         </p:nvSpPr>
         <p:spPr>
           <a:xfrm>
-            <a:off x="10305288" y="3938375"/>
-            <a:ext cx="1143000" cy="261411"/>
+            <a:off x="10305288" y="3766252"/>
+            <a:ext cx="1143000" cy="239896"/>
           </a:xfrm>
           <a:prstGeom prst="rect">
             <a:avLst/>
@@ -23584,8 +23702,8 @@
         </p:nvSpPr>
         <p:spPr>
           <a:xfrm>
-            <a:off x="6208776" y="4199785"/>
-            <a:ext cx="310896" cy="261411"/>
+            <a:off x="6208776" y="4006148"/>
+            <a:ext cx="310896" cy="239896"/>
           </a:xfrm>
           <a:prstGeom prst="rect">
             <a:avLst/>
@@ -23623,8 +23741,8 @@
         </p:nvSpPr>
         <p:spPr>
           <a:xfrm>
-            <a:off x="6565392" y="4199785"/>
-            <a:ext cx="1920240" cy="261411"/>
+            <a:off x="6565392" y="4006148"/>
+            <a:ext cx="1920240" cy="239896"/>
           </a:xfrm>
           <a:prstGeom prst="rect">
             <a:avLst/>
@@ -23662,8 +23780,8 @@
         </p:nvSpPr>
         <p:spPr>
           <a:xfrm>
-            <a:off x="8558784" y="4265138"/>
-            <a:ext cx="677288" cy="130705"/>
+            <a:off x="8558784" y="4066122"/>
+            <a:ext cx="677288" cy="119948"/>
           </a:xfrm>
           <a:prstGeom prst="rect">
             <a:avLst/>
@@ -23682,8 +23800,8 @@
         </p:nvSpPr>
         <p:spPr>
           <a:xfrm>
-            <a:off x="10305288" y="4199785"/>
-            <a:ext cx="1143000" cy="261411"/>
+            <a:off x="10305288" y="4006148"/>
+            <a:ext cx="1143000" cy="239896"/>
           </a:xfrm>
           <a:prstGeom prst="rect">
             <a:avLst/>
@@ -23721,8 +23839,8 @@
         </p:nvSpPr>
         <p:spPr>
           <a:xfrm>
-            <a:off x="6208776" y="4461196"/>
-            <a:ext cx="310896" cy="261411"/>
+            <a:off x="6208776" y="4246043"/>
+            <a:ext cx="310896" cy="239896"/>
           </a:xfrm>
           <a:prstGeom prst="rect">
             <a:avLst/>
@@ -23760,8 +23878,8 @@
         </p:nvSpPr>
         <p:spPr>
           <a:xfrm>
-            <a:off x="6565392" y="4461196"/>
-            <a:ext cx="1920240" cy="261411"/>
+            <a:off x="6565392" y="4246043"/>
+            <a:ext cx="1920240" cy="239896"/>
           </a:xfrm>
           <a:prstGeom prst="rect">
             <a:avLst/>
@@ -23799,8 +23917,8 @@
         </p:nvSpPr>
         <p:spPr>
           <a:xfrm>
-            <a:off x="8558784" y="4526549"/>
-            <a:ext cx="652252" cy="130705"/>
+            <a:off x="8558784" y="4306017"/>
+            <a:ext cx="652252" cy="119948"/>
           </a:xfrm>
           <a:prstGeom prst="rect">
             <a:avLst/>
@@ -23819,8 +23937,8 @@
         </p:nvSpPr>
         <p:spPr>
           <a:xfrm>
-            <a:off x="10305288" y="4461196"/>
-            <a:ext cx="1143000" cy="261411"/>
+            <a:off x="10305288" y="4246043"/>
+            <a:ext cx="1143000" cy="239896"/>
           </a:xfrm>
           <a:prstGeom prst="rect">
             <a:avLst/>
@@ -23858,8 +23976,8 @@
         </p:nvSpPr>
         <p:spPr>
           <a:xfrm>
-            <a:off x="6208776" y="4722607"/>
-            <a:ext cx="310896" cy="261411"/>
+            <a:off x="6208776" y="4485939"/>
+            <a:ext cx="310896" cy="239896"/>
           </a:xfrm>
           <a:prstGeom prst="rect">
             <a:avLst/>
@@ -23897,8 +24015,8 @@
         </p:nvSpPr>
         <p:spPr>
           <a:xfrm>
-            <a:off x="6565392" y="4722607"/>
-            <a:ext cx="1920240" cy="261411"/>
+            <a:off x="6565392" y="4485939"/>
+            <a:ext cx="1920240" cy="239896"/>
           </a:xfrm>
           <a:prstGeom prst="rect">
             <a:avLst/>
@@ -23936,8 +24054,8 @@
         </p:nvSpPr>
         <p:spPr>
           <a:xfrm>
-            <a:off x="8558784" y="4787960"/>
-            <a:ext cx="586483" cy="130705"/>
+            <a:off x="8558784" y="4545913"/>
+            <a:ext cx="586483" cy="119948"/>
           </a:xfrm>
           <a:prstGeom prst="rect">
             <a:avLst/>
@@ -23956,8 +24074,8 @@
         </p:nvSpPr>
         <p:spPr>
           <a:xfrm>
-            <a:off x="10305288" y="4722607"/>
-            <a:ext cx="1143000" cy="261411"/>
+            <a:off x="10305288" y="4485939"/>
+            <a:ext cx="1143000" cy="239896"/>
           </a:xfrm>
           <a:prstGeom prst="rect">
             <a:avLst/>
@@ -23995,8 +24113,8 @@
         </p:nvSpPr>
         <p:spPr>
           <a:xfrm>
-            <a:off x="6208776" y="4984018"/>
-            <a:ext cx="310896" cy="261411"/>
+            <a:off x="6208776" y="4725834"/>
+            <a:ext cx="310896" cy="239896"/>
           </a:xfrm>
           <a:prstGeom prst="rect">
             <a:avLst/>
@@ -24034,8 +24152,8 @@
         </p:nvSpPr>
         <p:spPr>
           <a:xfrm>
-            <a:off x="6565392" y="4984018"/>
-            <a:ext cx="1920240" cy="261411"/>
+            <a:off x="6565392" y="4725834"/>
+            <a:ext cx="1920240" cy="239896"/>
           </a:xfrm>
           <a:prstGeom prst="rect">
             <a:avLst/>
@@ -24073,8 +24191,8 @@
         </p:nvSpPr>
         <p:spPr>
           <a:xfrm>
-            <a:off x="8558784" y="5049371"/>
-            <a:ext cx="460386" cy="130705"/>
+            <a:off x="8558784" y="4785808"/>
+            <a:ext cx="460386" cy="119948"/>
           </a:xfrm>
           <a:prstGeom prst="rect">
             <a:avLst/>
@@ -24093,8 +24211,8 @@
         </p:nvSpPr>
         <p:spPr>
           <a:xfrm>
-            <a:off x="10305288" y="4984018"/>
-            <a:ext cx="1143000" cy="261411"/>
+            <a:off x="10305288" y="4725834"/>
+            <a:ext cx="1143000" cy="239896"/>
           </a:xfrm>
           <a:prstGeom prst="rect">
             <a:avLst/>
@@ -24132,8 +24250,8 @@
         </p:nvSpPr>
         <p:spPr>
           <a:xfrm>
-            <a:off x="6208776" y="5245429"/>
-            <a:ext cx="310896" cy="261411"/>
+            <a:off x="6208776" y="4965730"/>
+            <a:ext cx="310896" cy="239896"/>
           </a:xfrm>
           <a:prstGeom prst="rect">
             <a:avLst/>
@@ -24171,8 +24289,8 @@
         </p:nvSpPr>
         <p:spPr>
           <a:xfrm>
-            <a:off x="6565392" y="5245429"/>
-            <a:ext cx="1920240" cy="261411"/>
+            <a:off x="6565392" y="4965730"/>
+            <a:ext cx="1920240" cy="239896"/>
           </a:xfrm>
           <a:prstGeom prst="rect">
             <a:avLst/>
@@ -24210,8 +24328,8 @@
         </p:nvSpPr>
         <p:spPr>
           <a:xfrm>
-            <a:off x="8558784" y="5310781"/>
-            <a:ext cx="414612" cy="130705"/>
+            <a:off x="8558784" y="5025704"/>
+            <a:ext cx="414612" cy="119948"/>
           </a:xfrm>
           <a:prstGeom prst="rect">
             <a:avLst/>
@@ -24230,8 +24348,8 @@
         </p:nvSpPr>
         <p:spPr>
           <a:xfrm>
-            <a:off x="10305288" y="5245429"/>
-            <a:ext cx="1143000" cy="261411"/>
+            <a:off x="10305288" y="4965730"/>
+            <a:ext cx="1143000" cy="239896"/>
           </a:xfrm>
           <a:prstGeom prst="rect">
             <a:avLst/>
@@ -24269,8 +24387,8 @@
         </p:nvSpPr>
         <p:spPr>
           <a:xfrm>
-            <a:off x="6208776" y="5506840"/>
-            <a:ext cx="310896" cy="261411"/>
+            <a:off x="6208776" y="5205625"/>
+            <a:ext cx="310896" cy="239896"/>
           </a:xfrm>
           <a:prstGeom prst="rect">
             <a:avLst/>
@@ -24308,8 +24426,8 @@
         </p:nvSpPr>
         <p:spPr>
           <a:xfrm>
-            <a:off x="6565392" y="5506840"/>
-            <a:ext cx="1920240" cy="261411"/>
+            <a:off x="6565392" y="5205625"/>
+            <a:ext cx="1920240" cy="239896"/>
           </a:xfrm>
           <a:prstGeom prst="rect">
             <a:avLst/>
@@ -24347,8 +24465,8 @@
         </p:nvSpPr>
         <p:spPr>
           <a:xfrm>
-            <a:off x="8558784" y="5572192"/>
-            <a:ext cx="351368" cy="130705"/>
+            <a:off x="8558784" y="5265599"/>
+            <a:ext cx="351368" cy="119948"/>
           </a:xfrm>
           <a:prstGeom prst="rect">
             <a:avLst/>
@@ -24367,8 +24485,8 @@
         </p:nvSpPr>
         <p:spPr>
           <a:xfrm>
-            <a:off x="10305288" y="5506840"/>
-            <a:ext cx="1143000" cy="261411"/>
+            <a:off x="10305288" y="5205625"/>
+            <a:ext cx="1143000" cy="239896"/>
           </a:xfrm>
           <a:prstGeom prst="rect">
             <a:avLst/>
@@ -24406,8 +24524,8 @@
         </p:nvSpPr>
         <p:spPr>
           <a:xfrm>
-            <a:off x="6208776" y="5768250"/>
-            <a:ext cx="310896" cy="261411"/>
+            <a:off x="6208776" y="5445521"/>
+            <a:ext cx="310896" cy="239896"/>
           </a:xfrm>
           <a:prstGeom prst="rect">
             <a:avLst/>
@@ -24445,8 +24563,8 @@
         </p:nvSpPr>
         <p:spPr>
           <a:xfrm>
-            <a:off x="6565392" y="5768250"/>
-            <a:ext cx="1920240" cy="261411"/>
+            <a:off x="6565392" y="5445521"/>
+            <a:ext cx="1920240" cy="239896"/>
           </a:xfrm>
           <a:prstGeom prst="rect">
             <a:avLst/>
@@ -24484,8 +24602,8 @@
         </p:nvSpPr>
         <p:spPr>
           <a:xfrm>
-            <a:off x="8558784" y="5833603"/>
-            <a:ext cx="298886" cy="130705"/>
+            <a:off x="8558784" y="5505495"/>
+            <a:ext cx="298886" cy="119948"/>
           </a:xfrm>
           <a:prstGeom prst="rect">
             <a:avLst/>
@@ -24504,8 +24622,8 @@
         </p:nvSpPr>
         <p:spPr>
           <a:xfrm>
-            <a:off x="10305288" y="5768250"/>
-            <a:ext cx="1143000" cy="261411"/>
+            <a:off x="10305288" y="5445521"/>
+            <a:ext cx="1143000" cy="239896"/>
           </a:xfrm>
           <a:prstGeom prst="rect">
             <a:avLst/>
@@ -24544,7 +24662,7 @@
         <p:spPr>
           <a:xfrm>
             <a:off x="4109587" y="1847088"/>
-            <a:ext cx="14630" cy="4443984"/>
+            <a:ext cx="14630" cy="4078224"/>
           </a:xfrm>
           <a:prstGeom prst="rect">
             <a:avLst/>
@@ -24564,7 +24682,7 @@
         <p:spPr>
           <a:xfrm>
             <a:off x="9659995" y="1847088"/>
-            <a:ext cx="14630" cy="4443984"/>
+            <a:ext cx="14630" cy="4078224"/>
           </a:xfrm>
           <a:prstGeom prst="rect">
             <a:avLst/>
@@ -24584,7 +24702,7 @@
         <p:spPr>
           <a:xfrm>
             <a:off x="6085332" y="1847088"/>
-            <a:ext cx="10973" cy="4443984"/>
+            <a:ext cx="10973" cy="4078224"/>
           </a:xfrm>
           <a:prstGeom prst="rect">
             <a:avLst/>
@@ -24594,6 +24712,65 @@
           </a:solidFill>
           <a:ln/>
         </p:spPr>
+      </p:sp>
+      <p:sp>
+        <p:nvSpPr>
+          <p:cNvPr id="147" name="Shape 144"/>
+          <p:cNvSpPr/>
+          <p:nvPr/>
+        </p:nvSpPr>
+        <p:spPr>
+          <a:xfrm>
+            <a:off x="457200" y="6126480"/>
+            <a:ext cx="11274552" cy="371856"/>
+          </a:xfrm>
+          <a:prstGeom prst="rect">
+            <a:avLst/>
+          </a:prstGeom>
+          <a:solidFill>
+            <a:srgbClr val="EDF4FA"/>
+          </a:solidFill>
+          <a:ln/>
+        </p:spPr>
+      </p:sp>
+      <p:sp>
+        <p:nvSpPr>
+          <p:cNvPr id="148" name="Text 145"/>
+          <p:cNvSpPr txBox="1"/>
+          <p:nvPr/>
+        </p:nvSpPr>
+        <p:spPr>
+          <a:xfrm>
+            <a:off x="658368" y="6144768"/>
+            <a:ext cx="10927080" cy="335280"/>
+          </a:xfrm>
+          <a:prstGeom prst="rect">
+            <a:avLst/>
+          </a:prstGeom>
+          <a:noFill/>
+          <a:ln/>
+        </p:spPr>
+        <p:txBody>
+          <a:bodyPr wrap="square" lIns="0" tIns="0" rIns="0" bIns="0" rtlCol="0" anchor="ctr"/>
+          <a:lstStyle/>
+          <a:p>
+            <a:pPr indent="0" marL="0">
+              <a:buNone/>
+            </a:pPr>
+            <a:r>
+              <a:rPr lang="en-US" sz="1600" b="1" dirty="0">
+                <a:solidFill>
+                  <a:srgbClr val="0B2C4A"/>
+                </a:solidFill>
+                <a:latin typeface="Inter" pitchFamily="34" charset="0"/>
+                <a:ea typeface="Inter" pitchFamily="34" charset="-122"/>
+                <a:cs typeface="Inter" pitchFamily="34" charset="-120"/>
+              </a:rPr>
+              <a:t>13 of 33 stores at or above the 36.5% group.</a:t>
+            </a:r>
+            <a:endParaRPr lang="en-US" sz="1600" dirty="0"/>
+          </a:p>
+        </p:txBody>
       </p:sp>
     </p:spTree>
   </p:cSld>
@@ -24734,7 +24911,7 @@
         <p:spPr>
           <a:xfrm>
             <a:off x="457200" y="1207008"/>
-            <a:ext cx="11274552" cy="5148072"/>
+            <a:ext cx="11274552" cy="4782312"/>
           </a:xfrm>
           <a:prstGeom prst="rect">
             <a:avLst/>
@@ -24911,7 +25088,7 @@
         <p:spPr>
           <a:xfrm>
             <a:off x="658368" y="1847088"/>
-            <a:ext cx="310896" cy="261411"/>
+            <a:ext cx="310896" cy="239896"/>
           </a:xfrm>
           <a:prstGeom prst="rect">
             <a:avLst/>
@@ -24950,7 +25127,7 @@
         <p:spPr>
           <a:xfrm>
             <a:off x="1014984" y="1847088"/>
-            <a:ext cx="1920240" cy="261411"/>
+            <a:ext cx="1920240" cy="239896"/>
           </a:xfrm>
           <a:prstGeom prst="rect">
             <a:avLst/>
@@ -24988,8 +25165,8 @@
         </p:nvSpPr>
         <p:spPr>
           <a:xfrm>
-            <a:off x="3785616" y="1917669"/>
-            <a:ext cx="777240" cy="120249"/>
+            <a:off x="3785616" y="1911860"/>
+            <a:ext cx="777240" cy="110352"/>
           </a:xfrm>
           <a:prstGeom prst="rect">
             <a:avLst/>
@@ -25009,7 +25186,7 @@
         <p:spPr>
           <a:xfrm>
             <a:off x="4617720" y="1847088"/>
-            <a:ext cx="1234440" cy="261411"/>
+            <a:ext cx="1234440" cy="239896"/>
           </a:xfrm>
           <a:prstGeom prst="rect">
             <a:avLst/>
@@ -25047,8 +25224,8 @@
         </p:nvSpPr>
         <p:spPr>
           <a:xfrm>
-            <a:off x="658368" y="2108499"/>
-            <a:ext cx="310896" cy="261411"/>
+            <a:off x="658368" y="2086984"/>
+            <a:ext cx="310896" cy="239896"/>
           </a:xfrm>
           <a:prstGeom prst="rect">
             <a:avLst/>
@@ -25086,8 +25263,8 @@
         </p:nvSpPr>
         <p:spPr>
           <a:xfrm>
-            <a:off x="1014984" y="2108499"/>
-            <a:ext cx="1920240" cy="261411"/>
+            <a:off x="1014984" y="2086984"/>
+            <a:ext cx="1920240" cy="239896"/>
           </a:xfrm>
           <a:prstGeom prst="rect">
             <a:avLst/>
@@ -25125,8 +25302,8 @@
         </p:nvSpPr>
         <p:spPr>
           <a:xfrm>
-            <a:off x="3785616" y="2179080"/>
-            <a:ext cx="746935" cy="120249"/>
+            <a:off x="3785616" y="2151755"/>
+            <a:ext cx="746935" cy="110352"/>
           </a:xfrm>
           <a:prstGeom prst="rect">
             <a:avLst/>
@@ -25145,8 +25322,8 @@
         </p:nvSpPr>
         <p:spPr>
           <a:xfrm>
-            <a:off x="4617720" y="2108499"/>
-            <a:ext cx="1234440" cy="261411"/>
+            <a:off x="4617720" y="2086984"/>
+            <a:ext cx="1234440" cy="239896"/>
           </a:xfrm>
           <a:prstGeom prst="rect">
             <a:avLst/>
@@ -25184,8 +25361,8 @@
         </p:nvSpPr>
         <p:spPr>
           <a:xfrm>
-            <a:off x="658368" y="2369910"/>
-            <a:ext cx="310896" cy="261411"/>
+            <a:off x="658368" y="2326879"/>
+            <a:ext cx="310896" cy="239896"/>
           </a:xfrm>
           <a:prstGeom prst="rect">
             <a:avLst/>
@@ -25223,8 +25400,8 @@
         </p:nvSpPr>
         <p:spPr>
           <a:xfrm>
-            <a:off x="1014984" y="2369910"/>
-            <a:ext cx="1920240" cy="261411"/>
+            <a:off x="1014984" y="2326879"/>
+            <a:ext cx="1920240" cy="239896"/>
           </a:xfrm>
           <a:prstGeom prst="rect">
             <a:avLst/>
@@ -25262,8 +25439,8 @@
         </p:nvSpPr>
         <p:spPr>
           <a:xfrm>
-            <a:off x="3785616" y="2440491"/>
-            <a:ext cx="544841" cy="120249"/>
+            <a:off x="3785616" y="2391651"/>
+            <a:ext cx="544841" cy="110352"/>
           </a:xfrm>
           <a:prstGeom prst="rect">
             <a:avLst/>
@@ -25282,8 +25459,8 @@
         </p:nvSpPr>
         <p:spPr>
           <a:xfrm>
-            <a:off x="4617720" y="2369910"/>
-            <a:ext cx="1234440" cy="261411"/>
+            <a:off x="4617720" y="2326879"/>
+            <a:ext cx="1234440" cy="239896"/>
           </a:xfrm>
           <a:prstGeom prst="rect">
             <a:avLst/>
@@ -25321,8 +25498,8 @@
         </p:nvSpPr>
         <p:spPr>
           <a:xfrm>
-            <a:off x="658368" y="2631320"/>
-            <a:ext cx="310896" cy="261411"/>
+            <a:off x="658368" y="2566775"/>
+            <a:ext cx="310896" cy="239896"/>
           </a:xfrm>
           <a:prstGeom prst="rect">
             <a:avLst/>
@@ -25360,8 +25537,8 @@
         </p:nvSpPr>
         <p:spPr>
           <a:xfrm>
-            <a:off x="1014984" y="2631320"/>
-            <a:ext cx="1920240" cy="261411"/>
+            <a:off x="1014984" y="2566775"/>
+            <a:ext cx="1920240" cy="239896"/>
           </a:xfrm>
           <a:prstGeom prst="rect">
             <a:avLst/>
@@ -25399,8 +25576,8 @@
         </p:nvSpPr>
         <p:spPr>
           <a:xfrm>
-            <a:off x="3785616" y="2701901"/>
-            <a:ext cx="411845" cy="120249"/>
+            <a:off x="3785616" y="2631546"/>
+            <a:ext cx="411845" cy="110352"/>
           </a:xfrm>
           <a:prstGeom prst="rect">
             <a:avLst/>
@@ -25419,8 +25596,8 @@
         </p:nvSpPr>
         <p:spPr>
           <a:xfrm>
-            <a:off x="4617720" y="2631320"/>
-            <a:ext cx="1234440" cy="261411"/>
+            <a:off x="4617720" y="2566775"/>
+            <a:ext cx="1234440" cy="239896"/>
           </a:xfrm>
           <a:prstGeom prst="rect">
             <a:avLst/>
@@ -25458,8 +25635,8 @@
         </p:nvSpPr>
         <p:spPr>
           <a:xfrm>
-            <a:off x="658368" y="2892731"/>
-            <a:ext cx="310896" cy="261411"/>
+            <a:off x="658368" y="2806670"/>
+            <a:ext cx="310896" cy="239896"/>
           </a:xfrm>
           <a:prstGeom prst="rect">
             <a:avLst/>
@@ -25497,8 +25674,8 @@
         </p:nvSpPr>
         <p:spPr>
           <a:xfrm>
-            <a:off x="1014984" y="2892731"/>
-            <a:ext cx="1920240" cy="261411"/>
+            <a:off x="1014984" y="2806670"/>
+            <a:ext cx="1920240" cy="239896"/>
           </a:xfrm>
           <a:prstGeom prst="rect">
             <a:avLst/>
@@ -25536,8 +25713,8 @@
         </p:nvSpPr>
         <p:spPr>
           <a:xfrm>
-            <a:off x="3785616" y="2963312"/>
-            <a:ext cx="410069" cy="120249"/>
+            <a:off x="3785616" y="2871442"/>
+            <a:ext cx="410069" cy="110352"/>
           </a:xfrm>
           <a:prstGeom prst="rect">
             <a:avLst/>
@@ -25556,8 +25733,8 @@
         </p:nvSpPr>
         <p:spPr>
           <a:xfrm>
-            <a:off x="4617720" y="2892731"/>
-            <a:ext cx="1234440" cy="261411"/>
+            <a:off x="4617720" y="2806670"/>
+            <a:ext cx="1234440" cy="239896"/>
           </a:xfrm>
           <a:prstGeom prst="rect">
             <a:avLst/>
@@ -25595,8 +25772,8 @@
         </p:nvSpPr>
         <p:spPr>
           <a:xfrm>
-            <a:off x="658368" y="3154142"/>
-            <a:ext cx="310896" cy="261411"/>
+            <a:off x="658368" y="3046566"/>
+            <a:ext cx="310896" cy="239896"/>
           </a:xfrm>
           <a:prstGeom prst="rect">
             <a:avLst/>
@@ -25634,8 +25811,8 @@
         </p:nvSpPr>
         <p:spPr>
           <a:xfrm>
-            <a:off x="1014984" y="3154142"/>
-            <a:ext cx="1920240" cy="261411"/>
+            <a:off x="1014984" y="3046566"/>
+            <a:ext cx="1920240" cy="239896"/>
           </a:xfrm>
           <a:prstGeom prst="rect">
             <a:avLst/>
@@ -25673,8 +25850,8 @@
         </p:nvSpPr>
         <p:spPr>
           <a:xfrm>
-            <a:off x="3785616" y="3224723"/>
-            <a:ext cx="366175" cy="120249"/>
+            <a:off x="3785616" y="3111337"/>
+            <a:ext cx="366175" cy="110352"/>
           </a:xfrm>
           <a:prstGeom prst="rect">
             <a:avLst/>
@@ -25693,8 +25870,8 @@
         </p:nvSpPr>
         <p:spPr>
           <a:xfrm>
-            <a:off x="4617720" y="3154142"/>
-            <a:ext cx="1234440" cy="261411"/>
+            <a:off x="4617720" y="3046566"/>
+            <a:ext cx="1234440" cy="239896"/>
           </a:xfrm>
           <a:prstGeom prst="rect">
             <a:avLst/>
@@ -25732,8 +25909,8 @@
         </p:nvSpPr>
         <p:spPr>
           <a:xfrm>
-            <a:off x="658368" y="3415553"/>
-            <a:ext cx="310896" cy="261411"/>
+            <a:off x="658368" y="3286461"/>
+            <a:ext cx="310896" cy="239896"/>
           </a:xfrm>
           <a:prstGeom prst="rect">
             <a:avLst/>
@@ -25771,8 +25948,8 @@
         </p:nvSpPr>
         <p:spPr>
           <a:xfrm>
-            <a:off x="1014984" y="3415553"/>
-            <a:ext cx="1920240" cy="261411"/>
+            <a:off x="1014984" y="3286461"/>
+            <a:ext cx="1920240" cy="239896"/>
           </a:xfrm>
           <a:prstGeom prst="rect">
             <a:avLst/>
@@ -25810,8 +25987,8 @@
         </p:nvSpPr>
         <p:spPr>
           <a:xfrm>
-            <a:off x="3785616" y="3486134"/>
-            <a:ext cx="321691" cy="120249"/>
+            <a:off x="3785616" y="3351233"/>
+            <a:ext cx="321691" cy="110352"/>
           </a:xfrm>
           <a:prstGeom prst="rect">
             <a:avLst/>
@@ -25830,8 +26007,8 @@
         </p:nvSpPr>
         <p:spPr>
           <a:xfrm>
-            <a:off x="4617720" y="3415553"/>
-            <a:ext cx="1234440" cy="261411"/>
+            <a:off x="4617720" y="3286461"/>
+            <a:ext cx="1234440" cy="239896"/>
           </a:xfrm>
           <a:prstGeom prst="rect">
             <a:avLst/>
@@ -25869,8 +26046,8 @@
         </p:nvSpPr>
         <p:spPr>
           <a:xfrm>
-            <a:off x="658368" y="3676964"/>
-            <a:ext cx="310896" cy="261411"/>
+            <a:off x="658368" y="3526357"/>
+            <a:ext cx="310896" cy="239896"/>
           </a:xfrm>
           <a:prstGeom prst="rect">
             <a:avLst/>
@@ -25908,8 +26085,8 @@
         </p:nvSpPr>
         <p:spPr>
           <a:xfrm>
-            <a:off x="1014984" y="3676964"/>
-            <a:ext cx="1920240" cy="261411"/>
+            <a:off x="1014984" y="3526357"/>
+            <a:ext cx="1920240" cy="239896"/>
           </a:xfrm>
           <a:prstGeom prst="rect">
             <a:avLst/>
@@ -25947,8 +26124,8 @@
         </p:nvSpPr>
         <p:spPr>
           <a:xfrm>
-            <a:off x="3785616" y="3747545"/>
-            <a:ext cx="314225" cy="120249"/>
+            <a:off x="3785616" y="3591128"/>
+            <a:ext cx="314225" cy="110352"/>
           </a:xfrm>
           <a:prstGeom prst="rect">
             <a:avLst/>
@@ -25967,8 +26144,8 @@
         </p:nvSpPr>
         <p:spPr>
           <a:xfrm>
-            <a:off x="4617720" y="3676964"/>
-            <a:ext cx="1234440" cy="261411"/>
+            <a:off x="4617720" y="3526357"/>
+            <a:ext cx="1234440" cy="239896"/>
           </a:xfrm>
           <a:prstGeom prst="rect">
             <a:avLst/>
@@ -26006,8 +26183,8 @@
         </p:nvSpPr>
         <p:spPr>
           <a:xfrm>
-            <a:off x="658368" y="3938375"/>
-            <a:ext cx="310896" cy="261411"/>
+            <a:off x="658368" y="3766252"/>
+            <a:ext cx="310896" cy="239896"/>
           </a:xfrm>
           <a:prstGeom prst="rect">
             <a:avLst/>
@@ -26045,8 +26222,8 @@
         </p:nvSpPr>
         <p:spPr>
           <a:xfrm>
-            <a:off x="1014984" y="3938375"/>
-            <a:ext cx="1920240" cy="261411"/>
+            <a:off x="1014984" y="3766252"/>
+            <a:ext cx="1920240" cy="239896"/>
           </a:xfrm>
           <a:prstGeom prst="rect">
             <a:avLst/>
@@ -26084,8 +26261,8 @@
         </p:nvSpPr>
         <p:spPr>
           <a:xfrm>
-            <a:off x="3785616" y="4008956"/>
-            <a:ext cx="301280" cy="120249"/>
+            <a:off x="3785616" y="3831024"/>
+            <a:ext cx="301280" cy="110352"/>
           </a:xfrm>
           <a:prstGeom prst="rect">
             <a:avLst/>
@@ -26104,8 +26281,8 @@
         </p:nvSpPr>
         <p:spPr>
           <a:xfrm>
-            <a:off x="4617720" y="3938375"/>
-            <a:ext cx="1234440" cy="261411"/>
+            <a:off x="4617720" y="3766252"/>
+            <a:ext cx="1234440" cy="239896"/>
           </a:xfrm>
           <a:prstGeom prst="rect">
             <a:avLst/>
@@ -26143,8 +26320,8 @@
         </p:nvSpPr>
         <p:spPr>
           <a:xfrm>
-            <a:off x="658368" y="4199785"/>
-            <a:ext cx="310896" cy="261411"/>
+            <a:off x="658368" y="4006148"/>
+            <a:ext cx="310896" cy="239896"/>
           </a:xfrm>
           <a:prstGeom prst="rect">
             <a:avLst/>
@@ -26182,8 +26359,8 @@
         </p:nvSpPr>
         <p:spPr>
           <a:xfrm>
-            <a:off x="1014984" y="4199785"/>
-            <a:ext cx="1920240" cy="261411"/>
+            <a:off x="1014984" y="4006148"/>
+            <a:ext cx="1920240" cy="239896"/>
           </a:xfrm>
           <a:prstGeom prst="rect">
             <a:avLst/>
@@ -26221,8 +26398,8 @@
         </p:nvSpPr>
         <p:spPr>
           <a:xfrm>
-            <a:off x="3785616" y="4270366"/>
-            <a:ext cx="260605" cy="120249"/>
+            <a:off x="3785616" y="4070920"/>
+            <a:ext cx="260605" cy="110352"/>
           </a:xfrm>
           <a:prstGeom prst="rect">
             <a:avLst/>
@@ -26241,8 +26418,8 @@
         </p:nvSpPr>
         <p:spPr>
           <a:xfrm>
-            <a:off x="4617720" y="4199785"/>
-            <a:ext cx="1234440" cy="261411"/>
+            <a:off x="4617720" y="4006148"/>
+            <a:ext cx="1234440" cy="239896"/>
           </a:xfrm>
           <a:prstGeom prst="rect">
             <a:avLst/>
@@ -26280,8 +26457,8 @@
         </p:nvSpPr>
         <p:spPr>
           <a:xfrm>
-            <a:off x="658368" y="4461196"/>
-            <a:ext cx="310896" cy="261411"/>
+            <a:off x="658368" y="4246043"/>
+            <a:ext cx="310896" cy="239896"/>
           </a:xfrm>
           <a:prstGeom prst="rect">
             <a:avLst/>
@@ -26319,8 +26496,8 @@
         </p:nvSpPr>
         <p:spPr>
           <a:xfrm>
-            <a:off x="1014984" y="4461196"/>
-            <a:ext cx="1920240" cy="261411"/>
+            <a:off x="1014984" y="4246043"/>
+            <a:ext cx="1920240" cy="239896"/>
           </a:xfrm>
           <a:prstGeom prst="rect">
             <a:avLst/>
@@ -26358,8 +26535,8 @@
         </p:nvSpPr>
         <p:spPr>
           <a:xfrm>
-            <a:off x="3785616" y="4531777"/>
-            <a:ext cx="253666" cy="120249"/>
+            <a:off x="3785616" y="4310815"/>
+            <a:ext cx="253666" cy="110352"/>
           </a:xfrm>
           <a:prstGeom prst="rect">
             <a:avLst/>
@@ -26378,8 +26555,8 @@
         </p:nvSpPr>
         <p:spPr>
           <a:xfrm>
-            <a:off x="4617720" y="4461196"/>
-            <a:ext cx="1234440" cy="261411"/>
+            <a:off x="4617720" y="4246043"/>
+            <a:ext cx="1234440" cy="239896"/>
           </a:xfrm>
           <a:prstGeom prst="rect">
             <a:avLst/>
@@ -26417,8 +26594,8 @@
         </p:nvSpPr>
         <p:spPr>
           <a:xfrm>
-            <a:off x="658368" y="4722607"/>
-            <a:ext cx="310896" cy="261411"/>
+            <a:off x="658368" y="4485939"/>
+            <a:ext cx="310896" cy="239896"/>
           </a:xfrm>
           <a:prstGeom prst="rect">
             <a:avLst/>
@@ -26456,8 +26633,8 @@
         </p:nvSpPr>
         <p:spPr>
           <a:xfrm>
-            <a:off x="1014984" y="4722607"/>
-            <a:ext cx="1920240" cy="261411"/>
+            <a:off x="1014984" y="4485939"/>
+            <a:ext cx="1920240" cy="239896"/>
           </a:xfrm>
           <a:prstGeom prst="rect">
             <a:avLst/>
@@ -26495,8 +26672,8 @@
         </p:nvSpPr>
         <p:spPr>
           <a:xfrm>
-            <a:off x="3785616" y="4793188"/>
-            <a:ext cx="211088" cy="120249"/>
+            <a:off x="3785616" y="4550711"/>
+            <a:ext cx="211088" cy="110352"/>
           </a:xfrm>
           <a:prstGeom prst="rect">
             <a:avLst/>
@@ -26515,8 +26692,8 @@
         </p:nvSpPr>
         <p:spPr>
           <a:xfrm>
-            <a:off x="4617720" y="4722607"/>
-            <a:ext cx="1234440" cy="261411"/>
+            <a:off x="4617720" y="4485939"/>
+            <a:ext cx="1234440" cy="239896"/>
           </a:xfrm>
           <a:prstGeom prst="rect">
             <a:avLst/>
@@ -26554,8 +26731,8 @@
         </p:nvSpPr>
         <p:spPr>
           <a:xfrm>
-            <a:off x="658368" y="4984018"/>
-            <a:ext cx="310896" cy="261411"/>
+            <a:off x="658368" y="4725834"/>
+            <a:ext cx="310896" cy="239896"/>
           </a:xfrm>
           <a:prstGeom prst="rect">
             <a:avLst/>
@@ -26593,8 +26770,8 @@
         </p:nvSpPr>
         <p:spPr>
           <a:xfrm>
-            <a:off x="1014984" y="4984018"/>
-            <a:ext cx="1920240" cy="261411"/>
+            <a:off x="1014984" y="4725834"/>
+            <a:ext cx="1920240" cy="239896"/>
           </a:xfrm>
           <a:prstGeom prst="rect">
             <a:avLst/>
@@ -26632,8 +26809,8 @@
         </p:nvSpPr>
         <p:spPr>
           <a:xfrm>
-            <a:off x="3785616" y="5054599"/>
-            <a:ext cx="192231" cy="120249"/>
+            <a:off x="3785616" y="4790606"/>
+            <a:ext cx="192231" cy="110352"/>
           </a:xfrm>
           <a:prstGeom prst="rect">
             <a:avLst/>
@@ -26652,8 +26829,8 @@
         </p:nvSpPr>
         <p:spPr>
           <a:xfrm>
-            <a:off x="4617720" y="4984018"/>
-            <a:ext cx="1234440" cy="261411"/>
+            <a:off x="4617720" y="4725834"/>
+            <a:ext cx="1234440" cy="239896"/>
           </a:xfrm>
           <a:prstGeom prst="rect">
             <a:avLst/>
@@ -26691,8 +26868,8 @@
         </p:nvSpPr>
         <p:spPr>
           <a:xfrm>
-            <a:off x="658368" y="5245429"/>
-            <a:ext cx="310896" cy="261411"/>
+            <a:off x="658368" y="4965730"/>
+            <a:ext cx="310896" cy="239896"/>
           </a:xfrm>
           <a:prstGeom prst="rect">
             <a:avLst/>
@@ -26730,8 +26907,8 @@
         </p:nvSpPr>
         <p:spPr>
           <a:xfrm>
-            <a:off x="1014984" y="5245429"/>
-            <a:ext cx="1920240" cy="261411"/>
+            <a:off x="1014984" y="4965730"/>
+            <a:ext cx="1920240" cy="239896"/>
           </a:xfrm>
           <a:prstGeom prst="rect">
             <a:avLst/>
@@ -26769,8 +26946,8 @@
         </p:nvSpPr>
         <p:spPr>
           <a:xfrm>
-            <a:off x="3785616" y="5316010"/>
-            <a:ext cx="190854" cy="120249"/>
+            <a:off x="3785616" y="5030502"/>
+            <a:ext cx="190854" cy="110352"/>
           </a:xfrm>
           <a:prstGeom prst="rect">
             <a:avLst/>
@@ -26789,8 +26966,8 @@
         </p:nvSpPr>
         <p:spPr>
           <a:xfrm>
-            <a:off x="4617720" y="5245429"/>
-            <a:ext cx="1234440" cy="261411"/>
+            <a:off x="4617720" y="4965730"/>
+            <a:ext cx="1234440" cy="239896"/>
           </a:xfrm>
           <a:prstGeom prst="rect">
             <a:avLst/>
@@ -26828,8 +27005,8 @@
         </p:nvSpPr>
         <p:spPr>
           <a:xfrm>
-            <a:off x="658368" y="5506840"/>
-            <a:ext cx="310896" cy="261411"/>
+            <a:off x="658368" y="5205625"/>
+            <a:ext cx="310896" cy="239896"/>
           </a:xfrm>
           <a:prstGeom prst="rect">
             <a:avLst/>
@@ -26867,8 +27044,8 @@
         </p:nvSpPr>
         <p:spPr>
           <a:xfrm>
-            <a:off x="1014984" y="5506840"/>
-            <a:ext cx="1920240" cy="261411"/>
+            <a:off x="1014984" y="5205625"/>
+            <a:ext cx="1920240" cy="239896"/>
           </a:xfrm>
           <a:prstGeom prst="rect">
             <a:avLst/>
@@ -26906,8 +27083,8 @@
         </p:nvSpPr>
         <p:spPr>
           <a:xfrm>
-            <a:off x="3785616" y="5577420"/>
-            <a:ext cx="190842" cy="120249"/>
+            <a:off x="3785616" y="5270397"/>
+            <a:ext cx="190842" cy="110352"/>
           </a:xfrm>
           <a:prstGeom prst="rect">
             <a:avLst/>
@@ -26926,8 +27103,8 @@
         </p:nvSpPr>
         <p:spPr>
           <a:xfrm>
-            <a:off x="4617720" y="5506840"/>
-            <a:ext cx="1234440" cy="261411"/>
+            <a:off x="4617720" y="5205625"/>
+            <a:ext cx="1234440" cy="239896"/>
           </a:xfrm>
           <a:prstGeom prst="rect">
             <a:avLst/>
@@ -26965,8 +27142,8 @@
         </p:nvSpPr>
         <p:spPr>
           <a:xfrm>
-            <a:off x="658368" y="5768250"/>
-            <a:ext cx="310896" cy="261411"/>
+            <a:off x="658368" y="5445521"/>
+            <a:ext cx="310896" cy="239896"/>
           </a:xfrm>
           <a:prstGeom prst="rect">
             <a:avLst/>
@@ -27004,8 +27181,8 @@
         </p:nvSpPr>
         <p:spPr>
           <a:xfrm>
-            <a:off x="1014984" y="5768250"/>
-            <a:ext cx="1920240" cy="261411"/>
+            <a:off x="1014984" y="5445521"/>
+            <a:ext cx="1920240" cy="239896"/>
           </a:xfrm>
           <a:prstGeom prst="rect">
             <a:avLst/>
@@ -27043,8 +27220,8 @@
         </p:nvSpPr>
         <p:spPr>
           <a:xfrm>
-            <a:off x="3785616" y="5838831"/>
-            <a:ext cx="158978" cy="120249"/>
+            <a:off x="3785616" y="5510293"/>
+            <a:ext cx="158978" cy="110352"/>
           </a:xfrm>
           <a:prstGeom prst="rect">
             <a:avLst/>
@@ -27063,8 +27240,8 @@
         </p:nvSpPr>
         <p:spPr>
           <a:xfrm>
-            <a:off x="4617720" y="5768250"/>
-            <a:ext cx="1234440" cy="261411"/>
+            <a:off x="4617720" y="5445521"/>
+            <a:ext cx="1234440" cy="239896"/>
           </a:xfrm>
           <a:prstGeom prst="rect">
             <a:avLst/>
@@ -27102,8 +27279,8 @@
         </p:nvSpPr>
         <p:spPr>
           <a:xfrm>
-            <a:off x="658368" y="6029661"/>
-            <a:ext cx="310896" cy="261411"/>
+            <a:off x="658368" y="5685416"/>
+            <a:ext cx="310896" cy="239896"/>
           </a:xfrm>
           <a:prstGeom prst="rect">
             <a:avLst/>
@@ -27141,8 +27318,8 @@
         </p:nvSpPr>
         <p:spPr>
           <a:xfrm>
-            <a:off x="1014984" y="6029661"/>
-            <a:ext cx="1920240" cy="261411"/>
+            <a:off x="1014984" y="5685416"/>
+            <a:ext cx="1920240" cy="239896"/>
           </a:xfrm>
           <a:prstGeom prst="rect">
             <a:avLst/>
@@ -27180,8 +27357,8 @@
         </p:nvSpPr>
         <p:spPr>
           <a:xfrm>
-            <a:off x="3785616" y="6100242"/>
-            <a:ext cx="145538" cy="120249"/>
+            <a:off x="3785616" y="5750188"/>
+            <a:ext cx="145538" cy="110352"/>
           </a:xfrm>
           <a:prstGeom prst="rect">
             <a:avLst/>
@@ -27200,8 +27377,8 @@
         </p:nvSpPr>
         <p:spPr>
           <a:xfrm>
-            <a:off x="4617720" y="6029661"/>
-            <a:ext cx="1234440" cy="261411"/>
+            <a:off x="4617720" y="5685416"/>
+            <a:ext cx="1234440" cy="239896"/>
           </a:xfrm>
           <a:prstGeom prst="rect">
             <a:avLst/>
@@ -27240,7 +27417,7 @@
         <p:spPr>
           <a:xfrm>
             <a:off x="6208776" y="1847088"/>
-            <a:ext cx="310896" cy="261411"/>
+            <a:ext cx="310896" cy="239896"/>
           </a:xfrm>
           <a:prstGeom prst="rect">
             <a:avLst/>
@@ -27279,7 +27456,7 @@
         <p:spPr>
           <a:xfrm>
             <a:off x="6565392" y="1847088"/>
-            <a:ext cx="1920240" cy="261411"/>
+            <a:ext cx="1920240" cy="239896"/>
           </a:xfrm>
           <a:prstGeom prst="rect">
             <a:avLst/>
@@ -27317,8 +27494,8 @@
         </p:nvSpPr>
         <p:spPr>
           <a:xfrm>
-            <a:off x="9336024" y="1917669"/>
-            <a:ext cx="118014" cy="120249"/>
+            <a:off x="9336024" y="1911860"/>
+            <a:ext cx="118014" cy="110352"/>
           </a:xfrm>
           <a:prstGeom prst="rect">
             <a:avLst/>
@@ -27338,7 +27515,7 @@
         <p:spPr>
           <a:xfrm>
             <a:off x="10168128" y="1847088"/>
-            <a:ext cx="1234440" cy="261411"/>
+            <a:ext cx="1234440" cy="239896"/>
           </a:xfrm>
           <a:prstGeom prst="rect">
             <a:avLst/>
@@ -27376,8 +27553,8 @@
         </p:nvSpPr>
         <p:spPr>
           <a:xfrm>
-            <a:off x="6208776" y="2108499"/>
-            <a:ext cx="310896" cy="261411"/>
+            <a:off x="6208776" y="2086984"/>
+            <a:ext cx="310896" cy="239896"/>
           </a:xfrm>
           <a:prstGeom prst="rect">
             <a:avLst/>
@@ -27415,8 +27592,8 @@
         </p:nvSpPr>
         <p:spPr>
           <a:xfrm>
-            <a:off x="6565392" y="2108499"/>
-            <a:ext cx="1920240" cy="261411"/>
+            <a:off x="6565392" y="2086984"/>
+            <a:ext cx="1920240" cy="239896"/>
           </a:xfrm>
           <a:prstGeom prst="rect">
             <a:avLst/>
@@ -27454,8 +27631,8 @@
         </p:nvSpPr>
         <p:spPr>
           <a:xfrm>
-            <a:off x="9336024" y="2179080"/>
-            <a:ext cx="112861" cy="120249"/>
+            <a:off x="9336024" y="2151755"/>
+            <a:ext cx="112861" cy="110352"/>
           </a:xfrm>
           <a:prstGeom prst="rect">
             <a:avLst/>
@@ -27474,8 +27651,8 @@
         </p:nvSpPr>
         <p:spPr>
           <a:xfrm>
-            <a:off x="10168128" y="2108499"/>
-            <a:ext cx="1234440" cy="261411"/>
+            <a:off x="10168128" y="2086984"/>
+            <a:ext cx="1234440" cy="239896"/>
           </a:xfrm>
           <a:prstGeom prst="rect">
             <a:avLst/>
@@ -27513,8 +27690,8 @@
         </p:nvSpPr>
         <p:spPr>
           <a:xfrm>
-            <a:off x="6208776" y="2369910"/>
-            <a:ext cx="310896" cy="261411"/>
+            <a:off x="6208776" y="2326879"/>
+            <a:ext cx="310896" cy="239896"/>
           </a:xfrm>
           <a:prstGeom prst="rect">
             <a:avLst/>
@@ -27552,8 +27729,8 @@
         </p:nvSpPr>
         <p:spPr>
           <a:xfrm>
-            <a:off x="6565392" y="2369910"/>
-            <a:ext cx="1920240" cy="261411"/>
+            <a:off x="6565392" y="2326879"/>
+            <a:ext cx="1920240" cy="239896"/>
           </a:xfrm>
           <a:prstGeom prst="rect">
             <a:avLst/>
@@ -27591,8 +27768,8 @@
         </p:nvSpPr>
         <p:spPr>
           <a:xfrm>
-            <a:off x="9336024" y="2440491"/>
-            <a:ext cx="51131" cy="120249"/>
+            <a:off x="9336024" y="2391651"/>
+            <a:ext cx="51131" cy="110352"/>
           </a:xfrm>
           <a:prstGeom prst="rect">
             <a:avLst/>
@@ -27611,8 +27788,8 @@
         </p:nvSpPr>
         <p:spPr>
           <a:xfrm>
-            <a:off x="10168128" y="2369910"/>
-            <a:ext cx="1234440" cy="261411"/>
+            <a:off x="10168128" y="2326879"/>
+            <a:ext cx="1234440" cy="239896"/>
           </a:xfrm>
           <a:prstGeom prst="rect">
             <a:avLst/>
@@ -27650,8 +27827,8 @@
         </p:nvSpPr>
         <p:spPr>
           <a:xfrm>
-            <a:off x="6208776" y="2631320"/>
-            <a:ext cx="310896" cy="261411"/>
+            <a:off x="6208776" y="2566775"/>
+            <a:ext cx="310896" cy="239896"/>
           </a:xfrm>
           <a:prstGeom prst="rect">
             <a:avLst/>
@@ -27689,8 +27866,8 @@
         </p:nvSpPr>
         <p:spPr>
           <a:xfrm>
-            <a:off x="6565392" y="2631320"/>
-            <a:ext cx="1920240" cy="261411"/>
+            <a:off x="6565392" y="2566775"/>
+            <a:ext cx="1920240" cy="239896"/>
           </a:xfrm>
           <a:prstGeom prst="rect">
             <a:avLst/>
@@ -27728,8 +27905,8 @@
         </p:nvSpPr>
         <p:spPr>
           <a:xfrm>
-            <a:off x="9336024" y="2701901"/>
-            <a:ext cx="42573" cy="120249"/>
+            <a:off x="9336024" y="2631546"/>
+            <a:ext cx="42573" cy="110352"/>
           </a:xfrm>
           <a:prstGeom prst="rect">
             <a:avLst/>
@@ -27748,8 +27925,8 @@
         </p:nvSpPr>
         <p:spPr>
           <a:xfrm>
-            <a:off x="10168128" y="2631320"/>
-            <a:ext cx="1234440" cy="261411"/>
+            <a:off x="10168128" y="2566775"/>
+            <a:ext cx="1234440" cy="239896"/>
           </a:xfrm>
           <a:prstGeom prst="rect">
             <a:avLst/>
@@ -27787,8 +27964,8 @@
         </p:nvSpPr>
         <p:spPr>
           <a:xfrm>
-            <a:off x="6208776" y="2892731"/>
-            <a:ext cx="310896" cy="261411"/>
+            <a:off x="6208776" y="2806670"/>
+            <a:ext cx="310896" cy="239896"/>
           </a:xfrm>
           <a:prstGeom prst="rect">
             <a:avLst/>
@@ -27826,8 +28003,8 @@
         </p:nvSpPr>
         <p:spPr>
           <a:xfrm>
-            <a:off x="6565392" y="2892731"/>
-            <a:ext cx="1920240" cy="261411"/>
+            <a:off x="6565392" y="2806670"/>
+            <a:ext cx="1920240" cy="239896"/>
           </a:xfrm>
           <a:prstGeom prst="rect">
             <a:avLst/>
@@ -27865,8 +28042,8 @@
         </p:nvSpPr>
         <p:spPr>
           <a:xfrm>
-            <a:off x="9306469" y="2963312"/>
-            <a:ext cx="29555" cy="120249"/>
+            <a:off x="9306469" y="2871442"/>
+            <a:ext cx="29555" cy="110352"/>
           </a:xfrm>
           <a:prstGeom prst="rect">
             <a:avLst/>
@@ -27885,8 +28062,8 @@
         </p:nvSpPr>
         <p:spPr>
           <a:xfrm>
-            <a:off x="10168128" y="2892731"/>
-            <a:ext cx="1234440" cy="261411"/>
+            <a:off x="10168128" y="2806670"/>
+            <a:ext cx="1234440" cy="239896"/>
           </a:xfrm>
           <a:prstGeom prst="rect">
             <a:avLst/>
@@ -27924,8 +28101,8 @@
         </p:nvSpPr>
         <p:spPr>
           <a:xfrm>
-            <a:off x="6208776" y="3154142"/>
-            <a:ext cx="310896" cy="261411"/>
+            <a:off x="6208776" y="3046566"/>
+            <a:ext cx="310896" cy="239896"/>
           </a:xfrm>
           <a:prstGeom prst="rect">
             <a:avLst/>
@@ -27963,8 +28140,8 @@
         </p:nvSpPr>
         <p:spPr>
           <a:xfrm>
-            <a:off x="6565392" y="3154142"/>
-            <a:ext cx="1920240" cy="261411"/>
+            <a:off x="6565392" y="3046566"/>
+            <a:ext cx="1920240" cy="239896"/>
           </a:xfrm>
           <a:prstGeom prst="rect">
             <a:avLst/>
@@ -28002,8 +28179,8 @@
         </p:nvSpPr>
         <p:spPr>
           <a:xfrm>
-            <a:off x="9293325" y="3224723"/>
-            <a:ext cx="42699" cy="120249"/>
+            <a:off x="9293325" y="3111337"/>
+            <a:ext cx="42699" cy="110352"/>
           </a:xfrm>
           <a:prstGeom prst="rect">
             <a:avLst/>
@@ -28022,8 +28199,8 @@
         </p:nvSpPr>
         <p:spPr>
           <a:xfrm>
-            <a:off x="10168128" y="3154142"/>
-            <a:ext cx="1234440" cy="261411"/>
+            <a:off x="10168128" y="3046566"/>
+            <a:ext cx="1234440" cy="239896"/>
           </a:xfrm>
           <a:prstGeom prst="rect">
             <a:avLst/>
@@ -28061,8 +28238,8 @@
         </p:nvSpPr>
         <p:spPr>
           <a:xfrm>
-            <a:off x="6208776" y="3415553"/>
-            <a:ext cx="310896" cy="261411"/>
+            <a:off x="6208776" y="3286461"/>
+            <a:ext cx="310896" cy="239896"/>
           </a:xfrm>
           <a:prstGeom prst="rect">
             <a:avLst/>
@@ -28100,8 +28277,8 @@
         </p:nvSpPr>
         <p:spPr>
           <a:xfrm>
-            <a:off x="6565392" y="3415553"/>
-            <a:ext cx="1920240" cy="261411"/>
+            <a:off x="6565392" y="3286461"/>
+            <a:ext cx="1920240" cy="239896"/>
           </a:xfrm>
           <a:prstGeom prst="rect">
             <a:avLst/>
@@ -28139,8 +28316,8 @@
         </p:nvSpPr>
         <p:spPr>
           <a:xfrm>
-            <a:off x="9214515" y="3486134"/>
-            <a:ext cx="121509" cy="120249"/>
+            <a:off x="9214515" y="3351233"/>
+            <a:ext cx="121509" cy="110352"/>
           </a:xfrm>
           <a:prstGeom prst="rect">
             <a:avLst/>
@@ -28159,8 +28336,8 @@
         </p:nvSpPr>
         <p:spPr>
           <a:xfrm>
-            <a:off x="10168128" y="3415553"/>
-            <a:ext cx="1234440" cy="261411"/>
+            <a:off x="10168128" y="3286461"/>
+            <a:ext cx="1234440" cy="239896"/>
           </a:xfrm>
           <a:prstGeom prst="rect">
             <a:avLst/>
@@ -28198,8 +28375,8 @@
         </p:nvSpPr>
         <p:spPr>
           <a:xfrm>
-            <a:off x="6208776" y="3676964"/>
-            <a:ext cx="310896" cy="261411"/>
+            <a:off x="6208776" y="3526357"/>
+            <a:ext cx="310896" cy="239896"/>
           </a:xfrm>
           <a:prstGeom prst="rect">
             <a:avLst/>
@@ -28237,8 +28414,8 @@
         </p:nvSpPr>
         <p:spPr>
           <a:xfrm>
-            <a:off x="6565392" y="3676964"/>
-            <a:ext cx="1920240" cy="261411"/>
+            <a:off x="6565392" y="3526357"/>
+            <a:ext cx="1920240" cy="239896"/>
           </a:xfrm>
           <a:prstGeom prst="rect">
             <a:avLst/>
@@ -28276,8 +28453,8 @@
         </p:nvSpPr>
         <p:spPr>
           <a:xfrm>
-            <a:off x="9050201" y="3747545"/>
-            <a:ext cx="285823" cy="120249"/>
+            <a:off x="9050201" y="3591128"/>
+            <a:ext cx="285823" cy="110352"/>
           </a:xfrm>
           <a:prstGeom prst="rect">
             <a:avLst/>
@@ -28296,8 +28473,8 @@
         </p:nvSpPr>
         <p:spPr>
           <a:xfrm>
-            <a:off x="10168128" y="3676964"/>
-            <a:ext cx="1234440" cy="261411"/>
+            <a:off x="10168128" y="3526357"/>
+            <a:ext cx="1234440" cy="239896"/>
           </a:xfrm>
           <a:prstGeom prst="rect">
             <a:avLst/>
@@ -28335,8 +28512,8 @@
         </p:nvSpPr>
         <p:spPr>
           <a:xfrm>
-            <a:off x="6208776" y="3938375"/>
-            <a:ext cx="310896" cy="261411"/>
+            <a:off x="6208776" y="3766252"/>
+            <a:ext cx="310896" cy="239896"/>
           </a:xfrm>
           <a:prstGeom prst="rect">
             <a:avLst/>
@@ -28374,8 +28551,8 @@
         </p:nvSpPr>
         <p:spPr>
           <a:xfrm>
-            <a:off x="6565392" y="3938375"/>
-            <a:ext cx="1920240" cy="261411"/>
+            <a:off x="6565392" y="3766252"/>
+            <a:ext cx="1920240" cy="239896"/>
           </a:xfrm>
           <a:prstGeom prst="rect">
             <a:avLst/>
@@ -28413,8 +28590,8 @@
         </p:nvSpPr>
         <p:spPr>
           <a:xfrm>
-            <a:off x="9011711" y="4008956"/>
-            <a:ext cx="324313" cy="120249"/>
+            <a:off x="9011711" y="3831024"/>
+            <a:ext cx="324313" cy="110352"/>
           </a:xfrm>
           <a:prstGeom prst="rect">
             <a:avLst/>
@@ -28433,8 +28610,8 @@
         </p:nvSpPr>
         <p:spPr>
           <a:xfrm>
-            <a:off x="10168128" y="3938375"/>
-            <a:ext cx="1234440" cy="261411"/>
+            <a:off x="10168128" y="3766252"/>
+            <a:ext cx="1234440" cy="239896"/>
           </a:xfrm>
           <a:prstGeom prst="rect">
             <a:avLst/>
@@ -28472,8 +28649,8 @@
         </p:nvSpPr>
         <p:spPr>
           <a:xfrm>
-            <a:off x="6208776" y="4199785"/>
-            <a:ext cx="310896" cy="261411"/>
+            <a:off x="6208776" y="4006148"/>
+            <a:ext cx="310896" cy="239896"/>
           </a:xfrm>
           <a:prstGeom prst="rect">
             <a:avLst/>
@@ -28511,8 +28688,8 @@
         </p:nvSpPr>
         <p:spPr>
           <a:xfrm>
-            <a:off x="6565392" y="4199785"/>
-            <a:ext cx="1920240" cy="261411"/>
+            <a:off x="6565392" y="4006148"/>
+            <a:ext cx="1920240" cy="239896"/>
           </a:xfrm>
           <a:prstGeom prst="rect">
             <a:avLst/>
@@ -28550,8 +28727,8 @@
         </p:nvSpPr>
         <p:spPr>
           <a:xfrm>
-            <a:off x="8964654" y="4270366"/>
-            <a:ext cx="371370" cy="120249"/>
+            <a:off x="8964654" y="4070920"/>
+            <a:ext cx="371370" cy="110352"/>
           </a:xfrm>
           <a:prstGeom prst="rect">
             <a:avLst/>
@@ -28570,8 +28747,8 @@
         </p:nvSpPr>
         <p:spPr>
           <a:xfrm>
-            <a:off x="10168128" y="4199785"/>
-            <a:ext cx="1234440" cy="261411"/>
+            <a:off x="10168128" y="4006148"/>
+            <a:ext cx="1234440" cy="239896"/>
           </a:xfrm>
           <a:prstGeom prst="rect">
             <a:avLst/>
@@ -28609,8 +28786,8 @@
         </p:nvSpPr>
         <p:spPr>
           <a:xfrm>
-            <a:off x="6208776" y="4461196"/>
-            <a:ext cx="310896" cy="261411"/>
+            <a:off x="6208776" y="4246043"/>
+            <a:ext cx="310896" cy="239896"/>
           </a:xfrm>
           <a:prstGeom prst="rect">
             <a:avLst/>
@@ -28648,8 +28825,8 @@
         </p:nvSpPr>
         <p:spPr>
           <a:xfrm>
-            <a:off x="6565392" y="4461196"/>
-            <a:ext cx="1920240" cy="261411"/>
+            <a:off x="6565392" y="4246043"/>
+            <a:ext cx="1920240" cy="239896"/>
           </a:xfrm>
           <a:prstGeom prst="rect">
             <a:avLst/>
@@ -28687,8 +28864,8 @@
         </p:nvSpPr>
         <p:spPr>
           <a:xfrm>
-            <a:off x="8964060" y="4531777"/>
-            <a:ext cx="371964" cy="120249"/>
+            <a:off x="8964060" y="4310815"/>
+            <a:ext cx="371964" cy="110352"/>
           </a:xfrm>
           <a:prstGeom prst="rect">
             <a:avLst/>
@@ -28707,8 +28884,8 @@
         </p:nvSpPr>
         <p:spPr>
           <a:xfrm>
-            <a:off x="10168128" y="4461196"/>
-            <a:ext cx="1234440" cy="261411"/>
+            <a:off x="10168128" y="4246043"/>
+            <a:ext cx="1234440" cy="239896"/>
           </a:xfrm>
           <a:prstGeom prst="rect">
             <a:avLst/>
@@ -28746,8 +28923,8 @@
         </p:nvSpPr>
         <p:spPr>
           <a:xfrm>
-            <a:off x="6208776" y="4722607"/>
-            <a:ext cx="310896" cy="261411"/>
+            <a:off x="6208776" y="4485939"/>
+            <a:ext cx="310896" cy="239896"/>
           </a:xfrm>
           <a:prstGeom prst="rect">
             <a:avLst/>
@@ -28785,8 +28962,8 @@
         </p:nvSpPr>
         <p:spPr>
           <a:xfrm>
-            <a:off x="6565392" y="4722607"/>
-            <a:ext cx="1920240" cy="261411"/>
+            <a:off x="6565392" y="4485939"/>
+            <a:ext cx="1920240" cy="239896"/>
           </a:xfrm>
           <a:prstGeom prst="rect">
             <a:avLst/>
@@ -28824,8 +29001,8 @@
         </p:nvSpPr>
         <p:spPr>
           <a:xfrm>
-            <a:off x="8958532" y="4793188"/>
-            <a:ext cx="377492" cy="120249"/>
+            <a:off x="8958532" y="4550711"/>
+            <a:ext cx="377492" cy="110352"/>
           </a:xfrm>
           <a:prstGeom prst="rect">
             <a:avLst/>
@@ -28844,8 +29021,8 @@
         </p:nvSpPr>
         <p:spPr>
           <a:xfrm>
-            <a:off x="10168128" y="4722607"/>
-            <a:ext cx="1234440" cy="261411"/>
+            <a:off x="10168128" y="4485939"/>
+            <a:ext cx="1234440" cy="239896"/>
           </a:xfrm>
           <a:prstGeom prst="rect">
             <a:avLst/>
@@ -28883,8 +29060,8 @@
         </p:nvSpPr>
         <p:spPr>
           <a:xfrm>
-            <a:off x="6208776" y="4984018"/>
-            <a:ext cx="310896" cy="261411"/>
+            <a:off x="6208776" y="4725834"/>
+            <a:ext cx="310896" cy="239896"/>
           </a:xfrm>
           <a:prstGeom prst="rect">
             <a:avLst/>
@@ -28922,8 +29099,8 @@
         </p:nvSpPr>
         <p:spPr>
           <a:xfrm>
-            <a:off x="6565392" y="4984018"/>
-            <a:ext cx="1920240" cy="261411"/>
+            <a:off x="6565392" y="4725834"/>
+            <a:ext cx="1920240" cy="239896"/>
           </a:xfrm>
           <a:prstGeom prst="rect">
             <a:avLst/>
@@ -28961,8 +29138,8 @@
         </p:nvSpPr>
         <p:spPr>
           <a:xfrm>
-            <a:off x="8881593" y="5054599"/>
-            <a:ext cx="454431" cy="120249"/>
+            <a:off x="8881593" y="4790606"/>
+            <a:ext cx="454431" cy="110352"/>
           </a:xfrm>
           <a:prstGeom prst="rect">
             <a:avLst/>
@@ -28981,8 +29158,8 @@
         </p:nvSpPr>
         <p:spPr>
           <a:xfrm>
-            <a:off x="10168128" y="4984018"/>
-            <a:ext cx="1234440" cy="261411"/>
+            <a:off x="10168128" y="4725834"/>
+            <a:ext cx="1234440" cy="239896"/>
           </a:xfrm>
           <a:prstGeom prst="rect">
             <a:avLst/>
@@ -29020,8 +29197,8 @@
         </p:nvSpPr>
         <p:spPr>
           <a:xfrm>
-            <a:off x="6208776" y="5245429"/>
-            <a:ext cx="310896" cy="261411"/>
+            <a:off x="6208776" y="4965730"/>
+            <a:ext cx="310896" cy="239896"/>
           </a:xfrm>
           <a:prstGeom prst="rect">
             <a:avLst/>
@@ -29059,8 +29236,8 @@
         </p:nvSpPr>
         <p:spPr>
           <a:xfrm>
-            <a:off x="6565392" y="5245429"/>
-            <a:ext cx="1920240" cy="261411"/>
+            <a:off x="6565392" y="4965730"/>
+            <a:ext cx="1920240" cy="239896"/>
           </a:xfrm>
           <a:prstGeom prst="rect">
             <a:avLst/>
@@ -29098,8 +29275,8 @@
         </p:nvSpPr>
         <p:spPr>
           <a:xfrm>
-            <a:off x="8875241" y="5316010"/>
-            <a:ext cx="460783" cy="120249"/>
+            <a:off x="8875241" y="5030502"/>
+            <a:ext cx="460783" cy="110352"/>
           </a:xfrm>
           <a:prstGeom prst="rect">
             <a:avLst/>
@@ -29118,8 +29295,8 @@
         </p:nvSpPr>
         <p:spPr>
           <a:xfrm>
-            <a:off x="10168128" y="5245429"/>
-            <a:ext cx="1234440" cy="261411"/>
+            <a:off x="10168128" y="4965730"/>
+            <a:ext cx="1234440" cy="239896"/>
           </a:xfrm>
           <a:prstGeom prst="rect">
             <a:avLst/>
@@ -29157,8 +29334,8 @@
         </p:nvSpPr>
         <p:spPr>
           <a:xfrm>
-            <a:off x="6208776" y="5506840"/>
-            <a:ext cx="310896" cy="261411"/>
+            <a:off x="6208776" y="5205625"/>
+            <a:ext cx="310896" cy="239896"/>
           </a:xfrm>
           <a:prstGeom prst="rect">
             <a:avLst/>
@@ -29196,8 +29373,8 @@
         </p:nvSpPr>
         <p:spPr>
           <a:xfrm>
-            <a:off x="6565392" y="5506840"/>
-            <a:ext cx="1920240" cy="261411"/>
+            <a:off x="6565392" y="5205625"/>
+            <a:ext cx="1920240" cy="239896"/>
           </a:xfrm>
           <a:prstGeom prst="rect">
             <a:avLst/>
@@ -29235,8 +29412,8 @@
         </p:nvSpPr>
         <p:spPr>
           <a:xfrm>
-            <a:off x="8760254" y="5577420"/>
-            <a:ext cx="575770" cy="120249"/>
+            <a:off x="8760254" y="5270397"/>
+            <a:ext cx="575770" cy="110352"/>
           </a:xfrm>
           <a:prstGeom prst="rect">
             <a:avLst/>
@@ -29255,8 +29432,8 @@
         </p:nvSpPr>
         <p:spPr>
           <a:xfrm>
-            <a:off x="10168128" y="5506840"/>
-            <a:ext cx="1234440" cy="261411"/>
+            <a:off x="10168128" y="5205625"/>
+            <a:ext cx="1234440" cy="239896"/>
           </a:xfrm>
           <a:prstGeom prst="rect">
             <a:avLst/>
@@ -29294,8 +29471,8 @@
         </p:nvSpPr>
         <p:spPr>
           <a:xfrm>
-            <a:off x="6208776" y="5768250"/>
-            <a:ext cx="310896" cy="261411"/>
+            <a:off x="6208776" y="5445521"/>
+            <a:ext cx="310896" cy="239896"/>
           </a:xfrm>
           <a:prstGeom prst="rect">
             <a:avLst/>
@@ -29333,8 +29510,8 @@
         </p:nvSpPr>
         <p:spPr>
           <a:xfrm>
-            <a:off x="6565392" y="5768250"/>
-            <a:ext cx="1920240" cy="261411"/>
+            <a:off x="6565392" y="5445521"/>
+            <a:ext cx="1920240" cy="239896"/>
           </a:xfrm>
           <a:prstGeom prst="rect">
             <a:avLst/>
@@ -29372,8 +29549,8 @@
         </p:nvSpPr>
         <p:spPr>
           <a:xfrm>
-            <a:off x="8731990" y="5838831"/>
-            <a:ext cx="604034" cy="120249"/>
+            <a:off x="8731990" y="5510293"/>
+            <a:ext cx="604034" cy="110352"/>
           </a:xfrm>
           <a:prstGeom prst="rect">
             <a:avLst/>
@@ -29392,8 +29569,8 @@
         </p:nvSpPr>
         <p:spPr>
           <a:xfrm>
-            <a:off x="10168128" y="5768250"/>
-            <a:ext cx="1234440" cy="261411"/>
+            <a:off x="10168128" y="5445521"/>
+            <a:ext cx="1234440" cy="239896"/>
           </a:xfrm>
           <a:prstGeom prst="rect">
             <a:avLst/>
@@ -29432,7 +29609,7 @@
         <p:spPr>
           <a:xfrm>
             <a:off x="3780130" y="1847088"/>
-            <a:ext cx="10973" cy="4443984"/>
+            <a:ext cx="10973" cy="4078224"/>
           </a:xfrm>
           <a:prstGeom prst="rect">
             <a:avLst/>
@@ -29452,7 +29629,7 @@
         <p:spPr>
           <a:xfrm>
             <a:off x="9330538" y="1847088"/>
-            <a:ext cx="10973" cy="4443984"/>
+            <a:ext cx="10973" cy="4078224"/>
           </a:xfrm>
           <a:prstGeom prst="rect">
             <a:avLst/>
@@ -29472,7 +29649,7 @@
         <p:spPr>
           <a:xfrm>
             <a:off x="6085332" y="1847088"/>
-            <a:ext cx="10973" cy="4443984"/>
+            <a:ext cx="10973" cy="4078224"/>
           </a:xfrm>
           <a:prstGeom prst="rect">
             <a:avLst/>
@@ -29482,6 +29659,65 @@
           </a:solidFill>
           <a:ln/>
         </p:spPr>
+      </p:sp>
+      <p:sp>
+        <p:nvSpPr>
+          <p:cNvPr id="147" name="Shape 144"/>
+          <p:cNvSpPr/>
+          <p:nvPr/>
+        </p:nvSpPr>
+        <p:spPr>
+          <a:xfrm>
+            <a:off x="457200" y="6126480"/>
+            <a:ext cx="11274552" cy="371856"/>
+          </a:xfrm>
+          <a:prstGeom prst="rect">
+            <a:avLst/>
+          </a:prstGeom>
+          <a:solidFill>
+            <a:srgbClr val="E6F6EE"/>
+          </a:solidFill>
+          <a:ln/>
+        </p:spPr>
+      </p:sp>
+      <p:sp>
+        <p:nvSpPr>
+          <p:cNvPr id="148" name="Text 145"/>
+          <p:cNvSpPr txBox="1"/>
+          <p:nvPr/>
+        </p:nvSpPr>
+        <p:spPr>
+          <a:xfrm>
+            <a:off x="658368" y="6144768"/>
+            <a:ext cx="10927080" cy="335280"/>
+          </a:xfrm>
+          <a:prstGeom prst="rect">
+            <a:avLst/>
+          </a:prstGeom>
+          <a:noFill/>
+          <a:ln/>
+        </p:spPr>
+        <p:txBody>
+          <a:bodyPr wrap="square" lIns="0" tIns="0" rIns="0" bIns="0" rtlCol="0" anchor="ctr"/>
+          <a:lstStyle/>
+          <a:p>
+            <a:pPr indent="0" marL="0">
+              <a:buNone/>
+            </a:pPr>
+            <a:r>
+              <a:rPr lang="en-US" sz="1600" b="1" dirty="0">
+                <a:solidFill>
+                  <a:srgbClr val="0B7A4A"/>
+                </a:solidFill>
+                <a:latin typeface="Inter" pitchFamily="34" charset="0"/>
+                <a:ea typeface="Inter" pitchFamily="34" charset="-122"/>
+                <a:cs typeface="Inter" pitchFamily="34" charset="-120"/>
+              </a:rPr>
+              <a:t>21 of 33 stores raised internal parts GP%. 12 declined.</a:t>
+            </a:r>
+            <a:endParaRPr lang="en-US" sz="1600" dirty="0"/>
+          </a:p>
+        </p:txBody>
       </p:sp>
     </p:spTree>
   </p:cSld>

--- a/day2-deck/decks/Internal Gross Profit - Review.pptx
+++ b/day2-deck/decks/Internal Gross Profit - Review.pptx
@@ -18100,7 +18100,7 @@
                 <a:ea typeface="Inter" pitchFamily="34" charset="-122"/>
                 <a:cs typeface="Inter" pitchFamily="34" charset="-120"/>
               </a:rPr>
-              <a:t>Jul–Sep vs Jan–Mar this year</a:t>
+              <a:t>Q3 vs Q1, this year</a:t>
             </a:r>
             <a:endParaRPr lang="en-US" sz="1200" dirty="0"/>
           </a:p>
@@ -31867,7 +31867,7 @@
                 <a:ea typeface="Inter" pitchFamily="34" charset="-122"/>
                 <a:cs typeface="Inter" pitchFamily="34" charset="-120"/>
               </a:rPr>
-              <a:t>Jul–Sep vs Jan–Mar this year</a:t>
+              <a:t>Q3 vs Q1, this year</a:t>
             </a:r>
             <a:endParaRPr lang="en-US" sz="1200" dirty="0"/>
           </a:p>

--- a/day2-deck/decks/Internal Gross Profit - Review.pptx
+++ b/day2-deck/decks/Internal Gross Profit - Review.pptx
@@ -4863,7 +4863,7 @@
           <a:p>
             <a:r>
               <a:rPr lang="en-US" dirty="0"/>
-              <a:t>Takeaway with the store call-outs (off the slide): Ask Acura, Hyundai Prescott and Honda Flagstaff what changed. Ask VW St George, Kia LV and LR LV what got in the way. Ask LR Reno, CDJR Post Falls and LR Henderson what they started this year.Source: Qlik - Closed Repair Orders. Internal pay type, Jan-Sep by close month. Same-store, INEOS excluded (opened 2026). GMC Prescott body shop labor types excluded. Internal parts gross / internal parts sale on repair orders. A higher internal margin adds parts gross but is a cost to used cars. Top and bottom five stores by change in Internal Parts Gross Profit %, Jan-Sep 2026 vs 2025. Moving now: Jul-Sep 2026 vs Jan-Mar 2026, each store against itself; the group moved +0.5 pts on the same basis, so part of every store's change is seasonal. Green bar at the right of a row: the store is on both the top five vs last year and the top five moving now.Conversation starter: each top store says one thing they started doing; each bottom store says what got in the way and what they would try. The room trades ideas. Moving now: ask the top three what they started this year.</a:t>
+              <a:t>Takeaway with the store call-outs (off the slide): Ask Acura, Hyundai Prescott and Honda Flagstaff what changed. Ask VW St George, Kia LV and GMC Prescott what got in the way. Ask LR Reno, CDJR Post Falls and LR Henderson what they started this year.Source: Qlik - Closed Repair Orders. Internal pay type, Jan-Sep by close month. Same-store, INEOS excluded (opened 2026). GMC Prescott body shop labor types excluded. Internal parts gross / internal parts sale on repair orders. A higher internal margin adds parts gross but is a cost to used cars. Top and bottom five stores by change in Internal Parts Gross Profit %, Jan-Sep 2026 vs 2025. Moving now: Jul-Sep 2026 vs Jan-Mar 2026, each store against itself; the group moved +0.5 pts on the same basis, so part of every store's change is seasonal. Green bar at the right of a row: the store is on both the top five vs last year and the top five moving now.Conversation starter: each top store says one thing they started doing; each bottom store says what got in the way and what they would try. The room trades ideas. Moving now: ask the top three what they started this year.</a:t>
             </a:r>
             <a:endParaRPr lang="en-US" dirty="0"/>
           </a:p>
@@ -5582,7 +5582,7 @@
                 <a:ea typeface="Inter" pitchFamily="34" charset="-122"/>
                 <a:cs typeface="Inter" pitchFamily="34" charset="-120"/>
               </a:rPr>
-              <a:t>+0.3 pts</a:t>
+              <a:t>+0.2 pts</a:t>
             </a:r>
             <a:endParaRPr lang="en-US" sz="3000" dirty="0"/>
           </a:p>
@@ -6052,7 +6052,7 @@
                 <a:ea typeface="Inter" pitchFamily="34" charset="-122"/>
                 <a:cs typeface="Inter" pitchFamily="34" charset="-120"/>
               </a:rPr>
-              <a:t>Up 0.3 pts to 78.1%, ahead of 2025 in six of nine months.</a:t>
+              <a:t>Up 0.2 pts to 78.1%, ahead of 2025 in six of nine months.</a:t>
             </a:r>
             <a:endParaRPr lang="en-US" sz="1600" dirty="0"/>
           </a:p>
@@ -11306,7 +11306,7 @@
                 <a:ea typeface="Inter" pitchFamily="34" charset="-122"/>
                 <a:cs typeface="Inter" pitchFamily="34" charset="-120"/>
               </a:rPr>
-              <a:t>+0.3 pts</a:t>
+              <a:t>+0.2 pts</a:t>
             </a:r>
             <a:endParaRPr lang="en-US" sz="2000" dirty="0"/>
           </a:p>
@@ -11399,7 +11399,7 @@
         <p:spPr>
           <a:xfrm>
             <a:off x="3785616" y="1911860"/>
-            <a:ext cx="495495" cy="110352"/>
+            <a:ext cx="494607" cy="110352"/>
           </a:xfrm>
           <a:prstGeom prst="rect">
             <a:avLst/>
@@ -11536,7 +11536,7 @@
         <p:spPr>
           <a:xfrm>
             <a:off x="3785616" y="2151755"/>
-            <a:ext cx="322622" cy="110352"/>
+            <a:ext cx="326794" cy="110352"/>
           </a:xfrm>
           <a:prstGeom prst="rect">
             <a:avLst/>
@@ -11673,7 +11673,7 @@
         <p:spPr>
           <a:xfrm>
             <a:off x="3785616" y="2391651"/>
-            <a:ext cx="303335" cy="110352"/>
+            <a:ext cx="309130" cy="110352"/>
           </a:xfrm>
           <a:prstGeom prst="rect">
             <a:avLst/>
@@ -11717,7 +11717,7 @@
                 <a:ea typeface="Inter" pitchFamily="34" charset="-122"/>
                 <a:cs typeface="Inter" pitchFamily="34" charset="-120"/>
               </a:rPr>
-              <a:t>+3.4 pts</a:t>
+              <a:t>+3.5 pts</a:t>
             </a:r>
             <a:endParaRPr lang="en-US" sz="1200" dirty="0"/>
           </a:p>
@@ -11810,7 +11810,7 @@
         <p:spPr>
           <a:xfrm>
             <a:off x="3785616" y="2631546"/>
-            <a:ext cx="263778" cy="110352"/>
+            <a:ext cx="264968" cy="110352"/>
           </a:xfrm>
           <a:prstGeom prst="rect">
             <a:avLst/>
@@ -11947,7 +11947,7 @@
         <p:spPr>
           <a:xfrm>
             <a:off x="3785616" y="2871442"/>
-            <a:ext cx="214318" cy="110352"/>
+            <a:ext cx="211975" cy="110352"/>
           </a:xfrm>
           <a:prstGeom prst="rect">
             <a:avLst/>
@@ -12069,7 +12069,7 @@
                 <a:ea typeface="Inter" pitchFamily="34" charset="-122"/>
                 <a:cs typeface="Inter" pitchFamily="34" charset="-120"/>
               </a:rPr>
-              <a:t>KIA ST GEORGE</a:t>
+              <a:t>TOYOTA HENDERSON</a:t>
             </a:r>
             <a:endParaRPr lang="en-US" sz="1200" dirty="0"/>
           </a:p>
@@ -12084,7 +12084,7 @@
         <p:spPr>
           <a:xfrm>
             <a:off x="3785616" y="3111337"/>
-            <a:ext cx="192096" cy="110352"/>
+            <a:ext cx="194310" cy="110352"/>
           </a:xfrm>
           <a:prstGeom prst="rect">
             <a:avLst/>
@@ -12206,7 +12206,7 @@
                 <a:ea typeface="Inter" pitchFamily="34" charset="-122"/>
                 <a:cs typeface="Inter" pitchFamily="34" charset="-120"/>
               </a:rPr>
-              <a:t>TOYOTA HENDERSON</a:t>
+              <a:t>KIA ST GEORGE</a:t>
             </a:r>
             <a:endParaRPr lang="en-US" sz="1200" dirty="0"/>
           </a:p>
@@ -12221,7 +12221,7 @@
         <p:spPr>
           <a:xfrm>
             <a:off x="3785616" y="3351233"/>
-            <a:ext cx="188815" cy="110352"/>
+            <a:ext cx="185478" cy="110352"/>
           </a:xfrm>
           <a:prstGeom prst="rect">
             <a:avLst/>
@@ -12358,7 +12358,7 @@
         <p:spPr>
           <a:xfrm>
             <a:off x="3785616" y="3591128"/>
-            <a:ext cx="160577" cy="110352"/>
+            <a:ext cx="158981" cy="110352"/>
           </a:xfrm>
           <a:prstGeom prst="rect">
             <a:avLst/>
@@ -12495,7 +12495,7 @@
         <p:spPr>
           <a:xfrm>
             <a:off x="3785616" y="3831024"/>
-            <a:ext cx="142780" cy="110352"/>
+            <a:ext cx="141316" cy="110352"/>
           </a:xfrm>
           <a:prstGeom prst="rect">
             <a:avLst/>
@@ -12632,7 +12632,7 @@
         <p:spPr>
           <a:xfrm>
             <a:off x="3785616" y="4070920"/>
-            <a:ext cx="132169" cy="110352"/>
+            <a:ext cx="132484" cy="110352"/>
           </a:xfrm>
           <a:prstGeom prst="rect">
             <a:avLst/>
@@ -12769,7 +12769,7 @@
         <p:spPr>
           <a:xfrm>
             <a:off x="3785616" y="4310815"/>
-            <a:ext cx="131489" cy="110352"/>
+            <a:ext cx="132484" cy="110352"/>
           </a:xfrm>
           <a:prstGeom prst="rect">
             <a:avLst/>
@@ -12906,7 +12906,7 @@
         <p:spPr>
           <a:xfrm>
             <a:off x="3785616" y="4550711"/>
-            <a:ext cx="117300" cy="110352"/>
+            <a:ext cx="123652" cy="110352"/>
           </a:xfrm>
           <a:prstGeom prst="rect">
             <a:avLst/>
@@ -12950,7 +12950,7 @@
                 <a:ea typeface="Inter" pitchFamily="34" charset="-122"/>
                 <a:cs typeface="Inter" pitchFamily="34" charset="-120"/>
               </a:rPr>
-              <a:t>+1.3 pts</a:t>
+              <a:t>+1.4 pts</a:t>
             </a:r>
             <a:endParaRPr lang="en-US" sz="1200" dirty="0"/>
           </a:p>
@@ -13043,7 +13043,7 @@
         <p:spPr>
           <a:xfrm>
             <a:off x="3785616" y="4790606"/>
-            <a:ext cx="95080" cy="110352"/>
+            <a:ext cx="97155" cy="110352"/>
           </a:xfrm>
           <a:prstGeom prst="rect">
             <a:avLst/>
@@ -13180,7 +13180,7 @@
         <p:spPr>
           <a:xfrm>
             <a:off x="3785616" y="5030502"/>
-            <a:ext cx="68825" cy="110352"/>
+            <a:ext cx="70658" cy="110352"/>
           </a:xfrm>
           <a:prstGeom prst="rect">
             <a:avLst/>
@@ -13317,7 +13317,7 @@
         <p:spPr>
           <a:xfrm>
             <a:off x="3785616" y="5270397"/>
-            <a:ext cx="36133" cy="110352"/>
+            <a:ext cx="35329" cy="110352"/>
           </a:xfrm>
           <a:prstGeom prst="rect">
             <a:avLst/>
@@ -13454,7 +13454,7 @@
         <p:spPr>
           <a:xfrm>
             <a:off x="3785616" y="5510293"/>
-            <a:ext cx="34356" cy="110352"/>
+            <a:ext cx="35329" cy="110352"/>
           </a:xfrm>
           <a:prstGeom prst="rect">
             <a:avLst/>
@@ -13591,7 +13591,7 @@
         <p:spPr>
           <a:xfrm>
             <a:off x="3785616" y="5750188"/>
-            <a:ext cx="26542" cy="110352"/>
+            <a:ext cx="26497" cy="110352"/>
           </a:xfrm>
           <a:prstGeom prst="rect">
             <a:avLst/>
@@ -13713,7 +13713,7 @@
                 <a:ea typeface="Inter" pitchFamily="34" charset="-122"/>
                 <a:cs typeface="Inter" pitchFamily="34" charset="-120"/>
               </a:rPr>
-              <a:t>TOYOTA PRESCOTT</a:t>
+              <a:t>CHEVY LV</a:t>
             </a:r>
             <a:endParaRPr lang="en-US" sz="1200" dirty="0"/>
           </a:p>
@@ -13850,7 +13850,7 @@
                 <a:ea typeface="Inter" pitchFamily="34" charset="-122"/>
                 <a:cs typeface="Inter" pitchFamily="34" charset="-120"/>
               </a:rPr>
-              <a:t>CHEVY LV</a:t>
+              <a:t>TOYOTA PRESCOTT</a:t>
             </a:r>
             <a:endParaRPr lang="en-US" sz="1200" dirty="0"/>
           </a:p>
@@ -13909,7 +13909,7 @@
                 <a:ea typeface="Inter" pitchFamily="34" charset="-122"/>
                 <a:cs typeface="Inter" pitchFamily="34" charset="-120"/>
               </a:rPr>
-              <a:t>+0.0 pts</a:t>
+              <a:t>+0.1 pts</a:t>
             </a:r>
             <a:endParaRPr lang="en-US" sz="1200" dirty="0"/>
           </a:p>
@@ -14001,8 +14001,8 @@
         </p:nvSpPr>
         <p:spPr>
           <a:xfrm>
-            <a:off x="9300490" y="2391651"/>
-            <a:ext cx="35534" cy="110352"/>
+            <a:off x="9300695" y="2391651"/>
+            <a:ext cx="35329" cy="110352"/>
           </a:xfrm>
           <a:prstGeom prst="rect">
             <a:avLst/>
@@ -14138,8 +14138,8 @@
         </p:nvSpPr>
         <p:spPr>
           <a:xfrm>
-            <a:off x="9251253" y="2631546"/>
-            <a:ext cx="84771" cy="110352"/>
+            <a:off x="9247701" y="2631546"/>
+            <a:ext cx="88323" cy="110352"/>
           </a:xfrm>
           <a:prstGeom prst="rect">
             <a:avLst/>
@@ -14275,8 +14275,8 @@
         </p:nvSpPr>
         <p:spPr>
           <a:xfrm>
-            <a:off x="9226020" y="2871442"/>
-            <a:ext cx="110004" cy="110352"/>
+            <a:off x="9230037" y="2871442"/>
+            <a:ext cx="105987" cy="110352"/>
           </a:xfrm>
           <a:prstGeom prst="rect">
             <a:avLst/>
@@ -14320,7 +14320,7 @@
                 <a:ea typeface="Inter" pitchFamily="34" charset="-122"/>
                 <a:cs typeface="Inter" pitchFamily="34" charset="-120"/>
               </a:rPr>
-              <a:t>−1.3 pts</a:t>
+              <a:t>−1.2 pts</a:t>
             </a:r>
             <a:endParaRPr lang="en-US" sz="1200" dirty="0"/>
           </a:p>
@@ -14412,8 +14412,8 @@
         </p:nvSpPr>
         <p:spPr>
           <a:xfrm>
-            <a:off x="9211478" y="3111337"/>
-            <a:ext cx="124546" cy="110352"/>
+            <a:off x="9212372" y="3111337"/>
+            <a:ext cx="123652" cy="110352"/>
           </a:xfrm>
           <a:prstGeom prst="rect">
             <a:avLst/>
@@ -14549,8 +14549,8 @@
         </p:nvSpPr>
         <p:spPr>
           <a:xfrm>
-            <a:off x="9201170" y="3351233"/>
-            <a:ext cx="134854" cy="110352"/>
+            <a:off x="9203540" y="3351233"/>
+            <a:ext cx="132484" cy="110352"/>
           </a:xfrm>
           <a:prstGeom prst="rect">
             <a:avLst/>
@@ -14686,8 +14686,8 @@
         </p:nvSpPr>
         <p:spPr>
           <a:xfrm>
-            <a:off x="9108753" y="3591128"/>
-            <a:ext cx="227271" cy="110352"/>
+            <a:off x="9106385" y="3591128"/>
+            <a:ext cx="229639" cy="110352"/>
           </a:xfrm>
           <a:prstGeom prst="rect">
             <a:avLst/>
@@ -14823,8 +14823,8 @@
         </p:nvSpPr>
         <p:spPr>
           <a:xfrm>
-            <a:off x="9091564" y="3831024"/>
-            <a:ext cx="244460" cy="110352"/>
+            <a:off x="9097553" y="3831024"/>
+            <a:ext cx="238471" cy="110352"/>
           </a:xfrm>
           <a:prstGeom prst="rect">
             <a:avLst/>
@@ -14868,7 +14868,7 @@
                 <a:ea typeface="Inter" pitchFamily="34" charset="-122"/>
                 <a:cs typeface="Inter" pitchFamily="34" charset="-120"/>
               </a:rPr>
-              <a:t>−2.8 pts</a:t>
+              <a:t>−2.7 pts</a:t>
             </a:r>
             <a:endParaRPr lang="en-US" sz="1200" dirty="0"/>
           </a:p>
@@ -14960,8 +14960,8 @@
         </p:nvSpPr>
         <p:spPr>
           <a:xfrm>
-            <a:off x="9060005" y="4070920"/>
-            <a:ext cx="276019" cy="110352"/>
+            <a:off x="9062224" y="4070920"/>
+            <a:ext cx="273800" cy="110352"/>
           </a:xfrm>
           <a:prstGeom prst="rect">
             <a:avLst/>
@@ -15097,8 +15097,8 @@
         </p:nvSpPr>
         <p:spPr>
           <a:xfrm>
-            <a:off x="9035101" y="4310815"/>
-            <a:ext cx="300923" cy="110352"/>
+            <a:off x="9035727" y="4310815"/>
+            <a:ext cx="300297" cy="110352"/>
           </a:xfrm>
           <a:prstGeom prst="rect">
             <a:avLst/>
@@ -15234,8 +15234,8 @@
         </p:nvSpPr>
         <p:spPr>
           <a:xfrm>
-            <a:off x="8954892" y="4550711"/>
-            <a:ext cx="381132" cy="110352"/>
+            <a:off x="8947404" y="4550711"/>
+            <a:ext cx="388620" cy="110352"/>
           </a:xfrm>
           <a:prstGeom prst="rect">
             <a:avLst/>
@@ -15279,7 +15279,7 @@
                 <a:ea typeface="Inter" pitchFamily="34" charset="-122"/>
                 <a:cs typeface="Inter" pitchFamily="34" charset="-120"/>
               </a:rPr>
-              <a:t>−4.3 pts</a:t>
+              <a:t>−4.4 pts</a:t>
             </a:r>
             <a:endParaRPr lang="en-US" sz="1200" dirty="0"/>
           </a:p>
@@ -15371,8 +15371,8 @@
         </p:nvSpPr>
         <p:spPr>
           <a:xfrm>
-            <a:off x="8929245" y="4790606"/>
-            <a:ext cx="406779" cy="110352"/>
+            <a:off x="8929739" y="4790606"/>
+            <a:ext cx="406285" cy="110352"/>
           </a:xfrm>
           <a:prstGeom prst="rect">
             <a:avLst/>
@@ -15508,8 +15508,8 @@
         </p:nvSpPr>
         <p:spPr>
           <a:xfrm>
-            <a:off x="8865948" y="5030502"/>
-            <a:ext cx="470076" cy="110352"/>
+            <a:off x="8859081" y="5030502"/>
+            <a:ext cx="476943" cy="110352"/>
           </a:xfrm>
           <a:prstGeom prst="rect">
             <a:avLst/>
@@ -15553,7 +15553,7 @@
                 <a:ea typeface="Inter" pitchFamily="34" charset="-122"/>
                 <a:cs typeface="Inter" pitchFamily="34" charset="-120"/>
               </a:rPr>
-              <a:t>−5.3 pts</a:t>
+              <a:t>−5.4 pts</a:t>
             </a:r>
             <a:endParaRPr lang="en-US" sz="1200" dirty="0"/>
           </a:p>
@@ -15645,8 +15645,8 @@
         </p:nvSpPr>
         <p:spPr>
           <a:xfrm>
-            <a:off x="8842326" y="5270397"/>
-            <a:ext cx="493698" cy="110352"/>
+            <a:off x="8841417" y="5270397"/>
+            <a:ext cx="494607" cy="110352"/>
           </a:xfrm>
           <a:prstGeom prst="rect">
             <a:avLst/>
@@ -16705,7 +16705,7 @@
                 <a:ea typeface="Inter" pitchFamily="34" charset="-122"/>
                 <a:cs typeface="Inter" pitchFamily="34" charset="-120"/>
               </a:rPr>
-              <a:t>+3.4 pts</a:t>
+              <a:t>+3.5 pts</a:t>
             </a:r>
             <a:endParaRPr lang="en-US" sz="1600" dirty="0"/>
           </a:p>
@@ -17668,7 +17668,7 @@
                 <a:ea typeface="Inter" pitchFamily="34" charset="-122"/>
                 <a:cs typeface="Inter" pitchFamily="34" charset="-120"/>
               </a:rPr>
-              <a:t>−5.3 pts</a:t>
+              <a:t>−5.4 pts</a:t>
             </a:r>
             <a:endParaRPr lang="en-US" sz="1600" dirty="0"/>
           </a:p>
@@ -18002,7 +18002,7 @@
                 <a:ea typeface="Inter" pitchFamily="34" charset="-122"/>
                 <a:cs typeface="Inter" pitchFamily="34" charset="-120"/>
               </a:rPr>
-              <a:t>−4.3 pts</a:t>
+              <a:t>−4.4 pts</a:t>
             </a:r>
             <a:endParaRPr lang="en-US" sz="1600" dirty="0"/>
           </a:p>
@@ -25303,7 +25303,7 @@
         <p:spPr>
           <a:xfrm>
             <a:off x="3785616" y="2151755"/>
-            <a:ext cx="746935" cy="110352"/>
+            <a:ext cx="752168" cy="110352"/>
           </a:xfrm>
           <a:prstGeom prst="rect">
             <a:avLst/>
@@ -25440,7 +25440,7 @@
         <p:spPr>
           <a:xfrm>
             <a:off x="3785616" y="2391651"/>
-            <a:ext cx="544841" cy="110352"/>
+            <a:ext cx="551590" cy="110352"/>
           </a:xfrm>
           <a:prstGeom prst="rect">
             <a:avLst/>
@@ -25562,7 +25562,7 @@
                 <a:ea typeface="Inter" pitchFamily="34" charset="-122"/>
                 <a:cs typeface="Inter" pitchFamily="34" charset="-120"/>
               </a:rPr>
-              <a:t>VW HENDERSON</a:t>
+              <a:t>TOYOTA HENDERSON</a:t>
             </a:r>
             <a:endParaRPr lang="en-US" sz="1200" dirty="0"/>
           </a:p>
@@ -25577,7 +25577,7 @@
         <p:spPr>
           <a:xfrm>
             <a:off x="3785616" y="2631546"/>
-            <a:ext cx="411845" cy="110352"/>
+            <a:ext cx="413692" cy="110352"/>
           </a:xfrm>
           <a:prstGeom prst="rect">
             <a:avLst/>
@@ -25699,7 +25699,7 @@
                 <a:ea typeface="Inter" pitchFamily="34" charset="-122"/>
                 <a:cs typeface="Inter" pitchFamily="34" charset="-120"/>
               </a:rPr>
-              <a:t>TOYOTA HENDERSON</a:t>
+              <a:t>VW HENDERSON</a:t>
             </a:r>
             <a:endParaRPr lang="en-US" sz="1200" dirty="0"/>
           </a:p>
@@ -25714,7 +25714,7 @@
         <p:spPr>
           <a:xfrm>
             <a:off x="3785616" y="2871442"/>
-            <a:ext cx="410069" cy="110352"/>
+            <a:ext cx="413692" cy="110352"/>
           </a:xfrm>
           <a:prstGeom prst="rect">
             <a:avLst/>
@@ -25851,7 +25851,7 @@
         <p:spPr>
           <a:xfrm>
             <a:off x="3785616" y="3111337"/>
-            <a:ext cx="366175" cy="110352"/>
+            <a:ext cx="363548" cy="110352"/>
           </a:xfrm>
           <a:prstGeom prst="rect">
             <a:avLst/>
@@ -25988,7 +25988,7 @@
         <p:spPr>
           <a:xfrm>
             <a:off x="3785616" y="3351233"/>
-            <a:ext cx="321691" cy="110352"/>
+            <a:ext cx="325939" cy="110352"/>
           </a:xfrm>
           <a:prstGeom prst="rect">
             <a:avLst/>
@@ -26110,7 +26110,7 @@
                 <a:ea typeface="Inter" pitchFamily="34" charset="-122"/>
                 <a:cs typeface="Inter" pitchFamily="34" charset="-120"/>
               </a:rPr>
-              <a:t>LINCOLN</a:t>
+              <a:t>VOLVO</a:t>
             </a:r>
             <a:endParaRPr lang="en-US" sz="1200" dirty="0"/>
           </a:p>
@@ -26125,7 +26125,7 @@
         <p:spPr>
           <a:xfrm>
             <a:off x="3785616" y="3591128"/>
-            <a:ext cx="314225" cy="110352"/>
+            <a:ext cx="313403" cy="110352"/>
           </a:xfrm>
           <a:prstGeom prst="rect">
             <a:avLst/>
@@ -26247,7 +26247,7 @@
                 <a:ea typeface="Inter" pitchFamily="34" charset="-122"/>
                 <a:cs typeface="Inter" pitchFamily="34" charset="-120"/>
               </a:rPr>
-              <a:t>VOLVO</a:t>
+              <a:t>LINCOLN</a:t>
             </a:r>
             <a:endParaRPr lang="en-US" sz="1200" dirty="0"/>
           </a:p>
@@ -26262,7 +26262,7 @@
         <p:spPr>
           <a:xfrm>
             <a:off x="3785616" y="3831024"/>
-            <a:ext cx="301280" cy="110352"/>
+            <a:ext cx="313403" cy="110352"/>
           </a:xfrm>
           <a:prstGeom prst="rect">
             <a:avLst/>
@@ -26306,7 +26306,7 @@
                 <a:ea typeface="Inter" pitchFamily="34" charset="-122"/>
                 <a:cs typeface="Inter" pitchFamily="34" charset="-120"/>
               </a:rPr>
-              <a:t>+2.4 pts</a:t>
+              <a:t>+2.5 pts</a:t>
             </a:r>
             <a:endParaRPr lang="en-US" sz="1200" dirty="0"/>
           </a:p>
@@ -26384,7 +26384,7 @@
                 <a:ea typeface="Inter" pitchFamily="34" charset="-122"/>
                 <a:cs typeface="Inter" pitchFamily="34" charset="-120"/>
               </a:rPr>
-              <a:t>SUBARU PRESCOTT</a:t>
+              <a:t>LEXUS</a:t>
             </a:r>
             <a:endParaRPr lang="en-US" sz="1200" dirty="0"/>
           </a:p>
@@ -26399,7 +26399,7 @@
         <p:spPr>
           <a:xfrm>
             <a:off x="3785616" y="4070920"/>
-            <a:ext cx="260605" cy="110352"/>
+            <a:ext cx="250723" cy="110352"/>
           </a:xfrm>
           <a:prstGeom prst="rect">
             <a:avLst/>
@@ -26443,7 +26443,7 @@
                 <a:ea typeface="Inter" pitchFamily="34" charset="-122"/>
                 <a:cs typeface="Inter" pitchFamily="34" charset="-120"/>
               </a:rPr>
-              <a:t>+2.1 pts</a:t>
+              <a:t>+2.0 pts</a:t>
             </a:r>
             <a:endParaRPr lang="en-US" sz="1200" dirty="0"/>
           </a:p>
@@ -26521,7 +26521,7 @@
                 <a:ea typeface="Inter" pitchFamily="34" charset="-122"/>
                 <a:cs typeface="Inter" pitchFamily="34" charset="-120"/>
               </a:rPr>
-              <a:t>LEXUS</a:t>
+              <a:t>SUBARU PRESCOTT</a:t>
             </a:r>
             <a:endParaRPr lang="en-US" sz="1200" dirty="0"/>
           </a:p>
@@ -26536,7 +26536,7 @@
         <p:spPr>
           <a:xfrm>
             <a:off x="3785616" y="4310815"/>
-            <a:ext cx="253666" cy="110352"/>
+            <a:ext cx="250723" cy="110352"/>
           </a:xfrm>
           <a:prstGeom prst="rect">
             <a:avLst/>
@@ -26673,7 +26673,7 @@
         <p:spPr>
           <a:xfrm>
             <a:off x="3785616" y="4550711"/>
-            <a:ext cx="211088" cy="110352"/>
+            <a:ext cx="213114" cy="110352"/>
           </a:xfrm>
           <a:prstGeom prst="rect">
             <a:avLst/>
@@ -26795,7 +26795,7 @@
                 <a:ea typeface="Inter" pitchFamily="34" charset="-122"/>
                 <a:cs typeface="Inter" pitchFamily="34" charset="-120"/>
               </a:rPr>
-              <a:t>CDJR POST FALLS</a:t>
+              <a:t>MAZDA</a:t>
             </a:r>
             <a:endParaRPr lang="en-US" sz="1200" dirty="0"/>
           </a:p>
@@ -26810,7 +26810,7 @@
         <p:spPr>
           <a:xfrm>
             <a:off x="3785616" y="4790606"/>
-            <a:ext cx="192231" cy="110352"/>
+            <a:ext cx="188042" cy="110352"/>
           </a:xfrm>
           <a:prstGeom prst="rect">
             <a:avLst/>
@@ -26932,7 +26932,7 @@
                 <a:ea typeface="Inter" pitchFamily="34" charset="-122"/>
                 <a:cs typeface="Inter" pitchFamily="34" charset="-120"/>
               </a:rPr>
-              <a:t>KIA ST GEORGE</a:t>
+              <a:t>CDJR POST FALLS</a:t>
             </a:r>
             <a:endParaRPr lang="en-US" sz="1200" dirty="0"/>
           </a:p>
@@ -26947,7 +26947,7 @@
         <p:spPr>
           <a:xfrm>
             <a:off x="3785616" y="5030502"/>
-            <a:ext cx="190854" cy="110352"/>
+            <a:ext cx="188042" cy="110352"/>
           </a:xfrm>
           <a:prstGeom prst="rect">
             <a:avLst/>
@@ -27069,7 +27069,7 @@
                 <a:ea typeface="Inter" pitchFamily="34" charset="-122"/>
                 <a:cs typeface="Inter" pitchFamily="34" charset="-120"/>
               </a:rPr>
-              <a:t>MAZDA</a:t>
+              <a:t>KIA ST GEORGE</a:t>
             </a:r>
             <a:endParaRPr lang="en-US" sz="1200" dirty="0"/>
           </a:p>
@@ -27084,7 +27084,7 @@
         <p:spPr>
           <a:xfrm>
             <a:off x="3785616" y="5270397"/>
-            <a:ext cx="190842" cy="110352"/>
+            <a:ext cx="188042" cy="110352"/>
           </a:xfrm>
           <a:prstGeom prst="rect">
             <a:avLst/>
@@ -27221,7 +27221,7 @@
         <p:spPr>
           <a:xfrm>
             <a:off x="3785616" y="5510293"/>
-            <a:ext cx="158978" cy="110352"/>
+            <a:ext cx="150434" cy="110352"/>
           </a:xfrm>
           <a:prstGeom prst="rect">
             <a:avLst/>
@@ -27265,7 +27265,7 @@
                 <a:ea typeface="Inter" pitchFamily="34" charset="-122"/>
                 <a:cs typeface="Inter" pitchFamily="34" charset="-120"/>
               </a:rPr>
-              <a:t>+1.3 pts</a:t>
+              <a:t>+1.2 pts</a:t>
             </a:r>
             <a:endParaRPr lang="en-US" sz="1200" dirty="0"/>
           </a:p>
@@ -27358,7 +27358,7 @@
         <p:spPr>
           <a:xfrm>
             <a:off x="3785616" y="5750188"/>
-            <a:ext cx="145538" cy="110352"/>
+            <a:ext cx="150434" cy="110352"/>
           </a:xfrm>
           <a:prstGeom prst="rect">
             <a:avLst/>
@@ -27480,7 +27480,7 @@
                 <a:ea typeface="Inter" pitchFamily="34" charset="-122"/>
                 <a:cs typeface="Inter" pitchFamily="34" charset="-120"/>
               </a:rPr>
-              <a:t>TOYOTA SPOKANE</a:t>
+              <a:t>HONDA NORTH</a:t>
             </a:r>
             <a:endParaRPr lang="en-US" sz="1200" dirty="0"/>
           </a:p>
@@ -27495,7 +27495,7 @@
         <p:spPr>
           <a:xfrm>
             <a:off x="9336024" y="1911860"/>
-            <a:ext cx="118014" cy="110352"/>
+            <a:ext cx="125361" cy="110352"/>
           </a:xfrm>
           <a:prstGeom prst="rect">
             <a:avLst/>
@@ -27539,7 +27539,7 @@
                 <a:ea typeface="Inter" pitchFamily="34" charset="-122"/>
                 <a:cs typeface="Inter" pitchFamily="34" charset="-120"/>
               </a:rPr>
-              <a:t>+0.9 pts</a:t>
+              <a:t>+1.0 pts</a:t>
             </a:r>
             <a:endParaRPr lang="en-US" sz="1200" dirty="0"/>
           </a:p>
@@ -27617,7 +27617,7 @@
                 <a:ea typeface="Inter" pitchFamily="34" charset="-122"/>
                 <a:cs typeface="Inter" pitchFamily="34" charset="-120"/>
               </a:rPr>
-              <a:t>HONDA NORTH</a:t>
+              <a:t>TOYOTA SPOKANE</a:t>
             </a:r>
             <a:endParaRPr lang="en-US" sz="1200" dirty="0"/>
           </a:p>
@@ -27632,7 +27632,7 @@
         <p:spPr>
           <a:xfrm>
             <a:off x="9336024" y="2151755"/>
-            <a:ext cx="112861" cy="110352"/>
+            <a:ext cx="112825" cy="110352"/>
           </a:xfrm>
           <a:prstGeom prst="rect">
             <a:avLst/>
@@ -27769,7 +27769,7 @@
         <p:spPr>
           <a:xfrm>
             <a:off x="9336024" y="2391651"/>
-            <a:ext cx="51131" cy="110352"/>
+            <a:ext cx="50145" cy="110352"/>
           </a:xfrm>
           <a:prstGeom prst="rect">
             <a:avLst/>
@@ -27906,7 +27906,7 @@
         <p:spPr>
           <a:xfrm>
             <a:off x="9336024" y="2631546"/>
-            <a:ext cx="42573" cy="110352"/>
+            <a:ext cx="37608" cy="110352"/>
           </a:xfrm>
           <a:prstGeom prst="rect">
             <a:avLst/>
@@ -28042,8 +28042,8 @@
         </p:nvSpPr>
         <p:spPr>
           <a:xfrm>
-            <a:off x="9306469" y="2871442"/>
-            <a:ext cx="29555" cy="110352"/>
+            <a:off x="9298416" y="2871442"/>
+            <a:ext cx="37608" cy="110352"/>
           </a:xfrm>
           <a:prstGeom prst="rect">
             <a:avLst/>
@@ -28087,7 +28087,7 @@
                 <a:ea typeface="Inter" pitchFamily="34" charset="-122"/>
                 <a:cs typeface="Inter" pitchFamily="34" charset="-120"/>
               </a:rPr>
-              <a:t>−0.2 pts</a:t>
+              <a:t>−0.3 pts</a:t>
             </a:r>
             <a:endParaRPr lang="en-US" sz="1200" dirty="0"/>
           </a:p>
@@ -28179,8 +28179,8 @@
         </p:nvSpPr>
         <p:spPr>
           <a:xfrm>
-            <a:off x="9293325" y="3111337"/>
-            <a:ext cx="42699" cy="110352"/>
+            <a:off x="9298416" y="3111337"/>
+            <a:ext cx="37608" cy="110352"/>
           </a:xfrm>
           <a:prstGeom prst="rect">
             <a:avLst/>
@@ -28316,8 +28316,8 @@
         </p:nvSpPr>
         <p:spPr>
           <a:xfrm>
-            <a:off x="9214515" y="3351233"/>
-            <a:ext cx="121509" cy="110352"/>
+            <a:off x="9210663" y="3351233"/>
+            <a:ext cx="125361" cy="110352"/>
           </a:xfrm>
           <a:prstGeom prst="rect">
             <a:avLst/>
@@ -28453,8 +28453,8 @@
         </p:nvSpPr>
         <p:spPr>
           <a:xfrm>
-            <a:off x="9050201" y="3591128"/>
-            <a:ext cx="285823" cy="110352"/>
+            <a:off x="9047693" y="3591128"/>
+            <a:ext cx="288331" cy="110352"/>
           </a:xfrm>
           <a:prstGeom prst="rect">
             <a:avLst/>
@@ -28590,8 +28590,8 @@
         </p:nvSpPr>
         <p:spPr>
           <a:xfrm>
-            <a:off x="9011711" y="3831024"/>
-            <a:ext cx="324313" cy="110352"/>
+            <a:off x="9010085" y="3831024"/>
+            <a:ext cx="325939" cy="110352"/>
           </a:xfrm>
           <a:prstGeom prst="rect">
             <a:avLst/>
@@ -28713,7 +28713,7 @@
                 <a:ea typeface="Inter" pitchFamily="34" charset="-122"/>
                 <a:cs typeface="Inter" pitchFamily="34" charset="-120"/>
               </a:rPr>
-              <a:t>LR RENO</a:t>
+              <a:t>AUDI HENDERSON</a:t>
             </a:r>
             <a:endParaRPr lang="en-US" sz="1200" dirty="0"/>
           </a:p>
@@ -28727,8 +28727,8 @@
         </p:nvSpPr>
         <p:spPr>
           <a:xfrm>
-            <a:off x="8964654" y="4070920"/>
-            <a:ext cx="371370" cy="110352"/>
+            <a:off x="8972476" y="4070920"/>
+            <a:ext cx="363548" cy="110352"/>
           </a:xfrm>
           <a:prstGeom prst="rect">
             <a:avLst/>
@@ -28772,7 +28772,7 @@
                 <a:ea typeface="Inter" pitchFamily="34" charset="-122"/>
                 <a:cs typeface="Inter" pitchFamily="34" charset="-120"/>
               </a:rPr>
-              <a:t>−3.0 pts</a:t>
+              <a:t>−2.9 pts</a:t>
             </a:r>
             <a:endParaRPr lang="en-US" sz="1200" dirty="0"/>
           </a:p>
@@ -28850,7 +28850,7 @@
                 <a:ea typeface="Inter" pitchFamily="34" charset="-122"/>
                 <a:cs typeface="Inter" pitchFamily="34" charset="-120"/>
               </a:rPr>
-              <a:t>AUDI HENDERSON</a:t>
+              <a:t>LR RENO</a:t>
             </a:r>
             <a:endParaRPr lang="en-US" sz="1200" dirty="0"/>
           </a:p>
@@ -28864,8 +28864,8 @@
         </p:nvSpPr>
         <p:spPr>
           <a:xfrm>
-            <a:off x="8964060" y="4310815"/>
-            <a:ext cx="371964" cy="110352"/>
+            <a:off x="8972476" y="4310815"/>
+            <a:ext cx="363548" cy="110352"/>
           </a:xfrm>
           <a:prstGeom prst="rect">
             <a:avLst/>
@@ -28909,7 +28909,7 @@
                 <a:ea typeface="Inter" pitchFamily="34" charset="-122"/>
                 <a:cs typeface="Inter" pitchFamily="34" charset="-120"/>
               </a:rPr>
-              <a:t>−3.0 pts</a:t>
+              <a:t>−2.9 pts</a:t>
             </a:r>
             <a:endParaRPr lang="en-US" sz="1200" dirty="0"/>
           </a:p>
@@ -29001,8 +29001,8 @@
         </p:nvSpPr>
         <p:spPr>
           <a:xfrm>
-            <a:off x="8958532" y="4550711"/>
-            <a:ext cx="377492" cy="110352"/>
+            <a:off x="8959940" y="4550711"/>
+            <a:ext cx="376084" cy="110352"/>
           </a:xfrm>
           <a:prstGeom prst="rect">
             <a:avLst/>
@@ -29124,7 +29124,7 @@
                 <a:ea typeface="Inter" pitchFamily="34" charset="-122"/>
                 <a:cs typeface="Inter" pitchFamily="34" charset="-120"/>
               </a:rPr>
-              <a:t>GMC PRESCOTT</a:t>
+              <a:t>LR LV</a:t>
             </a:r>
             <a:endParaRPr lang="en-US" sz="1200" dirty="0"/>
           </a:p>
@@ -29138,8 +29138,8 @@
         </p:nvSpPr>
         <p:spPr>
           <a:xfrm>
-            <a:off x="8881593" y="4790606"/>
-            <a:ext cx="454431" cy="110352"/>
+            <a:off x="8872187" y="4790606"/>
+            <a:ext cx="463837" cy="110352"/>
           </a:xfrm>
           <a:prstGeom prst="rect">
             <a:avLst/>
@@ -29183,7 +29183,7 @@
                 <a:ea typeface="Inter" pitchFamily="34" charset="-122"/>
                 <a:cs typeface="Inter" pitchFamily="34" charset="-120"/>
               </a:rPr>
-              <a:t>−3.6 pts</a:t>
+              <a:t>−3.7 pts</a:t>
             </a:r>
             <a:endParaRPr lang="en-US" sz="1200" dirty="0"/>
           </a:p>
@@ -29261,7 +29261,7 @@
                 <a:ea typeface="Inter" pitchFamily="34" charset="-122"/>
                 <a:cs typeface="Inter" pitchFamily="34" charset="-120"/>
               </a:rPr>
-              <a:t>LR LV</a:t>
+              <a:t>GMC PRESCOTT</a:t>
             </a:r>
             <a:endParaRPr lang="en-US" sz="1200" dirty="0"/>
           </a:p>
@@ -29275,8 +29275,8 @@
         </p:nvSpPr>
         <p:spPr>
           <a:xfrm>
-            <a:off x="8875241" y="5030502"/>
-            <a:ext cx="460783" cy="110352"/>
+            <a:off x="8872187" y="5030502"/>
+            <a:ext cx="463837" cy="110352"/>
           </a:xfrm>
           <a:prstGeom prst="rect">
             <a:avLst/>
@@ -29412,8 +29412,8 @@
         </p:nvSpPr>
         <p:spPr>
           <a:xfrm>
-            <a:off x="8760254" y="5270397"/>
-            <a:ext cx="575770" cy="110352"/>
+            <a:off x="8759362" y="5270397"/>
+            <a:ext cx="576662" cy="110352"/>
           </a:xfrm>
           <a:prstGeom prst="rect">
             <a:avLst/>
@@ -29549,8 +29549,8 @@
         </p:nvSpPr>
         <p:spPr>
           <a:xfrm>
-            <a:off x="8731990" y="5510293"/>
-            <a:ext cx="604034" cy="110352"/>
+            <a:off x="8734290" y="5510293"/>
+            <a:ext cx="601734" cy="110352"/>
           </a:xfrm>
           <a:prstGeom prst="rect">
             <a:avLst/>
@@ -30500,7 +30500,27 @@
       </p:sp>
       <p:sp>
         <p:nvSpPr>
-          <p:cNvPr id="21" name="Text 19"/>
+          <p:cNvPr id="21" name="Shape 19"/>
+          <p:cNvSpPr/>
+          <p:nvPr/>
+        </p:nvSpPr>
+        <p:spPr>
+          <a:xfrm>
+            <a:off x="4084320" y="4625035"/>
+            <a:ext cx="64008" cy="755294"/>
+          </a:xfrm>
+          <a:prstGeom prst="rect">
+            <a:avLst/>
+          </a:prstGeom>
+          <a:solidFill>
+            <a:srgbClr val="12A566"/>
+          </a:solidFill>
+          <a:ln/>
+        </p:spPr>
+      </p:sp>
+      <p:sp>
+        <p:nvSpPr>
+          <p:cNvPr id="22" name="Text 20"/>
           <p:cNvSpPr txBox="1"/>
           <p:nvPr/>
         </p:nvSpPr>
@@ -30539,7 +30559,7 @@
       </p:sp>
       <p:sp>
         <p:nvSpPr>
-          <p:cNvPr id="22" name="Text 20"/>
+          <p:cNvPr id="23" name="Text 21"/>
           <p:cNvSpPr txBox="1"/>
           <p:nvPr/>
         </p:nvSpPr>
@@ -30573,7 +30593,7 @@
                 <a:ea typeface="Inter" pitchFamily="34" charset="-122"/>
                 <a:cs typeface="Inter" pitchFamily="34" charset="-120"/>
               </a:rPr>
-              <a:t>VW Henderson</a:t>
+              <a:t>Toyota Henderson</a:t>
             </a:r>
             <a:endParaRPr lang="en-US" sz="1400" dirty="0"/>
           </a:p>
@@ -30593,7 +30613,7 @@
                 <a:ea typeface="Inter" pitchFamily="34" charset="-122"/>
                 <a:cs typeface="Inter" pitchFamily="34" charset="-120"/>
               </a:rPr>
-              <a:t>23.5%  →  </a:t>
+              <a:t>41.8%  →  </a:t>
             </a:r>
             <a:pPr indent="0" marL="0">
               <a:spcAft>
@@ -30610,7 +30630,7 @@
                 <a:ea typeface="Inter" pitchFamily="34" charset="-122"/>
                 <a:cs typeface="Inter" pitchFamily="34" charset="-120"/>
               </a:rPr>
-              <a:t>26.8%</a:t>
+              <a:t>45.1%</a:t>
             </a:r>
             <a:endParaRPr lang="en-US" sz="1400" dirty="0"/>
           </a:p>
@@ -30618,7 +30638,7 @@
       </p:sp>
       <p:sp>
         <p:nvSpPr>
-          <p:cNvPr id="23" name="Text 21"/>
+          <p:cNvPr id="24" name="Text 22"/>
           <p:cNvSpPr txBox="1"/>
           <p:nvPr/>
         </p:nvSpPr>
@@ -30657,7 +30677,7 @@
       </p:sp>
       <p:sp>
         <p:nvSpPr>
-          <p:cNvPr id="24" name="Shape 22"/>
+          <p:cNvPr id="25" name="Shape 23"/>
           <p:cNvSpPr/>
           <p:nvPr/>
         </p:nvSpPr>
@@ -30677,7 +30697,7 @@
       </p:sp>
       <p:sp>
         <p:nvSpPr>
-          <p:cNvPr id="25" name="Text 23"/>
+          <p:cNvPr id="26" name="Text 24"/>
           <p:cNvSpPr txBox="1"/>
           <p:nvPr/>
         </p:nvSpPr>
@@ -30716,7 +30736,7 @@
       </p:sp>
       <p:sp>
         <p:nvSpPr>
-          <p:cNvPr id="26" name="Text 24"/>
+          <p:cNvPr id="27" name="Text 25"/>
           <p:cNvSpPr txBox="1"/>
           <p:nvPr/>
         </p:nvSpPr>
@@ -30750,7 +30770,7 @@
                 <a:ea typeface="Inter" pitchFamily="34" charset="-122"/>
                 <a:cs typeface="Inter" pitchFamily="34" charset="-120"/>
               </a:rPr>
-              <a:t>Toyota Henderson</a:t>
+              <a:t>VW Henderson</a:t>
             </a:r>
             <a:endParaRPr lang="en-US" sz="1400" dirty="0"/>
           </a:p>
@@ -30770,7 +30790,7 @@
                 <a:ea typeface="Inter" pitchFamily="34" charset="-122"/>
                 <a:cs typeface="Inter" pitchFamily="34" charset="-120"/>
               </a:rPr>
-              <a:t>41.8%  →  </a:t>
+              <a:t>23.5%  →  </a:t>
             </a:r>
             <a:pPr indent="0" marL="0">
               <a:spcAft>
@@ -30787,7 +30807,7 @@
                 <a:ea typeface="Inter" pitchFamily="34" charset="-122"/>
                 <a:cs typeface="Inter" pitchFamily="34" charset="-120"/>
               </a:rPr>
-              <a:t>45.1%</a:t>
+              <a:t>26.8%</a:t>
             </a:r>
             <a:endParaRPr lang="en-US" sz="1400" dirty="0"/>
           </a:p>
@@ -30795,7 +30815,7 @@
       </p:sp>
       <p:sp>
         <p:nvSpPr>
-          <p:cNvPr id="27" name="Text 25"/>
+          <p:cNvPr id="28" name="Text 26"/>
           <p:cNvSpPr txBox="1"/>
           <p:nvPr/>
         </p:nvSpPr>
@@ -30834,7 +30854,7 @@
       </p:sp>
       <p:sp>
         <p:nvSpPr>
-          <p:cNvPr id="28" name="Shape 26"/>
+          <p:cNvPr id="29" name="Shape 27"/>
           <p:cNvSpPr/>
           <p:nvPr/>
         </p:nvSpPr>
@@ -30854,7 +30874,7 @@
       </p:sp>
       <p:sp>
         <p:nvSpPr>
-          <p:cNvPr id="29" name="Text 27"/>
+          <p:cNvPr id="30" name="Text 28"/>
           <p:cNvSpPr txBox="1"/>
           <p:nvPr/>
         </p:nvSpPr>
@@ -30893,7 +30913,7 @@
       </p:sp>
       <p:sp>
         <p:nvSpPr>
-          <p:cNvPr id="30" name="Text 28"/>
+          <p:cNvPr id="31" name="Text 29"/>
           <p:cNvSpPr txBox="1"/>
           <p:nvPr/>
         </p:nvSpPr>
@@ -30932,7 +30952,7 @@
       </p:sp>
       <p:sp>
         <p:nvSpPr>
-          <p:cNvPr id="31" name="Shape 29"/>
+          <p:cNvPr id="32" name="Shape 30"/>
           <p:cNvSpPr/>
           <p:nvPr/>
         </p:nvSpPr>
@@ -30952,7 +30972,7 @@
       </p:sp>
       <p:sp>
         <p:nvSpPr>
-          <p:cNvPr id="32" name="Text 30"/>
+          <p:cNvPr id="33" name="Text 31"/>
           <p:cNvSpPr txBox="1"/>
           <p:nvPr/>
         </p:nvSpPr>
@@ -30991,7 +31011,7 @@
       </p:sp>
       <p:sp>
         <p:nvSpPr>
-          <p:cNvPr id="33" name="Text 31"/>
+          <p:cNvPr id="34" name="Text 32"/>
           <p:cNvSpPr txBox="1"/>
           <p:nvPr/>
         </p:nvSpPr>
@@ -31070,7 +31090,7 @@
       </p:sp>
       <p:sp>
         <p:nvSpPr>
-          <p:cNvPr id="34" name="Text 32"/>
+          <p:cNvPr id="35" name="Text 33"/>
           <p:cNvSpPr txBox="1"/>
           <p:nvPr/>
         </p:nvSpPr>
@@ -31109,7 +31129,7 @@
       </p:sp>
       <p:sp>
         <p:nvSpPr>
-          <p:cNvPr id="35" name="Text 33"/>
+          <p:cNvPr id="36" name="Text 34"/>
           <p:cNvSpPr txBox="1"/>
           <p:nvPr/>
         </p:nvSpPr>
@@ -31148,7 +31168,7 @@
       </p:sp>
       <p:sp>
         <p:nvSpPr>
-          <p:cNvPr id="36" name="Text 34"/>
+          <p:cNvPr id="37" name="Text 35"/>
           <p:cNvSpPr txBox="1"/>
           <p:nvPr/>
         </p:nvSpPr>
@@ -31227,7 +31247,7 @@
       </p:sp>
       <p:sp>
         <p:nvSpPr>
-          <p:cNvPr id="37" name="Text 35"/>
+          <p:cNvPr id="38" name="Text 36"/>
           <p:cNvSpPr txBox="1"/>
           <p:nvPr/>
         </p:nvSpPr>
@@ -31266,7 +31286,7 @@
       </p:sp>
       <p:sp>
         <p:nvSpPr>
-          <p:cNvPr id="38" name="Shape 36"/>
+          <p:cNvPr id="39" name="Shape 37"/>
           <p:cNvSpPr/>
           <p:nvPr/>
         </p:nvSpPr>
@@ -31286,7 +31306,7 @@
       </p:sp>
       <p:sp>
         <p:nvSpPr>
-          <p:cNvPr id="39" name="Text 37"/>
+          <p:cNvPr id="40" name="Text 38"/>
           <p:cNvSpPr txBox="1"/>
           <p:nvPr/>
         </p:nvSpPr>
@@ -31325,7 +31345,7 @@
       </p:sp>
       <p:sp>
         <p:nvSpPr>
-          <p:cNvPr id="40" name="Text 38"/>
+          <p:cNvPr id="41" name="Text 39"/>
           <p:cNvSpPr txBox="1"/>
           <p:nvPr/>
         </p:nvSpPr>
@@ -31359,7 +31379,7 @@
                 <a:ea typeface="Inter" pitchFamily="34" charset="-122"/>
                 <a:cs typeface="Inter" pitchFamily="34" charset="-120"/>
               </a:rPr>
-              <a:t>LR LV</a:t>
+              <a:t>GMC Prescott</a:t>
             </a:r>
             <a:endParaRPr lang="en-US" sz="1400" dirty="0"/>
           </a:p>
@@ -31379,7 +31399,7 @@
                 <a:ea typeface="Inter" pitchFamily="34" charset="-122"/>
                 <a:cs typeface="Inter" pitchFamily="34" charset="-120"/>
               </a:rPr>
-              <a:t>28.9%  →  </a:t>
+              <a:t>35.0%  →  </a:t>
             </a:r>
             <a:pPr indent="0" marL="0">
               <a:spcAft>
@@ -31396,7 +31416,7 @@
                 <a:ea typeface="Inter" pitchFamily="34" charset="-122"/>
                 <a:cs typeface="Inter" pitchFamily="34" charset="-120"/>
               </a:rPr>
-              <a:t>25.2%</a:t>
+              <a:t>31.3%</a:t>
             </a:r>
             <a:endParaRPr lang="en-US" sz="1400" dirty="0"/>
           </a:p>
@@ -31404,7 +31424,7 @@
       </p:sp>
       <p:sp>
         <p:nvSpPr>
-          <p:cNvPr id="41" name="Text 39"/>
+          <p:cNvPr id="42" name="Text 40"/>
           <p:cNvSpPr txBox="1"/>
           <p:nvPr/>
         </p:nvSpPr>
@@ -31443,7 +31463,7 @@
       </p:sp>
       <p:sp>
         <p:nvSpPr>
-          <p:cNvPr id="42" name="Text 40"/>
+          <p:cNvPr id="43" name="Text 41"/>
           <p:cNvSpPr txBox="1"/>
           <p:nvPr/>
         </p:nvSpPr>
@@ -31482,7 +31502,7 @@
       </p:sp>
       <p:sp>
         <p:nvSpPr>
-          <p:cNvPr id="43" name="Text 41"/>
+          <p:cNvPr id="44" name="Text 42"/>
           <p:cNvSpPr txBox="1"/>
           <p:nvPr/>
         </p:nvSpPr>
@@ -31516,7 +31536,7 @@
                 <a:ea typeface="Inter" pitchFamily="34" charset="-122"/>
                 <a:cs typeface="Inter" pitchFamily="34" charset="-120"/>
               </a:rPr>
-              <a:t>GMC Prescott</a:t>
+              <a:t>LR LV</a:t>
             </a:r>
             <a:endParaRPr lang="en-US" sz="1400" dirty="0"/>
           </a:p>
@@ -31536,7 +31556,7 @@
                 <a:ea typeface="Inter" pitchFamily="34" charset="-122"/>
                 <a:cs typeface="Inter" pitchFamily="34" charset="-120"/>
               </a:rPr>
-              <a:t>35.0%  →  </a:t>
+              <a:t>28.9%  →  </a:t>
             </a:r>
             <a:pPr indent="0" marL="0">
               <a:spcAft>
@@ -31553,7 +31573,7 @@
                 <a:ea typeface="Inter" pitchFamily="34" charset="-122"/>
                 <a:cs typeface="Inter" pitchFamily="34" charset="-120"/>
               </a:rPr>
-              <a:t>31.3%</a:t>
+              <a:t>25.2%</a:t>
             </a:r>
             <a:endParaRPr lang="en-US" sz="1400" dirty="0"/>
           </a:p>
@@ -31561,7 +31581,7 @@
       </p:sp>
       <p:sp>
         <p:nvSpPr>
-          <p:cNvPr id="44" name="Text 42"/>
+          <p:cNvPr id="45" name="Text 43"/>
           <p:cNvSpPr txBox="1"/>
           <p:nvPr/>
         </p:nvSpPr>
@@ -31592,7 +31612,7 @@
                 <a:ea typeface="Inter" pitchFamily="34" charset="-122"/>
                 <a:cs typeface="Inter" pitchFamily="34" charset="-120"/>
               </a:rPr>
-              <a:t>−3.6 pts</a:t>
+              <a:t>−3.7 pts</a:t>
             </a:r>
             <a:endParaRPr lang="en-US" sz="1600" dirty="0"/>
           </a:p>
@@ -31600,7 +31620,7 @@
       </p:sp>
       <p:sp>
         <p:nvSpPr>
-          <p:cNvPr id="45" name="Shape 43"/>
+          <p:cNvPr id="46" name="Shape 44"/>
           <p:cNvSpPr/>
           <p:nvPr/>
         </p:nvSpPr>
@@ -31620,7 +31640,7 @@
       </p:sp>
       <p:sp>
         <p:nvSpPr>
-          <p:cNvPr id="46" name="Text 44"/>
+          <p:cNvPr id="47" name="Text 45"/>
           <p:cNvSpPr txBox="1"/>
           <p:nvPr/>
         </p:nvSpPr>
@@ -31659,7 +31679,7 @@
       </p:sp>
       <p:sp>
         <p:nvSpPr>
-          <p:cNvPr id="47" name="Text 45"/>
+          <p:cNvPr id="48" name="Text 46"/>
           <p:cNvSpPr txBox="1"/>
           <p:nvPr/>
         </p:nvSpPr>
@@ -31738,7 +31758,7 @@
       </p:sp>
       <p:sp>
         <p:nvSpPr>
-          <p:cNvPr id="48" name="Text 46"/>
+          <p:cNvPr id="49" name="Text 47"/>
           <p:cNvSpPr txBox="1"/>
           <p:nvPr/>
         </p:nvSpPr>
@@ -31777,7 +31797,7 @@
       </p:sp>
       <p:sp>
         <p:nvSpPr>
-          <p:cNvPr id="49" name="Shape 47"/>
+          <p:cNvPr id="50" name="Shape 48"/>
           <p:cNvSpPr/>
           <p:nvPr/>
         </p:nvSpPr>
@@ -31797,7 +31817,7 @@
       </p:sp>
       <p:sp>
         <p:nvSpPr>
-          <p:cNvPr id="50" name="Text 48"/>
+          <p:cNvPr id="51" name="Text 49"/>
           <p:cNvSpPr txBox="1"/>
           <p:nvPr/>
         </p:nvSpPr>
@@ -31836,7 +31856,7 @@
       </p:sp>
       <p:sp>
         <p:nvSpPr>
-          <p:cNvPr id="51" name="Text 49"/>
+          <p:cNvPr id="52" name="Text 50"/>
           <p:cNvSpPr txBox="1"/>
           <p:nvPr/>
         </p:nvSpPr>
@@ -31875,7 +31895,7 @@
       </p:sp>
       <p:sp>
         <p:nvSpPr>
-          <p:cNvPr id="52" name="Shape 50"/>
+          <p:cNvPr id="53" name="Shape 51"/>
           <p:cNvSpPr/>
           <p:nvPr/>
         </p:nvSpPr>
@@ -31895,7 +31915,7 @@
       </p:sp>
       <p:sp>
         <p:nvSpPr>
-          <p:cNvPr id="53" name="Text 51"/>
+          <p:cNvPr id="54" name="Text 52"/>
           <p:cNvSpPr txBox="1"/>
           <p:nvPr/>
         </p:nvSpPr>
@@ -31934,7 +31954,7 @@
       </p:sp>
       <p:sp>
         <p:nvSpPr>
-          <p:cNvPr id="54" name="Text 52"/>
+          <p:cNvPr id="55" name="Text 53"/>
           <p:cNvSpPr txBox="1"/>
           <p:nvPr/>
         </p:nvSpPr>
@@ -32013,7 +32033,7 @@
       </p:sp>
       <p:sp>
         <p:nvSpPr>
-          <p:cNvPr id="55" name="Text 53"/>
+          <p:cNvPr id="56" name="Text 54"/>
           <p:cNvSpPr txBox="1"/>
           <p:nvPr/>
         </p:nvSpPr>
@@ -32044,7 +32064,7 @@
                 <a:ea typeface="Inter" pitchFamily="34" charset="-122"/>
                 <a:cs typeface="Inter" pitchFamily="34" charset="-120"/>
               </a:rPr>
-              <a:t>+11.9 pts</a:t>
+              <a:t>+12.0 pts</a:t>
             </a:r>
             <a:endParaRPr lang="en-US" sz="1600" dirty="0"/>
           </a:p>
@@ -32052,7 +32072,7 @@
       </p:sp>
       <p:sp>
         <p:nvSpPr>
-          <p:cNvPr id="56" name="Text 54"/>
+          <p:cNvPr id="57" name="Text 55"/>
           <p:cNvSpPr txBox="1"/>
           <p:nvPr/>
         </p:nvSpPr>
@@ -32091,7 +32111,7 @@
       </p:sp>
       <p:sp>
         <p:nvSpPr>
-          <p:cNvPr id="57" name="Text 55"/>
+          <p:cNvPr id="58" name="Text 56"/>
           <p:cNvSpPr txBox="1"/>
           <p:nvPr/>
         </p:nvSpPr>
@@ -32170,7 +32190,7 @@
       </p:sp>
       <p:sp>
         <p:nvSpPr>
-          <p:cNvPr id="58" name="Text 56"/>
+          <p:cNvPr id="59" name="Text 57"/>
           <p:cNvSpPr txBox="1"/>
           <p:nvPr/>
         </p:nvSpPr>
@@ -32209,7 +32229,7 @@
       </p:sp>
       <p:sp>
         <p:nvSpPr>
-          <p:cNvPr id="59" name="Shape 57"/>
+          <p:cNvPr id="60" name="Shape 58"/>
           <p:cNvSpPr/>
           <p:nvPr/>
         </p:nvSpPr>
@@ -32229,7 +32249,7 @@
       </p:sp>
       <p:sp>
         <p:nvSpPr>
-          <p:cNvPr id="60" name="Text 58"/>
+          <p:cNvPr id="61" name="Text 59"/>
           <p:cNvSpPr txBox="1"/>
           <p:nvPr/>
         </p:nvSpPr>
@@ -32268,7 +32288,7 @@
       </p:sp>
       <p:sp>
         <p:nvSpPr>
-          <p:cNvPr id="61" name="Text 59"/>
+          <p:cNvPr id="62" name="Text 60"/>
           <p:cNvSpPr txBox="1"/>
           <p:nvPr/>
         </p:nvSpPr>
@@ -32347,7 +32367,7 @@
       </p:sp>
       <p:sp>
         <p:nvSpPr>
-          <p:cNvPr id="62" name="Text 60"/>
+          <p:cNvPr id="63" name="Text 61"/>
           <p:cNvSpPr txBox="1"/>
           <p:nvPr/>
         </p:nvSpPr>
@@ -32378,7 +32398,7 @@
                 <a:ea typeface="Inter" pitchFamily="34" charset="-122"/>
                 <a:cs typeface="Inter" pitchFamily="34" charset="-120"/>
               </a:rPr>
-              <a:t>+4.2 pts</a:t>
+              <a:t>+4.1 pts</a:t>
             </a:r>
             <a:endParaRPr lang="en-US" sz="1600" dirty="0"/>
           </a:p>
@@ -32386,7 +32406,7 @@
       </p:sp>
       <p:sp>
         <p:nvSpPr>
-          <p:cNvPr id="63" name="Shape 61"/>
+          <p:cNvPr id="64" name="Shape 62"/>
           <p:cNvSpPr/>
           <p:nvPr/>
         </p:nvSpPr>
@@ -32406,7 +32426,7 @@
       </p:sp>
       <p:sp>
         <p:nvSpPr>
-          <p:cNvPr id="64" name="Text 62"/>
+          <p:cNvPr id="65" name="Text 63"/>
           <p:cNvSpPr txBox="1"/>
           <p:nvPr/>
         </p:nvSpPr>
@@ -32445,7 +32465,7 @@
       </p:sp>
       <p:sp>
         <p:nvSpPr>
-          <p:cNvPr id="65" name="Text 63"/>
+          <p:cNvPr id="66" name="Text 64"/>
           <p:cNvSpPr txBox="1"/>
           <p:nvPr/>
         </p:nvSpPr>
@@ -32524,7 +32544,7 @@
       </p:sp>
       <p:sp>
         <p:nvSpPr>
-          <p:cNvPr id="66" name="Text 64"/>
+          <p:cNvPr id="67" name="Text 65"/>
           <p:cNvSpPr txBox="1"/>
           <p:nvPr/>
         </p:nvSpPr>
@@ -32563,7 +32583,7 @@
       </p:sp>
       <p:sp>
         <p:nvSpPr>
-          <p:cNvPr id="67" name="Shape 65"/>
+          <p:cNvPr id="68" name="Shape 66"/>
           <p:cNvSpPr/>
           <p:nvPr/>
         </p:nvSpPr>
@@ -32583,7 +32603,27 @@
       </p:sp>
       <p:sp>
         <p:nvSpPr>
-          <p:cNvPr id="68" name="Text 66"/>
+          <p:cNvPr id="69" name="Shape 67"/>
+          <p:cNvSpPr/>
+          <p:nvPr/>
+        </p:nvSpPr>
+        <p:spPr>
+          <a:xfrm>
+            <a:off x="11466576" y="5453482"/>
+            <a:ext cx="64008" cy="755294"/>
+          </a:xfrm>
+          <a:prstGeom prst="rect">
+            <a:avLst/>
+          </a:prstGeom>
+          <a:solidFill>
+            <a:srgbClr val="12A566"/>
+          </a:solidFill>
+          <a:ln/>
+        </p:spPr>
+      </p:sp>
+      <p:sp>
+        <p:nvSpPr>
+          <p:cNvPr id="70" name="Text 68"/>
           <p:cNvSpPr txBox="1"/>
           <p:nvPr/>
         </p:nvSpPr>
@@ -32622,7 +32662,7 @@
       </p:sp>
       <p:sp>
         <p:nvSpPr>
-          <p:cNvPr id="69" name="Text 67"/>
+          <p:cNvPr id="71" name="Text 69"/>
           <p:cNvSpPr txBox="1"/>
           <p:nvPr/>
         </p:nvSpPr>
@@ -32656,7 +32696,7 @@
                 <a:ea typeface="Inter" pitchFamily="34" charset="-122"/>
                 <a:cs typeface="Inter" pitchFamily="34" charset="-120"/>
               </a:rPr>
-              <a:t>Mazda</a:t>
+              <a:t>Toyota Henderson</a:t>
             </a:r>
             <a:endParaRPr lang="en-US" sz="1400" dirty="0"/>
           </a:p>
@@ -32676,7 +32716,7 @@
                 <a:ea typeface="Inter" pitchFamily="34" charset="-122"/>
                 <a:cs typeface="Inter" pitchFamily="34" charset="-120"/>
               </a:rPr>
-              <a:t>35.2%  →  </a:t>
+              <a:t>42.0%  →  </a:t>
             </a:r>
             <a:pPr indent="0" marL="0">
               <a:spcAft>
@@ -32693,7 +32733,7 @@
                 <a:ea typeface="Inter" pitchFamily="34" charset="-122"/>
                 <a:cs typeface="Inter" pitchFamily="34" charset="-120"/>
               </a:rPr>
-              <a:t>37.9%</a:t>
+              <a:t>44.7%</a:t>
             </a:r>
             <a:endParaRPr lang="en-US" sz="1400" dirty="0"/>
           </a:p>
@@ -32701,7 +32741,7 @@
       </p:sp>
       <p:sp>
         <p:nvSpPr>
-          <p:cNvPr id="70" name="Text 68"/>
+          <p:cNvPr id="72" name="Text 70"/>
           <p:cNvSpPr txBox="1"/>
           <p:nvPr/>
         </p:nvSpPr>

--- a/day2-deck/decks/Internal Gross Profit - Review.pptx
+++ b/day2-deck/decks/Internal Gross Profit - Review.pptx
@@ -4511,7 +4511,7 @@
           <a:p>
             <a:r>
               <a:rPr lang="en-US" dirty="0"/>
-              <a:t>Takeaway with the store call-outs (off the slide): Ask Acura, Honda Spokane and LR Reno what changed. Ask Nissan, LR LV and Mazda what got in the way. Ask LR Henderson, Kia St George and Hyundai St George what they started this year.Source: Qlik - Closed Repair Orders. Internal pay type, Jan-Sep by close month. Same-store, INEOS excluded (opened 2026). GMC Prescott body shop labor types excluded. Internal labor gross / internal labor sale. A higher internal margin adds service gross but is a cost to used cars. Top and bottom five stores by change in Internal Labor Gross Profit %, Jan-Sep 2026 vs 2025. Moving now: Jul-Sep 2026 vs Jan-Mar 2026, each store against itself; the group moved +0.5 pts on the same basis, so part of every store's change is seasonal. Green bar at the right of a row: the store is on both the top five vs last year and the top five moving now.Conversation starter: each top store says one thing they started doing; each bottom store says what got in the way and what they would try. The room trades ideas. Moving now: ask the top three what they started this year.</a:t>
+              <a:t>Takeaway with the store call-outs (off the slide): Ask Acura, Honda Spokane and LR Reno what changed. Ask Nissan, LR LV and Mazda what got in the way. Ask LR Henderson, Kia St George and Hyundai St George what they started this year.Source: Qlik - Closed Repair Orders. Internal pay type, Jan-Sep by close month. Same-store, INEOS excluded (opened 2026). GMC Prescott body shop labor types excluded. Internal labor gross / internal labor sale. A higher internal margin adds service gross but is a cost to used cars. Top and bottom five stores by change in Internal Labor Gross Profit %, Jan-Sep 2026 vs 2025. Moving now: Jul-Sep 2026 vs Jan-Mar 2026, each store against itself; the group moved +0.5 pts on the same basis, so part of every store's change is seasonal. Green bar at the right of a row: the store is on both the top five vs last year and the top five moving now. Blue bar: a turnaround, on the bottom five vs last year and the top five moving now.Conversation starter: each top store says one thing they started doing; each bottom store says what got in the way and what they would try. The room trades ideas. Moving now: ask the top three what they started this year.</a:t>
             </a:r>
             <a:endParaRPr lang="en-US" dirty="0"/>
           </a:p>
@@ -4863,7 +4863,7 @@
           <a:p>
             <a:r>
               <a:rPr lang="en-US" dirty="0"/>
-              <a:t>Takeaway with the store call-outs (off the slide): Ask Acura, Hyundai Prescott and Honda Flagstaff what changed. Ask VW St George, Kia LV and GMC Prescott what got in the way. Ask LR Reno, CDJR Post Falls and LR Henderson what they started this year.Source: Qlik - Closed Repair Orders. Internal pay type, Jan-Sep by close month. Same-store, INEOS excluded (opened 2026). GMC Prescott body shop labor types excluded. Internal parts gross / internal parts sale on repair orders. A higher internal margin adds parts gross but is a cost to used cars. Top and bottom five stores by change in Internal Parts Gross Profit %, Jan-Sep 2026 vs 2025. Moving now: Jul-Sep 2026 vs Jan-Mar 2026, each store against itself; the group moved +0.5 pts on the same basis, so part of every store's change is seasonal. Green bar at the right of a row: the store is on both the top five vs last year and the top five moving now.Conversation starter: each top store says one thing they started doing; each bottom store says what got in the way and what they would try. The room trades ideas. Moving now: ask the top three what they started this year.</a:t>
+              <a:t>Takeaway with the store call-outs (off the slide): Ask Acura, Hyundai Prescott and Honda Flagstaff what changed. Ask VW St George, Kia LV and GMC Prescott what got in the way. Ask LR Reno, CDJR Post Falls and LR Henderson what they started this year.Source: Qlik - Closed Repair Orders. Internal pay type, Jan-Sep by close month. Same-store, INEOS excluded (opened 2026). GMC Prescott body shop labor types excluded. Internal parts gross / internal parts sale on repair orders. A higher internal margin adds parts gross but is a cost to used cars. Top and bottom five stores by change in Internal Parts Gross Profit %, Jan-Sep 2026 vs 2025. Moving now: Jul-Sep 2026 vs Jan-Mar 2026, each store against itself; the group moved +0.5 pts on the same basis, so part of every store's change is seasonal. Green bar at the right of a row: the store is on both the top five vs last year and the top five moving now. Blue bar: a turnaround, on the bottom five vs last year and the top five moving now.Conversation starter: each top store says one thing they started doing; each bottom store says what got in the way and what they would try. The room trades ideas. Moving now: ask the top three what they started this year.</a:t>
             </a:r>
             <a:endParaRPr lang="en-US" dirty="0"/>
           </a:p>
